--- a/Review2_ByteBrigades_LoanDefault.pptx
+++ b/Review2_ByteBrigades_LoanDefault.pptx
@@ -511,7 +511,7 @@
           <a:lstStyle/>
           <a:p>
             <a:r>
-              <a:t>Good morning faculty. Today we present Review 2 of our project: Loan Default Prediction and Risk Profiling System. In Review 1 we completed the Star Schema Data Warehouse and OLAP operations. In Review 2 we cover the core data mining deliverables: Classification, Clustering, Association Rule Mining, and Default Prediction.</a:t>
+              <a:t>Good morning faculty. We are team Byte Brigades presenting Review 2 for CSI3010 Data Warehousing &amp; Data Mining. Our team consists of Mahaprabhu K (24MID0109) and Pavithran O (24MID0144). Today we present the complete data mining results: Classification, Clustering, Association Rules, and Continuous Prediction.</a:t>
             </a:r>
           </a:p>
         </p:txBody>
@@ -581,7 +581,7 @@
           <a:lstStyle/>
           <a:p>
             <a:r>
-              <a:t>In summary, all four required components of Review 2 are completely built, benchmarked, and verified. For Review 3, we will demonstrate the fully integrated interactive web dashboard and real-time loan underwriting simulator. Thank you faculty, we are now ready for your questions.</a:t>
+              <a:t>In summary, all four required components of Review 2 are fully completed and verified. In Review 3 we will demonstrate the live interactive dashboard and real-time simulator. Thank you faculty, we are ready for your questions.</a:t>
             </a:r>
           </a:p>
         </p:txBody>
@@ -651,7 +651,7 @@
           <a:lstStyle/>
           <a:p>
             <a:r>
-              <a:t>In credit risk, class distribution is naturally skewed. Here only 11.7% of loans default. If a model blindly predicts 0 for all loans, it gets 88.3% accuracy yet is completely useless. Therefore, our model benchmarking strictly prioritizes Recall, F1-Score, and ROC-AUC.</a:t>
+              <a:t>Here is the dataset profile. With 50,000 records, defaults represent only 11.7%. A naive model predicting zero defaults achieves 88% accuracy while failing completely. Hence our evaluation strictly prioritizes Recall, F1-Score, and ROC-AUC.</a:t>
             </a:r>
           </a:p>
         </p:txBody>
@@ -721,7 +721,7 @@
           <a:lstStyle/>
           <a:p>
             <a:r>
-              <a:t>Here is our comparative benchmark table evaluated on the 10,000 holdout test set. While Logistic Regression had high recall, its precision was only 57%, rejecting too many good customers. Gradient Boosting achieved 97.11% precision with 83.25% recall, giving the top F1-Score of 0.8965 and an exceptional ROC-AUC of 0.9973.</a:t>
+              <a:t>Here is the training code and test set benchmark. Logistic regression provides high recall but generates too many false alarms (57% precision). Gradient Boosting achieved 97.11% precision and 83.25% recall, with a champion F1-score of 0.8965 and 0.9973 ROC-AUC.</a:t>
             </a:r>
           </a:p>
         </p:txBody>
@@ -791,7 +791,7 @@
           <a:lstStyle/>
           <a:p>
             <a:r>
-              <a:t>On the left, the confusion matrices demonstrate how Gradient Boosting dramatically reduces False Positives compared to baseline models. On the right, the ROC curves illustrate that Gradient Boosting pushes closest to the top-left corner, achieving an Area Under Curve of 0.9973.</a:t>
+              <a:t>The pictorial diagnostics show our four models. The confusion matrix heatmaps show Gradient Boosting maintains minimal false positives. The ROC curves confirm near-optimal probability separation across all decision thresholds.</a:t>
             </a:r>
           </a:p>
         </p:txBody>
@@ -861,7 +861,7 @@
           <a:lstStyle/>
           <a:p>
             <a:r>
-              <a:t>For unsupervised segmentation, we used K-Means on normalized financial features. Evaluating K from 2 to 6, both the Elbow curve inertia drop and Silhouette scores indicate K=3 is the optimal inflection point, creating three commercially practical risk tiers.</a:t>
+              <a:t>Here is our clustering implementation. We standardized 5 core financial features and ran K-Means across K=2 to 6. The Elbow plot exhibits an inflection point at K=3, creating three distinct risk archetypes.</a:t>
             </a:r>
           </a:p>
         </p:txBody>
@@ -931,7 +931,7 @@
           <a:lstStyle/>
           <a:p>
             <a:r>
-              <a:t>Here are the mined borrower profiles. Cluster 2 represents our Prime borrowers with average credit of 741.8 and a low 3.93% default rate. Cluster 0 captures High-Risk borrowers who have brief employment history (27 months), exhibiting a 20.36% default rate. The 2D PCA projection clearly shows the geometric separation among these three segments.</a:t>
+              <a:t>Here are the mined borrower profiles alongside the 2D PCA projection. Cluster 2 represents Prime borrowers with a default rate of only 3.93%. Cluster 0 isolates vulnerable borrowers where default reaches 20.36%.</a:t>
             </a:r>
           </a:p>
         </p:txBody>
@@ -1001,7 +1001,7 @@
           <a:lstStyle/>
           <a:p>
             <a:r>
-              <a:t>To apply the Apriori algorithm, continuous numerical features were discretized into quantiles and credit bureau bands. We evaluated rules based on Support, Confidence, and Lift. Lift is particularly crucial because it measures the multiplicative increase in default risk over baseline.</a:t>
+              <a:t>To apply the Apriori algorithm, continuous numerical features were converted to categorical bins. We set a minimum support of 3% and confidence of 30%, filtering specifically for rules leading to Default=Yes. Lift indicates the multiplicative default risk increase above baseline.</a:t>
             </a:r>
           </a:p>
         </p:txBody>
@@ -1071,7 +1071,7 @@
           <a:lstStyle/>
           <a:p>
             <a:r>
-              <a:t>Here are our top-ranked association rules. Rule 1 shows that an applicant with Low Income, Poor Credit, and a Large Loan Amount has a 66.93% default confidence, which is 5.69 times higher than random chance. Rule 3 highlights that the lack of a co-signer combined with high DTI increases default probability to over 54%.</a:t>
+              <a:t>Here is the pictorial representation of our mined association rules. Rule 1 exhibits a Lift of 5.69x with 66.93% confidence when low income, poor credit, and large loan amount co-occur. Rule 3 shows that lacking a co-signer under high DTI drives default risk over 54%.</a:t>
             </a:r>
           </a:p>
         </p:txBody>
@@ -1141,7 +1141,7 @@
           <a:lstStyle/>
           <a:p>
             <a:r>
-              <a:t>Unlike binary classification, modern fintech uses continuous probability scoring. Our engine achieves a Brier score of 0.0168, proving high probability reliability. We map probabilities into 4 risk tiers and dynamically generate explainable risk factors.</a:t>
+              <a:t>Here is our prediction engine implementation. We transform borrower payloads and compute continuous probabilities P(Default=1). Our Brier score of 0.0168 confirms the probabilities are highly calibrated, enabling a clear 4-tier risk policy.</a:t>
             </a:r>
           </a:p>
         </p:txBody>
@@ -4206,8 +4206,8 @@
         </p:nvSpPr>
         <p:spPr>
           <a:xfrm>
-            <a:off x="914400" y="1645920"/>
-            <a:ext cx="10362895" cy="4114800"/>
+            <a:off x="914400" y="1097280"/>
+            <a:ext cx="10362895" cy="2377440"/>
           </a:xfrm>
           <a:prstGeom prst="rect">
             <a:avLst/>
@@ -4222,8 +4222,122 @@
           <a:p>
             <a:pPr>
               <a:spcAft>
+                <a:spcPts val="1000"/>
+              </a:spcAft>
+              <a:defRPr sz="1100" b="1">
+                <a:solidFill>
+                  <a:srgbClr val="10B981"/>
+                </a:solidFill>
+              </a:defRPr>
+            </a:pPr>
+            <a:r>
+              <a:t>COURSE: DATA WAREHOUSING AND DATA MINING  |  COURSE CODE: CSI3010</a:t>
+            </a:r>
+          </a:p>
+          <a:p>
+            <a:pPr>
+              <a:spcAft>
                 <a:spcPts val="1200"/>
               </a:spcAft>
+              <a:defRPr sz="3400" b="1">
+                <a:solidFill>
+                  <a:srgbClr val="FFFFFF"/>
+                </a:solidFill>
+              </a:defRPr>
+            </a:pPr>
+            <a:r>
+              <a:t>Loan Default Risk Prediction &amp;</a:t>
+            </a:r>
+            <a:br/>
+            <a:r>
+              <a:t>Borrower Profiling System</a:t>
+            </a:r>
+          </a:p>
+          <a:p>
+            <a:pPr>
+              <a:defRPr sz="1300">
+                <a:solidFill>
+                  <a:srgbClr val="94A3B8"/>
+                </a:solidFill>
+              </a:defRPr>
+            </a:pPr>
+            <a:r>
+              <a:t>Academic Review - 2: Classification  •  Clustering  •  Association Rules  •  Prediction Engine</a:t>
+            </a:r>
+          </a:p>
+        </p:txBody>
+      </p:sp>
+      <p:sp>
+        <p:nvSpPr>
+          <p:cNvPr id="4" name="Rounded Rectangle 3"/>
+          <p:cNvSpPr/>
+          <p:nvPr/>
+        </p:nvSpPr>
+        <p:spPr>
+          <a:xfrm>
+            <a:off x="914400" y="3931920"/>
+            <a:ext cx="4937760" cy="2194560"/>
+          </a:xfrm>
+          <a:prstGeom prst="roundRect">
+            <a:avLst/>
+          </a:prstGeom>
+          <a:solidFill>
+            <a:srgbClr val="1E293B"/>
+          </a:solidFill>
+          <a:ln w="12700">
+            <a:solidFill>
+              <a:srgbClr val="334155"/>
+            </a:solidFill>
+          </a:ln>
+        </p:spPr>
+        <p:style>
+          <a:lnRef idx="1">
+            <a:schemeClr val="accent1"/>
+          </a:lnRef>
+          <a:fillRef idx="3">
+            <a:schemeClr val="accent1"/>
+          </a:fillRef>
+          <a:effectRef idx="2">
+            <a:schemeClr val="accent1"/>
+          </a:effectRef>
+          <a:fontRef idx="minor">
+            <a:schemeClr val="lt1"/>
+          </a:fontRef>
+        </p:style>
+        <p:txBody>
+          <a:bodyPr rtlCol="0" anchor="ctr"/>
+          <a:lstStyle/>
+          <a:p>
+            <a:pPr algn="ctr"/>
+          </a:p>
+        </p:txBody>
+      </p:sp>
+      <p:sp>
+        <p:nvSpPr>
+          <p:cNvPr id="5" name="TextBox 4"/>
+          <p:cNvSpPr txBox="1"/>
+          <p:nvPr/>
+        </p:nvSpPr>
+        <p:spPr>
+          <a:xfrm>
+            <a:off x="1097280" y="4069080"/>
+            <a:ext cx="4572000" cy="1920240"/>
+          </a:xfrm>
+          <a:prstGeom prst="rect">
+            <a:avLst/>
+          </a:prstGeom>
+          <a:noFill/>
+        </p:spPr>
+        <p:txBody>
+          <a:bodyPr wrap="square">
+            <a:spAutoFit/>
+          </a:bodyPr>
+          <a:lstStyle/>
+          <a:p>
+            <a:pPr>
+              <a:spcAft>
+                <a:spcPts val="800"/>
+              </a:spcAft>
               <a:defRPr sz="1200" b="1">
                 <a:solidFill>
                   <a:srgbClr val="10B981"/>
@@ -4231,53 +4345,180 @@
               </a:defRPr>
             </a:pPr>
             <a:r>
-              <a:t>DATA WAREHOUSING &amp; DATA MINING  |  ACADEMIC REVIEW 2</a:t>
+              <a:t>TEAM: BYTE BRIGADES</a:t>
             </a:r>
           </a:p>
           <a:p>
             <a:pPr>
               <a:spcAft>
-                <a:spcPts val="1600"/>
+                <a:spcPts val="400"/>
               </a:spcAft>
-              <a:defRPr sz="3600" b="1">
+              <a:defRPr sz="1300" b="1">
                 <a:solidFill>
                   <a:srgbClr val="FFFFFF"/>
                 </a:solidFill>
               </a:defRPr>
             </a:pPr>
             <a:r>
-              <a:t>Loan Default Risk Prediction &amp;</a:t>
-            </a:r>
-            <a:br/>
-            <a:r>
-              <a:t>Borrower Profiling System</a:t>
+              <a:t>• Mahaprabhu K  (24MID0109)</a:t>
             </a:r>
           </a:p>
           <a:p>
             <a:pPr>
               <a:spcAft>
-                <a:spcPts val="3200"/>
+                <a:spcPts val="400"/>
               </a:spcAft>
-              <a:defRPr sz="1400">
-                <a:solidFill>
-                  <a:srgbClr val="94A3B8"/>
-                </a:solidFill>
-              </a:defRPr>
-            </a:pPr>
-            <a:r>
-              <a:t>Deliverables: Supervised Classification  •  K-Means Clustering  •  Apriori Association Rules  •  Prediction Engine</a:t>
-            </a:r>
-          </a:p>
-          <a:p>
-            <a:pPr>
+              <a:defRPr sz="1300" b="1">
+                <a:solidFill>
+                  <a:srgbClr val="FFFFFF"/>
+                </a:solidFill>
+              </a:defRPr>
+            </a:pPr>
+            <a:r>
+              <a:t>• Pavithran O  (24MID0144)</a:t>
+            </a:r>
+          </a:p>
+        </p:txBody>
+      </p:sp>
+      <p:sp>
+        <p:nvSpPr>
+          <p:cNvPr id="6" name="Rounded Rectangle 5"/>
+          <p:cNvSpPr/>
+          <p:nvPr/>
+        </p:nvSpPr>
+        <p:spPr>
+          <a:xfrm>
+            <a:off x="6217920" y="3931920"/>
+            <a:ext cx="5029200" cy="2194560"/>
+          </a:xfrm>
+          <a:prstGeom prst="roundRect">
+            <a:avLst/>
+          </a:prstGeom>
+          <a:solidFill>
+            <a:srgbClr val="1E293B"/>
+          </a:solidFill>
+          <a:ln w="12700">
+            <a:solidFill>
+              <a:srgbClr val="334155"/>
+            </a:solidFill>
+          </a:ln>
+        </p:spPr>
+        <p:style>
+          <a:lnRef idx="1">
+            <a:schemeClr val="accent1"/>
+          </a:lnRef>
+          <a:fillRef idx="3">
+            <a:schemeClr val="accent1"/>
+          </a:fillRef>
+          <a:effectRef idx="2">
+            <a:schemeClr val="accent1"/>
+          </a:effectRef>
+          <a:fontRef idx="minor">
+            <a:schemeClr val="lt1"/>
+          </a:fontRef>
+        </p:style>
+        <p:txBody>
+          <a:bodyPr rtlCol="0" anchor="ctr"/>
+          <a:lstStyle/>
+          <a:p>
+            <a:pPr algn="ctr"/>
+          </a:p>
+        </p:txBody>
+      </p:sp>
+      <p:sp>
+        <p:nvSpPr>
+          <p:cNvPr id="7" name="TextBox 6"/>
+          <p:cNvSpPr txBox="1"/>
+          <p:nvPr/>
+        </p:nvSpPr>
+        <p:spPr>
+          <a:xfrm>
+            <a:off x="6400800" y="4069080"/>
+            <a:ext cx="4663440" cy="1920240"/>
+          </a:xfrm>
+          <a:prstGeom prst="rect">
+            <a:avLst/>
+          </a:prstGeom>
+          <a:noFill/>
+        </p:spPr>
+        <p:txBody>
+          <a:bodyPr wrap="square">
+            <a:spAutoFit/>
+          </a:bodyPr>
+          <a:lstStyle/>
+          <a:p>
+            <a:pPr>
+              <a:spcAft>
+                <a:spcPts val="800"/>
+              </a:spcAft>
               <a:defRPr sz="1200" b="1">
                 <a:solidFill>
-                  <a:srgbClr val="FFFFFF"/>
-                </a:solidFill>
-              </a:defRPr>
-            </a:pPr>
-            <a:r>
-              <a:t>Team: Byte Brigades  |  Dataset: 50,000 Records, 18 Features  |  Target: Default (Binary 0/1)</a:t>
+                  <a:srgbClr val="10B981"/>
+                </a:solidFill>
+              </a:defRPr>
+            </a:pPr>
+            <a:r>
+              <a:t>PROJECT METADATA</a:t>
+            </a:r>
+          </a:p>
+          <a:p>
+            <a:pPr>
+              <a:spcAft>
+                <a:spcPts val="300"/>
+              </a:spcAft>
+              <a:defRPr sz="1100">
+                <a:solidFill>
+                  <a:srgbClr val="E2E8F0"/>
+                </a:solidFill>
+              </a:defRPr>
+            </a:pPr>
+            <a:r>
+              <a:t>• Review Phase: Review - 2 (Data Mining &amp; Predictive Analytics)</a:t>
+            </a:r>
+          </a:p>
+          <a:p>
+            <a:pPr>
+              <a:spcAft>
+                <a:spcPts val="300"/>
+              </a:spcAft>
+              <a:defRPr sz="1100">
+                <a:solidFill>
+                  <a:srgbClr val="E2E8F0"/>
+                </a:solidFill>
+              </a:defRPr>
+            </a:pPr>
+            <a:r>
+              <a:t>• Date of Presentation: 16/10/26</a:t>
+            </a:r>
+          </a:p>
+          <a:p>
+            <a:pPr>
+              <a:spcAft>
+                <a:spcPts val="300"/>
+              </a:spcAft>
+              <a:defRPr sz="1100">
+                <a:solidFill>
+                  <a:srgbClr val="E2E8F0"/>
+                </a:solidFill>
+              </a:defRPr>
+            </a:pPr>
+            <a:r>
+              <a:t>• Dataset Parameters: 50,000 Records, 18 Features</a:t>
+            </a:r>
+          </a:p>
+          <a:p>
+            <a:pPr>
+              <a:spcAft>
+                <a:spcPts val="300"/>
+              </a:spcAft>
+              <a:defRPr sz="1100">
+                <a:solidFill>
+                  <a:srgbClr val="E2E8F0"/>
+                </a:solidFill>
+              </a:defRPr>
+            </a:pPr>
+            <a:r>
+              <a:t>• Target Variable: Default (Binary 0 = No Default, 1 = Default)</a:t>
             </a:r>
           </a:p>
         </p:txBody>
@@ -4359,8 +4600,8 @@
         </p:nvSpPr>
         <p:spPr>
           <a:xfrm>
-            <a:off x="731520" y="274320"/>
-            <a:ext cx="10698480" cy="274320"/>
+            <a:off x="731520" y="256032"/>
+            <a:ext cx="10698480" cy="256032"/>
           </a:xfrm>
           <a:prstGeom prst="rect">
             <a:avLst/>
@@ -4381,7 +4622,7 @@
               </a:defRPr>
             </a:pPr>
             <a:r>
-              <a:t>ACADEMIC REVIEW 2 | DWDM</a:t>
+              <a:t>CSI3010: DATA WAREHOUSING &amp; DATA MINING | REVIEW 2</a:t>
             </a:r>
           </a:p>
         </p:txBody>
@@ -4394,7 +4635,7 @@
         </p:nvSpPr>
         <p:spPr>
           <a:xfrm>
-            <a:off x="731520" y="530352"/>
+            <a:off x="731520" y="502920"/>
             <a:ext cx="10698480" cy="548640"/>
           </a:xfrm>
           <a:prstGeom prst="rect">
@@ -4409,7 +4650,7 @@
           <a:lstStyle/>
           <a:p>
             <a:pPr>
-              <a:defRPr sz="2200" b="1">
+              <a:defRPr sz="2100" b="1">
                 <a:solidFill>
                   <a:srgbClr val="0F172A"/>
                 </a:solidFill>
@@ -4429,8 +4670,8 @@
         </p:nvSpPr>
         <p:spPr>
           <a:xfrm>
-            <a:off x="731520" y="1280160"/>
-            <a:ext cx="5212080" cy="5029200"/>
+            <a:off x="731520" y="1234440"/>
+            <a:ext cx="5212080" cy="5120640"/>
           </a:xfrm>
           <a:prstGeom prst="roundRect">
             <a:avLst/>
@@ -4474,8 +4715,8 @@
         </p:nvSpPr>
         <p:spPr>
           <a:xfrm>
-            <a:off x="914400" y="1463040"/>
-            <a:ext cx="4846320" cy="4572000"/>
+            <a:off x="914400" y="1371600"/>
+            <a:ext cx="4846320" cy="4754880"/>
           </a:xfrm>
           <a:prstGeom prst="rect">
             <a:avLst/>
@@ -4490,91 +4731,91 @@
           <a:p>
             <a:pPr>
               <a:spcAft>
-                <a:spcPts val="1400"/>
-              </a:spcAft>
-              <a:defRPr sz="1600" b="1">
-                <a:solidFill>
-                  <a:srgbClr val="0F172A"/>
-                </a:solidFill>
-              </a:defRPr>
-            </a:pPr>
-            <a:r>
-              <a:t>Review 2 Deliverables Accomplished</a:t>
-            </a:r>
-          </a:p>
-          <a:p>
-            <a:pPr>
-              <a:spcAft>
                 <a:spcPts val="1000"/>
               </a:spcAft>
-              <a:defRPr sz="1100">
+              <a:defRPr sz="1500" b="1">
+                <a:solidFill>
+                  <a:srgbClr val="0F172A"/>
+                </a:solidFill>
+              </a:defRPr>
+            </a:pPr>
+            <a:r>
+              <a:t>Review 2 Deliverables Accomplished</a:t>
+            </a:r>
+          </a:p>
+          <a:p>
+            <a:pPr>
+              <a:spcAft>
+                <a:spcPts val="800"/>
+              </a:spcAft>
+              <a:defRPr sz="1000">
                 <a:solidFill>
                   <a:srgbClr val="334155"/>
                 </a:solidFill>
               </a:defRPr>
             </a:pPr>
             <a:r>
-              <a:t>✓ Classification: Benchmarked 4 models; Gradient Boosting achieved champion status (F1 = 0.8965, ROC-AUC = 0.9973).</a:t>
+              <a:t>✓ Classification: Benchmarked 4 classifiers; Gradient Boosting selected as champion (F1 = 0.8965, ROC-AUC = 0.9973).</a:t>
             </a:r>
           </a:p>
           <a:p>
             <a:pPr>
               <a:spcAft>
-                <a:spcPts val="1000"/>
+                <a:spcPts val="800"/>
               </a:spcAft>
-              <a:defRPr sz="1100">
+              <a:defRPr sz="1000">
                 <a:solidFill>
                   <a:srgbClr val="334155"/>
                 </a:solidFill>
               </a:defRPr>
             </a:pPr>
             <a:r>
-              <a:t>✓ Clustering: K-Means identified 3 borrower profiles (Prime: 3.93% default vs Subprime: 20.36% default).</a:t>
+              <a:t>✓ Clustering: K-Means segmented borrowers into 3 profiles (Prime: 3.93% default vs Subprime: 20.36% default).</a:t>
             </a:r>
           </a:p>
           <a:p>
             <a:pPr>
               <a:spcAft>
-                <a:spcPts val="1000"/>
+                <a:spcPts val="800"/>
               </a:spcAft>
-              <a:defRPr sz="1100">
+              <a:defRPr sz="1000">
                 <a:solidFill>
                   <a:srgbClr val="334155"/>
                 </a:solidFill>
               </a:defRPr>
             </a:pPr>
             <a:r>
-              <a:t>✓ Association Rules: Apriori algorithm extracted high-conviction risk rules with Lift up to 5.69x.</a:t>
+              <a:t>✓ Association Rules: Apriori mined high-conviction risk rules with Lift up to 5.69x over baseline.</a:t>
             </a:r>
           </a:p>
           <a:p>
             <a:pPr>
               <a:spcAft>
-                <a:spcPts val="1000"/>
+                <a:spcPts val="800"/>
               </a:spcAft>
-              <a:defRPr sz="1100">
+              <a:defRPr sz="1000">
                 <a:solidFill>
                   <a:srgbClr val="334155"/>
                 </a:solidFill>
               </a:defRPr>
             </a:pPr>
             <a:r>
-              <a:t>✓ Prediction Engine: Operational continuous risk scorer with 0.0168 Brier score calibration.</a:t>
+              <a:t>✓ Prediction Engine: Operational continuous probability scoring with 0.0168 Brier score calibration.</a:t>
             </a:r>
           </a:p>
           <a:p>
             <a:pPr>
               <a:spcAft>
-                <a:spcPts val="1000"/>
+                <a:spcPts val="800"/>
               </a:spcAft>
-              <a:defRPr sz="1100">
+              <a:defRPr sz="1000">
                 <a:solidFill>
                   <a:srgbClr val="334155"/>
                 </a:solidFill>
               </a:defRPr>
             </a:pPr>
             <a:r>
-              <a:t>✓ Codebase &amp; Git: Fully verified, UTF-8 compliant, and pushed to GitHub main branch.</a:t>
+              <a:t>✓ Git Repository: All code, models, and artifacts version-controlled on GitHub main.</a:t>
             </a:r>
           </a:p>
         </p:txBody>
@@ -4587,8 +4828,8 @@
         </p:nvSpPr>
         <p:spPr>
           <a:xfrm>
-            <a:off x="6217920" y="1280160"/>
-            <a:ext cx="5242255" cy="5029200"/>
+            <a:off x="6217920" y="1234440"/>
+            <a:ext cx="5242255" cy="5120640"/>
           </a:xfrm>
           <a:prstGeom prst="roundRect">
             <a:avLst/>
@@ -4632,8 +4873,8 @@
         </p:nvSpPr>
         <p:spPr>
           <a:xfrm>
-            <a:off x="6400800" y="1463040"/>
-            <a:ext cx="4846320" cy="4572000"/>
+            <a:off x="6400800" y="1371600"/>
+            <a:ext cx="4846320" cy="4754880"/>
           </a:xfrm>
           <a:prstGeom prst="rect">
             <a:avLst/>
@@ -4648,91 +4889,91 @@
           <a:p>
             <a:pPr>
               <a:spcAft>
-                <a:spcPts val="1400"/>
-              </a:spcAft>
-              <a:defRPr sz="1600" b="1">
-                <a:solidFill>
-                  <a:srgbClr val="0F172A"/>
-                </a:solidFill>
-              </a:defRPr>
-            </a:pPr>
-            <a:r>
-              <a:t>Roadmap to Final Review 3</a:t>
-            </a:r>
-          </a:p>
-          <a:p>
-            <a:pPr>
-              <a:spcAft>
                 <a:spcPts val="1000"/>
               </a:spcAft>
-              <a:defRPr sz="1100">
+              <a:defRPr sz="1500" b="1">
+                <a:solidFill>
+                  <a:srgbClr val="0F172A"/>
+                </a:solidFill>
+              </a:defRPr>
+            </a:pPr>
+            <a:r>
+              <a:t>Roadmap to Final Review 3</a:t>
+            </a:r>
+          </a:p>
+          <a:p>
+            <a:pPr>
+              <a:spcAft>
+                <a:spcPts val="800"/>
+              </a:spcAft>
+              <a:defRPr sz="1000">
                 <a:solidFill>
                   <a:srgbClr val="334155"/>
                 </a:solidFill>
               </a:defRPr>
             </a:pPr>
             <a:r>
-              <a:t>➔ Interactive Web Application: Full React 19 + Vite dashboard featuring 7 visual analytical modules.</a:t>
+              <a:t>➔ Interactive Web Application: Full React 19 + Vite dashboard featuring 7 visual analytical tabs.</a:t>
             </a:r>
           </a:p>
           <a:p>
             <a:pPr>
               <a:spcAft>
-                <a:spcPts val="1000"/>
+                <a:spcPts val="800"/>
               </a:spcAft>
-              <a:defRPr sz="1100">
+              <a:defRPr sz="1000">
                 <a:solidFill>
                   <a:srgbClr val="334155"/>
                 </a:solidFill>
               </a:defRPr>
             </a:pPr>
             <a:r>
-              <a:t>➔ Real-Time Loan Simulator: Interactive form for underwriters to test any applicant profile live.</a:t>
+              <a:t>➔ Real-Time Loan Simulator: Live applicant scoring form with dynamic probability and risk factor alerts.</a:t>
             </a:r>
           </a:p>
           <a:p>
             <a:pPr>
               <a:spcAft>
-                <a:spcPts val="1000"/>
+                <a:spcPts val="800"/>
               </a:spcAft>
-              <a:defRPr sz="1100">
+              <a:defRPr sz="1000">
                 <a:solidFill>
                   <a:srgbClr val="334155"/>
                 </a:solidFill>
               </a:defRPr>
             </a:pPr>
             <a:r>
-              <a:t>➔ Streamlit Python Dashboard: Complete secondary dashboard runner with live parameter tuning.</a:t>
+              <a:t>➔ Secondary Python Dashboard: Interactive Streamlit platform for parameter exploration.</a:t>
             </a:r>
           </a:p>
           <a:p>
             <a:pPr>
               <a:spcAft>
-                <a:spcPts val="1000"/>
+                <a:spcPts val="800"/>
               </a:spcAft>
-              <a:defRPr sz="1100">
+              <a:defRPr sz="1000">
                 <a:solidFill>
                   <a:srgbClr val="334155"/>
                 </a:solidFill>
               </a:defRPr>
             </a:pPr>
             <a:r>
-              <a:t>➔ End-to-End Pipeline Demo: Complete walkthrough from Star Schema Data Warehouse to real-time ML risk scoring.</a:t>
+              <a:t>➔ End-to-End Demonstration: Integration from Star Schema Data Warehouse (Review 1) through ML Underwriting (Review 2).</a:t>
             </a:r>
           </a:p>
           <a:p>
             <a:pPr>
               <a:spcAft>
-                <a:spcPts val="1000"/>
+                <a:spcPts val="800"/>
               </a:spcAft>
-              <a:defRPr sz="1100">
+              <a:defRPr sz="1000">
                 <a:solidFill>
                   <a:srgbClr val="334155"/>
                 </a:solidFill>
               </a:defRPr>
             </a:pPr>
             <a:r>
-              <a:t>➔ Production Deployment: Final build passed and ready for institutional hosting.</a:t>
+              <a:t>➔ Institutional Deployment: Production build compiled with zero errors, ready for cloud hosting.</a:t>
             </a:r>
           </a:p>
         </p:txBody>
@@ -4814,8 +5055,8 @@
         </p:nvSpPr>
         <p:spPr>
           <a:xfrm>
-            <a:off x="731520" y="274320"/>
-            <a:ext cx="10698480" cy="274320"/>
+            <a:off x="731520" y="256032"/>
+            <a:ext cx="10698480" cy="256032"/>
           </a:xfrm>
           <a:prstGeom prst="rect">
             <a:avLst/>
@@ -4836,7 +5077,7 @@
               </a:defRPr>
             </a:pPr>
             <a:r>
-              <a:t>ACADEMIC REVIEW 2 | DWDM</a:t>
+              <a:t>CSI3010: DATA WAREHOUSING &amp; DATA MINING | REVIEW 2</a:t>
             </a:r>
           </a:p>
         </p:txBody>
@@ -4849,7 +5090,7 @@
         </p:nvSpPr>
         <p:spPr>
           <a:xfrm>
-            <a:off x="731520" y="530352"/>
+            <a:off x="731520" y="502920"/>
             <a:ext cx="10698480" cy="548640"/>
           </a:xfrm>
           <a:prstGeom prst="rect">
@@ -4864,14 +5105,14 @@
           <a:lstStyle/>
           <a:p>
             <a:pPr>
-              <a:defRPr sz="2200" b="1">
+              <a:defRPr sz="2100" b="1">
                 <a:solidFill>
                   <a:srgbClr val="0F172A"/>
                 </a:solidFill>
               </a:defRPr>
             </a:pPr>
             <a:r>
-              <a:t>Problem Definition &amp; The Class Imbalance Challenge</a:t>
+              <a:t>Dataset Characteristics &amp; Review-2 Pipeline Scope</a:t>
             </a:r>
           </a:p>
         </p:txBody>
@@ -4884,8 +5125,8 @@
         </p:nvSpPr>
         <p:spPr>
           <a:xfrm>
-            <a:off x="731520" y="1280160"/>
-            <a:ext cx="3291840" cy="4937760"/>
+            <a:off x="731520" y="1188720"/>
+            <a:ext cx="2560320" cy="1188720"/>
           </a:xfrm>
           <a:prstGeom prst="roundRect">
             <a:avLst/>
@@ -4895,7 +5136,7 @@
           </a:solidFill>
           <a:ln w="12700">
             <a:solidFill>
-              <a:srgbClr val="E2E8F0"/>
+              <a:srgbClr val="2563EB"/>
             </a:solidFill>
           </a:ln>
         </p:spPr>
@@ -4929,8 +5170,8 @@
         </p:nvSpPr>
         <p:spPr>
           <a:xfrm>
-            <a:off x="914400" y="1463040"/>
-            <a:ext cx="2926080" cy="4572000"/>
+            <a:off x="868680" y="1280160"/>
+            <a:ext cx="2286000" cy="1005840"/>
           </a:xfrm>
           <a:prstGeom prst="rect">
             <a:avLst/>
@@ -4945,91 +5186,32 @@
           <a:p>
             <a:pPr>
               <a:spcAft>
-                <a:spcPts val="1400"/>
+                <a:spcPts val="200"/>
               </a:spcAft>
-              <a:defRPr sz="1600" b="1">
-                <a:solidFill>
-                  <a:srgbClr val="0F172A"/>
-                </a:solidFill>
-              </a:defRPr>
-            </a:pPr>
-            <a:r>
-              <a:t>Dataset &amp; Preprocessing</a:t>
-            </a:r>
-          </a:p>
-          <a:p>
-            <a:pPr>
-              <a:spcAft>
-                <a:spcPts val="1000"/>
-              </a:spcAft>
-              <a:defRPr sz="1200">
+              <a:defRPr sz="1150" b="1">
+                <a:solidFill>
+                  <a:srgbClr val="2563EB"/>
+                </a:solidFill>
+              </a:defRPr>
+            </a:pPr>
+            <a:r>
+              <a:t>1. Classification</a:t>
+            </a:r>
+          </a:p>
+          <a:p>
+            <a:pPr>
+              <a:defRPr sz="950">
                 <a:solidFill>
                   <a:srgbClr val="334155"/>
                 </a:solidFill>
               </a:defRPr>
             </a:pPr>
             <a:r>
-              <a:t>• Total Records: 50,000 loans</a:t>
-            </a:r>
-          </a:p>
-          <a:p>
-            <a:pPr>
-              <a:spcAft>
-                <a:spcPts val="1000"/>
-              </a:spcAft>
-              <a:defRPr sz="1200">
-                <a:solidFill>
-                  <a:srgbClr val="334155"/>
-                </a:solidFill>
-              </a:defRPr>
-            </a:pPr>
-            <a:r>
-              <a:t>• Feature Space: 18 financial &amp; demographic columns</a:t>
-            </a:r>
-          </a:p>
-          <a:p>
-            <a:pPr>
-              <a:spcAft>
-                <a:spcPts val="1000"/>
-              </a:spcAft>
-              <a:defRPr sz="1200">
-                <a:solidFill>
-                  <a:srgbClr val="334155"/>
-                </a:solidFill>
-              </a:defRPr>
-            </a:pPr>
-            <a:r>
-              <a:t>• Train/Test Split: 80% Train (40,000) / 20% Test (10,000)</a:t>
-            </a:r>
-          </a:p>
-          <a:p>
-            <a:pPr>
-              <a:spcAft>
-                <a:spcPts val="1000"/>
-              </a:spcAft>
-              <a:defRPr sz="1200">
-                <a:solidFill>
-                  <a:srgbClr val="334155"/>
-                </a:solidFill>
-              </a:defRPr>
-            </a:pPr>
-            <a:r>
-              <a:t>• Partitioning: Stratified sampling to preserve default ratios</a:t>
-            </a:r>
-          </a:p>
-          <a:p>
-            <a:pPr>
-              <a:spcAft>
-                <a:spcPts val="1000"/>
-              </a:spcAft>
-              <a:defRPr sz="1200">
-                <a:solidFill>
-                  <a:srgbClr val="334155"/>
-                </a:solidFill>
-              </a:defRPr>
-            </a:pPr>
-            <a:r>
-              <a:t>• Data Leakage: Zero leakage. StandardScaler &amp; OneHotEncoder fit strictly on training set.</a:t>
+              <a:t>Default vs. No-Default</a:t>
+            </a:r>
+            <a:br/>
+            <a:r>
+              <a:t>4 ML algorithms benchmarked</a:t>
             </a:r>
           </a:p>
         </p:txBody>
@@ -5042,8 +5224,8 @@
         </p:nvSpPr>
         <p:spPr>
           <a:xfrm>
-            <a:off x="4297680" y="1280160"/>
-            <a:ext cx="3474720" cy="4937760"/>
+            <a:off x="3456432" y="1188720"/>
+            <a:ext cx="2560320" cy="1188720"/>
           </a:xfrm>
           <a:prstGeom prst="roundRect">
             <a:avLst/>
@@ -5053,7 +5235,7 @@
           </a:solidFill>
           <a:ln w="12700">
             <a:solidFill>
-              <a:srgbClr val="E2E8F0"/>
+              <a:srgbClr val="10B981"/>
             </a:solidFill>
           </a:ln>
         </p:spPr>
@@ -5087,8 +5269,8 @@
         </p:nvSpPr>
         <p:spPr>
           <a:xfrm>
-            <a:off x="4480560" y="1463040"/>
-            <a:ext cx="3108960" cy="4572000"/>
+            <a:off x="3593592" y="1280160"/>
+            <a:ext cx="2286000" cy="1005840"/>
           </a:xfrm>
           <a:prstGeom prst="rect">
             <a:avLst/>
@@ -5103,76 +5285,32 @@
           <a:p>
             <a:pPr>
               <a:spcAft>
-                <a:spcPts val="1400"/>
+                <a:spcPts val="200"/>
               </a:spcAft>
-              <a:defRPr sz="1600" b="1">
-                <a:solidFill>
-                  <a:srgbClr val="0F172A"/>
-                </a:solidFill>
-              </a:defRPr>
-            </a:pPr>
-            <a:r>
-              <a:t>The Class Imbalance Problem</a:t>
-            </a:r>
-          </a:p>
-          <a:p>
-            <a:pPr>
-              <a:spcAft>
-                <a:spcPts val="1000"/>
-              </a:spcAft>
-              <a:defRPr sz="1200">
+              <a:defRPr sz="1150" b="1">
+                <a:solidFill>
+                  <a:srgbClr val="10B981"/>
+                </a:solidFill>
+              </a:defRPr>
+            </a:pPr>
+            <a:r>
+              <a:t>2. Clustering</a:t>
+            </a:r>
+          </a:p>
+          <a:p>
+            <a:pPr>
+              <a:defRPr sz="950">
                 <a:solidFill>
                   <a:srgbClr val="334155"/>
                 </a:solidFill>
               </a:defRPr>
             </a:pPr>
             <a:r>
-              <a:t>• Non-Defaulters (Class 0): 88.3% (~44,150)</a:t>
-            </a:r>
-          </a:p>
-          <a:p>
-            <a:pPr>
-              <a:spcAft>
-                <a:spcPts val="1000"/>
-              </a:spcAft>
-              <a:defRPr sz="1200">
-                <a:solidFill>
-                  <a:srgbClr val="334155"/>
-                </a:solidFill>
-              </a:defRPr>
-            </a:pPr>
-            <a:r>
-              <a:t>• Defaulters (Class 1): 11.7% (~5,850)</a:t>
-            </a:r>
-          </a:p>
-          <a:p>
-            <a:pPr>
-              <a:spcAft>
-                <a:spcPts val="1000"/>
-              </a:spcAft>
-              <a:defRPr sz="1200">
-                <a:solidFill>
-                  <a:srgbClr val="334155"/>
-                </a:solidFill>
-              </a:defRPr>
-            </a:pPr>
-            <a:r>
-              <a:t>• The 'Accuracy Trap': A naive baseline predicting 'No Default' for all applicants achieves 88.3% accuracy while catching 0% of actual defaulters.</a:t>
-            </a:r>
-          </a:p>
-          <a:p>
-            <a:pPr>
-              <a:spcAft>
-                <a:spcPts val="1000"/>
-              </a:spcAft>
-              <a:defRPr sz="1200">
-                <a:solidFill>
-                  <a:srgbClr val="334155"/>
-                </a:solidFill>
-              </a:defRPr>
-            </a:pPr>
-            <a:r>
-              <a:t>• Financial Impact: Defaulters cause severe institutional lending losses; false negatives are far more costly than false positives.</a:t>
+              <a:t>Borrower Segmentation</a:t>
+            </a:r>
+            <a:br/>
+            <a:r>
+              <a:t>Optimal K=3 via Elbow/Silhouette</a:t>
             </a:r>
           </a:p>
         </p:txBody>
@@ -5185,8 +5323,8 @@
         </p:nvSpPr>
         <p:spPr>
           <a:xfrm>
-            <a:off x="8046720" y="1280160"/>
-            <a:ext cx="3383280" cy="4937760"/>
+            <a:off x="6181344" y="1188720"/>
+            <a:ext cx="2560320" cy="1188720"/>
           </a:xfrm>
           <a:prstGeom prst="roundRect">
             <a:avLst/>
@@ -5196,7 +5334,7 @@
           </a:solidFill>
           <a:ln w="12700">
             <a:solidFill>
-              <a:srgbClr val="E2E8F0"/>
+              <a:srgbClr val="D97706"/>
             </a:solidFill>
           </a:ln>
         </p:spPr>
@@ -5230,8 +5368,8 @@
         </p:nvSpPr>
         <p:spPr>
           <a:xfrm>
-            <a:off x="8229600" y="1463040"/>
-            <a:ext cx="3017520" cy="4572000"/>
+            <a:off x="6318504" y="1280160"/>
+            <a:ext cx="2286000" cy="1005840"/>
           </a:xfrm>
           <a:prstGeom prst="rect">
             <a:avLst/>
@@ -5246,76 +5384,432 @@
           <a:p>
             <a:pPr>
               <a:spcAft>
-                <a:spcPts val="1400"/>
+                <a:spcPts val="200"/>
               </a:spcAft>
-              <a:defRPr sz="1600" b="1">
+              <a:defRPr sz="1150" b="1">
+                <a:solidFill>
+                  <a:srgbClr val="D97706"/>
+                </a:solidFill>
+              </a:defRPr>
+            </a:pPr>
+            <a:r>
+              <a:t>3. Association Rules</a:t>
+            </a:r>
+          </a:p>
+          <a:p>
+            <a:pPr>
+              <a:defRPr sz="950">
+                <a:solidFill>
+                  <a:srgbClr val="334155"/>
+                </a:solidFill>
+              </a:defRPr>
+            </a:pPr>
+            <a:r>
+              <a:t>Apriori Co-occurrence</a:t>
+            </a:r>
+            <a:br/>
+            <a:r>
+              <a:t>Multi-feature risk rules (Lift &gt; 5x)</a:t>
+            </a:r>
+          </a:p>
+        </p:txBody>
+      </p:sp>
+      <p:sp>
+        <p:nvSpPr>
+          <p:cNvPr id="11" name="Rounded Rectangle 10"/>
+          <p:cNvSpPr/>
+          <p:nvPr/>
+        </p:nvSpPr>
+        <p:spPr>
+          <a:xfrm>
+            <a:off x="8906256" y="1188720"/>
+            <a:ext cx="2560320" cy="1188720"/>
+          </a:xfrm>
+          <a:prstGeom prst="roundRect">
+            <a:avLst/>
+          </a:prstGeom>
+          <a:solidFill>
+            <a:srgbClr val="FFFFFF"/>
+          </a:solidFill>
+          <a:ln w="12700">
+            <a:solidFill>
+              <a:srgbClr val="9333EA"/>
+            </a:solidFill>
+          </a:ln>
+        </p:spPr>
+        <p:style>
+          <a:lnRef idx="1">
+            <a:schemeClr val="accent1"/>
+          </a:lnRef>
+          <a:fillRef idx="3">
+            <a:schemeClr val="accent1"/>
+          </a:fillRef>
+          <a:effectRef idx="2">
+            <a:schemeClr val="accent1"/>
+          </a:effectRef>
+          <a:fontRef idx="minor">
+            <a:schemeClr val="lt1"/>
+          </a:fontRef>
+        </p:style>
+        <p:txBody>
+          <a:bodyPr rtlCol="0" anchor="ctr"/>
+          <a:lstStyle/>
+          <a:p>
+            <a:pPr algn="ctr"/>
+          </a:p>
+        </p:txBody>
+      </p:sp>
+      <p:sp>
+        <p:nvSpPr>
+          <p:cNvPr id="12" name="TextBox 11"/>
+          <p:cNvSpPr txBox="1"/>
+          <p:nvPr/>
+        </p:nvSpPr>
+        <p:spPr>
+          <a:xfrm>
+            <a:off x="9043416" y="1280160"/>
+            <a:ext cx="2286000" cy="1005840"/>
+          </a:xfrm>
+          <a:prstGeom prst="rect">
+            <a:avLst/>
+          </a:prstGeom>
+          <a:noFill/>
+        </p:spPr>
+        <p:txBody>
+          <a:bodyPr wrap="square">
+            <a:spAutoFit/>
+          </a:bodyPr>
+          <a:lstStyle/>
+          <a:p>
+            <a:pPr>
+              <a:spcAft>
+                <a:spcPts val="200"/>
+              </a:spcAft>
+              <a:defRPr sz="1150" b="1">
+                <a:solidFill>
+                  <a:srgbClr val="9333EA"/>
+                </a:solidFill>
+              </a:defRPr>
+            </a:pPr>
+            <a:r>
+              <a:t>4. Prediction Engine</a:t>
+            </a:r>
+          </a:p>
+          <a:p>
+            <a:pPr>
+              <a:defRPr sz="950">
+                <a:solidFill>
+                  <a:srgbClr val="334155"/>
+                </a:solidFill>
+              </a:defRPr>
+            </a:pPr>
+            <a:r>
+              <a:t>Continuous P(Default=1)</a:t>
+            </a:r>
+            <a:br/>
+            <a:r>
+              <a:t>Calibrated scoring &amp; risk tiers</a:t>
+            </a:r>
+          </a:p>
+        </p:txBody>
+      </p:sp>
+      <p:sp>
+        <p:nvSpPr>
+          <p:cNvPr id="13" name="Rounded Rectangle 12"/>
+          <p:cNvSpPr/>
+          <p:nvPr/>
+        </p:nvSpPr>
+        <p:spPr>
+          <a:xfrm>
+            <a:off x="731520" y="2560320"/>
+            <a:ext cx="5212080" cy="3840480"/>
+          </a:xfrm>
+          <a:prstGeom prst="roundRect">
+            <a:avLst/>
+          </a:prstGeom>
+          <a:solidFill>
+            <a:srgbClr val="FFFFFF"/>
+          </a:solidFill>
+          <a:ln w="12700">
+            <a:solidFill>
+              <a:srgbClr val="E2E8F0"/>
+            </a:solidFill>
+          </a:ln>
+        </p:spPr>
+        <p:style>
+          <a:lnRef idx="1">
+            <a:schemeClr val="accent1"/>
+          </a:lnRef>
+          <a:fillRef idx="3">
+            <a:schemeClr val="accent1"/>
+          </a:fillRef>
+          <a:effectRef idx="2">
+            <a:schemeClr val="accent1"/>
+          </a:effectRef>
+          <a:fontRef idx="minor">
+            <a:schemeClr val="lt1"/>
+          </a:fontRef>
+        </p:style>
+        <p:txBody>
+          <a:bodyPr rtlCol="0" anchor="ctr"/>
+          <a:lstStyle/>
+          <a:p>
+            <a:pPr algn="ctr"/>
+          </a:p>
+        </p:txBody>
+      </p:sp>
+      <p:sp>
+        <p:nvSpPr>
+          <p:cNvPr id="14" name="TextBox 13"/>
+          <p:cNvSpPr txBox="1"/>
+          <p:nvPr/>
+        </p:nvSpPr>
+        <p:spPr>
+          <a:xfrm>
+            <a:off x="914400" y="2697480"/>
+            <a:ext cx="4846320" cy="3566160"/>
+          </a:xfrm>
+          <a:prstGeom prst="rect">
+            <a:avLst/>
+          </a:prstGeom>
+          <a:noFill/>
+        </p:spPr>
+        <p:txBody>
+          <a:bodyPr wrap="square">
+            <a:spAutoFit/>
+          </a:bodyPr>
+          <a:lstStyle/>
+          <a:p>
+            <a:pPr>
+              <a:spcAft>
+                <a:spcPts val="800"/>
+              </a:spcAft>
+              <a:defRPr sz="1400" b="1">
                 <a:solidFill>
                   <a:srgbClr val="0F172A"/>
                 </a:solidFill>
               </a:defRPr>
             </a:pPr>
             <a:r>
-              <a:t>Evaluation Priority Metrics</a:t>
+              <a:t>Dataset Profile &amp; Stratification</a:t>
             </a:r>
           </a:p>
           <a:p>
             <a:pPr>
               <a:spcAft>
-                <a:spcPts val="1000"/>
+                <a:spcPts val="600"/>
               </a:spcAft>
-              <a:defRPr sz="1200">
+              <a:defRPr sz="1100">
                 <a:solidFill>
                   <a:srgbClr val="334155"/>
                 </a:solidFill>
               </a:defRPr>
             </a:pPr>
             <a:r>
-              <a:t>• Recall (Sensitivity): Maximizes detection of true defaulters, preventing toxic loan write-offs.</a:t>
+              <a:t>• Total Records: 50,000 credit records</a:t>
             </a:r>
           </a:p>
           <a:p>
             <a:pPr>
               <a:spcAft>
-                <a:spcPts val="1000"/>
+                <a:spcPts val="600"/>
               </a:spcAft>
-              <a:defRPr sz="1200">
+              <a:defRPr sz="1100">
                 <a:solidFill>
                   <a:srgbClr val="334155"/>
                 </a:solidFill>
               </a:defRPr>
             </a:pPr>
             <a:r>
-              <a:t>• Precision: Prevents false rejections of creditworthy borrowers.</a:t>
+              <a:t>• Feature Space: 18 attributes (Income, Credit Score, DTI, Loan Amount, etc.)</a:t>
             </a:r>
           </a:p>
           <a:p>
             <a:pPr>
               <a:spcAft>
-                <a:spcPts val="1000"/>
+                <a:spcPts val="600"/>
               </a:spcAft>
-              <a:defRPr sz="1200">
+              <a:defRPr sz="1100">
                 <a:solidFill>
                   <a:srgbClr val="334155"/>
                 </a:solidFill>
               </a:defRPr>
             </a:pPr>
             <a:r>
-              <a:t>• F1-Score: Harmonic mean balancing precision and recall under imbalance.</a:t>
+              <a:t>• Train / Test Partition: 80% Train (40,000) / 20% Holdout Test (10,000)</a:t>
             </a:r>
           </a:p>
           <a:p>
             <a:pPr>
               <a:spcAft>
-                <a:spcPts val="1000"/>
+                <a:spcPts val="600"/>
               </a:spcAft>
-              <a:defRPr sz="1200">
+              <a:defRPr sz="1100">
                 <a:solidFill>
                   <a:srgbClr val="334155"/>
                 </a:solidFill>
               </a:defRPr>
             </a:pPr>
             <a:r>
-              <a:t>• ROC-AUC: Threshold-independent discriminatory power across all probability cutoffs.</a:t>
+              <a:t>• Stratification: Maintains exact class proportions across splits</a:t>
+            </a:r>
+          </a:p>
+          <a:p>
+            <a:pPr>
+              <a:spcAft>
+                <a:spcPts val="600"/>
+              </a:spcAft>
+              <a:defRPr sz="1100">
+                <a:solidFill>
+                  <a:srgbClr val="334155"/>
+                </a:solidFill>
+              </a:defRPr>
+            </a:pPr>
+            <a:r>
+              <a:t>• Leakage Prevention: StandardScaler &amp; OneHotEncoder fit strictly on training set</a:t>
+            </a:r>
+          </a:p>
+        </p:txBody>
+      </p:sp>
+      <p:sp>
+        <p:nvSpPr>
+          <p:cNvPr id="15" name="Rounded Rectangle 14"/>
+          <p:cNvSpPr/>
+          <p:nvPr/>
+        </p:nvSpPr>
+        <p:spPr>
+          <a:xfrm>
+            <a:off x="6217920" y="2560320"/>
+            <a:ext cx="5242255" cy="3840480"/>
+          </a:xfrm>
+          <a:prstGeom prst="roundRect">
+            <a:avLst/>
+          </a:prstGeom>
+          <a:solidFill>
+            <a:srgbClr val="FEF2F2"/>
+          </a:solidFill>
+          <a:ln w="12700">
+            <a:solidFill>
+              <a:srgbClr val="F43F5E"/>
+            </a:solidFill>
+          </a:ln>
+        </p:spPr>
+        <p:style>
+          <a:lnRef idx="1">
+            <a:schemeClr val="accent1"/>
+          </a:lnRef>
+          <a:fillRef idx="3">
+            <a:schemeClr val="accent1"/>
+          </a:fillRef>
+          <a:effectRef idx="2">
+            <a:schemeClr val="accent1"/>
+          </a:effectRef>
+          <a:fontRef idx="minor">
+            <a:schemeClr val="lt1"/>
+          </a:fontRef>
+        </p:style>
+        <p:txBody>
+          <a:bodyPr rtlCol="0" anchor="ctr"/>
+          <a:lstStyle/>
+          <a:p>
+            <a:pPr algn="ctr"/>
+          </a:p>
+        </p:txBody>
+      </p:sp>
+      <p:sp>
+        <p:nvSpPr>
+          <p:cNvPr id="16" name="TextBox 15"/>
+          <p:cNvSpPr txBox="1"/>
+          <p:nvPr/>
+        </p:nvSpPr>
+        <p:spPr>
+          <a:xfrm>
+            <a:off x="6400800" y="2697480"/>
+            <a:ext cx="4846320" cy="3566160"/>
+          </a:xfrm>
+          <a:prstGeom prst="rect">
+            <a:avLst/>
+          </a:prstGeom>
+          <a:noFill/>
+        </p:spPr>
+        <p:txBody>
+          <a:bodyPr wrap="square">
+            <a:spAutoFit/>
+          </a:bodyPr>
+          <a:lstStyle/>
+          <a:p>
+            <a:pPr>
+              <a:spcAft>
+                <a:spcPts val="800"/>
+              </a:spcAft>
+              <a:defRPr sz="1400" b="1">
+                <a:solidFill>
+                  <a:srgbClr val="BE123C"/>
+                </a:solidFill>
+              </a:defRPr>
+            </a:pPr>
+            <a:r>
+              <a:t>Class Imbalance: The 'Accuracy Trap'</a:t>
+            </a:r>
+          </a:p>
+          <a:p>
+            <a:pPr>
+              <a:spcAft>
+                <a:spcPts val="600"/>
+              </a:spcAft>
+              <a:defRPr sz="1100">
+                <a:solidFill>
+                  <a:srgbClr val="334155"/>
+                </a:solidFill>
+              </a:defRPr>
+            </a:pPr>
+            <a:r>
+              <a:t>• Non-Defaulters (Class 0): 88.3% (~44,150 applicants)</a:t>
+            </a:r>
+          </a:p>
+          <a:p>
+            <a:pPr>
+              <a:spcAft>
+                <a:spcPts val="600"/>
+              </a:spcAft>
+              <a:defRPr sz="1100">
+                <a:solidFill>
+                  <a:srgbClr val="334155"/>
+                </a:solidFill>
+              </a:defRPr>
+            </a:pPr>
+            <a:r>
+              <a:t>• Defaulters (Class 1): 11.7% (~5,850 applicants)</a:t>
+            </a:r>
+          </a:p>
+          <a:p>
+            <a:pPr>
+              <a:spcAft>
+                <a:spcPts val="600"/>
+              </a:spcAft>
+              <a:defRPr sz="1100">
+                <a:solidFill>
+                  <a:srgbClr val="334155"/>
+                </a:solidFill>
+              </a:defRPr>
+            </a:pPr>
+            <a:r>
+              <a:t>• The 'Accuracy Paradox': A naive zero-default prediction yields 88.3% accuracy but detects 0% of risky loans, causing extreme financial write-offs.</a:t>
+            </a:r>
+          </a:p>
+          <a:p>
+            <a:pPr>
+              <a:spcAft>
+                <a:spcPts val="600"/>
+              </a:spcAft>
+              <a:defRPr sz="1100">
+                <a:solidFill>
+                  <a:srgbClr val="334155"/>
+                </a:solidFill>
+              </a:defRPr>
+            </a:pPr>
+            <a:r>
+              <a:t>• Evaluation Focus: Benchmarking prioritizes Recall (detecting defaulters), F1-Score (balanced harmonic mean), and ROC-AUC (threshold-independent).</a:t>
             </a:r>
           </a:p>
         </p:txBody>
@@ -5397,8 +5891,8 @@
         </p:nvSpPr>
         <p:spPr>
           <a:xfrm>
-            <a:off x="731520" y="274320"/>
-            <a:ext cx="10698480" cy="274320"/>
+            <a:off x="731520" y="256032"/>
+            <a:ext cx="10698480" cy="256032"/>
           </a:xfrm>
           <a:prstGeom prst="rect">
             <a:avLst/>
@@ -5419,7 +5913,7 @@
               </a:defRPr>
             </a:pPr>
             <a:r>
-              <a:t>ACADEMIC REVIEW 2 | DWDM</a:t>
+              <a:t>CSI3010: DATA WAREHOUSING &amp; DATA MINING | REVIEW 2</a:t>
             </a:r>
           </a:p>
         </p:txBody>
@@ -5432,7 +5926,7 @@
         </p:nvSpPr>
         <p:spPr>
           <a:xfrm>
-            <a:off x="731520" y="530352"/>
+            <a:off x="731520" y="502920"/>
             <a:ext cx="10698480" cy="548640"/>
           </a:xfrm>
           <a:prstGeom prst="rect">
@@ -5447,14 +5941,14 @@
           <a:lstStyle/>
           <a:p>
             <a:pPr>
-              <a:defRPr sz="2200" b="1">
+              <a:defRPr sz="2100" b="1">
                 <a:solidFill>
                   <a:srgbClr val="0F172A"/>
                 </a:solidFill>
               </a:defRPr>
             </a:pPr>
             <a:r>
-              <a:t>Classification: Multi-Model Benchmark Comparison</a:t>
+              <a:t>Classification: Algorithm Implementation &amp; Benchmark Results</a:t>
             </a:r>
           </a:p>
         </p:txBody>
@@ -5467,18 +5961,18 @@
         </p:nvSpPr>
         <p:spPr>
           <a:xfrm>
-            <a:off x="731520" y="1280160"/>
-            <a:ext cx="10728655" cy="3931920"/>
+            <a:off x="731520" y="1234440"/>
+            <a:ext cx="4389120" cy="5120640"/>
           </a:xfrm>
           <a:prstGeom prst="roundRect">
             <a:avLst/>
           </a:prstGeom>
           <a:solidFill>
-            <a:srgbClr val="FFFFFF"/>
+            <a:srgbClr val="0F172A"/>
           </a:solidFill>
           <a:ln w="12700">
             <a:solidFill>
-              <a:srgbClr val="E2E8F0"/>
+              <a:srgbClr val="334155"/>
             </a:solidFill>
           </a:ln>
         </p:spPr>
@@ -5504,17 +5998,325 @@
           </a:p>
         </p:txBody>
       </p:sp>
+      <p:sp>
+        <p:nvSpPr>
+          <p:cNvPr id="6" name="TextBox 5"/>
+          <p:cNvSpPr txBox="1"/>
+          <p:nvPr/>
+        </p:nvSpPr>
+        <p:spPr>
+          <a:xfrm>
+            <a:off x="914400" y="1344168"/>
+            <a:ext cx="4023360" cy="274320"/>
+          </a:xfrm>
+          <a:prstGeom prst="rect">
+            <a:avLst/>
+          </a:prstGeom>
+          <a:noFill/>
+        </p:spPr>
+        <p:txBody>
+          <a:bodyPr wrap="square" lIns="0" tIns="0" rIns="0" bIns="0">
+            <a:spAutoFit/>
+          </a:bodyPr>
+          <a:lstStyle/>
+          <a:p>
+            <a:pPr>
+              <a:defRPr sz="950" b="1">
+                <a:solidFill>
+                  <a:srgbClr val="10B981"/>
+                </a:solidFill>
+              </a:defRPr>
+            </a:pPr>
+            <a:r>
+              <a:t>⚙  train_classifiers.py</a:t>
+            </a:r>
+          </a:p>
+        </p:txBody>
+      </p:sp>
+      <p:sp>
+        <p:nvSpPr>
+          <p:cNvPr id="7" name="TextBox 6"/>
+          <p:cNvSpPr txBox="1"/>
+          <p:nvPr/>
+        </p:nvSpPr>
+        <p:spPr>
+          <a:xfrm>
+            <a:off x="914400" y="1645920"/>
+            <a:ext cx="4023360" cy="4617720"/>
+          </a:xfrm>
+          <a:prstGeom prst="rect">
+            <a:avLst/>
+          </a:prstGeom>
+          <a:noFill/>
+        </p:spPr>
+        <p:txBody>
+          <a:bodyPr wrap="square" lIns="0" tIns="0" rIns="0" bIns="0">
+            <a:spAutoFit/>
+          </a:bodyPr>
+          <a:lstStyle/>
+          <a:p>
+            <a:pPr>
+              <a:defRPr sz="850">
+                <a:solidFill>
+                  <a:srgbClr val="94A3B8"/>
+                </a:solidFill>
+                <a:latin typeface="Consolas"/>
+              </a:defRPr>
+            </a:pPr>
+            <a:r>
+              <a:t># classification/train_classifiers.py</a:t>
+            </a:r>
+          </a:p>
+          <a:p>
+            <a:pPr>
+              <a:defRPr sz="850">
+                <a:solidFill>
+                  <a:srgbClr val="93C5FD"/>
+                </a:solidFill>
+                <a:latin typeface="Consolas"/>
+              </a:defRPr>
+            </a:pPr>
+            <a:r>
+              <a:t>from sklearn.ensemble import GradientBoostingClassifier</a:t>
+            </a:r>
+          </a:p>
+          <a:p>
+            <a:pPr>
+              <a:defRPr sz="850">
+                <a:solidFill>
+                  <a:srgbClr val="93C5FD"/>
+                </a:solidFill>
+                <a:latin typeface="Consolas"/>
+              </a:defRPr>
+            </a:pPr>
+            <a:r>
+              <a:t>from sklearn.metrics import f1_score, roc_auc_score</a:t>
+            </a:r>
+          </a:p>
+          <a:p>
+            <a:pPr>
+              <a:defRPr sz="850">
+                <a:solidFill>
+                  <a:srgbClr val="F1F5F9"/>
+                </a:solidFill>
+                <a:latin typeface="Consolas"/>
+              </a:defRPr>
+            </a:pPr>
+          </a:p>
+          <a:p>
+            <a:pPr>
+              <a:defRPr sz="850">
+                <a:solidFill>
+                  <a:srgbClr val="F1F5F9"/>
+                </a:solidFill>
+                <a:latin typeface="Consolas"/>
+              </a:defRPr>
+            </a:pPr>
+            <a:r>
+              <a:t>models = {</a:t>
+            </a:r>
+          </a:p>
+          <a:p>
+            <a:pPr>
+              <a:defRPr sz="850">
+                <a:solidFill>
+                  <a:srgbClr val="F1F5F9"/>
+                </a:solidFill>
+                <a:latin typeface="Consolas"/>
+              </a:defRPr>
+            </a:pPr>
+            <a:r>
+              <a:t>  'Logistic Regression': LogisticRegression(class_weight='balanced'),</a:t>
+            </a:r>
+          </a:p>
+          <a:p>
+            <a:pPr>
+              <a:defRPr sz="850">
+                <a:solidFill>
+                  <a:srgbClr val="6EE7B7"/>
+                </a:solidFill>
+                <a:latin typeface="Consolas"/>
+              </a:defRPr>
+            </a:pPr>
+            <a:r>
+              <a:t>  'Decision Tree': DecisionTreeClassifier(max_depth=8),</a:t>
+            </a:r>
+          </a:p>
+          <a:p>
+            <a:pPr>
+              <a:defRPr sz="850">
+                <a:solidFill>
+                  <a:srgbClr val="6EE7B7"/>
+                </a:solidFill>
+                <a:latin typeface="Consolas"/>
+              </a:defRPr>
+            </a:pPr>
+            <a:r>
+              <a:t>  'Random Forest': RandomForestClassifier(n_estimators=100),</a:t>
+            </a:r>
+          </a:p>
+          <a:p>
+            <a:pPr>
+              <a:defRPr sz="850">
+                <a:solidFill>
+                  <a:srgbClr val="6EE7B7"/>
+                </a:solidFill>
+                <a:latin typeface="Consolas"/>
+              </a:defRPr>
+            </a:pPr>
+            <a:r>
+              <a:t>  'Gradient Boosting': GradientBoostingClassifier(max_depth=5, lr=0.1)</a:t>
+            </a:r>
+          </a:p>
+          <a:p>
+            <a:pPr>
+              <a:defRPr sz="850">
+                <a:solidFill>
+                  <a:srgbClr val="F1F5F9"/>
+                </a:solidFill>
+                <a:latin typeface="Consolas"/>
+              </a:defRPr>
+            </a:pPr>
+            <a:r>
+              <a:t>}</a:t>
+            </a:r>
+          </a:p>
+          <a:p>
+            <a:pPr>
+              <a:defRPr sz="850">
+                <a:solidFill>
+                  <a:srgbClr val="93C5FD"/>
+                </a:solidFill>
+                <a:latin typeface="Consolas"/>
+              </a:defRPr>
+            </a:pPr>
+            <a:r>
+              <a:t>for name, model in models.items():</a:t>
+            </a:r>
+          </a:p>
+          <a:p>
+            <a:pPr>
+              <a:defRPr sz="850">
+                <a:solidFill>
+                  <a:srgbClr val="F1F5F9"/>
+                </a:solidFill>
+                <a:latin typeface="Consolas"/>
+              </a:defRPr>
+            </a:pPr>
+            <a:r>
+              <a:t>    model.fit(X_train, y_train)</a:t>
+            </a:r>
+          </a:p>
+          <a:p>
+            <a:pPr>
+              <a:defRPr sz="850">
+                <a:solidFill>
+                  <a:srgbClr val="F1F5F9"/>
+                </a:solidFill>
+                <a:latin typeface="Consolas"/>
+              </a:defRPr>
+            </a:pPr>
+            <a:r>
+              <a:t>    y_prob = model.predict_proba(X_test)[:, 1]</a:t>
+            </a:r>
+          </a:p>
+          <a:p>
+            <a:pPr>
+              <a:defRPr sz="850">
+                <a:solidFill>
+                  <a:srgbClr val="F1F5F9"/>
+                </a:solidFill>
+                <a:latin typeface="Consolas"/>
+              </a:defRPr>
+            </a:pPr>
+            <a:r>
+              <a:t>    f1 = f1_score(y_test, model.predict(X_test))</a:t>
+            </a:r>
+          </a:p>
+          <a:p>
+            <a:pPr>
+              <a:defRPr sz="850">
+                <a:solidFill>
+                  <a:srgbClr val="F1F5F9"/>
+                </a:solidFill>
+                <a:latin typeface="Consolas"/>
+              </a:defRPr>
+            </a:pPr>
+            <a:r>
+              <a:t>    auc = roc_auc_score(y_test, y_prob)</a:t>
+            </a:r>
+          </a:p>
+          <a:p>
+            <a:pPr>
+              <a:defRPr sz="850">
+                <a:solidFill>
+                  <a:srgbClr val="F1F5F9"/>
+                </a:solidFill>
+                <a:latin typeface="Consolas"/>
+              </a:defRPr>
+            </a:pPr>
+            <a:r>
+              <a:t>joblib.dump(best_model, 'best_classifier.joblib')</a:t>
+            </a:r>
+          </a:p>
+        </p:txBody>
+      </p:sp>
+      <p:sp>
+        <p:nvSpPr>
+          <p:cNvPr id="8" name="Rounded Rectangle 7"/>
+          <p:cNvSpPr/>
+          <p:nvPr/>
+        </p:nvSpPr>
+        <p:spPr>
+          <a:xfrm>
+            <a:off x="5303520" y="1234440"/>
+            <a:ext cx="6156655" cy="3931920"/>
+          </a:xfrm>
+          <a:prstGeom prst="roundRect">
+            <a:avLst/>
+          </a:prstGeom>
+          <a:solidFill>
+            <a:srgbClr val="FFFFFF"/>
+          </a:solidFill>
+          <a:ln w="12700">
+            <a:solidFill>
+              <a:srgbClr val="E2E8F0"/>
+            </a:solidFill>
+          </a:ln>
+        </p:spPr>
+        <p:style>
+          <a:lnRef idx="1">
+            <a:schemeClr val="accent1"/>
+          </a:lnRef>
+          <a:fillRef idx="3">
+            <a:schemeClr val="accent1"/>
+          </a:fillRef>
+          <a:effectRef idx="2">
+            <a:schemeClr val="accent1"/>
+          </a:effectRef>
+          <a:fontRef idx="minor">
+            <a:schemeClr val="lt1"/>
+          </a:fontRef>
+        </p:style>
+        <p:txBody>
+          <a:bodyPr rtlCol="0" anchor="ctr"/>
+          <a:lstStyle/>
+          <a:p>
+            <a:pPr algn="ctr"/>
+          </a:p>
+        </p:txBody>
+      </p:sp>
       <p:graphicFrame>
         <p:nvGraphicFramePr>
-          <p:cNvPr id="6" name="Table 5"/>
+          <p:cNvPr id="9" name="Table 8"/>
           <p:cNvGraphicFramePr>
             <a:graphicFrameLocks noGrp="1"/>
           </p:cNvGraphicFramePr>
           <p:nvPr/>
         </p:nvGraphicFramePr>
         <p:xfrm>
-          <a:off x="1005840" y="1554480"/>
-          <a:ext cx="10180015" cy="3291840"/>
+          <a:off x="5440680" y="1371600"/>
+          <a:ext cx="5882335" cy="3566160"/>
         </p:xfrm>
         <a:graphic>
           <a:graphicData uri="http://schemas.openxmlformats.org/drawingml/2006/table">
@@ -5523,29 +6325,29 @@
                 <a:tableStyleId>{5C22544A-7EE6-4342-B048-85BDC9FD1C3A}</a:tableStyleId>
               </a:tblPr>
               <a:tblGrid>
-                <a:gridCol w="1454287"/>
-                <a:gridCol w="1454287"/>
-                <a:gridCol w="1454287"/>
-                <a:gridCol w="1454287"/>
-                <a:gridCol w="1454287"/>
-                <a:gridCol w="1454287"/>
-                <a:gridCol w="1454293"/>
+                <a:gridCol w="840333"/>
+                <a:gridCol w="840333"/>
+                <a:gridCol w="840333"/>
+                <a:gridCol w="840333"/>
+                <a:gridCol w="840333"/>
+                <a:gridCol w="840333"/>
+                <a:gridCol w="840337"/>
               </a:tblGrid>
-              <a:tr h="658368">
+              <a:tr h="713232">
                 <a:tc>
                   <a:txBody>
                     <a:bodyPr/>
                     <a:lstStyle/>
                     <a:p>
                       <a:pPr algn="ctr">
-                        <a:defRPr sz="1200" b="1">
+                        <a:defRPr sz="1050" b="1">
                           <a:solidFill>
                             <a:srgbClr val="FFFFFF"/>
                           </a:solidFill>
                         </a:defRPr>
                       </a:pPr>
                       <a:r>
-                        <a:t>Model Architecture</a:t>
+                        <a:t>Model</a:t>
                       </a:r>
                     </a:p>
                   </a:txBody>
@@ -5561,7 +6363,7 @@
                     <a:lstStyle/>
                     <a:p>
                       <a:pPr algn="ctr">
-                        <a:defRPr sz="1200" b="1">
+                        <a:defRPr sz="1050" b="1">
                           <a:solidFill>
                             <a:srgbClr val="FFFFFF"/>
                           </a:solidFill>
@@ -5584,7 +6386,7 @@
                     <a:lstStyle/>
                     <a:p>
                       <a:pPr algn="ctr">
-                        <a:defRPr sz="1200" b="1">
+                        <a:defRPr sz="1050" b="1">
                           <a:solidFill>
                             <a:srgbClr val="FFFFFF"/>
                           </a:solidFill>
@@ -5607,7 +6409,7 @@
                     <a:lstStyle/>
                     <a:p>
                       <a:pPr algn="ctr">
-                        <a:defRPr sz="1200" b="1">
+                        <a:defRPr sz="1050" b="1">
                           <a:solidFill>
                             <a:srgbClr val="FFFFFF"/>
                           </a:solidFill>
@@ -5630,14 +6432,14 @@
                     <a:lstStyle/>
                     <a:p>
                       <a:pPr algn="ctr">
-                        <a:defRPr sz="1200" b="1">
+                        <a:defRPr sz="1050" b="1">
                           <a:solidFill>
                             <a:srgbClr val="FFFFFF"/>
                           </a:solidFill>
                         </a:defRPr>
                       </a:pPr>
                       <a:r>
-                        <a:t>F1-Score</a:t>
+                        <a:t>F1</a:t>
                       </a:r>
                     </a:p>
                   </a:txBody>
@@ -5653,14 +6455,14 @@
                     <a:lstStyle/>
                     <a:p>
                       <a:pPr algn="ctr">
-                        <a:defRPr sz="1200" b="1">
+                        <a:defRPr sz="1050" b="1">
                           <a:solidFill>
                             <a:srgbClr val="FFFFFF"/>
                           </a:solidFill>
                         </a:defRPr>
                       </a:pPr>
                       <a:r>
-                        <a:t>ROC-AUC</a:t>
+                        <a:t>AUC</a:t>
                       </a:r>
                     </a:p>
                   </a:txBody>
@@ -5676,7 +6478,7 @@
                     <a:lstStyle/>
                     <a:p>
                       <a:pPr algn="ctr">
-                        <a:defRPr sz="1200" b="1">
+                        <a:defRPr sz="1050" b="1">
                           <a:solidFill>
                             <a:srgbClr val="FFFFFF"/>
                           </a:solidFill>
@@ -5694,21 +6496,17 @@
                   </a:tcPr>
                 </a:tc>
               </a:tr>
-              <a:tr h="658368">
+              <a:tr h="713232">
                 <a:tc>
                   <a:txBody>
                     <a:bodyPr/>
                     <a:lstStyle/>
                     <a:p>
                       <a:pPr algn="l">
-                        <a:defRPr sz="1100" b="1">
-                          <a:solidFill>
-                            <a:srgbClr val="334155"/>
-                          </a:solidFill>
-                        </a:defRPr>
+                        <a:defRPr sz="1000" b="1"/>
                       </a:pPr>
                       <a:r>
-                        <a:t>Logistic Regression (Balanced)</a:t>
+                        <a:t>Logistic Regression</a:t>
                       </a:r>
                     </a:p>
                   </a:txBody>
@@ -5724,11 +6522,7 @@
                     <a:lstStyle/>
                     <a:p>
                       <a:pPr algn="ctr">
-                        <a:defRPr sz="1100" b="0">
-                          <a:solidFill>
-                            <a:srgbClr val="334155"/>
-                          </a:solidFill>
-                        </a:defRPr>
+                        <a:defRPr sz="1000" b="0"/>
                       </a:pPr>
                       <a:r>
                         <a:t>91.07%</a:t>
@@ -5747,11 +6541,7 @@
                     <a:lstStyle/>
                     <a:p>
                       <a:pPr algn="ctr">
-                        <a:defRPr sz="1100" b="0">
-                          <a:solidFill>
-                            <a:srgbClr val="334155"/>
-                          </a:solidFill>
-                        </a:defRPr>
+                        <a:defRPr sz="1000" b="0"/>
                       </a:pPr>
                       <a:r>
                         <a:t>57.19%</a:t>
@@ -5770,11 +6560,7 @@
                     <a:lstStyle/>
                     <a:p>
                       <a:pPr algn="ctr">
-                        <a:defRPr sz="1100" b="0">
-                          <a:solidFill>
-                            <a:srgbClr val="334155"/>
-                          </a:solidFill>
-                        </a:defRPr>
+                        <a:defRPr sz="1000" b="0"/>
                       </a:pPr>
                       <a:r>
                         <a:t>94.10%</a:t>
@@ -5793,11 +6579,7 @@
                     <a:lstStyle/>
                     <a:p>
                       <a:pPr algn="ctr">
-                        <a:defRPr sz="1100" b="0">
-                          <a:solidFill>
-                            <a:srgbClr val="334155"/>
-                          </a:solidFill>
-                        </a:defRPr>
+                        <a:defRPr sz="1000" b="0"/>
                       </a:pPr>
                       <a:r>
                         <a:t>0.7115</a:t>
@@ -5816,11 +6598,7 @@
                     <a:lstStyle/>
                     <a:p>
                       <a:pPr algn="ctr">
-                        <a:defRPr sz="1100" b="0">
-                          <a:solidFill>
-                            <a:srgbClr val="334155"/>
-                          </a:solidFill>
-                        </a:defRPr>
+                        <a:defRPr sz="1000" b="0"/>
                       </a:pPr>
                       <a:r>
                         <a:t>0.9816</a:t>
@@ -5839,11 +6617,7 @@
                     <a:lstStyle/>
                     <a:p>
                       <a:pPr algn="ctr">
-                        <a:defRPr sz="1100" b="0">
-                          <a:solidFill>
-                            <a:srgbClr val="334155"/>
-                          </a:solidFill>
-                        </a:defRPr>
+                        <a:defRPr sz="1000" b="0"/>
                       </a:pPr>
                       <a:r>
                         <a:t>0.1885</a:t>
@@ -5857,21 +6631,17 @@
                   </a:tcPr>
                 </a:tc>
               </a:tr>
-              <a:tr h="658368">
+              <a:tr h="713232">
                 <a:tc>
                   <a:txBody>
                     <a:bodyPr/>
                     <a:lstStyle/>
                     <a:p>
                       <a:pPr algn="l">
-                        <a:defRPr sz="1100" b="1">
-                          <a:solidFill>
-                            <a:srgbClr val="334155"/>
-                          </a:solidFill>
-                        </a:defRPr>
+                        <a:defRPr sz="1000" b="1"/>
                       </a:pPr>
                       <a:r>
-                        <a:t>Decision Tree (max_depth=8)</a:t>
+                        <a:t>Decision Tree</a:t>
                       </a:r>
                     </a:p>
                   </a:txBody>
@@ -5887,11 +6657,7 @@
                     <a:lstStyle/>
                     <a:p>
                       <a:pPr algn="ctr">
-                        <a:defRPr sz="1100" b="0">
-                          <a:solidFill>
-                            <a:srgbClr val="334155"/>
-                          </a:solidFill>
-                        </a:defRPr>
+                        <a:defRPr sz="1000" b="0"/>
                       </a:pPr>
                       <a:r>
                         <a:t>89.26%</a:t>
@@ -5910,11 +6676,7 @@
                     <a:lstStyle/>
                     <a:p>
                       <a:pPr algn="ctr">
-                        <a:defRPr sz="1100" b="0">
-                          <a:solidFill>
-                            <a:srgbClr val="334155"/>
-                          </a:solidFill>
-                        </a:defRPr>
+                        <a:defRPr sz="1000" b="0"/>
                       </a:pPr>
                       <a:r>
                         <a:t>52.40%</a:t>
@@ -5933,11 +6695,7 @@
                     <a:lstStyle/>
                     <a:p>
                       <a:pPr algn="ctr">
-                        <a:defRPr sz="1100" b="0">
-                          <a:solidFill>
-                            <a:srgbClr val="334155"/>
-                          </a:solidFill>
-                        </a:defRPr>
+                        <a:defRPr sz="1000" b="0"/>
                       </a:pPr>
                       <a:r>
                         <a:t>89.49%</a:t>
@@ -5956,11 +6714,7 @@
                     <a:lstStyle/>
                     <a:p>
                       <a:pPr algn="ctr">
-                        <a:defRPr sz="1100" b="0">
-                          <a:solidFill>
-                            <a:srgbClr val="334155"/>
-                          </a:solidFill>
-                        </a:defRPr>
+                        <a:defRPr sz="1000" b="0"/>
                       </a:pPr>
                       <a:r>
                         <a:t>0.6610</a:t>
@@ -5979,11 +6733,7 @@
                     <a:lstStyle/>
                     <a:p>
                       <a:pPr algn="ctr">
-                        <a:defRPr sz="1100" b="0">
-                          <a:solidFill>
-                            <a:srgbClr val="334155"/>
-                          </a:solidFill>
-                        </a:defRPr>
+                        <a:defRPr sz="1000" b="0"/>
                       </a:pPr>
                       <a:r>
                         <a:t>0.9342</a:t>
@@ -6002,11 +6752,7 @@
                     <a:lstStyle/>
                     <a:p>
                       <a:pPr algn="ctr">
-                        <a:defRPr sz="1100" b="0">
-                          <a:solidFill>
-                            <a:srgbClr val="334155"/>
-                          </a:solidFill>
-                        </a:defRPr>
+                        <a:defRPr sz="1000" b="0"/>
                       </a:pPr>
                       <a:r>
                         <a:t>0.4943</a:t>
@@ -6020,21 +6766,17 @@
                   </a:tcPr>
                 </a:tc>
               </a:tr>
-              <a:tr h="658368">
+              <a:tr h="713232">
                 <a:tc>
                   <a:txBody>
                     <a:bodyPr/>
                     <a:lstStyle/>
                     <a:p>
                       <a:pPr algn="l">
-                        <a:defRPr sz="1100" b="1">
-                          <a:solidFill>
-                            <a:srgbClr val="334155"/>
-                          </a:solidFill>
-                        </a:defRPr>
+                        <a:defRPr sz="1000" b="1"/>
                       </a:pPr>
                       <a:r>
-                        <a:t>Random Forest (100 Trees)</a:t>
+                        <a:t>Random Forest</a:t>
                       </a:r>
                     </a:p>
                   </a:txBody>
@@ -6050,11 +6792,7 @@
                     <a:lstStyle/>
                     <a:p>
                       <a:pPr algn="ctr">
-                        <a:defRPr sz="1100" b="0">
-                          <a:solidFill>
-                            <a:srgbClr val="334155"/>
-                          </a:solidFill>
-                        </a:defRPr>
+                        <a:defRPr sz="1000" b="0"/>
                       </a:pPr>
                       <a:r>
                         <a:t>95.79%</a:t>
@@ -6073,11 +6811,7 @@
                     <a:lstStyle/>
                     <a:p>
                       <a:pPr algn="ctr">
-                        <a:defRPr sz="1100" b="0">
-                          <a:solidFill>
-                            <a:srgbClr val="334155"/>
-                          </a:solidFill>
-                        </a:defRPr>
+                        <a:defRPr sz="1000" b="0"/>
                       </a:pPr>
                       <a:r>
                         <a:t>76.13%</a:t>
@@ -6096,11 +6830,7 @@
                     <a:lstStyle/>
                     <a:p>
                       <a:pPr algn="ctr">
-                        <a:defRPr sz="1100" b="0">
-                          <a:solidFill>
-                            <a:srgbClr val="334155"/>
-                          </a:solidFill>
-                        </a:defRPr>
+                        <a:defRPr sz="1000" b="0"/>
                       </a:pPr>
                       <a:r>
                         <a:t>93.25%</a:t>
@@ -6119,11 +6849,7 @@
                     <a:lstStyle/>
                     <a:p>
                       <a:pPr algn="ctr">
-                        <a:defRPr sz="1100" b="0">
-                          <a:solidFill>
-                            <a:srgbClr val="334155"/>
-                          </a:solidFill>
-                        </a:defRPr>
+                        <a:defRPr sz="1000" b="0"/>
                       </a:pPr>
                       <a:r>
                         <a:t>0.8383</a:t>
@@ -6142,11 +6868,7 @@
                     <a:lstStyle/>
                     <a:p>
                       <a:pPr algn="ctr">
-                        <a:defRPr sz="1100" b="0">
-                          <a:solidFill>
-                            <a:srgbClr val="334155"/>
-                          </a:solidFill>
-                        </a:defRPr>
+                        <a:defRPr sz="1000" b="0"/>
                       </a:pPr>
                       <a:r>
                         <a:t>0.9910</a:t>
@@ -6165,11 +6887,7 @@
                     <a:lstStyle/>
                     <a:p>
                       <a:pPr algn="ctr">
-                        <a:defRPr sz="1100" b="0">
-                          <a:solidFill>
-                            <a:srgbClr val="334155"/>
-                          </a:solidFill>
-                        </a:defRPr>
+                        <a:defRPr sz="1000" b="0"/>
                       </a:pPr>
                       <a:r>
                         <a:t>0.1832</a:t>
@@ -6183,21 +6901,17 @@
                   </a:tcPr>
                 </a:tc>
               </a:tr>
-              <a:tr h="658368">
+              <a:tr h="713232">
                 <a:tc>
                   <a:txBody>
                     <a:bodyPr/>
                     <a:lstStyle/>
                     <a:p>
                       <a:pPr algn="l">
-                        <a:defRPr sz="1100" b="1">
-                          <a:solidFill>
-                            <a:srgbClr val="334155"/>
-                          </a:solidFill>
-                        </a:defRPr>
+                        <a:defRPr sz="1000" b="1"/>
                       </a:pPr>
                       <a:r>
-                        <a:t>Gradient Boosting (Champion)</a:t>
+                        <a:t>Gradient Boosting</a:t>
                       </a:r>
                     </a:p>
                   </a:txBody>
@@ -6213,7 +6927,7 @@
                     <a:lstStyle/>
                     <a:p>
                       <a:pPr algn="ctr">
-                        <a:defRPr sz="1100" b="1">
+                        <a:defRPr sz="1000" b="1">
                           <a:solidFill>
                             <a:srgbClr val="10B981"/>
                           </a:solidFill>
@@ -6236,7 +6950,7 @@
                     <a:lstStyle/>
                     <a:p>
                       <a:pPr algn="ctr">
-                        <a:defRPr sz="1100" b="1">
+                        <a:defRPr sz="1000" b="1">
                           <a:solidFill>
                             <a:srgbClr val="10B981"/>
                           </a:solidFill>
@@ -6259,11 +6973,7 @@
                     <a:lstStyle/>
                     <a:p>
                       <a:pPr algn="ctr">
-                        <a:defRPr sz="1100" b="1">
-                          <a:solidFill>
-                            <a:srgbClr val="334155"/>
-                          </a:solidFill>
-                        </a:defRPr>
+                        <a:defRPr sz="1000" b="1"/>
                       </a:pPr>
                       <a:r>
                         <a:t>83.25%</a:t>
@@ -6282,7 +6992,7 @@
                     <a:lstStyle/>
                     <a:p>
                       <a:pPr algn="ctr">
-                        <a:defRPr sz="1100" b="1">
+                        <a:defRPr sz="1000" b="1">
                           <a:solidFill>
                             <a:srgbClr val="10B981"/>
                           </a:solidFill>
@@ -6305,7 +7015,7 @@
                     <a:lstStyle/>
                     <a:p>
                       <a:pPr algn="ctr">
-                        <a:defRPr sz="1100" b="1">
+                        <a:defRPr sz="1000" b="1">
                           <a:solidFill>
                             <a:srgbClr val="10B981"/>
                           </a:solidFill>
@@ -6328,11 +7038,7 @@
                     <a:lstStyle/>
                     <a:p>
                       <a:pPr algn="ctr">
-                        <a:defRPr sz="1100" b="1">
-                          <a:solidFill>
-                            <a:srgbClr val="334155"/>
-                          </a:solidFill>
-                        </a:defRPr>
+                        <a:defRPr sz="1000" b="1"/>
                       </a:pPr>
                       <a:r>
                         <a:t>0.0622</a:t>
@@ -6352,14 +7058,14 @@
       </p:graphicFrame>
       <p:sp>
         <p:nvSpPr>
-          <p:cNvPr id="7" name="Rounded Rectangle 6"/>
+          <p:cNvPr id="10" name="Rounded Rectangle 9"/>
           <p:cNvSpPr/>
           <p:nvPr/>
         </p:nvSpPr>
         <p:spPr>
           <a:xfrm>
-            <a:off x="731520" y="5394960"/>
-            <a:ext cx="10728655" cy="1005840"/>
+            <a:off x="5303520" y="5303520"/>
+            <a:ext cx="6156655" cy="1051560"/>
           </a:xfrm>
           <a:prstGeom prst="roundRect">
             <a:avLst/>
@@ -6397,14 +7103,14 @@
       </p:sp>
       <p:sp>
         <p:nvSpPr>
-          <p:cNvPr id="8" name="TextBox 7"/>
+          <p:cNvPr id="11" name="TextBox 10"/>
           <p:cNvSpPr txBox="1"/>
           <p:nvPr/>
         </p:nvSpPr>
         <p:spPr>
           <a:xfrm>
-            <a:off x="914400" y="5440680"/>
-            <a:ext cx="10362895" cy="822960"/>
+            <a:off x="5440680" y="5349240"/>
+            <a:ext cx="5882335" cy="960120"/>
           </a:xfrm>
           <a:prstGeom prst="rect">
             <a:avLst/>
@@ -6418,26 +7124,33 @@
           <a:lstStyle/>
           <a:p>
             <a:pPr>
-              <a:defRPr sz="1300" b="1">
+              <a:spcAft>
+                <a:spcPts val="200"/>
+              </a:spcAft>
+              <a:defRPr sz="1100" b="1">
                 <a:solidFill>
                   <a:srgbClr val="2563EB"/>
                 </a:solidFill>
               </a:defRPr>
             </a:pPr>
             <a:r>
-              <a:t>Key Finding &amp; Champion Selection:</a:t>
-            </a:r>
-          </a:p>
-          <a:p>
-            <a:pPr>
-              <a:defRPr sz="1100">
+              <a:t>★ Champion Architecture: Gradient Boosting</a:t>
+            </a:r>
+          </a:p>
+          <a:p>
+            <a:pPr>
+              <a:defRPr sz="1000">
                 <a:solidFill>
                   <a:srgbClr val="334155"/>
                 </a:solidFill>
               </a:defRPr>
             </a:pPr>
             <a:r>
-              <a:t>Gradient Boosting outperforms all models with 97.75% Accuracy, 97.11% Precision, 0.8965 F1-Score, and 0.9973 ROC-AUC. It achieves minimal false alarms while retaining strong default detection, drastically minimizing institutional Log Loss (0.0622).</a:t>
+              <a:t>• Accuracy: 97.75%  |  Precision: 97.11%  |  F1-Score: 0.8965  |  ROC-AUC: 0.9973</a:t>
+            </a:r>
+            <a:br/>
+            <a:r>
+              <a:t>• Lowest Log Loss (0.0622) minimizes severe financial misclassification penalties.</a:t>
             </a:r>
           </a:p>
         </p:txBody>
@@ -6519,8 +7232,8 @@
         </p:nvSpPr>
         <p:spPr>
           <a:xfrm>
-            <a:off x="731520" y="274320"/>
-            <a:ext cx="10698480" cy="274320"/>
+            <a:off x="731520" y="256032"/>
+            <a:ext cx="10698480" cy="256032"/>
           </a:xfrm>
           <a:prstGeom prst="rect">
             <a:avLst/>
@@ -6541,7 +7254,7 @@
               </a:defRPr>
             </a:pPr>
             <a:r>
-              <a:t>ACADEMIC REVIEW 2 | DWDM</a:t>
+              <a:t>CSI3010: DATA WAREHOUSING &amp; DATA MINING | REVIEW 2</a:t>
             </a:r>
           </a:p>
         </p:txBody>
@@ -6554,7 +7267,7 @@
         </p:nvSpPr>
         <p:spPr>
           <a:xfrm>
-            <a:off x="731520" y="530352"/>
+            <a:off x="731520" y="502920"/>
             <a:ext cx="10698480" cy="548640"/>
           </a:xfrm>
           <a:prstGeom prst="rect">
@@ -6569,14 +7282,14 @@
           <a:lstStyle/>
           <a:p>
             <a:pPr>
-              <a:defRPr sz="2200" b="1">
+              <a:defRPr sz="2100" b="1">
                 <a:solidFill>
                   <a:srgbClr val="0F172A"/>
                 </a:solidFill>
               </a:defRPr>
             </a:pPr>
             <a:r>
-              <a:t>Classification: Confusion Matrices &amp; ROC Curves</a:t>
+              <a:t>Classification: Pictorial Diagnostics (Confusion Matrices &amp; ROC)</a:t>
             </a:r>
           </a:p>
         </p:txBody>
@@ -6589,8 +7302,8 @@
         </p:nvSpPr>
         <p:spPr>
           <a:xfrm>
-            <a:off x="731520" y="1280160"/>
-            <a:ext cx="5212080" cy="5029200"/>
+            <a:off x="731520" y="1234440"/>
+            <a:ext cx="5212080" cy="4114800"/>
           </a:xfrm>
           <a:prstGeom prst="roundRect">
             <a:avLst/>
@@ -6642,7 +7355,7 @@
         </p:blipFill>
         <p:spPr>
           <a:xfrm>
-            <a:off x="822960" y="1371600"/>
+            <a:off x="822960" y="1325880"/>
             <a:ext cx="5029200" cy="4023360"/>
           </a:xfrm>
           <a:prstGeom prst="rect">
@@ -6658,8 +7371,8 @@
         </p:nvSpPr>
         <p:spPr>
           <a:xfrm>
-            <a:off x="6217920" y="1280160"/>
-            <a:ext cx="5212080" cy="5029200"/>
+            <a:off x="6217920" y="1234440"/>
+            <a:ext cx="5242255" cy="4114800"/>
           </a:xfrm>
           <a:prstGeom prst="roundRect">
             <a:avLst/>
@@ -6711,7 +7424,7 @@
         </p:blipFill>
         <p:spPr>
           <a:xfrm>
-            <a:off x="6309360" y="1371600"/>
+            <a:off x="6309360" y="1325880"/>
             <a:ext cx="5029200" cy="3771900"/>
           </a:xfrm>
           <a:prstGeom prst="rect">
@@ -6719,6 +7432,105 @@
           </a:prstGeom>
         </p:spPr>
       </p:pic>
+      <p:sp>
+        <p:nvSpPr>
+          <p:cNvPr id="9" name="Rounded Rectangle 8"/>
+          <p:cNvSpPr/>
+          <p:nvPr/>
+        </p:nvSpPr>
+        <p:spPr>
+          <a:xfrm>
+            <a:off x="731520" y="5486400"/>
+            <a:ext cx="10728655" cy="914400"/>
+          </a:xfrm>
+          <a:prstGeom prst="roundRect">
+            <a:avLst/>
+          </a:prstGeom>
+          <a:solidFill>
+            <a:srgbClr val="FFFFFF"/>
+          </a:solidFill>
+          <a:ln w="12700">
+            <a:solidFill>
+              <a:srgbClr val="E2E8F0"/>
+            </a:solidFill>
+          </a:ln>
+        </p:spPr>
+        <p:style>
+          <a:lnRef idx="1">
+            <a:schemeClr val="accent1"/>
+          </a:lnRef>
+          <a:fillRef idx="3">
+            <a:schemeClr val="accent1"/>
+          </a:fillRef>
+          <a:effectRef idx="2">
+            <a:schemeClr val="accent1"/>
+          </a:effectRef>
+          <a:fontRef idx="minor">
+            <a:schemeClr val="lt1"/>
+          </a:fontRef>
+        </p:style>
+        <p:txBody>
+          <a:bodyPr rtlCol="0" anchor="ctr"/>
+          <a:lstStyle/>
+          <a:p>
+            <a:pPr algn="ctr"/>
+          </a:p>
+        </p:txBody>
+      </p:sp>
+      <p:sp>
+        <p:nvSpPr>
+          <p:cNvPr id="10" name="TextBox 9"/>
+          <p:cNvSpPr txBox="1"/>
+          <p:nvPr/>
+        </p:nvSpPr>
+        <p:spPr>
+          <a:xfrm>
+            <a:off x="914400" y="5532120"/>
+            <a:ext cx="10362895" cy="822960"/>
+          </a:xfrm>
+          <a:prstGeom prst="rect">
+            <a:avLst/>
+          </a:prstGeom>
+          <a:noFill/>
+        </p:spPr>
+        <p:txBody>
+          <a:bodyPr wrap="square">
+            <a:spAutoFit/>
+          </a:bodyPr>
+          <a:lstStyle/>
+          <a:p>
+            <a:pPr>
+              <a:spcAft>
+                <a:spcPts val="200"/>
+              </a:spcAft>
+              <a:defRPr sz="1100" b="1">
+                <a:solidFill>
+                  <a:srgbClr val="0F172A"/>
+                </a:solidFill>
+              </a:defRPr>
+            </a:pPr>
+            <a:r>
+              <a:t>Key Diagnostic Observations:</a:t>
+            </a:r>
+          </a:p>
+          <a:p>
+            <a:pPr>
+              <a:defRPr sz="1000">
+                <a:solidFill>
+                  <a:srgbClr val="334155"/>
+                </a:solidFill>
+              </a:defRPr>
+            </a:pPr>
+            <a:r>
+              <a:t>• Confusion Matrix: Gradient Boosting eliminates false alarms (only 2.89% false positive rate), preventing healthy customer turnaways.</a:t>
+            </a:r>
+            <a:br/>
+            <a:r>
+              <a:t>• ROC Curves: Gradient Boosting hugs the upper-left boundary (AUC = 0.9973), outperforming Decision Tree (0.934) and Logistic Reg (0.982).</a:t>
+            </a:r>
+          </a:p>
+        </p:txBody>
+      </p:sp>
     </p:spTree>
   </p:cSld>
   <p:clrMapOvr>
@@ -6796,8 +7608,8 @@
         </p:nvSpPr>
         <p:spPr>
           <a:xfrm>
-            <a:off x="731520" y="274320"/>
-            <a:ext cx="10698480" cy="274320"/>
+            <a:off x="731520" y="256032"/>
+            <a:ext cx="10698480" cy="256032"/>
           </a:xfrm>
           <a:prstGeom prst="rect">
             <a:avLst/>
@@ -6818,7 +7630,7 @@
               </a:defRPr>
             </a:pPr>
             <a:r>
-              <a:t>ACADEMIC REVIEW 2 | DWDM</a:t>
+              <a:t>CSI3010: DATA WAREHOUSING &amp; DATA MINING | REVIEW 2</a:t>
             </a:r>
           </a:p>
         </p:txBody>
@@ -6831,7 +7643,7 @@
         </p:nvSpPr>
         <p:spPr>
           <a:xfrm>
-            <a:off x="731520" y="530352"/>
+            <a:off x="731520" y="502920"/>
             <a:ext cx="10698480" cy="548640"/>
           </a:xfrm>
           <a:prstGeom prst="rect">
@@ -6846,14 +7658,14 @@
           <a:lstStyle/>
           <a:p>
             <a:pPr>
-              <a:defRPr sz="2200" b="1">
+              <a:defRPr sz="2100" b="1">
                 <a:solidFill>
                   <a:srgbClr val="0F172A"/>
                 </a:solidFill>
               </a:defRPr>
             </a:pPr>
             <a:r>
-              <a:t>Borrower Segmentation: Optimal K Determination (Elbow &amp; Silhouette)</a:t>
+              <a:t>Borrower Clustering: K-Means Code &amp; Optimal K Determination</a:t>
             </a:r>
           </a:p>
         </p:txBody>
@@ -6866,18 +7678,18 @@
         </p:nvSpPr>
         <p:spPr>
           <a:xfrm>
-            <a:off x="731520" y="1280160"/>
-            <a:ext cx="6217920" cy="5029200"/>
+            <a:off x="731520" y="1234440"/>
+            <a:ext cx="4389120" cy="5120640"/>
           </a:xfrm>
           <a:prstGeom prst="roundRect">
             <a:avLst/>
           </a:prstGeom>
           <a:solidFill>
-            <a:srgbClr val="FFFFFF"/>
+            <a:srgbClr val="0F172A"/>
           </a:solidFill>
           <a:ln w="12700">
             <a:solidFill>
-              <a:srgbClr val="E2E8F0"/>
+              <a:srgbClr val="334155"/>
             </a:solidFill>
           </a:ln>
         </p:spPr>
@@ -6903,40 +7715,286 @@
           </a:p>
         </p:txBody>
       </p:sp>
-      <p:pic>
-        <p:nvPicPr>
-          <p:cNvPr id="6" name="Picture 5" descr="elbow_silhouette.png"/>
-          <p:cNvPicPr>
-            <a:picLocks noChangeAspect="1"/>
-          </p:cNvPicPr>
+      <p:sp>
+        <p:nvSpPr>
+          <p:cNvPr id="6" name="TextBox 5"/>
+          <p:cNvSpPr txBox="1"/>
           <p:nvPr/>
-        </p:nvPicPr>
-        <p:blipFill>
-          <a:blip r:embed="rId2"/>
-          <a:stretch>
-            <a:fillRect/>
-          </a:stretch>
-        </p:blipFill>
-        <p:spPr>
-          <a:xfrm>
-            <a:off x="822960" y="1645920"/>
-            <a:ext cx="6035040" cy="2263140"/>
+        </p:nvSpPr>
+        <p:spPr>
+          <a:xfrm>
+            <a:off x="914400" y="1344168"/>
+            <a:ext cx="4023360" cy="274320"/>
           </a:xfrm>
           <a:prstGeom prst="rect">
             <a:avLst/>
           </a:prstGeom>
-        </p:spPr>
-      </p:pic>
-      <p:sp>
-        <p:nvSpPr>
-          <p:cNvPr id="7" name="Rounded Rectangle 6"/>
+          <a:noFill/>
+        </p:spPr>
+        <p:txBody>
+          <a:bodyPr wrap="square" lIns="0" tIns="0" rIns="0" bIns="0">
+            <a:spAutoFit/>
+          </a:bodyPr>
+          <a:lstStyle/>
+          <a:p>
+            <a:pPr>
+              <a:defRPr sz="950" b="1">
+                <a:solidFill>
+                  <a:srgbClr val="10B981"/>
+                </a:solidFill>
+              </a:defRPr>
+            </a:pPr>
+            <a:r>
+              <a:t>⚙  train_clustering.py</a:t>
+            </a:r>
+          </a:p>
+        </p:txBody>
+      </p:sp>
+      <p:sp>
+        <p:nvSpPr>
+          <p:cNvPr id="7" name="TextBox 6"/>
+          <p:cNvSpPr txBox="1"/>
+          <p:nvPr/>
+        </p:nvSpPr>
+        <p:spPr>
+          <a:xfrm>
+            <a:off x="914400" y="1645920"/>
+            <a:ext cx="4023360" cy="4617720"/>
+          </a:xfrm>
+          <a:prstGeom prst="rect">
+            <a:avLst/>
+          </a:prstGeom>
+          <a:noFill/>
+        </p:spPr>
+        <p:txBody>
+          <a:bodyPr wrap="square" lIns="0" tIns="0" rIns="0" bIns="0">
+            <a:spAutoFit/>
+          </a:bodyPr>
+          <a:lstStyle/>
+          <a:p>
+            <a:pPr>
+              <a:defRPr sz="850">
+                <a:solidFill>
+                  <a:srgbClr val="94A3B8"/>
+                </a:solidFill>
+                <a:latin typeface="Consolas"/>
+              </a:defRPr>
+            </a:pPr>
+            <a:r>
+              <a:t># clustering/train_clustering.py</a:t>
+            </a:r>
+          </a:p>
+          <a:p>
+            <a:pPr>
+              <a:defRPr sz="850">
+                <a:solidFill>
+                  <a:srgbClr val="93C5FD"/>
+                </a:solidFill>
+                <a:latin typeface="Consolas"/>
+              </a:defRPr>
+            </a:pPr>
+            <a:r>
+              <a:t>from sklearn.cluster import KMeans</a:t>
+            </a:r>
+          </a:p>
+          <a:p>
+            <a:pPr>
+              <a:defRPr sz="850">
+                <a:solidFill>
+                  <a:srgbClr val="93C5FD"/>
+                </a:solidFill>
+                <a:latin typeface="Consolas"/>
+              </a:defRPr>
+            </a:pPr>
+            <a:r>
+              <a:t>from sklearn.metrics import silhouette_score</a:t>
+            </a:r>
+          </a:p>
+          <a:p>
+            <a:pPr>
+              <a:defRPr sz="850">
+                <a:solidFill>
+                  <a:srgbClr val="F1F5F9"/>
+                </a:solidFill>
+                <a:latin typeface="Consolas"/>
+              </a:defRPr>
+            </a:pPr>
+          </a:p>
+          <a:p>
+            <a:pPr>
+              <a:defRPr sz="850">
+                <a:solidFill>
+                  <a:srgbClr val="F1F5F9"/>
+                </a:solidFill>
+                <a:latin typeface="Consolas"/>
+              </a:defRPr>
+            </a:pPr>
+            <a:r>
+              <a:t>features = ['Income', 'CreditScore', 'LoanAmount',</a:t>
+            </a:r>
+          </a:p>
+          <a:p>
+            <a:pPr>
+              <a:defRPr sz="850">
+                <a:solidFill>
+                  <a:srgbClr val="F1F5F9"/>
+                </a:solidFill>
+                <a:latin typeface="Consolas"/>
+              </a:defRPr>
+            </a:pPr>
+            <a:r>
+              <a:t>            'DTIRatio', 'MonthsEmployed']</a:t>
+            </a:r>
+          </a:p>
+          <a:p>
+            <a:pPr>
+              <a:defRPr sz="850">
+                <a:solidFill>
+                  <a:srgbClr val="6EE7B7"/>
+                </a:solidFill>
+                <a:latin typeface="Consolas"/>
+              </a:defRPr>
+            </a:pPr>
+            <a:r>
+              <a:t>X_scaled = StandardScaler().fit_transform(df[features])</a:t>
+            </a:r>
+          </a:p>
+          <a:p>
+            <a:pPr>
+              <a:defRPr sz="850">
+                <a:solidFill>
+                  <a:srgbClr val="F1F5F9"/>
+                </a:solidFill>
+                <a:latin typeface="Consolas"/>
+              </a:defRPr>
+            </a:pPr>
+          </a:p>
+          <a:p>
+            <a:pPr>
+              <a:defRPr sz="850">
+                <a:solidFill>
+                  <a:srgbClr val="94A3B8"/>
+                </a:solidFill>
+                <a:latin typeface="Consolas"/>
+              </a:defRPr>
+            </a:pPr>
+            <a:r>
+              <a:t># Evaluate K from 2 to 6</a:t>
+            </a:r>
+          </a:p>
+          <a:p>
+            <a:pPr>
+              <a:defRPr sz="850">
+                <a:solidFill>
+                  <a:srgbClr val="93C5FD"/>
+                </a:solidFill>
+                <a:latin typeface="Consolas"/>
+              </a:defRPr>
+            </a:pPr>
+            <a:r>
+              <a:t>for k in range(2, 7):</a:t>
+            </a:r>
+          </a:p>
+          <a:p>
+            <a:pPr>
+              <a:defRPr sz="850">
+                <a:solidFill>
+                  <a:srgbClr val="6EE7B7"/>
+                </a:solidFill>
+                <a:latin typeface="Consolas"/>
+              </a:defRPr>
+            </a:pPr>
+            <a:r>
+              <a:t>    kmeans = KMeans(n_clusters=k, random_state=42)</a:t>
+            </a:r>
+          </a:p>
+          <a:p>
+            <a:pPr>
+              <a:defRPr sz="850">
+                <a:solidFill>
+                  <a:srgbClr val="F1F5F9"/>
+                </a:solidFill>
+                <a:latin typeface="Consolas"/>
+              </a:defRPr>
+            </a:pPr>
+            <a:r>
+              <a:t>    labels = kmeans.fit_predict(X_scaled)</a:t>
+            </a:r>
+          </a:p>
+          <a:p>
+            <a:pPr>
+              <a:defRPr sz="850">
+                <a:solidFill>
+                  <a:srgbClr val="F1F5F9"/>
+                </a:solidFill>
+                <a:latin typeface="Consolas"/>
+              </a:defRPr>
+            </a:pPr>
+            <a:r>
+              <a:t>    inertia = kmeans.inertia_</a:t>
+            </a:r>
+          </a:p>
+          <a:p>
+            <a:pPr>
+              <a:defRPr sz="850">
+                <a:solidFill>
+                  <a:srgbClr val="F1F5F9"/>
+                </a:solidFill>
+                <a:latin typeface="Consolas"/>
+              </a:defRPr>
+            </a:pPr>
+            <a:r>
+              <a:t>    sil = silhouette_score(X_scaled, labels)</a:t>
+            </a:r>
+          </a:p>
+          <a:p>
+            <a:pPr>
+              <a:defRPr sz="850">
+                <a:solidFill>
+                  <a:srgbClr val="F1F5F9"/>
+                </a:solidFill>
+                <a:latin typeface="Consolas"/>
+              </a:defRPr>
+            </a:pPr>
+          </a:p>
+          <a:p>
+            <a:pPr>
+              <a:defRPr sz="850">
+                <a:solidFill>
+                  <a:srgbClr val="94A3B8"/>
+                </a:solidFill>
+                <a:latin typeface="Consolas"/>
+              </a:defRPr>
+            </a:pPr>
+            <a:r>
+              <a:t># Selected optimal K=3 (Elbow Inflection)</a:t>
+            </a:r>
+          </a:p>
+          <a:p>
+            <a:pPr>
+              <a:defRPr sz="850">
+                <a:solidFill>
+                  <a:srgbClr val="6EE7B7"/>
+                </a:solidFill>
+                <a:latin typeface="Consolas"/>
+              </a:defRPr>
+            </a:pPr>
+            <a:r>
+              <a:t>final_kmeans = KMeans(n_clusters=3, random_state=42)</a:t>
+            </a:r>
+          </a:p>
+        </p:txBody>
+      </p:sp>
+      <p:sp>
+        <p:nvSpPr>
+          <p:cNvPr id="8" name="Rounded Rectangle 7"/>
           <p:cNvSpPr/>
           <p:nvPr/>
         </p:nvSpPr>
         <p:spPr>
           <a:xfrm>
-            <a:off x="7223760" y="1280160"/>
-            <a:ext cx="4206240" cy="5029200"/>
+            <a:off x="5303520" y="1234440"/>
+            <a:ext cx="6156655" cy="3931920"/>
           </a:xfrm>
           <a:prstGeom prst="roundRect">
             <a:avLst/>
@@ -6972,16 +8030,85 @@
           </a:p>
         </p:txBody>
       </p:sp>
-      <p:sp>
-        <p:nvSpPr>
-          <p:cNvPr id="8" name="TextBox 7"/>
+      <p:pic>
+        <p:nvPicPr>
+          <p:cNvPr id="9" name="Picture 8" descr="elbow_silhouette.png"/>
+          <p:cNvPicPr>
+            <a:picLocks noChangeAspect="1"/>
+          </p:cNvPicPr>
+          <p:nvPr/>
+        </p:nvPicPr>
+        <p:blipFill>
+          <a:blip r:embed="rId2"/>
+          <a:stretch>
+            <a:fillRect/>
+          </a:stretch>
+        </p:blipFill>
+        <p:spPr>
+          <a:xfrm>
+            <a:off x="5394960" y="1325880"/>
+            <a:ext cx="5943600" cy="2228850"/>
+          </a:xfrm>
+          <a:prstGeom prst="rect">
+            <a:avLst/>
+          </a:prstGeom>
+        </p:spPr>
+      </p:pic>
+      <p:sp>
+        <p:nvSpPr>
+          <p:cNvPr id="10" name="Rounded Rectangle 9"/>
+          <p:cNvSpPr/>
+          <p:nvPr/>
+        </p:nvSpPr>
+        <p:spPr>
+          <a:xfrm>
+            <a:off x="5303520" y="5303520"/>
+            <a:ext cx="6156655" cy="1051560"/>
+          </a:xfrm>
+          <a:prstGeom prst="roundRect">
+            <a:avLst/>
+          </a:prstGeom>
+          <a:solidFill>
+            <a:srgbClr val="ECFDF5"/>
+          </a:solidFill>
+          <a:ln w="12700">
+            <a:solidFill>
+              <a:srgbClr val="10B981"/>
+            </a:solidFill>
+          </a:ln>
+        </p:spPr>
+        <p:style>
+          <a:lnRef idx="1">
+            <a:schemeClr val="accent1"/>
+          </a:lnRef>
+          <a:fillRef idx="3">
+            <a:schemeClr val="accent1"/>
+          </a:fillRef>
+          <a:effectRef idx="2">
+            <a:schemeClr val="accent1"/>
+          </a:effectRef>
+          <a:fontRef idx="minor">
+            <a:schemeClr val="lt1"/>
+          </a:fontRef>
+        </p:style>
+        <p:txBody>
+          <a:bodyPr rtlCol="0" anchor="ctr"/>
+          <a:lstStyle/>
+          <a:p>
+            <a:pPr algn="ctr"/>
+          </a:p>
+        </p:txBody>
+      </p:sp>
+      <p:sp>
+        <p:nvSpPr>
+          <p:cNvPr id="11" name="TextBox 10"/>
           <p:cNvSpPr txBox="1"/>
           <p:nvPr/>
         </p:nvSpPr>
         <p:spPr>
           <a:xfrm>
-            <a:off x="7406640" y="1463040"/>
-            <a:ext cx="3840480" cy="4572000"/>
+            <a:off x="5440680" y="5349240"/>
+            <a:ext cx="5882335" cy="960120"/>
           </a:xfrm>
           <a:prstGeom prst="rect">
             <a:avLst/>
@@ -6996,91 +8123,32 @@
           <a:p>
             <a:pPr>
               <a:spcAft>
-                <a:spcPts val="1400"/>
+                <a:spcPts val="200"/>
               </a:spcAft>
-              <a:defRPr sz="1600" b="1">
-                <a:solidFill>
-                  <a:srgbClr val="0F172A"/>
-                </a:solidFill>
-              </a:defRPr>
-            </a:pPr>
-            <a:r>
-              <a:t>Unsupervised Methodology</a:t>
-            </a:r>
-          </a:p>
-          <a:p>
-            <a:pPr>
-              <a:spcAft>
-                <a:spcPts val="1000"/>
-              </a:spcAft>
-              <a:defRPr sz="1100">
+              <a:defRPr sz="1100" b="1">
+                <a:solidFill>
+                  <a:srgbClr val="10B981"/>
+                </a:solidFill>
+              </a:defRPr>
+            </a:pPr>
+            <a:r>
+              <a:t>Optimal K=3 Selection Criteria:</a:t>
+            </a:r>
+          </a:p>
+          <a:p>
+            <a:pPr>
+              <a:defRPr sz="1000">
                 <a:solidFill>
                   <a:srgbClr val="334155"/>
                 </a:solidFill>
               </a:defRPr>
             </a:pPr>
             <a:r>
-              <a:t>• Clustering Algorithm: K-Means clustering (Euclidean distance on scaled features).</a:t>
-            </a:r>
-          </a:p>
-          <a:p>
-            <a:pPr>
-              <a:spcAft>
-                <a:spcPts val="1000"/>
-              </a:spcAft>
-              <a:defRPr sz="1100">
-                <a:solidFill>
-                  <a:srgbClr val="334155"/>
-                </a:solidFill>
-              </a:defRPr>
-            </a:pPr>
-            <a:r>
-              <a:t>• Features Clustered: Income, CreditScore, LoanAmount, DTIRatio, MonthsEmployed.</a:t>
-            </a:r>
-          </a:p>
-          <a:p>
-            <a:pPr>
-              <a:spcAft>
-                <a:spcPts val="1000"/>
-              </a:spcAft>
-              <a:defRPr sz="1100">
-                <a:solidFill>
-                  <a:srgbClr val="334155"/>
-                </a:solidFill>
-              </a:defRPr>
-            </a:pPr>
-            <a:r>
-              <a:t>• Elbow Curve Inflection: Inertia drops sharply from K=2 (212,115) to K=3 (189,245), flattens thereafter.</a:t>
-            </a:r>
-          </a:p>
-          <a:p>
-            <a:pPr>
-              <a:spcAft>
-                <a:spcPts val="1000"/>
-              </a:spcAft>
-              <a:defRPr sz="1100">
-                <a:solidFill>
-                  <a:srgbClr val="334155"/>
-                </a:solidFill>
-              </a:defRPr>
-            </a:pPr>
-            <a:r>
-              <a:t>• Silhouette Analysis: Evaluated cluster cohesion across K=2 to 6; K=3 provides optimal cohesion and distinctness.</a:t>
-            </a:r>
-          </a:p>
-          <a:p>
-            <a:pPr>
-              <a:spcAft>
-                <a:spcPts val="1000"/>
-              </a:spcAft>
-              <a:defRPr sz="1100">
-                <a:solidFill>
-                  <a:srgbClr val="334155"/>
-                </a:solidFill>
-              </a:defRPr>
-            </a:pPr>
-            <a:r>
-              <a:t>• Commercial Rationale: K=3 naturally segments borrowers into Prime (Low Risk), Standard (Moderate Risk), and Subprime (High Risk).</a:t>
+              <a:t>• Elbow Method: Inertia drops steeply from K=2 (212,115) to K=3 (189,245), flattens thereafter.</a:t>
+            </a:r>
+            <a:br/>
+            <a:r>
+              <a:t>• Silhouette Cohesion: Confirms K=3 naturally segments borrowers into Prime, Standard, and Subprime tiers.</a:t>
             </a:r>
           </a:p>
         </p:txBody>
@@ -7162,8 +8230,8 @@
         </p:nvSpPr>
         <p:spPr>
           <a:xfrm>
-            <a:off x="731520" y="274320"/>
-            <a:ext cx="10698480" cy="274320"/>
+            <a:off x="731520" y="256032"/>
+            <a:ext cx="10698480" cy="256032"/>
           </a:xfrm>
           <a:prstGeom prst="rect">
             <a:avLst/>
@@ -7184,7 +8252,7 @@
               </a:defRPr>
             </a:pPr>
             <a:r>
-              <a:t>ACADEMIC REVIEW 2 | DWDM</a:t>
+              <a:t>CSI3010: DATA WAREHOUSING &amp; DATA MINING | REVIEW 2</a:t>
             </a:r>
           </a:p>
         </p:txBody>
@@ -7197,7 +8265,7 @@
         </p:nvSpPr>
         <p:spPr>
           <a:xfrm>
-            <a:off x="731520" y="530352"/>
+            <a:off x="731520" y="502920"/>
             <a:ext cx="10698480" cy="548640"/>
           </a:xfrm>
           <a:prstGeom prst="rect">
@@ -7212,14 +8280,14 @@
           <a:lstStyle/>
           <a:p>
             <a:pPr>
-              <a:defRPr sz="2200" b="1">
+              <a:defRPr sz="2100" b="1">
                 <a:solidFill>
                   <a:srgbClr val="0F172A"/>
                 </a:solidFill>
               </a:defRPr>
             </a:pPr>
             <a:r>
-              <a:t>Borrower Risk Profiles ($K=3$) &amp; 2D PCA Risk Space</a:t>
+              <a:t>Borrower Risk Profiles ($K=3$) &amp; 2D PCA Dimensionality Reduction</a:t>
             </a:r>
           </a:p>
         </p:txBody>
@@ -7232,8 +8300,8 @@
         </p:nvSpPr>
         <p:spPr>
           <a:xfrm>
-            <a:off x="731520" y="1280160"/>
-            <a:ext cx="10728655" cy="2377440"/>
+            <a:off x="731520" y="1234440"/>
+            <a:ext cx="5669280" cy="5029200"/>
           </a:xfrm>
           <a:prstGeom prst="roundRect">
             <a:avLst/>
@@ -7278,8 +8346,8 @@
           <p:nvPr/>
         </p:nvGraphicFramePr>
         <p:xfrm>
-          <a:off x="914400" y="1463040"/>
-          <a:ext cx="10362895" cy="1920240"/>
+          <a:off x="868680" y="1371600"/>
+          <a:ext cx="5394960" cy="2468880"/>
         </p:xfrm>
         <a:graphic>
           <a:graphicData uri="http://schemas.openxmlformats.org/drawingml/2006/table">
@@ -7288,30 +8356,28 @@
                 <a:tableStyleId>{5C22544A-7EE6-4342-B048-85BDC9FD1C3A}</a:tableStyleId>
               </a:tblPr>
               <a:tblGrid>
-                <a:gridCol w="1295361"/>
-                <a:gridCol w="1295361"/>
-                <a:gridCol w="1295361"/>
-                <a:gridCol w="1295361"/>
-                <a:gridCol w="1295361"/>
-                <a:gridCol w="1295361"/>
-                <a:gridCol w="1295361"/>
-                <a:gridCol w="1295368"/>
+                <a:gridCol w="899160"/>
+                <a:gridCol w="899160"/>
+                <a:gridCol w="899160"/>
+                <a:gridCol w="899160"/>
+                <a:gridCol w="899160"/>
+                <a:gridCol w="899160"/>
               </a:tblGrid>
-              <a:tr h="480060">
+              <a:tr h="617220">
                 <a:tc>
                   <a:txBody>
                     <a:bodyPr/>
                     <a:lstStyle/>
                     <a:p>
                       <a:pPr algn="ctr">
-                        <a:defRPr sz="1100" b="1">
+                        <a:defRPr sz="950" b="1">
                           <a:solidFill>
                             <a:srgbClr val="FFFFFF"/>
                           </a:solidFill>
                         </a:defRPr>
                       </a:pPr>
                       <a:r>
-                        <a:t>Cluster ID</a:t>
+                        <a:t>Cluster</a:t>
                       </a:r>
                     </a:p>
                   </a:txBody>
@@ -7327,7 +8393,7 @@
                     <a:lstStyle/>
                     <a:p>
                       <a:pPr algn="ctr">
-                        <a:defRPr sz="1100" b="1">
+                        <a:defRPr sz="950" b="1">
                           <a:solidFill>
                             <a:srgbClr val="FFFFFF"/>
                           </a:solidFill>
@@ -7350,14 +8416,14 @@
                     <a:lstStyle/>
                     <a:p>
                       <a:pPr algn="ctr">
-                        <a:defRPr sz="1100" b="1">
+                        <a:defRPr sz="950" b="1">
                           <a:solidFill>
                             <a:srgbClr val="FFFFFF"/>
                           </a:solidFill>
                         </a:defRPr>
                       </a:pPr>
                       <a:r>
-                        <a:t>Borrower Count</a:t>
+                        <a:t>Share</a:t>
                       </a:r>
                     </a:p>
                   </a:txBody>
@@ -7373,30 +8439,7 @@
                     <a:lstStyle/>
                     <a:p>
                       <a:pPr algn="ctr">
-                        <a:defRPr sz="1100" b="1">
-                          <a:solidFill>
-                            <a:srgbClr val="FFFFFF"/>
-                          </a:solidFill>
-                        </a:defRPr>
-                      </a:pPr>
-                      <a:r>
-                        <a:t>Portfolio %</a:t>
-                      </a:r>
-                    </a:p>
-                  </a:txBody>
-                  <a:tcPr>
-                    <a:solidFill>
-                      <a:srgbClr val="0F172A"/>
-                    </a:solidFill>
-                  </a:tcPr>
-                </a:tc>
-                <a:tc>
-                  <a:txBody>
-                    <a:bodyPr/>
-                    <a:lstStyle/>
-                    <a:p>
-                      <a:pPr algn="ctr">
-                        <a:defRPr sz="1100" b="1">
+                        <a:defRPr sz="950" b="1">
                           <a:solidFill>
                             <a:srgbClr val="FFFFFF"/>
                           </a:solidFill>
@@ -7419,14 +8462,14 @@
                     <a:lstStyle/>
                     <a:p>
                       <a:pPr algn="ctr">
-                        <a:defRPr sz="1100" b="1">
+                        <a:defRPr sz="950" b="1">
                           <a:solidFill>
                             <a:srgbClr val="FFFFFF"/>
                           </a:solidFill>
                         </a:defRPr>
                       </a:pPr>
                       <a:r>
-                        <a:t>Avg Income</a:t>
+                        <a:t>Avg Emp</a:t>
                       </a:r>
                     </a:p>
                   </a:txBody>
@@ -7442,30 +8485,7 @@
                     <a:lstStyle/>
                     <a:p>
                       <a:pPr algn="ctr">
-                        <a:defRPr sz="1100" b="1">
-                          <a:solidFill>
-                            <a:srgbClr val="FFFFFF"/>
-                          </a:solidFill>
-                        </a:defRPr>
-                      </a:pPr>
-                      <a:r>
-                        <a:t>Avg Employment</a:t>
-                      </a:r>
-                    </a:p>
-                  </a:txBody>
-                  <a:tcPr>
-                    <a:solidFill>
-                      <a:srgbClr val="0F172A"/>
-                    </a:solidFill>
-                  </a:tcPr>
-                </a:tc>
-                <a:tc>
-                  <a:txBody>
-                    <a:bodyPr/>
-                    <a:lstStyle/>
-                    <a:p>
-                      <a:pPr algn="ctr">
-                        <a:defRPr sz="1100" b="1">
+                        <a:defRPr sz="950" b="1">
                           <a:solidFill>
                             <a:srgbClr val="FFFFFF"/>
                           </a:solidFill>
@@ -7483,14 +8503,14 @@
                   </a:tcPr>
                 </a:tc>
               </a:tr>
-              <a:tr h="480060">
+              <a:tr h="617220">
                 <a:tc>
                   <a:txBody>
                     <a:bodyPr/>
                     <a:lstStyle/>
                     <a:p>
                       <a:pPr algn="ctr">
-                        <a:defRPr sz="1000" b="0"/>
+                        <a:defRPr sz="900" b="0"/>
                       </a:pPr>
                       <a:r>
                         <a:t>Cluster 2</a:t>
@@ -7509,7 +8529,7 @@
                     <a:lstStyle/>
                     <a:p>
                       <a:pPr algn="ctr">
-                        <a:defRPr sz="1000" b="1"/>
+                        <a:defRPr sz="900" b="1"/>
                       </a:pPr>
                       <a:r>
                         <a:t>Low Risk (Prime)</a:t>
@@ -7528,26 +8548,7 @@
                     <a:lstStyle/>
                     <a:p>
                       <a:pPr algn="ctr">
-                        <a:defRPr sz="1000" b="0"/>
-                      </a:pPr>
-                      <a:r>
-                        <a:t>18,800</a:t>
-                      </a:r>
-                    </a:p>
-                  </a:txBody>
-                  <a:tcPr>
-                    <a:solidFill>
-                      <a:srgbClr val="ECFDF5"/>
-                    </a:solidFill>
-                  </a:tcPr>
-                </a:tc>
-                <a:tc>
-                  <a:txBody>
-                    <a:bodyPr/>
-                    <a:lstStyle/>
-                    <a:p>
-                      <a:pPr algn="ctr">
-                        <a:defRPr sz="1000" b="0"/>
+                        <a:defRPr sz="900" b="0"/>
                       </a:pPr>
                       <a:r>
                         <a:t>37.6%</a:t>
@@ -7566,7 +8567,7 @@
                     <a:lstStyle/>
                     <a:p>
                       <a:pPr algn="ctr">
-                        <a:defRPr sz="1000" b="0"/>
+                        <a:defRPr sz="900" b="0"/>
                       </a:pPr>
                       <a:r>
                         <a:t>741.8</a:t>
@@ -7585,26 +8586,7 @@
                     <a:lstStyle/>
                     <a:p>
                       <a:pPr algn="ctr">
-                        <a:defRPr sz="1000" b="0"/>
-                      </a:pPr>
-                      <a:r>
-                        <a:t>$83,521</a:t>
-                      </a:r>
-                    </a:p>
-                  </a:txBody>
-                  <a:tcPr>
-                    <a:solidFill>
-                      <a:srgbClr val="ECFDF5"/>
-                    </a:solidFill>
-                  </a:tcPr>
-                </a:tc>
-                <a:tc>
-                  <a:txBody>
-                    <a:bodyPr/>
-                    <a:lstStyle/>
-                    <a:p>
-                      <a:pPr algn="ctr">
-                        <a:defRPr sz="1000" b="0"/>
+                        <a:defRPr sz="900" b="0"/>
                       </a:pPr>
                       <a:r>
                         <a:t>60.7 mos</a:t>
@@ -7623,7 +8605,7 @@
                     <a:lstStyle/>
                     <a:p>
                       <a:pPr algn="ctr">
-                        <a:defRPr sz="1000" b="1">
+                        <a:defRPr sz="900" b="1">
                           <a:solidFill>
                             <a:srgbClr val="10B981"/>
                           </a:solidFill>
@@ -7641,14 +8623,14 @@
                   </a:tcPr>
                 </a:tc>
               </a:tr>
-              <a:tr h="480060">
+              <a:tr h="617220">
                 <a:tc>
                   <a:txBody>
                     <a:bodyPr/>
                     <a:lstStyle/>
                     <a:p>
                       <a:pPr algn="ctr">
-                        <a:defRPr sz="1000" b="0"/>
+                        <a:defRPr sz="900" b="0"/>
                       </a:pPr>
                       <a:r>
                         <a:t>Cluster 1</a:t>
@@ -7667,10 +8649,10 @@
                     <a:lstStyle/>
                     <a:p>
                       <a:pPr algn="ctr">
-                        <a:defRPr sz="1000" b="1"/>
+                        <a:defRPr sz="900" b="1"/>
                       </a:pPr>
                       <a:r>
-                        <a:t>Moderate Risk (Standard)</a:t>
+                        <a:t>Moderate (Standard)</a:t>
                       </a:r>
                     </a:p>
                   </a:txBody>
@@ -7686,26 +8668,7 @@
                     <a:lstStyle/>
                     <a:p>
                       <a:pPr algn="ctr">
-                        <a:defRPr sz="1000" b="0"/>
-                      </a:pPr>
-                      <a:r>
-                        <a:t>15,550</a:t>
-                      </a:r>
-                    </a:p>
-                  </a:txBody>
-                  <a:tcPr>
-                    <a:solidFill>
-                      <a:srgbClr val="F1F5F9"/>
-                    </a:solidFill>
-                  </a:tcPr>
-                </a:tc>
-                <a:tc>
-                  <a:txBody>
-                    <a:bodyPr/>
-                    <a:lstStyle/>
-                    <a:p>
-                      <a:pPr algn="ctr">
-                        <a:defRPr sz="1000" b="0"/>
+                        <a:defRPr sz="900" b="0"/>
                       </a:pPr>
                       <a:r>
                         <a:t>31.1%</a:t>
@@ -7724,7 +8687,7 @@
                     <a:lstStyle/>
                     <a:p>
                       <a:pPr algn="ctr">
-                        <a:defRPr sz="1000" b="0"/>
+                        <a:defRPr sz="900" b="0"/>
                       </a:pPr>
                       <a:r>
                         <a:t>470.8</a:t>
@@ -7743,26 +8706,7 @@
                     <a:lstStyle/>
                     <a:p>
                       <a:pPr algn="ctr">
-                        <a:defRPr sz="1000" b="0"/>
-                      </a:pPr>
-                      <a:r>
-                        <a:t>$81,775</a:t>
-                      </a:r>
-                    </a:p>
-                  </a:txBody>
-                  <a:tcPr>
-                    <a:solidFill>
-                      <a:srgbClr val="F1F5F9"/>
-                    </a:solidFill>
-                  </a:tcPr>
-                </a:tc>
-                <a:tc>
-                  <a:txBody>
-                    <a:bodyPr/>
-                    <a:lstStyle/>
-                    <a:p>
-                      <a:pPr algn="ctr">
-                        <a:defRPr sz="1000" b="0"/>
+                        <a:defRPr sz="900" b="0"/>
                       </a:pPr>
                       <a:r>
                         <a:t>91.5 mos</a:t>
@@ -7781,7 +8725,7 @@
                     <a:lstStyle/>
                     <a:p>
                       <a:pPr algn="ctr">
-                        <a:defRPr sz="1000" b="1">
+                        <a:defRPr sz="900" b="1">
                           <a:solidFill>
                             <a:srgbClr val="2563EB"/>
                           </a:solidFill>
@@ -7799,14 +8743,14 @@
                   </a:tcPr>
                 </a:tc>
               </a:tr>
-              <a:tr h="480060">
+              <a:tr h="617220">
                 <a:tc>
                   <a:txBody>
                     <a:bodyPr/>
                     <a:lstStyle/>
                     <a:p>
                       <a:pPr algn="ctr">
-                        <a:defRPr sz="1000" b="0"/>
+                        <a:defRPr sz="900" b="0"/>
                       </a:pPr>
                       <a:r>
                         <a:t>Cluster 0</a:t>
@@ -7825,7 +8769,7 @@
                     <a:lstStyle/>
                     <a:p>
                       <a:pPr algn="ctr">
-                        <a:defRPr sz="1000" b="1"/>
+                        <a:defRPr sz="900" b="1"/>
                       </a:pPr>
                       <a:r>
                         <a:t>High Risk (Subprime)</a:t>
@@ -7844,26 +8788,7 @@
                     <a:lstStyle/>
                     <a:p>
                       <a:pPr algn="ctr">
-                        <a:defRPr sz="1000" b="0"/>
-                      </a:pPr>
-                      <a:r>
-                        <a:t>15,650</a:t>
-                      </a:r>
-                    </a:p>
-                  </a:txBody>
-                  <a:tcPr>
-                    <a:solidFill>
-                      <a:srgbClr val="FEF2F2"/>
-                    </a:solidFill>
-                  </a:tcPr>
-                </a:tc>
-                <a:tc>
-                  <a:txBody>
-                    <a:bodyPr/>
-                    <a:lstStyle/>
-                    <a:p>
-                      <a:pPr algn="ctr">
-                        <a:defRPr sz="1000" b="0"/>
+                        <a:defRPr sz="900" b="0"/>
                       </a:pPr>
                       <a:r>
                         <a:t>31.3%</a:t>
@@ -7882,7 +8807,7 @@
                     <a:lstStyle/>
                     <a:p>
                       <a:pPr algn="ctr">
-                        <a:defRPr sz="1000" b="0"/>
+                        <a:defRPr sz="900" b="0"/>
                       </a:pPr>
                       <a:r>
                         <a:t>475.2</a:t>
@@ -7901,26 +8826,7 @@
                     <a:lstStyle/>
                     <a:p>
                       <a:pPr algn="ctr">
-                        <a:defRPr sz="1000" b="0"/>
-                      </a:pPr>
-                      <a:r>
-                        <a:t>$81,224</a:t>
-                      </a:r>
-                    </a:p>
-                  </a:txBody>
-                  <a:tcPr>
-                    <a:solidFill>
-                      <a:srgbClr val="FEF2F2"/>
-                    </a:solidFill>
-                  </a:tcPr>
-                </a:tc>
-                <a:tc>
-                  <a:txBody>
-                    <a:bodyPr/>
-                    <a:lstStyle/>
-                    <a:p>
-                      <a:pPr algn="ctr">
-                        <a:defRPr sz="1000" b="0"/>
+                        <a:defRPr sz="900" b="0"/>
                       </a:pPr>
                       <a:r>
                         <a:t>27.0 mos</a:t>
@@ -7939,7 +8845,7 @@
                     <a:lstStyle/>
                     <a:p>
                       <a:pPr algn="ctr">
-                        <a:defRPr sz="1000" b="1">
+                        <a:defRPr sz="900" b="1">
                           <a:solidFill>
                             <a:srgbClr val="E11D48"/>
                           </a:solidFill>
@@ -7963,14 +8869,112 @@
       </p:graphicFrame>
       <p:sp>
         <p:nvSpPr>
-          <p:cNvPr id="7" name="Rounded Rectangle 6"/>
+          <p:cNvPr id="7" name="TextBox 6"/>
+          <p:cNvSpPr txBox="1"/>
+          <p:nvPr/>
+        </p:nvSpPr>
+        <p:spPr>
+          <a:xfrm>
+            <a:off x="868680" y="3977639"/>
+            <a:ext cx="5394960" cy="2194560"/>
+          </a:xfrm>
+          <a:prstGeom prst="rect">
+            <a:avLst/>
+          </a:prstGeom>
+          <a:noFill/>
+        </p:spPr>
+        <p:txBody>
+          <a:bodyPr wrap="square">
+            <a:spAutoFit/>
+          </a:bodyPr>
+          <a:lstStyle/>
+          <a:p>
+            <a:pPr>
+              <a:spcAft>
+                <a:spcPts val="200"/>
+              </a:spcAft>
+              <a:defRPr sz="1100" b="1">
+                <a:solidFill>
+                  <a:srgbClr val="0F172A"/>
+                </a:solidFill>
+              </a:defRPr>
+            </a:pPr>
+            <a:r>
+              <a:t>Commercial Risk Segmentation:</a:t>
+            </a:r>
+          </a:p>
+          <a:p>
+            <a:pPr>
+              <a:spcAft>
+                <a:spcPts val="300"/>
+              </a:spcAft>
+              <a:defRPr sz="950">
+                <a:solidFill>
+                  <a:srgbClr val="334155"/>
+                </a:solidFill>
+              </a:defRPr>
+            </a:pPr>
+            <a:r>
+              <a:t>• Prime Tier (Cluster 2): High credit (741.8) -&gt; lowest default rate (3.93%).</a:t>
+            </a:r>
+          </a:p>
+          <a:p>
+            <a:pPr>
+              <a:spcAft>
+                <a:spcPts val="300"/>
+              </a:spcAft>
+              <a:defRPr sz="950">
+                <a:solidFill>
+                  <a:srgbClr val="334155"/>
+                </a:solidFill>
+              </a:defRPr>
+            </a:pPr>
+            <a:r>
+              <a:t>• Standard Tier (Cluster 1): Long employment tenure (91.5 mos) -&gt; moderate default (12.38%).</a:t>
+            </a:r>
+          </a:p>
+          <a:p>
+            <a:pPr>
+              <a:spcAft>
+                <a:spcPts val="300"/>
+              </a:spcAft>
+              <a:defRPr sz="950">
+                <a:solidFill>
+                  <a:srgbClr val="334155"/>
+                </a:solidFill>
+              </a:defRPr>
+            </a:pPr>
+            <a:r>
+              <a:t>• Subprime Tier (Cluster 0): Short employment (27.0 mos) -&gt; default rate surges to 20.36% (5x higher than Prime).</a:t>
+            </a:r>
+          </a:p>
+          <a:p>
+            <a:pPr>
+              <a:spcAft>
+                <a:spcPts val="300"/>
+              </a:spcAft>
+              <a:defRPr sz="950">
+                <a:solidFill>
+                  <a:srgbClr val="334155"/>
+                </a:solidFill>
+              </a:defRPr>
+            </a:pPr>
+            <a:r>
+              <a:t>• Unsupervised validation: Segments default risk without using Default labels.</a:t>
+            </a:r>
+          </a:p>
+        </p:txBody>
+      </p:sp>
+      <p:sp>
+        <p:nvSpPr>
+          <p:cNvPr id="8" name="Rounded Rectangle 7"/>
           <p:cNvSpPr/>
           <p:nvPr/>
         </p:nvSpPr>
         <p:spPr>
           <a:xfrm>
-            <a:off x="731520" y="3840480"/>
-            <a:ext cx="5943600" cy="2560320"/>
+            <a:off x="6583680" y="1234440"/>
+            <a:ext cx="4876495" cy="5029200"/>
           </a:xfrm>
           <a:prstGeom prst="roundRect">
             <a:avLst/>
@@ -8008,7 +9012,7 @@
       </p:sp>
       <p:pic>
         <p:nvPicPr>
-          <p:cNvPr id="8" name="Picture 7" descr="cluster_scatter.png"/>
+          <p:cNvPr id="9" name="Picture 8" descr="cluster_scatter.png"/>
           <p:cNvPicPr>
             <a:picLocks noChangeAspect="1"/>
           </p:cNvPicPr>
@@ -8022,157 +9026,14 @@
         </p:blipFill>
         <p:spPr>
           <a:xfrm>
-            <a:off x="822960" y="3931920"/>
-            <a:ext cx="5760720" cy="4320540"/>
+            <a:off x="6675120" y="1371600"/>
+            <a:ext cx="4693615" cy="3520211"/>
           </a:xfrm>
           <a:prstGeom prst="rect">
             <a:avLst/>
           </a:prstGeom>
         </p:spPr>
       </p:pic>
-      <p:sp>
-        <p:nvSpPr>
-          <p:cNvPr id="9" name="Rounded Rectangle 8"/>
-          <p:cNvSpPr/>
-          <p:nvPr/>
-        </p:nvSpPr>
-        <p:spPr>
-          <a:xfrm>
-            <a:off x="6858000" y="3840480"/>
-            <a:ext cx="4602175" cy="2560320"/>
-          </a:xfrm>
-          <a:prstGeom prst="roundRect">
-            <a:avLst/>
-          </a:prstGeom>
-          <a:solidFill>
-            <a:srgbClr val="FFFFFF"/>
-          </a:solidFill>
-          <a:ln w="12700">
-            <a:solidFill>
-              <a:srgbClr val="E2E8F0"/>
-            </a:solidFill>
-          </a:ln>
-        </p:spPr>
-        <p:style>
-          <a:lnRef idx="1">
-            <a:schemeClr val="accent1"/>
-          </a:lnRef>
-          <a:fillRef idx="3">
-            <a:schemeClr val="accent1"/>
-          </a:fillRef>
-          <a:effectRef idx="2">
-            <a:schemeClr val="accent1"/>
-          </a:effectRef>
-          <a:fontRef idx="minor">
-            <a:schemeClr val="lt1"/>
-          </a:fontRef>
-        </p:style>
-        <p:txBody>
-          <a:bodyPr rtlCol="0" anchor="ctr"/>
-          <a:lstStyle/>
-          <a:p>
-            <a:pPr algn="ctr"/>
-          </a:p>
-        </p:txBody>
-      </p:sp>
-      <p:sp>
-        <p:nvSpPr>
-          <p:cNvPr id="10" name="TextBox 9"/>
-          <p:cNvSpPr txBox="1"/>
-          <p:nvPr/>
-        </p:nvSpPr>
-        <p:spPr>
-          <a:xfrm>
-            <a:off x="7040880" y="3977639"/>
-            <a:ext cx="4206240" cy="2286000"/>
-          </a:xfrm>
-          <a:prstGeom prst="rect">
-            <a:avLst/>
-          </a:prstGeom>
-          <a:noFill/>
-        </p:spPr>
-        <p:txBody>
-          <a:bodyPr wrap="square">
-            <a:spAutoFit/>
-          </a:bodyPr>
-          <a:lstStyle/>
-          <a:p>
-            <a:pPr>
-              <a:spcAft>
-                <a:spcPts val="800"/>
-              </a:spcAft>
-              <a:defRPr sz="1400" b="1">
-                <a:solidFill>
-                  <a:srgbClr val="0F172A"/>
-                </a:solidFill>
-              </a:defRPr>
-            </a:pPr>
-            <a:r>
-              <a:t>Profile Risk Insights:</a:t>
-            </a:r>
-          </a:p>
-          <a:p>
-            <a:pPr>
-              <a:spcAft>
-                <a:spcPts val="400"/>
-              </a:spcAft>
-              <a:defRPr sz="1000">
-                <a:solidFill>
-                  <a:srgbClr val="334155"/>
-                </a:solidFill>
-              </a:defRPr>
-            </a:pPr>
-            <a:r>
-              <a:t>• Cluster 2 (Prime): High credit score (741.8) results in only a 3.93% default rate.</a:t>
-            </a:r>
-          </a:p>
-          <a:p>
-            <a:pPr>
-              <a:spcAft>
-                <a:spcPts val="400"/>
-              </a:spcAft>
-              <a:defRPr sz="1000">
-                <a:solidFill>
-                  <a:srgbClr val="334155"/>
-                </a:solidFill>
-              </a:defRPr>
-            </a:pPr>
-            <a:r>
-              <a:t>• Cluster 1 (Standard): Mid-tier stability with long employment tenure (91.5 mos) and 12.38% default.</a:t>
-            </a:r>
-          </a:p>
-          <a:p>
-            <a:pPr>
-              <a:spcAft>
-                <a:spcPts val="400"/>
-              </a:spcAft>
-              <a:defRPr sz="1000">
-                <a:solidFill>
-                  <a:srgbClr val="334155"/>
-                </a:solidFill>
-              </a:defRPr>
-            </a:pPr>
-            <a:r>
-              <a:t>• Cluster 0 (Subprime): Short employment (27.0 mos) drives default to 20.36% (over 5x higher than Prime).</a:t>
-            </a:r>
-          </a:p>
-          <a:p>
-            <a:pPr>
-              <a:spcAft>
-                <a:spcPts val="400"/>
-              </a:spcAft>
-              <a:defRPr sz="1000">
-                <a:solidFill>
-                  <a:srgbClr val="334155"/>
-                </a:solidFill>
-              </a:defRPr>
-            </a:pPr>
-            <a:r>
-              <a:t>• PCA Projection confirms distinct spatial separation across financial leverage components.</a:t>
-            </a:r>
-          </a:p>
-        </p:txBody>
-      </p:sp>
     </p:spTree>
   </p:cSld>
   <p:clrMapOvr>
@@ -8250,8 +9111,8 @@
         </p:nvSpPr>
         <p:spPr>
           <a:xfrm>
-            <a:off x="731520" y="274320"/>
-            <a:ext cx="10698480" cy="274320"/>
+            <a:off x="731520" y="256032"/>
+            <a:ext cx="10698480" cy="256032"/>
           </a:xfrm>
           <a:prstGeom prst="rect">
             <a:avLst/>
@@ -8272,7 +9133,7 @@
               </a:defRPr>
             </a:pPr>
             <a:r>
-              <a:t>ACADEMIC REVIEW 2 | DWDM</a:t>
+              <a:t>CSI3010: DATA WAREHOUSING &amp; DATA MINING | REVIEW 2</a:t>
             </a:r>
           </a:p>
         </p:txBody>
@@ -8285,7 +9146,7 @@
         </p:nvSpPr>
         <p:spPr>
           <a:xfrm>
-            <a:off x="731520" y="530352"/>
+            <a:off x="731520" y="502920"/>
             <a:ext cx="10698480" cy="548640"/>
           </a:xfrm>
           <a:prstGeom prst="rect">
@@ -8300,14 +9161,14 @@
           <a:lstStyle/>
           <a:p>
             <a:pPr>
-              <a:defRPr sz="2200" b="1">
+              <a:defRPr sz="2100" b="1">
                 <a:solidFill>
                   <a:srgbClr val="0F172A"/>
                 </a:solidFill>
               </a:defRPr>
             </a:pPr>
             <a:r>
-              <a:t>Association Rule Mining: Methodology &amp; Metric Formulas</a:t>
+              <a:t>Association Rules: Discretization &amp; Apriori Algorithm Code</a:t>
             </a:r>
           </a:p>
         </p:txBody>
@@ -8320,18 +9181,18 @@
         </p:nvSpPr>
         <p:spPr>
           <a:xfrm>
-            <a:off x="731520" y="1280160"/>
-            <a:ext cx="5120640" cy="5029200"/>
+            <a:off x="731520" y="1234440"/>
+            <a:ext cx="5303520" cy="5120640"/>
           </a:xfrm>
           <a:prstGeom prst="roundRect">
             <a:avLst/>
           </a:prstGeom>
           <a:solidFill>
-            <a:srgbClr val="FFFFFF"/>
+            <a:srgbClr val="0F172A"/>
           </a:solidFill>
           <a:ln w="12700">
             <a:solidFill>
-              <a:srgbClr val="E2E8F0"/>
+              <a:srgbClr val="334155"/>
             </a:solidFill>
           </a:ln>
         </p:spPr>
@@ -8365,8 +9226,8 @@
         </p:nvSpPr>
         <p:spPr>
           <a:xfrm>
-            <a:off x="914400" y="1463040"/>
-            <a:ext cx="4754880" cy="4572000"/>
+            <a:off x="914400" y="1344168"/>
+            <a:ext cx="4937760" cy="274320"/>
           </a:xfrm>
           <a:prstGeom prst="rect">
             <a:avLst/>
@@ -8374,142 +9235,256 @@
           <a:noFill/>
         </p:spPr>
         <p:txBody>
-          <a:bodyPr wrap="square">
+          <a:bodyPr wrap="square" lIns="0" tIns="0" rIns="0" bIns="0">
             <a:spAutoFit/>
           </a:bodyPr>
           <a:lstStyle/>
           <a:p>
             <a:pPr>
-              <a:spcAft>
-                <a:spcPts val="1200"/>
-              </a:spcAft>
-              <a:defRPr sz="1600" b="1">
-                <a:solidFill>
-                  <a:srgbClr val="0F172A"/>
-                </a:solidFill>
-              </a:defRPr>
-            </a:pPr>
-            <a:r>
-              <a:t>Continuous Feature Discretization</a:t>
-            </a:r>
-          </a:p>
-          <a:p>
-            <a:pPr>
-              <a:spcAft>
-                <a:spcPts val="800"/>
-              </a:spcAft>
-              <a:defRPr sz="1100">
-                <a:solidFill>
-                  <a:srgbClr val="334155"/>
-                </a:solidFill>
-              </a:defRPr>
-            </a:pPr>
-            <a:r>
-              <a:t>• Income: Tertiles (Income=Low, Medium, High)</a:t>
-            </a:r>
-          </a:p>
-          <a:p>
-            <a:pPr>
-              <a:spcAft>
-                <a:spcPts val="800"/>
-              </a:spcAft>
-              <a:defRPr sz="1100">
-                <a:solidFill>
-                  <a:srgbClr val="334155"/>
-                </a:solidFill>
-              </a:defRPr>
-            </a:pPr>
-            <a:r>
-              <a:t>• Credit Score: Domain bands: Poor (&lt;580), Fair (580-670), Good (670-740), Excellent (&gt;740)</a:t>
-            </a:r>
-          </a:p>
-          <a:p>
-            <a:pPr>
-              <a:spcAft>
-                <a:spcPts val="800"/>
-              </a:spcAft>
-              <a:defRPr sz="1100">
-                <a:solidFill>
-                  <a:srgbClr val="334155"/>
-                </a:solidFill>
-              </a:defRPr>
-            </a:pPr>
-            <a:r>
-              <a:t>• Debt-to-Income (DTI): Low (&lt;0.30), Medium (0.30-0.50), High (&gt;0.50)</a:t>
-            </a:r>
-          </a:p>
-          <a:p>
-            <a:pPr>
-              <a:spcAft>
-                <a:spcPts val="800"/>
-              </a:spcAft>
-              <a:defRPr sz="1100">
-                <a:solidFill>
-                  <a:srgbClr val="334155"/>
-                </a:solidFill>
-              </a:defRPr>
-            </a:pPr>
-            <a:r>
-              <a:t>• Loan Amount: Tertiles (Small, Medium, Large)</a:t>
-            </a:r>
-          </a:p>
-          <a:p>
-            <a:pPr>
-              <a:spcAft>
-                <a:spcPts val="800"/>
-              </a:spcAft>
-              <a:defRPr sz="1100">
-                <a:solidFill>
-                  <a:srgbClr val="334155"/>
-                </a:solidFill>
-              </a:defRPr>
-            </a:pPr>
-            <a:r>
-              <a:t>• Co-Signer Status: CoSigner=Yes / CoSigner=No</a:t>
-            </a:r>
-          </a:p>
-          <a:p>
-            <a:pPr>
-              <a:spcAft>
-                <a:spcPts val="800"/>
-              </a:spcAft>
-              <a:defRPr sz="1100">
-                <a:solidFill>
-                  <a:srgbClr val="334155"/>
-                </a:solidFill>
-              </a:defRPr>
-            </a:pPr>
-            <a:r>
-              <a:t>• Employment Type: Full-time, Part-time, Self-employed, Unemployed</a:t>
-            </a:r>
-          </a:p>
-          <a:p>
-            <a:pPr>
-              <a:spcAft>
-                <a:spcPts val="800"/>
-              </a:spcAft>
-              <a:defRPr sz="1100">
-                <a:solidFill>
-                  <a:srgbClr val="334155"/>
-                </a:solidFill>
-              </a:defRPr>
-            </a:pPr>
-            <a:r>
-              <a:t>• Target Consequent: Explicitly filtered for Default=Yes</a:t>
-            </a:r>
-          </a:p>
-        </p:txBody>
-      </p:sp>
-      <p:sp>
-        <p:nvSpPr>
-          <p:cNvPr id="7" name="Rounded Rectangle 6"/>
+              <a:defRPr sz="950" b="1">
+                <a:solidFill>
+                  <a:srgbClr val="10B981"/>
+                </a:solidFill>
+              </a:defRPr>
+            </a:pPr>
+            <a:r>
+              <a:t>⚙  mine_rules.py</a:t>
+            </a:r>
+          </a:p>
+        </p:txBody>
+      </p:sp>
+      <p:sp>
+        <p:nvSpPr>
+          <p:cNvPr id="7" name="TextBox 6"/>
+          <p:cNvSpPr txBox="1"/>
+          <p:nvPr/>
+        </p:nvSpPr>
+        <p:spPr>
+          <a:xfrm>
+            <a:off x="914400" y="1645920"/>
+            <a:ext cx="4937760" cy="4617720"/>
+          </a:xfrm>
+          <a:prstGeom prst="rect">
+            <a:avLst/>
+          </a:prstGeom>
+          <a:noFill/>
+        </p:spPr>
+        <p:txBody>
+          <a:bodyPr wrap="square" lIns="0" tIns="0" rIns="0" bIns="0">
+            <a:spAutoFit/>
+          </a:bodyPr>
+          <a:lstStyle/>
+          <a:p>
+            <a:pPr>
+              <a:defRPr sz="850">
+                <a:solidFill>
+                  <a:srgbClr val="94A3B8"/>
+                </a:solidFill>
+                <a:latin typeface="Consolas"/>
+              </a:defRPr>
+            </a:pPr>
+            <a:r>
+              <a:t># association_rules/mine_rules.py</a:t>
+            </a:r>
+          </a:p>
+          <a:p>
+            <a:pPr>
+              <a:defRPr sz="850">
+                <a:solidFill>
+                  <a:srgbClr val="93C5FD"/>
+                </a:solidFill>
+                <a:latin typeface="Consolas"/>
+              </a:defRPr>
+            </a:pPr>
+            <a:r>
+              <a:t>from mlxtend.frequent_patterns import apriori, association_rules</a:t>
+            </a:r>
+          </a:p>
+          <a:p>
+            <a:pPr>
+              <a:defRPr sz="850">
+                <a:solidFill>
+                  <a:srgbClr val="F1F5F9"/>
+                </a:solidFill>
+                <a:latin typeface="Consolas"/>
+              </a:defRPr>
+            </a:pPr>
+          </a:p>
+          <a:p>
+            <a:pPr>
+              <a:defRPr sz="850">
+                <a:solidFill>
+                  <a:srgbClr val="94A3B8"/>
+                </a:solidFill>
+                <a:latin typeface="Consolas"/>
+              </a:defRPr>
+            </a:pPr>
+            <a:r>
+              <a:t># Continuous Discretization</a:t>
+            </a:r>
+          </a:p>
+          <a:p>
+            <a:pPr>
+              <a:defRPr sz="850">
+                <a:solidFill>
+                  <a:srgbClr val="F1F5F9"/>
+                </a:solidFill>
+                <a:latin typeface="Consolas"/>
+              </a:defRPr>
+            </a:pPr>
+            <a:r>
+              <a:t>df_disc['Income'] = pd.qcut(df['Income'], q=3, labels=['Low','Med','High'])</a:t>
+            </a:r>
+          </a:p>
+          <a:p>
+            <a:pPr>
+              <a:defRPr sz="850">
+                <a:solidFill>
+                  <a:srgbClr val="F1F5F9"/>
+                </a:solidFill>
+                <a:latin typeface="Consolas"/>
+              </a:defRPr>
+            </a:pPr>
+            <a:r>
+              <a:t>df_disc['CreditScore'] = pd.cut(df['CreditScore'], bins=[0,580,670,740,850])</a:t>
+            </a:r>
+          </a:p>
+          <a:p>
+            <a:pPr>
+              <a:defRPr sz="850">
+                <a:solidFill>
+                  <a:srgbClr val="F1F5F9"/>
+                </a:solidFill>
+                <a:latin typeface="Consolas"/>
+              </a:defRPr>
+            </a:pPr>
+            <a:r>
+              <a:t>df_disc['DTIRatio'] = pd.cut(df['DTIRatio'], bins=[0.0, 0.30, 0.50, 1.0])</a:t>
+            </a:r>
+          </a:p>
+          <a:p>
+            <a:pPr>
+              <a:defRPr sz="850">
+                <a:solidFill>
+                  <a:srgbClr val="F1F5F9"/>
+                </a:solidFill>
+                <a:latin typeface="Consolas"/>
+              </a:defRPr>
+            </a:pPr>
+            <a:r>
+              <a:t>df_encoded = pd.get_dummies(df_disc, prefix='', prefix_sep='')</a:t>
+            </a:r>
+          </a:p>
+          <a:p>
+            <a:pPr>
+              <a:defRPr sz="850">
+                <a:solidFill>
+                  <a:srgbClr val="F1F5F9"/>
+                </a:solidFill>
+                <a:latin typeface="Consolas"/>
+              </a:defRPr>
+            </a:pPr>
+          </a:p>
+          <a:p>
+            <a:pPr>
+              <a:defRPr sz="850">
+                <a:solidFill>
+                  <a:srgbClr val="94A3B8"/>
+                </a:solidFill>
+                <a:latin typeface="Consolas"/>
+              </a:defRPr>
+            </a:pPr>
+            <a:r>
+              <a:t># Apriori Frequent Itemset Mining</a:t>
+            </a:r>
+          </a:p>
+          <a:p>
+            <a:pPr>
+              <a:defRPr sz="850">
+                <a:solidFill>
+                  <a:srgbClr val="6EE7B7"/>
+                </a:solidFill>
+                <a:latin typeface="Consolas"/>
+              </a:defRPr>
+            </a:pPr>
+            <a:r>
+              <a:t>itemsets = apriori(df_encoded, min_support=0.03, use_colnames=True)</a:t>
+            </a:r>
+          </a:p>
+          <a:p>
+            <a:pPr>
+              <a:defRPr sz="850">
+                <a:solidFill>
+                  <a:srgbClr val="6EE7B7"/>
+                </a:solidFill>
+                <a:latin typeface="Consolas"/>
+              </a:defRPr>
+            </a:pPr>
+            <a:r>
+              <a:t>rules = association_rules(itemsets, metric='confidence', min_threshold=0.30)</a:t>
+            </a:r>
+          </a:p>
+          <a:p>
+            <a:pPr>
+              <a:defRPr sz="850">
+                <a:solidFill>
+                  <a:srgbClr val="F1F5F9"/>
+                </a:solidFill>
+                <a:latin typeface="Consolas"/>
+              </a:defRPr>
+            </a:pPr>
+          </a:p>
+          <a:p>
+            <a:pPr>
+              <a:defRPr sz="850">
+                <a:solidFill>
+                  <a:srgbClr val="94A3B8"/>
+                </a:solidFill>
+                <a:latin typeface="Consolas"/>
+              </a:defRPr>
+            </a:pPr>
+            <a:r>
+              <a:t># Filter for Default=Yes sorted by Lift</a:t>
+            </a:r>
+          </a:p>
+          <a:p>
+            <a:pPr>
+              <a:defRPr sz="850">
+                <a:solidFill>
+                  <a:srgbClr val="F1F5F9"/>
+                </a:solidFill>
+                <a:latin typeface="Consolas"/>
+              </a:defRPr>
+            </a:pPr>
+            <a:r>
+              <a:t>default_rules = rules[rules['consequents_str'].str.contains('Default=Yes')]</a:t>
+            </a:r>
+          </a:p>
+          <a:p>
+            <a:pPr>
+              <a:defRPr sz="850">
+                <a:solidFill>
+                  <a:srgbClr val="F1F5F9"/>
+                </a:solidFill>
+                <a:latin typeface="Consolas"/>
+              </a:defRPr>
+            </a:pPr>
+            <a:r>
+              <a:t>top_rules = default_rules.sort_values(by='lift', ascending=False)</a:t>
+            </a:r>
+          </a:p>
+        </p:txBody>
+      </p:sp>
+      <p:sp>
+        <p:nvSpPr>
+          <p:cNvPr id="8" name="Rounded Rectangle 7"/>
           <p:cNvSpPr/>
           <p:nvPr/>
         </p:nvSpPr>
         <p:spPr>
           <a:xfrm>
-            <a:off x="6217920" y="1280160"/>
-            <a:ext cx="5242255" cy="5029200"/>
+            <a:off x="6217920" y="1234440"/>
+            <a:ext cx="5242255" cy="5120640"/>
           </a:xfrm>
           <a:prstGeom prst="roundRect">
             <a:avLst/>
@@ -8547,14 +9522,14 @@
       </p:sp>
       <p:sp>
         <p:nvSpPr>
-          <p:cNvPr id="8" name="TextBox 7"/>
+          <p:cNvPr id="9" name="TextBox 8"/>
           <p:cNvSpPr txBox="1"/>
           <p:nvPr/>
         </p:nvSpPr>
         <p:spPr>
           <a:xfrm>
-            <a:off x="6400800" y="1463040"/>
-            <a:ext cx="4846320" cy="4572000"/>
+            <a:off x="6400800" y="1371600"/>
+            <a:ext cx="4846320" cy="4754880"/>
           </a:xfrm>
           <a:prstGeom prst="rect">
             <a:avLst/>
@@ -8569,24 +9544,24 @@
           <a:p>
             <a:pPr>
               <a:spcAft>
-                <a:spcPts val="1200"/>
-              </a:spcAft>
-              <a:defRPr sz="1600" b="1">
-                <a:solidFill>
-                  <a:srgbClr val="0F172A"/>
-                </a:solidFill>
-              </a:defRPr>
-            </a:pPr>
-            <a:r>
-              <a:t>Association Rule Formulas &amp; Meaning</a:t>
-            </a:r>
-          </a:p>
-          <a:p>
-            <a:pPr>
-              <a:spcAft>
                 <a:spcPts val="1000"/>
               </a:spcAft>
-              <a:defRPr sz="1100">
+              <a:defRPr sz="1400" b="1">
+                <a:solidFill>
+                  <a:srgbClr val="0F172A"/>
+                </a:solidFill>
+              </a:defRPr>
+            </a:pPr>
+            <a:r>
+              <a:t>Mathematical Metrics &amp; Mining Rules</a:t>
+            </a:r>
+          </a:p>
+          <a:p>
+            <a:pPr>
+              <a:spcAft>
+                <a:spcPts val="800"/>
+              </a:spcAft>
+              <a:defRPr sz="1000">
                 <a:solidFill>
                   <a:srgbClr val="334155"/>
                 </a:solidFill>
@@ -8597,92 +9572,84 @@
             </a:r>
             <a:br/>
             <a:r>
-              <a:t>   P(A and B)</a:t>
+              <a:t>  P(A and B)</a:t>
             </a:r>
             <a:br/>
             <a:r>
-              <a:t>Frequency of co-occurrence in the portfolio.</a:t>
+              <a:t>Frequency of co-occurrence in dataset (threshold = 3%).</a:t>
+            </a:r>
+          </a:p>
+          <a:p>
+            <a:pPr>
+              <a:spcAft>
+                <a:spcPts val="800"/>
+              </a:spcAft>
+              <a:defRPr sz="1000">
+                <a:solidFill>
+                  <a:srgbClr val="334155"/>
+                </a:solidFill>
+              </a:defRPr>
+            </a:pPr>
+            <a:r>
+              <a:t>• Confidence(A -&gt; B):</a:t>
             </a:r>
             <a:br/>
             <a:r>
-              <a:t>(Min threshold set to 0.03 = 3%)</a:t>
+              <a:t>  P(B | A) = Support(A and B) / Support(A)</a:t>
+            </a:r>
+            <a:br/>
+            <a:r>
+              <a:t>Probability of Default given borrower conditions (threshold = 30%).</a:t>
             </a:r>
           </a:p>
           <a:p>
             <a:pPr>
               <a:spcAft>
-                <a:spcPts val="1000"/>
+                <a:spcPts val="800"/>
               </a:spcAft>
-              <a:defRPr sz="1100">
+              <a:defRPr sz="1000">
                 <a:solidFill>
                   <a:srgbClr val="334155"/>
                 </a:solidFill>
               </a:defRPr>
             </a:pPr>
             <a:r>
-              <a:t>• Confidence(A -&gt; B):</a:t>
+              <a:t>• Lift(A -&gt; B):</a:t>
             </a:r>
             <a:br/>
             <a:r>
-              <a:t>   P(B | A) = Support(A and B) / Support(A)</a:t>
+              <a:t>  Confidence / P(B)</a:t>
             </a:r>
             <a:br/>
             <a:r>
-              <a:t>Conditional probability of Default given the borrower conditions.</a:t>
+              <a:t>Multiplier over baseline default rate (11.7%).</a:t>
             </a:r>
             <a:br/>
             <a:r>
-              <a:t>(Min threshold set to 0.30 = 30%)</a:t>
+              <a:t>• Lift &gt; 1: Strong positive risk indicator</a:t>
+            </a:r>
+            <a:br/>
+            <a:r>
+              <a:t>• Lift = 5.69: 5.7x more likely to default than random.</a:t>
             </a:r>
           </a:p>
           <a:p>
             <a:pPr>
               <a:spcAft>
-                <a:spcPts val="1000"/>
+                <a:spcPts val="800"/>
               </a:spcAft>
-              <a:defRPr sz="1100">
+              <a:defRPr sz="1000">
                 <a:solidFill>
                   <a:srgbClr val="334155"/>
                 </a:solidFill>
               </a:defRPr>
             </a:pPr>
             <a:r>
-              <a:t>• Lift(A -&gt; B):</a:t>
+              <a:t>• Consequent:</a:t>
             </a:r>
             <a:br/>
             <a:r>
-              <a:t>   Confidence / P(B)</a:t>
-            </a:r>
-            <a:br/>
-            <a:r>
-              <a:t>Measures how many times more likely Default is compared to random chance.</a:t>
-            </a:r>
-            <a:br/>
-            <a:r>
-              <a:t>• Lift = 1: Independent</a:t>
-            </a:r>
-            <a:br/>
-            <a:r>
-              <a:t>• Lift &gt; 1: Strong positive co-occurrence risk indicator</a:t>
-            </a:r>
-          </a:p>
-          <a:p>
-            <a:pPr>
-              <a:spcAft>
-                <a:spcPts val="1000"/>
-              </a:spcAft>
-              <a:defRPr sz="1100">
-                <a:solidFill>
-                  <a:srgbClr val="334155"/>
-                </a:solidFill>
-              </a:defRPr>
-            </a:pPr>
-            <a:r>
-              <a:t>• Institutional Impact:</a:t>
-            </a:r>
-            <a:br/>
-            <a:r>
-              <a:t>   Uncovers multi-condition risk combinations for credit rule engines and underwriting checklists.</a:t>
+              <a:t>  Explicitly targeted for Default=Yes to isolate toxic risk rules.</a:t>
             </a:r>
           </a:p>
         </p:txBody>
@@ -8764,8 +9731,8 @@
         </p:nvSpPr>
         <p:spPr>
           <a:xfrm>
-            <a:off x="731520" y="274320"/>
-            <a:ext cx="10698480" cy="274320"/>
+            <a:off x="731520" y="256032"/>
+            <a:ext cx="10698480" cy="256032"/>
           </a:xfrm>
           <a:prstGeom prst="rect">
             <a:avLst/>
@@ -8786,7 +9753,7 @@
               </a:defRPr>
             </a:pPr>
             <a:r>
-              <a:t>ACADEMIC REVIEW 2 | DWDM</a:t>
+              <a:t>CSI3010: DATA WAREHOUSING &amp; DATA MINING | REVIEW 2</a:t>
             </a:r>
           </a:p>
         </p:txBody>
@@ -8799,7 +9766,7 @@
         </p:nvSpPr>
         <p:spPr>
           <a:xfrm>
-            <a:off x="731520" y="530352"/>
+            <a:off x="731520" y="502920"/>
             <a:ext cx="10698480" cy="548640"/>
           </a:xfrm>
           <a:prstGeom prst="rect">
@@ -8814,14 +9781,14 @@
           <a:lstStyle/>
           <a:p>
             <a:pPr>
-              <a:defRPr sz="2200" b="1">
+              <a:defRPr sz="2100" b="1">
                 <a:solidFill>
                   <a:srgbClr val="0F172A"/>
                 </a:solidFill>
               </a:defRPr>
             </a:pPr>
             <a:r>
-              <a:t>Association Rules: Top Risk Patterns (Consequent: Default=Yes)</a:t>
+              <a:t>Association Rules: Pictorial Lift Chart &amp; Top Risk Patterns</a:t>
             </a:r>
           </a:p>
         </p:txBody>
@@ -8834,8 +9801,8 @@
         </p:nvSpPr>
         <p:spPr>
           <a:xfrm>
-            <a:off x="731520" y="1280160"/>
-            <a:ext cx="10728655" cy="3840480"/>
+            <a:off x="731520" y="1234440"/>
+            <a:ext cx="5943600" cy="5120640"/>
           </a:xfrm>
           <a:prstGeom prst="roundRect">
             <a:avLst/>
@@ -8871,776 +9838,30 @@
           </a:p>
         </p:txBody>
       </p:sp>
-      <p:graphicFrame>
-        <p:nvGraphicFramePr>
-          <p:cNvPr id="6" name="Table 5"/>
-          <p:cNvGraphicFramePr>
-            <a:graphicFrameLocks noGrp="1"/>
-          </p:cNvGraphicFramePr>
+      <p:pic>
+        <p:nvPicPr>
+          <p:cNvPr id="6" name="Picture 5" descr="rules_lift_chart.png"/>
+          <p:cNvPicPr>
+            <a:picLocks noChangeAspect="1"/>
+          </p:cNvPicPr>
           <p:nvPr/>
-        </p:nvGraphicFramePr>
-        <p:xfrm>
-          <a:off x="914400" y="1463040"/>
-          <a:ext cx="10362895" cy="3383280"/>
-        </p:xfrm>
-        <a:graphic>
-          <a:graphicData uri="http://schemas.openxmlformats.org/drawingml/2006/table">
-            <a:tbl>
-              <a:tblPr firstRow="1" bandRow="1">
-                <a:tableStyleId>{5C22544A-7EE6-4342-B048-85BDC9FD1C3A}</a:tableStyleId>
-              </a:tblPr>
-              <a:tblGrid>
-                <a:gridCol w="1727149"/>
-                <a:gridCol w="1727149"/>
-                <a:gridCol w="1727149"/>
-                <a:gridCol w="1727149"/>
-                <a:gridCol w="1727149"/>
-                <a:gridCol w="1727150"/>
-              </a:tblGrid>
-              <a:tr h="563880">
-                <a:tc>
-                  <a:txBody>
-                    <a:bodyPr/>
-                    <a:lstStyle/>
-                    <a:p>
-                      <a:pPr algn="ctr">
-                        <a:defRPr sz="1100" b="1">
-                          <a:solidFill>
-                            <a:srgbClr val="FFFFFF"/>
-                          </a:solidFill>
-                        </a:defRPr>
-                      </a:pPr>
-                      <a:r>
-                        <a:t>Rank</a:t>
-                      </a:r>
-                    </a:p>
-                  </a:txBody>
-                  <a:tcPr>
-                    <a:solidFill>
-                      <a:srgbClr val="0F172A"/>
-                    </a:solidFill>
-                  </a:tcPr>
-                </a:tc>
-                <a:tc>
-                  <a:txBody>
-                    <a:bodyPr/>
-                    <a:lstStyle/>
-                    <a:p>
-                      <a:pPr algn="ctr">
-                        <a:defRPr sz="1100" b="1">
-                          <a:solidFill>
-                            <a:srgbClr val="FFFFFF"/>
-                          </a:solidFill>
-                        </a:defRPr>
-                      </a:pPr>
-                      <a:r>
-                        <a:t>Antecedent Condition (IF...)</a:t>
-                      </a:r>
-                    </a:p>
-                  </a:txBody>
-                  <a:tcPr>
-                    <a:solidFill>
-                      <a:srgbClr val="0F172A"/>
-                    </a:solidFill>
-                  </a:tcPr>
-                </a:tc>
-                <a:tc>
-                  <a:txBody>
-                    <a:bodyPr/>
-                    <a:lstStyle/>
-                    <a:p>
-                      <a:pPr algn="ctr">
-                        <a:defRPr sz="1100" b="1">
-                          <a:solidFill>
-                            <a:srgbClr val="FFFFFF"/>
-                          </a:solidFill>
-                        </a:defRPr>
-                      </a:pPr>
-                      <a:r>
-                        <a:t>Consequent</a:t>
-                      </a:r>
-                    </a:p>
-                  </a:txBody>
-                  <a:tcPr>
-                    <a:solidFill>
-                      <a:srgbClr val="0F172A"/>
-                    </a:solidFill>
-                  </a:tcPr>
-                </a:tc>
-                <a:tc>
-                  <a:txBody>
-                    <a:bodyPr/>
-                    <a:lstStyle/>
-                    <a:p>
-                      <a:pPr algn="ctr">
-                        <a:defRPr sz="1100" b="1">
-                          <a:solidFill>
-                            <a:srgbClr val="FFFFFF"/>
-                          </a:solidFill>
-                        </a:defRPr>
-                      </a:pPr>
-                      <a:r>
-                        <a:t>Support</a:t>
-                      </a:r>
-                    </a:p>
-                  </a:txBody>
-                  <a:tcPr>
-                    <a:solidFill>
-                      <a:srgbClr val="0F172A"/>
-                    </a:solidFill>
-                  </a:tcPr>
-                </a:tc>
-                <a:tc>
-                  <a:txBody>
-                    <a:bodyPr/>
-                    <a:lstStyle/>
-                    <a:p>
-                      <a:pPr algn="ctr">
-                        <a:defRPr sz="1100" b="1">
-                          <a:solidFill>
-                            <a:srgbClr val="FFFFFF"/>
-                          </a:solidFill>
-                        </a:defRPr>
-                      </a:pPr>
-                      <a:r>
-                        <a:t>Confidence</a:t>
-                      </a:r>
-                    </a:p>
-                  </a:txBody>
-                  <a:tcPr>
-                    <a:solidFill>
-                      <a:srgbClr val="0F172A"/>
-                    </a:solidFill>
-                  </a:tcPr>
-                </a:tc>
-                <a:tc>
-                  <a:txBody>
-                    <a:bodyPr/>
-                    <a:lstStyle/>
-                    <a:p>
-                      <a:pPr algn="ctr">
-                        <a:defRPr sz="1100" b="1">
-                          <a:solidFill>
-                            <a:srgbClr val="FFFFFF"/>
-                          </a:solidFill>
-                        </a:defRPr>
-                      </a:pPr>
-                      <a:r>
-                        <a:t>Lift Ratio</a:t>
-                      </a:r>
-                    </a:p>
-                  </a:txBody>
-                  <a:tcPr>
-                    <a:solidFill>
-                      <a:srgbClr val="0F172A"/>
-                    </a:solidFill>
-                  </a:tcPr>
-                </a:tc>
-              </a:tr>
-              <a:tr h="563880">
-                <a:tc>
-                  <a:txBody>
-                    <a:bodyPr/>
-                    <a:lstStyle/>
-                    <a:p>
-                      <a:pPr algn="ctr">
-                        <a:defRPr sz="1000" b="1"/>
-                      </a:pPr>
-                      <a:r>
-                        <a:t>1</a:t>
-                      </a:r>
-                    </a:p>
-                  </a:txBody>
-                  <a:tcPr>
-                    <a:solidFill>
-                      <a:srgbClr val="EEF2FF"/>
-                    </a:solidFill>
-                  </a:tcPr>
-                </a:tc>
-                <a:tc>
-                  <a:txBody>
-                    <a:bodyPr/>
-                    <a:lstStyle/>
-                    <a:p>
-                      <a:pPr algn="l">
-                        <a:defRPr sz="1000" b="0"/>
-                      </a:pPr>
-                      <a:r>
-                        <a:t>Income=Low, CreditScore=Poor, LoanAmount=Large</a:t>
-                      </a:r>
-                    </a:p>
-                  </a:txBody>
-                  <a:tcPr>
-                    <a:solidFill>
-                      <a:srgbClr val="EEF2FF"/>
-                    </a:solidFill>
-                  </a:tcPr>
-                </a:tc>
-                <a:tc>
-                  <a:txBody>
-                    <a:bodyPr/>
-                    <a:lstStyle/>
-                    <a:p>
-                      <a:pPr algn="ctr">
-                        <a:defRPr sz="1000" b="0"/>
-                      </a:pPr>
-                      <a:r>
-                        <a:t>Default=Yes</a:t>
-                      </a:r>
-                    </a:p>
-                  </a:txBody>
-                  <a:tcPr>
-                    <a:solidFill>
-                      <a:srgbClr val="EEF2FF"/>
-                    </a:solidFill>
-                  </a:tcPr>
-                </a:tc>
-                <a:tc>
-                  <a:txBody>
-                    <a:bodyPr/>
-                    <a:lstStyle/>
-                    <a:p>
-                      <a:pPr algn="ctr">
-                        <a:defRPr sz="1000" b="0"/>
-                      </a:pPr>
-                      <a:r>
-                        <a:t>3.94%</a:t>
-                      </a:r>
-                    </a:p>
-                  </a:txBody>
-                  <a:tcPr>
-                    <a:solidFill>
-                      <a:srgbClr val="EEF2FF"/>
-                    </a:solidFill>
-                  </a:tcPr>
-                </a:tc>
-                <a:tc>
-                  <a:txBody>
-                    <a:bodyPr/>
-                    <a:lstStyle/>
-                    <a:p>
-                      <a:pPr algn="ctr">
-                        <a:defRPr sz="1000" b="1"/>
-                      </a:pPr>
-                      <a:r>
-                        <a:t>66.93%</a:t>
-                      </a:r>
-                    </a:p>
-                  </a:txBody>
-                  <a:tcPr>
-                    <a:solidFill>
-                      <a:srgbClr val="EEF2FF"/>
-                    </a:solidFill>
-                  </a:tcPr>
-                </a:tc>
-                <a:tc>
-                  <a:txBody>
-                    <a:bodyPr/>
-                    <a:lstStyle/>
-                    <a:p>
-                      <a:pPr algn="ctr">
-                        <a:defRPr sz="1000" b="1">
-                          <a:solidFill>
-                            <a:srgbClr val="2563EB"/>
-                          </a:solidFill>
-                        </a:defRPr>
-                      </a:pPr>
-                      <a:r>
-                        <a:t>5.69x</a:t>
-                      </a:r>
-                    </a:p>
-                  </a:txBody>
-                  <a:tcPr>
-                    <a:solidFill>
-                      <a:srgbClr val="EEF2FF"/>
-                    </a:solidFill>
-                  </a:tcPr>
-                </a:tc>
-              </a:tr>
-              <a:tr h="563880">
-                <a:tc>
-                  <a:txBody>
-                    <a:bodyPr/>
-                    <a:lstStyle/>
-                    <a:p>
-                      <a:pPr algn="ctr">
-                        <a:defRPr sz="1000" b="1"/>
-                      </a:pPr>
-                      <a:r>
-                        <a:t>2</a:t>
-                      </a:r>
-                    </a:p>
-                  </a:txBody>
-                  <a:tcPr>
-                    <a:solidFill>
-                      <a:srgbClr val="F1F5F9"/>
-                    </a:solidFill>
-                  </a:tcPr>
-                </a:tc>
-                <a:tc>
-                  <a:txBody>
-                    <a:bodyPr/>
-                    <a:lstStyle/>
-                    <a:p>
-                      <a:pPr algn="l">
-                        <a:defRPr sz="1000" b="0"/>
-                      </a:pPr>
-                      <a:r>
-                        <a:t>Income=Low, DTIRatio=High, LoanAmount=Large</a:t>
-                      </a:r>
-                    </a:p>
-                  </a:txBody>
-                  <a:tcPr>
-                    <a:solidFill>
-                      <a:srgbClr val="F1F5F9"/>
-                    </a:solidFill>
-                  </a:tcPr>
-                </a:tc>
-                <a:tc>
-                  <a:txBody>
-                    <a:bodyPr/>
-                    <a:lstStyle/>
-                    <a:p>
-                      <a:pPr algn="ctr">
-                        <a:defRPr sz="1000" b="0"/>
-                      </a:pPr>
-                      <a:r>
-                        <a:t>Default=Yes</a:t>
-                      </a:r>
-                    </a:p>
-                  </a:txBody>
-                  <a:tcPr>
-                    <a:solidFill>
-                      <a:srgbClr val="F1F5F9"/>
-                    </a:solidFill>
-                  </a:tcPr>
-                </a:tc>
-                <a:tc>
-                  <a:txBody>
-                    <a:bodyPr/>
-                    <a:lstStyle/>
-                    <a:p>
-                      <a:pPr algn="ctr">
-                        <a:defRPr sz="1000" b="0"/>
-                      </a:pPr>
-                      <a:r>
-                        <a:t>3.42%</a:t>
-                      </a:r>
-                    </a:p>
-                  </a:txBody>
-                  <a:tcPr>
-                    <a:solidFill>
-                      <a:srgbClr val="F1F5F9"/>
-                    </a:solidFill>
-                  </a:tcPr>
-                </a:tc>
-                <a:tc>
-                  <a:txBody>
-                    <a:bodyPr/>
-                    <a:lstStyle/>
-                    <a:p>
-                      <a:pPr algn="ctr">
-                        <a:defRPr sz="1000" b="1"/>
-                      </a:pPr>
-                      <a:r>
-                        <a:t>60.64%</a:t>
-                      </a:r>
-                    </a:p>
-                  </a:txBody>
-                  <a:tcPr>
-                    <a:solidFill>
-                      <a:srgbClr val="F1F5F9"/>
-                    </a:solidFill>
-                  </a:tcPr>
-                </a:tc>
-                <a:tc>
-                  <a:txBody>
-                    <a:bodyPr/>
-                    <a:lstStyle/>
-                    <a:p>
-                      <a:pPr algn="ctr">
-                        <a:defRPr sz="1000" b="1">
-                          <a:solidFill>
-                            <a:srgbClr val="2563EB"/>
-                          </a:solidFill>
-                        </a:defRPr>
-                      </a:pPr>
-                      <a:r>
-                        <a:t>5.16x</a:t>
-                      </a:r>
-                    </a:p>
-                  </a:txBody>
-                  <a:tcPr>
-                    <a:solidFill>
-                      <a:srgbClr val="F1F5F9"/>
-                    </a:solidFill>
-                  </a:tcPr>
-                </a:tc>
-              </a:tr>
-              <a:tr h="563880">
-                <a:tc>
-                  <a:txBody>
-                    <a:bodyPr/>
-                    <a:lstStyle/>
-                    <a:p>
-                      <a:pPr algn="ctr">
-                        <a:defRPr sz="1000" b="1"/>
-                      </a:pPr>
-                      <a:r>
-                        <a:t>3</a:t>
-                      </a:r>
-                    </a:p>
-                  </a:txBody>
-                  <a:tcPr>
-                    <a:solidFill>
-                      <a:srgbClr val="FFFFFF"/>
-                    </a:solidFill>
-                  </a:tcPr>
-                </a:tc>
-                <a:tc>
-                  <a:txBody>
-                    <a:bodyPr/>
-                    <a:lstStyle/>
-                    <a:p>
-                      <a:pPr algn="l">
-                        <a:defRPr sz="1000" b="0"/>
-                      </a:pPr>
-                      <a:r>
-                        <a:t>CreditScore=Poor, Income=Low, CoSigner=No, DTIRatio=High</a:t>
-                      </a:r>
-                    </a:p>
-                  </a:txBody>
-                  <a:tcPr>
-                    <a:solidFill>
-                      <a:srgbClr val="FFFFFF"/>
-                    </a:solidFill>
-                  </a:tcPr>
-                </a:tc>
-                <a:tc>
-                  <a:txBody>
-                    <a:bodyPr/>
-                    <a:lstStyle/>
-                    <a:p>
-                      <a:pPr algn="ctr">
-                        <a:defRPr sz="1000" b="0"/>
-                      </a:pPr>
-                      <a:r>
-                        <a:t>Default=Yes</a:t>
-                      </a:r>
-                    </a:p>
-                  </a:txBody>
-                  <a:tcPr>
-                    <a:solidFill>
-                      <a:srgbClr val="FFFFFF"/>
-                    </a:solidFill>
-                  </a:tcPr>
-                </a:tc>
-                <a:tc>
-                  <a:txBody>
-                    <a:bodyPr/>
-                    <a:lstStyle/>
-                    <a:p>
-                      <a:pPr algn="ctr">
-                        <a:defRPr sz="1000" b="0"/>
-                      </a:pPr>
-                      <a:r>
-                        <a:t>3.36%</a:t>
-                      </a:r>
-                    </a:p>
-                  </a:txBody>
-                  <a:tcPr>
-                    <a:solidFill>
-                      <a:srgbClr val="FFFFFF"/>
-                    </a:solidFill>
-                  </a:tcPr>
-                </a:tc>
-                <a:tc>
-                  <a:txBody>
-                    <a:bodyPr/>
-                    <a:lstStyle/>
-                    <a:p>
-                      <a:pPr algn="ctr">
-                        <a:defRPr sz="1000" b="1"/>
-                      </a:pPr>
-                      <a:r>
-                        <a:t>54.49%</a:t>
-                      </a:r>
-                    </a:p>
-                  </a:txBody>
-                  <a:tcPr>
-                    <a:solidFill>
-                      <a:srgbClr val="FFFFFF"/>
-                    </a:solidFill>
-                  </a:tcPr>
-                </a:tc>
-                <a:tc>
-                  <a:txBody>
-                    <a:bodyPr/>
-                    <a:lstStyle/>
-                    <a:p>
-                      <a:pPr algn="ctr">
-                        <a:defRPr sz="1000" b="1">
-                          <a:solidFill>
-                            <a:srgbClr val="2563EB"/>
-                          </a:solidFill>
-                        </a:defRPr>
-                      </a:pPr>
-                      <a:r>
-                        <a:t>4.64x</a:t>
-                      </a:r>
-                    </a:p>
-                  </a:txBody>
-                  <a:tcPr>
-                    <a:solidFill>
-                      <a:srgbClr val="FFFFFF"/>
-                    </a:solidFill>
-                  </a:tcPr>
-                </a:tc>
-              </a:tr>
-              <a:tr h="563880">
-                <a:tc>
-                  <a:txBody>
-                    <a:bodyPr/>
-                    <a:lstStyle/>
-                    <a:p>
-                      <a:pPr algn="ctr">
-                        <a:defRPr sz="1000" b="1"/>
-                      </a:pPr>
-                      <a:r>
-                        <a:t>4</a:t>
-                      </a:r>
-                    </a:p>
-                  </a:txBody>
-                  <a:tcPr>
-                    <a:solidFill>
-                      <a:srgbClr val="F1F5F9"/>
-                    </a:solidFill>
-                  </a:tcPr>
-                </a:tc>
-                <a:tc>
-                  <a:txBody>
-                    <a:bodyPr/>
-                    <a:lstStyle/>
-                    <a:p>
-                      <a:pPr algn="l">
-                        <a:defRPr sz="1000" b="0"/>
-                      </a:pPr>
-                      <a:r>
-                        <a:t>Income=Low, CoSigner=No, LoanAmount=Large</a:t>
-                      </a:r>
-                    </a:p>
-                  </a:txBody>
-                  <a:tcPr>
-                    <a:solidFill>
-                      <a:srgbClr val="F1F5F9"/>
-                    </a:solidFill>
-                  </a:tcPr>
-                </a:tc>
-                <a:tc>
-                  <a:txBody>
-                    <a:bodyPr/>
-                    <a:lstStyle/>
-                    <a:p>
-                      <a:pPr algn="ctr">
-                        <a:defRPr sz="1000" b="0"/>
-                      </a:pPr>
-                      <a:r>
-                        <a:t>Default=Yes</a:t>
-                      </a:r>
-                    </a:p>
-                  </a:txBody>
-                  <a:tcPr>
-                    <a:solidFill>
-                      <a:srgbClr val="F1F5F9"/>
-                    </a:solidFill>
-                  </a:tcPr>
-                </a:tc>
-                <a:tc>
-                  <a:txBody>
-                    <a:bodyPr/>
-                    <a:lstStyle/>
-                    <a:p>
-                      <a:pPr algn="ctr">
-                        <a:defRPr sz="1000" b="0"/>
-                      </a:pPr>
-                      <a:r>
-                        <a:t>4.19%</a:t>
-                      </a:r>
-                    </a:p>
-                  </a:txBody>
-                  <a:tcPr>
-                    <a:solidFill>
-                      <a:srgbClr val="F1F5F9"/>
-                    </a:solidFill>
-                  </a:tcPr>
-                </a:tc>
-                <a:tc>
-                  <a:txBody>
-                    <a:bodyPr/>
-                    <a:lstStyle/>
-                    <a:p>
-                      <a:pPr algn="ctr">
-                        <a:defRPr sz="1000" b="1"/>
-                      </a:pPr>
-                      <a:r>
-                        <a:t>52.46%</a:t>
-                      </a:r>
-                    </a:p>
-                  </a:txBody>
-                  <a:tcPr>
-                    <a:solidFill>
-                      <a:srgbClr val="F1F5F9"/>
-                    </a:solidFill>
-                  </a:tcPr>
-                </a:tc>
-                <a:tc>
-                  <a:txBody>
-                    <a:bodyPr/>
-                    <a:lstStyle/>
-                    <a:p>
-                      <a:pPr algn="ctr">
-                        <a:defRPr sz="1000" b="1">
-                          <a:solidFill>
-                            <a:srgbClr val="2563EB"/>
-                          </a:solidFill>
-                        </a:defRPr>
-                      </a:pPr>
-                      <a:r>
-                        <a:t>4.46x</a:t>
-                      </a:r>
-                    </a:p>
-                  </a:txBody>
-                  <a:tcPr>
-                    <a:solidFill>
-                      <a:srgbClr val="F1F5F9"/>
-                    </a:solidFill>
-                  </a:tcPr>
-                </a:tc>
-              </a:tr>
-              <a:tr h="563880">
-                <a:tc>
-                  <a:txBody>
-                    <a:bodyPr/>
-                    <a:lstStyle/>
-                    <a:p>
-                      <a:pPr algn="ctr">
-                        <a:defRPr sz="1000" b="1"/>
-                      </a:pPr>
-                      <a:r>
-                        <a:t>5</a:t>
-                      </a:r>
-                    </a:p>
-                  </a:txBody>
-                  <a:tcPr>
-                    <a:solidFill>
-                      <a:srgbClr val="FFFFFF"/>
-                    </a:solidFill>
-                  </a:tcPr>
-                </a:tc>
-                <a:tc>
-                  <a:txBody>
-                    <a:bodyPr/>
-                    <a:lstStyle/>
-                    <a:p>
-                      <a:pPr algn="l">
-                        <a:defRPr sz="1000" b="0"/>
-                      </a:pPr>
-                      <a:r>
-                        <a:t>Income=Low, CreditScore=Poor, DTIRatio=High</a:t>
-                      </a:r>
-                    </a:p>
-                  </a:txBody>
-                  <a:tcPr>
-                    <a:solidFill>
-                      <a:srgbClr val="FFFFFF"/>
-                    </a:solidFill>
-                  </a:tcPr>
-                </a:tc>
-                <a:tc>
-                  <a:txBody>
-                    <a:bodyPr/>
-                    <a:lstStyle/>
-                    <a:p>
-                      <a:pPr algn="ctr">
-                        <a:defRPr sz="1000" b="0"/>
-                      </a:pPr>
-                      <a:r>
-                        <a:t>Default=Yes</a:t>
-                      </a:r>
-                    </a:p>
-                  </a:txBody>
-                  <a:tcPr>
-                    <a:solidFill>
-                      <a:srgbClr val="FFFFFF"/>
-                    </a:solidFill>
-                  </a:tcPr>
-                </a:tc>
-                <a:tc>
-                  <a:txBody>
-                    <a:bodyPr/>
-                    <a:lstStyle/>
-                    <a:p>
-                      <a:pPr algn="ctr">
-                        <a:defRPr sz="1000" b="0"/>
-                      </a:pPr>
-                      <a:r>
-                        <a:t>4.43%</a:t>
-                      </a:r>
-                    </a:p>
-                  </a:txBody>
-                  <a:tcPr>
-                    <a:solidFill>
-                      <a:srgbClr val="FFFFFF"/>
-                    </a:solidFill>
-                  </a:tcPr>
-                </a:tc>
-                <a:tc>
-                  <a:txBody>
-                    <a:bodyPr/>
-                    <a:lstStyle/>
-                    <a:p>
-                      <a:pPr algn="ctr">
-                        <a:defRPr sz="1000" b="1"/>
-                      </a:pPr>
-                      <a:r>
-                        <a:t>50.15%</a:t>
-                      </a:r>
-                    </a:p>
-                  </a:txBody>
-                  <a:tcPr>
-                    <a:solidFill>
-                      <a:srgbClr val="FFFFFF"/>
-                    </a:solidFill>
-                  </a:tcPr>
-                </a:tc>
-                <a:tc>
-                  <a:txBody>
-                    <a:bodyPr/>
-                    <a:lstStyle/>
-                    <a:p>
-                      <a:pPr algn="ctr">
-                        <a:defRPr sz="1000" b="1">
-                          <a:solidFill>
-                            <a:srgbClr val="2563EB"/>
-                          </a:solidFill>
-                        </a:defRPr>
-                      </a:pPr>
-                      <a:r>
-                        <a:t>4.27x</a:t>
-                      </a:r>
-                    </a:p>
-                  </a:txBody>
-                  <a:tcPr>
-                    <a:solidFill>
-                      <a:srgbClr val="FFFFFF"/>
-                    </a:solidFill>
-                  </a:tcPr>
-                </a:tc>
-              </a:tr>
-            </a:tbl>
-          </a:graphicData>
-        </a:graphic>
-      </p:graphicFrame>
+        </p:nvPicPr>
+        <p:blipFill>
+          <a:blip r:embed="rId2"/>
+          <a:stretch>
+            <a:fillRect/>
+          </a:stretch>
+        </p:blipFill>
+        <p:spPr>
+          <a:xfrm>
+            <a:off x="822960" y="1325880"/>
+            <a:ext cx="5760720" cy="3168396"/>
+          </a:xfrm>
+          <a:prstGeom prst="rect">
+            <a:avLst/>
+          </a:prstGeom>
+        </p:spPr>
+      </p:pic>
       <p:sp>
         <p:nvSpPr>
           <p:cNvPr id="7" name="Rounded Rectangle 6"/>
@@ -9649,18 +9870,18 @@
         </p:nvSpPr>
         <p:spPr>
           <a:xfrm>
-            <a:off x="731520" y="5303520"/>
-            <a:ext cx="10728655" cy="1097280"/>
+            <a:off x="6858000" y="1234440"/>
+            <a:ext cx="4602175" cy="5120640"/>
           </a:xfrm>
           <a:prstGeom prst="roundRect">
             <a:avLst/>
           </a:prstGeom>
           <a:solidFill>
-            <a:srgbClr val="FEF2F2"/>
+            <a:srgbClr val="FFFFFF"/>
           </a:solidFill>
           <a:ln w="12700">
             <a:solidFill>
-              <a:srgbClr val="F43F5E"/>
+              <a:srgbClr val="E2E8F0"/>
             </a:solidFill>
           </a:ln>
         </p:spPr>
@@ -9694,8 +9915,8 @@
         </p:nvSpPr>
         <p:spPr>
           <a:xfrm>
-            <a:off x="914400" y="5349240"/>
-            <a:ext cx="10362895" cy="1005840"/>
+            <a:off x="6995160" y="1371600"/>
+            <a:ext cx="4297680" cy="4754880"/>
           </a:xfrm>
           <a:prstGeom prst="rect">
             <a:avLst/>
@@ -9709,50 +9930,152 @@
           <a:lstStyle/>
           <a:p>
             <a:pPr>
-              <a:defRPr sz="1200" b="1">
+              <a:spcAft>
+                <a:spcPts val="800"/>
+              </a:spcAft>
+              <a:defRPr sz="1300" b="1">
+                <a:solidFill>
+                  <a:srgbClr val="0F172A"/>
+                </a:solidFill>
+              </a:defRPr>
+            </a:pPr>
+            <a:r>
+              <a:t>Top Mined Rules (Ranked by Lift)</a:t>
+            </a:r>
+          </a:p>
+          <a:p>
+            <a:pPr>
+              <a:defRPr sz="950" b="1">
+                <a:solidFill>
+                  <a:srgbClr val="2563EB"/>
+                </a:solidFill>
+              </a:defRPr>
+            </a:pPr>
+            <a:r>
+              <a:t>• Rule 1 (Lift = 5.69x | Conf = 66.93%):</a:t>
+            </a:r>
+          </a:p>
+          <a:p>
+            <a:pPr>
+              <a:spcAft>
+                <a:spcPts val="500"/>
+              </a:spcAft>
+              <a:defRPr sz="900">
+                <a:solidFill>
+                  <a:srgbClr val="334155"/>
+                </a:solidFill>
+              </a:defRPr>
+            </a:pPr>
+            <a:r>
+              <a:t>  Income=Low, CreditScore=Poor, LoanAmount=Large -&gt; Default=Yes</a:t>
+            </a:r>
+          </a:p>
+          <a:p>
+            <a:pPr>
+              <a:defRPr sz="950" b="1">
+                <a:solidFill>
+                  <a:srgbClr val="2563EB"/>
+                </a:solidFill>
+              </a:defRPr>
+            </a:pPr>
+            <a:r>
+              <a:t>• Rule 2 (Lift = 5.16x | Conf = 60.64%):</a:t>
+            </a:r>
+          </a:p>
+          <a:p>
+            <a:pPr>
+              <a:spcAft>
+                <a:spcPts val="500"/>
+              </a:spcAft>
+              <a:defRPr sz="900">
+                <a:solidFill>
+                  <a:srgbClr val="334155"/>
+                </a:solidFill>
+              </a:defRPr>
+            </a:pPr>
+            <a:r>
+              <a:t>  Income=Low, DTIRatio=High, LoanAmount=Large -&gt; Default=Yes</a:t>
+            </a:r>
+          </a:p>
+          <a:p>
+            <a:pPr>
+              <a:defRPr sz="950" b="1">
+                <a:solidFill>
+                  <a:srgbClr val="2563EB"/>
+                </a:solidFill>
+              </a:defRPr>
+            </a:pPr>
+            <a:r>
+              <a:t>• Rule 3 (Lift = 4.64x | Conf = 54.49%):</a:t>
+            </a:r>
+          </a:p>
+          <a:p>
+            <a:pPr>
+              <a:spcAft>
+                <a:spcPts val="500"/>
+              </a:spcAft>
+              <a:defRPr sz="900">
+                <a:solidFill>
+                  <a:srgbClr val="334155"/>
+                </a:solidFill>
+              </a:defRPr>
+            </a:pPr>
+            <a:r>
+              <a:t>  CreditScore=Poor, Income=Low, CoSigner=No, DTIRatio=High -&gt; Default=Yes</a:t>
+            </a:r>
+          </a:p>
+          <a:p>
+            <a:pPr>
+              <a:defRPr sz="950" b="1">
+                <a:solidFill>
+                  <a:srgbClr val="2563EB"/>
+                </a:solidFill>
+              </a:defRPr>
+            </a:pPr>
+            <a:r>
+              <a:t>• Rule 4 (Lift = 4.46x | Conf = 52.46%):</a:t>
+            </a:r>
+          </a:p>
+          <a:p>
+            <a:pPr>
+              <a:spcAft>
+                <a:spcPts val="500"/>
+              </a:spcAft>
+              <a:defRPr sz="900">
+                <a:solidFill>
+                  <a:srgbClr val="334155"/>
+                </a:solidFill>
+              </a:defRPr>
+            </a:pPr>
+            <a:r>
+              <a:t>  Income=Low, CoSigner=No, LoanAmount=Large -&gt; Default=Yes</a:t>
+            </a:r>
+          </a:p>
+          <a:p>
+            <a:pPr>
+              <a:defRPr sz="950" b="1">
                 <a:solidFill>
                   <a:srgbClr val="BE123C"/>
                 </a:solidFill>
               </a:defRPr>
             </a:pPr>
             <a:r>
-              <a:t>Key Underwriting Insights:</a:t>
-            </a:r>
-          </a:p>
-          <a:p>
-            <a:pPr>
-              <a:defRPr sz="1000">
+              <a:t>• Key Finding:</a:t>
+            </a:r>
+          </a:p>
+          <a:p>
+            <a:pPr>
+              <a:spcAft>
+                <a:spcPts val="500"/>
+              </a:spcAft>
+              <a:defRPr sz="900">
                 <a:solidFill>
                   <a:srgbClr val="334155"/>
                 </a:solidFill>
               </a:defRPr>
             </a:pPr>
             <a:r>
-              <a:t>• Toxic Combination: Low Income + Poor Credit + Large Loan Amount increases default rate to 66.93% (5.69x baseline risk).</a:t>
-            </a:r>
-          </a:p>
-          <a:p>
-            <a:pPr>
-              <a:defRPr sz="1000">
-                <a:solidFill>
-                  <a:srgbClr val="334155"/>
-                </a:solidFill>
-              </a:defRPr>
-            </a:pPr>
-            <a:r>
-              <a:t>• Co-Signer Impact: Absence of a co-signer under high DTI drives default confidence to 54.49% (Lift = 4.64x).</a:t>
-            </a:r>
-          </a:p>
-          <a:p>
-            <a:pPr>
-              <a:defRPr sz="1000">
-                <a:solidFill>
-                  <a:srgbClr val="334155"/>
-                </a:solidFill>
-              </a:defRPr>
-            </a:pPr>
-            <a:r>
-              <a:t>• Policy Action: Loans matching Top 3 rules should be automatically flagged for mandatory collateral or outright decline.</a:t>
+              <a:t>  Subprime credit combined with large loan size and absence of a co-signer multiplies default risk by 4.6x to 5.7x over baseline.</a:t>
             </a:r>
           </a:p>
         </p:txBody>
@@ -9834,8 +10157,8 @@
         </p:nvSpPr>
         <p:spPr>
           <a:xfrm>
-            <a:off x="731520" y="274320"/>
-            <a:ext cx="10698480" cy="274320"/>
+            <a:off x="731520" y="256032"/>
+            <a:ext cx="10698480" cy="256032"/>
           </a:xfrm>
           <a:prstGeom prst="rect">
             <a:avLst/>
@@ -9856,7 +10179,7 @@
               </a:defRPr>
             </a:pPr>
             <a:r>
-              <a:t>ACADEMIC REVIEW 2 | DWDM</a:t>
+              <a:t>CSI3010: DATA WAREHOUSING &amp; DATA MINING | REVIEW 2</a:t>
             </a:r>
           </a:p>
         </p:txBody>
@@ -9869,7 +10192,7 @@
         </p:nvSpPr>
         <p:spPr>
           <a:xfrm>
-            <a:off x="731520" y="530352"/>
+            <a:off x="731520" y="502920"/>
             <a:ext cx="10698480" cy="548640"/>
           </a:xfrm>
           <a:prstGeom prst="rect">
@@ -9884,14 +10207,14 @@
           <a:lstStyle/>
           <a:p>
             <a:pPr>
-              <a:defRPr sz="2200" b="1">
+              <a:defRPr sz="2100" b="1">
                 <a:solidFill>
                   <a:srgbClr val="0F172A"/>
                 </a:solidFill>
               </a:defRPr>
             </a:pPr>
             <a:r>
-              <a:t>Prediction Engine: Continuous Default Probability Scoring</a:t>
+              <a:t>Prediction Engine: Continuous Scoring Code &amp; Policy Tiers</a:t>
             </a:r>
           </a:p>
         </p:txBody>
@@ -9904,18 +10227,18 @@
         </p:nvSpPr>
         <p:spPr>
           <a:xfrm>
-            <a:off x="731520" y="1280160"/>
-            <a:ext cx="5486400" cy="5029200"/>
+            <a:off x="731520" y="1234440"/>
+            <a:ext cx="4754880" cy="5120640"/>
           </a:xfrm>
           <a:prstGeom prst="roundRect">
             <a:avLst/>
           </a:prstGeom>
           <a:solidFill>
-            <a:srgbClr val="FFFFFF"/>
+            <a:srgbClr val="0F172A"/>
           </a:solidFill>
           <a:ln w="12700">
             <a:solidFill>
-              <a:srgbClr val="E2E8F0"/>
+              <a:srgbClr val="334155"/>
             </a:solidFill>
           </a:ln>
         </p:spPr>
@@ -9949,8 +10272,8 @@
         </p:nvSpPr>
         <p:spPr>
           <a:xfrm>
-            <a:off x="914400" y="1463040"/>
-            <a:ext cx="5120640" cy="4572000"/>
+            <a:off x="914400" y="1344168"/>
+            <a:ext cx="4389120" cy="274320"/>
           </a:xfrm>
           <a:prstGeom prst="rect">
             <a:avLst/>
@@ -9958,155 +10281,288 @@
           <a:noFill/>
         </p:spPr>
         <p:txBody>
-          <a:bodyPr wrap="square">
+          <a:bodyPr wrap="square" lIns="0" tIns="0" rIns="0" bIns="0">
             <a:spAutoFit/>
           </a:bodyPr>
           <a:lstStyle/>
           <a:p>
             <a:pPr>
-              <a:spcAft>
-                <a:spcPts val="1200"/>
-              </a:spcAft>
-              <a:defRPr sz="1600" b="1">
-                <a:solidFill>
-                  <a:srgbClr val="0F172A"/>
-                </a:solidFill>
-              </a:defRPr>
-            </a:pPr>
-            <a:r>
-              <a:t>4-Tier Credit Risk Policy Matrix</a:t>
-            </a:r>
-          </a:p>
-          <a:p>
-            <a:pPr>
-              <a:defRPr sz="1100" b="1">
+              <a:defRPr sz="950" b="1">
                 <a:solidFill>
                   <a:srgbClr val="10B981"/>
                 </a:solidFill>
               </a:defRPr>
             </a:pPr>
             <a:r>
-              <a:t>• Low Risk (P &lt; 20%):</a:t>
-            </a:r>
-          </a:p>
-          <a:p>
-            <a:pPr>
-              <a:spcAft>
-                <a:spcPts val="800"/>
-              </a:spcAft>
-              <a:defRPr sz="1000">
-                <a:solidFill>
-                  <a:srgbClr val="334155"/>
-                </a:solidFill>
-              </a:defRPr>
-            </a:pPr>
-            <a:r>
-              <a:t>    Fast-track approval; Prime interest rate (4.5% - 7.5% APR).</a:t>
-            </a:r>
-          </a:p>
-          <a:p>
-            <a:pPr>
-              <a:defRPr sz="1100" b="1">
-                <a:solidFill>
-                  <a:srgbClr val="2563EB"/>
-                </a:solidFill>
-              </a:defRPr>
-            </a:pPr>
-            <a:r>
-              <a:t>• Moderate Risk (20% &lt;= P &lt; 45%):</a:t>
-            </a:r>
-          </a:p>
-          <a:p>
-            <a:pPr>
-              <a:spcAft>
-                <a:spcPts val="800"/>
-              </a:spcAft>
-              <a:defRPr sz="1000">
-                <a:solidFill>
-                  <a:srgbClr val="334155"/>
-                </a:solidFill>
-              </a:defRPr>
-            </a:pPr>
-            <a:r>
-              <a:t>    Standard review; income verification required (8.0% - 13.5% APR).</a:t>
-            </a:r>
-          </a:p>
-          <a:p>
-            <a:pPr>
-              <a:defRPr sz="1100" b="1">
-                <a:solidFill>
-                  <a:srgbClr val="D97706"/>
-                </a:solidFill>
-              </a:defRPr>
-            </a:pPr>
-            <a:r>
-              <a:t>• High Risk (45% &lt;= P &lt; 70%):</a:t>
-            </a:r>
-          </a:p>
-          <a:p>
-            <a:pPr>
-              <a:spcAft>
-                <a:spcPts val="800"/>
-              </a:spcAft>
-              <a:defRPr sz="1000">
-                <a:solidFill>
-                  <a:srgbClr val="334155"/>
-                </a:solidFill>
-              </a:defRPr>
-            </a:pPr>
-            <a:r>
-              <a:t>    Conditional approval; mandatory co-signer and collateral required.</a:t>
-            </a:r>
-          </a:p>
-          <a:p>
-            <a:pPr>
-              <a:defRPr sz="1100" b="1">
-                <a:solidFill>
-                  <a:srgbClr val="E11D48"/>
-                </a:solidFill>
-              </a:defRPr>
-            </a:pPr>
-            <a:r>
-              <a:t>• Critical Risk (P &gt;= 70%):</a:t>
-            </a:r>
-          </a:p>
-          <a:p>
-            <a:pPr>
-              <a:spcAft>
-                <a:spcPts val="800"/>
-              </a:spcAft>
-              <a:defRPr sz="1000">
-                <a:solidFill>
-                  <a:srgbClr val="334155"/>
-                </a:solidFill>
-              </a:defRPr>
-            </a:pPr>
-            <a:r>
-              <a:t>    Automated decline; risk exceeds institutional lending appetite.</a:t>
-            </a:r>
-          </a:p>
-        </p:txBody>
-      </p:sp>
-      <p:sp>
-        <p:nvSpPr>
-          <p:cNvPr id="7" name="Rounded Rectangle 6"/>
+              <a:t>⚙  predictor.py</a:t>
+            </a:r>
+          </a:p>
+        </p:txBody>
+      </p:sp>
+      <p:sp>
+        <p:nvSpPr>
+          <p:cNvPr id="7" name="TextBox 6"/>
+          <p:cNvSpPr txBox="1"/>
+          <p:nvPr/>
+        </p:nvSpPr>
+        <p:spPr>
+          <a:xfrm>
+            <a:off x="914400" y="1645920"/>
+            <a:ext cx="4389120" cy="4617720"/>
+          </a:xfrm>
+          <a:prstGeom prst="rect">
+            <a:avLst/>
+          </a:prstGeom>
+          <a:noFill/>
+        </p:spPr>
+        <p:txBody>
+          <a:bodyPr wrap="square" lIns="0" tIns="0" rIns="0" bIns="0">
+            <a:spAutoFit/>
+          </a:bodyPr>
+          <a:lstStyle/>
+          <a:p>
+            <a:pPr>
+              <a:defRPr sz="850">
+                <a:solidFill>
+                  <a:srgbClr val="94A3B8"/>
+                </a:solidFill>
+                <a:latin typeface="Consolas"/>
+              </a:defRPr>
+            </a:pPr>
+            <a:r>
+              <a:t># prediction/predictor.py</a:t>
+            </a:r>
+          </a:p>
+          <a:p>
+            <a:pPr>
+              <a:defRPr sz="850">
+                <a:solidFill>
+                  <a:srgbClr val="93C5FD"/>
+                </a:solidFill>
+                <a:latin typeface="Consolas"/>
+              </a:defRPr>
+            </a:pPr>
+            <a:r>
+              <a:t>class LoanDefaultPredictor:</a:t>
+            </a:r>
+          </a:p>
+          <a:p>
+            <a:pPr>
+              <a:defRPr sz="850">
+                <a:solidFill>
+                  <a:srgbClr val="93C5FD"/>
+                </a:solidFill>
+                <a:latin typeface="Consolas"/>
+              </a:defRPr>
+            </a:pPr>
+            <a:r>
+              <a:t>    def predict_borrower_risk(self, borrower_data):</a:t>
+            </a:r>
+          </a:p>
+          <a:p>
+            <a:pPr>
+              <a:defRPr sz="850">
+                <a:solidFill>
+                  <a:srgbClr val="94A3B8"/>
+                </a:solidFill>
+                <a:latin typeface="Consolas"/>
+              </a:defRPr>
+            </a:pPr>
+            <a:r>
+              <a:t>        # Preprocessing transform</a:t>
+            </a:r>
+          </a:p>
+          <a:p>
+            <a:pPr>
+              <a:defRPr sz="850">
+                <a:solidFill>
+                  <a:srgbClr val="F1F5F9"/>
+                </a:solidFill>
+                <a:latin typeface="Consolas"/>
+              </a:defRPr>
+            </a:pPr>
+            <a:r>
+              <a:t>        df_input = pd.DataFrame([borrower_data])</a:t>
+            </a:r>
+          </a:p>
+          <a:p>
+            <a:pPr>
+              <a:defRPr sz="850">
+                <a:solidFill>
+                  <a:srgbClr val="F1F5F9"/>
+                </a:solidFill>
+                <a:latin typeface="Consolas"/>
+              </a:defRPr>
+            </a:pPr>
+            <a:r>
+              <a:t>        X_trans = self.preprocessor.transform(df_input)</a:t>
+            </a:r>
+          </a:p>
+          <a:p>
+            <a:pPr>
+              <a:defRPr sz="850">
+                <a:solidFill>
+                  <a:srgbClr val="F1F5F9"/>
+                </a:solidFill>
+                <a:latin typeface="Consolas"/>
+              </a:defRPr>
+            </a:pPr>
+            <a:r>
+              <a:t>        </a:t>
+            </a:r>
+          </a:p>
+          <a:p>
+            <a:pPr>
+              <a:defRPr sz="850">
+                <a:solidFill>
+                  <a:srgbClr val="94A3B8"/>
+                </a:solidFill>
+                <a:latin typeface="Consolas"/>
+              </a:defRPr>
+            </a:pPr>
+            <a:r>
+              <a:t>        # Continuous probability P(Default=1)</a:t>
+            </a:r>
+          </a:p>
+          <a:p>
+            <a:pPr>
+              <a:defRPr sz="850">
+                <a:solidFill>
+                  <a:srgbClr val="F1F5F9"/>
+                </a:solidFill>
+                <a:latin typeface="Consolas"/>
+              </a:defRPr>
+            </a:pPr>
+            <a:r>
+              <a:t>        prob = float(self.model.predict_proba(X_trans)[0, 1])</a:t>
+            </a:r>
+          </a:p>
+          <a:p>
+            <a:pPr>
+              <a:defRPr sz="850">
+                <a:solidFill>
+                  <a:srgbClr val="F1F5F9"/>
+                </a:solidFill>
+                <a:latin typeface="Consolas"/>
+              </a:defRPr>
+            </a:pPr>
+            <a:r>
+              <a:t>        </a:t>
+            </a:r>
+          </a:p>
+          <a:p>
+            <a:pPr>
+              <a:defRPr sz="850">
+                <a:solidFill>
+                  <a:srgbClr val="94A3B8"/>
+                </a:solidFill>
+                <a:latin typeface="Consolas"/>
+              </a:defRPr>
+            </a:pPr>
+            <a:r>
+              <a:t>        # 4-Tier Risk Categorization</a:t>
+            </a:r>
+          </a:p>
+          <a:p>
+            <a:pPr>
+              <a:defRPr sz="850">
+                <a:solidFill>
+                  <a:srgbClr val="F1F5F9"/>
+                </a:solidFill>
+                <a:latin typeface="Consolas"/>
+              </a:defRPr>
+            </a:pPr>
+            <a:r>
+              <a:t>        if prob &lt; 0.20:   tier = 'Low Risk'</a:t>
+            </a:r>
+          </a:p>
+          <a:p>
+            <a:pPr>
+              <a:defRPr sz="850">
+                <a:solidFill>
+                  <a:srgbClr val="F1F5F9"/>
+                </a:solidFill>
+                <a:latin typeface="Consolas"/>
+              </a:defRPr>
+            </a:pPr>
+            <a:r>
+              <a:t>        elif prob &lt; 0.45: tier = 'Moderate Risk'</a:t>
+            </a:r>
+          </a:p>
+          <a:p>
+            <a:pPr>
+              <a:defRPr sz="850">
+                <a:solidFill>
+                  <a:srgbClr val="F1F5F9"/>
+                </a:solidFill>
+                <a:latin typeface="Consolas"/>
+              </a:defRPr>
+            </a:pPr>
+            <a:r>
+              <a:t>        elif prob &lt; 0.70: tier = 'High Risk'</a:t>
+            </a:r>
+          </a:p>
+          <a:p>
+            <a:pPr>
+              <a:defRPr sz="850">
+                <a:solidFill>
+                  <a:srgbClr val="F1F5F9"/>
+                </a:solidFill>
+                <a:latin typeface="Consolas"/>
+              </a:defRPr>
+            </a:pPr>
+            <a:r>
+              <a:t>        else:             tier = 'Critical Risk'</a:t>
+            </a:r>
+          </a:p>
+          <a:p>
+            <a:pPr>
+              <a:defRPr sz="850">
+                <a:solidFill>
+                  <a:srgbClr val="F1F5F9"/>
+                </a:solidFill>
+                <a:latin typeface="Consolas"/>
+              </a:defRPr>
+            </a:pPr>
+            <a:r>
+              <a:t>        </a:t>
+            </a:r>
+          </a:p>
+          <a:p>
+            <a:pPr>
+              <a:defRPr sz="850">
+                <a:solidFill>
+                  <a:srgbClr val="93C5FD"/>
+                </a:solidFill>
+                <a:latin typeface="Consolas"/>
+              </a:defRPr>
+            </a:pPr>
+            <a:r>
+              <a:t>        return {'prob': prob, 'tier': tier, 'factors': warnings}</a:t>
+            </a:r>
+          </a:p>
+        </p:txBody>
+      </p:sp>
+      <p:sp>
+        <p:nvSpPr>
+          <p:cNvPr id="8" name="Rounded Rectangle 7"/>
           <p:cNvSpPr/>
           <p:nvPr/>
         </p:nvSpPr>
         <p:spPr>
           <a:xfrm>
-            <a:off x="6492240" y="1280160"/>
-            <a:ext cx="4967935" cy="5029200"/>
+            <a:off x="5669280" y="1234440"/>
+            <a:ext cx="5790895" cy="1554480"/>
           </a:xfrm>
           <a:prstGeom prst="roundRect">
             <a:avLst/>
           </a:prstGeom>
           <a:solidFill>
-            <a:srgbClr val="FFFFFF"/>
+            <a:srgbClr val="EEF2FF"/>
           </a:solidFill>
           <a:ln w="12700">
             <a:solidFill>
-              <a:srgbClr val="E2E8F0"/>
+              <a:srgbClr val="2563EB"/>
             </a:solidFill>
           </a:ln>
         </p:spPr>
@@ -10134,14 +10590,14 @@
       </p:sp>
       <p:sp>
         <p:nvSpPr>
-          <p:cNvPr id="8" name="TextBox 7"/>
+          <p:cNvPr id="9" name="TextBox 8"/>
           <p:cNvSpPr txBox="1"/>
           <p:nvPr/>
         </p:nvSpPr>
         <p:spPr>
           <a:xfrm>
-            <a:off x="6675120" y="1463040"/>
-            <a:ext cx="4572000" cy="4572000"/>
+            <a:off x="5806440" y="1325880"/>
+            <a:ext cx="5486400" cy="1371600"/>
           </a:xfrm>
           <a:prstGeom prst="rect">
             <a:avLst/>
@@ -10156,99 +10612,255 @@
           <a:p>
             <a:pPr>
               <a:spcAft>
-                <a:spcPts val="1200"/>
+                <a:spcPts val="400"/>
               </a:spcAft>
-              <a:defRPr sz="1600" b="1">
+              <a:defRPr sz="1200" b="1">
+                <a:solidFill>
+                  <a:srgbClr val="2563EB"/>
+                </a:solidFill>
+              </a:defRPr>
+            </a:pPr>
+            <a:r>
+              <a:t>Probability Calibration Metrics</a:t>
+            </a:r>
+          </a:p>
+          <a:p>
+            <a:pPr>
+              <a:defRPr sz="950">
+                <a:solidFill>
+                  <a:srgbClr val="334155"/>
+                </a:solidFill>
+              </a:defRPr>
+            </a:pPr>
+            <a:r>
+              <a:t>• Brier Score: 0.0168 (near zero indicates exceptional probability calibration quality)</a:t>
+            </a:r>
+          </a:p>
+          <a:p>
+            <a:pPr>
+              <a:defRPr sz="950">
+                <a:solidFill>
+                  <a:srgbClr val="334155"/>
+                </a:solidFill>
+              </a:defRPr>
+            </a:pPr>
+            <a:r>
+              <a:t>• Test Set ROC-AUC: 0.9973  |  Model Log Loss: 0.0622</a:t>
+            </a:r>
+          </a:p>
+          <a:p>
+            <a:pPr>
+              <a:defRPr sz="950">
+                <a:solidFill>
+                  <a:srgbClr val="334155"/>
+                </a:solidFill>
+              </a:defRPr>
+            </a:pPr>
+            <a:r>
+              <a:t>• Sample Prime Scoring: Credit 810, DTI 0.15 -&gt; P(Default) = 0.02% (Low Risk Badge)</a:t>
+            </a:r>
+          </a:p>
+          <a:p>
+            <a:pPr>
+              <a:defRPr sz="950">
+                <a:solidFill>
+                  <a:srgbClr val="334155"/>
+                </a:solidFill>
+              </a:defRPr>
+            </a:pPr>
+            <a:r>
+              <a:t>• Sample Subprime Scoring: Credit 420, DTI 0.82 -&gt; P(Default) = 99.99% (Critical Risk Badge)</a:t>
+            </a:r>
+          </a:p>
+        </p:txBody>
+      </p:sp>
+      <p:sp>
+        <p:nvSpPr>
+          <p:cNvPr id="10" name="Rounded Rectangle 9"/>
+          <p:cNvSpPr/>
+          <p:nvPr/>
+        </p:nvSpPr>
+        <p:spPr>
+          <a:xfrm>
+            <a:off x="5669280" y="2926080"/>
+            <a:ext cx="5790895" cy="3429000"/>
+          </a:xfrm>
+          <a:prstGeom prst="roundRect">
+            <a:avLst/>
+          </a:prstGeom>
+          <a:solidFill>
+            <a:srgbClr val="FFFFFF"/>
+          </a:solidFill>
+          <a:ln w="12700">
+            <a:solidFill>
+              <a:srgbClr val="E2E8F0"/>
+            </a:solidFill>
+          </a:ln>
+        </p:spPr>
+        <p:style>
+          <a:lnRef idx="1">
+            <a:schemeClr val="accent1"/>
+          </a:lnRef>
+          <a:fillRef idx="3">
+            <a:schemeClr val="accent1"/>
+          </a:fillRef>
+          <a:effectRef idx="2">
+            <a:schemeClr val="accent1"/>
+          </a:effectRef>
+          <a:fontRef idx="minor">
+            <a:schemeClr val="lt1"/>
+          </a:fontRef>
+        </p:style>
+        <p:txBody>
+          <a:bodyPr rtlCol="0" anchor="ctr"/>
+          <a:lstStyle/>
+          <a:p>
+            <a:pPr algn="ctr"/>
+          </a:p>
+        </p:txBody>
+      </p:sp>
+      <p:sp>
+        <p:nvSpPr>
+          <p:cNvPr id="11" name="TextBox 10"/>
+          <p:cNvSpPr txBox="1"/>
+          <p:nvPr/>
+        </p:nvSpPr>
+        <p:spPr>
+          <a:xfrm>
+            <a:off x="5806440" y="3017520"/>
+            <a:ext cx="5486400" cy="3200400"/>
+          </a:xfrm>
+          <a:prstGeom prst="rect">
+            <a:avLst/>
+          </a:prstGeom>
+          <a:noFill/>
+        </p:spPr>
+        <p:txBody>
+          <a:bodyPr wrap="square">
+            <a:spAutoFit/>
+          </a:bodyPr>
+          <a:lstStyle/>
+          <a:p>
+            <a:pPr>
+              <a:spcAft>
+                <a:spcPts val="600"/>
+              </a:spcAft>
+              <a:defRPr sz="1300" b="1">
                 <a:solidFill>
                   <a:srgbClr val="0F172A"/>
                 </a:solidFill>
               </a:defRPr>
             </a:pPr>
             <a:r>
-              <a:t>Engine Calibration &amp; Real-Time Output</a:t>
+              <a:t>4-Tier Underwriting Decision Matrix</a:t>
+            </a:r>
+          </a:p>
+          <a:p>
+            <a:pPr>
+              <a:defRPr sz="1000" b="1">
+                <a:solidFill>
+                  <a:srgbClr val="10B981"/>
+                </a:solidFill>
+              </a:defRPr>
+            </a:pPr>
+            <a:r>
+              <a:t>Low Risk (P &lt; 20%):</a:t>
             </a:r>
           </a:p>
           <a:p>
             <a:pPr>
               <a:spcAft>
-                <a:spcPts val="800"/>
+                <a:spcPts val="400"/>
               </a:spcAft>
-              <a:defRPr sz="1000">
+              <a:defRPr sz="950">
                 <a:solidFill>
                   <a:srgbClr val="334155"/>
                 </a:solidFill>
               </a:defRPr>
             </a:pPr>
             <a:r>
-              <a:t>• Brier Score Loss:  0.0168 (near 0.0 indicates exceptional probability calibration quality).</a:t>
+              <a:t>  Fast-track instant approval; Prime interest rate (4.5% - 7.5% APR).</a:t>
+            </a:r>
+          </a:p>
+          <a:p>
+            <a:pPr>
+              <a:defRPr sz="1000" b="1">
+                <a:solidFill>
+                  <a:srgbClr val="2563EB"/>
+                </a:solidFill>
+              </a:defRPr>
+            </a:pPr>
+            <a:r>
+              <a:t>Moderate Risk (20% &lt;= P &lt; 45%):</a:t>
             </a:r>
           </a:p>
           <a:p>
             <a:pPr>
               <a:spcAft>
-                <a:spcPts val="800"/>
+                <a:spcPts val="400"/>
               </a:spcAft>
-              <a:defRPr sz="1000">
+              <a:defRPr sz="950">
                 <a:solidFill>
                   <a:srgbClr val="334155"/>
                 </a:solidFill>
               </a:defRPr>
             </a:pPr>
             <a:r>
-              <a:t>• Model Log Loss:  0.0622 | Test ROC-AUC: 0.9973</a:t>
+              <a:t>  Standard underwriting review; income verification required.</a:t>
+            </a:r>
+          </a:p>
+          <a:p>
+            <a:pPr>
+              <a:defRPr sz="1000" b="1">
+                <a:solidFill>
+                  <a:srgbClr val="D97706"/>
+                </a:solidFill>
+              </a:defRPr>
+            </a:pPr>
+            <a:r>
+              <a:t>High Risk (45% &lt;= P &lt; 70%):</a:t>
             </a:r>
           </a:p>
           <a:p>
             <a:pPr>
               <a:spcAft>
-                <a:spcPts val="800"/>
+                <a:spcPts val="400"/>
               </a:spcAft>
-              <a:defRPr sz="1000">
+              <a:defRPr sz="950">
                 <a:solidFill>
                   <a:srgbClr val="334155"/>
                 </a:solidFill>
               </a:defRPr>
             </a:pPr>
             <a:r>
-              <a:t>• Sample Scoring 1 (Prime):  Credit 810, DTI 0.15</a:t>
-            </a:r>
-            <a:br/>
-            <a:r>
-              <a:t>-&gt; P(Default=1) = 0.02% (Low Risk Badge)</a:t>
+              <a:t>  Conditional approval; mandatory co-signer and collateral required.</a:t>
+            </a:r>
+          </a:p>
+          <a:p>
+            <a:pPr>
+              <a:defRPr sz="1000" b="1">
+                <a:solidFill>
+                  <a:srgbClr val="E11D48"/>
+                </a:solidFill>
+              </a:defRPr>
+            </a:pPr>
+            <a:r>
+              <a:t>Critical Risk (P &gt;= 70%):</a:t>
             </a:r>
           </a:p>
           <a:p>
             <a:pPr>
               <a:spcAft>
-                <a:spcPts val="800"/>
+                <a:spcPts val="400"/>
               </a:spcAft>
-              <a:defRPr sz="1000">
+              <a:defRPr sz="950">
                 <a:solidFill>
                   <a:srgbClr val="334155"/>
                 </a:solidFill>
               </a:defRPr>
             </a:pPr>
             <a:r>
-              <a:t>• Sample Scoring 2 (Subprime):  Credit 420, DTI 0.82</a:t>
-            </a:r>
-            <a:br/>
-            <a:r>
-              <a:t>-&gt; P(Default=1) = 99.99% (Critical Risk Badge)</a:t>
-            </a:r>
-          </a:p>
-          <a:p>
-            <a:pPr>
-              <a:spcAft>
-                <a:spcPts val="800"/>
-              </a:spcAft>
-              <a:defRPr sz="1000">
-                <a:solidFill>
-                  <a:srgbClr val="334155"/>
-                </a:solidFill>
-              </a:defRPr>
-            </a:pPr>
-            <a:r>
-              <a:t>• Automated Explanations:  Engine isolates explicit risk factors (DTI &gt; 45%, Credit &lt; 600, Unemployed, No Co-Signer).</a:t>
+              <a:t>  Automated decline; risk exceeds institutional lending tolerance.</a:t>
             </a:r>
           </a:p>
         </p:txBody>

--- a/Review2_ByteBrigades_LoanDefault.pptx
+++ b/Review2_ByteBrigades_LoanDefault.pptx
@@ -15,6 +15,10 @@
     <p:sldId id="263" r:id="rId15"/>
     <p:sldId id="264" r:id="rId16"/>
     <p:sldId id="265" r:id="rId17"/>
+    <p:sldId id="266" r:id="rId18"/>
+    <p:sldId id="267" r:id="rId19"/>
+    <p:sldId id="268" r:id="rId20"/>
+    <p:sldId id="269" r:id="rId21"/>
   </p:sldIdLst>
   <p:sldSz cx="12191695" cy="6858000" type="screen4x3"/>
   <p:notesSz cx="6858000" cy="9144000"/>
@@ -511,7 +515,7 @@
           <a:lstStyle/>
           <a:p>
             <a:r>
-              <a:t>Good morning faculty. We are team Byte Brigades presenting Review 2 for CSI3010 Data Warehousing &amp; Data Mining. Our team consists of Mahaprabhu K (24MID0109) and Pavithran O (24MID0144). Today we present the complete data mining results: Classification, Clustering, Association Rules, and Continuous Prediction.</a:t>
+              <a:t>Good morning faculty. We are team Byte Brigades presenting Review 2 for CSI3010 Data Warehousing &amp; Data Mining. Our team members are Mahaprabhu K (24MID0109) and Pavithran O (24MID0144). Today we present the four core data mining components: Classification, Clustering, Association Rules, and Default Prediction.</a:t>
             </a:r>
           </a:p>
         </p:txBody>
@@ -4473,7 +4477,7 @@
               </a:defRPr>
             </a:pPr>
             <a:r>
-              <a:t>• Review Phase: Review - 2 (Data Mining &amp; Predictive Analytics)</a:t>
+              <a:t>• Review Phase: Review - 2 (Data Mining &amp; Predictive Modeling)</a:t>
             </a:r>
           </a:p>
           <a:p>
@@ -4657,6 +4661,2488 @@
               </a:defRPr>
             </a:pPr>
             <a:r>
+              <a:t>Association Rules: Discretization &amp; Apriori Algorithm Code</a:t>
+            </a:r>
+          </a:p>
+        </p:txBody>
+      </p:sp>
+      <p:sp>
+        <p:nvSpPr>
+          <p:cNvPr id="5" name="Rounded Rectangle 4"/>
+          <p:cNvSpPr/>
+          <p:nvPr/>
+        </p:nvSpPr>
+        <p:spPr>
+          <a:xfrm>
+            <a:off x="731520" y="1234440"/>
+            <a:ext cx="5303520" cy="5120640"/>
+          </a:xfrm>
+          <a:prstGeom prst="roundRect">
+            <a:avLst/>
+          </a:prstGeom>
+          <a:solidFill>
+            <a:srgbClr val="0F172A"/>
+          </a:solidFill>
+          <a:ln w="12700">
+            <a:solidFill>
+              <a:srgbClr val="334155"/>
+            </a:solidFill>
+          </a:ln>
+        </p:spPr>
+        <p:style>
+          <a:lnRef idx="1">
+            <a:schemeClr val="accent1"/>
+          </a:lnRef>
+          <a:fillRef idx="3">
+            <a:schemeClr val="accent1"/>
+          </a:fillRef>
+          <a:effectRef idx="2">
+            <a:schemeClr val="accent1"/>
+          </a:effectRef>
+          <a:fontRef idx="minor">
+            <a:schemeClr val="lt1"/>
+          </a:fontRef>
+        </p:style>
+        <p:txBody>
+          <a:bodyPr rtlCol="0" anchor="ctr"/>
+          <a:lstStyle/>
+          <a:p>
+            <a:pPr algn="ctr"/>
+          </a:p>
+        </p:txBody>
+      </p:sp>
+      <p:sp>
+        <p:nvSpPr>
+          <p:cNvPr id="6" name="TextBox 5"/>
+          <p:cNvSpPr txBox="1"/>
+          <p:nvPr/>
+        </p:nvSpPr>
+        <p:spPr>
+          <a:xfrm>
+            <a:off x="914400" y="1344168"/>
+            <a:ext cx="4937760" cy="274320"/>
+          </a:xfrm>
+          <a:prstGeom prst="rect">
+            <a:avLst/>
+          </a:prstGeom>
+          <a:noFill/>
+        </p:spPr>
+        <p:txBody>
+          <a:bodyPr wrap="square" lIns="0" tIns="0" rIns="0" bIns="0">
+            <a:spAutoFit/>
+          </a:bodyPr>
+          <a:lstStyle/>
+          <a:p>
+            <a:pPr>
+              <a:defRPr sz="950" b="1">
+                <a:solidFill>
+                  <a:srgbClr val="10B981"/>
+                </a:solidFill>
+              </a:defRPr>
+            </a:pPr>
+            <a:r>
+              <a:t>⚙  mine_rules.py</a:t>
+            </a:r>
+          </a:p>
+        </p:txBody>
+      </p:sp>
+      <p:sp>
+        <p:nvSpPr>
+          <p:cNvPr id="7" name="TextBox 6"/>
+          <p:cNvSpPr txBox="1"/>
+          <p:nvPr/>
+        </p:nvSpPr>
+        <p:spPr>
+          <a:xfrm>
+            <a:off x="914400" y="1645920"/>
+            <a:ext cx="4937760" cy="4617720"/>
+          </a:xfrm>
+          <a:prstGeom prst="rect">
+            <a:avLst/>
+          </a:prstGeom>
+          <a:noFill/>
+        </p:spPr>
+        <p:txBody>
+          <a:bodyPr wrap="square" lIns="0" tIns="0" rIns="0" bIns="0">
+            <a:spAutoFit/>
+          </a:bodyPr>
+          <a:lstStyle/>
+          <a:p>
+            <a:pPr>
+              <a:defRPr sz="850">
+                <a:solidFill>
+                  <a:srgbClr val="94A3B8"/>
+                </a:solidFill>
+                <a:latin typeface="Consolas"/>
+              </a:defRPr>
+            </a:pPr>
+            <a:r>
+              <a:t># association_rules/mine_rules.py</a:t>
+            </a:r>
+          </a:p>
+          <a:p>
+            <a:pPr>
+              <a:defRPr sz="850">
+                <a:solidFill>
+                  <a:srgbClr val="93C5FD"/>
+                </a:solidFill>
+                <a:latin typeface="Consolas"/>
+              </a:defRPr>
+            </a:pPr>
+            <a:r>
+              <a:t>from mlxtend.frequent_patterns import apriori, association_rules</a:t>
+            </a:r>
+          </a:p>
+          <a:p>
+            <a:pPr>
+              <a:defRPr sz="850">
+                <a:solidFill>
+                  <a:srgbClr val="F1F5F9"/>
+                </a:solidFill>
+                <a:latin typeface="Consolas"/>
+              </a:defRPr>
+            </a:pPr>
+          </a:p>
+          <a:p>
+            <a:pPr>
+              <a:defRPr sz="850">
+                <a:solidFill>
+                  <a:srgbClr val="94A3B8"/>
+                </a:solidFill>
+                <a:latin typeface="Consolas"/>
+              </a:defRPr>
+            </a:pPr>
+            <a:r>
+              <a:t># Continuous Discretization</a:t>
+            </a:r>
+          </a:p>
+          <a:p>
+            <a:pPr>
+              <a:defRPr sz="850">
+                <a:solidFill>
+                  <a:srgbClr val="F1F5F9"/>
+                </a:solidFill>
+                <a:latin typeface="Consolas"/>
+              </a:defRPr>
+            </a:pPr>
+            <a:r>
+              <a:t>df_disc['Income'] = pd.qcut(df['Income'], q=3, labels=['Low','Med','High'])</a:t>
+            </a:r>
+          </a:p>
+          <a:p>
+            <a:pPr>
+              <a:defRPr sz="850">
+                <a:solidFill>
+                  <a:srgbClr val="F1F5F9"/>
+                </a:solidFill>
+                <a:latin typeface="Consolas"/>
+              </a:defRPr>
+            </a:pPr>
+            <a:r>
+              <a:t>df_disc['CreditScore'] = pd.cut(df['CreditScore'], bins=[0,580,670,740,850])</a:t>
+            </a:r>
+          </a:p>
+          <a:p>
+            <a:pPr>
+              <a:defRPr sz="850">
+                <a:solidFill>
+                  <a:srgbClr val="F1F5F9"/>
+                </a:solidFill>
+                <a:latin typeface="Consolas"/>
+              </a:defRPr>
+            </a:pPr>
+            <a:r>
+              <a:t>df_disc['DTIRatio'] = pd.cut(df['DTIRatio'], bins=[0.0, 0.30, 0.50, 1.0])</a:t>
+            </a:r>
+          </a:p>
+          <a:p>
+            <a:pPr>
+              <a:defRPr sz="850">
+                <a:solidFill>
+                  <a:srgbClr val="F1F5F9"/>
+                </a:solidFill>
+                <a:latin typeface="Consolas"/>
+              </a:defRPr>
+            </a:pPr>
+            <a:r>
+              <a:t>df_encoded = pd.get_dummies(df_disc, prefix='', prefix_sep='')</a:t>
+            </a:r>
+          </a:p>
+          <a:p>
+            <a:pPr>
+              <a:defRPr sz="850">
+                <a:solidFill>
+                  <a:srgbClr val="F1F5F9"/>
+                </a:solidFill>
+                <a:latin typeface="Consolas"/>
+              </a:defRPr>
+            </a:pPr>
+          </a:p>
+          <a:p>
+            <a:pPr>
+              <a:defRPr sz="850">
+                <a:solidFill>
+                  <a:srgbClr val="94A3B8"/>
+                </a:solidFill>
+                <a:latin typeface="Consolas"/>
+              </a:defRPr>
+            </a:pPr>
+            <a:r>
+              <a:t># Apriori Frequent Itemset Mining</a:t>
+            </a:r>
+          </a:p>
+          <a:p>
+            <a:pPr>
+              <a:defRPr sz="850">
+                <a:solidFill>
+                  <a:srgbClr val="6EE7B7"/>
+                </a:solidFill>
+                <a:latin typeface="Consolas"/>
+              </a:defRPr>
+            </a:pPr>
+            <a:r>
+              <a:t>itemsets = apriori(df_encoded, min_support=0.03, use_colnames=True)</a:t>
+            </a:r>
+          </a:p>
+          <a:p>
+            <a:pPr>
+              <a:defRPr sz="850">
+                <a:solidFill>
+                  <a:srgbClr val="6EE7B7"/>
+                </a:solidFill>
+                <a:latin typeface="Consolas"/>
+              </a:defRPr>
+            </a:pPr>
+            <a:r>
+              <a:t>rules = association_rules(itemsets, metric='confidence', min_threshold=0.30)</a:t>
+            </a:r>
+          </a:p>
+          <a:p>
+            <a:pPr>
+              <a:defRPr sz="850">
+                <a:solidFill>
+                  <a:srgbClr val="F1F5F9"/>
+                </a:solidFill>
+                <a:latin typeface="Consolas"/>
+              </a:defRPr>
+            </a:pPr>
+          </a:p>
+          <a:p>
+            <a:pPr>
+              <a:defRPr sz="850">
+                <a:solidFill>
+                  <a:srgbClr val="94A3B8"/>
+                </a:solidFill>
+                <a:latin typeface="Consolas"/>
+              </a:defRPr>
+            </a:pPr>
+            <a:r>
+              <a:t># Filter for Default=Yes sorted by Lift</a:t>
+            </a:r>
+          </a:p>
+          <a:p>
+            <a:pPr>
+              <a:defRPr sz="850">
+                <a:solidFill>
+                  <a:srgbClr val="F1F5F9"/>
+                </a:solidFill>
+                <a:latin typeface="Consolas"/>
+              </a:defRPr>
+            </a:pPr>
+            <a:r>
+              <a:t>default_rules = rules[rules['consequents_str'].str.contains('Default=Yes')]</a:t>
+            </a:r>
+          </a:p>
+          <a:p>
+            <a:pPr>
+              <a:defRPr sz="850">
+                <a:solidFill>
+                  <a:srgbClr val="F1F5F9"/>
+                </a:solidFill>
+                <a:latin typeface="Consolas"/>
+              </a:defRPr>
+            </a:pPr>
+            <a:r>
+              <a:t>top_rules = default_rules.sort_values(by='lift', ascending=False)</a:t>
+            </a:r>
+          </a:p>
+        </p:txBody>
+      </p:sp>
+      <p:sp>
+        <p:nvSpPr>
+          <p:cNvPr id="8" name="Rounded Rectangle 7"/>
+          <p:cNvSpPr/>
+          <p:nvPr/>
+        </p:nvSpPr>
+        <p:spPr>
+          <a:xfrm>
+            <a:off x="6217920" y="1234440"/>
+            <a:ext cx="5242255" cy="5120640"/>
+          </a:xfrm>
+          <a:prstGeom prst="roundRect">
+            <a:avLst/>
+          </a:prstGeom>
+          <a:solidFill>
+            <a:srgbClr val="FFFFFF"/>
+          </a:solidFill>
+          <a:ln w="12700">
+            <a:solidFill>
+              <a:srgbClr val="E2E8F0"/>
+            </a:solidFill>
+          </a:ln>
+        </p:spPr>
+        <p:style>
+          <a:lnRef idx="1">
+            <a:schemeClr val="accent1"/>
+          </a:lnRef>
+          <a:fillRef idx="3">
+            <a:schemeClr val="accent1"/>
+          </a:fillRef>
+          <a:effectRef idx="2">
+            <a:schemeClr val="accent1"/>
+          </a:effectRef>
+          <a:fontRef idx="minor">
+            <a:schemeClr val="lt1"/>
+          </a:fontRef>
+        </p:style>
+        <p:txBody>
+          <a:bodyPr rtlCol="0" anchor="ctr"/>
+          <a:lstStyle/>
+          <a:p>
+            <a:pPr algn="ctr"/>
+          </a:p>
+        </p:txBody>
+      </p:sp>
+      <p:sp>
+        <p:nvSpPr>
+          <p:cNvPr id="9" name="TextBox 8"/>
+          <p:cNvSpPr txBox="1"/>
+          <p:nvPr/>
+        </p:nvSpPr>
+        <p:spPr>
+          <a:xfrm>
+            <a:off x="6400800" y="1371600"/>
+            <a:ext cx="4846320" cy="4754880"/>
+          </a:xfrm>
+          <a:prstGeom prst="rect">
+            <a:avLst/>
+          </a:prstGeom>
+          <a:noFill/>
+        </p:spPr>
+        <p:txBody>
+          <a:bodyPr wrap="square">
+            <a:spAutoFit/>
+          </a:bodyPr>
+          <a:lstStyle/>
+          <a:p>
+            <a:pPr>
+              <a:spcAft>
+                <a:spcPts val="1000"/>
+              </a:spcAft>
+              <a:defRPr sz="1400" b="1">
+                <a:solidFill>
+                  <a:srgbClr val="0F172A"/>
+                </a:solidFill>
+              </a:defRPr>
+            </a:pPr>
+            <a:r>
+              <a:t>Mathematical Metrics &amp; Mining Rules</a:t>
+            </a:r>
+          </a:p>
+          <a:p>
+            <a:pPr>
+              <a:spcAft>
+                <a:spcPts val="800"/>
+              </a:spcAft>
+              <a:defRPr sz="1000">
+                <a:solidFill>
+                  <a:srgbClr val="334155"/>
+                </a:solidFill>
+              </a:defRPr>
+            </a:pPr>
+            <a:r>
+              <a:t>• Support(A -&gt; B):</a:t>
+            </a:r>
+            <a:br/>
+            <a:r>
+              <a:t>  P(A and B)</a:t>
+            </a:r>
+            <a:br/>
+            <a:r>
+              <a:t>Frequency of co-occurrence in dataset (threshold = 3%).</a:t>
+            </a:r>
+          </a:p>
+          <a:p>
+            <a:pPr>
+              <a:spcAft>
+                <a:spcPts val="800"/>
+              </a:spcAft>
+              <a:defRPr sz="1000">
+                <a:solidFill>
+                  <a:srgbClr val="334155"/>
+                </a:solidFill>
+              </a:defRPr>
+            </a:pPr>
+            <a:r>
+              <a:t>• Confidence(A -&gt; B):</a:t>
+            </a:r>
+            <a:br/>
+            <a:r>
+              <a:t>  P(B | A) = Support(A and B) / Support(A)</a:t>
+            </a:r>
+            <a:br/>
+            <a:r>
+              <a:t>Probability of Default given borrower conditions (threshold = 30%).</a:t>
+            </a:r>
+          </a:p>
+          <a:p>
+            <a:pPr>
+              <a:spcAft>
+                <a:spcPts val="800"/>
+              </a:spcAft>
+              <a:defRPr sz="1000">
+                <a:solidFill>
+                  <a:srgbClr val="334155"/>
+                </a:solidFill>
+              </a:defRPr>
+            </a:pPr>
+            <a:r>
+              <a:t>• Lift(A -&gt; B):</a:t>
+            </a:r>
+            <a:br/>
+            <a:r>
+              <a:t>  Confidence / P(B)</a:t>
+            </a:r>
+            <a:br/>
+            <a:r>
+              <a:t>Multiplier over baseline default rate (11.7%).</a:t>
+            </a:r>
+            <a:br/>
+            <a:r>
+              <a:t>• Lift &gt; 1: Strong positive risk indicator</a:t>
+            </a:r>
+            <a:br/>
+            <a:r>
+              <a:t>• Lift = 5.69: 5.7x more likely to default than random.</a:t>
+            </a:r>
+          </a:p>
+          <a:p>
+            <a:pPr>
+              <a:spcAft>
+                <a:spcPts val="800"/>
+              </a:spcAft>
+              <a:defRPr sz="1000">
+                <a:solidFill>
+                  <a:srgbClr val="334155"/>
+                </a:solidFill>
+              </a:defRPr>
+            </a:pPr>
+            <a:r>
+              <a:t>• Consequent:</a:t>
+            </a:r>
+            <a:br/>
+            <a:r>
+              <a:t>  Explicitly targeted for Default=Yes to isolate toxic risk rules.</a:t>
+            </a:r>
+          </a:p>
+        </p:txBody>
+      </p:sp>
+    </p:spTree>
+  </p:cSld>
+  <p:clrMapOvr>
+    <a:masterClrMapping/>
+  </p:clrMapOvr>
+</p:sld>
+</file>
+
+<file path=ppt/slides/slide11.xml><?xml version="1.0" encoding="utf-8"?>
+<p:sld xmlns:a="http://schemas.openxmlformats.org/drawingml/2006/main" xmlns:p="http://schemas.openxmlformats.org/presentationml/2006/main" xmlns:r="http://schemas.openxmlformats.org/officeDocument/2006/relationships">
+  <p:cSld>
+    <p:bg>
+      <p:bgPr>
+        <a:solidFill>
+          <a:srgbClr val="F8FAFC"/>
+        </a:solidFill>
+        <a:effectLst/>
+      </p:bgPr>
+    </p:bg>
+    <p:spTree>
+      <p:nvGrpSpPr>
+        <p:cNvPr id="1" name=""/>
+        <p:cNvGrpSpPr/>
+        <p:nvPr/>
+      </p:nvGrpSpPr>
+      <p:grpSpPr/>
+      <p:sp>
+        <p:nvSpPr>
+          <p:cNvPr id="2" name="Rectangle 1"/>
+          <p:cNvSpPr/>
+          <p:nvPr/>
+        </p:nvSpPr>
+        <p:spPr>
+          <a:xfrm>
+            <a:off x="0" y="0"/>
+            <a:ext cx="12191695" cy="109728"/>
+          </a:xfrm>
+          <a:prstGeom prst="rect">
+            <a:avLst/>
+          </a:prstGeom>
+          <a:solidFill>
+            <a:srgbClr val="2563EB"/>
+          </a:solidFill>
+          <a:ln>
+            <a:noFill/>
+          </a:ln>
+        </p:spPr>
+        <p:style>
+          <a:lnRef idx="1">
+            <a:schemeClr val="accent1"/>
+          </a:lnRef>
+          <a:fillRef idx="3">
+            <a:schemeClr val="accent1"/>
+          </a:fillRef>
+          <a:effectRef idx="2">
+            <a:schemeClr val="accent1"/>
+          </a:effectRef>
+          <a:fontRef idx="minor">
+            <a:schemeClr val="lt1"/>
+          </a:fontRef>
+        </p:style>
+        <p:txBody>
+          <a:bodyPr rtlCol="0" anchor="ctr"/>
+          <a:lstStyle/>
+          <a:p>
+            <a:pPr algn="ctr"/>
+          </a:p>
+        </p:txBody>
+      </p:sp>
+      <p:sp>
+        <p:nvSpPr>
+          <p:cNvPr id="3" name="TextBox 2"/>
+          <p:cNvSpPr txBox="1"/>
+          <p:nvPr/>
+        </p:nvSpPr>
+        <p:spPr>
+          <a:xfrm>
+            <a:off x="731520" y="256032"/>
+            <a:ext cx="10698480" cy="256032"/>
+          </a:xfrm>
+          <a:prstGeom prst="rect">
+            <a:avLst/>
+          </a:prstGeom>
+          <a:noFill/>
+        </p:spPr>
+        <p:txBody>
+          <a:bodyPr wrap="square" lIns="0" tIns="0" rIns="0" bIns="0">
+            <a:spAutoFit/>
+          </a:bodyPr>
+          <a:lstStyle/>
+          <a:p>
+            <a:pPr>
+              <a:defRPr sz="1000" b="1">
+                <a:solidFill>
+                  <a:srgbClr val="2563EB"/>
+                </a:solidFill>
+              </a:defRPr>
+            </a:pPr>
+            <a:r>
+              <a:t>CSI3010: DATA WAREHOUSING &amp; DATA MINING | REVIEW 2</a:t>
+            </a:r>
+          </a:p>
+        </p:txBody>
+      </p:sp>
+      <p:sp>
+        <p:nvSpPr>
+          <p:cNvPr id="4" name="TextBox 3"/>
+          <p:cNvSpPr txBox="1"/>
+          <p:nvPr/>
+        </p:nvSpPr>
+        <p:spPr>
+          <a:xfrm>
+            <a:off x="731520" y="502920"/>
+            <a:ext cx="10698480" cy="548640"/>
+          </a:xfrm>
+          <a:prstGeom prst="rect">
+            <a:avLst/>
+          </a:prstGeom>
+          <a:noFill/>
+        </p:spPr>
+        <p:txBody>
+          <a:bodyPr wrap="square" lIns="0" tIns="0" rIns="0" bIns="0">
+            <a:spAutoFit/>
+          </a:bodyPr>
+          <a:lstStyle/>
+          <a:p>
+            <a:pPr>
+              <a:defRPr sz="2100" b="1">
+                <a:solidFill>
+                  <a:srgbClr val="0F172A"/>
+                </a:solidFill>
+              </a:defRPr>
+            </a:pPr>
+            <a:r>
+              <a:t>Association Rules: Pictorial Lift Chart &amp; Top Risk Patterns</a:t>
+            </a:r>
+          </a:p>
+        </p:txBody>
+      </p:sp>
+      <p:sp>
+        <p:nvSpPr>
+          <p:cNvPr id="5" name="Rounded Rectangle 4"/>
+          <p:cNvSpPr/>
+          <p:nvPr/>
+        </p:nvSpPr>
+        <p:spPr>
+          <a:xfrm>
+            <a:off x="731520" y="1234440"/>
+            <a:ext cx="5943600" cy="5120640"/>
+          </a:xfrm>
+          <a:prstGeom prst="roundRect">
+            <a:avLst/>
+          </a:prstGeom>
+          <a:solidFill>
+            <a:srgbClr val="FFFFFF"/>
+          </a:solidFill>
+          <a:ln w="12700">
+            <a:solidFill>
+              <a:srgbClr val="E2E8F0"/>
+            </a:solidFill>
+          </a:ln>
+        </p:spPr>
+        <p:style>
+          <a:lnRef idx="1">
+            <a:schemeClr val="accent1"/>
+          </a:lnRef>
+          <a:fillRef idx="3">
+            <a:schemeClr val="accent1"/>
+          </a:fillRef>
+          <a:effectRef idx="2">
+            <a:schemeClr val="accent1"/>
+          </a:effectRef>
+          <a:fontRef idx="minor">
+            <a:schemeClr val="lt1"/>
+          </a:fontRef>
+        </p:style>
+        <p:txBody>
+          <a:bodyPr rtlCol="0" anchor="ctr"/>
+          <a:lstStyle/>
+          <a:p>
+            <a:pPr algn="ctr"/>
+          </a:p>
+        </p:txBody>
+      </p:sp>
+      <p:pic>
+        <p:nvPicPr>
+          <p:cNvPr id="6" name="Picture 5" descr="rules_lift_chart.png"/>
+          <p:cNvPicPr>
+            <a:picLocks noChangeAspect="1"/>
+          </p:cNvPicPr>
+          <p:nvPr/>
+        </p:nvPicPr>
+        <p:blipFill>
+          <a:blip r:embed="rId2"/>
+          <a:stretch>
+            <a:fillRect/>
+          </a:stretch>
+        </p:blipFill>
+        <p:spPr>
+          <a:xfrm>
+            <a:off x="822960" y="1325880"/>
+            <a:ext cx="5760720" cy="3168396"/>
+          </a:xfrm>
+          <a:prstGeom prst="rect">
+            <a:avLst/>
+          </a:prstGeom>
+        </p:spPr>
+      </p:pic>
+      <p:sp>
+        <p:nvSpPr>
+          <p:cNvPr id="7" name="Rounded Rectangle 6"/>
+          <p:cNvSpPr/>
+          <p:nvPr/>
+        </p:nvSpPr>
+        <p:spPr>
+          <a:xfrm>
+            <a:off x="6858000" y="1234440"/>
+            <a:ext cx="4602175" cy="5120640"/>
+          </a:xfrm>
+          <a:prstGeom prst="roundRect">
+            <a:avLst/>
+          </a:prstGeom>
+          <a:solidFill>
+            <a:srgbClr val="FFFFFF"/>
+          </a:solidFill>
+          <a:ln w="12700">
+            <a:solidFill>
+              <a:srgbClr val="E2E8F0"/>
+            </a:solidFill>
+          </a:ln>
+        </p:spPr>
+        <p:style>
+          <a:lnRef idx="1">
+            <a:schemeClr val="accent1"/>
+          </a:lnRef>
+          <a:fillRef idx="3">
+            <a:schemeClr val="accent1"/>
+          </a:fillRef>
+          <a:effectRef idx="2">
+            <a:schemeClr val="accent1"/>
+          </a:effectRef>
+          <a:fontRef idx="minor">
+            <a:schemeClr val="lt1"/>
+          </a:fontRef>
+        </p:style>
+        <p:txBody>
+          <a:bodyPr rtlCol="0" anchor="ctr"/>
+          <a:lstStyle/>
+          <a:p>
+            <a:pPr algn="ctr"/>
+          </a:p>
+        </p:txBody>
+      </p:sp>
+      <p:sp>
+        <p:nvSpPr>
+          <p:cNvPr id="8" name="TextBox 7"/>
+          <p:cNvSpPr txBox="1"/>
+          <p:nvPr/>
+        </p:nvSpPr>
+        <p:spPr>
+          <a:xfrm>
+            <a:off x="6995160" y="1371600"/>
+            <a:ext cx="4297680" cy="4754880"/>
+          </a:xfrm>
+          <a:prstGeom prst="rect">
+            <a:avLst/>
+          </a:prstGeom>
+          <a:noFill/>
+        </p:spPr>
+        <p:txBody>
+          <a:bodyPr wrap="square">
+            <a:spAutoFit/>
+          </a:bodyPr>
+          <a:lstStyle/>
+          <a:p>
+            <a:pPr>
+              <a:spcAft>
+                <a:spcPts val="800"/>
+              </a:spcAft>
+              <a:defRPr sz="1300" b="1">
+                <a:solidFill>
+                  <a:srgbClr val="0F172A"/>
+                </a:solidFill>
+              </a:defRPr>
+            </a:pPr>
+            <a:r>
+              <a:t>Top Mined Rules (Ranked by Lift)</a:t>
+            </a:r>
+          </a:p>
+          <a:p>
+            <a:pPr>
+              <a:defRPr sz="950" b="1">
+                <a:solidFill>
+                  <a:srgbClr val="2563EB"/>
+                </a:solidFill>
+              </a:defRPr>
+            </a:pPr>
+            <a:r>
+              <a:t>• Rule 1 (Lift = 5.69x | Conf = 66.93%):</a:t>
+            </a:r>
+          </a:p>
+          <a:p>
+            <a:pPr>
+              <a:spcAft>
+                <a:spcPts val="500"/>
+              </a:spcAft>
+              <a:defRPr sz="900">
+                <a:solidFill>
+                  <a:srgbClr val="334155"/>
+                </a:solidFill>
+              </a:defRPr>
+            </a:pPr>
+            <a:r>
+              <a:t>  Income=Low, CreditScore=Poor, LoanAmount=Large -&gt; Default=Yes</a:t>
+            </a:r>
+          </a:p>
+          <a:p>
+            <a:pPr>
+              <a:defRPr sz="950" b="1">
+                <a:solidFill>
+                  <a:srgbClr val="2563EB"/>
+                </a:solidFill>
+              </a:defRPr>
+            </a:pPr>
+            <a:r>
+              <a:t>• Rule 2 (Lift = 5.16x | Conf = 60.64%):</a:t>
+            </a:r>
+          </a:p>
+          <a:p>
+            <a:pPr>
+              <a:spcAft>
+                <a:spcPts val="500"/>
+              </a:spcAft>
+              <a:defRPr sz="900">
+                <a:solidFill>
+                  <a:srgbClr val="334155"/>
+                </a:solidFill>
+              </a:defRPr>
+            </a:pPr>
+            <a:r>
+              <a:t>  Income=Low, DTIRatio=High, LoanAmount=Large -&gt; Default=Yes</a:t>
+            </a:r>
+          </a:p>
+          <a:p>
+            <a:pPr>
+              <a:defRPr sz="950" b="1">
+                <a:solidFill>
+                  <a:srgbClr val="2563EB"/>
+                </a:solidFill>
+              </a:defRPr>
+            </a:pPr>
+            <a:r>
+              <a:t>• Rule 3 (Lift = 4.64x | Conf = 54.49%):</a:t>
+            </a:r>
+          </a:p>
+          <a:p>
+            <a:pPr>
+              <a:spcAft>
+                <a:spcPts val="500"/>
+              </a:spcAft>
+              <a:defRPr sz="900">
+                <a:solidFill>
+                  <a:srgbClr val="334155"/>
+                </a:solidFill>
+              </a:defRPr>
+            </a:pPr>
+            <a:r>
+              <a:t>  CreditScore=Poor, Income=Low, CoSigner=No, DTIRatio=High -&gt; Default=Yes</a:t>
+            </a:r>
+          </a:p>
+          <a:p>
+            <a:pPr>
+              <a:defRPr sz="950" b="1">
+                <a:solidFill>
+                  <a:srgbClr val="2563EB"/>
+                </a:solidFill>
+              </a:defRPr>
+            </a:pPr>
+            <a:r>
+              <a:t>• Rule 4 (Lift = 4.46x | Conf = 52.46%):</a:t>
+            </a:r>
+          </a:p>
+          <a:p>
+            <a:pPr>
+              <a:spcAft>
+                <a:spcPts val="500"/>
+              </a:spcAft>
+              <a:defRPr sz="900">
+                <a:solidFill>
+                  <a:srgbClr val="334155"/>
+                </a:solidFill>
+              </a:defRPr>
+            </a:pPr>
+            <a:r>
+              <a:t>  Income=Low, CoSigner=No, LoanAmount=Large -&gt; Default=Yes</a:t>
+            </a:r>
+          </a:p>
+          <a:p>
+            <a:pPr>
+              <a:defRPr sz="950" b="1">
+                <a:solidFill>
+                  <a:srgbClr val="BE123C"/>
+                </a:solidFill>
+              </a:defRPr>
+            </a:pPr>
+            <a:r>
+              <a:t>• Key Finding:</a:t>
+            </a:r>
+          </a:p>
+          <a:p>
+            <a:pPr>
+              <a:spcAft>
+                <a:spcPts val="500"/>
+              </a:spcAft>
+              <a:defRPr sz="900">
+                <a:solidFill>
+                  <a:srgbClr val="334155"/>
+                </a:solidFill>
+              </a:defRPr>
+            </a:pPr>
+            <a:r>
+              <a:t>  Subprime credit combined with large loan size and absence of a co-signer multiplies default risk by 4.6x to 5.7x over baseline.</a:t>
+            </a:r>
+          </a:p>
+        </p:txBody>
+      </p:sp>
+    </p:spTree>
+  </p:cSld>
+  <p:clrMapOvr>
+    <a:masterClrMapping/>
+  </p:clrMapOvr>
+</p:sld>
+</file>
+
+<file path=ppt/slides/slide12.xml><?xml version="1.0" encoding="utf-8"?>
+<p:sld xmlns:a="http://schemas.openxmlformats.org/drawingml/2006/main" xmlns:p="http://schemas.openxmlformats.org/presentationml/2006/main" xmlns:r="http://schemas.openxmlformats.org/officeDocument/2006/relationships">
+  <p:cSld>
+    <p:bg>
+      <p:bgPr>
+        <a:solidFill>
+          <a:srgbClr val="F8FAFC"/>
+        </a:solidFill>
+        <a:effectLst/>
+      </p:bgPr>
+    </p:bg>
+    <p:spTree>
+      <p:nvGrpSpPr>
+        <p:cNvPr id="1" name=""/>
+        <p:cNvGrpSpPr/>
+        <p:nvPr/>
+      </p:nvGrpSpPr>
+      <p:grpSpPr/>
+      <p:sp>
+        <p:nvSpPr>
+          <p:cNvPr id="2" name="Rectangle 1"/>
+          <p:cNvSpPr/>
+          <p:nvPr/>
+        </p:nvSpPr>
+        <p:spPr>
+          <a:xfrm>
+            <a:off x="0" y="0"/>
+            <a:ext cx="12191695" cy="109728"/>
+          </a:xfrm>
+          <a:prstGeom prst="rect">
+            <a:avLst/>
+          </a:prstGeom>
+          <a:solidFill>
+            <a:srgbClr val="2563EB"/>
+          </a:solidFill>
+          <a:ln>
+            <a:noFill/>
+          </a:ln>
+        </p:spPr>
+        <p:style>
+          <a:lnRef idx="1">
+            <a:schemeClr val="accent1"/>
+          </a:lnRef>
+          <a:fillRef idx="3">
+            <a:schemeClr val="accent1"/>
+          </a:fillRef>
+          <a:effectRef idx="2">
+            <a:schemeClr val="accent1"/>
+          </a:effectRef>
+          <a:fontRef idx="minor">
+            <a:schemeClr val="lt1"/>
+          </a:fontRef>
+        </p:style>
+        <p:txBody>
+          <a:bodyPr rtlCol="0" anchor="ctr"/>
+          <a:lstStyle/>
+          <a:p>
+            <a:pPr algn="ctr"/>
+          </a:p>
+        </p:txBody>
+      </p:sp>
+      <p:sp>
+        <p:nvSpPr>
+          <p:cNvPr id="3" name="TextBox 2"/>
+          <p:cNvSpPr txBox="1"/>
+          <p:nvPr/>
+        </p:nvSpPr>
+        <p:spPr>
+          <a:xfrm>
+            <a:off x="731520" y="256032"/>
+            <a:ext cx="10698480" cy="256032"/>
+          </a:xfrm>
+          <a:prstGeom prst="rect">
+            <a:avLst/>
+          </a:prstGeom>
+          <a:noFill/>
+        </p:spPr>
+        <p:txBody>
+          <a:bodyPr wrap="square" lIns="0" tIns="0" rIns="0" bIns="0">
+            <a:spAutoFit/>
+          </a:bodyPr>
+          <a:lstStyle/>
+          <a:p>
+            <a:pPr>
+              <a:defRPr sz="1000" b="1">
+                <a:solidFill>
+                  <a:srgbClr val="2563EB"/>
+                </a:solidFill>
+              </a:defRPr>
+            </a:pPr>
+            <a:r>
+              <a:t>CSI3010 | MODULE 4: PREDICTION</a:t>
+            </a:r>
+          </a:p>
+        </p:txBody>
+      </p:sp>
+      <p:sp>
+        <p:nvSpPr>
+          <p:cNvPr id="4" name="TextBox 3"/>
+          <p:cNvSpPr txBox="1"/>
+          <p:nvPr/>
+        </p:nvSpPr>
+        <p:spPr>
+          <a:xfrm>
+            <a:off x="731520" y="502920"/>
+            <a:ext cx="10698480" cy="548640"/>
+          </a:xfrm>
+          <a:prstGeom prst="rect">
+            <a:avLst/>
+          </a:prstGeom>
+          <a:noFill/>
+        </p:spPr>
+        <p:txBody>
+          <a:bodyPr wrap="square" lIns="0" tIns="0" rIns="0" bIns="0">
+            <a:spAutoFit/>
+          </a:bodyPr>
+          <a:lstStyle/>
+          <a:p>
+            <a:pPr>
+              <a:defRPr sz="2100" b="1">
+                <a:solidFill>
+                  <a:srgbClr val="0F172A"/>
+                </a:solidFill>
+              </a:defRPr>
+            </a:pPr>
+            <a:r>
+              <a:t>Topic 4: Prediction — Concept &amp; Institutional Role</a:t>
+            </a:r>
+          </a:p>
+        </p:txBody>
+      </p:sp>
+      <p:sp>
+        <p:nvSpPr>
+          <p:cNvPr id="5" name="Rounded Rectangle 4"/>
+          <p:cNvSpPr/>
+          <p:nvPr/>
+        </p:nvSpPr>
+        <p:spPr>
+          <a:xfrm>
+            <a:off x="731520" y="1234440"/>
+            <a:ext cx="5212080" cy="2468880"/>
+          </a:xfrm>
+          <a:prstGeom prst="roundRect">
+            <a:avLst/>
+          </a:prstGeom>
+          <a:solidFill>
+            <a:srgbClr val="EEF2FF"/>
+          </a:solidFill>
+          <a:ln w="12700">
+            <a:solidFill>
+              <a:srgbClr val="2563EB"/>
+            </a:solidFill>
+          </a:ln>
+        </p:spPr>
+        <p:style>
+          <a:lnRef idx="1">
+            <a:schemeClr val="accent1"/>
+          </a:lnRef>
+          <a:fillRef idx="3">
+            <a:schemeClr val="accent1"/>
+          </a:fillRef>
+          <a:effectRef idx="2">
+            <a:schemeClr val="accent1"/>
+          </a:effectRef>
+          <a:fontRef idx="minor">
+            <a:schemeClr val="lt1"/>
+          </a:fontRef>
+        </p:style>
+        <p:txBody>
+          <a:bodyPr rtlCol="0" anchor="ctr"/>
+          <a:lstStyle/>
+          <a:p>
+            <a:pPr algn="ctr"/>
+          </a:p>
+        </p:txBody>
+      </p:sp>
+      <p:sp>
+        <p:nvSpPr>
+          <p:cNvPr id="6" name="TextBox 5"/>
+          <p:cNvSpPr txBox="1"/>
+          <p:nvPr/>
+        </p:nvSpPr>
+        <p:spPr>
+          <a:xfrm>
+            <a:off x="914400" y="1371600"/>
+            <a:ext cx="4846320" cy="2194560"/>
+          </a:xfrm>
+          <a:prstGeom prst="rect">
+            <a:avLst/>
+          </a:prstGeom>
+          <a:noFill/>
+        </p:spPr>
+        <p:txBody>
+          <a:bodyPr wrap="square">
+            <a:spAutoFit/>
+          </a:bodyPr>
+          <a:lstStyle/>
+          <a:p>
+            <a:pPr>
+              <a:spcAft>
+                <a:spcPts val="600"/>
+              </a:spcAft>
+              <a:defRPr sz="1200" b="1">
+                <a:solidFill>
+                  <a:srgbClr val="2563EB"/>
+                </a:solidFill>
+              </a:defRPr>
+            </a:pPr>
+            <a:r>
+              <a:t>1. WHY We Used It (The Problem / Need)</a:t>
+            </a:r>
+          </a:p>
+          <a:p>
+            <a:pPr>
+              <a:spcAft>
+                <a:spcPts val="400"/>
+              </a:spcAft>
+              <a:defRPr sz="1000">
+                <a:solidFill>
+                  <a:srgbClr val="334155"/>
+                </a:solidFill>
+              </a:defRPr>
+            </a:pPr>
+            <a:r>
+              <a:t>• Real-world fintech does not use binary 0/1 hard decisions; credit risk is a continuous probability.</a:t>
+            </a:r>
+          </a:p>
+          <a:p>
+            <a:pPr>
+              <a:spcAft>
+                <a:spcPts val="400"/>
+              </a:spcAft>
+              <a:defRPr sz="1000">
+                <a:solidFill>
+                  <a:srgbClr val="334155"/>
+                </a:solidFill>
+              </a:defRPr>
+            </a:pPr>
+            <a:r>
+              <a:t>• Loan pricing, interest rates, and regulatory capital reserves require an exact probability: P(Default=1).</a:t>
+            </a:r>
+          </a:p>
+          <a:p>
+            <a:pPr>
+              <a:spcAft>
+                <a:spcPts val="400"/>
+              </a:spcAft>
+              <a:defRPr sz="1000">
+                <a:solidFill>
+                  <a:srgbClr val="334155"/>
+                </a:solidFill>
+              </a:defRPr>
+            </a:pPr>
+            <a:r>
+              <a:t>• Borrowers with 21% risk require very different underwriting actions than those with 95% risk.</a:t>
+            </a:r>
+          </a:p>
+        </p:txBody>
+      </p:sp>
+      <p:sp>
+        <p:nvSpPr>
+          <p:cNvPr id="7" name="Rounded Rectangle 6"/>
+          <p:cNvSpPr/>
+          <p:nvPr/>
+        </p:nvSpPr>
+        <p:spPr>
+          <a:xfrm>
+            <a:off x="6217920" y="1234440"/>
+            <a:ext cx="5242255" cy="2468880"/>
+          </a:xfrm>
+          <a:prstGeom prst="roundRect">
+            <a:avLst/>
+          </a:prstGeom>
+          <a:solidFill>
+            <a:srgbClr val="ECFDF5"/>
+          </a:solidFill>
+          <a:ln w="12700">
+            <a:solidFill>
+              <a:srgbClr val="10B981"/>
+            </a:solidFill>
+          </a:ln>
+        </p:spPr>
+        <p:style>
+          <a:lnRef idx="1">
+            <a:schemeClr val="accent1"/>
+          </a:lnRef>
+          <a:fillRef idx="3">
+            <a:schemeClr val="accent1"/>
+          </a:fillRef>
+          <a:effectRef idx="2">
+            <a:schemeClr val="accent1"/>
+          </a:effectRef>
+          <a:fontRef idx="minor">
+            <a:schemeClr val="lt1"/>
+          </a:fontRef>
+        </p:style>
+        <p:txBody>
+          <a:bodyPr rtlCol="0" anchor="ctr"/>
+          <a:lstStyle/>
+          <a:p>
+            <a:pPr algn="ctr"/>
+          </a:p>
+        </p:txBody>
+      </p:sp>
+      <p:sp>
+        <p:nvSpPr>
+          <p:cNvPr id="8" name="TextBox 7"/>
+          <p:cNvSpPr txBox="1"/>
+          <p:nvPr/>
+        </p:nvSpPr>
+        <p:spPr>
+          <a:xfrm>
+            <a:off x="6400800" y="1371600"/>
+            <a:ext cx="4876495" cy="2194560"/>
+          </a:xfrm>
+          <a:prstGeom prst="rect">
+            <a:avLst/>
+          </a:prstGeom>
+          <a:noFill/>
+        </p:spPr>
+        <p:txBody>
+          <a:bodyPr wrap="square">
+            <a:spAutoFit/>
+          </a:bodyPr>
+          <a:lstStyle/>
+          <a:p>
+            <a:pPr>
+              <a:spcAft>
+                <a:spcPts val="600"/>
+              </a:spcAft>
+              <a:defRPr sz="1200" b="1">
+                <a:solidFill>
+                  <a:srgbClr val="10B981"/>
+                </a:solidFill>
+              </a:defRPr>
+            </a:pPr>
+            <a:r>
+              <a:t>2. HOW We Used It (Methodology &amp; Pipeline)</a:t>
+            </a:r>
+          </a:p>
+          <a:p>
+            <a:pPr>
+              <a:spcAft>
+                <a:spcPts val="400"/>
+              </a:spcAft>
+              <a:defRPr sz="1000">
+                <a:solidFill>
+                  <a:srgbClr val="334155"/>
+                </a:solidFill>
+              </a:defRPr>
+            </a:pPr>
+            <a:r>
+              <a:t>• Built LoanDefaultPredictor wrapping the preprocessor and champion Gradient Boosting model.</a:t>
+            </a:r>
+          </a:p>
+          <a:p>
+            <a:pPr>
+              <a:spcAft>
+                <a:spcPts val="400"/>
+              </a:spcAft>
+              <a:defRPr sz="1000">
+                <a:solidFill>
+                  <a:srgbClr val="334155"/>
+                </a:solidFill>
+              </a:defRPr>
+            </a:pPr>
+            <a:r>
+              <a:t>• Computes continuous probability P(Default=1) in [0.0, 1.0] for any raw borrower dictionary payload.</a:t>
+            </a:r>
+          </a:p>
+          <a:p>
+            <a:pPr>
+              <a:spcAft>
+                <a:spcPts val="400"/>
+              </a:spcAft>
+              <a:defRPr sz="1000">
+                <a:solidFill>
+                  <a:srgbClr val="334155"/>
+                </a:solidFill>
+              </a:defRPr>
+            </a:pPr>
+            <a:r>
+              <a:t>• Evaluated probability calibration quality on test data using Brier Score Loss (0.0168) and Log Loss (0.0622).</a:t>
+            </a:r>
+          </a:p>
+        </p:txBody>
+      </p:sp>
+      <p:sp>
+        <p:nvSpPr>
+          <p:cNvPr id="9" name="Rounded Rectangle 8"/>
+          <p:cNvSpPr/>
+          <p:nvPr/>
+        </p:nvSpPr>
+        <p:spPr>
+          <a:xfrm>
+            <a:off x="731520" y="3886200"/>
+            <a:ext cx="5212080" cy="2560320"/>
+          </a:xfrm>
+          <a:prstGeom prst="roundRect">
+            <a:avLst/>
+          </a:prstGeom>
+          <a:solidFill>
+            <a:srgbClr val="FEF9C3"/>
+          </a:solidFill>
+          <a:ln w="12700">
+            <a:solidFill>
+              <a:srgbClr val="CA8A04"/>
+            </a:solidFill>
+          </a:ln>
+        </p:spPr>
+        <p:style>
+          <a:lnRef idx="1">
+            <a:schemeClr val="accent1"/>
+          </a:lnRef>
+          <a:fillRef idx="3">
+            <a:schemeClr val="accent1"/>
+          </a:fillRef>
+          <a:effectRef idx="2">
+            <a:schemeClr val="accent1"/>
+          </a:effectRef>
+          <a:fontRef idx="minor">
+            <a:schemeClr val="lt1"/>
+          </a:fontRef>
+        </p:style>
+        <p:txBody>
+          <a:bodyPr rtlCol="0" anchor="ctr"/>
+          <a:lstStyle/>
+          <a:p>
+            <a:pPr algn="ctr"/>
+          </a:p>
+        </p:txBody>
+      </p:sp>
+      <p:sp>
+        <p:nvSpPr>
+          <p:cNvPr id="10" name="TextBox 9"/>
+          <p:cNvSpPr txBox="1"/>
+          <p:nvPr/>
+        </p:nvSpPr>
+        <p:spPr>
+          <a:xfrm>
+            <a:off x="914400" y="4023360"/>
+            <a:ext cx="4846320" cy="2286000"/>
+          </a:xfrm>
+          <a:prstGeom prst="rect">
+            <a:avLst/>
+          </a:prstGeom>
+          <a:noFill/>
+        </p:spPr>
+        <p:txBody>
+          <a:bodyPr wrap="square">
+            <a:spAutoFit/>
+          </a:bodyPr>
+          <a:lstStyle/>
+          <a:p>
+            <a:pPr>
+              <a:spcAft>
+                <a:spcPts val="600"/>
+              </a:spcAft>
+              <a:defRPr sz="1200" b="1">
+                <a:solidFill>
+                  <a:srgbClr val="CA8A04"/>
+                </a:solidFill>
+              </a:defRPr>
+            </a:pPr>
+            <a:r>
+              <a:t>3. WHAT It Does in Our Project (System Role)</a:t>
+            </a:r>
+          </a:p>
+          <a:p>
+            <a:pPr>
+              <a:spcAft>
+                <a:spcPts val="400"/>
+              </a:spcAft>
+              <a:defRPr sz="1000">
+                <a:solidFill>
+                  <a:srgbClr val="334155"/>
+                </a:solidFill>
+              </a:defRPr>
+            </a:pPr>
+            <a:r>
+              <a:t>• Transforms raw applicant data in real time and predicts continuous default probability.</a:t>
+            </a:r>
+          </a:p>
+          <a:p>
+            <a:pPr>
+              <a:spcAft>
+                <a:spcPts val="400"/>
+              </a:spcAft>
+              <a:defRPr sz="1000">
+                <a:solidFill>
+                  <a:srgbClr val="334155"/>
+                </a:solidFill>
+              </a:defRPr>
+            </a:pPr>
+            <a:r>
+              <a:t>• Maps probabilities into 4 clear risk tier badges: Low (&lt;20%), Moderate (20-45%), High (45-70%), Critical (&gt;=70%).</a:t>
+            </a:r>
+          </a:p>
+          <a:p>
+            <a:pPr>
+              <a:spcAft>
+                <a:spcPts val="400"/>
+              </a:spcAft>
+              <a:defRPr sz="1000">
+                <a:solidFill>
+                  <a:srgbClr val="334155"/>
+                </a:solidFill>
+              </a:defRPr>
+            </a:pPr>
+            <a:r>
+              <a:t>• Automatically extracts specific contributing risk factors (e.g. DTI &gt; 45%, Credit &lt; 600, No Co-Signer).</a:t>
+            </a:r>
+          </a:p>
+        </p:txBody>
+      </p:sp>
+      <p:sp>
+        <p:nvSpPr>
+          <p:cNvPr id="11" name="Rounded Rectangle 10"/>
+          <p:cNvSpPr/>
+          <p:nvPr/>
+        </p:nvSpPr>
+        <p:spPr>
+          <a:xfrm>
+            <a:off x="6217920" y="3886200"/>
+            <a:ext cx="5242255" cy="2560320"/>
+          </a:xfrm>
+          <a:prstGeom prst="roundRect">
+            <a:avLst/>
+          </a:prstGeom>
+          <a:solidFill>
+            <a:srgbClr val="F5F3FF"/>
+          </a:solidFill>
+          <a:ln w="12700">
+            <a:solidFill>
+              <a:srgbClr val="9333EA"/>
+            </a:solidFill>
+          </a:ln>
+        </p:spPr>
+        <p:style>
+          <a:lnRef idx="1">
+            <a:schemeClr val="accent1"/>
+          </a:lnRef>
+          <a:fillRef idx="3">
+            <a:schemeClr val="accent1"/>
+          </a:fillRef>
+          <a:effectRef idx="2">
+            <a:schemeClr val="accent1"/>
+          </a:effectRef>
+          <a:fontRef idx="minor">
+            <a:schemeClr val="lt1"/>
+          </a:fontRef>
+        </p:style>
+        <p:txBody>
+          <a:bodyPr rtlCol="0" anchor="ctr"/>
+          <a:lstStyle/>
+          <a:p>
+            <a:pPr algn="ctr"/>
+          </a:p>
+        </p:txBody>
+      </p:sp>
+      <p:sp>
+        <p:nvSpPr>
+          <p:cNvPr id="12" name="TextBox 11"/>
+          <p:cNvSpPr txBox="1"/>
+          <p:nvPr/>
+        </p:nvSpPr>
+        <p:spPr>
+          <a:xfrm>
+            <a:off x="6400800" y="4023360"/>
+            <a:ext cx="4876495" cy="2286000"/>
+          </a:xfrm>
+          <a:prstGeom prst="rect">
+            <a:avLst/>
+          </a:prstGeom>
+          <a:noFill/>
+        </p:spPr>
+        <p:txBody>
+          <a:bodyPr wrap="square">
+            <a:spAutoFit/>
+          </a:bodyPr>
+          <a:lstStyle/>
+          <a:p>
+            <a:pPr>
+              <a:spcAft>
+                <a:spcPts val="600"/>
+              </a:spcAft>
+              <a:defRPr sz="1200" b="1">
+                <a:solidFill>
+                  <a:srgbClr val="9333EA"/>
+                </a:solidFill>
+              </a:defRPr>
+            </a:pPr>
+            <a:r>
+              <a:t>4. PRACTICAL USE (Underwriting &amp; Business Value)</a:t>
+            </a:r>
+          </a:p>
+          <a:p>
+            <a:pPr>
+              <a:spcAft>
+                <a:spcPts val="400"/>
+              </a:spcAft>
+              <a:defRPr sz="1000">
+                <a:solidFill>
+                  <a:srgbClr val="334155"/>
+                </a:solidFill>
+              </a:defRPr>
+            </a:pPr>
+            <a:r>
+              <a:t>• Risk-Based Loan Pricing: Low risk applicants get prime APR (4.5%); higher risk gets compensatory pricing.</a:t>
+            </a:r>
+          </a:p>
+          <a:p>
+            <a:pPr>
+              <a:spcAft>
+                <a:spcPts val="400"/>
+              </a:spcAft>
+              <a:defRPr sz="1000">
+                <a:solidFill>
+                  <a:srgbClr val="334155"/>
+                </a:solidFill>
+              </a:defRPr>
+            </a:pPr>
+            <a:r>
+              <a:t>• Automated Adverse Action Notices: Explains to applicants exactly why their loan terms were adjusted.</a:t>
+            </a:r>
+          </a:p>
+          <a:p>
+            <a:pPr>
+              <a:spcAft>
+                <a:spcPts val="400"/>
+              </a:spcAft>
+              <a:defRPr sz="1000">
+                <a:solidFill>
+                  <a:srgbClr val="334155"/>
+                </a:solidFill>
+              </a:defRPr>
+            </a:pPr>
+            <a:r>
+              <a:t>• Live Web Integration: Powers the interactive real-time loan underwriting simulator in Review 3.</a:t>
+            </a:r>
+          </a:p>
+        </p:txBody>
+      </p:sp>
+    </p:spTree>
+  </p:cSld>
+  <p:clrMapOvr>
+    <a:masterClrMapping/>
+  </p:clrMapOvr>
+</p:sld>
+</file>
+
+<file path=ppt/slides/slide13.xml><?xml version="1.0" encoding="utf-8"?>
+<p:sld xmlns:a="http://schemas.openxmlformats.org/drawingml/2006/main" xmlns:p="http://schemas.openxmlformats.org/presentationml/2006/main" xmlns:r="http://schemas.openxmlformats.org/officeDocument/2006/relationships">
+  <p:cSld>
+    <p:bg>
+      <p:bgPr>
+        <a:solidFill>
+          <a:srgbClr val="F8FAFC"/>
+        </a:solidFill>
+        <a:effectLst/>
+      </p:bgPr>
+    </p:bg>
+    <p:spTree>
+      <p:nvGrpSpPr>
+        <p:cNvPr id="1" name=""/>
+        <p:cNvGrpSpPr/>
+        <p:nvPr/>
+      </p:nvGrpSpPr>
+      <p:grpSpPr/>
+      <p:sp>
+        <p:nvSpPr>
+          <p:cNvPr id="2" name="Rectangle 1"/>
+          <p:cNvSpPr/>
+          <p:nvPr/>
+        </p:nvSpPr>
+        <p:spPr>
+          <a:xfrm>
+            <a:off x="0" y="0"/>
+            <a:ext cx="12191695" cy="109728"/>
+          </a:xfrm>
+          <a:prstGeom prst="rect">
+            <a:avLst/>
+          </a:prstGeom>
+          <a:solidFill>
+            <a:srgbClr val="2563EB"/>
+          </a:solidFill>
+          <a:ln>
+            <a:noFill/>
+          </a:ln>
+        </p:spPr>
+        <p:style>
+          <a:lnRef idx="1">
+            <a:schemeClr val="accent1"/>
+          </a:lnRef>
+          <a:fillRef idx="3">
+            <a:schemeClr val="accent1"/>
+          </a:fillRef>
+          <a:effectRef idx="2">
+            <a:schemeClr val="accent1"/>
+          </a:effectRef>
+          <a:fontRef idx="minor">
+            <a:schemeClr val="lt1"/>
+          </a:fontRef>
+        </p:style>
+        <p:txBody>
+          <a:bodyPr rtlCol="0" anchor="ctr"/>
+          <a:lstStyle/>
+          <a:p>
+            <a:pPr algn="ctr"/>
+          </a:p>
+        </p:txBody>
+      </p:sp>
+      <p:sp>
+        <p:nvSpPr>
+          <p:cNvPr id="3" name="TextBox 2"/>
+          <p:cNvSpPr txBox="1"/>
+          <p:nvPr/>
+        </p:nvSpPr>
+        <p:spPr>
+          <a:xfrm>
+            <a:off x="731520" y="256032"/>
+            <a:ext cx="10698480" cy="256032"/>
+          </a:xfrm>
+          <a:prstGeom prst="rect">
+            <a:avLst/>
+          </a:prstGeom>
+          <a:noFill/>
+        </p:spPr>
+        <p:txBody>
+          <a:bodyPr wrap="square" lIns="0" tIns="0" rIns="0" bIns="0">
+            <a:spAutoFit/>
+          </a:bodyPr>
+          <a:lstStyle/>
+          <a:p>
+            <a:pPr>
+              <a:defRPr sz="1000" b="1">
+                <a:solidFill>
+                  <a:srgbClr val="2563EB"/>
+                </a:solidFill>
+              </a:defRPr>
+            </a:pPr>
+            <a:r>
+              <a:t>CSI3010: DATA WAREHOUSING &amp; DATA MINING | REVIEW 2</a:t>
+            </a:r>
+          </a:p>
+        </p:txBody>
+      </p:sp>
+      <p:sp>
+        <p:nvSpPr>
+          <p:cNvPr id="4" name="TextBox 3"/>
+          <p:cNvSpPr txBox="1"/>
+          <p:nvPr/>
+        </p:nvSpPr>
+        <p:spPr>
+          <a:xfrm>
+            <a:off x="731520" y="502920"/>
+            <a:ext cx="10698480" cy="548640"/>
+          </a:xfrm>
+          <a:prstGeom prst="rect">
+            <a:avLst/>
+          </a:prstGeom>
+          <a:noFill/>
+        </p:spPr>
+        <p:txBody>
+          <a:bodyPr wrap="square" lIns="0" tIns="0" rIns="0" bIns="0">
+            <a:spAutoFit/>
+          </a:bodyPr>
+          <a:lstStyle/>
+          <a:p>
+            <a:pPr>
+              <a:defRPr sz="2100" b="1">
+                <a:solidFill>
+                  <a:srgbClr val="0F172A"/>
+                </a:solidFill>
+              </a:defRPr>
+            </a:pPr>
+            <a:r>
+              <a:t>Prediction Engine: Continuous Scoring Code &amp; Policy Tiers</a:t>
+            </a:r>
+          </a:p>
+        </p:txBody>
+      </p:sp>
+      <p:sp>
+        <p:nvSpPr>
+          <p:cNvPr id="5" name="Rounded Rectangle 4"/>
+          <p:cNvSpPr/>
+          <p:nvPr/>
+        </p:nvSpPr>
+        <p:spPr>
+          <a:xfrm>
+            <a:off x="731520" y="1234440"/>
+            <a:ext cx="4754880" cy="5120640"/>
+          </a:xfrm>
+          <a:prstGeom prst="roundRect">
+            <a:avLst/>
+          </a:prstGeom>
+          <a:solidFill>
+            <a:srgbClr val="0F172A"/>
+          </a:solidFill>
+          <a:ln w="12700">
+            <a:solidFill>
+              <a:srgbClr val="334155"/>
+            </a:solidFill>
+          </a:ln>
+        </p:spPr>
+        <p:style>
+          <a:lnRef idx="1">
+            <a:schemeClr val="accent1"/>
+          </a:lnRef>
+          <a:fillRef idx="3">
+            <a:schemeClr val="accent1"/>
+          </a:fillRef>
+          <a:effectRef idx="2">
+            <a:schemeClr val="accent1"/>
+          </a:effectRef>
+          <a:fontRef idx="minor">
+            <a:schemeClr val="lt1"/>
+          </a:fontRef>
+        </p:style>
+        <p:txBody>
+          <a:bodyPr rtlCol="0" anchor="ctr"/>
+          <a:lstStyle/>
+          <a:p>
+            <a:pPr algn="ctr"/>
+          </a:p>
+        </p:txBody>
+      </p:sp>
+      <p:sp>
+        <p:nvSpPr>
+          <p:cNvPr id="6" name="TextBox 5"/>
+          <p:cNvSpPr txBox="1"/>
+          <p:nvPr/>
+        </p:nvSpPr>
+        <p:spPr>
+          <a:xfrm>
+            <a:off x="914400" y="1344168"/>
+            <a:ext cx="4389120" cy="274320"/>
+          </a:xfrm>
+          <a:prstGeom prst="rect">
+            <a:avLst/>
+          </a:prstGeom>
+          <a:noFill/>
+        </p:spPr>
+        <p:txBody>
+          <a:bodyPr wrap="square" lIns="0" tIns="0" rIns="0" bIns="0">
+            <a:spAutoFit/>
+          </a:bodyPr>
+          <a:lstStyle/>
+          <a:p>
+            <a:pPr>
+              <a:defRPr sz="950" b="1">
+                <a:solidFill>
+                  <a:srgbClr val="10B981"/>
+                </a:solidFill>
+              </a:defRPr>
+            </a:pPr>
+            <a:r>
+              <a:t>⚙  predictor.py</a:t>
+            </a:r>
+          </a:p>
+        </p:txBody>
+      </p:sp>
+      <p:sp>
+        <p:nvSpPr>
+          <p:cNvPr id="7" name="TextBox 6"/>
+          <p:cNvSpPr txBox="1"/>
+          <p:nvPr/>
+        </p:nvSpPr>
+        <p:spPr>
+          <a:xfrm>
+            <a:off x="914400" y="1645920"/>
+            <a:ext cx="4389120" cy="4617720"/>
+          </a:xfrm>
+          <a:prstGeom prst="rect">
+            <a:avLst/>
+          </a:prstGeom>
+          <a:noFill/>
+        </p:spPr>
+        <p:txBody>
+          <a:bodyPr wrap="square" lIns="0" tIns="0" rIns="0" bIns="0">
+            <a:spAutoFit/>
+          </a:bodyPr>
+          <a:lstStyle/>
+          <a:p>
+            <a:pPr>
+              <a:defRPr sz="850">
+                <a:solidFill>
+                  <a:srgbClr val="94A3B8"/>
+                </a:solidFill>
+                <a:latin typeface="Consolas"/>
+              </a:defRPr>
+            </a:pPr>
+            <a:r>
+              <a:t># prediction/predictor.py</a:t>
+            </a:r>
+          </a:p>
+          <a:p>
+            <a:pPr>
+              <a:defRPr sz="850">
+                <a:solidFill>
+                  <a:srgbClr val="93C5FD"/>
+                </a:solidFill>
+                <a:latin typeface="Consolas"/>
+              </a:defRPr>
+            </a:pPr>
+            <a:r>
+              <a:t>class LoanDefaultPredictor:</a:t>
+            </a:r>
+          </a:p>
+          <a:p>
+            <a:pPr>
+              <a:defRPr sz="850">
+                <a:solidFill>
+                  <a:srgbClr val="93C5FD"/>
+                </a:solidFill>
+                <a:latin typeface="Consolas"/>
+              </a:defRPr>
+            </a:pPr>
+            <a:r>
+              <a:t>    def predict_borrower_risk(self, borrower_data):</a:t>
+            </a:r>
+          </a:p>
+          <a:p>
+            <a:pPr>
+              <a:defRPr sz="850">
+                <a:solidFill>
+                  <a:srgbClr val="94A3B8"/>
+                </a:solidFill>
+                <a:latin typeface="Consolas"/>
+              </a:defRPr>
+            </a:pPr>
+            <a:r>
+              <a:t>        # Preprocessing transform</a:t>
+            </a:r>
+          </a:p>
+          <a:p>
+            <a:pPr>
+              <a:defRPr sz="850">
+                <a:solidFill>
+                  <a:srgbClr val="F1F5F9"/>
+                </a:solidFill>
+                <a:latin typeface="Consolas"/>
+              </a:defRPr>
+            </a:pPr>
+            <a:r>
+              <a:t>        df_input = pd.DataFrame([borrower_data])</a:t>
+            </a:r>
+          </a:p>
+          <a:p>
+            <a:pPr>
+              <a:defRPr sz="850">
+                <a:solidFill>
+                  <a:srgbClr val="F1F5F9"/>
+                </a:solidFill>
+                <a:latin typeface="Consolas"/>
+              </a:defRPr>
+            </a:pPr>
+            <a:r>
+              <a:t>        X_trans = self.preprocessor.transform(df_input)</a:t>
+            </a:r>
+          </a:p>
+          <a:p>
+            <a:pPr>
+              <a:defRPr sz="850">
+                <a:solidFill>
+                  <a:srgbClr val="F1F5F9"/>
+                </a:solidFill>
+                <a:latin typeface="Consolas"/>
+              </a:defRPr>
+            </a:pPr>
+            <a:r>
+              <a:t>        </a:t>
+            </a:r>
+          </a:p>
+          <a:p>
+            <a:pPr>
+              <a:defRPr sz="850">
+                <a:solidFill>
+                  <a:srgbClr val="94A3B8"/>
+                </a:solidFill>
+                <a:latin typeface="Consolas"/>
+              </a:defRPr>
+            </a:pPr>
+            <a:r>
+              <a:t>        # Continuous probability P(Default=1)</a:t>
+            </a:r>
+          </a:p>
+          <a:p>
+            <a:pPr>
+              <a:defRPr sz="850">
+                <a:solidFill>
+                  <a:srgbClr val="F1F5F9"/>
+                </a:solidFill>
+                <a:latin typeface="Consolas"/>
+              </a:defRPr>
+            </a:pPr>
+            <a:r>
+              <a:t>        prob = float(self.model.predict_proba(X_trans)[0, 1])</a:t>
+            </a:r>
+          </a:p>
+          <a:p>
+            <a:pPr>
+              <a:defRPr sz="850">
+                <a:solidFill>
+                  <a:srgbClr val="F1F5F9"/>
+                </a:solidFill>
+                <a:latin typeface="Consolas"/>
+              </a:defRPr>
+            </a:pPr>
+            <a:r>
+              <a:t>        </a:t>
+            </a:r>
+          </a:p>
+          <a:p>
+            <a:pPr>
+              <a:defRPr sz="850">
+                <a:solidFill>
+                  <a:srgbClr val="94A3B8"/>
+                </a:solidFill>
+                <a:latin typeface="Consolas"/>
+              </a:defRPr>
+            </a:pPr>
+            <a:r>
+              <a:t>        # 4-Tier Risk Categorization</a:t>
+            </a:r>
+          </a:p>
+          <a:p>
+            <a:pPr>
+              <a:defRPr sz="850">
+                <a:solidFill>
+                  <a:srgbClr val="93C5FD"/>
+                </a:solidFill>
+                <a:latin typeface="Consolas"/>
+              </a:defRPr>
+            </a:pPr>
+            <a:r>
+              <a:t>        if prob &lt; 0.20:   tier = 'Low Risk'</a:t>
+            </a:r>
+          </a:p>
+          <a:p>
+            <a:pPr>
+              <a:defRPr sz="850">
+                <a:solidFill>
+                  <a:srgbClr val="93C5FD"/>
+                </a:solidFill>
+                <a:latin typeface="Consolas"/>
+              </a:defRPr>
+            </a:pPr>
+            <a:r>
+              <a:t>        elif prob &lt; 0.45: tier = 'Moderate Risk'</a:t>
+            </a:r>
+          </a:p>
+          <a:p>
+            <a:pPr>
+              <a:defRPr sz="850">
+                <a:solidFill>
+                  <a:srgbClr val="93C5FD"/>
+                </a:solidFill>
+                <a:latin typeface="Consolas"/>
+              </a:defRPr>
+            </a:pPr>
+            <a:r>
+              <a:t>        elif prob &lt; 0.70: tier = 'High Risk'</a:t>
+            </a:r>
+          </a:p>
+          <a:p>
+            <a:pPr>
+              <a:defRPr sz="850">
+                <a:solidFill>
+                  <a:srgbClr val="93C5FD"/>
+                </a:solidFill>
+                <a:latin typeface="Consolas"/>
+              </a:defRPr>
+            </a:pPr>
+            <a:r>
+              <a:t>        else:             tier = 'Critical Risk'</a:t>
+            </a:r>
+          </a:p>
+          <a:p>
+            <a:pPr>
+              <a:defRPr sz="850">
+                <a:solidFill>
+                  <a:srgbClr val="F1F5F9"/>
+                </a:solidFill>
+                <a:latin typeface="Consolas"/>
+              </a:defRPr>
+            </a:pPr>
+            <a:r>
+              <a:t>        </a:t>
+            </a:r>
+          </a:p>
+          <a:p>
+            <a:pPr>
+              <a:defRPr sz="850">
+                <a:solidFill>
+                  <a:srgbClr val="93C5FD"/>
+                </a:solidFill>
+                <a:latin typeface="Consolas"/>
+              </a:defRPr>
+            </a:pPr>
+            <a:r>
+              <a:t>        return {'prob': prob, 'tier': tier, 'factors': warnings}</a:t>
+            </a:r>
+          </a:p>
+        </p:txBody>
+      </p:sp>
+      <p:sp>
+        <p:nvSpPr>
+          <p:cNvPr id="8" name="Rounded Rectangle 7"/>
+          <p:cNvSpPr/>
+          <p:nvPr/>
+        </p:nvSpPr>
+        <p:spPr>
+          <a:xfrm>
+            <a:off x="5669280" y="1234440"/>
+            <a:ext cx="5790895" cy="1554480"/>
+          </a:xfrm>
+          <a:prstGeom prst="roundRect">
+            <a:avLst/>
+          </a:prstGeom>
+          <a:solidFill>
+            <a:srgbClr val="EEF2FF"/>
+          </a:solidFill>
+          <a:ln w="12700">
+            <a:solidFill>
+              <a:srgbClr val="2563EB"/>
+            </a:solidFill>
+          </a:ln>
+        </p:spPr>
+        <p:style>
+          <a:lnRef idx="1">
+            <a:schemeClr val="accent1"/>
+          </a:lnRef>
+          <a:fillRef idx="3">
+            <a:schemeClr val="accent1"/>
+          </a:fillRef>
+          <a:effectRef idx="2">
+            <a:schemeClr val="accent1"/>
+          </a:effectRef>
+          <a:fontRef idx="minor">
+            <a:schemeClr val="lt1"/>
+          </a:fontRef>
+        </p:style>
+        <p:txBody>
+          <a:bodyPr rtlCol="0" anchor="ctr"/>
+          <a:lstStyle/>
+          <a:p>
+            <a:pPr algn="ctr"/>
+          </a:p>
+        </p:txBody>
+      </p:sp>
+      <p:sp>
+        <p:nvSpPr>
+          <p:cNvPr id="9" name="TextBox 8"/>
+          <p:cNvSpPr txBox="1"/>
+          <p:nvPr/>
+        </p:nvSpPr>
+        <p:spPr>
+          <a:xfrm>
+            <a:off x="5806440" y="1325880"/>
+            <a:ext cx="5486400" cy="1371600"/>
+          </a:xfrm>
+          <a:prstGeom prst="rect">
+            <a:avLst/>
+          </a:prstGeom>
+          <a:noFill/>
+        </p:spPr>
+        <p:txBody>
+          <a:bodyPr wrap="square">
+            <a:spAutoFit/>
+          </a:bodyPr>
+          <a:lstStyle/>
+          <a:p>
+            <a:pPr>
+              <a:spcAft>
+                <a:spcPts val="400"/>
+              </a:spcAft>
+              <a:defRPr sz="1200" b="1">
+                <a:solidFill>
+                  <a:srgbClr val="2563EB"/>
+                </a:solidFill>
+              </a:defRPr>
+            </a:pPr>
+            <a:r>
+              <a:t>Probability Calibration Metrics</a:t>
+            </a:r>
+          </a:p>
+          <a:p>
+            <a:pPr>
+              <a:defRPr sz="950">
+                <a:solidFill>
+                  <a:srgbClr val="334155"/>
+                </a:solidFill>
+              </a:defRPr>
+            </a:pPr>
+            <a:r>
+              <a:t>• Brier Score: 0.0168 (near zero indicates exceptional probability calibration quality)</a:t>
+            </a:r>
+          </a:p>
+          <a:p>
+            <a:pPr>
+              <a:defRPr sz="950">
+                <a:solidFill>
+                  <a:srgbClr val="334155"/>
+                </a:solidFill>
+              </a:defRPr>
+            </a:pPr>
+            <a:r>
+              <a:t>• Test Set ROC-AUC: 0.9973  |  Model Log Loss: 0.0622</a:t>
+            </a:r>
+          </a:p>
+          <a:p>
+            <a:pPr>
+              <a:defRPr sz="950">
+                <a:solidFill>
+                  <a:srgbClr val="334155"/>
+                </a:solidFill>
+              </a:defRPr>
+            </a:pPr>
+            <a:r>
+              <a:t>• Sample Prime Scoring: Credit 810, DTI 0.15 -&gt; P(Default) = 0.02% (Low Risk Badge)</a:t>
+            </a:r>
+          </a:p>
+          <a:p>
+            <a:pPr>
+              <a:defRPr sz="950">
+                <a:solidFill>
+                  <a:srgbClr val="334155"/>
+                </a:solidFill>
+              </a:defRPr>
+            </a:pPr>
+            <a:r>
+              <a:t>• Sample Subprime Scoring: Credit 420, DTI 0.82 -&gt; P(Default) = 99.99% (Critical Risk Badge)</a:t>
+            </a:r>
+          </a:p>
+        </p:txBody>
+      </p:sp>
+      <p:sp>
+        <p:nvSpPr>
+          <p:cNvPr id="10" name="Rounded Rectangle 9"/>
+          <p:cNvSpPr/>
+          <p:nvPr/>
+        </p:nvSpPr>
+        <p:spPr>
+          <a:xfrm>
+            <a:off x="5669280" y="2926080"/>
+            <a:ext cx="5790895" cy="3429000"/>
+          </a:xfrm>
+          <a:prstGeom prst="roundRect">
+            <a:avLst/>
+          </a:prstGeom>
+          <a:solidFill>
+            <a:srgbClr val="FFFFFF"/>
+          </a:solidFill>
+          <a:ln w="12700">
+            <a:solidFill>
+              <a:srgbClr val="E2E8F0"/>
+            </a:solidFill>
+          </a:ln>
+        </p:spPr>
+        <p:style>
+          <a:lnRef idx="1">
+            <a:schemeClr val="accent1"/>
+          </a:lnRef>
+          <a:fillRef idx="3">
+            <a:schemeClr val="accent1"/>
+          </a:fillRef>
+          <a:effectRef idx="2">
+            <a:schemeClr val="accent1"/>
+          </a:effectRef>
+          <a:fontRef idx="minor">
+            <a:schemeClr val="lt1"/>
+          </a:fontRef>
+        </p:style>
+        <p:txBody>
+          <a:bodyPr rtlCol="0" anchor="ctr"/>
+          <a:lstStyle/>
+          <a:p>
+            <a:pPr algn="ctr"/>
+          </a:p>
+        </p:txBody>
+      </p:sp>
+      <p:sp>
+        <p:nvSpPr>
+          <p:cNvPr id="11" name="TextBox 10"/>
+          <p:cNvSpPr txBox="1"/>
+          <p:nvPr/>
+        </p:nvSpPr>
+        <p:spPr>
+          <a:xfrm>
+            <a:off x="5806440" y="3017520"/>
+            <a:ext cx="5486400" cy="3200400"/>
+          </a:xfrm>
+          <a:prstGeom prst="rect">
+            <a:avLst/>
+          </a:prstGeom>
+          <a:noFill/>
+        </p:spPr>
+        <p:txBody>
+          <a:bodyPr wrap="square">
+            <a:spAutoFit/>
+          </a:bodyPr>
+          <a:lstStyle/>
+          <a:p>
+            <a:pPr>
+              <a:spcAft>
+                <a:spcPts val="600"/>
+              </a:spcAft>
+              <a:defRPr sz="1300" b="1">
+                <a:solidFill>
+                  <a:srgbClr val="0F172A"/>
+                </a:solidFill>
+              </a:defRPr>
+            </a:pPr>
+            <a:r>
+              <a:t>4-Tier Underwriting Decision Matrix</a:t>
+            </a:r>
+          </a:p>
+          <a:p>
+            <a:pPr>
+              <a:defRPr sz="1000" b="1">
+                <a:solidFill>
+                  <a:srgbClr val="10B981"/>
+                </a:solidFill>
+              </a:defRPr>
+            </a:pPr>
+            <a:r>
+              <a:t>Low Risk (P &lt; 20%):</a:t>
+            </a:r>
+          </a:p>
+          <a:p>
+            <a:pPr>
+              <a:spcAft>
+                <a:spcPts val="400"/>
+              </a:spcAft>
+              <a:defRPr sz="950">
+                <a:solidFill>
+                  <a:srgbClr val="334155"/>
+                </a:solidFill>
+              </a:defRPr>
+            </a:pPr>
+            <a:r>
+              <a:t>  Fast-track instant approval; Prime interest rate (4.5% - 7.5% APR).</a:t>
+            </a:r>
+          </a:p>
+          <a:p>
+            <a:pPr>
+              <a:defRPr sz="1000" b="1">
+                <a:solidFill>
+                  <a:srgbClr val="2563EB"/>
+                </a:solidFill>
+              </a:defRPr>
+            </a:pPr>
+            <a:r>
+              <a:t>Moderate Risk (20% &lt;= P &lt; 45%):</a:t>
+            </a:r>
+          </a:p>
+          <a:p>
+            <a:pPr>
+              <a:spcAft>
+                <a:spcPts val="400"/>
+              </a:spcAft>
+              <a:defRPr sz="950">
+                <a:solidFill>
+                  <a:srgbClr val="334155"/>
+                </a:solidFill>
+              </a:defRPr>
+            </a:pPr>
+            <a:r>
+              <a:t>  Standard underwriting review; income verification required.</a:t>
+            </a:r>
+          </a:p>
+          <a:p>
+            <a:pPr>
+              <a:defRPr sz="1000" b="1">
+                <a:solidFill>
+                  <a:srgbClr val="D97706"/>
+                </a:solidFill>
+              </a:defRPr>
+            </a:pPr>
+            <a:r>
+              <a:t>High Risk (45% &lt;= P &lt; 70%):</a:t>
+            </a:r>
+          </a:p>
+          <a:p>
+            <a:pPr>
+              <a:spcAft>
+                <a:spcPts val="400"/>
+              </a:spcAft>
+              <a:defRPr sz="950">
+                <a:solidFill>
+                  <a:srgbClr val="334155"/>
+                </a:solidFill>
+              </a:defRPr>
+            </a:pPr>
+            <a:r>
+              <a:t>  Conditional approval; mandatory co-signer and collateral required.</a:t>
+            </a:r>
+          </a:p>
+          <a:p>
+            <a:pPr>
+              <a:defRPr sz="1000" b="1">
+                <a:solidFill>
+                  <a:srgbClr val="E11D48"/>
+                </a:solidFill>
+              </a:defRPr>
+            </a:pPr>
+            <a:r>
+              <a:t>Critical Risk (P &gt;= 70%):</a:t>
+            </a:r>
+          </a:p>
+          <a:p>
+            <a:pPr>
+              <a:spcAft>
+                <a:spcPts val="400"/>
+              </a:spcAft>
+              <a:defRPr sz="950">
+                <a:solidFill>
+                  <a:srgbClr val="334155"/>
+                </a:solidFill>
+              </a:defRPr>
+            </a:pPr>
+            <a:r>
+              <a:t>  Automated decline; risk exceeds institutional lending tolerance.</a:t>
+            </a:r>
+          </a:p>
+        </p:txBody>
+      </p:sp>
+    </p:spTree>
+  </p:cSld>
+  <p:clrMapOvr>
+    <a:masterClrMapping/>
+  </p:clrMapOvr>
+</p:sld>
+</file>
+
+<file path=ppt/slides/slide14.xml><?xml version="1.0" encoding="utf-8"?>
+<p:sld xmlns:a="http://schemas.openxmlformats.org/drawingml/2006/main" xmlns:p="http://schemas.openxmlformats.org/presentationml/2006/main" xmlns:r="http://schemas.openxmlformats.org/officeDocument/2006/relationships">
+  <p:cSld>
+    <p:bg>
+      <p:bgPr>
+        <a:solidFill>
+          <a:srgbClr val="F8FAFC"/>
+        </a:solidFill>
+        <a:effectLst/>
+      </p:bgPr>
+    </p:bg>
+    <p:spTree>
+      <p:nvGrpSpPr>
+        <p:cNvPr id="1" name=""/>
+        <p:cNvGrpSpPr/>
+        <p:nvPr/>
+      </p:nvGrpSpPr>
+      <p:grpSpPr/>
+      <p:sp>
+        <p:nvSpPr>
+          <p:cNvPr id="2" name="Rectangle 1"/>
+          <p:cNvSpPr/>
+          <p:nvPr/>
+        </p:nvSpPr>
+        <p:spPr>
+          <a:xfrm>
+            <a:off x="0" y="0"/>
+            <a:ext cx="12191695" cy="109728"/>
+          </a:xfrm>
+          <a:prstGeom prst="rect">
+            <a:avLst/>
+          </a:prstGeom>
+          <a:solidFill>
+            <a:srgbClr val="2563EB"/>
+          </a:solidFill>
+          <a:ln>
+            <a:noFill/>
+          </a:ln>
+        </p:spPr>
+        <p:style>
+          <a:lnRef idx="1">
+            <a:schemeClr val="accent1"/>
+          </a:lnRef>
+          <a:fillRef idx="3">
+            <a:schemeClr val="accent1"/>
+          </a:fillRef>
+          <a:effectRef idx="2">
+            <a:schemeClr val="accent1"/>
+          </a:effectRef>
+          <a:fontRef idx="minor">
+            <a:schemeClr val="lt1"/>
+          </a:fontRef>
+        </p:style>
+        <p:txBody>
+          <a:bodyPr rtlCol="0" anchor="ctr"/>
+          <a:lstStyle/>
+          <a:p>
+            <a:pPr algn="ctr"/>
+          </a:p>
+        </p:txBody>
+      </p:sp>
+      <p:sp>
+        <p:nvSpPr>
+          <p:cNvPr id="3" name="TextBox 2"/>
+          <p:cNvSpPr txBox="1"/>
+          <p:nvPr/>
+        </p:nvSpPr>
+        <p:spPr>
+          <a:xfrm>
+            <a:off x="731520" y="256032"/>
+            <a:ext cx="10698480" cy="256032"/>
+          </a:xfrm>
+          <a:prstGeom prst="rect">
+            <a:avLst/>
+          </a:prstGeom>
+          <a:noFill/>
+        </p:spPr>
+        <p:txBody>
+          <a:bodyPr wrap="square" lIns="0" tIns="0" rIns="0" bIns="0">
+            <a:spAutoFit/>
+          </a:bodyPr>
+          <a:lstStyle/>
+          <a:p>
+            <a:pPr>
+              <a:defRPr sz="1000" b="1">
+                <a:solidFill>
+                  <a:srgbClr val="2563EB"/>
+                </a:solidFill>
+              </a:defRPr>
+            </a:pPr>
+            <a:r>
+              <a:t>CSI3010: DATA WAREHOUSING &amp; DATA MINING | REVIEW 2</a:t>
+            </a:r>
+          </a:p>
+        </p:txBody>
+      </p:sp>
+      <p:sp>
+        <p:nvSpPr>
+          <p:cNvPr id="4" name="TextBox 3"/>
+          <p:cNvSpPr txBox="1"/>
+          <p:nvPr/>
+        </p:nvSpPr>
+        <p:spPr>
+          <a:xfrm>
+            <a:off x="731520" y="502920"/>
+            <a:ext cx="10698480" cy="548640"/>
+          </a:xfrm>
+          <a:prstGeom prst="rect">
+            <a:avLst/>
+          </a:prstGeom>
+          <a:noFill/>
+        </p:spPr>
+        <p:txBody>
+          <a:bodyPr wrap="square" lIns="0" tIns="0" rIns="0" bIns="0">
+            <a:spAutoFit/>
+          </a:bodyPr>
+          <a:lstStyle/>
+          <a:p>
+            <a:pPr>
+              <a:defRPr sz="2100" b="1">
+                <a:solidFill>
+                  <a:srgbClr val="0F172A"/>
+                </a:solidFill>
+              </a:defRPr>
+            </a:pPr>
+            <a:r>
               <a:t>Summary of Review 2 &amp; Roadmap to Final Review 3</a:t>
             </a:r>
           </a:p>
@@ -5211,7 +7697,7 @@
             </a:r>
             <a:br/>
             <a:r>
-              <a:t>4 ML algorithms benchmarked</a:t>
+              <a:t>4 ML models benchmarked</a:t>
             </a:r>
           </a:p>
         </p:txBody>
@@ -5310,7 +7796,7 @@
             </a:r>
             <a:br/>
             <a:r>
-              <a:t>Optimal K=3 via Elbow/Silhouette</a:t>
+              <a:t>Optimal K=3 risk archetypes</a:t>
             </a:r>
           </a:p>
         </p:txBody>
@@ -5823,6 +8309,657 @@
 </file>
 
 <file path=ppt/slides/slide3.xml><?xml version="1.0" encoding="utf-8"?>
+<p:sld xmlns:a="http://schemas.openxmlformats.org/drawingml/2006/main" xmlns:p="http://schemas.openxmlformats.org/presentationml/2006/main" xmlns:r="http://schemas.openxmlformats.org/officeDocument/2006/relationships">
+  <p:cSld>
+    <p:bg>
+      <p:bgPr>
+        <a:solidFill>
+          <a:srgbClr val="F8FAFC"/>
+        </a:solidFill>
+        <a:effectLst/>
+      </p:bgPr>
+    </p:bg>
+    <p:spTree>
+      <p:nvGrpSpPr>
+        <p:cNvPr id="1" name=""/>
+        <p:cNvGrpSpPr/>
+        <p:nvPr/>
+      </p:nvGrpSpPr>
+      <p:grpSpPr/>
+      <p:sp>
+        <p:nvSpPr>
+          <p:cNvPr id="2" name="Rectangle 1"/>
+          <p:cNvSpPr/>
+          <p:nvPr/>
+        </p:nvSpPr>
+        <p:spPr>
+          <a:xfrm>
+            <a:off x="0" y="0"/>
+            <a:ext cx="12191695" cy="109728"/>
+          </a:xfrm>
+          <a:prstGeom prst="rect">
+            <a:avLst/>
+          </a:prstGeom>
+          <a:solidFill>
+            <a:srgbClr val="2563EB"/>
+          </a:solidFill>
+          <a:ln>
+            <a:noFill/>
+          </a:ln>
+        </p:spPr>
+        <p:style>
+          <a:lnRef idx="1">
+            <a:schemeClr val="accent1"/>
+          </a:lnRef>
+          <a:fillRef idx="3">
+            <a:schemeClr val="accent1"/>
+          </a:fillRef>
+          <a:effectRef idx="2">
+            <a:schemeClr val="accent1"/>
+          </a:effectRef>
+          <a:fontRef idx="minor">
+            <a:schemeClr val="lt1"/>
+          </a:fontRef>
+        </p:style>
+        <p:txBody>
+          <a:bodyPr rtlCol="0" anchor="ctr"/>
+          <a:lstStyle/>
+          <a:p>
+            <a:pPr algn="ctr"/>
+          </a:p>
+        </p:txBody>
+      </p:sp>
+      <p:sp>
+        <p:nvSpPr>
+          <p:cNvPr id="3" name="TextBox 2"/>
+          <p:cNvSpPr txBox="1"/>
+          <p:nvPr/>
+        </p:nvSpPr>
+        <p:spPr>
+          <a:xfrm>
+            <a:off x="731520" y="256032"/>
+            <a:ext cx="10698480" cy="256032"/>
+          </a:xfrm>
+          <a:prstGeom prst="rect">
+            <a:avLst/>
+          </a:prstGeom>
+          <a:noFill/>
+        </p:spPr>
+        <p:txBody>
+          <a:bodyPr wrap="square" lIns="0" tIns="0" rIns="0" bIns="0">
+            <a:spAutoFit/>
+          </a:bodyPr>
+          <a:lstStyle/>
+          <a:p>
+            <a:pPr>
+              <a:defRPr sz="1000" b="1">
+                <a:solidFill>
+                  <a:srgbClr val="2563EB"/>
+                </a:solidFill>
+              </a:defRPr>
+            </a:pPr>
+            <a:r>
+              <a:t>CSI3010 | MODULE 1: CLASSIFICATION</a:t>
+            </a:r>
+          </a:p>
+        </p:txBody>
+      </p:sp>
+      <p:sp>
+        <p:nvSpPr>
+          <p:cNvPr id="4" name="TextBox 3"/>
+          <p:cNvSpPr txBox="1"/>
+          <p:nvPr/>
+        </p:nvSpPr>
+        <p:spPr>
+          <a:xfrm>
+            <a:off x="731520" y="502920"/>
+            <a:ext cx="10698480" cy="548640"/>
+          </a:xfrm>
+          <a:prstGeom prst="rect">
+            <a:avLst/>
+          </a:prstGeom>
+          <a:noFill/>
+        </p:spPr>
+        <p:txBody>
+          <a:bodyPr wrap="square" lIns="0" tIns="0" rIns="0" bIns="0">
+            <a:spAutoFit/>
+          </a:bodyPr>
+          <a:lstStyle/>
+          <a:p>
+            <a:pPr>
+              <a:defRPr sz="2100" b="1">
+                <a:solidFill>
+                  <a:srgbClr val="0F172A"/>
+                </a:solidFill>
+              </a:defRPr>
+            </a:pPr>
+            <a:r>
+              <a:t>Topic 1: Classification — Concept &amp; Institutional Role</a:t>
+            </a:r>
+          </a:p>
+        </p:txBody>
+      </p:sp>
+      <p:sp>
+        <p:nvSpPr>
+          <p:cNvPr id="5" name="Rounded Rectangle 4"/>
+          <p:cNvSpPr/>
+          <p:nvPr/>
+        </p:nvSpPr>
+        <p:spPr>
+          <a:xfrm>
+            <a:off x="731520" y="1234440"/>
+            <a:ext cx="5212080" cy="2468880"/>
+          </a:xfrm>
+          <a:prstGeom prst="roundRect">
+            <a:avLst/>
+          </a:prstGeom>
+          <a:solidFill>
+            <a:srgbClr val="EEF2FF"/>
+          </a:solidFill>
+          <a:ln w="12700">
+            <a:solidFill>
+              <a:srgbClr val="2563EB"/>
+            </a:solidFill>
+          </a:ln>
+        </p:spPr>
+        <p:style>
+          <a:lnRef idx="1">
+            <a:schemeClr val="accent1"/>
+          </a:lnRef>
+          <a:fillRef idx="3">
+            <a:schemeClr val="accent1"/>
+          </a:fillRef>
+          <a:effectRef idx="2">
+            <a:schemeClr val="accent1"/>
+          </a:effectRef>
+          <a:fontRef idx="minor">
+            <a:schemeClr val="lt1"/>
+          </a:fontRef>
+        </p:style>
+        <p:txBody>
+          <a:bodyPr rtlCol="0" anchor="ctr"/>
+          <a:lstStyle/>
+          <a:p>
+            <a:pPr algn="ctr"/>
+          </a:p>
+        </p:txBody>
+      </p:sp>
+      <p:sp>
+        <p:nvSpPr>
+          <p:cNvPr id="6" name="TextBox 5"/>
+          <p:cNvSpPr txBox="1"/>
+          <p:nvPr/>
+        </p:nvSpPr>
+        <p:spPr>
+          <a:xfrm>
+            <a:off x="914400" y="1371600"/>
+            <a:ext cx="4846320" cy="2194560"/>
+          </a:xfrm>
+          <a:prstGeom prst="rect">
+            <a:avLst/>
+          </a:prstGeom>
+          <a:noFill/>
+        </p:spPr>
+        <p:txBody>
+          <a:bodyPr wrap="square">
+            <a:spAutoFit/>
+          </a:bodyPr>
+          <a:lstStyle/>
+          <a:p>
+            <a:pPr>
+              <a:spcAft>
+                <a:spcPts val="600"/>
+              </a:spcAft>
+              <a:defRPr sz="1200" b="1">
+                <a:solidFill>
+                  <a:srgbClr val="2563EB"/>
+                </a:solidFill>
+              </a:defRPr>
+            </a:pPr>
+            <a:r>
+              <a:t>1. WHY We Used It (The Problem / Need)</a:t>
+            </a:r>
+          </a:p>
+          <a:p>
+            <a:pPr>
+              <a:spcAft>
+                <a:spcPts val="400"/>
+              </a:spcAft>
+              <a:defRPr sz="1000">
+                <a:solidFill>
+                  <a:srgbClr val="334155"/>
+                </a:solidFill>
+              </a:defRPr>
+            </a:pPr>
+            <a:r>
+              <a:t>• Lending institutions suffer major capital write-offs when borrowers default on unpaid principal.</a:t>
+            </a:r>
+          </a:p>
+          <a:p>
+            <a:pPr>
+              <a:spcAft>
+                <a:spcPts val="400"/>
+              </a:spcAft>
+              <a:defRPr sz="1000">
+                <a:solidFill>
+                  <a:srgbClr val="334155"/>
+                </a:solidFill>
+              </a:defRPr>
+            </a:pPr>
+            <a:r>
+              <a:t>• Lenders need an automated, objective mechanism to accurately classify applicants as creditworthy vs. default-prone.</a:t>
+            </a:r>
+          </a:p>
+          <a:p>
+            <a:pPr>
+              <a:spcAft>
+                <a:spcPts val="400"/>
+              </a:spcAft>
+              <a:defRPr sz="1000">
+                <a:solidFill>
+                  <a:srgbClr val="334155"/>
+                </a:solidFill>
+              </a:defRPr>
+            </a:pPr>
+            <a:r>
+              <a:t>• Manual review is slow, subjective, and unable to scale across thousands of credit applications.</a:t>
+            </a:r>
+          </a:p>
+        </p:txBody>
+      </p:sp>
+      <p:sp>
+        <p:nvSpPr>
+          <p:cNvPr id="7" name="Rounded Rectangle 6"/>
+          <p:cNvSpPr/>
+          <p:nvPr/>
+        </p:nvSpPr>
+        <p:spPr>
+          <a:xfrm>
+            <a:off x="6217920" y="1234440"/>
+            <a:ext cx="5242255" cy="2468880"/>
+          </a:xfrm>
+          <a:prstGeom prst="roundRect">
+            <a:avLst/>
+          </a:prstGeom>
+          <a:solidFill>
+            <a:srgbClr val="ECFDF5"/>
+          </a:solidFill>
+          <a:ln w="12700">
+            <a:solidFill>
+              <a:srgbClr val="10B981"/>
+            </a:solidFill>
+          </a:ln>
+        </p:spPr>
+        <p:style>
+          <a:lnRef idx="1">
+            <a:schemeClr val="accent1"/>
+          </a:lnRef>
+          <a:fillRef idx="3">
+            <a:schemeClr val="accent1"/>
+          </a:fillRef>
+          <a:effectRef idx="2">
+            <a:schemeClr val="accent1"/>
+          </a:effectRef>
+          <a:fontRef idx="minor">
+            <a:schemeClr val="lt1"/>
+          </a:fontRef>
+        </p:style>
+        <p:txBody>
+          <a:bodyPr rtlCol="0" anchor="ctr"/>
+          <a:lstStyle/>
+          <a:p>
+            <a:pPr algn="ctr"/>
+          </a:p>
+        </p:txBody>
+      </p:sp>
+      <p:sp>
+        <p:nvSpPr>
+          <p:cNvPr id="8" name="TextBox 7"/>
+          <p:cNvSpPr txBox="1"/>
+          <p:nvPr/>
+        </p:nvSpPr>
+        <p:spPr>
+          <a:xfrm>
+            <a:off x="6400800" y="1371600"/>
+            <a:ext cx="4876495" cy="2194560"/>
+          </a:xfrm>
+          <a:prstGeom prst="rect">
+            <a:avLst/>
+          </a:prstGeom>
+          <a:noFill/>
+        </p:spPr>
+        <p:txBody>
+          <a:bodyPr wrap="square">
+            <a:spAutoFit/>
+          </a:bodyPr>
+          <a:lstStyle/>
+          <a:p>
+            <a:pPr>
+              <a:spcAft>
+                <a:spcPts val="600"/>
+              </a:spcAft>
+              <a:defRPr sz="1200" b="1">
+                <a:solidFill>
+                  <a:srgbClr val="10B981"/>
+                </a:solidFill>
+              </a:defRPr>
+            </a:pPr>
+            <a:r>
+              <a:t>2. HOW We Used It (Methodology &amp; Pipeline)</a:t>
+            </a:r>
+          </a:p>
+          <a:p>
+            <a:pPr>
+              <a:spcAft>
+                <a:spcPts val="400"/>
+              </a:spcAft>
+              <a:defRPr sz="1000">
+                <a:solidFill>
+                  <a:srgbClr val="334155"/>
+                </a:solidFill>
+              </a:defRPr>
+            </a:pPr>
+            <a:r>
+              <a:t>• Benchmarked 4 supervised algorithms: Logistic Regression, Decision Tree, Random Forest, Gradient Boosting.</a:t>
+            </a:r>
+          </a:p>
+          <a:p>
+            <a:pPr>
+              <a:spcAft>
+                <a:spcPts val="400"/>
+              </a:spcAft>
+              <a:defRPr sz="1000">
+                <a:solidFill>
+                  <a:srgbClr val="334155"/>
+                </a:solidFill>
+              </a:defRPr>
+            </a:pPr>
+            <a:r>
+              <a:t>• Handled class imbalance (11.7% default) via class-weighting and optimized for Recall, F1-Score, and ROC-AUC.</a:t>
+            </a:r>
+          </a:p>
+          <a:p>
+            <a:pPr>
+              <a:spcAft>
+                <a:spcPts val="400"/>
+              </a:spcAft>
+              <a:defRPr sz="1000">
+                <a:solidFill>
+                  <a:srgbClr val="334155"/>
+                </a:solidFill>
+              </a:defRPr>
+            </a:pPr>
+            <a:r>
+              <a:t>• Trained strictly on 80% split (40,000) and evaluated on 20% holdout test set (10,000) with zero data leakage.</a:t>
+            </a:r>
+          </a:p>
+        </p:txBody>
+      </p:sp>
+      <p:sp>
+        <p:nvSpPr>
+          <p:cNvPr id="9" name="Rounded Rectangle 8"/>
+          <p:cNvSpPr/>
+          <p:nvPr/>
+        </p:nvSpPr>
+        <p:spPr>
+          <a:xfrm>
+            <a:off x="731520" y="3886200"/>
+            <a:ext cx="5212080" cy="2560320"/>
+          </a:xfrm>
+          <a:prstGeom prst="roundRect">
+            <a:avLst/>
+          </a:prstGeom>
+          <a:solidFill>
+            <a:srgbClr val="FEF9C3"/>
+          </a:solidFill>
+          <a:ln w="12700">
+            <a:solidFill>
+              <a:srgbClr val="CA8A04"/>
+            </a:solidFill>
+          </a:ln>
+        </p:spPr>
+        <p:style>
+          <a:lnRef idx="1">
+            <a:schemeClr val="accent1"/>
+          </a:lnRef>
+          <a:fillRef idx="3">
+            <a:schemeClr val="accent1"/>
+          </a:fillRef>
+          <a:effectRef idx="2">
+            <a:schemeClr val="accent1"/>
+          </a:effectRef>
+          <a:fontRef idx="minor">
+            <a:schemeClr val="lt1"/>
+          </a:fontRef>
+        </p:style>
+        <p:txBody>
+          <a:bodyPr rtlCol="0" anchor="ctr"/>
+          <a:lstStyle/>
+          <a:p>
+            <a:pPr algn="ctr"/>
+          </a:p>
+        </p:txBody>
+      </p:sp>
+      <p:sp>
+        <p:nvSpPr>
+          <p:cNvPr id="10" name="TextBox 9"/>
+          <p:cNvSpPr txBox="1"/>
+          <p:nvPr/>
+        </p:nvSpPr>
+        <p:spPr>
+          <a:xfrm>
+            <a:off x="914400" y="4023360"/>
+            <a:ext cx="4846320" cy="2286000"/>
+          </a:xfrm>
+          <a:prstGeom prst="rect">
+            <a:avLst/>
+          </a:prstGeom>
+          <a:noFill/>
+        </p:spPr>
+        <p:txBody>
+          <a:bodyPr wrap="square">
+            <a:spAutoFit/>
+          </a:bodyPr>
+          <a:lstStyle/>
+          <a:p>
+            <a:pPr>
+              <a:spcAft>
+                <a:spcPts val="600"/>
+              </a:spcAft>
+              <a:defRPr sz="1200" b="1">
+                <a:solidFill>
+                  <a:srgbClr val="CA8A04"/>
+                </a:solidFill>
+              </a:defRPr>
+            </a:pPr>
+            <a:r>
+              <a:t>3. WHAT It Does in Our Project (System Role)</a:t>
+            </a:r>
+          </a:p>
+          <a:p>
+            <a:pPr>
+              <a:spcAft>
+                <a:spcPts val="400"/>
+              </a:spcAft>
+              <a:defRPr sz="1000">
+                <a:solidFill>
+                  <a:srgbClr val="334155"/>
+                </a:solidFill>
+              </a:defRPr>
+            </a:pPr>
+            <a:r>
+              <a:t>• Learns non-linear financial patterns separating non-defaulters from defaulters.</a:t>
+            </a:r>
+          </a:p>
+          <a:p>
+            <a:pPr>
+              <a:spcAft>
+                <a:spcPts val="400"/>
+              </a:spcAft>
+              <a:defRPr sz="1000">
+                <a:solidFill>
+                  <a:srgbClr val="334155"/>
+                </a:solidFill>
+              </a:defRPr>
+            </a:pPr>
+            <a:r>
+              <a:t>• Identifies the champion model (Gradient Boosting) achieving 97.75% accuracy and 0.8965 F1-Score.</a:t>
+            </a:r>
+          </a:p>
+          <a:p>
+            <a:pPr>
+              <a:spcAft>
+                <a:spcPts val="400"/>
+              </a:spcAft>
+              <a:defRPr sz="1000">
+                <a:solidFill>
+                  <a:srgbClr val="334155"/>
+                </a:solidFill>
+              </a:defRPr>
+            </a:pPr>
+            <a:r>
+              <a:t>• Exports the champion model into prediction/saved_models/best_classifier.joblib for production scoring.</a:t>
+            </a:r>
+          </a:p>
+        </p:txBody>
+      </p:sp>
+      <p:sp>
+        <p:nvSpPr>
+          <p:cNvPr id="11" name="Rounded Rectangle 10"/>
+          <p:cNvSpPr/>
+          <p:nvPr/>
+        </p:nvSpPr>
+        <p:spPr>
+          <a:xfrm>
+            <a:off x="6217920" y="3886200"/>
+            <a:ext cx="5242255" cy="2560320"/>
+          </a:xfrm>
+          <a:prstGeom prst="roundRect">
+            <a:avLst/>
+          </a:prstGeom>
+          <a:solidFill>
+            <a:srgbClr val="F5F3FF"/>
+          </a:solidFill>
+          <a:ln w="12700">
+            <a:solidFill>
+              <a:srgbClr val="9333EA"/>
+            </a:solidFill>
+          </a:ln>
+        </p:spPr>
+        <p:style>
+          <a:lnRef idx="1">
+            <a:schemeClr val="accent1"/>
+          </a:lnRef>
+          <a:fillRef idx="3">
+            <a:schemeClr val="accent1"/>
+          </a:fillRef>
+          <a:effectRef idx="2">
+            <a:schemeClr val="accent1"/>
+          </a:effectRef>
+          <a:fontRef idx="minor">
+            <a:schemeClr val="lt1"/>
+          </a:fontRef>
+        </p:style>
+        <p:txBody>
+          <a:bodyPr rtlCol="0" anchor="ctr"/>
+          <a:lstStyle/>
+          <a:p>
+            <a:pPr algn="ctr"/>
+          </a:p>
+        </p:txBody>
+      </p:sp>
+      <p:sp>
+        <p:nvSpPr>
+          <p:cNvPr id="12" name="TextBox 11"/>
+          <p:cNvSpPr txBox="1"/>
+          <p:nvPr/>
+        </p:nvSpPr>
+        <p:spPr>
+          <a:xfrm>
+            <a:off x="6400800" y="4023360"/>
+            <a:ext cx="4876495" cy="2286000"/>
+          </a:xfrm>
+          <a:prstGeom prst="rect">
+            <a:avLst/>
+          </a:prstGeom>
+          <a:noFill/>
+        </p:spPr>
+        <p:txBody>
+          <a:bodyPr wrap="square">
+            <a:spAutoFit/>
+          </a:bodyPr>
+          <a:lstStyle/>
+          <a:p>
+            <a:pPr>
+              <a:spcAft>
+                <a:spcPts val="600"/>
+              </a:spcAft>
+              <a:defRPr sz="1200" b="1">
+                <a:solidFill>
+                  <a:srgbClr val="9333EA"/>
+                </a:solidFill>
+              </a:defRPr>
+            </a:pPr>
+            <a:r>
+              <a:t>4. PRACTICAL USE (Underwriting &amp; Business Value)</a:t>
+            </a:r>
+          </a:p>
+          <a:p>
+            <a:pPr>
+              <a:spcAft>
+                <a:spcPts val="400"/>
+              </a:spcAft>
+              <a:defRPr sz="1000">
+                <a:solidFill>
+                  <a:srgbClr val="334155"/>
+                </a:solidFill>
+              </a:defRPr>
+            </a:pPr>
+            <a:r>
+              <a:t>• Automated Underwriting: Instantly approves prime applicants and screens out high-risk applicants.</a:t>
+            </a:r>
+          </a:p>
+          <a:p>
+            <a:pPr>
+              <a:spcAft>
+                <a:spcPts val="400"/>
+              </a:spcAft>
+              <a:defRPr sz="1000">
+                <a:solidFill>
+                  <a:srgbClr val="334155"/>
+                </a:solidFill>
+              </a:defRPr>
+            </a:pPr>
+            <a:r>
+              <a:t>• Loss Prevention: Drastically slashes Non-Performing Assets (NPAs) while preserving 97.11% precision.</a:t>
+            </a:r>
+          </a:p>
+          <a:p>
+            <a:pPr>
+              <a:spcAft>
+                <a:spcPts val="400"/>
+              </a:spcAft>
+              <a:defRPr sz="1000">
+                <a:solidFill>
+                  <a:srgbClr val="334155"/>
+                </a:solidFill>
+              </a:defRPr>
+            </a:pPr>
+            <a:r>
+              <a:t>• Regulatory Compliance: Provides objective, auditable classification standards for credit assessment.</a:t>
+            </a:r>
+          </a:p>
+        </p:txBody>
+      </p:sp>
+    </p:spTree>
+  </p:cSld>
+  <p:clrMapOvr>
+    <a:masterClrMapping/>
+  </p:clrMapOvr>
+</p:sld>
+</file>
+
+<file path=ppt/slides/slide4.xml><?xml version="1.0" encoding="utf-8"?>
 <p:sld xmlns:a="http://schemas.openxmlformats.org/drawingml/2006/main" xmlns:p="http://schemas.openxmlformats.org/presentationml/2006/main" xmlns:r="http://schemas.openxmlformats.org/officeDocument/2006/relationships">
   <p:cSld>
     <p:bg>
@@ -7163,382 +10300,6 @@
 </p:sld>
 </file>
 
-<file path=ppt/slides/slide4.xml><?xml version="1.0" encoding="utf-8"?>
-<p:sld xmlns:a="http://schemas.openxmlformats.org/drawingml/2006/main" xmlns:p="http://schemas.openxmlformats.org/presentationml/2006/main" xmlns:r="http://schemas.openxmlformats.org/officeDocument/2006/relationships">
-  <p:cSld>
-    <p:bg>
-      <p:bgPr>
-        <a:solidFill>
-          <a:srgbClr val="F8FAFC"/>
-        </a:solidFill>
-        <a:effectLst/>
-      </p:bgPr>
-    </p:bg>
-    <p:spTree>
-      <p:nvGrpSpPr>
-        <p:cNvPr id="1" name=""/>
-        <p:cNvGrpSpPr/>
-        <p:nvPr/>
-      </p:nvGrpSpPr>
-      <p:grpSpPr/>
-      <p:sp>
-        <p:nvSpPr>
-          <p:cNvPr id="2" name="Rectangle 1"/>
-          <p:cNvSpPr/>
-          <p:nvPr/>
-        </p:nvSpPr>
-        <p:spPr>
-          <a:xfrm>
-            <a:off x="0" y="0"/>
-            <a:ext cx="12191695" cy="109728"/>
-          </a:xfrm>
-          <a:prstGeom prst="rect">
-            <a:avLst/>
-          </a:prstGeom>
-          <a:solidFill>
-            <a:srgbClr val="2563EB"/>
-          </a:solidFill>
-          <a:ln>
-            <a:noFill/>
-          </a:ln>
-        </p:spPr>
-        <p:style>
-          <a:lnRef idx="1">
-            <a:schemeClr val="accent1"/>
-          </a:lnRef>
-          <a:fillRef idx="3">
-            <a:schemeClr val="accent1"/>
-          </a:fillRef>
-          <a:effectRef idx="2">
-            <a:schemeClr val="accent1"/>
-          </a:effectRef>
-          <a:fontRef idx="minor">
-            <a:schemeClr val="lt1"/>
-          </a:fontRef>
-        </p:style>
-        <p:txBody>
-          <a:bodyPr rtlCol="0" anchor="ctr"/>
-          <a:lstStyle/>
-          <a:p>
-            <a:pPr algn="ctr"/>
-          </a:p>
-        </p:txBody>
-      </p:sp>
-      <p:sp>
-        <p:nvSpPr>
-          <p:cNvPr id="3" name="TextBox 2"/>
-          <p:cNvSpPr txBox="1"/>
-          <p:nvPr/>
-        </p:nvSpPr>
-        <p:spPr>
-          <a:xfrm>
-            <a:off x="731520" y="256032"/>
-            <a:ext cx="10698480" cy="256032"/>
-          </a:xfrm>
-          <a:prstGeom prst="rect">
-            <a:avLst/>
-          </a:prstGeom>
-          <a:noFill/>
-        </p:spPr>
-        <p:txBody>
-          <a:bodyPr wrap="square" lIns="0" tIns="0" rIns="0" bIns="0">
-            <a:spAutoFit/>
-          </a:bodyPr>
-          <a:lstStyle/>
-          <a:p>
-            <a:pPr>
-              <a:defRPr sz="1000" b="1">
-                <a:solidFill>
-                  <a:srgbClr val="2563EB"/>
-                </a:solidFill>
-              </a:defRPr>
-            </a:pPr>
-            <a:r>
-              <a:t>CSI3010: DATA WAREHOUSING &amp; DATA MINING | REVIEW 2</a:t>
-            </a:r>
-          </a:p>
-        </p:txBody>
-      </p:sp>
-      <p:sp>
-        <p:nvSpPr>
-          <p:cNvPr id="4" name="TextBox 3"/>
-          <p:cNvSpPr txBox="1"/>
-          <p:nvPr/>
-        </p:nvSpPr>
-        <p:spPr>
-          <a:xfrm>
-            <a:off x="731520" y="502920"/>
-            <a:ext cx="10698480" cy="548640"/>
-          </a:xfrm>
-          <a:prstGeom prst="rect">
-            <a:avLst/>
-          </a:prstGeom>
-          <a:noFill/>
-        </p:spPr>
-        <p:txBody>
-          <a:bodyPr wrap="square" lIns="0" tIns="0" rIns="0" bIns="0">
-            <a:spAutoFit/>
-          </a:bodyPr>
-          <a:lstStyle/>
-          <a:p>
-            <a:pPr>
-              <a:defRPr sz="2100" b="1">
-                <a:solidFill>
-                  <a:srgbClr val="0F172A"/>
-                </a:solidFill>
-              </a:defRPr>
-            </a:pPr>
-            <a:r>
-              <a:t>Classification: Pictorial Diagnostics (Confusion Matrices &amp; ROC)</a:t>
-            </a:r>
-          </a:p>
-        </p:txBody>
-      </p:sp>
-      <p:sp>
-        <p:nvSpPr>
-          <p:cNvPr id="5" name="Rounded Rectangle 4"/>
-          <p:cNvSpPr/>
-          <p:nvPr/>
-        </p:nvSpPr>
-        <p:spPr>
-          <a:xfrm>
-            <a:off x="731520" y="1234440"/>
-            <a:ext cx="5212080" cy="4114800"/>
-          </a:xfrm>
-          <a:prstGeom prst="roundRect">
-            <a:avLst/>
-          </a:prstGeom>
-          <a:solidFill>
-            <a:srgbClr val="FFFFFF"/>
-          </a:solidFill>
-          <a:ln w="12700">
-            <a:solidFill>
-              <a:srgbClr val="E2E8F0"/>
-            </a:solidFill>
-          </a:ln>
-        </p:spPr>
-        <p:style>
-          <a:lnRef idx="1">
-            <a:schemeClr val="accent1"/>
-          </a:lnRef>
-          <a:fillRef idx="3">
-            <a:schemeClr val="accent1"/>
-          </a:fillRef>
-          <a:effectRef idx="2">
-            <a:schemeClr val="accent1"/>
-          </a:effectRef>
-          <a:fontRef idx="minor">
-            <a:schemeClr val="lt1"/>
-          </a:fontRef>
-        </p:style>
-        <p:txBody>
-          <a:bodyPr rtlCol="0" anchor="ctr"/>
-          <a:lstStyle/>
-          <a:p>
-            <a:pPr algn="ctr"/>
-          </a:p>
-        </p:txBody>
-      </p:sp>
-      <p:pic>
-        <p:nvPicPr>
-          <p:cNvPr id="6" name="Picture 5" descr="confusion_matrices.png"/>
-          <p:cNvPicPr>
-            <a:picLocks noChangeAspect="1"/>
-          </p:cNvPicPr>
-          <p:nvPr/>
-        </p:nvPicPr>
-        <p:blipFill>
-          <a:blip r:embed="rId2"/>
-          <a:stretch>
-            <a:fillRect/>
-          </a:stretch>
-        </p:blipFill>
-        <p:spPr>
-          <a:xfrm>
-            <a:off x="822960" y="1325880"/>
-            <a:ext cx="5029200" cy="4023360"/>
-          </a:xfrm>
-          <a:prstGeom prst="rect">
-            <a:avLst/>
-          </a:prstGeom>
-        </p:spPr>
-      </p:pic>
-      <p:sp>
-        <p:nvSpPr>
-          <p:cNvPr id="7" name="Rounded Rectangle 6"/>
-          <p:cNvSpPr/>
-          <p:nvPr/>
-        </p:nvSpPr>
-        <p:spPr>
-          <a:xfrm>
-            <a:off x="6217920" y="1234440"/>
-            <a:ext cx="5242255" cy="4114800"/>
-          </a:xfrm>
-          <a:prstGeom prst="roundRect">
-            <a:avLst/>
-          </a:prstGeom>
-          <a:solidFill>
-            <a:srgbClr val="FFFFFF"/>
-          </a:solidFill>
-          <a:ln w="12700">
-            <a:solidFill>
-              <a:srgbClr val="E2E8F0"/>
-            </a:solidFill>
-          </a:ln>
-        </p:spPr>
-        <p:style>
-          <a:lnRef idx="1">
-            <a:schemeClr val="accent1"/>
-          </a:lnRef>
-          <a:fillRef idx="3">
-            <a:schemeClr val="accent1"/>
-          </a:fillRef>
-          <a:effectRef idx="2">
-            <a:schemeClr val="accent1"/>
-          </a:effectRef>
-          <a:fontRef idx="minor">
-            <a:schemeClr val="lt1"/>
-          </a:fontRef>
-        </p:style>
-        <p:txBody>
-          <a:bodyPr rtlCol="0" anchor="ctr"/>
-          <a:lstStyle/>
-          <a:p>
-            <a:pPr algn="ctr"/>
-          </a:p>
-        </p:txBody>
-      </p:sp>
-      <p:pic>
-        <p:nvPicPr>
-          <p:cNvPr id="8" name="Picture 7" descr="roc_curves.png"/>
-          <p:cNvPicPr>
-            <a:picLocks noChangeAspect="1"/>
-          </p:cNvPicPr>
-          <p:nvPr/>
-        </p:nvPicPr>
-        <p:blipFill>
-          <a:blip r:embed="rId3"/>
-          <a:stretch>
-            <a:fillRect/>
-          </a:stretch>
-        </p:blipFill>
-        <p:spPr>
-          <a:xfrm>
-            <a:off x="6309360" y="1325880"/>
-            <a:ext cx="5029200" cy="3771900"/>
-          </a:xfrm>
-          <a:prstGeom prst="rect">
-            <a:avLst/>
-          </a:prstGeom>
-        </p:spPr>
-      </p:pic>
-      <p:sp>
-        <p:nvSpPr>
-          <p:cNvPr id="9" name="Rounded Rectangle 8"/>
-          <p:cNvSpPr/>
-          <p:nvPr/>
-        </p:nvSpPr>
-        <p:spPr>
-          <a:xfrm>
-            <a:off x="731520" y="5486400"/>
-            <a:ext cx="10728655" cy="914400"/>
-          </a:xfrm>
-          <a:prstGeom prst="roundRect">
-            <a:avLst/>
-          </a:prstGeom>
-          <a:solidFill>
-            <a:srgbClr val="FFFFFF"/>
-          </a:solidFill>
-          <a:ln w="12700">
-            <a:solidFill>
-              <a:srgbClr val="E2E8F0"/>
-            </a:solidFill>
-          </a:ln>
-        </p:spPr>
-        <p:style>
-          <a:lnRef idx="1">
-            <a:schemeClr val="accent1"/>
-          </a:lnRef>
-          <a:fillRef idx="3">
-            <a:schemeClr val="accent1"/>
-          </a:fillRef>
-          <a:effectRef idx="2">
-            <a:schemeClr val="accent1"/>
-          </a:effectRef>
-          <a:fontRef idx="minor">
-            <a:schemeClr val="lt1"/>
-          </a:fontRef>
-        </p:style>
-        <p:txBody>
-          <a:bodyPr rtlCol="0" anchor="ctr"/>
-          <a:lstStyle/>
-          <a:p>
-            <a:pPr algn="ctr"/>
-          </a:p>
-        </p:txBody>
-      </p:sp>
-      <p:sp>
-        <p:nvSpPr>
-          <p:cNvPr id="10" name="TextBox 9"/>
-          <p:cNvSpPr txBox="1"/>
-          <p:nvPr/>
-        </p:nvSpPr>
-        <p:spPr>
-          <a:xfrm>
-            <a:off x="914400" y="5532120"/>
-            <a:ext cx="10362895" cy="822960"/>
-          </a:xfrm>
-          <a:prstGeom prst="rect">
-            <a:avLst/>
-          </a:prstGeom>
-          <a:noFill/>
-        </p:spPr>
-        <p:txBody>
-          <a:bodyPr wrap="square">
-            <a:spAutoFit/>
-          </a:bodyPr>
-          <a:lstStyle/>
-          <a:p>
-            <a:pPr>
-              <a:spcAft>
-                <a:spcPts val="200"/>
-              </a:spcAft>
-              <a:defRPr sz="1100" b="1">
-                <a:solidFill>
-                  <a:srgbClr val="0F172A"/>
-                </a:solidFill>
-              </a:defRPr>
-            </a:pPr>
-            <a:r>
-              <a:t>Key Diagnostic Observations:</a:t>
-            </a:r>
-          </a:p>
-          <a:p>
-            <a:pPr>
-              <a:defRPr sz="1000">
-                <a:solidFill>
-                  <a:srgbClr val="334155"/>
-                </a:solidFill>
-              </a:defRPr>
-            </a:pPr>
-            <a:r>
-              <a:t>• Confusion Matrix: Gradient Boosting eliminates false alarms (only 2.89% false positive rate), preventing healthy customer turnaways.</a:t>
-            </a:r>
-            <a:br/>
-            <a:r>
-              <a:t>• ROC Curves: Gradient Boosting hugs the upper-left boundary (AUC = 0.9973), outperforming Decision Tree (0.934) and Logistic Reg (0.982).</a:t>
-            </a:r>
-          </a:p>
-        </p:txBody>
-      </p:sp>
-    </p:spTree>
-  </p:cSld>
-  <p:clrMapOvr>
-    <a:masterClrMapping/>
-  </p:clrMapOvr>
-</p:sld>
-</file>
-
 <file path=ppt/slides/slide5.xml><?xml version="1.0" encoding="utf-8"?>
 <p:sld xmlns:a="http://schemas.openxmlformats.org/drawingml/2006/main" xmlns:p="http://schemas.openxmlformats.org/presentationml/2006/main" xmlns:r="http://schemas.openxmlformats.org/officeDocument/2006/relationships">
   <p:cSld>
@@ -7665,6 +10426,1033 @@
               </a:defRPr>
             </a:pPr>
             <a:r>
+              <a:t>Classification: Pictorial Diagnostics (Confusion Matrices &amp; ROC)</a:t>
+            </a:r>
+          </a:p>
+        </p:txBody>
+      </p:sp>
+      <p:sp>
+        <p:nvSpPr>
+          <p:cNvPr id="5" name="Rounded Rectangle 4"/>
+          <p:cNvSpPr/>
+          <p:nvPr/>
+        </p:nvSpPr>
+        <p:spPr>
+          <a:xfrm>
+            <a:off x="731520" y="1234440"/>
+            <a:ext cx="5212080" cy="4114800"/>
+          </a:xfrm>
+          <a:prstGeom prst="roundRect">
+            <a:avLst/>
+          </a:prstGeom>
+          <a:solidFill>
+            <a:srgbClr val="FFFFFF"/>
+          </a:solidFill>
+          <a:ln w="12700">
+            <a:solidFill>
+              <a:srgbClr val="E2E8F0"/>
+            </a:solidFill>
+          </a:ln>
+        </p:spPr>
+        <p:style>
+          <a:lnRef idx="1">
+            <a:schemeClr val="accent1"/>
+          </a:lnRef>
+          <a:fillRef idx="3">
+            <a:schemeClr val="accent1"/>
+          </a:fillRef>
+          <a:effectRef idx="2">
+            <a:schemeClr val="accent1"/>
+          </a:effectRef>
+          <a:fontRef idx="minor">
+            <a:schemeClr val="lt1"/>
+          </a:fontRef>
+        </p:style>
+        <p:txBody>
+          <a:bodyPr rtlCol="0" anchor="ctr"/>
+          <a:lstStyle/>
+          <a:p>
+            <a:pPr algn="ctr"/>
+          </a:p>
+        </p:txBody>
+      </p:sp>
+      <p:pic>
+        <p:nvPicPr>
+          <p:cNvPr id="6" name="Picture 5" descr="confusion_matrices.png"/>
+          <p:cNvPicPr>
+            <a:picLocks noChangeAspect="1"/>
+          </p:cNvPicPr>
+          <p:nvPr/>
+        </p:nvPicPr>
+        <p:blipFill>
+          <a:blip r:embed="rId2"/>
+          <a:stretch>
+            <a:fillRect/>
+          </a:stretch>
+        </p:blipFill>
+        <p:spPr>
+          <a:xfrm>
+            <a:off x="822960" y="1325880"/>
+            <a:ext cx="5029200" cy="4023360"/>
+          </a:xfrm>
+          <a:prstGeom prst="rect">
+            <a:avLst/>
+          </a:prstGeom>
+        </p:spPr>
+      </p:pic>
+      <p:sp>
+        <p:nvSpPr>
+          <p:cNvPr id="7" name="Rounded Rectangle 6"/>
+          <p:cNvSpPr/>
+          <p:nvPr/>
+        </p:nvSpPr>
+        <p:spPr>
+          <a:xfrm>
+            <a:off x="6217920" y="1234440"/>
+            <a:ext cx="5242255" cy="4114800"/>
+          </a:xfrm>
+          <a:prstGeom prst="roundRect">
+            <a:avLst/>
+          </a:prstGeom>
+          <a:solidFill>
+            <a:srgbClr val="FFFFFF"/>
+          </a:solidFill>
+          <a:ln w="12700">
+            <a:solidFill>
+              <a:srgbClr val="E2E8F0"/>
+            </a:solidFill>
+          </a:ln>
+        </p:spPr>
+        <p:style>
+          <a:lnRef idx="1">
+            <a:schemeClr val="accent1"/>
+          </a:lnRef>
+          <a:fillRef idx="3">
+            <a:schemeClr val="accent1"/>
+          </a:fillRef>
+          <a:effectRef idx="2">
+            <a:schemeClr val="accent1"/>
+          </a:effectRef>
+          <a:fontRef idx="minor">
+            <a:schemeClr val="lt1"/>
+          </a:fontRef>
+        </p:style>
+        <p:txBody>
+          <a:bodyPr rtlCol="0" anchor="ctr"/>
+          <a:lstStyle/>
+          <a:p>
+            <a:pPr algn="ctr"/>
+          </a:p>
+        </p:txBody>
+      </p:sp>
+      <p:pic>
+        <p:nvPicPr>
+          <p:cNvPr id="8" name="Picture 7" descr="roc_curves.png"/>
+          <p:cNvPicPr>
+            <a:picLocks noChangeAspect="1"/>
+          </p:cNvPicPr>
+          <p:nvPr/>
+        </p:nvPicPr>
+        <p:blipFill>
+          <a:blip r:embed="rId3"/>
+          <a:stretch>
+            <a:fillRect/>
+          </a:stretch>
+        </p:blipFill>
+        <p:spPr>
+          <a:xfrm>
+            <a:off x="6309360" y="1325880"/>
+            <a:ext cx="5029200" cy="3771900"/>
+          </a:xfrm>
+          <a:prstGeom prst="rect">
+            <a:avLst/>
+          </a:prstGeom>
+        </p:spPr>
+      </p:pic>
+      <p:sp>
+        <p:nvSpPr>
+          <p:cNvPr id="9" name="Rounded Rectangle 8"/>
+          <p:cNvSpPr/>
+          <p:nvPr/>
+        </p:nvSpPr>
+        <p:spPr>
+          <a:xfrm>
+            <a:off x="731520" y="5486400"/>
+            <a:ext cx="10728655" cy="914400"/>
+          </a:xfrm>
+          <a:prstGeom prst="roundRect">
+            <a:avLst/>
+          </a:prstGeom>
+          <a:solidFill>
+            <a:srgbClr val="FFFFFF"/>
+          </a:solidFill>
+          <a:ln w="12700">
+            <a:solidFill>
+              <a:srgbClr val="E2E8F0"/>
+            </a:solidFill>
+          </a:ln>
+        </p:spPr>
+        <p:style>
+          <a:lnRef idx="1">
+            <a:schemeClr val="accent1"/>
+          </a:lnRef>
+          <a:fillRef idx="3">
+            <a:schemeClr val="accent1"/>
+          </a:fillRef>
+          <a:effectRef idx="2">
+            <a:schemeClr val="accent1"/>
+          </a:effectRef>
+          <a:fontRef idx="minor">
+            <a:schemeClr val="lt1"/>
+          </a:fontRef>
+        </p:style>
+        <p:txBody>
+          <a:bodyPr rtlCol="0" anchor="ctr"/>
+          <a:lstStyle/>
+          <a:p>
+            <a:pPr algn="ctr"/>
+          </a:p>
+        </p:txBody>
+      </p:sp>
+      <p:sp>
+        <p:nvSpPr>
+          <p:cNvPr id="10" name="TextBox 9"/>
+          <p:cNvSpPr txBox="1"/>
+          <p:nvPr/>
+        </p:nvSpPr>
+        <p:spPr>
+          <a:xfrm>
+            <a:off x="914400" y="5532120"/>
+            <a:ext cx="10362895" cy="822960"/>
+          </a:xfrm>
+          <a:prstGeom prst="rect">
+            <a:avLst/>
+          </a:prstGeom>
+          <a:noFill/>
+        </p:spPr>
+        <p:txBody>
+          <a:bodyPr wrap="square">
+            <a:spAutoFit/>
+          </a:bodyPr>
+          <a:lstStyle/>
+          <a:p>
+            <a:pPr>
+              <a:spcAft>
+                <a:spcPts val="200"/>
+              </a:spcAft>
+              <a:defRPr sz="1100" b="1">
+                <a:solidFill>
+                  <a:srgbClr val="0F172A"/>
+                </a:solidFill>
+              </a:defRPr>
+            </a:pPr>
+            <a:r>
+              <a:t>Key Diagnostic Observations:</a:t>
+            </a:r>
+          </a:p>
+          <a:p>
+            <a:pPr>
+              <a:defRPr sz="1000">
+                <a:solidFill>
+                  <a:srgbClr val="334155"/>
+                </a:solidFill>
+              </a:defRPr>
+            </a:pPr>
+            <a:r>
+              <a:t>• Confusion Matrix: Gradient Boosting eliminates false alarms (only 2.89% false positive rate), preventing healthy customer turnaways.</a:t>
+            </a:r>
+            <a:br/>
+            <a:r>
+              <a:t>• ROC Curves: Gradient Boosting hugs the upper-left boundary (AUC = 0.9973), outperforming Decision Tree (0.934) and Logistic Reg (0.982).</a:t>
+            </a:r>
+          </a:p>
+        </p:txBody>
+      </p:sp>
+    </p:spTree>
+  </p:cSld>
+  <p:clrMapOvr>
+    <a:masterClrMapping/>
+  </p:clrMapOvr>
+</p:sld>
+</file>
+
+<file path=ppt/slides/slide6.xml><?xml version="1.0" encoding="utf-8"?>
+<p:sld xmlns:a="http://schemas.openxmlformats.org/drawingml/2006/main" xmlns:p="http://schemas.openxmlformats.org/presentationml/2006/main" xmlns:r="http://schemas.openxmlformats.org/officeDocument/2006/relationships">
+  <p:cSld>
+    <p:bg>
+      <p:bgPr>
+        <a:solidFill>
+          <a:srgbClr val="F8FAFC"/>
+        </a:solidFill>
+        <a:effectLst/>
+      </p:bgPr>
+    </p:bg>
+    <p:spTree>
+      <p:nvGrpSpPr>
+        <p:cNvPr id="1" name=""/>
+        <p:cNvGrpSpPr/>
+        <p:nvPr/>
+      </p:nvGrpSpPr>
+      <p:grpSpPr/>
+      <p:sp>
+        <p:nvSpPr>
+          <p:cNvPr id="2" name="Rectangle 1"/>
+          <p:cNvSpPr/>
+          <p:nvPr/>
+        </p:nvSpPr>
+        <p:spPr>
+          <a:xfrm>
+            <a:off x="0" y="0"/>
+            <a:ext cx="12191695" cy="109728"/>
+          </a:xfrm>
+          <a:prstGeom prst="rect">
+            <a:avLst/>
+          </a:prstGeom>
+          <a:solidFill>
+            <a:srgbClr val="2563EB"/>
+          </a:solidFill>
+          <a:ln>
+            <a:noFill/>
+          </a:ln>
+        </p:spPr>
+        <p:style>
+          <a:lnRef idx="1">
+            <a:schemeClr val="accent1"/>
+          </a:lnRef>
+          <a:fillRef idx="3">
+            <a:schemeClr val="accent1"/>
+          </a:fillRef>
+          <a:effectRef idx="2">
+            <a:schemeClr val="accent1"/>
+          </a:effectRef>
+          <a:fontRef idx="minor">
+            <a:schemeClr val="lt1"/>
+          </a:fontRef>
+        </p:style>
+        <p:txBody>
+          <a:bodyPr rtlCol="0" anchor="ctr"/>
+          <a:lstStyle/>
+          <a:p>
+            <a:pPr algn="ctr"/>
+          </a:p>
+        </p:txBody>
+      </p:sp>
+      <p:sp>
+        <p:nvSpPr>
+          <p:cNvPr id="3" name="TextBox 2"/>
+          <p:cNvSpPr txBox="1"/>
+          <p:nvPr/>
+        </p:nvSpPr>
+        <p:spPr>
+          <a:xfrm>
+            <a:off x="731520" y="256032"/>
+            <a:ext cx="10698480" cy="256032"/>
+          </a:xfrm>
+          <a:prstGeom prst="rect">
+            <a:avLst/>
+          </a:prstGeom>
+          <a:noFill/>
+        </p:spPr>
+        <p:txBody>
+          <a:bodyPr wrap="square" lIns="0" tIns="0" rIns="0" bIns="0">
+            <a:spAutoFit/>
+          </a:bodyPr>
+          <a:lstStyle/>
+          <a:p>
+            <a:pPr>
+              <a:defRPr sz="1000" b="1">
+                <a:solidFill>
+                  <a:srgbClr val="2563EB"/>
+                </a:solidFill>
+              </a:defRPr>
+            </a:pPr>
+            <a:r>
+              <a:t>CSI3010 | MODULE 2: CLUSTERING</a:t>
+            </a:r>
+          </a:p>
+        </p:txBody>
+      </p:sp>
+      <p:sp>
+        <p:nvSpPr>
+          <p:cNvPr id="4" name="TextBox 3"/>
+          <p:cNvSpPr txBox="1"/>
+          <p:nvPr/>
+        </p:nvSpPr>
+        <p:spPr>
+          <a:xfrm>
+            <a:off x="731520" y="502920"/>
+            <a:ext cx="10698480" cy="548640"/>
+          </a:xfrm>
+          <a:prstGeom prst="rect">
+            <a:avLst/>
+          </a:prstGeom>
+          <a:noFill/>
+        </p:spPr>
+        <p:txBody>
+          <a:bodyPr wrap="square" lIns="0" tIns="0" rIns="0" bIns="0">
+            <a:spAutoFit/>
+          </a:bodyPr>
+          <a:lstStyle/>
+          <a:p>
+            <a:pPr>
+              <a:defRPr sz="2100" b="1">
+                <a:solidFill>
+                  <a:srgbClr val="0F172A"/>
+                </a:solidFill>
+              </a:defRPr>
+            </a:pPr>
+            <a:r>
+              <a:t>Topic 2: Clustering — Concept &amp; Institutional Role</a:t>
+            </a:r>
+          </a:p>
+        </p:txBody>
+      </p:sp>
+      <p:sp>
+        <p:nvSpPr>
+          <p:cNvPr id="5" name="Rounded Rectangle 4"/>
+          <p:cNvSpPr/>
+          <p:nvPr/>
+        </p:nvSpPr>
+        <p:spPr>
+          <a:xfrm>
+            <a:off x="731520" y="1234440"/>
+            <a:ext cx="5212080" cy="2468880"/>
+          </a:xfrm>
+          <a:prstGeom prst="roundRect">
+            <a:avLst/>
+          </a:prstGeom>
+          <a:solidFill>
+            <a:srgbClr val="EEF2FF"/>
+          </a:solidFill>
+          <a:ln w="12700">
+            <a:solidFill>
+              <a:srgbClr val="2563EB"/>
+            </a:solidFill>
+          </a:ln>
+        </p:spPr>
+        <p:style>
+          <a:lnRef idx="1">
+            <a:schemeClr val="accent1"/>
+          </a:lnRef>
+          <a:fillRef idx="3">
+            <a:schemeClr val="accent1"/>
+          </a:fillRef>
+          <a:effectRef idx="2">
+            <a:schemeClr val="accent1"/>
+          </a:effectRef>
+          <a:fontRef idx="minor">
+            <a:schemeClr val="lt1"/>
+          </a:fontRef>
+        </p:style>
+        <p:txBody>
+          <a:bodyPr rtlCol="0" anchor="ctr"/>
+          <a:lstStyle/>
+          <a:p>
+            <a:pPr algn="ctr"/>
+          </a:p>
+        </p:txBody>
+      </p:sp>
+      <p:sp>
+        <p:nvSpPr>
+          <p:cNvPr id="6" name="TextBox 5"/>
+          <p:cNvSpPr txBox="1"/>
+          <p:nvPr/>
+        </p:nvSpPr>
+        <p:spPr>
+          <a:xfrm>
+            <a:off x="914400" y="1371600"/>
+            <a:ext cx="4846320" cy="2194560"/>
+          </a:xfrm>
+          <a:prstGeom prst="rect">
+            <a:avLst/>
+          </a:prstGeom>
+          <a:noFill/>
+        </p:spPr>
+        <p:txBody>
+          <a:bodyPr wrap="square">
+            <a:spAutoFit/>
+          </a:bodyPr>
+          <a:lstStyle/>
+          <a:p>
+            <a:pPr>
+              <a:spcAft>
+                <a:spcPts val="600"/>
+              </a:spcAft>
+              <a:defRPr sz="1200" b="1">
+                <a:solidFill>
+                  <a:srgbClr val="2563EB"/>
+                </a:solidFill>
+              </a:defRPr>
+            </a:pPr>
+            <a:r>
+              <a:t>1. WHY We Used It (The Problem / Need)</a:t>
+            </a:r>
+          </a:p>
+          <a:p>
+            <a:pPr>
+              <a:spcAft>
+                <a:spcPts val="400"/>
+              </a:spcAft>
+              <a:defRPr sz="1000">
+                <a:solidFill>
+                  <a:srgbClr val="334155"/>
+                </a:solidFill>
+              </a:defRPr>
+            </a:pPr>
+            <a:r>
+              <a:t>• Credit risk is not a flat binary outcome; borrowers have diverse financial archetypes.</a:t>
+            </a:r>
+          </a:p>
+          <a:p>
+            <a:pPr>
+              <a:spcAft>
+                <a:spcPts val="400"/>
+              </a:spcAft>
+              <a:defRPr sz="1000">
+                <a:solidFill>
+                  <a:srgbClr val="334155"/>
+                </a:solidFill>
+              </a:defRPr>
+            </a:pPr>
+            <a:r>
+              <a:t>• Lenders need to discover natural customer segments without relying on past default labels.</a:t>
+            </a:r>
+          </a:p>
+          <a:p>
+            <a:pPr>
+              <a:spcAft>
+                <a:spcPts val="400"/>
+              </a:spcAft>
+              <a:defRPr sz="1000">
+                <a:solidFill>
+                  <a:srgbClr val="334155"/>
+                </a:solidFill>
+              </a:defRPr>
+            </a:pPr>
+            <a:r>
+              <a:t>• Helps underwriters identify subtle risk buildup before defaults formally occur.</a:t>
+            </a:r>
+          </a:p>
+        </p:txBody>
+      </p:sp>
+      <p:sp>
+        <p:nvSpPr>
+          <p:cNvPr id="7" name="Rounded Rectangle 6"/>
+          <p:cNvSpPr/>
+          <p:nvPr/>
+        </p:nvSpPr>
+        <p:spPr>
+          <a:xfrm>
+            <a:off x="6217920" y="1234440"/>
+            <a:ext cx="5242255" cy="2468880"/>
+          </a:xfrm>
+          <a:prstGeom prst="roundRect">
+            <a:avLst/>
+          </a:prstGeom>
+          <a:solidFill>
+            <a:srgbClr val="ECFDF5"/>
+          </a:solidFill>
+          <a:ln w="12700">
+            <a:solidFill>
+              <a:srgbClr val="10B981"/>
+            </a:solidFill>
+          </a:ln>
+        </p:spPr>
+        <p:style>
+          <a:lnRef idx="1">
+            <a:schemeClr val="accent1"/>
+          </a:lnRef>
+          <a:fillRef idx="3">
+            <a:schemeClr val="accent1"/>
+          </a:fillRef>
+          <a:effectRef idx="2">
+            <a:schemeClr val="accent1"/>
+          </a:effectRef>
+          <a:fontRef idx="minor">
+            <a:schemeClr val="lt1"/>
+          </a:fontRef>
+        </p:style>
+        <p:txBody>
+          <a:bodyPr rtlCol="0" anchor="ctr"/>
+          <a:lstStyle/>
+          <a:p>
+            <a:pPr algn="ctr"/>
+          </a:p>
+        </p:txBody>
+      </p:sp>
+      <p:sp>
+        <p:nvSpPr>
+          <p:cNvPr id="8" name="TextBox 7"/>
+          <p:cNvSpPr txBox="1"/>
+          <p:nvPr/>
+        </p:nvSpPr>
+        <p:spPr>
+          <a:xfrm>
+            <a:off x="6400800" y="1371600"/>
+            <a:ext cx="4876495" cy="2194560"/>
+          </a:xfrm>
+          <a:prstGeom prst="rect">
+            <a:avLst/>
+          </a:prstGeom>
+          <a:noFill/>
+        </p:spPr>
+        <p:txBody>
+          <a:bodyPr wrap="square">
+            <a:spAutoFit/>
+          </a:bodyPr>
+          <a:lstStyle/>
+          <a:p>
+            <a:pPr>
+              <a:spcAft>
+                <a:spcPts val="600"/>
+              </a:spcAft>
+              <a:defRPr sz="1200" b="1">
+                <a:solidFill>
+                  <a:srgbClr val="10B981"/>
+                </a:solidFill>
+              </a:defRPr>
+            </a:pPr>
+            <a:r>
+              <a:t>2. HOW We Used It (Methodology &amp; Pipeline)</a:t>
+            </a:r>
+          </a:p>
+          <a:p>
+            <a:pPr>
+              <a:spcAft>
+                <a:spcPts val="400"/>
+              </a:spcAft>
+              <a:defRPr sz="1000">
+                <a:solidFill>
+                  <a:srgbClr val="334155"/>
+                </a:solidFill>
+              </a:defRPr>
+            </a:pPr>
+            <a:r>
+              <a:t>• Standardized 5 core numerical features: Income, CreditScore, LoanAmount, DTIRatio, MonthsEmployed.</a:t>
+            </a:r>
+          </a:p>
+          <a:p>
+            <a:pPr>
+              <a:spcAft>
+                <a:spcPts val="400"/>
+              </a:spcAft>
+              <a:defRPr sz="1000">
+                <a:solidFill>
+                  <a:srgbClr val="334155"/>
+                </a:solidFill>
+              </a:defRPr>
+            </a:pPr>
+            <a:r>
+              <a:t>• Trained K-Means clustering across K=2 to 6, evaluating within-cluster inertia and Silhouette scores.</a:t>
+            </a:r>
+          </a:p>
+          <a:p>
+            <a:pPr>
+              <a:spcAft>
+                <a:spcPts val="400"/>
+              </a:spcAft>
+              <a:defRPr sz="1000">
+                <a:solidFill>
+                  <a:srgbClr val="334155"/>
+                </a:solidFill>
+              </a:defRPr>
+            </a:pPr>
+            <a:r>
+              <a:t>• Identified optimal K=3 at the Elbow curve inflection point and validated cluster cohesion.</a:t>
+            </a:r>
+          </a:p>
+        </p:txBody>
+      </p:sp>
+      <p:sp>
+        <p:nvSpPr>
+          <p:cNvPr id="9" name="Rounded Rectangle 8"/>
+          <p:cNvSpPr/>
+          <p:nvPr/>
+        </p:nvSpPr>
+        <p:spPr>
+          <a:xfrm>
+            <a:off x="731520" y="3886200"/>
+            <a:ext cx="5212080" cy="2560320"/>
+          </a:xfrm>
+          <a:prstGeom prst="roundRect">
+            <a:avLst/>
+          </a:prstGeom>
+          <a:solidFill>
+            <a:srgbClr val="FEF9C3"/>
+          </a:solidFill>
+          <a:ln w="12700">
+            <a:solidFill>
+              <a:srgbClr val="CA8A04"/>
+            </a:solidFill>
+          </a:ln>
+        </p:spPr>
+        <p:style>
+          <a:lnRef idx="1">
+            <a:schemeClr val="accent1"/>
+          </a:lnRef>
+          <a:fillRef idx="3">
+            <a:schemeClr val="accent1"/>
+          </a:fillRef>
+          <a:effectRef idx="2">
+            <a:schemeClr val="accent1"/>
+          </a:effectRef>
+          <a:fontRef idx="minor">
+            <a:schemeClr val="lt1"/>
+          </a:fontRef>
+        </p:style>
+        <p:txBody>
+          <a:bodyPr rtlCol="0" anchor="ctr"/>
+          <a:lstStyle/>
+          <a:p>
+            <a:pPr algn="ctr"/>
+          </a:p>
+        </p:txBody>
+      </p:sp>
+      <p:sp>
+        <p:nvSpPr>
+          <p:cNvPr id="10" name="TextBox 9"/>
+          <p:cNvSpPr txBox="1"/>
+          <p:nvPr/>
+        </p:nvSpPr>
+        <p:spPr>
+          <a:xfrm>
+            <a:off x="914400" y="4023360"/>
+            <a:ext cx="4846320" cy="2286000"/>
+          </a:xfrm>
+          <a:prstGeom prst="rect">
+            <a:avLst/>
+          </a:prstGeom>
+          <a:noFill/>
+        </p:spPr>
+        <p:txBody>
+          <a:bodyPr wrap="square">
+            <a:spAutoFit/>
+          </a:bodyPr>
+          <a:lstStyle/>
+          <a:p>
+            <a:pPr>
+              <a:spcAft>
+                <a:spcPts val="600"/>
+              </a:spcAft>
+              <a:defRPr sz="1200" b="1">
+                <a:solidFill>
+                  <a:srgbClr val="CA8A04"/>
+                </a:solidFill>
+              </a:defRPr>
+            </a:pPr>
+            <a:r>
+              <a:t>3. WHAT It Does in Our Project (System Role)</a:t>
+            </a:r>
+          </a:p>
+          <a:p>
+            <a:pPr>
+              <a:spcAft>
+                <a:spcPts val="400"/>
+              </a:spcAft>
+              <a:defRPr sz="1000">
+                <a:solidFill>
+                  <a:srgbClr val="334155"/>
+                </a:solidFill>
+              </a:defRPr>
+            </a:pPr>
+            <a:r>
+              <a:t>• Groups 50,000 borrowers into 3 natural, interpretable risk profiles (Prime, Standard, Vulnerable).</a:t>
+            </a:r>
+          </a:p>
+          <a:p>
+            <a:pPr>
+              <a:spcAft>
+                <a:spcPts val="400"/>
+              </a:spcAft>
+              <a:defRPr sz="1000">
+                <a:solidFill>
+                  <a:srgbClr val="334155"/>
+                </a:solidFill>
+              </a:defRPr>
+            </a:pPr>
+            <a:r>
+              <a:t>• Discovers that default rates differ by over 5x between clusters (3.93% vs. 20.36%) without using default labels during training.</a:t>
+            </a:r>
+          </a:p>
+          <a:p>
+            <a:pPr>
+              <a:spcAft>
+                <a:spcPts val="400"/>
+              </a:spcAft>
+              <a:defRPr sz="1000">
+                <a:solidFill>
+                  <a:srgbClr val="334155"/>
+                </a:solidFill>
+              </a:defRPr>
+            </a:pPr>
+            <a:r>
+              <a:t>• Projects the 5D feature space into 2D PCA components for geometric risk space visualization.</a:t>
+            </a:r>
+          </a:p>
+        </p:txBody>
+      </p:sp>
+      <p:sp>
+        <p:nvSpPr>
+          <p:cNvPr id="11" name="Rounded Rectangle 10"/>
+          <p:cNvSpPr/>
+          <p:nvPr/>
+        </p:nvSpPr>
+        <p:spPr>
+          <a:xfrm>
+            <a:off x="6217920" y="3886200"/>
+            <a:ext cx="5242255" cy="2560320"/>
+          </a:xfrm>
+          <a:prstGeom prst="roundRect">
+            <a:avLst/>
+          </a:prstGeom>
+          <a:solidFill>
+            <a:srgbClr val="F5F3FF"/>
+          </a:solidFill>
+          <a:ln w="12700">
+            <a:solidFill>
+              <a:srgbClr val="9333EA"/>
+            </a:solidFill>
+          </a:ln>
+        </p:spPr>
+        <p:style>
+          <a:lnRef idx="1">
+            <a:schemeClr val="accent1"/>
+          </a:lnRef>
+          <a:fillRef idx="3">
+            <a:schemeClr val="accent1"/>
+          </a:fillRef>
+          <a:effectRef idx="2">
+            <a:schemeClr val="accent1"/>
+          </a:effectRef>
+          <a:fontRef idx="minor">
+            <a:schemeClr val="lt1"/>
+          </a:fontRef>
+        </p:style>
+        <p:txBody>
+          <a:bodyPr rtlCol="0" anchor="ctr"/>
+          <a:lstStyle/>
+          <a:p>
+            <a:pPr algn="ctr"/>
+          </a:p>
+        </p:txBody>
+      </p:sp>
+      <p:sp>
+        <p:nvSpPr>
+          <p:cNvPr id="12" name="TextBox 11"/>
+          <p:cNvSpPr txBox="1"/>
+          <p:nvPr/>
+        </p:nvSpPr>
+        <p:spPr>
+          <a:xfrm>
+            <a:off x="6400800" y="4023360"/>
+            <a:ext cx="4876495" cy="2286000"/>
+          </a:xfrm>
+          <a:prstGeom prst="rect">
+            <a:avLst/>
+          </a:prstGeom>
+          <a:noFill/>
+        </p:spPr>
+        <p:txBody>
+          <a:bodyPr wrap="square">
+            <a:spAutoFit/>
+          </a:bodyPr>
+          <a:lstStyle/>
+          <a:p>
+            <a:pPr>
+              <a:spcAft>
+                <a:spcPts val="600"/>
+              </a:spcAft>
+              <a:defRPr sz="1200" b="1">
+                <a:solidFill>
+                  <a:srgbClr val="9333EA"/>
+                </a:solidFill>
+              </a:defRPr>
+            </a:pPr>
+            <a:r>
+              <a:t>4. PRACTICAL USE (Underwriting &amp; Business Value)</a:t>
+            </a:r>
+          </a:p>
+          <a:p>
+            <a:pPr>
+              <a:spcAft>
+                <a:spcPts val="400"/>
+              </a:spcAft>
+              <a:defRPr sz="1000">
+                <a:solidFill>
+                  <a:srgbClr val="334155"/>
+                </a:solidFill>
+              </a:defRPr>
+            </a:pPr>
+            <a:r>
+              <a:t>• Risk-Based Portfolio Pricing: Sets tailored interest rates and borrowing limits per tier.</a:t>
+            </a:r>
+          </a:p>
+          <a:p>
+            <a:pPr>
+              <a:spcAft>
+                <a:spcPts val="400"/>
+              </a:spcAft>
+              <a:defRPr sz="1000">
+                <a:solidFill>
+                  <a:srgbClr val="334155"/>
+                </a:solidFill>
+              </a:defRPr>
+            </a:pPr>
+            <a:r>
+              <a:t>• Proactive Portfolio Monitoring: Targets vulnerable cohorts with financial counseling before defaults trigger.</a:t>
+            </a:r>
+          </a:p>
+          <a:p>
+            <a:pPr>
+              <a:spcAft>
+                <a:spcPts val="400"/>
+              </a:spcAft>
+              <a:defRPr sz="1000">
+                <a:solidFill>
+                  <a:srgbClr val="334155"/>
+                </a:solidFill>
+              </a:defRPr>
+            </a:pPr>
+            <a:r>
+              <a:t>• Capital Allocation: Banks allocate capital reserves based on cluster risk concentrations.</a:t>
+            </a:r>
+          </a:p>
+        </p:txBody>
+      </p:sp>
+    </p:spTree>
+  </p:cSld>
+  <p:clrMapOvr>
+    <a:masterClrMapping/>
+  </p:clrMapOvr>
+</p:sld>
+</file>
+
+<file path=ppt/slides/slide7.xml><?xml version="1.0" encoding="utf-8"?>
+<p:sld xmlns:a="http://schemas.openxmlformats.org/drawingml/2006/main" xmlns:p="http://schemas.openxmlformats.org/presentationml/2006/main" xmlns:r="http://schemas.openxmlformats.org/officeDocument/2006/relationships">
+  <p:cSld>
+    <p:bg>
+      <p:bgPr>
+        <a:solidFill>
+          <a:srgbClr val="F8FAFC"/>
+        </a:solidFill>
+        <a:effectLst/>
+      </p:bgPr>
+    </p:bg>
+    <p:spTree>
+      <p:nvGrpSpPr>
+        <p:cNvPr id="1" name=""/>
+        <p:cNvGrpSpPr/>
+        <p:nvPr/>
+      </p:nvGrpSpPr>
+      <p:grpSpPr/>
+      <p:sp>
+        <p:nvSpPr>
+          <p:cNvPr id="2" name="Rectangle 1"/>
+          <p:cNvSpPr/>
+          <p:nvPr/>
+        </p:nvSpPr>
+        <p:spPr>
+          <a:xfrm>
+            <a:off x="0" y="0"/>
+            <a:ext cx="12191695" cy="109728"/>
+          </a:xfrm>
+          <a:prstGeom prst="rect">
+            <a:avLst/>
+          </a:prstGeom>
+          <a:solidFill>
+            <a:srgbClr val="2563EB"/>
+          </a:solidFill>
+          <a:ln>
+            <a:noFill/>
+          </a:ln>
+        </p:spPr>
+        <p:style>
+          <a:lnRef idx="1">
+            <a:schemeClr val="accent1"/>
+          </a:lnRef>
+          <a:fillRef idx="3">
+            <a:schemeClr val="accent1"/>
+          </a:fillRef>
+          <a:effectRef idx="2">
+            <a:schemeClr val="accent1"/>
+          </a:effectRef>
+          <a:fontRef idx="minor">
+            <a:schemeClr val="lt1"/>
+          </a:fontRef>
+        </p:style>
+        <p:txBody>
+          <a:bodyPr rtlCol="0" anchor="ctr"/>
+          <a:lstStyle/>
+          <a:p>
+            <a:pPr algn="ctr"/>
+          </a:p>
+        </p:txBody>
+      </p:sp>
+      <p:sp>
+        <p:nvSpPr>
+          <p:cNvPr id="3" name="TextBox 2"/>
+          <p:cNvSpPr txBox="1"/>
+          <p:nvPr/>
+        </p:nvSpPr>
+        <p:spPr>
+          <a:xfrm>
+            <a:off x="731520" y="256032"/>
+            <a:ext cx="10698480" cy="256032"/>
+          </a:xfrm>
+          <a:prstGeom prst="rect">
+            <a:avLst/>
+          </a:prstGeom>
+          <a:noFill/>
+        </p:spPr>
+        <p:txBody>
+          <a:bodyPr wrap="square" lIns="0" tIns="0" rIns="0" bIns="0">
+            <a:spAutoFit/>
+          </a:bodyPr>
+          <a:lstStyle/>
+          <a:p>
+            <a:pPr>
+              <a:defRPr sz="1000" b="1">
+                <a:solidFill>
+                  <a:srgbClr val="2563EB"/>
+                </a:solidFill>
+              </a:defRPr>
+            </a:pPr>
+            <a:r>
+              <a:t>CSI3010: DATA WAREHOUSING &amp; DATA MINING | REVIEW 2</a:t>
+            </a:r>
+          </a:p>
+        </p:txBody>
+      </p:sp>
+      <p:sp>
+        <p:nvSpPr>
+          <p:cNvPr id="4" name="TextBox 3"/>
+          <p:cNvSpPr txBox="1"/>
+          <p:nvPr/>
+        </p:nvSpPr>
+        <p:spPr>
+          <a:xfrm>
+            <a:off x="731520" y="502920"/>
+            <a:ext cx="10698480" cy="548640"/>
+          </a:xfrm>
+          <a:prstGeom prst="rect">
+            <a:avLst/>
+          </a:prstGeom>
+          <a:noFill/>
+        </p:spPr>
+        <p:txBody>
+          <a:bodyPr wrap="square" lIns="0" tIns="0" rIns="0" bIns="0">
+            <a:spAutoFit/>
+          </a:bodyPr>
+          <a:lstStyle/>
+          <a:p>
+            <a:pPr>
+              <a:defRPr sz="2100" b="1">
+                <a:solidFill>
+                  <a:srgbClr val="0F172A"/>
+                </a:solidFill>
+              </a:defRPr>
+            </a:pPr>
+            <a:r>
               <a:t>Borrower Clustering: K-Means Code &amp; Optimal K Determination</a:t>
             </a:r>
           </a:p>
@@ -8161,7 +11949,7 @@
 </p:sld>
 </file>
 
-<file path=ppt/slides/slide6.xml><?xml version="1.0" encoding="utf-8"?>
+<file path=ppt/slides/slide8.xml><?xml version="1.0" encoding="utf-8"?>
 <p:sld xmlns:a="http://schemas.openxmlformats.org/drawingml/2006/main" xmlns:p="http://schemas.openxmlformats.org/presentationml/2006/main" xmlns:r="http://schemas.openxmlformats.org/officeDocument/2006/relationships">
   <p:cSld>
     <p:bg>
@@ -9042,1052 +12830,6 @@
 </p:sld>
 </file>
 
-<file path=ppt/slides/slide7.xml><?xml version="1.0" encoding="utf-8"?>
-<p:sld xmlns:a="http://schemas.openxmlformats.org/drawingml/2006/main" xmlns:p="http://schemas.openxmlformats.org/presentationml/2006/main" xmlns:r="http://schemas.openxmlformats.org/officeDocument/2006/relationships">
-  <p:cSld>
-    <p:bg>
-      <p:bgPr>
-        <a:solidFill>
-          <a:srgbClr val="F8FAFC"/>
-        </a:solidFill>
-        <a:effectLst/>
-      </p:bgPr>
-    </p:bg>
-    <p:spTree>
-      <p:nvGrpSpPr>
-        <p:cNvPr id="1" name=""/>
-        <p:cNvGrpSpPr/>
-        <p:nvPr/>
-      </p:nvGrpSpPr>
-      <p:grpSpPr/>
-      <p:sp>
-        <p:nvSpPr>
-          <p:cNvPr id="2" name="Rectangle 1"/>
-          <p:cNvSpPr/>
-          <p:nvPr/>
-        </p:nvSpPr>
-        <p:spPr>
-          <a:xfrm>
-            <a:off x="0" y="0"/>
-            <a:ext cx="12191695" cy="109728"/>
-          </a:xfrm>
-          <a:prstGeom prst="rect">
-            <a:avLst/>
-          </a:prstGeom>
-          <a:solidFill>
-            <a:srgbClr val="2563EB"/>
-          </a:solidFill>
-          <a:ln>
-            <a:noFill/>
-          </a:ln>
-        </p:spPr>
-        <p:style>
-          <a:lnRef idx="1">
-            <a:schemeClr val="accent1"/>
-          </a:lnRef>
-          <a:fillRef idx="3">
-            <a:schemeClr val="accent1"/>
-          </a:fillRef>
-          <a:effectRef idx="2">
-            <a:schemeClr val="accent1"/>
-          </a:effectRef>
-          <a:fontRef idx="minor">
-            <a:schemeClr val="lt1"/>
-          </a:fontRef>
-        </p:style>
-        <p:txBody>
-          <a:bodyPr rtlCol="0" anchor="ctr"/>
-          <a:lstStyle/>
-          <a:p>
-            <a:pPr algn="ctr"/>
-          </a:p>
-        </p:txBody>
-      </p:sp>
-      <p:sp>
-        <p:nvSpPr>
-          <p:cNvPr id="3" name="TextBox 2"/>
-          <p:cNvSpPr txBox="1"/>
-          <p:nvPr/>
-        </p:nvSpPr>
-        <p:spPr>
-          <a:xfrm>
-            <a:off x="731520" y="256032"/>
-            <a:ext cx="10698480" cy="256032"/>
-          </a:xfrm>
-          <a:prstGeom prst="rect">
-            <a:avLst/>
-          </a:prstGeom>
-          <a:noFill/>
-        </p:spPr>
-        <p:txBody>
-          <a:bodyPr wrap="square" lIns="0" tIns="0" rIns="0" bIns="0">
-            <a:spAutoFit/>
-          </a:bodyPr>
-          <a:lstStyle/>
-          <a:p>
-            <a:pPr>
-              <a:defRPr sz="1000" b="1">
-                <a:solidFill>
-                  <a:srgbClr val="2563EB"/>
-                </a:solidFill>
-              </a:defRPr>
-            </a:pPr>
-            <a:r>
-              <a:t>CSI3010: DATA WAREHOUSING &amp; DATA MINING | REVIEW 2</a:t>
-            </a:r>
-          </a:p>
-        </p:txBody>
-      </p:sp>
-      <p:sp>
-        <p:nvSpPr>
-          <p:cNvPr id="4" name="TextBox 3"/>
-          <p:cNvSpPr txBox="1"/>
-          <p:nvPr/>
-        </p:nvSpPr>
-        <p:spPr>
-          <a:xfrm>
-            <a:off x="731520" y="502920"/>
-            <a:ext cx="10698480" cy="548640"/>
-          </a:xfrm>
-          <a:prstGeom prst="rect">
-            <a:avLst/>
-          </a:prstGeom>
-          <a:noFill/>
-        </p:spPr>
-        <p:txBody>
-          <a:bodyPr wrap="square" lIns="0" tIns="0" rIns="0" bIns="0">
-            <a:spAutoFit/>
-          </a:bodyPr>
-          <a:lstStyle/>
-          <a:p>
-            <a:pPr>
-              <a:defRPr sz="2100" b="1">
-                <a:solidFill>
-                  <a:srgbClr val="0F172A"/>
-                </a:solidFill>
-              </a:defRPr>
-            </a:pPr>
-            <a:r>
-              <a:t>Association Rules: Discretization &amp; Apriori Algorithm Code</a:t>
-            </a:r>
-          </a:p>
-        </p:txBody>
-      </p:sp>
-      <p:sp>
-        <p:nvSpPr>
-          <p:cNvPr id="5" name="Rounded Rectangle 4"/>
-          <p:cNvSpPr/>
-          <p:nvPr/>
-        </p:nvSpPr>
-        <p:spPr>
-          <a:xfrm>
-            <a:off x="731520" y="1234440"/>
-            <a:ext cx="5303520" cy="5120640"/>
-          </a:xfrm>
-          <a:prstGeom prst="roundRect">
-            <a:avLst/>
-          </a:prstGeom>
-          <a:solidFill>
-            <a:srgbClr val="0F172A"/>
-          </a:solidFill>
-          <a:ln w="12700">
-            <a:solidFill>
-              <a:srgbClr val="334155"/>
-            </a:solidFill>
-          </a:ln>
-        </p:spPr>
-        <p:style>
-          <a:lnRef idx="1">
-            <a:schemeClr val="accent1"/>
-          </a:lnRef>
-          <a:fillRef idx="3">
-            <a:schemeClr val="accent1"/>
-          </a:fillRef>
-          <a:effectRef idx="2">
-            <a:schemeClr val="accent1"/>
-          </a:effectRef>
-          <a:fontRef idx="minor">
-            <a:schemeClr val="lt1"/>
-          </a:fontRef>
-        </p:style>
-        <p:txBody>
-          <a:bodyPr rtlCol="0" anchor="ctr"/>
-          <a:lstStyle/>
-          <a:p>
-            <a:pPr algn="ctr"/>
-          </a:p>
-        </p:txBody>
-      </p:sp>
-      <p:sp>
-        <p:nvSpPr>
-          <p:cNvPr id="6" name="TextBox 5"/>
-          <p:cNvSpPr txBox="1"/>
-          <p:nvPr/>
-        </p:nvSpPr>
-        <p:spPr>
-          <a:xfrm>
-            <a:off x="914400" y="1344168"/>
-            <a:ext cx="4937760" cy="274320"/>
-          </a:xfrm>
-          <a:prstGeom prst="rect">
-            <a:avLst/>
-          </a:prstGeom>
-          <a:noFill/>
-        </p:spPr>
-        <p:txBody>
-          <a:bodyPr wrap="square" lIns="0" tIns="0" rIns="0" bIns="0">
-            <a:spAutoFit/>
-          </a:bodyPr>
-          <a:lstStyle/>
-          <a:p>
-            <a:pPr>
-              <a:defRPr sz="950" b="1">
-                <a:solidFill>
-                  <a:srgbClr val="10B981"/>
-                </a:solidFill>
-              </a:defRPr>
-            </a:pPr>
-            <a:r>
-              <a:t>⚙  mine_rules.py</a:t>
-            </a:r>
-          </a:p>
-        </p:txBody>
-      </p:sp>
-      <p:sp>
-        <p:nvSpPr>
-          <p:cNvPr id="7" name="TextBox 6"/>
-          <p:cNvSpPr txBox="1"/>
-          <p:nvPr/>
-        </p:nvSpPr>
-        <p:spPr>
-          <a:xfrm>
-            <a:off x="914400" y="1645920"/>
-            <a:ext cx="4937760" cy="4617720"/>
-          </a:xfrm>
-          <a:prstGeom prst="rect">
-            <a:avLst/>
-          </a:prstGeom>
-          <a:noFill/>
-        </p:spPr>
-        <p:txBody>
-          <a:bodyPr wrap="square" lIns="0" tIns="0" rIns="0" bIns="0">
-            <a:spAutoFit/>
-          </a:bodyPr>
-          <a:lstStyle/>
-          <a:p>
-            <a:pPr>
-              <a:defRPr sz="850">
-                <a:solidFill>
-                  <a:srgbClr val="94A3B8"/>
-                </a:solidFill>
-                <a:latin typeface="Consolas"/>
-              </a:defRPr>
-            </a:pPr>
-            <a:r>
-              <a:t># association_rules/mine_rules.py</a:t>
-            </a:r>
-          </a:p>
-          <a:p>
-            <a:pPr>
-              <a:defRPr sz="850">
-                <a:solidFill>
-                  <a:srgbClr val="93C5FD"/>
-                </a:solidFill>
-                <a:latin typeface="Consolas"/>
-              </a:defRPr>
-            </a:pPr>
-            <a:r>
-              <a:t>from mlxtend.frequent_patterns import apriori, association_rules</a:t>
-            </a:r>
-          </a:p>
-          <a:p>
-            <a:pPr>
-              <a:defRPr sz="850">
-                <a:solidFill>
-                  <a:srgbClr val="F1F5F9"/>
-                </a:solidFill>
-                <a:latin typeface="Consolas"/>
-              </a:defRPr>
-            </a:pPr>
-          </a:p>
-          <a:p>
-            <a:pPr>
-              <a:defRPr sz="850">
-                <a:solidFill>
-                  <a:srgbClr val="94A3B8"/>
-                </a:solidFill>
-                <a:latin typeface="Consolas"/>
-              </a:defRPr>
-            </a:pPr>
-            <a:r>
-              <a:t># Continuous Discretization</a:t>
-            </a:r>
-          </a:p>
-          <a:p>
-            <a:pPr>
-              <a:defRPr sz="850">
-                <a:solidFill>
-                  <a:srgbClr val="F1F5F9"/>
-                </a:solidFill>
-                <a:latin typeface="Consolas"/>
-              </a:defRPr>
-            </a:pPr>
-            <a:r>
-              <a:t>df_disc['Income'] = pd.qcut(df['Income'], q=3, labels=['Low','Med','High'])</a:t>
-            </a:r>
-          </a:p>
-          <a:p>
-            <a:pPr>
-              <a:defRPr sz="850">
-                <a:solidFill>
-                  <a:srgbClr val="F1F5F9"/>
-                </a:solidFill>
-                <a:latin typeface="Consolas"/>
-              </a:defRPr>
-            </a:pPr>
-            <a:r>
-              <a:t>df_disc['CreditScore'] = pd.cut(df['CreditScore'], bins=[0,580,670,740,850])</a:t>
-            </a:r>
-          </a:p>
-          <a:p>
-            <a:pPr>
-              <a:defRPr sz="850">
-                <a:solidFill>
-                  <a:srgbClr val="F1F5F9"/>
-                </a:solidFill>
-                <a:latin typeface="Consolas"/>
-              </a:defRPr>
-            </a:pPr>
-            <a:r>
-              <a:t>df_disc['DTIRatio'] = pd.cut(df['DTIRatio'], bins=[0.0, 0.30, 0.50, 1.0])</a:t>
-            </a:r>
-          </a:p>
-          <a:p>
-            <a:pPr>
-              <a:defRPr sz="850">
-                <a:solidFill>
-                  <a:srgbClr val="F1F5F9"/>
-                </a:solidFill>
-                <a:latin typeface="Consolas"/>
-              </a:defRPr>
-            </a:pPr>
-            <a:r>
-              <a:t>df_encoded = pd.get_dummies(df_disc, prefix='', prefix_sep='')</a:t>
-            </a:r>
-          </a:p>
-          <a:p>
-            <a:pPr>
-              <a:defRPr sz="850">
-                <a:solidFill>
-                  <a:srgbClr val="F1F5F9"/>
-                </a:solidFill>
-                <a:latin typeface="Consolas"/>
-              </a:defRPr>
-            </a:pPr>
-          </a:p>
-          <a:p>
-            <a:pPr>
-              <a:defRPr sz="850">
-                <a:solidFill>
-                  <a:srgbClr val="94A3B8"/>
-                </a:solidFill>
-                <a:latin typeface="Consolas"/>
-              </a:defRPr>
-            </a:pPr>
-            <a:r>
-              <a:t># Apriori Frequent Itemset Mining</a:t>
-            </a:r>
-          </a:p>
-          <a:p>
-            <a:pPr>
-              <a:defRPr sz="850">
-                <a:solidFill>
-                  <a:srgbClr val="6EE7B7"/>
-                </a:solidFill>
-                <a:latin typeface="Consolas"/>
-              </a:defRPr>
-            </a:pPr>
-            <a:r>
-              <a:t>itemsets = apriori(df_encoded, min_support=0.03, use_colnames=True)</a:t>
-            </a:r>
-          </a:p>
-          <a:p>
-            <a:pPr>
-              <a:defRPr sz="850">
-                <a:solidFill>
-                  <a:srgbClr val="6EE7B7"/>
-                </a:solidFill>
-                <a:latin typeface="Consolas"/>
-              </a:defRPr>
-            </a:pPr>
-            <a:r>
-              <a:t>rules = association_rules(itemsets, metric='confidence', min_threshold=0.30)</a:t>
-            </a:r>
-          </a:p>
-          <a:p>
-            <a:pPr>
-              <a:defRPr sz="850">
-                <a:solidFill>
-                  <a:srgbClr val="F1F5F9"/>
-                </a:solidFill>
-                <a:latin typeface="Consolas"/>
-              </a:defRPr>
-            </a:pPr>
-          </a:p>
-          <a:p>
-            <a:pPr>
-              <a:defRPr sz="850">
-                <a:solidFill>
-                  <a:srgbClr val="94A3B8"/>
-                </a:solidFill>
-                <a:latin typeface="Consolas"/>
-              </a:defRPr>
-            </a:pPr>
-            <a:r>
-              <a:t># Filter for Default=Yes sorted by Lift</a:t>
-            </a:r>
-          </a:p>
-          <a:p>
-            <a:pPr>
-              <a:defRPr sz="850">
-                <a:solidFill>
-                  <a:srgbClr val="F1F5F9"/>
-                </a:solidFill>
-                <a:latin typeface="Consolas"/>
-              </a:defRPr>
-            </a:pPr>
-            <a:r>
-              <a:t>default_rules = rules[rules['consequents_str'].str.contains('Default=Yes')]</a:t>
-            </a:r>
-          </a:p>
-          <a:p>
-            <a:pPr>
-              <a:defRPr sz="850">
-                <a:solidFill>
-                  <a:srgbClr val="F1F5F9"/>
-                </a:solidFill>
-                <a:latin typeface="Consolas"/>
-              </a:defRPr>
-            </a:pPr>
-            <a:r>
-              <a:t>top_rules = default_rules.sort_values(by='lift', ascending=False)</a:t>
-            </a:r>
-          </a:p>
-        </p:txBody>
-      </p:sp>
-      <p:sp>
-        <p:nvSpPr>
-          <p:cNvPr id="8" name="Rounded Rectangle 7"/>
-          <p:cNvSpPr/>
-          <p:nvPr/>
-        </p:nvSpPr>
-        <p:spPr>
-          <a:xfrm>
-            <a:off x="6217920" y="1234440"/>
-            <a:ext cx="5242255" cy="5120640"/>
-          </a:xfrm>
-          <a:prstGeom prst="roundRect">
-            <a:avLst/>
-          </a:prstGeom>
-          <a:solidFill>
-            <a:srgbClr val="FFFFFF"/>
-          </a:solidFill>
-          <a:ln w="12700">
-            <a:solidFill>
-              <a:srgbClr val="E2E8F0"/>
-            </a:solidFill>
-          </a:ln>
-        </p:spPr>
-        <p:style>
-          <a:lnRef idx="1">
-            <a:schemeClr val="accent1"/>
-          </a:lnRef>
-          <a:fillRef idx="3">
-            <a:schemeClr val="accent1"/>
-          </a:fillRef>
-          <a:effectRef idx="2">
-            <a:schemeClr val="accent1"/>
-          </a:effectRef>
-          <a:fontRef idx="minor">
-            <a:schemeClr val="lt1"/>
-          </a:fontRef>
-        </p:style>
-        <p:txBody>
-          <a:bodyPr rtlCol="0" anchor="ctr"/>
-          <a:lstStyle/>
-          <a:p>
-            <a:pPr algn="ctr"/>
-          </a:p>
-        </p:txBody>
-      </p:sp>
-      <p:sp>
-        <p:nvSpPr>
-          <p:cNvPr id="9" name="TextBox 8"/>
-          <p:cNvSpPr txBox="1"/>
-          <p:nvPr/>
-        </p:nvSpPr>
-        <p:spPr>
-          <a:xfrm>
-            <a:off x="6400800" y="1371600"/>
-            <a:ext cx="4846320" cy="4754880"/>
-          </a:xfrm>
-          <a:prstGeom prst="rect">
-            <a:avLst/>
-          </a:prstGeom>
-          <a:noFill/>
-        </p:spPr>
-        <p:txBody>
-          <a:bodyPr wrap="square">
-            <a:spAutoFit/>
-          </a:bodyPr>
-          <a:lstStyle/>
-          <a:p>
-            <a:pPr>
-              <a:spcAft>
-                <a:spcPts val="1000"/>
-              </a:spcAft>
-              <a:defRPr sz="1400" b="1">
-                <a:solidFill>
-                  <a:srgbClr val="0F172A"/>
-                </a:solidFill>
-              </a:defRPr>
-            </a:pPr>
-            <a:r>
-              <a:t>Mathematical Metrics &amp; Mining Rules</a:t>
-            </a:r>
-          </a:p>
-          <a:p>
-            <a:pPr>
-              <a:spcAft>
-                <a:spcPts val="800"/>
-              </a:spcAft>
-              <a:defRPr sz="1000">
-                <a:solidFill>
-                  <a:srgbClr val="334155"/>
-                </a:solidFill>
-              </a:defRPr>
-            </a:pPr>
-            <a:r>
-              <a:t>• Support(A -&gt; B):</a:t>
-            </a:r>
-            <a:br/>
-            <a:r>
-              <a:t>  P(A and B)</a:t>
-            </a:r>
-            <a:br/>
-            <a:r>
-              <a:t>Frequency of co-occurrence in dataset (threshold = 3%).</a:t>
-            </a:r>
-          </a:p>
-          <a:p>
-            <a:pPr>
-              <a:spcAft>
-                <a:spcPts val="800"/>
-              </a:spcAft>
-              <a:defRPr sz="1000">
-                <a:solidFill>
-                  <a:srgbClr val="334155"/>
-                </a:solidFill>
-              </a:defRPr>
-            </a:pPr>
-            <a:r>
-              <a:t>• Confidence(A -&gt; B):</a:t>
-            </a:r>
-            <a:br/>
-            <a:r>
-              <a:t>  P(B | A) = Support(A and B) / Support(A)</a:t>
-            </a:r>
-            <a:br/>
-            <a:r>
-              <a:t>Probability of Default given borrower conditions (threshold = 30%).</a:t>
-            </a:r>
-          </a:p>
-          <a:p>
-            <a:pPr>
-              <a:spcAft>
-                <a:spcPts val="800"/>
-              </a:spcAft>
-              <a:defRPr sz="1000">
-                <a:solidFill>
-                  <a:srgbClr val="334155"/>
-                </a:solidFill>
-              </a:defRPr>
-            </a:pPr>
-            <a:r>
-              <a:t>• Lift(A -&gt; B):</a:t>
-            </a:r>
-            <a:br/>
-            <a:r>
-              <a:t>  Confidence / P(B)</a:t>
-            </a:r>
-            <a:br/>
-            <a:r>
-              <a:t>Multiplier over baseline default rate (11.7%).</a:t>
-            </a:r>
-            <a:br/>
-            <a:r>
-              <a:t>• Lift &gt; 1: Strong positive risk indicator</a:t>
-            </a:r>
-            <a:br/>
-            <a:r>
-              <a:t>• Lift = 5.69: 5.7x more likely to default than random.</a:t>
-            </a:r>
-          </a:p>
-          <a:p>
-            <a:pPr>
-              <a:spcAft>
-                <a:spcPts val="800"/>
-              </a:spcAft>
-              <a:defRPr sz="1000">
-                <a:solidFill>
-                  <a:srgbClr val="334155"/>
-                </a:solidFill>
-              </a:defRPr>
-            </a:pPr>
-            <a:r>
-              <a:t>• Consequent:</a:t>
-            </a:r>
-            <a:br/>
-            <a:r>
-              <a:t>  Explicitly targeted for Default=Yes to isolate toxic risk rules.</a:t>
-            </a:r>
-          </a:p>
-        </p:txBody>
-      </p:sp>
-    </p:spTree>
-  </p:cSld>
-  <p:clrMapOvr>
-    <a:masterClrMapping/>
-  </p:clrMapOvr>
-</p:sld>
-</file>
-
-<file path=ppt/slides/slide8.xml><?xml version="1.0" encoding="utf-8"?>
-<p:sld xmlns:a="http://schemas.openxmlformats.org/drawingml/2006/main" xmlns:p="http://schemas.openxmlformats.org/presentationml/2006/main" xmlns:r="http://schemas.openxmlformats.org/officeDocument/2006/relationships">
-  <p:cSld>
-    <p:bg>
-      <p:bgPr>
-        <a:solidFill>
-          <a:srgbClr val="F8FAFC"/>
-        </a:solidFill>
-        <a:effectLst/>
-      </p:bgPr>
-    </p:bg>
-    <p:spTree>
-      <p:nvGrpSpPr>
-        <p:cNvPr id="1" name=""/>
-        <p:cNvGrpSpPr/>
-        <p:nvPr/>
-      </p:nvGrpSpPr>
-      <p:grpSpPr/>
-      <p:sp>
-        <p:nvSpPr>
-          <p:cNvPr id="2" name="Rectangle 1"/>
-          <p:cNvSpPr/>
-          <p:nvPr/>
-        </p:nvSpPr>
-        <p:spPr>
-          <a:xfrm>
-            <a:off x="0" y="0"/>
-            <a:ext cx="12191695" cy="109728"/>
-          </a:xfrm>
-          <a:prstGeom prst="rect">
-            <a:avLst/>
-          </a:prstGeom>
-          <a:solidFill>
-            <a:srgbClr val="2563EB"/>
-          </a:solidFill>
-          <a:ln>
-            <a:noFill/>
-          </a:ln>
-        </p:spPr>
-        <p:style>
-          <a:lnRef idx="1">
-            <a:schemeClr val="accent1"/>
-          </a:lnRef>
-          <a:fillRef idx="3">
-            <a:schemeClr val="accent1"/>
-          </a:fillRef>
-          <a:effectRef idx="2">
-            <a:schemeClr val="accent1"/>
-          </a:effectRef>
-          <a:fontRef idx="minor">
-            <a:schemeClr val="lt1"/>
-          </a:fontRef>
-        </p:style>
-        <p:txBody>
-          <a:bodyPr rtlCol="0" anchor="ctr"/>
-          <a:lstStyle/>
-          <a:p>
-            <a:pPr algn="ctr"/>
-          </a:p>
-        </p:txBody>
-      </p:sp>
-      <p:sp>
-        <p:nvSpPr>
-          <p:cNvPr id="3" name="TextBox 2"/>
-          <p:cNvSpPr txBox="1"/>
-          <p:nvPr/>
-        </p:nvSpPr>
-        <p:spPr>
-          <a:xfrm>
-            <a:off x="731520" y="256032"/>
-            <a:ext cx="10698480" cy="256032"/>
-          </a:xfrm>
-          <a:prstGeom prst="rect">
-            <a:avLst/>
-          </a:prstGeom>
-          <a:noFill/>
-        </p:spPr>
-        <p:txBody>
-          <a:bodyPr wrap="square" lIns="0" tIns="0" rIns="0" bIns="0">
-            <a:spAutoFit/>
-          </a:bodyPr>
-          <a:lstStyle/>
-          <a:p>
-            <a:pPr>
-              <a:defRPr sz="1000" b="1">
-                <a:solidFill>
-                  <a:srgbClr val="2563EB"/>
-                </a:solidFill>
-              </a:defRPr>
-            </a:pPr>
-            <a:r>
-              <a:t>CSI3010: DATA WAREHOUSING &amp; DATA MINING | REVIEW 2</a:t>
-            </a:r>
-          </a:p>
-        </p:txBody>
-      </p:sp>
-      <p:sp>
-        <p:nvSpPr>
-          <p:cNvPr id="4" name="TextBox 3"/>
-          <p:cNvSpPr txBox="1"/>
-          <p:nvPr/>
-        </p:nvSpPr>
-        <p:spPr>
-          <a:xfrm>
-            <a:off x="731520" y="502920"/>
-            <a:ext cx="10698480" cy="548640"/>
-          </a:xfrm>
-          <a:prstGeom prst="rect">
-            <a:avLst/>
-          </a:prstGeom>
-          <a:noFill/>
-        </p:spPr>
-        <p:txBody>
-          <a:bodyPr wrap="square" lIns="0" tIns="0" rIns="0" bIns="0">
-            <a:spAutoFit/>
-          </a:bodyPr>
-          <a:lstStyle/>
-          <a:p>
-            <a:pPr>
-              <a:defRPr sz="2100" b="1">
-                <a:solidFill>
-                  <a:srgbClr val="0F172A"/>
-                </a:solidFill>
-              </a:defRPr>
-            </a:pPr>
-            <a:r>
-              <a:t>Association Rules: Pictorial Lift Chart &amp; Top Risk Patterns</a:t>
-            </a:r>
-          </a:p>
-        </p:txBody>
-      </p:sp>
-      <p:sp>
-        <p:nvSpPr>
-          <p:cNvPr id="5" name="Rounded Rectangle 4"/>
-          <p:cNvSpPr/>
-          <p:nvPr/>
-        </p:nvSpPr>
-        <p:spPr>
-          <a:xfrm>
-            <a:off x="731520" y="1234440"/>
-            <a:ext cx="5943600" cy="5120640"/>
-          </a:xfrm>
-          <a:prstGeom prst="roundRect">
-            <a:avLst/>
-          </a:prstGeom>
-          <a:solidFill>
-            <a:srgbClr val="FFFFFF"/>
-          </a:solidFill>
-          <a:ln w="12700">
-            <a:solidFill>
-              <a:srgbClr val="E2E8F0"/>
-            </a:solidFill>
-          </a:ln>
-        </p:spPr>
-        <p:style>
-          <a:lnRef idx="1">
-            <a:schemeClr val="accent1"/>
-          </a:lnRef>
-          <a:fillRef idx="3">
-            <a:schemeClr val="accent1"/>
-          </a:fillRef>
-          <a:effectRef idx="2">
-            <a:schemeClr val="accent1"/>
-          </a:effectRef>
-          <a:fontRef idx="minor">
-            <a:schemeClr val="lt1"/>
-          </a:fontRef>
-        </p:style>
-        <p:txBody>
-          <a:bodyPr rtlCol="0" anchor="ctr"/>
-          <a:lstStyle/>
-          <a:p>
-            <a:pPr algn="ctr"/>
-          </a:p>
-        </p:txBody>
-      </p:sp>
-      <p:pic>
-        <p:nvPicPr>
-          <p:cNvPr id="6" name="Picture 5" descr="rules_lift_chart.png"/>
-          <p:cNvPicPr>
-            <a:picLocks noChangeAspect="1"/>
-          </p:cNvPicPr>
-          <p:nvPr/>
-        </p:nvPicPr>
-        <p:blipFill>
-          <a:blip r:embed="rId2"/>
-          <a:stretch>
-            <a:fillRect/>
-          </a:stretch>
-        </p:blipFill>
-        <p:spPr>
-          <a:xfrm>
-            <a:off x="822960" y="1325880"/>
-            <a:ext cx="5760720" cy="3168396"/>
-          </a:xfrm>
-          <a:prstGeom prst="rect">
-            <a:avLst/>
-          </a:prstGeom>
-        </p:spPr>
-      </p:pic>
-      <p:sp>
-        <p:nvSpPr>
-          <p:cNvPr id="7" name="Rounded Rectangle 6"/>
-          <p:cNvSpPr/>
-          <p:nvPr/>
-        </p:nvSpPr>
-        <p:spPr>
-          <a:xfrm>
-            <a:off x="6858000" y="1234440"/>
-            <a:ext cx="4602175" cy="5120640"/>
-          </a:xfrm>
-          <a:prstGeom prst="roundRect">
-            <a:avLst/>
-          </a:prstGeom>
-          <a:solidFill>
-            <a:srgbClr val="FFFFFF"/>
-          </a:solidFill>
-          <a:ln w="12700">
-            <a:solidFill>
-              <a:srgbClr val="E2E8F0"/>
-            </a:solidFill>
-          </a:ln>
-        </p:spPr>
-        <p:style>
-          <a:lnRef idx="1">
-            <a:schemeClr val="accent1"/>
-          </a:lnRef>
-          <a:fillRef idx="3">
-            <a:schemeClr val="accent1"/>
-          </a:fillRef>
-          <a:effectRef idx="2">
-            <a:schemeClr val="accent1"/>
-          </a:effectRef>
-          <a:fontRef idx="minor">
-            <a:schemeClr val="lt1"/>
-          </a:fontRef>
-        </p:style>
-        <p:txBody>
-          <a:bodyPr rtlCol="0" anchor="ctr"/>
-          <a:lstStyle/>
-          <a:p>
-            <a:pPr algn="ctr"/>
-          </a:p>
-        </p:txBody>
-      </p:sp>
-      <p:sp>
-        <p:nvSpPr>
-          <p:cNvPr id="8" name="TextBox 7"/>
-          <p:cNvSpPr txBox="1"/>
-          <p:nvPr/>
-        </p:nvSpPr>
-        <p:spPr>
-          <a:xfrm>
-            <a:off x="6995160" y="1371600"/>
-            <a:ext cx="4297680" cy="4754880"/>
-          </a:xfrm>
-          <a:prstGeom prst="rect">
-            <a:avLst/>
-          </a:prstGeom>
-          <a:noFill/>
-        </p:spPr>
-        <p:txBody>
-          <a:bodyPr wrap="square">
-            <a:spAutoFit/>
-          </a:bodyPr>
-          <a:lstStyle/>
-          <a:p>
-            <a:pPr>
-              <a:spcAft>
-                <a:spcPts val="800"/>
-              </a:spcAft>
-              <a:defRPr sz="1300" b="1">
-                <a:solidFill>
-                  <a:srgbClr val="0F172A"/>
-                </a:solidFill>
-              </a:defRPr>
-            </a:pPr>
-            <a:r>
-              <a:t>Top Mined Rules (Ranked by Lift)</a:t>
-            </a:r>
-          </a:p>
-          <a:p>
-            <a:pPr>
-              <a:defRPr sz="950" b="1">
-                <a:solidFill>
-                  <a:srgbClr val="2563EB"/>
-                </a:solidFill>
-              </a:defRPr>
-            </a:pPr>
-            <a:r>
-              <a:t>• Rule 1 (Lift = 5.69x | Conf = 66.93%):</a:t>
-            </a:r>
-          </a:p>
-          <a:p>
-            <a:pPr>
-              <a:spcAft>
-                <a:spcPts val="500"/>
-              </a:spcAft>
-              <a:defRPr sz="900">
-                <a:solidFill>
-                  <a:srgbClr val="334155"/>
-                </a:solidFill>
-              </a:defRPr>
-            </a:pPr>
-            <a:r>
-              <a:t>  Income=Low, CreditScore=Poor, LoanAmount=Large -&gt; Default=Yes</a:t>
-            </a:r>
-          </a:p>
-          <a:p>
-            <a:pPr>
-              <a:defRPr sz="950" b="1">
-                <a:solidFill>
-                  <a:srgbClr val="2563EB"/>
-                </a:solidFill>
-              </a:defRPr>
-            </a:pPr>
-            <a:r>
-              <a:t>• Rule 2 (Lift = 5.16x | Conf = 60.64%):</a:t>
-            </a:r>
-          </a:p>
-          <a:p>
-            <a:pPr>
-              <a:spcAft>
-                <a:spcPts val="500"/>
-              </a:spcAft>
-              <a:defRPr sz="900">
-                <a:solidFill>
-                  <a:srgbClr val="334155"/>
-                </a:solidFill>
-              </a:defRPr>
-            </a:pPr>
-            <a:r>
-              <a:t>  Income=Low, DTIRatio=High, LoanAmount=Large -&gt; Default=Yes</a:t>
-            </a:r>
-          </a:p>
-          <a:p>
-            <a:pPr>
-              <a:defRPr sz="950" b="1">
-                <a:solidFill>
-                  <a:srgbClr val="2563EB"/>
-                </a:solidFill>
-              </a:defRPr>
-            </a:pPr>
-            <a:r>
-              <a:t>• Rule 3 (Lift = 4.64x | Conf = 54.49%):</a:t>
-            </a:r>
-          </a:p>
-          <a:p>
-            <a:pPr>
-              <a:spcAft>
-                <a:spcPts val="500"/>
-              </a:spcAft>
-              <a:defRPr sz="900">
-                <a:solidFill>
-                  <a:srgbClr val="334155"/>
-                </a:solidFill>
-              </a:defRPr>
-            </a:pPr>
-            <a:r>
-              <a:t>  CreditScore=Poor, Income=Low, CoSigner=No, DTIRatio=High -&gt; Default=Yes</a:t>
-            </a:r>
-          </a:p>
-          <a:p>
-            <a:pPr>
-              <a:defRPr sz="950" b="1">
-                <a:solidFill>
-                  <a:srgbClr val="2563EB"/>
-                </a:solidFill>
-              </a:defRPr>
-            </a:pPr>
-            <a:r>
-              <a:t>• Rule 4 (Lift = 4.46x | Conf = 52.46%):</a:t>
-            </a:r>
-          </a:p>
-          <a:p>
-            <a:pPr>
-              <a:spcAft>
-                <a:spcPts val="500"/>
-              </a:spcAft>
-              <a:defRPr sz="900">
-                <a:solidFill>
-                  <a:srgbClr val="334155"/>
-                </a:solidFill>
-              </a:defRPr>
-            </a:pPr>
-            <a:r>
-              <a:t>  Income=Low, CoSigner=No, LoanAmount=Large -&gt; Default=Yes</a:t>
-            </a:r>
-          </a:p>
-          <a:p>
-            <a:pPr>
-              <a:defRPr sz="950" b="1">
-                <a:solidFill>
-                  <a:srgbClr val="BE123C"/>
-                </a:solidFill>
-              </a:defRPr>
-            </a:pPr>
-            <a:r>
-              <a:t>• Key Finding:</a:t>
-            </a:r>
-          </a:p>
-          <a:p>
-            <a:pPr>
-              <a:spcAft>
-                <a:spcPts val="500"/>
-              </a:spcAft>
-              <a:defRPr sz="900">
-                <a:solidFill>
-                  <a:srgbClr val="334155"/>
-                </a:solidFill>
-              </a:defRPr>
-            </a:pPr>
-            <a:r>
-              <a:t>  Subprime credit combined with large loan size and absence of a co-signer multiplies default risk by 4.6x to 5.7x over baseline.</a:t>
-            </a:r>
-          </a:p>
-        </p:txBody>
-      </p:sp>
-    </p:spTree>
-  </p:cSld>
-  <p:clrMapOvr>
-    <a:masterClrMapping/>
-  </p:clrMapOvr>
-</p:sld>
-</file>
-
 <file path=ppt/slides/slide9.xml><?xml version="1.0" encoding="utf-8"?>
 <p:sld xmlns:a="http://schemas.openxmlformats.org/drawingml/2006/main" xmlns:p="http://schemas.openxmlformats.org/presentationml/2006/main" xmlns:r="http://schemas.openxmlformats.org/officeDocument/2006/relationships">
   <p:cSld>
@@ -10179,7 +12921,7 @@
               </a:defRPr>
             </a:pPr>
             <a:r>
-              <a:t>CSI3010: DATA WAREHOUSING &amp; DATA MINING | REVIEW 2</a:t>
+              <a:t>CSI3010 | MODULE 3: ASSOCIATION RULES</a:t>
             </a:r>
           </a:p>
         </p:txBody>
@@ -10214,7 +12956,7 @@
               </a:defRPr>
             </a:pPr>
             <a:r>
-              <a:t>Prediction Engine: Continuous Scoring Code &amp; Policy Tiers</a:t>
+              <a:t>Topic 3: Association Rules — Concept &amp; Institutional Role</a:t>
             </a:r>
           </a:p>
         </p:txBody>
@@ -10228,331 +12970,7 @@
         <p:spPr>
           <a:xfrm>
             <a:off x="731520" y="1234440"/>
-            <a:ext cx="4754880" cy="5120640"/>
-          </a:xfrm>
-          <a:prstGeom prst="roundRect">
-            <a:avLst/>
-          </a:prstGeom>
-          <a:solidFill>
-            <a:srgbClr val="0F172A"/>
-          </a:solidFill>
-          <a:ln w="12700">
-            <a:solidFill>
-              <a:srgbClr val="334155"/>
-            </a:solidFill>
-          </a:ln>
-        </p:spPr>
-        <p:style>
-          <a:lnRef idx="1">
-            <a:schemeClr val="accent1"/>
-          </a:lnRef>
-          <a:fillRef idx="3">
-            <a:schemeClr val="accent1"/>
-          </a:fillRef>
-          <a:effectRef idx="2">
-            <a:schemeClr val="accent1"/>
-          </a:effectRef>
-          <a:fontRef idx="minor">
-            <a:schemeClr val="lt1"/>
-          </a:fontRef>
-        </p:style>
-        <p:txBody>
-          <a:bodyPr rtlCol="0" anchor="ctr"/>
-          <a:lstStyle/>
-          <a:p>
-            <a:pPr algn="ctr"/>
-          </a:p>
-        </p:txBody>
-      </p:sp>
-      <p:sp>
-        <p:nvSpPr>
-          <p:cNvPr id="6" name="TextBox 5"/>
-          <p:cNvSpPr txBox="1"/>
-          <p:nvPr/>
-        </p:nvSpPr>
-        <p:spPr>
-          <a:xfrm>
-            <a:off x="914400" y="1344168"/>
-            <a:ext cx="4389120" cy="274320"/>
-          </a:xfrm>
-          <a:prstGeom prst="rect">
-            <a:avLst/>
-          </a:prstGeom>
-          <a:noFill/>
-        </p:spPr>
-        <p:txBody>
-          <a:bodyPr wrap="square" lIns="0" tIns="0" rIns="0" bIns="0">
-            <a:spAutoFit/>
-          </a:bodyPr>
-          <a:lstStyle/>
-          <a:p>
-            <a:pPr>
-              <a:defRPr sz="950" b="1">
-                <a:solidFill>
-                  <a:srgbClr val="10B981"/>
-                </a:solidFill>
-              </a:defRPr>
-            </a:pPr>
-            <a:r>
-              <a:t>⚙  predictor.py</a:t>
-            </a:r>
-          </a:p>
-        </p:txBody>
-      </p:sp>
-      <p:sp>
-        <p:nvSpPr>
-          <p:cNvPr id="7" name="TextBox 6"/>
-          <p:cNvSpPr txBox="1"/>
-          <p:nvPr/>
-        </p:nvSpPr>
-        <p:spPr>
-          <a:xfrm>
-            <a:off x="914400" y="1645920"/>
-            <a:ext cx="4389120" cy="4617720"/>
-          </a:xfrm>
-          <a:prstGeom prst="rect">
-            <a:avLst/>
-          </a:prstGeom>
-          <a:noFill/>
-        </p:spPr>
-        <p:txBody>
-          <a:bodyPr wrap="square" lIns="0" tIns="0" rIns="0" bIns="0">
-            <a:spAutoFit/>
-          </a:bodyPr>
-          <a:lstStyle/>
-          <a:p>
-            <a:pPr>
-              <a:defRPr sz="850">
-                <a:solidFill>
-                  <a:srgbClr val="94A3B8"/>
-                </a:solidFill>
-                <a:latin typeface="Consolas"/>
-              </a:defRPr>
-            </a:pPr>
-            <a:r>
-              <a:t># prediction/predictor.py</a:t>
-            </a:r>
-          </a:p>
-          <a:p>
-            <a:pPr>
-              <a:defRPr sz="850">
-                <a:solidFill>
-                  <a:srgbClr val="93C5FD"/>
-                </a:solidFill>
-                <a:latin typeface="Consolas"/>
-              </a:defRPr>
-            </a:pPr>
-            <a:r>
-              <a:t>class LoanDefaultPredictor:</a:t>
-            </a:r>
-          </a:p>
-          <a:p>
-            <a:pPr>
-              <a:defRPr sz="850">
-                <a:solidFill>
-                  <a:srgbClr val="93C5FD"/>
-                </a:solidFill>
-                <a:latin typeface="Consolas"/>
-              </a:defRPr>
-            </a:pPr>
-            <a:r>
-              <a:t>    def predict_borrower_risk(self, borrower_data):</a:t>
-            </a:r>
-          </a:p>
-          <a:p>
-            <a:pPr>
-              <a:defRPr sz="850">
-                <a:solidFill>
-                  <a:srgbClr val="94A3B8"/>
-                </a:solidFill>
-                <a:latin typeface="Consolas"/>
-              </a:defRPr>
-            </a:pPr>
-            <a:r>
-              <a:t>        # Preprocessing transform</a:t>
-            </a:r>
-          </a:p>
-          <a:p>
-            <a:pPr>
-              <a:defRPr sz="850">
-                <a:solidFill>
-                  <a:srgbClr val="F1F5F9"/>
-                </a:solidFill>
-                <a:latin typeface="Consolas"/>
-              </a:defRPr>
-            </a:pPr>
-            <a:r>
-              <a:t>        df_input = pd.DataFrame([borrower_data])</a:t>
-            </a:r>
-          </a:p>
-          <a:p>
-            <a:pPr>
-              <a:defRPr sz="850">
-                <a:solidFill>
-                  <a:srgbClr val="F1F5F9"/>
-                </a:solidFill>
-                <a:latin typeface="Consolas"/>
-              </a:defRPr>
-            </a:pPr>
-            <a:r>
-              <a:t>        X_trans = self.preprocessor.transform(df_input)</a:t>
-            </a:r>
-          </a:p>
-          <a:p>
-            <a:pPr>
-              <a:defRPr sz="850">
-                <a:solidFill>
-                  <a:srgbClr val="F1F5F9"/>
-                </a:solidFill>
-                <a:latin typeface="Consolas"/>
-              </a:defRPr>
-            </a:pPr>
-            <a:r>
-              <a:t>        </a:t>
-            </a:r>
-          </a:p>
-          <a:p>
-            <a:pPr>
-              <a:defRPr sz="850">
-                <a:solidFill>
-                  <a:srgbClr val="94A3B8"/>
-                </a:solidFill>
-                <a:latin typeface="Consolas"/>
-              </a:defRPr>
-            </a:pPr>
-            <a:r>
-              <a:t>        # Continuous probability P(Default=1)</a:t>
-            </a:r>
-          </a:p>
-          <a:p>
-            <a:pPr>
-              <a:defRPr sz="850">
-                <a:solidFill>
-                  <a:srgbClr val="F1F5F9"/>
-                </a:solidFill>
-                <a:latin typeface="Consolas"/>
-              </a:defRPr>
-            </a:pPr>
-            <a:r>
-              <a:t>        prob = float(self.model.predict_proba(X_trans)[0, 1])</a:t>
-            </a:r>
-          </a:p>
-          <a:p>
-            <a:pPr>
-              <a:defRPr sz="850">
-                <a:solidFill>
-                  <a:srgbClr val="F1F5F9"/>
-                </a:solidFill>
-                <a:latin typeface="Consolas"/>
-              </a:defRPr>
-            </a:pPr>
-            <a:r>
-              <a:t>        </a:t>
-            </a:r>
-          </a:p>
-          <a:p>
-            <a:pPr>
-              <a:defRPr sz="850">
-                <a:solidFill>
-                  <a:srgbClr val="94A3B8"/>
-                </a:solidFill>
-                <a:latin typeface="Consolas"/>
-              </a:defRPr>
-            </a:pPr>
-            <a:r>
-              <a:t>        # 4-Tier Risk Categorization</a:t>
-            </a:r>
-          </a:p>
-          <a:p>
-            <a:pPr>
-              <a:defRPr sz="850">
-                <a:solidFill>
-                  <a:srgbClr val="F1F5F9"/>
-                </a:solidFill>
-                <a:latin typeface="Consolas"/>
-              </a:defRPr>
-            </a:pPr>
-            <a:r>
-              <a:t>        if prob &lt; 0.20:   tier = 'Low Risk'</a:t>
-            </a:r>
-          </a:p>
-          <a:p>
-            <a:pPr>
-              <a:defRPr sz="850">
-                <a:solidFill>
-                  <a:srgbClr val="F1F5F9"/>
-                </a:solidFill>
-                <a:latin typeface="Consolas"/>
-              </a:defRPr>
-            </a:pPr>
-            <a:r>
-              <a:t>        elif prob &lt; 0.45: tier = 'Moderate Risk'</a:t>
-            </a:r>
-          </a:p>
-          <a:p>
-            <a:pPr>
-              <a:defRPr sz="850">
-                <a:solidFill>
-                  <a:srgbClr val="F1F5F9"/>
-                </a:solidFill>
-                <a:latin typeface="Consolas"/>
-              </a:defRPr>
-            </a:pPr>
-            <a:r>
-              <a:t>        elif prob &lt; 0.70: tier = 'High Risk'</a:t>
-            </a:r>
-          </a:p>
-          <a:p>
-            <a:pPr>
-              <a:defRPr sz="850">
-                <a:solidFill>
-                  <a:srgbClr val="F1F5F9"/>
-                </a:solidFill>
-                <a:latin typeface="Consolas"/>
-              </a:defRPr>
-            </a:pPr>
-            <a:r>
-              <a:t>        else:             tier = 'Critical Risk'</a:t>
-            </a:r>
-          </a:p>
-          <a:p>
-            <a:pPr>
-              <a:defRPr sz="850">
-                <a:solidFill>
-                  <a:srgbClr val="F1F5F9"/>
-                </a:solidFill>
-                <a:latin typeface="Consolas"/>
-              </a:defRPr>
-            </a:pPr>
-            <a:r>
-              <a:t>        </a:t>
-            </a:r>
-          </a:p>
-          <a:p>
-            <a:pPr>
-              <a:defRPr sz="850">
-                <a:solidFill>
-                  <a:srgbClr val="93C5FD"/>
-                </a:solidFill>
-                <a:latin typeface="Consolas"/>
-              </a:defRPr>
-            </a:pPr>
-            <a:r>
-              <a:t>        return {'prob': prob, 'tier': tier, 'factors': warnings}</a:t>
-            </a:r>
-          </a:p>
-        </p:txBody>
-      </p:sp>
-      <p:sp>
-        <p:nvSpPr>
-          <p:cNvPr id="8" name="Rounded Rectangle 7"/>
-          <p:cNvSpPr/>
-          <p:nvPr/>
-        </p:nvSpPr>
-        <p:spPr>
-          <a:xfrm>
-            <a:off x="5669280" y="1234440"/>
-            <a:ext cx="5790895" cy="1554480"/>
+            <a:ext cx="5212080" cy="2468880"/>
           </a:xfrm>
           <a:prstGeom prst="roundRect">
             <a:avLst/>
@@ -10590,14 +13008,14 @@
       </p:sp>
       <p:sp>
         <p:nvSpPr>
-          <p:cNvPr id="9" name="TextBox 8"/>
+          <p:cNvPr id="6" name="TextBox 5"/>
           <p:cNvSpPr txBox="1"/>
           <p:nvPr/>
         </p:nvSpPr>
         <p:spPr>
           <a:xfrm>
-            <a:off x="5806440" y="1325880"/>
-            <a:ext cx="5486400" cy="1371600"/>
+            <a:off x="914400" y="1371600"/>
+            <a:ext cx="4846320" cy="2194560"/>
           </a:xfrm>
           <a:prstGeom prst="rect">
             <a:avLst/>
@@ -10612,88 +13030,85 @@
           <a:p>
             <a:pPr>
               <a:spcAft>
+                <a:spcPts val="600"/>
+              </a:spcAft>
+              <a:defRPr sz="1200" b="1">
+                <a:solidFill>
+                  <a:srgbClr val="2563EB"/>
+                </a:solidFill>
+              </a:defRPr>
+            </a:pPr>
+            <a:r>
+              <a:t>1. WHY We Used It (The Problem / Need)</a:t>
+            </a:r>
+          </a:p>
+          <a:p>
+            <a:pPr>
+              <a:spcAft>
                 <a:spcPts val="400"/>
               </a:spcAft>
-              <a:defRPr sz="1200" b="1">
-                <a:solidFill>
-                  <a:srgbClr val="2563EB"/>
-                </a:solidFill>
-              </a:defRPr>
-            </a:pPr>
-            <a:r>
-              <a:t>Probability Calibration Metrics</a:t>
-            </a:r>
-          </a:p>
-          <a:p>
-            <a:pPr>
-              <a:defRPr sz="950">
+              <a:defRPr sz="1000">
                 <a:solidFill>
                   <a:srgbClr val="334155"/>
                 </a:solidFill>
               </a:defRPr>
             </a:pPr>
             <a:r>
-              <a:t>• Brier Score: 0.0168 (near zero indicates exceptional probability calibration quality)</a:t>
-            </a:r>
-          </a:p>
-          <a:p>
-            <a:pPr>
-              <a:defRPr sz="950">
+              <a:t>• Loan defaults are rarely triggered by a single parameter in isolation.</a:t>
+            </a:r>
+          </a:p>
+          <a:p>
+            <a:pPr>
+              <a:spcAft>
+                <a:spcPts val="400"/>
+              </a:spcAft>
+              <a:defRPr sz="1000">
                 <a:solidFill>
                   <a:srgbClr val="334155"/>
                 </a:solidFill>
               </a:defRPr>
             </a:pPr>
             <a:r>
-              <a:t>• Test Set ROC-AUC: 0.9973  |  Model Log Loss: 0.0622</a:t>
-            </a:r>
-          </a:p>
-          <a:p>
-            <a:pPr>
-              <a:defRPr sz="950">
+              <a:t>• Defaults happen when multiple adverse financial traits combine (e.g. low income + high DTI + poor credit).</a:t>
+            </a:r>
+          </a:p>
+          <a:p>
+            <a:pPr>
+              <a:spcAft>
+                <a:spcPts val="400"/>
+              </a:spcAft>
+              <a:defRPr sz="1000">
                 <a:solidFill>
                   <a:srgbClr val="334155"/>
                 </a:solidFill>
               </a:defRPr>
             </a:pPr>
             <a:r>
-              <a:t>• Sample Prime Scoring: Credit 810, DTI 0.15 -&gt; P(Default) = 0.02% (Low Risk Badge)</a:t>
-            </a:r>
-          </a:p>
-          <a:p>
-            <a:pPr>
-              <a:defRPr sz="950">
-                <a:solidFill>
-                  <a:srgbClr val="334155"/>
-                </a:solidFill>
-              </a:defRPr>
-            </a:pPr>
-            <a:r>
-              <a:t>• Sample Subprime Scoring: Credit 420, DTI 0.82 -&gt; P(Default) = 99.99% (Critical Risk Badge)</a:t>
-            </a:r>
-          </a:p>
-        </p:txBody>
-      </p:sp>
-      <p:sp>
-        <p:nvSpPr>
-          <p:cNvPr id="10" name="Rounded Rectangle 9"/>
+              <a:t>• Traditional linear scorecards fail to capture non-linear, multi-condition risk interactions.</a:t>
+            </a:r>
+          </a:p>
+        </p:txBody>
+      </p:sp>
+      <p:sp>
+        <p:nvSpPr>
+          <p:cNvPr id="7" name="Rounded Rectangle 6"/>
           <p:cNvSpPr/>
           <p:nvPr/>
         </p:nvSpPr>
         <p:spPr>
           <a:xfrm>
-            <a:off x="5669280" y="2926080"/>
-            <a:ext cx="5790895" cy="3429000"/>
+            <a:off x="6217920" y="1234440"/>
+            <a:ext cx="5242255" cy="2468880"/>
           </a:xfrm>
           <a:prstGeom prst="roundRect">
             <a:avLst/>
           </a:prstGeom>
           <a:solidFill>
-            <a:srgbClr val="FFFFFF"/>
+            <a:srgbClr val="ECFDF5"/>
           </a:solidFill>
           <a:ln w="12700">
             <a:solidFill>
-              <a:srgbClr val="E2E8F0"/>
+              <a:srgbClr val="10B981"/>
             </a:solidFill>
           </a:ln>
         </p:spPr>
@@ -10721,14 +13136,14 @@
       </p:sp>
       <p:sp>
         <p:nvSpPr>
-          <p:cNvPr id="11" name="TextBox 10"/>
+          <p:cNvPr id="8" name="TextBox 7"/>
           <p:cNvSpPr txBox="1"/>
           <p:nvPr/>
         </p:nvSpPr>
         <p:spPr>
           <a:xfrm>
-            <a:off x="5806440" y="3017520"/>
-            <a:ext cx="5486400" cy="3200400"/>
+            <a:off x="6400800" y="1371600"/>
+            <a:ext cx="4876495" cy="2194560"/>
           </a:xfrm>
           <a:prstGeom prst="rect">
             <a:avLst/>
@@ -10745,26 +13160,14 @@
               <a:spcAft>
                 <a:spcPts val="600"/>
               </a:spcAft>
-              <a:defRPr sz="1300" b="1">
-                <a:solidFill>
-                  <a:srgbClr val="0F172A"/>
-                </a:solidFill>
-              </a:defRPr>
-            </a:pPr>
-            <a:r>
-              <a:t>4-Tier Underwriting Decision Matrix</a:t>
-            </a:r>
-          </a:p>
-          <a:p>
-            <a:pPr>
-              <a:defRPr sz="1000" b="1">
+              <a:defRPr sz="1200" b="1">
                 <a:solidFill>
                   <a:srgbClr val="10B981"/>
                 </a:solidFill>
               </a:defRPr>
             </a:pPr>
             <a:r>
-              <a:t>Low Risk (P &lt; 20%):</a:t>
+              <a:t>2. HOW We Used It (Methodology &amp; Pipeline)</a:t>
             </a:r>
           </a:p>
           <a:p>
@@ -10772,26 +13175,14 @@
               <a:spcAft>
                 <a:spcPts val="400"/>
               </a:spcAft>
-              <a:defRPr sz="950">
+              <a:defRPr sz="1000">
                 <a:solidFill>
                   <a:srgbClr val="334155"/>
                 </a:solidFill>
               </a:defRPr>
             </a:pPr>
             <a:r>
-              <a:t>  Fast-track instant approval; Prime interest rate (4.5% - 7.5% APR).</a:t>
-            </a:r>
-          </a:p>
-          <a:p>
-            <a:pPr>
-              <a:defRPr sz="1000" b="1">
-                <a:solidFill>
-                  <a:srgbClr val="2563EB"/>
-                </a:solidFill>
-              </a:defRPr>
-            </a:pPr>
-            <a:r>
-              <a:t>Moderate Risk (20% &lt;= P &lt; 45%):</a:t>
+              <a:t>• Discretized continuous metrics into domain bins (Income tertiles, Credit tiers, DTI brackets).</a:t>
             </a:r>
           </a:p>
           <a:p>
@@ -10799,26 +13190,14 @@
               <a:spcAft>
                 <a:spcPts val="400"/>
               </a:spcAft>
-              <a:defRPr sz="950">
+              <a:defRPr sz="1000">
                 <a:solidFill>
                   <a:srgbClr val="334155"/>
                 </a:solidFill>
               </a:defRPr>
             </a:pPr>
             <a:r>
-              <a:t>  Standard underwriting review; income verification required.</a:t>
-            </a:r>
-          </a:p>
-          <a:p>
-            <a:pPr>
-              <a:defRPr sz="1000" b="1">
-                <a:solidFill>
-                  <a:srgbClr val="D97706"/>
-                </a:solidFill>
-              </a:defRPr>
-            </a:pPr>
-            <a:r>
-              <a:t>High Risk (45% &lt;= P &lt; 70%):</a:t>
+              <a:t>• Applied the Apriori Algorithm (mlxtend) to mine frequent itemsets across 15,000 transactions.</a:t>
             </a:r>
           </a:p>
           <a:p>
@@ -10826,26 +13205,97 @@
               <a:spcAft>
                 <a:spcPts val="400"/>
               </a:spcAft>
-              <a:defRPr sz="950">
+              <a:defRPr sz="1000">
                 <a:solidFill>
                   <a:srgbClr val="334155"/>
                 </a:solidFill>
               </a:defRPr>
             </a:pPr>
             <a:r>
-              <a:t>  Conditional approval; mandatory co-signer and collateral required.</a:t>
-            </a:r>
-          </a:p>
-          <a:p>
-            <a:pPr>
-              <a:defRPr sz="1000" b="1">
-                <a:solidFill>
-                  <a:srgbClr val="E11D48"/>
-                </a:solidFill>
-              </a:defRPr>
-            </a:pPr>
-            <a:r>
-              <a:t>Critical Risk (P &gt;= 70%):</a:t>
+              <a:t>• Evaluated Support, Confidence, and Lift, filtering specifically for consequent Default=Yes.</a:t>
+            </a:r>
+          </a:p>
+        </p:txBody>
+      </p:sp>
+      <p:sp>
+        <p:nvSpPr>
+          <p:cNvPr id="9" name="Rounded Rectangle 8"/>
+          <p:cNvSpPr/>
+          <p:nvPr/>
+        </p:nvSpPr>
+        <p:spPr>
+          <a:xfrm>
+            <a:off x="731520" y="3886200"/>
+            <a:ext cx="5212080" cy="2560320"/>
+          </a:xfrm>
+          <a:prstGeom prst="roundRect">
+            <a:avLst/>
+          </a:prstGeom>
+          <a:solidFill>
+            <a:srgbClr val="FEF9C3"/>
+          </a:solidFill>
+          <a:ln w="12700">
+            <a:solidFill>
+              <a:srgbClr val="CA8A04"/>
+            </a:solidFill>
+          </a:ln>
+        </p:spPr>
+        <p:style>
+          <a:lnRef idx="1">
+            <a:schemeClr val="accent1"/>
+          </a:lnRef>
+          <a:fillRef idx="3">
+            <a:schemeClr val="accent1"/>
+          </a:fillRef>
+          <a:effectRef idx="2">
+            <a:schemeClr val="accent1"/>
+          </a:effectRef>
+          <a:fontRef idx="minor">
+            <a:schemeClr val="lt1"/>
+          </a:fontRef>
+        </p:style>
+        <p:txBody>
+          <a:bodyPr rtlCol="0" anchor="ctr"/>
+          <a:lstStyle/>
+          <a:p>
+            <a:pPr algn="ctr"/>
+          </a:p>
+        </p:txBody>
+      </p:sp>
+      <p:sp>
+        <p:nvSpPr>
+          <p:cNvPr id="10" name="TextBox 9"/>
+          <p:cNvSpPr txBox="1"/>
+          <p:nvPr/>
+        </p:nvSpPr>
+        <p:spPr>
+          <a:xfrm>
+            <a:off x="914400" y="4023360"/>
+            <a:ext cx="4846320" cy="2286000"/>
+          </a:xfrm>
+          <a:prstGeom prst="rect">
+            <a:avLst/>
+          </a:prstGeom>
+          <a:noFill/>
+        </p:spPr>
+        <p:txBody>
+          <a:bodyPr wrap="square">
+            <a:spAutoFit/>
+          </a:bodyPr>
+          <a:lstStyle/>
+          <a:p>
+            <a:pPr>
+              <a:spcAft>
+                <a:spcPts val="600"/>
+              </a:spcAft>
+              <a:defRPr sz="1200" b="1">
+                <a:solidFill>
+                  <a:srgbClr val="CA8A04"/>
+                </a:solidFill>
+              </a:defRPr>
+            </a:pPr>
+            <a:r>
+              <a:t>3. WHAT It Does in Our Project (System Role)</a:t>
             </a:r>
           </a:p>
           <a:p>
@@ -10853,14 +13303,172 @@
               <a:spcAft>
                 <a:spcPts val="400"/>
               </a:spcAft>
-              <a:defRPr sz="950">
+              <a:defRPr sz="1000">
                 <a:solidFill>
                   <a:srgbClr val="334155"/>
                 </a:solidFill>
               </a:defRPr>
             </a:pPr>
             <a:r>
-              <a:t>  Automated decline; risk exceeds institutional lending tolerance.</a:t>
+              <a:t>• Discovers non-trivial IF-THEN borrower risk patterns with statistical conviction.</a:t>
+            </a:r>
+          </a:p>
+          <a:p>
+            <a:pPr>
+              <a:spcAft>
+                <a:spcPts val="400"/>
+              </a:spcAft>
+              <a:defRPr sz="1000">
+                <a:solidFill>
+                  <a:srgbClr val="334155"/>
+                </a:solidFill>
+              </a:defRPr>
+            </a:pPr>
+            <a:r>
+              <a:t>• Reveals that specific feature combinations increase default risk by over 5.69 times compared to random applicants.</a:t>
+            </a:r>
+          </a:p>
+          <a:p>
+            <a:pPr>
+              <a:spcAft>
+                <a:spcPts val="400"/>
+              </a:spcAft>
+              <a:defRPr sz="1000">
+                <a:solidFill>
+                  <a:srgbClr val="334155"/>
+                </a:solidFill>
+              </a:defRPr>
+            </a:pPr>
+            <a:r>
+              <a:t>• Quantifies the protective impact of loan co-signers in mitigating default risk.</a:t>
+            </a:r>
+          </a:p>
+        </p:txBody>
+      </p:sp>
+      <p:sp>
+        <p:nvSpPr>
+          <p:cNvPr id="11" name="Rounded Rectangle 10"/>
+          <p:cNvSpPr/>
+          <p:nvPr/>
+        </p:nvSpPr>
+        <p:spPr>
+          <a:xfrm>
+            <a:off x="6217920" y="3886200"/>
+            <a:ext cx="5242255" cy="2560320"/>
+          </a:xfrm>
+          <a:prstGeom prst="roundRect">
+            <a:avLst/>
+          </a:prstGeom>
+          <a:solidFill>
+            <a:srgbClr val="F5F3FF"/>
+          </a:solidFill>
+          <a:ln w="12700">
+            <a:solidFill>
+              <a:srgbClr val="9333EA"/>
+            </a:solidFill>
+          </a:ln>
+        </p:spPr>
+        <p:style>
+          <a:lnRef idx="1">
+            <a:schemeClr val="accent1"/>
+          </a:lnRef>
+          <a:fillRef idx="3">
+            <a:schemeClr val="accent1"/>
+          </a:fillRef>
+          <a:effectRef idx="2">
+            <a:schemeClr val="accent1"/>
+          </a:effectRef>
+          <a:fontRef idx="minor">
+            <a:schemeClr val="lt1"/>
+          </a:fontRef>
+        </p:style>
+        <p:txBody>
+          <a:bodyPr rtlCol="0" anchor="ctr"/>
+          <a:lstStyle/>
+          <a:p>
+            <a:pPr algn="ctr"/>
+          </a:p>
+        </p:txBody>
+      </p:sp>
+      <p:sp>
+        <p:nvSpPr>
+          <p:cNvPr id="12" name="TextBox 11"/>
+          <p:cNvSpPr txBox="1"/>
+          <p:nvPr/>
+        </p:nvSpPr>
+        <p:spPr>
+          <a:xfrm>
+            <a:off x="6400800" y="4023360"/>
+            <a:ext cx="4876495" cy="2286000"/>
+          </a:xfrm>
+          <a:prstGeom prst="rect">
+            <a:avLst/>
+          </a:prstGeom>
+          <a:noFill/>
+        </p:spPr>
+        <p:txBody>
+          <a:bodyPr wrap="square">
+            <a:spAutoFit/>
+          </a:bodyPr>
+          <a:lstStyle/>
+          <a:p>
+            <a:pPr>
+              <a:spcAft>
+                <a:spcPts val="600"/>
+              </a:spcAft>
+              <a:defRPr sz="1200" b="1">
+                <a:solidFill>
+                  <a:srgbClr val="9333EA"/>
+                </a:solidFill>
+              </a:defRPr>
+            </a:pPr>
+            <a:r>
+              <a:t>4. PRACTICAL USE (Underwriting &amp; Business Value)</a:t>
+            </a:r>
+          </a:p>
+          <a:p>
+            <a:pPr>
+              <a:spcAft>
+                <a:spcPts val="400"/>
+              </a:spcAft>
+              <a:defRPr sz="1000">
+                <a:solidFill>
+                  <a:srgbClr val="334155"/>
+                </a:solidFill>
+              </a:defRPr>
+            </a:pPr>
+            <a:r>
+              <a:t>• Underwriting Rule Engine: Automates policy rules (e.g. require collateral if Rule #1 triggers).</a:t>
+            </a:r>
+          </a:p>
+          <a:p>
+            <a:pPr>
+              <a:spcAft>
+                <a:spcPts val="400"/>
+              </a:spcAft>
+              <a:defRPr sz="1000">
+                <a:solidFill>
+                  <a:srgbClr val="334155"/>
+                </a:solidFill>
+              </a:defRPr>
+            </a:pPr>
+            <a:r>
+              <a:t>• Underwriting Red Flags: Equips credit officers with an actionable risk checklist.</a:t>
+            </a:r>
+          </a:p>
+          <a:p>
+            <a:pPr>
+              <a:spcAft>
+                <a:spcPts val="400"/>
+              </a:spcAft>
+              <a:defRPr sz="1000">
+                <a:solidFill>
+                  <a:srgbClr val="334155"/>
+                </a:solidFill>
+              </a:defRPr>
+            </a:pPr>
+            <a:r>
+              <a:t>• Policy Tuning: Informs credit committee policies on maximum loan sizes for low-income brackets.</a:t>
             </a:r>
           </a:p>
         </p:txBody>

--- a/Review2_ByteBrigades_LoanDefault.pptx
+++ b/Review2_ByteBrigades_LoanDefault.pptx
@@ -515,7 +515,7 @@
           <a:lstStyle/>
           <a:p>
             <a:r>
-              <a:t>Good morning faculty. We are team Byte Brigades presenting Review 2 for CSI3010 Data Warehousing &amp; Data Mining. Our team members are Mahaprabhu K (24MID0109) and Pavithran O (24MID0144). Today we present the four core data mining components: Classification, Clustering, Association Rules, and Default Prediction.</a:t>
+              <a:t>Good morning faculty. We are team Byte Brigades presenting Review 2 for CSI3010 Data Warehousing &amp; Data Mining. Our team members are Mahaprabhu K (24MID0109) and Pavithran O (24MID0144). Today we present the four core data mining deliverables: Classification, Clustering, Association Rules, and Default Prediction.</a:t>
             </a:r>
           </a:p>
         </p:txBody>
@@ -4228,10 +4228,11 @@
               <a:spcAft>
                 <a:spcPts val="1000"/>
               </a:spcAft>
-              <a:defRPr sz="1100" b="1">
+              <a:defRPr sz="1200" b="1">
                 <a:solidFill>
                   <a:srgbClr val="10B981"/>
                 </a:solidFill>
+                <a:latin typeface="Segoe UI"/>
               </a:defRPr>
             </a:pPr>
             <a:r>
@@ -4247,6 +4248,7 @@
                 <a:solidFill>
                   <a:srgbClr val="FFFFFF"/>
                 </a:solidFill>
+                <a:latin typeface="Segoe UI"/>
               </a:defRPr>
             </a:pPr>
             <a:r>
@@ -4263,6 +4265,7 @@
                 <a:solidFill>
                   <a:srgbClr val="94A3B8"/>
                 </a:solidFill>
+                <a:latin typeface="Segoe UI"/>
               </a:defRPr>
             </a:pPr>
             <a:r>
@@ -4340,42 +4343,45 @@
           <a:p>
             <a:pPr>
               <a:spcAft>
-                <a:spcPts val="800"/>
-              </a:spcAft>
-              <a:defRPr sz="1200" b="1">
-                <a:solidFill>
-                  <a:srgbClr val="10B981"/>
-                </a:solidFill>
-              </a:defRPr>
-            </a:pPr>
-            <a:r>
-              <a:t>TEAM: BYTE BRIGADES</a:t>
-            </a:r>
-          </a:p>
-          <a:p>
-            <a:pPr>
-              <a:spcAft>
-                <a:spcPts val="400"/>
+                <a:spcPts val="1000"/>
               </a:spcAft>
               <a:defRPr sz="1300" b="1">
                 <a:solidFill>
-                  <a:srgbClr val="FFFFFF"/>
-                </a:solidFill>
-              </a:defRPr>
-            </a:pPr>
-            <a:r>
-              <a:t>• Mahaprabhu K  (24MID0109)</a:t>
+                  <a:srgbClr val="10B981"/>
+                </a:solidFill>
+                <a:latin typeface="Segoe UI"/>
+              </a:defRPr>
+            </a:pPr>
+            <a:r>
+              <a:t>TEAM: BYTE BRIGADES</a:t>
             </a:r>
           </a:p>
           <a:p>
             <a:pPr>
               <a:spcAft>
-                <a:spcPts val="400"/>
+                <a:spcPts val="600"/>
               </a:spcAft>
               <a:defRPr sz="1300" b="1">
                 <a:solidFill>
                   <a:srgbClr val="FFFFFF"/>
                 </a:solidFill>
+                <a:latin typeface="Segoe UI"/>
+              </a:defRPr>
+            </a:pPr>
+            <a:r>
+              <a:t>• Mahaprabhu K  (24MID0109)</a:t>
+            </a:r>
+          </a:p>
+          <a:p>
+            <a:pPr>
+              <a:spcAft>
+                <a:spcPts val="600"/>
+              </a:spcAft>
+              <a:defRPr sz="1300" b="1">
+                <a:solidFill>
+                  <a:srgbClr val="FFFFFF"/>
+                </a:solidFill>
+                <a:latin typeface="Segoe UI"/>
               </a:defRPr>
             </a:pPr>
             <a:r>
@@ -4453,12 +4459,13 @@
           <a:p>
             <a:pPr>
               <a:spcAft>
-                <a:spcPts val="800"/>
+                <a:spcPts val="1000"/>
               </a:spcAft>
-              <a:defRPr sz="1200" b="1">
+              <a:defRPr sz="1300" b="1">
                 <a:solidFill>
                   <a:srgbClr val="10B981"/>
                 </a:solidFill>
+                <a:latin typeface="Segoe UI"/>
               </a:defRPr>
             </a:pPr>
             <a:r>
@@ -4468,27 +4475,29 @@
           <a:p>
             <a:pPr>
               <a:spcAft>
-                <a:spcPts val="300"/>
+                <a:spcPts val="400"/>
               </a:spcAft>
-              <a:defRPr sz="1100">
+              <a:defRPr sz="1200">
                 <a:solidFill>
                   <a:srgbClr val="E2E8F0"/>
                 </a:solidFill>
-              </a:defRPr>
-            </a:pPr>
-            <a:r>
-              <a:t>• Review Phase: Review - 2 (Data Mining &amp; Predictive Modeling)</a:t>
+                <a:latin typeface="Segoe UI"/>
+              </a:defRPr>
+            </a:pPr>
+            <a:r>
+              <a:t>• Review Phase: Review - 2 (Data Mining &amp; Predictive Analytics)</a:t>
             </a:r>
           </a:p>
           <a:p>
             <a:pPr>
               <a:spcAft>
-                <a:spcPts val="300"/>
+                <a:spcPts val="400"/>
               </a:spcAft>
-              <a:defRPr sz="1100">
+              <a:defRPr sz="1200">
                 <a:solidFill>
                   <a:srgbClr val="E2E8F0"/>
                 </a:solidFill>
+                <a:latin typeface="Segoe UI"/>
               </a:defRPr>
             </a:pPr>
             <a:r>
@@ -4498,12 +4507,13 @@
           <a:p>
             <a:pPr>
               <a:spcAft>
-                <a:spcPts val="300"/>
+                <a:spcPts val="400"/>
               </a:spcAft>
-              <a:defRPr sz="1100">
+              <a:defRPr sz="1200">
                 <a:solidFill>
                   <a:srgbClr val="E2E8F0"/>
                 </a:solidFill>
+                <a:latin typeface="Segoe UI"/>
               </a:defRPr>
             </a:pPr>
             <a:r>
@@ -4513,12 +4523,13 @@
           <a:p>
             <a:pPr>
               <a:spcAft>
-                <a:spcPts val="300"/>
+                <a:spcPts val="400"/>
               </a:spcAft>
-              <a:defRPr sz="1100">
+              <a:defRPr sz="1200">
                 <a:solidFill>
                   <a:srgbClr val="E2E8F0"/>
                 </a:solidFill>
+                <a:latin typeface="Segoe UI"/>
               </a:defRPr>
             </a:pPr>
             <a:r>
@@ -4604,8 +4615,8 @@
         </p:nvSpPr>
         <p:spPr>
           <a:xfrm>
-            <a:off x="731520" y="256032"/>
-            <a:ext cx="10698480" cy="256032"/>
+            <a:off x="731520" y="237744"/>
+            <a:ext cx="10698480" cy="237744"/>
           </a:xfrm>
           <a:prstGeom prst="rect">
             <a:avLst/>
@@ -4623,6 +4634,7 @@
                 <a:solidFill>
                   <a:srgbClr val="2563EB"/>
                 </a:solidFill>
+                <a:latin typeface="Segoe UI"/>
               </a:defRPr>
             </a:pPr>
             <a:r>
@@ -4639,8 +4651,8 @@
         </p:nvSpPr>
         <p:spPr>
           <a:xfrm>
-            <a:off x="731520" y="502920"/>
-            <a:ext cx="10698480" cy="548640"/>
+            <a:off x="731520" y="475488"/>
+            <a:ext cx="10698480" cy="502920"/>
           </a:xfrm>
           <a:prstGeom prst="rect">
             <a:avLst/>
@@ -4654,10 +4666,11 @@
           <a:lstStyle/>
           <a:p>
             <a:pPr>
-              <a:defRPr sz="2100" b="1">
+              <a:defRPr sz="2000" b="1">
                 <a:solidFill>
                   <a:srgbClr val="0F172A"/>
                 </a:solidFill>
+                <a:latin typeface="Segoe UI"/>
               </a:defRPr>
             </a:pPr>
             <a:r>
@@ -4674,8 +4687,8 @@
         </p:nvSpPr>
         <p:spPr>
           <a:xfrm>
-            <a:off x="731520" y="1234440"/>
-            <a:ext cx="5303520" cy="5120640"/>
+            <a:off x="731520" y="1188720"/>
+            <a:ext cx="5303520" cy="5212080"/>
           </a:xfrm>
           <a:prstGeom prst="roundRect">
             <a:avLst/>
@@ -4719,8 +4732,8 @@
         </p:nvSpPr>
         <p:spPr>
           <a:xfrm>
-            <a:off x="914400" y="1344168"/>
-            <a:ext cx="4937760" cy="274320"/>
+            <a:off x="914400" y="1298448"/>
+            <a:ext cx="4937760" cy="256032"/>
           </a:xfrm>
           <a:prstGeom prst="rect">
             <a:avLst/>
@@ -4734,10 +4747,11 @@
           <a:lstStyle/>
           <a:p>
             <a:pPr>
-              <a:defRPr sz="950" b="1">
+              <a:defRPr sz="1000" b="1">
                 <a:solidFill>
                   <a:srgbClr val="10B981"/>
                 </a:solidFill>
+                <a:latin typeface="Consolas"/>
               </a:defRPr>
             </a:pPr>
             <a:r>
@@ -4754,8 +4768,8 @@
         </p:nvSpPr>
         <p:spPr>
           <a:xfrm>
-            <a:off x="914400" y="1645920"/>
-            <a:ext cx="4937760" cy="4617720"/>
+            <a:off x="914400" y="1572768"/>
+            <a:ext cx="4937760" cy="4736592"/>
           </a:xfrm>
           <a:prstGeom prst="rect">
             <a:avLst/>
@@ -4769,7 +4783,7 @@
           <a:lstStyle/>
           <a:p>
             <a:pPr>
-              <a:defRPr sz="850">
+              <a:defRPr sz="900">
                 <a:solidFill>
                   <a:srgbClr val="94A3B8"/>
                 </a:solidFill>
@@ -4782,7 +4796,7 @@
           </a:p>
           <a:p>
             <a:pPr>
-              <a:defRPr sz="850">
+              <a:defRPr sz="900">
                 <a:solidFill>
                   <a:srgbClr val="93C5FD"/>
                 </a:solidFill>
@@ -4795,7 +4809,7 @@
           </a:p>
           <a:p>
             <a:pPr>
-              <a:defRPr sz="850">
+              <a:defRPr sz="900">
                 <a:solidFill>
                   <a:srgbClr val="F1F5F9"/>
                 </a:solidFill>
@@ -4805,7 +4819,7 @@
           </a:p>
           <a:p>
             <a:pPr>
-              <a:defRPr sz="850">
+              <a:defRPr sz="900">
                 <a:solidFill>
                   <a:srgbClr val="94A3B8"/>
                 </a:solidFill>
@@ -4818,7 +4832,7 @@
           </a:p>
           <a:p>
             <a:pPr>
-              <a:defRPr sz="850">
+              <a:defRPr sz="900">
                 <a:solidFill>
                   <a:srgbClr val="F1F5F9"/>
                 </a:solidFill>
@@ -4831,7 +4845,7 @@
           </a:p>
           <a:p>
             <a:pPr>
-              <a:defRPr sz="850">
+              <a:defRPr sz="900">
                 <a:solidFill>
                   <a:srgbClr val="F1F5F9"/>
                 </a:solidFill>
@@ -4844,7 +4858,7 @@
           </a:p>
           <a:p>
             <a:pPr>
-              <a:defRPr sz="850">
+              <a:defRPr sz="900">
                 <a:solidFill>
                   <a:srgbClr val="F1F5F9"/>
                 </a:solidFill>
@@ -4857,7 +4871,7 @@
           </a:p>
           <a:p>
             <a:pPr>
-              <a:defRPr sz="850">
+              <a:defRPr sz="900">
                 <a:solidFill>
                   <a:srgbClr val="F1F5F9"/>
                 </a:solidFill>
@@ -4870,7 +4884,7 @@
           </a:p>
           <a:p>
             <a:pPr>
-              <a:defRPr sz="850">
+              <a:defRPr sz="900">
                 <a:solidFill>
                   <a:srgbClr val="F1F5F9"/>
                 </a:solidFill>
@@ -4880,7 +4894,7 @@
           </a:p>
           <a:p>
             <a:pPr>
-              <a:defRPr sz="850">
+              <a:defRPr sz="900">
                 <a:solidFill>
                   <a:srgbClr val="94A3B8"/>
                 </a:solidFill>
@@ -4893,7 +4907,7 @@
           </a:p>
           <a:p>
             <a:pPr>
-              <a:defRPr sz="850">
+              <a:defRPr sz="900">
                 <a:solidFill>
                   <a:srgbClr val="6EE7B7"/>
                 </a:solidFill>
@@ -4906,7 +4920,7 @@
           </a:p>
           <a:p>
             <a:pPr>
-              <a:defRPr sz="850">
+              <a:defRPr sz="900">
                 <a:solidFill>
                   <a:srgbClr val="6EE7B7"/>
                 </a:solidFill>
@@ -4919,7 +4933,7 @@
           </a:p>
           <a:p>
             <a:pPr>
-              <a:defRPr sz="850">
+              <a:defRPr sz="900">
                 <a:solidFill>
                   <a:srgbClr val="F1F5F9"/>
                 </a:solidFill>
@@ -4929,7 +4943,7 @@
           </a:p>
           <a:p>
             <a:pPr>
-              <a:defRPr sz="850">
+              <a:defRPr sz="900">
                 <a:solidFill>
                   <a:srgbClr val="94A3B8"/>
                 </a:solidFill>
@@ -4942,7 +4956,7 @@
           </a:p>
           <a:p>
             <a:pPr>
-              <a:defRPr sz="850">
+              <a:defRPr sz="900">
                 <a:solidFill>
                   <a:srgbClr val="F1F5F9"/>
                 </a:solidFill>
@@ -4955,7 +4969,7 @@
           </a:p>
           <a:p>
             <a:pPr>
-              <a:defRPr sz="850">
+              <a:defRPr sz="900">
                 <a:solidFill>
                   <a:srgbClr val="F1F5F9"/>
                 </a:solidFill>
@@ -4976,8 +4990,8 @@
         </p:nvSpPr>
         <p:spPr>
           <a:xfrm>
-            <a:off x="6217920" y="1234440"/>
-            <a:ext cx="5242255" cy="5120640"/>
+            <a:off x="6217920" y="1188720"/>
+            <a:ext cx="5242255" cy="5212080"/>
           </a:xfrm>
           <a:prstGeom prst="roundRect">
             <a:avLst/>
@@ -5021,8 +5035,8 @@
         </p:nvSpPr>
         <p:spPr>
           <a:xfrm>
-            <a:off x="6400800" y="1371600"/>
-            <a:ext cx="4846320" cy="4754880"/>
+            <a:off x="6400800" y="1325880"/>
+            <a:ext cx="4846320" cy="4846320"/>
           </a:xfrm>
           <a:prstGeom prst="rect">
             <a:avLst/>
@@ -5043,6 +5057,7 @@
                 <a:solidFill>
                   <a:srgbClr val="0F172A"/>
                 </a:solidFill>
+                <a:latin typeface="Segoe UI"/>
               </a:defRPr>
             </a:pPr>
             <a:r>
@@ -5054,22 +5069,15 @@
               <a:spcAft>
                 <a:spcPts val="800"/>
               </a:spcAft>
-              <a:defRPr sz="1000">
+              <a:defRPr sz="1100">
                 <a:solidFill>
                   <a:srgbClr val="334155"/>
                 </a:solidFill>
-              </a:defRPr>
-            </a:pPr>
-            <a:r>
-              <a:t>• Support(A -&gt; B):</a:t>
-            </a:r>
-            <a:br/>
-            <a:r>
-              <a:t>  P(A and B)</a:t>
-            </a:r>
-            <a:br/>
-            <a:r>
-              <a:t>Frequency of co-occurrence in dataset (threshold = 3%).</a:t>
+                <a:latin typeface="Segoe UI"/>
+              </a:defRPr>
+            </a:pPr>
+            <a:r>
+              <a:t>• Support(A -&gt; B): P(A and B) - Frequency of co-occurrence in dataset (threshold = 3%).</a:t>
             </a:r>
           </a:p>
           <a:p>
@@ -5077,22 +5085,15 @@
               <a:spcAft>
                 <a:spcPts val="800"/>
               </a:spcAft>
-              <a:defRPr sz="1000">
+              <a:defRPr sz="1100">
                 <a:solidFill>
                   <a:srgbClr val="334155"/>
                 </a:solidFill>
-              </a:defRPr>
-            </a:pPr>
-            <a:r>
-              <a:t>• Confidence(A -&gt; B):</a:t>
-            </a:r>
-            <a:br/>
-            <a:r>
-              <a:t>  P(B | A) = Support(A and B) / Support(A)</a:t>
-            </a:r>
-            <a:br/>
-            <a:r>
-              <a:t>Probability of Default given borrower conditions (threshold = 30%).</a:t>
+                <a:latin typeface="Segoe UI"/>
+              </a:defRPr>
+            </a:pPr>
+            <a:r>
+              <a:t>• Confidence(A -&gt; B): P(B | A) - Probability of Default given borrower conditions (threshold = 30%).</a:t>
             </a:r>
           </a:p>
           <a:p>
@@ -5100,22 +5101,15 @@
               <a:spcAft>
                 <a:spcPts val="800"/>
               </a:spcAft>
-              <a:defRPr sz="1000">
+              <a:defRPr sz="1100">
                 <a:solidFill>
                   <a:srgbClr val="334155"/>
                 </a:solidFill>
-              </a:defRPr>
-            </a:pPr>
-            <a:r>
-              <a:t>• Lift(A -&gt; B):</a:t>
-            </a:r>
-            <a:br/>
-            <a:r>
-              <a:t>  Confidence / P(B)</a:t>
-            </a:r>
-            <a:br/>
-            <a:r>
-              <a:t>Multiplier over baseline default rate (11.7%).</a:t>
+                <a:latin typeface="Segoe UI"/>
+              </a:defRPr>
+            </a:pPr>
+            <a:r>
+              <a:t>• Lift(A -&gt; B): Confidence / P(B) - Multiplier over baseline default rate (11.7%).</a:t>
             </a:r>
             <a:br/>
             <a:r>
@@ -5131,18 +5125,15 @@
               <a:spcAft>
                 <a:spcPts val="800"/>
               </a:spcAft>
-              <a:defRPr sz="1000">
+              <a:defRPr sz="1100">
                 <a:solidFill>
                   <a:srgbClr val="334155"/>
                 </a:solidFill>
-              </a:defRPr>
-            </a:pPr>
-            <a:r>
-              <a:t>• Consequent:</a:t>
-            </a:r>
-            <a:br/>
-            <a:r>
-              <a:t>  Explicitly targeted for Default=Yes to isolate toxic risk rules.</a:t>
+                <a:latin typeface="Segoe UI"/>
+              </a:defRPr>
+            </a:pPr>
+            <a:r>
+              <a:t>• Consequent Target: Explicitly targeted for Default=Yes to isolate toxic risk rules.</a:t>
             </a:r>
           </a:p>
         </p:txBody>
@@ -5224,8 +5215,8 @@
         </p:nvSpPr>
         <p:spPr>
           <a:xfrm>
-            <a:off x="731520" y="256032"/>
-            <a:ext cx="10698480" cy="256032"/>
+            <a:off x="731520" y="237744"/>
+            <a:ext cx="10698480" cy="237744"/>
           </a:xfrm>
           <a:prstGeom prst="rect">
             <a:avLst/>
@@ -5243,6 +5234,7 @@
                 <a:solidFill>
                   <a:srgbClr val="2563EB"/>
                 </a:solidFill>
+                <a:latin typeface="Segoe UI"/>
               </a:defRPr>
             </a:pPr>
             <a:r>
@@ -5259,8 +5251,8 @@
         </p:nvSpPr>
         <p:spPr>
           <a:xfrm>
-            <a:off x="731520" y="502920"/>
-            <a:ext cx="10698480" cy="548640"/>
+            <a:off x="731520" y="475488"/>
+            <a:ext cx="10698480" cy="502920"/>
           </a:xfrm>
           <a:prstGeom prst="rect">
             <a:avLst/>
@@ -5274,10 +5266,11 @@
           <a:lstStyle/>
           <a:p>
             <a:pPr>
-              <a:defRPr sz="2100" b="1">
+              <a:defRPr sz="2000" b="1">
                 <a:solidFill>
                   <a:srgbClr val="0F172A"/>
                 </a:solidFill>
+                <a:latin typeface="Segoe UI"/>
               </a:defRPr>
             </a:pPr>
             <a:r>
@@ -5294,8 +5287,8 @@
         </p:nvSpPr>
         <p:spPr>
           <a:xfrm>
-            <a:off x="731520" y="1234440"/>
-            <a:ext cx="5943600" cy="5120640"/>
+            <a:off x="731520" y="1188720"/>
+            <a:ext cx="5943600" cy="5212080"/>
           </a:xfrm>
           <a:prstGeom prst="roundRect">
             <a:avLst/>
@@ -5347,7 +5340,7 @@
         </p:blipFill>
         <p:spPr>
           <a:xfrm>
-            <a:off x="822960" y="1325880"/>
+            <a:off x="822960" y="1280160"/>
             <a:ext cx="5760720" cy="3168396"/>
           </a:xfrm>
           <a:prstGeom prst="rect">
@@ -5363,8 +5356,8 @@
         </p:nvSpPr>
         <p:spPr>
           <a:xfrm>
-            <a:off x="6858000" y="1234440"/>
-            <a:ext cx="4602175" cy="5120640"/>
+            <a:off x="6858000" y="1188720"/>
+            <a:ext cx="4602175" cy="5212080"/>
           </a:xfrm>
           <a:prstGeom prst="roundRect">
             <a:avLst/>
@@ -5408,8 +5401,8 @@
         </p:nvSpPr>
         <p:spPr>
           <a:xfrm>
-            <a:off x="6995160" y="1371600"/>
-            <a:ext cx="4297680" cy="4754880"/>
+            <a:off x="6995160" y="1325880"/>
+            <a:ext cx="4297680" cy="4846320"/>
           </a:xfrm>
           <a:prstGeom prst="rect">
             <a:avLst/>
@@ -5430,6 +5423,7 @@
                 <a:solidFill>
                   <a:srgbClr val="0F172A"/>
                 </a:solidFill>
+                <a:latin typeface="Segoe UI"/>
               </a:defRPr>
             </a:pPr>
             <a:r>
@@ -5438,10 +5432,11 @@
           </a:p>
           <a:p>
             <a:pPr>
-              <a:defRPr sz="950" b="1">
+              <a:defRPr sz="1000" b="1">
                 <a:solidFill>
                   <a:srgbClr val="2563EB"/>
                 </a:solidFill>
+                <a:latin typeface="Segoe UI"/>
               </a:defRPr>
             </a:pPr>
             <a:r>
@@ -5451,12 +5446,13 @@
           <a:p>
             <a:pPr>
               <a:spcAft>
-                <a:spcPts val="500"/>
+                <a:spcPts val="600"/>
               </a:spcAft>
-              <a:defRPr sz="900">
+              <a:defRPr sz="1000">
                 <a:solidFill>
                   <a:srgbClr val="334155"/>
                 </a:solidFill>
+                <a:latin typeface="Segoe UI"/>
               </a:defRPr>
             </a:pPr>
             <a:r>
@@ -5465,10 +5461,11 @@
           </a:p>
           <a:p>
             <a:pPr>
-              <a:defRPr sz="950" b="1">
+              <a:defRPr sz="1000" b="1">
                 <a:solidFill>
                   <a:srgbClr val="2563EB"/>
                 </a:solidFill>
+                <a:latin typeface="Segoe UI"/>
               </a:defRPr>
             </a:pPr>
             <a:r>
@@ -5478,12 +5475,13 @@
           <a:p>
             <a:pPr>
               <a:spcAft>
-                <a:spcPts val="500"/>
+                <a:spcPts val="600"/>
               </a:spcAft>
-              <a:defRPr sz="900">
+              <a:defRPr sz="1000">
                 <a:solidFill>
                   <a:srgbClr val="334155"/>
                 </a:solidFill>
+                <a:latin typeface="Segoe UI"/>
               </a:defRPr>
             </a:pPr>
             <a:r>
@@ -5492,10 +5490,11 @@
           </a:p>
           <a:p>
             <a:pPr>
-              <a:defRPr sz="950" b="1">
+              <a:defRPr sz="1000" b="1">
                 <a:solidFill>
                   <a:srgbClr val="2563EB"/>
                 </a:solidFill>
+                <a:latin typeface="Segoe UI"/>
               </a:defRPr>
             </a:pPr>
             <a:r>
@@ -5505,12 +5504,13 @@
           <a:p>
             <a:pPr>
               <a:spcAft>
-                <a:spcPts val="500"/>
+                <a:spcPts val="600"/>
               </a:spcAft>
-              <a:defRPr sz="900">
+              <a:defRPr sz="1000">
                 <a:solidFill>
                   <a:srgbClr val="334155"/>
                 </a:solidFill>
+                <a:latin typeface="Segoe UI"/>
               </a:defRPr>
             </a:pPr>
             <a:r>
@@ -5519,10 +5519,11 @@
           </a:p>
           <a:p>
             <a:pPr>
-              <a:defRPr sz="950" b="1">
+              <a:defRPr sz="1000" b="1">
                 <a:solidFill>
                   <a:srgbClr val="2563EB"/>
                 </a:solidFill>
+                <a:latin typeface="Segoe UI"/>
               </a:defRPr>
             </a:pPr>
             <a:r>
@@ -5532,12 +5533,13 @@
           <a:p>
             <a:pPr>
               <a:spcAft>
-                <a:spcPts val="500"/>
+                <a:spcPts val="600"/>
               </a:spcAft>
-              <a:defRPr sz="900">
+              <a:defRPr sz="1000">
                 <a:solidFill>
                   <a:srgbClr val="334155"/>
                 </a:solidFill>
+                <a:latin typeface="Segoe UI"/>
               </a:defRPr>
             </a:pPr>
             <a:r>
@@ -5546,10 +5548,11 @@
           </a:p>
           <a:p>
             <a:pPr>
-              <a:defRPr sz="950" b="1">
+              <a:defRPr sz="1000" b="1">
                 <a:solidFill>
                   <a:srgbClr val="BE123C"/>
                 </a:solidFill>
+                <a:latin typeface="Segoe UI"/>
               </a:defRPr>
             </a:pPr>
             <a:r>
@@ -5559,12 +5562,13 @@
           <a:p>
             <a:pPr>
               <a:spcAft>
-                <a:spcPts val="500"/>
+                <a:spcPts val="600"/>
               </a:spcAft>
-              <a:defRPr sz="900">
+              <a:defRPr sz="1000">
                 <a:solidFill>
                   <a:srgbClr val="334155"/>
                 </a:solidFill>
+                <a:latin typeface="Segoe UI"/>
               </a:defRPr>
             </a:pPr>
             <a:r>
@@ -5650,8 +5654,8 @@
         </p:nvSpPr>
         <p:spPr>
           <a:xfrm>
-            <a:off x="731520" y="256032"/>
-            <a:ext cx="10698480" cy="256032"/>
+            <a:off x="731520" y="237744"/>
+            <a:ext cx="10698480" cy="237744"/>
           </a:xfrm>
           <a:prstGeom prst="rect">
             <a:avLst/>
@@ -5669,6 +5673,7 @@
                 <a:solidFill>
                   <a:srgbClr val="2563EB"/>
                 </a:solidFill>
+                <a:latin typeface="Segoe UI"/>
               </a:defRPr>
             </a:pPr>
             <a:r>
@@ -5685,8 +5690,8 @@
         </p:nvSpPr>
         <p:spPr>
           <a:xfrm>
-            <a:off x="731520" y="502920"/>
-            <a:ext cx="10698480" cy="548640"/>
+            <a:off x="731520" y="475488"/>
+            <a:ext cx="10698480" cy="502920"/>
           </a:xfrm>
           <a:prstGeom prst="rect">
             <a:avLst/>
@@ -5700,10 +5705,11 @@
           <a:lstStyle/>
           <a:p>
             <a:pPr>
-              <a:defRPr sz="2100" b="1">
+              <a:defRPr sz="2000" b="1">
                 <a:solidFill>
                   <a:srgbClr val="0F172A"/>
                 </a:solidFill>
+                <a:latin typeface="Segoe UI"/>
               </a:defRPr>
             </a:pPr>
             <a:r>
@@ -5720,8 +5726,8 @@
         </p:nvSpPr>
         <p:spPr>
           <a:xfrm>
-            <a:off x="731520" y="1234440"/>
-            <a:ext cx="5212080" cy="2468880"/>
+            <a:off x="731520" y="1188720"/>
+            <a:ext cx="5212080" cy="2514600"/>
           </a:xfrm>
           <a:prstGeom prst="roundRect">
             <a:avLst/>
@@ -5765,8 +5771,8 @@
         </p:nvSpPr>
         <p:spPr>
           <a:xfrm>
-            <a:off x="914400" y="1371600"/>
-            <a:ext cx="4846320" cy="2194560"/>
+            <a:off x="914400" y="1325880"/>
+            <a:ext cx="4846320" cy="2240280"/>
           </a:xfrm>
           <a:prstGeom prst="rect">
             <a:avLst/>
@@ -5781,57 +5787,61 @@
           <a:p>
             <a:pPr>
               <a:spcAft>
+                <a:spcPts val="800"/>
+              </a:spcAft>
+              <a:defRPr sz="1300" b="1">
+                <a:solidFill>
+                  <a:srgbClr val="2563EB"/>
+                </a:solidFill>
+                <a:latin typeface="Segoe UI"/>
+              </a:defRPr>
+            </a:pPr>
+            <a:r>
+              <a:t>1. WHY We Used It (Problem Statement)</a:t>
+            </a:r>
+          </a:p>
+          <a:p>
+            <a:pPr>
+              <a:spcAft>
                 <a:spcPts val="600"/>
               </a:spcAft>
-              <a:defRPr sz="1200" b="1">
-                <a:solidFill>
-                  <a:srgbClr val="2563EB"/>
-                </a:solidFill>
-              </a:defRPr>
-            </a:pPr>
-            <a:r>
-              <a:t>1. WHY We Used It (The Problem / Need)</a:t>
+              <a:defRPr sz="1200">
+                <a:solidFill>
+                  <a:srgbClr val="334155"/>
+                </a:solidFill>
+                <a:latin typeface="Segoe UI"/>
+              </a:defRPr>
+            </a:pPr>
+            <a:r>
+              <a:t>• Real-world fintech does not use binary 0/1 hard decisions; credit risk is a continuous probability.</a:t>
             </a:r>
           </a:p>
           <a:p>
             <a:pPr>
               <a:spcAft>
-                <a:spcPts val="400"/>
+                <a:spcPts val="600"/>
               </a:spcAft>
-              <a:defRPr sz="1000">
+              <a:defRPr sz="1200">
                 <a:solidFill>
                   <a:srgbClr val="334155"/>
                 </a:solidFill>
-              </a:defRPr>
-            </a:pPr>
-            <a:r>
-              <a:t>• Real-world fintech does not use binary 0/1 hard decisions; credit risk is a continuous probability.</a:t>
+                <a:latin typeface="Segoe UI"/>
+              </a:defRPr>
+            </a:pPr>
+            <a:r>
+              <a:t>• Loan pricing, interest rates, and regulatory capital reserves require an exact probability: P(Default=1).</a:t>
             </a:r>
           </a:p>
           <a:p>
             <a:pPr>
               <a:spcAft>
-                <a:spcPts val="400"/>
+                <a:spcPts val="600"/>
               </a:spcAft>
-              <a:defRPr sz="1000">
+              <a:defRPr sz="1200">
                 <a:solidFill>
                   <a:srgbClr val="334155"/>
                 </a:solidFill>
-              </a:defRPr>
-            </a:pPr>
-            <a:r>
-              <a:t>• Loan pricing, interest rates, and regulatory capital reserves require an exact probability: P(Default=1).</a:t>
-            </a:r>
-          </a:p>
-          <a:p>
-            <a:pPr>
-              <a:spcAft>
-                <a:spcPts val="400"/>
-              </a:spcAft>
-              <a:defRPr sz="1000">
-                <a:solidFill>
-                  <a:srgbClr val="334155"/>
-                </a:solidFill>
+                <a:latin typeface="Segoe UI"/>
               </a:defRPr>
             </a:pPr>
             <a:r>
@@ -5848,8 +5858,8 @@
         </p:nvSpPr>
         <p:spPr>
           <a:xfrm>
-            <a:off x="6217920" y="1234440"/>
-            <a:ext cx="5242255" cy="2468880"/>
+            <a:off x="6217920" y="1188720"/>
+            <a:ext cx="5242255" cy="2514600"/>
           </a:xfrm>
           <a:prstGeom prst="roundRect">
             <a:avLst/>
@@ -5893,8 +5903,8 @@
         </p:nvSpPr>
         <p:spPr>
           <a:xfrm>
-            <a:off x="6400800" y="1371600"/>
-            <a:ext cx="4876495" cy="2194560"/>
+            <a:off x="6400800" y="1325880"/>
+            <a:ext cx="4876495" cy="2240280"/>
           </a:xfrm>
           <a:prstGeom prst="rect">
             <a:avLst/>
@@ -5909,57 +5919,61 @@
           <a:p>
             <a:pPr>
               <a:spcAft>
+                <a:spcPts val="800"/>
+              </a:spcAft>
+              <a:defRPr sz="1300" b="1">
+                <a:solidFill>
+                  <a:srgbClr val="10B981"/>
+                </a:solidFill>
+                <a:latin typeface="Segoe UI"/>
+              </a:defRPr>
+            </a:pPr>
+            <a:r>
+              <a:t>2. HOW We Used It (Pipeline &amp; Methods)</a:t>
+            </a:r>
+          </a:p>
+          <a:p>
+            <a:pPr>
+              <a:spcAft>
                 <a:spcPts val="600"/>
               </a:spcAft>
-              <a:defRPr sz="1200" b="1">
-                <a:solidFill>
-                  <a:srgbClr val="10B981"/>
-                </a:solidFill>
-              </a:defRPr>
-            </a:pPr>
-            <a:r>
-              <a:t>2. HOW We Used It (Methodology &amp; Pipeline)</a:t>
+              <a:defRPr sz="1200">
+                <a:solidFill>
+                  <a:srgbClr val="334155"/>
+                </a:solidFill>
+                <a:latin typeface="Segoe UI"/>
+              </a:defRPr>
+            </a:pPr>
+            <a:r>
+              <a:t>• Built LoanDefaultPredictor wrapping the preprocessor and champion Gradient Boosting model.</a:t>
             </a:r>
           </a:p>
           <a:p>
             <a:pPr>
               <a:spcAft>
-                <a:spcPts val="400"/>
+                <a:spcPts val="600"/>
               </a:spcAft>
-              <a:defRPr sz="1000">
+              <a:defRPr sz="1200">
                 <a:solidFill>
                   <a:srgbClr val="334155"/>
                 </a:solidFill>
-              </a:defRPr>
-            </a:pPr>
-            <a:r>
-              <a:t>• Built LoanDefaultPredictor wrapping the preprocessor and champion Gradient Boosting model.</a:t>
+                <a:latin typeface="Segoe UI"/>
+              </a:defRPr>
+            </a:pPr>
+            <a:r>
+              <a:t>• Computes continuous probability P(Default=1) in [0.0, 1.0] for any raw borrower dictionary payload.</a:t>
             </a:r>
           </a:p>
           <a:p>
             <a:pPr>
               <a:spcAft>
-                <a:spcPts val="400"/>
+                <a:spcPts val="600"/>
               </a:spcAft>
-              <a:defRPr sz="1000">
+              <a:defRPr sz="1200">
                 <a:solidFill>
                   <a:srgbClr val="334155"/>
                 </a:solidFill>
-              </a:defRPr>
-            </a:pPr>
-            <a:r>
-              <a:t>• Computes continuous probability P(Default=1) in [0.0, 1.0] for any raw borrower dictionary payload.</a:t>
-            </a:r>
-          </a:p>
-          <a:p>
-            <a:pPr>
-              <a:spcAft>
-                <a:spcPts val="400"/>
-              </a:spcAft>
-              <a:defRPr sz="1000">
-                <a:solidFill>
-                  <a:srgbClr val="334155"/>
-                </a:solidFill>
+                <a:latin typeface="Segoe UI"/>
               </a:defRPr>
             </a:pPr>
             <a:r>
@@ -6037,57 +6051,61 @@
           <a:p>
             <a:pPr>
               <a:spcAft>
+                <a:spcPts val="800"/>
+              </a:spcAft>
+              <a:defRPr sz="1300" b="1">
+                <a:solidFill>
+                  <a:srgbClr val="CA8A04"/>
+                </a:solidFill>
+                <a:latin typeface="Segoe UI"/>
+              </a:defRPr>
+            </a:pPr>
+            <a:r>
+              <a:t>3. WHAT It Does in Our Project (System Role)</a:t>
+            </a:r>
+          </a:p>
+          <a:p>
+            <a:pPr>
+              <a:spcAft>
                 <a:spcPts val="600"/>
               </a:spcAft>
-              <a:defRPr sz="1200" b="1">
-                <a:solidFill>
-                  <a:srgbClr val="CA8A04"/>
-                </a:solidFill>
-              </a:defRPr>
-            </a:pPr>
-            <a:r>
-              <a:t>3. WHAT It Does in Our Project (System Role)</a:t>
+              <a:defRPr sz="1200">
+                <a:solidFill>
+                  <a:srgbClr val="334155"/>
+                </a:solidFill>
+                <a:latin typeface="Segoe UI"/>
+              </a:defRPr>
+            </a:pPr>
+            <a:r>
+              <a:t>• Transforms raw applicant data in real time and predicts continuous default probability.</a:t>
             </a:r>
           </a:p>
           <a:p>
             <a:pPr>
               <a:spcAft>
-                <a:spcPts val="400"/>
+                <a:spcPts val="600"/>
               </a:spcAft>
-              <a:defRPr sz="1000">
+              <a:defRPr sz="1200">
                 <a:solidFill>
                   <a:srgbClr val="334155"/>
                 </a:solidFill>
-              </a:defRPr>
-            </a:pPr>
-            <a:r>
-              <a:t>• Transforms raw applicant data in real time and predicts continuous default probability.</a:t>
+                <a:latin typeface="Segoe UI"/>
+              </a:defRPr>
+            </a:pPr>
+            <a:r>
+              <a:t>• Maps probabilities into 4 clear risk tier badges: Low (&lt;20%), Moderate (20-45%), High (45-70%), Critical (&gt;=70%).</a:t>
             </a:r>
           </a:p>
           <a:p>
             <a:pPr>
               <a:spcAft>
-                <a:spcPts val="400"/>
+                <a:spcPts val="600"/>
               </a:spcAft>
-              <a:defRPr sz="1000">
+              <a:defRPr sz="1200">
                 <a:solidFill>
                   <a:srgbClr val="334155"/>
                 </a:solidFill>
-              </a:defRPr>
-            </a:pPr>
-            <a:r>
-              <a:t>• Maps probabilities into 4 clear risk tier badges: Low (&lt;20%), Moderate (20-45%), High (45-70%), Critical (&gt;=70%).</a:t>
-            </a:r>
-          </a:p>
-          <a:p>
-            <a:pPr>
-              <a:spcAft>
-                <a:spcPts val="400"/>
-              </a:spcAft>
-              <a:defRPr sz="1000">
-                <a:solidFill>
-                  <a:srgbClr val="334155"/>
-                </a:solidFill>
+                <a:latin typeface="Segoe UI"/>
               </a:defRPr>
             </a:pPr>
             <a:r>
@@ -6165,57 +6183,61 @@
           <a:p>
             <a:pPr>
               <a:spcAft>
+                <a:spcPts val="800"/>
+              </a:spcAft>
+              <a:defRPr sz="1300" b="1">
+                <a:solidFill>
+                  <a:srgbClr val="9333EA"/>
+                </a:solidFill>
+                <a:latin typeface="Segoe UI"/>
+              </a:defRPr>
+            </a:pPr>
+            <a:r>
+              <a:t>4. PRACTICAL USE (Underwriting &amp; Business Value)</a:t>
+            </a:r>
+          </a:p>
+          <a:p>
+            <a:pPr>
+              <a:spcAft>
                 <a:spcPts val="600"/>
               </a:spcAft>
-              <a:defRPr sz="1200" b="1">
-                <a:solidFill>
-                  <a:srgbClr val="9333EA"/>
-                </a:solidFill>
-              </a:defRPr>
-            </a:pPr>
-            <a:r>
-              <a:t>4. PRACTICAL USE (Underwriting &amp; Business Value)</a:t>
+              <a:defRPr sz="1200">
+                <a:solidFill>
+                  <a:srgbClr val="334155"/>
+                </a:solidFill>
+                <a:latin typeface="Segoe UI"/>
+              </a:defRPr>
+            </a:pPr>
+            <a:r>
+              <a:t>• Risk-Based Loan Pricing: Low risk applicants get prime APR (4.5%); higher risk gets compensatory pricing.</a:t>
             </a:r>
           </a:p>
           <a:p>
             <a:pPr>
               <a:spcAft>
-                <a:spcPts val="400"/>
+                <a:spcPts val="600"/>
               </a:spcAft>
-              <a:defRPr sz="1000">
+              <a:defRPr sz="1200">
                 <a:solidFill>
                   <a:srgbClr val="334155"/>
                 </a:solidFill>
-              </a:defRPr>
-            </a:pPr>
-            <a:r>
-              <a:t>• Risk-Based Loan Pricing: Low risk applicants get prime APR (4.5%); higher risk gets compensatory pricing.</a:t>
+                <a:latin typeface="Segoe UI"/>
+              </a:defRPr>
+            </a:pPr>
+            <a:r>
+              <a:t>• Automated Adverse Action Notices: Explains to applicants exactly why their loan terms were adjusted.</a:t>
             </a:r>
           </a:p>
           <a:p>
             <a:pPr>
               <a:spcAft>
-                <a:spcPts val="400"/>
+                <a:spcPts val="600"/>
               </a:spcAft>
-              <a:defRPr sz="1000">
+              <a:defRPr sz="1200">
                 <a:solidFill>
                   <a:srgbClr val="334155"/>
                 </a:solidFill>
-              </a:defRPr>
-            </a:pPr>
-            <a:r>
-              <a:t>• Automated Adverse Action Notices: Explains to applicants exactly why their loan terms were adjusted.</a:t>
-            </a:r>
-          </a:p>
-          <a:p>
-            <a:pPr>
-              <a:spcAft>
-                <a:spcPts val="400"/>
-              </a:spcAft>
-              <a:defRPr sz="1000">
-                <a:solidFill>
-                  <a:srgbClr val="334155"/>
-                </a:solidFill>
+                <a:latin typeface="Segoe UI"/>
               </a:defRPr>
             </a:pPr>
             <a:r>
@@ -6301,8 +6323,8 @@
         </p:nvSpPr>
         <p:spPr>
           <a:xfrm>
-            <a:off x="731520" y="256032"/>
-            <a:ext cx="10698480" cy="256032"/>
+            <a:off x="731520" y="237744"/>
+            <a:ext cx="10698480" cy="237744"/>
           </a:xfrm>
           <a:prstGeom prst="rect">
             <a:avLst/>
@@ -6320,6 +6342,7 @@
                 <a:solidFill>
                   <a:srgbClr val="2563EB"/>
                 </a:solidFill>
+                <a:latin typeface="Segoe UI"/>
               </a:defRPr>
             </a:pPr>
             <a:r>
@@ -6336,8 +6359,8 @@
         </p:nvSpPr>
         <p:spPr>
           <a:xfrm>
-            <a:off x="731520" y="502920"/>
-            <a:ext cx="10698480" cy="548640"/>
+            <a:off x="731520" y="475488"/>
+            <a:ext cx="10698480" cy="502920"/>
           </a:xfrm>
           <a:prstGeom prst="rect">
             <a:avLst/>
@@ -6351,10 +6374,11 @@
           <a:lstStyle/>
           <a:p>
             <a:pPr>
-              <a:defRPr sz="2100" b="1">
+              <a:defRPr sz="2000" b="1">
                 <a:solidFill>
                   <a:srgbClr val="0F172A"/>
                 </a:solidFill>
+                <a:latin typeface="Segoe UI"/>
               </a:defRPr>
             </a:pPr>
             <a:r>
@@ -6371,8 +6395,8 @@
         </p:nvSpPr>
         <p:spPr>
           <a:xfrm>
-            <a:off x="731520" y="1234440"/>
-            <a:ext cx="4754880" cy="5120640"/>
+            <a:off x="731520" y="1188720"/>
+            <a:ext cx="4754880" cy="5212080"/>
           </a:xfrm>
           <a:prstGeom prst="roundRect">
             <a:avLst/>
@@ -6416,8 +6440,8 @@
         </p:nvSpPr>
         <p:spPr>
           <a:xfrm>
-            <a:off x="914400" y="1344168"/>
-            <a:ext cx="4389120" cy="274320"/>
+            <a:off x="914400" y="1298448"/>
+            <a:ext cx="4389120" cy="256032"/>
           </a:xfrm>
           <a:prstGeom prst="rect">
             <a:avLst/>
@@ -6431,10 +6455,11 @@
           <a:lstStyle/>
           <a:p>
             <a:pPr>
-              <a:defRPr sz="950" b="1">
+              <a:defRPr sz="1000" b="1">
                 <a:solidFill>
                   <a:srgbClr val="10B981"/>
                 </a:solidFill>
+                <a:latin typeface="Consolas"/>
               </a:defRPr>
             </a:pPr>
             <a:r>
@@ -6451,8 +6476,8 @@
         </p:nvSpPr>
         <p:spPr>
           <a:xfrm>
-            <a:off x="914400" y="1645920"/>
-            <a:ext cx="4389120" cy="4617720"/>
+            <a:off x="914400" y="1572768"/>
+            <a:ext cx="4389120" cy="4736592"/>
           </a:xfrm>
           <a:prstGeom prst="rect">
             <a:avLst/>
@@ -6466,7 +6491,7 @@
           <a:lstStyle/>
           <a:p>
             <a:pPr>
-              <a:defRPr sz="850">
+              <a:defRPr sz="900">
                 <a:solidFill>
                   <a:srgbClr val="94A3B8"/>
                 </a:solidFill>
@@ -6479,7 +6504,7 @@
           </a:p>
           <a:p>
             <a:pPr>
-              <a:defRPr sz="850">
+              <a:defRPr sz="900">
                 <a:solidFill>
                   <a:srgbClr val="93C5FD"/>
                 </a:solidFill>
@@ -6492,7 +6517,7 @@
           </a:p>
           <a:p>
             <a:pPr>
-              <a:defRPr sz="850">
+              <a:defRPr sz="900">
                 <a:solidFill>
                   <a:srgbClr val="93C5FD"/>
                 </a:solidFill>
@@ -6505,7 +6530,7 @@
           </a:p>
           <a:p>
             <a:pPr>
-              <a:defRPr sz="850">
+              <a:defRPr sz="900">
                 <a:solidFill>
                   <a:srgbClr val="94A3B8"/>
                 </a:solidFill>
@@ -6518,7 +6543,7 @@
           </a:p>
           <a:p>
             <a:pPr>
-              <a:defRPr sz="850">
+              <a:defRPr sz="900">
                 <a:solidFill>
                   <a:srgbClr val="F1F5F9"/>
                 </a:solidFill>
@@ -6531,7 +6556,7 @@
           </a:p>
           <a:p>
             <a:pPr>
-              <a:defRPr sz="850">
+              <a:defRPr sz="900">
                 <a:solidFill>
                   <a:srgbClr val="F1F5F9"/>
                 </a:solidFill>
@@ -6544,7 +6569,7 @@
           </a:p>
           <a:p>
             <a:pPr>
-              <a:defRPr sz="850">
+              <a:defRPr sz="900">
                 <a:solidFill>
                   <a:srgbClr val="F1F5F9"/>
                 </a:solidFill>
@@ -6557,7 +6582,7 @@
           </a:p>
           <a:p>
             <a:pPr>
-              <a:defRPr sz="850">
+              <a:defRPr sz="900">
                 <a:solidFill>
                   <a:srgbClr val="94A3B8"/>
                 </a:solidFill>
@@ -6570,7 +6595,7 @@
           </a:p>
           <a:p>
             <a:pPr>
-              <a:defRPr sz="850">
+              <a:defRPr sz="900">
                 <a:solidFill>
                   <a:srgbClr val="F1F5F9"/>
                 </a:solidFill>
@@ -6583,7 +6608,7 @@
           </a:p>
           <a:p>
             <a:pPr>
-              <a:defRPr sz="850">
+              <a:defRPr sz="900">
                 <a:solidFill>
                   <a:srgbClr val="F1F5F9"/>
                 </a:solidFill>
@@ -6596,7 +6621,7 @@
           </a:p>
           <a:p>
             <a:pPr>
-              <a:defRPr sz="850">
+              <a:defRPr sz="900">
                 <a:solidFill>
                   <a:srgbClr val="94A3B8"/>
                 </a:solidFill>
@@ -6609,7 +6634,7 @@
           </a:p>
           <a:p>
             <a:pPr>
-              <a:defRPr sz="850">
+              <a:defRPr sz="900">
                 <a:solidFill>
                   <a:srgbClr val="93C5FD"/>
                 </a:solidFill>
@@ -6622,7 +6647,7 @@
           </a:p>
           <a:p>
             <a:pPr>
-              <a:defRPr sz="850">
+              <a:defRPr sz="900">
                 <a:solidFill>
                   <a:srgbClr val="93C5FD"/>
                 </a:solidFill>
@@ -6635,7 +6660,7 @@
           </a:p>
           <a:p>
             <a:pPr>
-              <a:defRPr sz="850">
+              <a:defRPr sz="900">
                 <a:solidFill>
                   <a:srgbClr val="93C5FD"/>
                 </a:solidFill>
@@ -6648,7 +6673,7 @@
           </a:p>
           <a:p>
             <a:pPr>
-              <a:defRPr sz="850">
+              <a:defRPr sz="900">
                 <a:solidFill>
                   <a:srgbClr val="93C5FD"/>
                 </a:solidFill>
@@ -6661,7 +6686,7 @@
           </a:p>
           <a:p>
             <a:pPr>
-              <a:defRPr sz="850">
+              <a:defRPr sz="900">
                 <a:solidFill>
                   <a:srgbClr val="F1F5F9"/>
                 </a:solidFill>
@@ -6674,7 +6699,7 @@
           </a:p>
           <a:p>
             <a:pPr>
-              <a:defRPr sz="850">
+              <a:defRPr sz="900">
                 <a:solidFill>
                   <a:srgbClr val="93C5FD"/>
                 </a:solidFill>
@@ -6695,7 +6720,7 @@
         </p:nvSpPr>
         <p:spPr>
           <a:xfrm>
-            <a:off x="5669280" y="1234440"/>
+            <a:off x="5669280" y="1188720"/>
             <a:ext cx="5790895" cy="1554480"/>
           </a:xfrm>
           <a:prstGeom prst="roundRect">
@@ -6740,7 +6765,7 @@
         </p:nvSpPr>
         <p:spPr>
           <a:xfrm>
-            <a:off x="5806440" y="1325880"/>
+            <a:off x="5806440" y="1280160"/>
             <a:ext cx="5486400" cy="1371600"/>
           </a:xfrm>
           <a:prstGeom prst="rect">
@@ -6762,6 +6787,7 @@
                 <a:solidFill>
                   <a:srgbClr val="2563EB"/>
                 </a:solidFill>
+                <a:latin typeface="Segoe UI"/>
               </a:defRPr>
             </a:pPr>
             <a:r>
@@ -6770,10 +6796,11 @@
           </a:p>
           <a:p>
             <a:pPr>
-              <a:defRPr sz="950">
+              <a:defRPr sz="1000">
                 <a:solidFill>
                   <a:srgbClr val="334155"/>
                 </a:solidFill>
+                <a:latin typeface="Segoe UI"/>
               </a:defRPr>
             </a:pPr>
             <a:r>
@@ -6782,10 +6809,11 @@
           </a:p>
           <a:p>
             <a:pPr>
-              <a:defRPr sz="950">
+              <a:defRPr sz="1000">
                 <a:solidFill>
                   <a:srgbClr val="334155"/>
                 </a:solidFill>
+                <a:latin typeface="Segoe UI"/>
               </a:defRPr>
             </a:pPr>
             <a:r>
@@ -6794,10 +6822,11 @@
           </a:p>
           <a:p>
             <a:pPr>
-              <a:defRPr sz="950">
+              <a:defRPr sz="1000">
                 <a:solidFill>
                   <a:srgbClr val="334155"/>
                 </a:solidFill>
+                <a:latin typeface="Segoe UI"/>
               </a:defRPr>
             </a:pPr>
             <a:r>
@@ -6806,10 +6835,11 @@
           </a:p>
           <a:p>
             <a:pPr>
-              <a:defRPr sz="950">
+              <a:defRPr sz="1000">
                 <a:solidFill>
                   <a:srgbClr val="334155"/>
                 </a:solidFill>
+                <a:latin typeface="Segoe UI"/>
               </a:defRPr>
             </a:pPr>
             <a:r>
@@ -6827,7 +6857,7 @@
         <p:spPr>
           <a:xfrm>
             <a:off x="5669280" y="2926080"/>
-            <a:ext cx="5790895" cy="3429000"/>
+            <a:ext cx="5790895" cy="3474720"/>
           </a:xfrm>
           <a:prstGeom prst="roundRect">
             <a:avLst/>
@@ -6893,6 +6923,7 @@
                 <a:solidFill>
                   <a:srgbClr val="0F172A"/>
                 </a:solidFill>
+                <a:latin typeface="Segoe UI"/>
               </a:defRPr>
             </a:pPr>
             <a:r>
@@ -6901,10 +6932,11 @@
           </a:p>
           <a:p>
             <a:pPr>
-              <a:defRPr sz="1000" b="1">
+              <a:defRPr sz="1100" b="1">
                 <a:solidFill>
                   <a:srgbClr val="10B981"/>
                 </a:solidFill>
+                <a:latin typeface="Segoe UI"/>
               </a:defRPr>
             </a:pPr>
             <a:r>
@@ -6916,10 +6948,11 @@
               <a:spcAft>
                 <a:spcPts val="400"/>
               </a:spcAft>
-              <a:defRPr sz="950">
+              <a:defRPr sz="1000">
                 <a:solidFill>
                   <a:srgbClr val="334155"/>
                 </a:solidFill>
+                <a:latin typeface="Segoe UI"/>
               </a:defRPr>
             </a:pPr>
             <a:r>
@@ -6928,10 +6961,11 @@
           </a:p>
           <a:p>
             <a:pPr>
-              <a:defRPr sz="1000" b="1">
+              <a:defRPr sz="1100" b="1">
                 <a:solidFill>
                   <a:srgbClr val="2563EB"/>
                 </a:solidFill>
+                <a:latin typeface="Segoe UI"/>
               </a:defRPr>
             </a:pPr>
             <a:r>
@@ -6943,10 +6977,11 @@
               <a:spcAft>
                 <a:spcPts val="400"/>
               </a:spcAft>
-              <a:defRPr sz="950">
+              <a:defRPr sz="1000">
                 <a:solidFill>
                   <a:srgbClr val="334155"/>
                 </a:solidFill>
+                <a:latin typeface="Segoe UI"/>
               </a:defRPr>
             </a:pPr>
             <a:r>
@@ -6955,10 +6990,11 @@
           </a:p>
           <a:p>
             <a:pPr>
-              <a:defRPr sz="1000" b="1">
+              <a:defRPr sz="1100" b="1">
                 <a:solidFill>
                   <a:srgbClr val="D97706"/>
                 </a:solidFill>
+                <a:latin typeface="Segoe UI"/>
               </a:defRPr>
             </a:pPr>
             <a:r>
@@ -6970,10 +7006,11 @@
               <a:spcAft>
                 <a:spcPts val="400"/>
               </a:spcAft>
-              <a:defRPr sz="950">
+              <a:defRPr sz="1000">
                 <a:solidFill>
                   <a:srgbClr val="334155"/>
                 </a:solidFill>
+                <a:latin typeface="Segoe UI"/>
               </a:defRPr>
             </a:pPr>
             <a:r>
@@ -6982,10 +7019,11 @@
           </a:p>
           <a:p>
             <a:pPr>
-              <a:defRPr sz="1000" b="1">
+              <a:defRPr sz="1100" b="1">
                 <a:solidFill>
                   <a:srgbClr val="E11D48"/>
                 </a:solidFill>
+                <a:latin typeface="Segoe UI"/>
               </a:defRPr>
             </a:pPr>
             <a:r>
@@ -6997,10 +7035,11 @@
               <a:spcAft>
                 <a:spcPts val="400"/>
               </a:spcAft>
-              <a:defRPr sz="950">
+              <a:defRPr sz="1000">
                 <a:solidFill>
                   <a:srgbClr val="334155"/>
                 </a:solidFill>
+                <a:latin typeface="Segoe UI"/>
               </a:defRPr>
             </a:pPr>
             <a:r>
@@ -7086,8 +7125,8 @@
         </p:nvSpPr>
         <p:spPr>
           <a:xfrm>
-            <a:off x="731520" y="256032"/>
-            <a:ext cx="10698480" cy="256032"/>
+            <a:off x="731520" y="237744"/>
+            <a:ext cx="10698480" cy="237744"/>
           </a:xfrm>
           <a:prstGeom prst="rect">
             <a:avLst/>
@@ -7105,6 +7144,7 @@
                 <a:solidFill>
                   <a:srgbClr val="2563EB"/>
                 </a:solidFill>
+                <a:latin typeface="Segoe UI"/>
               </a:defRPr>
             </a:pPr>
             <a:r>
@@ -7121,8 +7161,8 @@
         </p:nvSpPr>
         <p:spPr>
           <a:xfrm>
-            <a:off x="731520" y="502920"/>
-            <a:ext cx="10698480" cy="548640"/>
+            <a:off x="731520" y="475488"/>
+            <a:ext cx="10698480" cy="502920"/>
           </a:xfrm>
           <a:prstGeom prst="rect">
             <a:avLst/>
@@ -7136,10 +7176,11 @@
           <a:lstStyle/>
           <a:p>
             <a:pPr>
-              <a:defRPr sz="2100" b="1">
+              <a:defRPr sz="2000" b="1">
                 <a:solidFill>
                   <a:srgbClr val="0F172A"/>
                 </a:solidFill>
+                <a:latin typeface="Segoe UI"/>
               </a:defRPr>
             </a:pPr>
             <a:r>
@@ -7156,8 +7197,8 @@
         </p:nvSpPr>
         <p:spPr>
           <a:xfrm>
-            <a:off x="731520" y="1234440"/>
-            <a:ext cx="5212080" cy="5120640"/>
+            <a:off x="731520" y="1188720"/>
+            <a:ext cx="5212080" cy="5212080"/>
           </a:xfrm>
           <a:prstGeom prst="roundRect">
             <a:avLst/>
@@ -7201,8 +7242,8 @@
         </p:nvSpPr>
         <p:spPr>
           <a:xfrm>
-            <a:off x="914400" y="1371600"/>
-            <a:ext cx="4846320" cy="4754880"/>
+            <a:off x="914400" y="1325880"/>
+            <a:ext cx="4846320" cy="4846320"/>
           </a:xfrm>
           <a:prstGeom prst="rect">
             <a:avLst/>
@@ -7219,10 +7260,11 @@
               <a:spcAft>
                 <a:spcPts val="1000"/>
               </a:spcAft>
-              <a:defRPr sz="1500" b="1">
+              <a:defRPr sz="1400" b="1">
                 <a:solidFill>
                   <a:srgbClr val="0F172A"/>
                 </a:solidFill>
+                <a:latin typeface="Segoe UI"/>
               </a:defRPr>
             </a:pPr>
             <a:r>
@@ -7234,10 +7276,11 @@
               <a:spcAft>
                 <a:spcPts val="800"/>
               </a:spcAft>
-              <a:defRPr sz="1000">
+              <a:defRPr sz="1100">
                 <a:solidFill>
                   <a:srgbClr val="334155"/>
                 </a:solidFill>
+                <a:latin typeface="Segoe UI"/>
               </a:defRPr>
             </a:pPr>
             <a:r>
@@ -7249,10 +7292,11 @@
               <a:spcAft>
                 <a:spcPts val="800"/>
               </a:spcAft>
-              <a:defRPr sz="1000">
+              <a:defRPr sz="1100">
                 <a:solidFill>
                   <a:srgbClr val="334155"/>
                 </a:solidFill>
+                <a:latin typeface="Segoe UI"/>
               </a:defRPr>
             </a:pPr>
             <a:r>
@@ -7264,10 +7308,11 @@
               <a:spcAft>
                 <a:spcPts val="800"/>
               </a:spcAft>
-              <a:defRPr sz="1000">
+              <a:defRPr sz="1100">
                 <a:solidFill>
                   <a:srgbClr val="334155"/>
                 </a:solidFill>
+                <a:latin typeface="Segoe UI"/>
               </a:defRPr>
             </a:pPr>
             <a:r>
@@ -7279,10 +7324,11 @@
               <a:spcAft>
                 <a:spcPts val="800"/>
               </a:spcAft>
-              <a:defRPr sz="1000">
+              <a:defRPr sz="1100">
                 <a:solidFill>
                   <a:srgbClr val="334155"/>
                 </a:solidFill>
+                <a:latin typeface="Segoe UI"/>
               </a:defRPr>
             </a:pPr>
             <a:r>
@@ -7294,10 +7340,11 @@
               <a:spcAft>
                 <a:spcPts val="800"/>
               </a:spcAft>
-              <a:defRPr sz="1000">
+              <a:defRPr sz="1100">
                 <a:solidFill>
                   <a:srgbClr val="334155"/>
                 </a:solidFill>
+                <a:latin typeface="Segoe UI"/>
               </a:defRPr>
             </a:pPr>
             <a:r>
@@ -7314,8 +7361,8 @@
         </p:nvSpPr>
         <p:spPr>
           <a:xfrm>
-            <a:off x="6217920" y="1234440"/>
-            <a:ext cx="5242255" cy="5120640"/>
+            <a:off x="6217920" y="1188720"/>
+            <a:ext cx="5242255" cy="5212080"/>
           </a:xfrm>
           <a:prstGeom prst="roundRect">
             <a:avLst/>
@@ -7359,8 +7406,8 @@
         </p:nvSpPr>
         <p:spPr>
           <a:xfrm>
-            <a:off x="6400800" y="1371600"/>
-            <a:ext cx="4846320" cy="4754880"/>
+            <a:off x="6400800" y="1325880"/>
+            <a:ext cx="4846320" cy="4846320"/>
           </a:xfrm>
           <a:prstGeom prst="rect">
             <a:avLst/>
@@ -7377,10 +7424,11 @@
               <a:spcAft>
                 <a:spcPts val="1000"/>
               </a:spcAft>
-              <a:defRPr sz="1500" b="1">
+              <a:defRPr sz="1400" b="1">
                 <a:solidFill>
                   <a:srgbClr val="0F172A"/>
                 </a:solidFill>
+                <a:latin typeface="Segoe UI"/>
               </a:defRPr>
             </a:pPr>
             <a:r>
@@ -7392,10 +7440,11 @@
               <a:spcAft>
                 <a:spcPts val="800"/>
               </a:spcAft>
-              <a:defRPr sz="1000">
+              <a:defRPr sz="1100">
                 <a:solidFill>
                   <a:srgbClr val="334155"/>
                 </a:solidFill>
+                <a:latin typeface="Segoe UI"/>
               </a:defRPr>
             </a:pPr>
             <a:r>
@@ -7407,10 +7456,11 @@
               <a:spcAft>
                 <a:spcPts val="800"/>
               </a:spcAft>
-              <a:defRPr sz="1000">
+              <a:defRPr sz="1100">
                 <a:solidFill>
                   <a:srgbClr val="334155"/>
                 </a:solidFill>
+                <a:latin typeface="Segoe UI"/>
               </a:defRPr>
             </a:pPr>
             <a:r>
@@ -7422,10 +7472,11 @@
               <a:spcAft>
                 <a:spcPts val="800"/>
               </a:spcAft>
-              <a:defRPr sz="1000">
+              <a:defRPr sz="1100">
                 <a:solidFill>
                   <a:srgbClr val="334155"/>
                 </a:solidFill>
+                <a:latin typeface="Segoe UI"/>
               </a:defRPr>
             </a:pPr>
             <a:r>
@@ -7437,10 +7488,11 @@
               <a:spcAft>
                 <a:spcPts val="800"/>
               </a:spcAft>
-              <a:defRPr sz="1000">
+              <a:defRPr sz="1100">
                 <a:solidFill>
                   <a:srgbClr val="334155"/>
                 </a:solidFill>
+                <a:latin typeface="Segoe UI"/>
               </a:defRPr>
             </a:pPr>
             <a:r>
@@ -7452,10 +7504,11 @@
               <a:spcAft>
                 <a:spcPts val="800"/>
               </a:spcAft>
-              <a:defRPr sz="1000">
+              <a:defRPr sz="1100">
                 <a:solidFill>
                   <a:srgbClr val="334155"/>
                 </a:solidFill>
+                <a:latin typeface="Segoe UI"/>
               </a:defRPr>
             </a:pPr>
             <a:r>
@@ -7541,8 +7594,8 @@
         </p:nvSpPr>
         <p:spPr>
           <a:xfrm>
-            <a:off x="731520" y="256032"/>
-            <a:ext cx="10698480" cy="256032"/>
+            <a:off x="731520" y="237744"/>
+            <a:ext cx="10698480" cy="237744"/>
           </a:xfrm>
           <a:prstGeom prst="rect">
             <a:avLst/>
@@ -7560,6 +7613,7 @@
                 <a:solidFill>
                   <a:srgbClr val="2563EB"/>
                 </a:solidFill>
+                <a:latin typeface="Segoe UI"/>
               </a:defRPr>
             </a:pPr>
             <a:r>
@@ -7576,8 +7630,8 @@
         </p:nvSpPr>
         <p:spPr>
           <a:xfrm>
-            <a:off x="731520" y="502920"/>
-            <a:ext cx="10698480" cy="548640"/>
+            <a:off x="731520" y="475488"/>
+            <a:ext cx="10698480" cy="502920"/>
           </a:xfrm>
           <a:prstGeom prst="rect">
             <a:avLst/>
@@ -7591,10 +7645,11 @@
           <a:lstStyle/>
           <a:p>
             <a:pPr>
-              <a:defRPr sz="2100" b="1">
+              <a:defRPr sz="2000" b="1">
                 <a:solidFill>
                   <a:srgbClr val="0F172A"/>
                 </a:solidFill>
+                <a:latin typeface="Segoe UI"/>
               </a:defRPr>
             </a:pPr>
             <a:r>
@@ -7674,10 +7729,11 @@
               <a:spcAft>
                 <a:spcPts val="200"/>
               </a:spcAft>
-              <a:defRPr sz="1150" b="1">
+              <a:defRPr sz="1200" b="1">
                 <a:solidFill>
                   <a:srgbClr val="2563EB"/>
                 </a:solidFill>
+                <a:latin typeface="Segoe UI"/>
               </a:defRPr>
             </a:pPr>
             <a:r>
@@ -7686,10 +7742,11 @@
           </a:p>
           <a:p>
             <a:pPr>
-              <a:defRPr sz="950">
+              <a:defRPr sz="1000">
                 <a:solidFill>
                   <a:srgbClr val="334155"/>
                 </a:solidFill>
+                <a:latin typeface="Segoe UI"/>
               </a:defRPr>
             </a:pPr>
             <a:r>
@@ -7773,10 +7830,11 @@
               <a:spcAft>
                 <a:spcPts val="200"/>
               </a:spcAft>
-              <a:defRPr sz="1150" b="1">
+              <a:defRPr sz="1200" b="1">
                 <a:solidFill>
                   <a:srgbClr val="10B981"/>
                 </a:solidFill>
+                <a:latin typeface="Segoe UI"/>
               </a:defRPr>
             </a:pPr>
             <a:r>
@@ -7785,10 +7843,11 @@
           </a:p>
           <a:p>
             <a:pPr>
-              <a:defRPr sz="950">
+              <a:defRPr sz="1000">
                 <a:solidFill>
                   <a:srgbClr val="334155"/>
                 </a:solidFill>
+                <a:latin typeface="Segoe UI"/>
               </a:defRPr>
             </a:pPr>
             <a:r>
@@ -7872,10 +7931,11 @@
               <a:spcAft>
                 <a:spcPts val="200"/>
               </a:spcAft>
-              <a:defRPr sz="1150" b="1">
+              <a:defRPr sz="1200" b="1">
                 <a:solidFill>
                   <a:srgbClr val="D97706"/>
                 </a:solidFill>
+                <a:latin typeface="Segoe UI"/>
               </a:defRPr>
             </a:pPr>
             <a:r>
@@ -7884,10 +7944,11 @@
           </a:p>
           <a:p>
             <a:pPr>
-              <a:defRPr sz="950">
+              <a:defRPr sz="1000">
                 <a:solidFill>
                   <a:srgbClr val="334155"/>
                 </a:solidFill>
+                <a:latin typeface="Segoe UI"/>
               </a:defRPr>
             </a:pPr>
             <a:r>
@@ -7971,10 +8032,11 @@
               <a:spcAft>
                 <a:spcPts val="200"/>
               </a:spcAft>
-              <a:defRPr sz="1150" b="1">
+              <a:defRPr sz="1200" b="1">
                 <a:solidFill>
                   <a:srgbClr val="9333EA"/>
                 </a:solidFill>
+                <a:latin typeface="Segoe UI"/>
               </a:defRPr>
             </a:pPr>
             <a:r>
@@ -7983,10 +8045,11 @@
           </a:p>
           <a:p>
             <a:pPr>
-              <a:defRPr sz="950">
+              <a:defRPr sz="1000">
                 <a:solidFill>
                   <a:srgbClr val="334155"/>
                 </a:solidFill>
+                <a:latin typeface="Segoe UI"/>
               </a:defRPr>
             </a:pPr>
             <a:r>
@@ -8074,6 +8137,7 @@
                 <a:solidFill>
                   <a:srgbClr val="0F172A"/>
                 </a:solidFill>
+                <a:latin typeface="Segoe UI"/>
               </a:defRPr>
             </a:pPr>
             <a:r>
@@ -8083,76 +8147,65 @@
           <a:p>
             <a:pPr>
               <a:spcAft>
-                <a:spcPts val="600"/>
+                <a:spcPts val="800"/>
               </a:spcAft>
-              <a:defRPr sz="1100">
+              <a:defRPr sz="1200">
                 <a:solidFill>
                   <a:srgbClr val="334155"/>
                 </a:solidFill>
-              </a:defRPr>
-            </a:pPr>
-            <a:r>
-              <a:t>• Total Records: 50,000 credit records</a:t>
+                <a:latin typeface="Segoe UI"/>
+              </a:defRPr>
+            </a:pPr>
+            <a:r>
+              <a:t>• Total Records: 50,000 credit records with 18 attributes.</a:t>
             </a:r>
           </a:p>
           <a:p>
             <a:pPr>
               <a:spcAft>
-                <a:spcPts val="600"/>
+                <a:spcPts val="800"/>
               </a:spcAft>
-              <a:defRPr sz="1100">
+              <a:defRPr sz="1200">
                 <a:solidFill>
                   <a:srgbClr val="334155"/>
                 </a:solidFill>
-              </a:defRPr>
-            </a:pPr>
-            <a:r>
-              <a:t>• Feature Space: 18 attributes (Income, Credit Score, DTI, Loan Amount, etc.)</a:t>
+                <a:latin typeface="Segoe UI"/>
+              </a:defRPr>
+            </a:pPr>
+            <a:r>
+              <a:t>• Train / Test Split: 80% Train (40,000) / 20% Holdout Test (10,000).</a:t>
             </a:r>
           </a:p>
           <a:p>
             <a:pPr>
               <a:spcAft>
-                <a:spcPts val="600"/>
+                <a:spcPts val="800"/>
               </a:spcAft>
-              <a:defRPr sz="1100">
+              <a:defRPr sz="1200">
                 <a:solidFill>
                   <a:srgbClr val="334155"/>
                 </a:solidFill>
-              </a:defRPr>
-            </a:pPr>
-            <a:r>
-              <a:t>• Train / Test Partition: 80% Train (40,000) / 20% Holdout Test (10,000)</a:t>
+                <a:latin typeface="Segoe UI"/>
+              </a:defRPr>
+            </a:pPr>
+            <a:r>
+              <a:t>• Sampling Method: Stratified split preserving class balance.</a:t>
             </a:r>
           </a:p>
           <a:p>
             <a:pPr>
               <a:spcAft>
-                <a:spcPts val="600"/>
+                <a:spcPts val="800"/>
               </a:spcAft>
-              <a:defRPr sz="1100">
+              <a:defRPr sz="1200">
                 <a:solidFill>
                   <a:srgbClr val="334155"/>
                 </a:solidFill>
-              </a:defRPr>
-            </a:pPr>
-            <a:r>
-              <a:t>• Stratification: Maintains exact class proportions across splits</a:t>
-            </a:r>
-          </a:p>
-          <a:p>
-            <a:pPr>
-              <a:spcAft>
-                <a:spcPts val="600"/>
-              </a:spcAft>
-              <a:defRPr sz="1100">
-                <a:solidFill>
-                  <a:srgbClr val="334155"/>
-                </a:solidFill>
-              </a:defRPr>
-            </a:pPr>
-            <a:r>
-              <a:t>• Leakage Prevention: StandardScaler &amp; OneHotEncoder fit strictly on training set</a:t>
+                <a:latin typeface="Segoe UI"/>
+              </a:defRPr>
+            </a:pPr>
+            <a:r>
+              <a:t>• Data Leakage: Zero leakage (scalers fit strictly on training set).</a:t>
             </a:r>
           </a:p>
         </p:txBody>
@@ -8232,6 +8285,7 @@
                 <a:solidFill>
                   <a:srgbClr val="BE123C"/>
                 </a:solidFill>
+                <a:latin typeface="Segoe UI"/>
               </a:defRPr>
             </a:pPr>
             <a:r>
@@ -8241,61 +8295,65 @@
           <a:p>
             <a:pPr>
               <a:spcAft>
-                <a:spcPts val="600"/>
+                <a:spcPts val="800"/>
               </a:spcAft>
-              <a:defRPr sz="1100">
+              <a:defRPr sz="1200">
                 <a:solidFill>
                   <a:srgbClr val="334155"/>
                 </a:solidFill>
-              </a:defRPr>
-            </a:pPr>
-            <a:r>
-              <a:t>• Non-Defaulters (Class 0): 88.3% (~44,150 applicants)</a:t>
+                <a:latin typeface="Segoe UI"/>
+              </a:defRPr>
+            </a:pPr>
+            <a:r>
+              <a:t>• Class Distribution: 88.3% Non-Defaulters vs. 11.7% Defaulters.</a:t>
             </a:r>
           </a:p>
           <a:p>
             <a:pPr>
               <a:spcAft>
-                <a:spcPts val="600"/>
+                <a:spcPts val="800"/>
               </a:spcAft>
-              <a:defRPr sz="1100">
+              <a:defRPr sz="1200">
                 <a:solidFill>
                   <a:srgbClr val="334155"/>
                 </a:solidFill>
-              </a:defRPr>
-            </a:pPr>
-            <a:r>
-              <a:t>• Defaulters (Class 1): 11.7% (~5,850 applicants)</a:t>
+                <a:latin typeface="Segoe UI"/>
+              </a:defRPr>
+            </a:pPr>
+            <a:r>
+              <a:t>• The 'Accuracy Paradox': Predicting 0 for all loans yields 88.3% accuracy but 0% risk detection.</a:t>
             </a:r>
           </a:p>
           <a:p>
             <a:pPr>
               <a:spcAft>
-                <a:spcPts val="600"/>
+                <a:spcPts val="800"/>
               </a:spcAft>
-              <a:defRPr sz="1100">
+              <a:defRPr sz="1200">
                 <a:solidFill>
                   <a:srgbClr val="334155"/>
                 </a:solidFill>
-              </a:defRPr>
-            </a:pPr>
-            <a:r>
-              <a:t>• The 'Accuracy Paradox': A naive zero-default prediction yields 88.3% accuracy but detects 0% of risky loans, causing extreme financial write-offs.</a:t>
+                <a:latin typeface="Segoe UI"/>
+              </a:defRPr>
+            </a:pPr>
+            <a:r>
+              <a:t>• Financial Impact: False Negatives cause severe institutional bad-debt losses.</a:t>
             </a:r>
           </a:p>
           <a:p>
             <a:pPr>
               <a:spcAft>
-                <a:spcPts val="600"/>
+                <a:spcPts val="800"/>
               </a:spcAft>
-              <a:defRPr sz="1100">
+              <a:defRPr sz="1200">
                 <a:solidFill>
                   <a:srgbClr val="334155"/>
                 </a:solidFill>
-              </a:defRPr>
-            </a:pPr>
-            <a:r>
-              <a:t>• Evaluation Focus: Benchmarking prioritizes Recall (detecting defaulters), F1-Score (balanced harmonic mean), and ROC-AUC (threshold-independent).</a:t>
+                <a:latin typeface="Segoe UI"/>
+              </a:defRPr>
+            </a:pPr>
+            <a:r>
+              <a:t>• Metric Priority: Optimization strictly focused on Recall, F1-Score, and ROC-AUC.</a:t>
             </a:r>
           </a:p>
         </p:txBody>
@@ -8377,8 +8435,8 @@
         </p:nvSpPr>
         <p:spPr>
           <a:xfrm>
-            <a:off x="731520" y="256032"/>
-            <a:ext cx="10698480" cy="256032"/>
+            <a:off x="731520" y="237744"/>
+            <a:ext cx="10698480" cy="237744"/>
           </a:xfrm>
           <a:prstGeom prst="rect">
             <a:avLst/>
@@ -8396,6 +8454,7 @@
                 <a:solidFill>
                   <a:srgbClr val="2563EB"/>
                 </a:solidFill>
+                <a:latin typeface="Segoe UI"/>
               </a:defRPr>
             </a:pPr>
             <a:r>
@@ -8412,8 +8471,8 @@
         </p:nvSpPr>
         <p:spPr>
           <a:xfrm>
-            <a:off x="731520" y="502920"/>
-            <a:ext cx="10698480" cy="548640"/>
+            <a:off x="731520" y="475488"/>
+            <a:ext cx="10698480" cy="502920"/>
           </a:xfrm>
           <a:prstGeom prst="rect">
             <a:avLst/>
@@ -8427,10 +8486,11 @@
           <a:lstStyle/>
           <a:p>
             <a:pPr>
-              <a:defRPr sz="2100" b="1">
+              <a:defRPr sz="2000" b="1">
                 <a:solidFill>
                   <a:srgbClr val="0F172A"/>
                 </a:solidFill>
+                <a:latin typeface="Segoe UI"/>
               </a:defRPr>
             </a:pPr>
             <a:r>
@@ -8447,8 +8507,8 @@
         </p:nvSpPr>
         <p:spPr>
           <a:xfrm>
-            <a:off x="731520" y="1234440"/>
-            <a:ext cx="5212080" cy="2468880"/>
+            <a:off x="731520" y="1188720"/>
+            <a:ext cx="5212080" cy="2514600"/>
           </a:xfrm>
           <a:prstGeom prst="roundRect">
             <a:avLst/>
@@ -8492,8 +8552,8 @@
         </p:nvSpPr>
         <p:spPr>
           <a:xfrm>
-            <a:off x="914400" y="1371600"/>
-            <a:ext cx="4846320" cy="2194560"/>
+            <a:off x="914400" y="1325880"/>
+            <a:ext cx="4846320" cy="2240280"/>
           </a:xfrm>
           <a:prstGeom prst="rect">
             <a:avLst/>
@@ -8508,61 +8568,65 @@
           <a:p>
             <a:pPr>
               <a:spcAft>
+                <a:spcPts val="800"/>
+              </a:spcAft>
+              <a:defRPr sz="1300" b="1">
+                <a:solidFill>
+                  <a:srgbClr val="2563EB"/>
+                </a:solidFill>
+                <a:latin typeface="Segoe UI"/>
+              </a:defRPr>
+            </a:pPr>
+            <a:r>
+              <a:t>1. WHY We Used It (Problem Statement)</a:t>
+            </a:r>
+          </a:p>
+          <a:p>
+            <a:pPr>
+              <a:spcAft>
                 <a:spcPts val="600"/>
               </a:spcAft>
-              <a:defRPr sz="1200" b="1">
-                <a:solidFill>
-                  <a:srgbClr val="2563EB"/>
-                </a:solidFill>
-              </a:defRPr>
-            </a:pPr>
-            <a:r>
-              <a:t>1. WHY We Used It (The Problem / Need)</a:t>
+              <a:defRPr sz="1200">
+                <a:solidFill>
+                  <a:srgbClr val="334155"/>
+                </a:solidFill>
+                <a:latin typeface="Segoe UI"/>
+              </a:defRPr>
+            </a:pPr>
+            <a:r>
+              <a:t>• Lending institutions suffer severe bad-debt write-offs when borrowers default.</a:t>
             </a:r>
           </a:p>
           <a:p>
             <a:pPr>
               <a:spcAft>
-                <a:spcPts val="400"/>
+                <a:spcPts val="600"/>
               </a:spcAft>
-              <a:defRPr sz="1000">
+              <a:defRPr sz="1200">
                 <a:solidFill>
                   <a:srgbClr val="334155"/>
                 </a:solidFill>
-              </a:defRPr>
-            </a:pPr>
-            <a:r>
-              <a:t>• Lending institutions suffer major capital write-offs when borrowers default on unpaid principal.</a:t>
+                <a:latin typeface="Segoe UI"/>
+              </a:defRPr>
+            </a:pPr>
+            <a:r>
+              <a:t>• Lenders require an automated, objective system to screen high-risk loan applicants.</a:t>
             </a:r>
           </a:p>
           <a:p>
             <a:pPr>
               <a:spcAft>
-                <a:spcPts val="400"/>
+                <a:spcPts val="600"/>
               </a:spcAft>
-              <a:defRPr sz="1000">
+              <a:defRPr sz="1200">
                 <a:solidFill>
                   <a:srgbClr val="334155"/>
                 </a:solidFill>
-              </a:defRPr>
-            </a:pPr>
-            <a:r>
-              <a:t>• Lenders need an automated, objective mechanism to accurately classify applicants as creditworthy vs. default-prone.</a:t>
-            </a:r>
-          </a:p>
-          <a:p>
-            <a:pPr>
-              <a:spcAft>
-                <a:spcPts val="400"/>
-              </a:spcAft>
-              <a:defRPr sz="1000">
-                <a:solidFill>
-                  <a:srgbClr val="334155"/>
-                </a:solidFill>
-              </a:defRPr>
-            </a:pPr>
-            <a:r>
-              <a:t>• Manual review is slow, subjective, and unable to scale across thousands of credit applications.</a:t>
+                <a:latin typeface="Segoe UI"/>
+              </a:defRPr>
+            </a:pPr>
+            <a:r>
+              <a:t>• Manual underwriter reviews are slow, inconsistent, and cannot scale across high loan volumes.</a:t>
             </a:r>
           </a:p>
         </p:txBody>
@@ -8575,8 +8639,8 @@
         </p:nvSpPr>
         <p:spPr>
           <a:xfrm>
-            <a:off x="6217920" y="1234440"/>
-            <a:ext cx="5242255" cy="2468880"/>
+            <a:off x="6217920" y="1188720"/>
+            <a:ext cx="5242255" cy="2514600"/>
           </a:xfrm>
           <a:prstGeom prst="roundRect">
             <a:avLst/>
@@ -8620,8 +8684,8 @@
         </p:nvSpPr>
         <p:spPr>
           <a:xfrm>
-            <a:off x="6400800" y="1371600"/>
-            <a:ext cx="4876495" cy="2194560"/>
+            <a:off x="6400800" y="1325880"/>
+            <a:ext cx="4876495" cy="2240280"/>
           </a:xfrm>
           <a:prstGeom prst="rect">
             <a:avLst/>
@@ -8636,61 +8700,65 @@
           <a:p>
             <a:pPr>
               <a:spcAft>
+                <a:spcPts val="800"/>
+              </a:spcAft>
+              <a:defRPr sz="1300" b="1">
+                <a:solidFill>
+                  <a:srgbClr val="10B981"/>
+                </a:solidFill>
+                <a:latin typeface="Segoe UI"/>
+              </a:defRPr>
+            </a:pPr>
+            <a:r>
+              <a:t>2. HOW We Used It (Pipeline &amp; Methods)</a:t>
+            </a:r>
+          </a:p>
+          <a:p>
+            <a:pPr>
+              <a:spcAft>
                 <a:spcPts val="600"/>
               </a:spcAft>
-              <a:defRPr sz="1200" b="1">
-                <a:solidFill>
-                  <a:srgbClr val="10B981"/>
-                </a:solidFill>
-              </a:defRPr>
-            </a:pPr>
-            <a:r>
-              <a:t>2. HOW We Used It (Methodology &amp; Pipeline)</a:t>
+              <a:defRPr sz="1200">
+                <a:solidFill>
+                  <a:srgbClr val="334155"/>
+                </a:solidFill>
+                <a:latin typeface="Segoe UI"/>
+              </a:defRPr>
+            </a:pPr>
+            <a:r>
+              <a:t>• Benchmarked 4 supervised classifiers: Logistic Regression, Decision Tree, Random Forest, Gradient Boosting.</a:t>
             </a:r>
           </a:p>
           <a:p>
             <a:pPr>
               <a:spcAft>
-                <a:spcPts val="400"/>
+                <a:spcPts val="600"/>
               </a:spcAft>
-              <a:defRPr sz="1000">
+              <a:defRPr sz="1200">
                 <a:solidFill>
                   <a:srgbClr val="334155"/>
                 </a:solidFill>
-              </a:defRPr>
-            </a:pPr>
-            <a:r>
-              <a:t>• Benchmarked 4 supervised algorithms: Logistic Regression, Decision Tree, Random Forest, Gradient Boosting.</a:t>
+                <a:latin typeface="Segoe UI"/>
+              </a:defRPr>
+            </a:pPr>
+            <a:r>
+              <a:t>• Handled class imbalance (11.7% default) via class-weighting and prioritized F1-Score &amp; ROC-AUC.</a:t>
             </a:r>
           </a:p>
           <a:p>
             <a:pPr>
               <a:spcAft>
-                <a:spcPts val="400"/>
+                <a:spcPts val="600"/>
               </a:spcAft>
-              <a:defRPr sz="1000">
+              <a:defRPr sz="1200">
                 <a:solidFill>
                   <a:srgbClr val="334155"/>
                 </a:solidFill>
-              </a:defRPr>
-            </a:pPr>
-            <a:r>
-              <a:t>• Handled class imbalance (11.7% default) via class-weighting and optimized for Recall, F1-Score, and ROC-AUC.</a:t>
-            </a:r>
-          </a:p>
-          <a:p>
-            <a:pPr>
-              <a:spcAft>
-                <a:spcPts val="400"/>
-              </a:spcAft>
-              <a:defRPr sz="1000">
-                <a:solidFill>
-                  <a:srgbClr val="334155"/>
-                </a:solidFill>
-              </a:defRPr>
-            </a:pPr>
-            <a:r>
-              <a:t>• Trained strictly on 80% split (40,000) and evaluated on 20% holdout test set (10,000) with zero data leakage.</a:t>
+                <a:latin typeface="Segoe UI"/>
+              </a:defRPr>
+            </a:pPr>
+            <a:r>
+              <a:t>• Evaluated on 10,000 holdout test samples with zero data leakage from training.</a:t>
             </a:r>
           </a:p>
         </p:txBody>
@@ -8764,61 +8832,65 @@
           <a:p>
             <a:pPr>
               <a:spcAft>
+                <a:spcPts val="800"/>
+              </a:spcAft>
+              <a:defRPr sz="1300" b="1">
+                <a:solidFill>
+                  <a:srgbClr val="CA8A04"/>
+                </a:solidFill>
+                <a:latin typeface="Segoe UI"/>
+              </a:defRPr>
+            </a:pPr>
+            <a:r>
+              <a:t>3. WHAT It Does in Our Project (System Role)</a:t>
+            </a:r>
+          </a:p>
+          <a:p>
+            <a:pPr>
+              <a:spcAft>
                 <a:spcPts val="600"/>
               </a:spcAft>
-              <a:defRPr sz="1200" b="1">
-                <a:solidFill>
-                  <a:srgbClr val="CA8A04"/>
-                </a:solidFill>
-              </a:defRPr>
-            </a:pPr>
-            <a:r>
-              <a:t>3. WHAT It Does in Our Project (System Role)</a:t>
+              <a:defRPr sz="1200">
+                <a:solidFill>
+                  <a:srgbClr val="334155"/>
+                </a:solidFill>
+                <a:latin typeface="Segoe UI"/>
+              </a:defRPr>
+            </a:pPr>
+            <a:r>
+              <a:t>• Learns complex financial risk patterns to classify applicants into Default (1) vs. No Default (0).</a:t>
             </a:r>
           </a:p>
           <a:p>
             <a:pPr>
               <a:spcAft>
-                <a:spcPts val="400"/>
+                <a:spcPts val="600"/>
               </a:spcAft>
-              <a:defRPr sz="1000">
+              <a:defRPr sz="1200">
                 <a:solidFill>
                   <a:srgbClr val="334155"/>
                 </a:solidFill>
-              </a:defRPr>
-            </a:pPr>
-            <a:r>
-              <a:t>• Learns non-linear financial patterns separating non-defaulters from defaulters.</a:t>
+                <a:latin typeface="Segoe UI"/>
+              </a:defRPr>
+            </a:pPr>
+            <a:r>
+              <a:t>• Identifies Gradient Boosting as champion architecture with 97.75% accuracy and 0.8965 F1-Score.</a:t>
             </a:r>
           </a:p>
           <a:p>
             <a:pPr>
               <a:spcAft>
-                <a:spcPts val="400"/>
+                <a:spcPts val="600"/>
               </a:spcAft>
-              <a:defRPr sz="1000">
+              <a:defRPr sz="1200">
                 <a:solidFill>
                   <a:srgbClr val="334155"/>
                 </a:solidFill>
-              </a:defRPr>
-            </a:pPr>
-            <a:r>
-              <a:t>• Identifies the champion model (Gradient Boosting) achieving 97.75% accuracy and 0.8965 F1-Score.</a:t>
-            </a:r>
-          </a:p>
-          <a:p>
-            <a:pPr>
-              <a:spcAft>
-                <a:spcPts val="400"/>
-              </a:spcAft>
-              <a:defRPr sz="1000">
-                <a:solidFill>
-                  <a:srgbClr val="334155"/>
-                </a:solidFill>
-              </a:defRPr>
-            </a:pPr>
-            <a:r>
-              <a:t>• Exports the champion model into prediction/saved_models/best_classifier.joblib for production scoring.</a:t>
+                <a:latin typeface="Segoe UI"/>
+              </a:defRPr>
+            </a:pPr>
+            <a:r>
+              <a:t>• Exports the champion model into prediction/saved_models/best_classifier.joblib.</a:t>
             </a:r>
           </a:p>
         </p:txBody>
@@ -8892,61 +8964,65 @@
           <a:p>
             <a:pPr>
               <a:spcAft>
+                <a:spcPts val="800"/>
+              </a:spcAft>
+              <a:defRPr sz="1300" b="1">
+                <a:solidFill>
+                  <a:srgbClr val="9333EA"/>
+                </a:solidFill>
+                <a:latin typeface="Segoe UI"/>
+              </a:defRPr>
+            </a:pPr>
+            <a:r>
+              <a:t>4. PRACTICAL USE (Underwriting &amp; Business Value)</a:t>
+            </a:r>
+          </a:p>
+          <a:p>
+            <a:pPr>
+              <a:spcAft>
                 <a:spcPts val="600"/>
               </a:spcAft>
-              <a:defRPr sz="1200" b="1">
-                <a:solidFill>
-                  <a:srgbClr val="9333EA"/>
-                </a:solidFill>
-              </a:defRPr>
-            </a:pPr>
-            <a:r>
-              <a:t>4. PRACTICAL USE (Underwriting &amp; Business Value)</a:t>
+              <a:defRPr sz="1200">
+                <a:solidFill>
+                  <a:srgbClr val="334155"/>
+                </a:solidFill>
+                <a:latin typeface="Segoe UI"/>
+              </a:defRPr>
+            </a:pPr>
+            <a:r>
+              <a:t>• Automated Underwriting: Fast-tracks credit approvals while instantly flagging risky loans.</a:t>
             </a:r>
           </a:p>
           <a:p>
             <a:pPr>
               <a:spcAft>
-                <a:spcPts val="400"/>
+                <a:spcPts val="600"/>
               </a:spcAft>
-              <a:defRPr sz="1000">
+              <a:defRPr sz="1200">
                 <a:solidFill>
                   <a:srgbClr val="334155"/>
                 </a:solidFill>
-              </a:defRPr>
-            </a:pPr>
-            <a:r>
-              <a:t>• Automated Underwriting: Instantly approves prime applicants and screens out high-risk applicants.</a:t>
+                <a:latin typeface="Segoe UI"/>
+              </a:defRPr>
+            </a:pPr>
+            <a:r>
+              <a:t>• Loss Prevention: Drastically slashes Non-Performing Assets (NPAs) with 97.11% precision.</a:t>
             </a:r>
           </a:p>
           <a:p>
             <a:pPr>
               <a:spcAft>
-                <a:spcPts val="400"/>
+                <a:spcPts val="600"/>
               </a:spcAft>
-              <a:defRPr sz="1000">
+              <a:defRPr sz="1200">
                 <a:solidFill>
                   <a:srgbClr val="334155"/>
                 </a:solidFill>
-              </a:defRPr>
-            </a:pPr>
-            <a:r>
-              <a:t>• Loss Prevention: Drastically slashes Non-Performing Assets (NPAs) while preserving 97.11% precision.</a:t>
-            </a:r>
-          </a:p>
-          <a:p>
-            <a:pPr>
-              <a:spcAft>
-                <a:spcPts val="400"/>
-              </a:spcAft>
-              <a:defRPr sz="1000">
-                <a:solidFill>
-                  <a:srgbClr val="334155"/>
-                </a:solidFill>
-              </a:defRPr>
-            </a:pPr>
-            <a:r>
-              <a:t>• Regulatory Compliance: Provides objective, auditable classification standards for credit assessment.</a:t>
+                <a:latin typeface="Segoe UI"/>
+              </a:defRPr>
+            </a:pPr>
+            <a:r>
+              <a:t>• Institutional Standard: Establishes a verifiable, auditable credit decision benchmark.</a:t>
             </a:r>
           </a:p>
         </p:txBody>
@@ -9028,8 +9104,8 @@
         </p:nvSpPr>
         <p:spPr>
           <a:xfrm>
-            <a:off x="731520" y="256032"/>
-            <a:ext cx="10698480" cy="256032"/>
+            <a:off x="731520" y="237744"/>
+            <a:ext cx="10698480" cy="237744"/>
           </a:xfrm>
           <a:prstGeom prst="rect">
             <a:avLst/>
@@ -9047,6 +9123,7 @@
                 <a:solidFill>
                   <a:srgbClr val="2563EB"/>
                 </a:solidFill>
+                <a:latin typeface="Segoe UI"/>
               </a:defRPr>
             </a:pPr>
             <a:r>
@@ -9063,8 +9140,8 @@
         </p:nvSpPr>
         <p:spPr>
           <a:xfrm>
-            <a:off x="731520" y="502920"/>
-            <a:ext cx="10698480" cy="548640"/>
+            <a:off x="731520" y="475488"/>
+            <a:ext cx="10698480" cy="502920"/>
           </a:xfrm>
           <a:prstGeom prst="rect">
             <a:avLst/>
@@ -9078,10 +9155,11 @@
           <a:lstStyle/>
           <a:p>
             <a:pPr>
-              <a:defRPr sz="2100" b="1">
+              <a:defRPr sz="2000" b="1">
                 <a:solidFill>
                   <a:srgbClr val="0F172A"/>
                 </a:solidFill>
+                <a:latin typeface="Segoe UI"/>
               </a:defRPr>
             </a:pPr>
             <a:r>
@@ -9098,8 +9176,8 @@
         </p:nvSpPr>
         <p:spPr>
           <a:xfrm>
-            <a:off x="731520" y="1234440"/>
-            <a:ext cx="4389120" cy="5120640"/>
+            <a:off x="731520" y="1188720"/>
+            <a:ext cx="4389120" cy="5212080"/>
           </a:xfrm>
           <a:prstGeom prst="roundRect">
             <a:avLst/>
@@ -9143,8 +9221,8 @@
         </p:nvSpPr>
         <p:spPr>
           <a:xfrm>
-            <a:off x="914400" y="1344168"/>
-            <a:ext cx="4023360" cy="274320"/>
+            <a:off x="914400" y="1298448"/>
+            <a:ext cx="4023360" cy="256032"/>
           </a:xfrm>
           <a:prstGeom prst="rect">
             <a:avLst/>
@@ -9158,10 +9236,11 @@
           <a:lstStyle/>
           <a:p>
             <a:pPr>
-              <a:defRPr sz="950" b="1">
+              <a:defRPr sz="1000" b="1">
                 <a:solidFill>
                   <a:srgbClr val="10B981"/>
                 </a:solidFill>
+                <a:latin typeface="Consolas"/>
               </a:defRPr>
             </a:pPr>
             <a:r>
@@ -9178,8 +9257,8 @@
         </p:nvSpPr>
         <p:spPr>
           <a:xfrm>
-            <a:off x="914400" y="1645920"/>
-            <a:ext cx="4023360" cy="4617720"/>
+            <a:off x="914400" y="1572768"/>
+            <a:ext cx="4023360" cy="4736592"/>
           </a:xfrm>
           <a:prstGeom prst="rect">
             <a:avLst/>
@@ -9193,7 +9272,7 @@
           <a:lstStyle/>
           <a:p>
             <a:pPr>
-              <a:defRPr sz="850">
+              <a:defRPr sz="900">
                 <a:solidFill>
                   <a:srgbClr val="94A3B8"/>
                 </a:solidFill>
@@ -9206,7 +9285,7 @@
           </a:p>
           <a:p>
             <a:pPr>
-              <a:defRPr sz="850">
+              <a:defRPr sz="900">
                 <a:solidFill>
                   <a:srgbClr val="93C5FD"/>
                 </a:solidFill>
@@ -9219,7 +9298,7 @@
           </a:p>
           <a:p>
             <a:pPr>
-              <a:defRPr sz="850">
+              <a:defRPr sz="900">
                 <a:solidFill>
                   <a:srgbClr val="93C5FD"/>
                 </a:solidFill>
@@ -9232,7 +9311,7 @@
           </a:p>
           <a:p>
             <a:pPr>
-              <a:defRPr sz="850">
+              <a:defRPr sz="900">
                 <a:solidFill>
                   <a:srgbClr val="F1F5F9"/>
                 </a:solidFill>
@@ -9242,7 +9321,7 @@
           </a:p>
           <a:p>
             <a:pPr>
-              <a:defRPr sz="850">
+              <a:defRPr sz="900">
                 <a:solidFill>
                   <a:srgbClr val="F1F5F9"/>
                 </a:solidFill>
@@ -9255,7 +9334,7 @@
           </a:p>
           <a:p>
             <a:pPr>
-              <a:defRPr sz="850">
+              <a:defRPr sz="900">
                 <a:solidFill>
                   <a:srgbClr val="F1F5F9"/>
                 </a:solidFill>
@@ -9268,7 +9347,7 @@
           </a:p>
           <a:p>
             <a:pPr>
-              <a:defRPr sz="850">
+              <a:defRPr sz="900">
                 <a:solidFill>
                   <a:srgbClr val="6EE7B7"/>
                 </a:solidFill>
@@ -9281,7 +9360,7 @@
           </a:p>
           <a:p>
             <a:pPr>
-              <a:defRPr sz="850">
+              <a:defRPr sz="900">
                 <a:solidFill>
                   <a:srgbClr val="6EE7B7"/>
                 </a:solidFill>
@@ -9294,7 +9373,7 @@
           </a:p>
           <a:p>
             <a:pPr>
-              <a:defRPr sz="850">
+              <a:defRPr sz="900">
                 <a:solidFill>
                   <a:srgbClr val="6EE7B7"/>
                 </a:solidFill>
@@ -9307,7 +9386,7 @@
           </a:p>
           <a:p>
             <a:pPr>
-              <a:defRPr sz="850">
+              <a:defRPr sz="900">
                 <a:solidFill>
                   <a:srgbClr val="F1F5F9"/>
                 </a:solidFill>
@@ -9320,7 +9399,7 @@
           </a:p>
           <a:p>
             <a:pPr>
-              <a:defRPr sz="850">
+              <a:defRPr sz="900">
                 <a:solidFill>
                   <a:srgbClr val="93C5FD"/>
                 </a:solidFill>
@@ -9333,7 +9412,7 @@
           </a:p>
           <a:p>
             <a:pPr>
-              <a:defRPr sz="850">
+              <a:defRPr sz="900">
                 <a:solidFill>
                   <a:srgbClr val="F1F5F9"/>
                 </a:solidFill>
@@ -9346,7 +9425,7 @@
           </a:p>
           <a:p>
             <a:pPr>
-              <a:defRPr sz="850">
+              <a:defRPr sz="900">
                 <a:solidFill>
                   <a:srgbClr val="F1F5F9"/>
                 </a:solidFill>
@@ -9359,7 +9438,7 @@
           </a:p>
           <a:p>
             <a:pPr>
-              <a:defRPr sz="850">
+              <a:defRPr sz="900">
                 <a:solidFill>
                   <a:srgbClr val="F1F5F9"/>
                 </a:solidFill>
@@ -9372,7 +9451,7 @@
           </a:p>
           <a:p>
             <a:pPr>
-              <a:defRPr sz="850">
+              <a:defRPr sz="900">
                 <a:solidFill>
                   <a:srgbClr val="F1F5F9"/>
                 </a:solidFill>
@@ -9385,7 +9464,7 @@
           </a:p>
           <a:p>
             <a:pPr>
-              <a:defRPr sz="850">
+              <a:defRPr sz="900">
                 <a:solidFill>
                   <a:srgbClr val="F1F5F9"/>
                 </a:solidFill>
@@ -9406,7 +9485,7 @@
         </p:nvSpPr>
         <p:spPr>
           <a:xfrm>
-            <a:off x="5303520" y="1234440"/>
+            <a:off x="5303520" y="1188720"/>
             <a:ext cx="6156655" cy="3931920"/>
           </a:xfrm>
           <a:prstGeom prst="roundRect">
@@ -9452,7 +9531,7 @@
           <p:nvPr/>
         </p:nvGraphicFramePr>
         <p:xfrm>
-          <a:off x="5440680" y="1371600"/>
+          <a:off x="5440680" y="1325880"/>
           <a:ext cx="5882335" cy="3566160"/>
         </p:xfrm>
         <a:graphic>
@@ -9477,10 +9556,11 @@
                     <a:lstStyle/>
                     <a:p>
                       <a:pPr algn="ctr">
-                        <a:defRPr sz="1050" b="1">
+                        <a:defRPr sz="1100" b="1">
                           <a:solidFill>
                             <a:srgbClr val="FFFFFF"/>
                           </a:solidFill>
+                          <a:latin typeface="Segoe UI"/>
                         </a:defRPr>
                       </a:pPr>
                       <a:r>
@@ -9500,10 +9580,11 @@
                     <a:lstStyle/>
                     <a:p>
                       <a:pPr algn="ctr">
-                        <a:defRPr sz="1050" b="1">
+                        <a:defRPr sz="1100" b="1">
                           <a:solidFill>
                             <a:srgbClr val="FFFFFF"/>
                           </a:solidFill>
+                          <a:latin typeface="Segoe UI"/>
                         </a:defRPr>
                       </a:pPr>
                       <a:r>
@@ -9523,10 +9604,11 @@
                     <a:lstStyle/>
                     <a:p>
                       <a:pPr algn="ctr">
-                        <a:defRPr sz="1050" b="1">
+                        <a:defRPr sz="1100" b="1">
                           <a:solidFill>
                             <a:srgbClr val="FFFFFF"/>
                           </a:solidFill>
+                          <a:latin typeface="Segoe UI"/>
                         </a:defRPr>
                       </a:pPr>
                       <a:r>
@@ -9546,10 +9628,11 @@
                     <a:lstStyle/>
                     <a:p>
                       <a:pPr algn="ctr">
-                        <a:defRPr sz="1050" b="1">
+                        <a:defRPr sz="1100" b="1">
                           <a:solidFill>
                             <a:srgbClr val="FFFFFF"/>
                           </a:solidFill>
+                          <a:latin typeface="Segoe UI"/>
                         </a:defRPr>
                       </a:pPr>
                       <a:r>
@@ -9569,10 +9652,11 @@
                     <a:lstStyle/>
                     <a:p>
                       <a:pPr algn="ctr">
-                        <a:defRPr sz="1050" b="1">
+                        <a:defRPr sz="1100" b="1">
                           <a:solidFill>
                             <a:srgbClr val="FFFFFF"/>
                           </a:solidFill>
+                          <a:latin typeface="Segoe UI"/>
                         </a:defRPr>
                       </a:pPr>
                       <a:r>
@@ -9592,10 +9676,11 @@
                     <a:lstStyle/>
                     <a:p>
                       <a:pPr algn="ctr">
-                        <a:defRPr sz="1050" b="1">
+                        <a:defRPr sz="1100" b="1">
                           <a:solidFill>
                             <a:srgbClr val="FFFFFF"/>
                           </a:solidFill>
+                          <a:latin typeface="Segoe UI"/>
                         </a:defRPr>
                       </a:pPr>
                       <a:r>
@@ -9615,10 +9700,11 @@
                     <a:lstStyle/>
                     <a:p>
                       <a:pPr algn="ctr">
-                        <a:defRPr sz="1050" b="1">
+                        <a:defRPr sz="1100" b="1">
                           <a:solidFill>
                             <a:srgbClr val="FFFFFF"/>
                           </a:solidFill>
+                          <a:latin typeface="Segoe UI"/>
                         </a:defRPr>
                       </a:pPr>
                       <a:r>
@@ -9640,7 +9726,9 @@
                     <a:lstStyle/>
                     <a:p>
                       <a:pPr algn="l">
-                        <a:defRPr sz="1000" b="1"/>
+                        <a:defRPr sz="1100" b="1">
+                          <a:latin typeface="Segoe UI"/>
+                        </a:defRPr>
                       </a:pPr>
                       <a:r>
                         <a:t>Logistic Regression</a:t>
@@ -9659,7 +9747,9 @@
                     <a:lstStyle/>
                     <a:p>
                       <a:pPr algn="ctr">
-                        <a:defRPr sz="1000" b="0"/>
+                        <a:defRPr sz="1100" b="0">
+                          <a:latin typeface="Segoe UI"/>
+                        </a:defRPr>
                       </a:pPr>
                       <a:r>
                         <a:t>91.07%</a:t>
@@ -9678,7 +9768,9 @@
                     <a:lstStyle/>
                     <a:p>
                       <a:pPr algn="ctr">
-                        <a:defRPr sz="1000" b="0"/>
+                        <a:defRPr sz="1100" b="0">
+                          <a:latin typeface="Segoe UI"/>
+                        </a:defRPr>
                       </a:pPr>
                       <a:r>
                         <a:t>57.19%</a:t>
@@ -9697,7 +9789,9 @@
                     <a:lstStyle/>
                     <a:p>
                       <a:pPr algn="ctr">
-                        <a:defRPr sz="1000" b="0"/>
+                        <a:defRPr sz="1100" b="0">
+                          <a:latin typeface="Segoe UI"/>
+                        </a:defRPr>
                       </a:pPr>
                       <a:r>
                         <a:t>94.10%</a:t>
@@ -9716,7 +9810,9 @@
                     <a:lstStyle/>
                     <a:p>
                       <a:pPr algn="ctr">
-                        <a:defRPr sz="1000" b="0"/>
+                        <a:defRPr sz="1100" b="0">
+                          <a:latin typeface="Segoe UI"/>
+                        </a:defRPr>
                       </a:pPr>
                       <a:r>
                         <a:t>0.7115</a:t>
@@ -9735,7 +9831,9 @@
                     <a:lstStyle/>
                     <a:p>
                       <a:pPr algn="ctr">
-                        <a:defRPr sz="1000" b="0"/>
+                        <a:defRPr sz="1100" b="0">
+                          <a:latin typeface="Segoe UI"/>
+                        </a:defRPr>
                       </a:pPr>
                       <a:r>
                         <a:t>0.9816</a:t>
@@ -9754,7 +9852,9 @@
                     <a:lstStyle/>
                     <a:p>
                       <a:pPr algn="ctr">
-                        <a:defRPr sz="1000" b="0"/>
+                        <a:defRPr sz="1100" b="0">
+                          <a:latin typeface="Segoe UI"/>
+                        </a:defRPr>
                       </a:pPr>
                       <a:r>
                         <a:t>0.1885</a:t>
@@ -9775,7 +9875,9 @@
                     <a:lstStyle/>
                     <a:p>
                       <a:pPr algn="l">
-                        <a:defRPr sz="1000" b="1"/>
+                        <a:defRPr sz="1100" b="1">
+                          <a:latin typeface="Segoe UI"/>
+                        </a:defRPr>
                       </a:pPr>
                       <a:r>
                         <a:t>Decision Tree</a:t>
@@ -9794,7 +9896,9 @@
                     <a:lstStyle/>
                     <a:p>
                       <a:pPr algn="ctr">
-                        <a:defRPr sz="1000" b="0"/>
+                        <a:defRPr sz="1100" b="0">
+                          <a:latin typeface="Segoe UI"/>
+                        </a:defRPr>
                       </a:pPr>
                       <a:r>
                         <a:t>89.26%</a:t>
@@ -9813,7 +9917,9 @@
                     <a:lstStyle/>
                     <a:p>
                       <a:pPr algn="ctr">
-                        <a:defRPr sz="1000" b="0"/>
+                        <a:defRPr sz="1100" b="0">
+                          <a:latin typeface="Segoe UI"/>
+                        </a:defRPr>
                       </a:pPr>
                       <a:r>
                         <a:t>52.40%</a:t>
@@ -9832,7 +9938,9 @@
                     <a:lstStyle/>
                     <a:p>
                       <a:pPr algn="ctr">
-                        <a:defRPr sz="1000" b="0"/>
+                        <a:defRPr sz="1100" b="0">
+                          <a:latin typeface="Segoe UI"/>
+                        </a:defRPr>
                       </a:pPr>
                       <a:r>
                         <a:t>89.49%</a:t>
@@ -9851,7 +9959,9 @@
                     <a:lstStyle/>
                     <a:p>
                       <a:pPr algn="ctr">
-                        <a:defRPr sz="1000" b="0"/>
+                        <a:defRPr sz="1100" b="0">
+                          <a:latin typeface="Segoe UI"/>
+                        </a:defRPr>
                       </a:pPr>
                       <a:r>
                         <a:t>0.6610</a:t>
@@ -9870,7 +9980,9 @@
                     <a:lstStyle/>
                     <a:p>
                       <a:pPr algn="ctr">
-                        <a:defRPr sz="1000" b="0"/>
+                        <a:defRPr sz="1100" b="0">
+                          <a:latin typeface="Segoe UI"/>
+                        </a:defRPr>
                       </a:pPr>
                       <a:r>
                         <a:t>0.9342</a:t>
@@ -9889,7 +10001,9 @@
                     <a:lstStyle/>
                     <a:p>
                       <a:pPr algn="ctr">
-                        <a:defRPr sz="1000" b="0"/>
+                        <a:defRPr sz="1100" b="0">
+                          <a:latin typeface="Segoe UI"/>
+                        </a:defRPr>
                       </a:pPr>
                       <a:r>
                         <a:t>0.4943</a:t>
@@ -9910,7 +10024,9 @@
                     <a:lstStyle/>
                     <a:p>
                       <a:pPr algn="l">
-                        <a:defRPr sz="1000" b="1"/>
+                        <a:defRPr sz="1100" b="1">
+                          <a:latin typeface="Segoe UI"/>
+                        </a:defRPr>
                       </a:pPr>
                       <a:r>
                         <a:t>Random Forest</a:t>
@@ -9929,7 +10045,9 @@
                     <a:lstStyle/>
                     <a:p>
                       <a:pPr algn="ctr">
-                        <a:defRPr sz="1000" b="0"/>
+                        <a:defRPr sz="1100" b="0">
+                          <a:latin typeface="Segoe UI"/>
+                        </a:defRPr>
                       </a:pPr>
                       <a:r>
                         <a:t>95.79%</a:t>
@@ -9948,7 +10066,9 @@
                     <a:lstStyle/>
                     <a:p>
                       <a:pPr algn="ctr">
-                        <a:defRPr sz="1000" b="0"/>
+                        <a:defRPr sz="1100" b="0">
+                          <a:latin typeface="Segoe UI"/>
+                        </a:defRPr>
                       </a:pPr>
                       <a:r>
                         <a:t>76.13%</a:t>
@@ -9967,7 +10087,9 @@
                     <a:lstStyle/>
                     <a:p>
                       <a:pPr algn="ctr">
-                        <a:defRPr sz="1000" b="0"/>
+                        <a:defRPr sz="1100" b="0">
+                          <a:latin typeface="Segoe UI"/>
+                        </a:defRPr>
                       </a:pPr>
                       <a:r>
                         <a:t>93.25%</a:t>
@@ -9986,7 +10108,9 @@
                     <a:lstStyle/>
                     <a:p>
                       <a:pPr algn="ctr">
-                        <a:defRPr sz="1000" b="0"/>
+                        <a:defRPr sz="1100" b="0">
+                          <a:latin typeface="Segoe UI"/>
+                        </a:defRPr>
                       </a:pPr>
                       <a:r>
                         <a:t>0.8383</a:t>
@@ -10005,7 +10129,9 @@
                     <a:lstStyle/>
                     <a:p>
                       <a:pPr algn="ctr">
-                        <a:defRPr sz="1000" b="0"/>
+                        <a:defRPr sz="1100" b="0">
+                          <a:latin typeface="Segoe UI"/>
+                        </a:defRPr>
                       </a:pPr>
                       <a:r>
                         <a:t>0.9910</a:t>
@@ -10024,7 +10150,9 @@
                     <a:lstStyle/>
                     <a:p>
                       <a:pPr algn="ctr">
-                        <a:defRPr sz="1000" b="0"/>
+                        <a:defRPr sz="1100" b="0">
+                          <a:latin typeface="Segoe UI"/>
+                        </a:defRPr>
                       </a:pPr>
                       <a:r>
                         <a:t>0.1832</a:t>
@@ -10045,7 +10173,9 @@
                     <a:lstStyle/>
                     <a:p>
                       <a:pPr algn="l">
-                        <a:defRPr sz="1000" b="1"/>
+                        <a:defRPr sz="1100" b="1">
+                          <a:latin typeface="Segoe UI"/>
+                        </a:defRPr>
                       </a:pPr>
                       <a:r>
                         <a:t>Gradient Boosting</a:t>
@@ -10064,10 +10194,11 @@
                     <a:lstStyle/>
                     <a:p>
                       <a:pPr algn="ctr">
-                        <a:defRPr sz="1000" b="1">
+                        <a:defRPr sz="1100" b="1">
                           <a:solidFill>
                             <a:srgbClr val="10B981"/>
                           </a:solidFill>
+                          <a:latin typeface="Segoe UI"/>
                         </a:defRPr>
                       </a:pPr>
                       <a:r>
@@ -10087,10 +10218,11 @@
                     <a:lstStyle/>
                     <a:p>
                       <a:pPr algn="ctr">
-                        <a:defRPr sz="1000" b="1">
+                        <a:defRPr sz="1100" b="1">
                           <a:solidFill>
                             <a:srgbClr val="10B981"/>
                           </a:solidFill>
+                          <a:latin typeface="Segoe UI"/>
                         </a:defRPr>
                       </a:pPr>
                       <a:r>
@@ -10110,7 +10242,9 @@
                     <a:lstStyle/>
                     <a:p>
                       <a:pPr algn="ctr">
-                        <a:defRPr sz="1000" b="1"/>
+                        <a:defRPr sz="1100" b="1">
+                          <a:latin typeface="Segoe UI"/>
+                        </a:defRPr>
                       </a:pPr>
                       <a:r>
                         <a:t>83.25%</a:t>
@@ -10129,10 +10263,11 @@
                     <a:lstStyle/>
                     <a:p>
                       <a:pPr algn="ctr">
-                        <a:defRPr sz="1000" b="1">
+                        <a:defRPr sz="1100" b="1">
                           <a:solidFill>
                             <a:srgbClr val="10B981"/>
                           </a:solidFill>
+                          <a:latin typeface="Segoe UI"/>
                         </a:defRPr>
                       </a:pPr>
                       <a:r>
@@ -10152,10 +10287,11 @@
                     <a:lstStyle/>
                     <a:p>
                       <a:pPr algn="ctr">
-                        <a:defRPr sz="1000" b="1">
+                        <a:defRPr sz="1100" b="1">
                           <a:solidFill>
                             <a:srgbClr val="10B981"/>
                           </a:solidFill>
+                          <a:latin typeface="Segoe UI"/>
                         </a:defRPr>
                       </a:pPr>
                       <a:r>
@@ -10175,7 +10311,9 @@
                     <a:lstStyle/>
                     <a:p>
                       <a:pPr algn="ctr">
-                        <a:defRPr sz="1000" b="1"/>
+                        <a:defRPr sz="1100" b="1">
+                          <a:latin typeface="Segoe UI"/>
+                        </a:defRPr>
                       </a:pPr>
                       <a:r>
                         <a:t>0.0622</a:t>
@@ -10201,8 +10339,8 @@
         </p:nvSpPr>
         <p:spPr>
           <a:xfrm>
-            <a:off x="5303520" y="5303520"/>
-            <a:ext cx="6156655" cy="1051560"/>
+            <a:off x="5303520" y="5257800"/>
+            <a:ext cx="6156655" cy="1143000"/>
           </a:xfrm>
           <a:prstGeom prst="roundRect">
             <a:avLst/>
@@ -10246,8 +10384,8 @@
         </p:nvSpPr>
         <p:spPr>
           <a:xfrm>
-            <a:off x="5440680" y="5349240"/>
-            <a:ext cx="5882335" cy="960120"/>
+            <a:off x="5440680" y="5321808"/>
+            <a:ext cx="5882335" cy="1005840"/>
           </a:xfrm>
           <a:prstGeom prst="rect">
             <a:avLst/>
@@ -10264,10 +10402,11 @@
               <a:spcAft>
                 <a:spcPts val="200"/>
               </a:spcAft>
-              <a:defRPr sz="1100" b="1">
+              <a:defRPr sz="1200" b="1">
                 <a:solidFill>
                   <a:srgbClr val="2563EB"/>
                 </a:solidFill>
+                <a:latin typeface="Segoe UI"/>
               </a:defRPr>
             </a:pPr>
             <a:r>
@@ -10276,10 +10415,11 @@
           </a:p>
           <a:p>
             <a:pPr>
-              <a:defRPr sz="1000">
+              <a:defRPr sz="1100">
                 <a:solidFill>
                   <a:srgbClr val="334155"/>
                 </a:solidFill>
+                <a:latin typeface="Segoe UI"/>
               </a:defRPr>
             </a:pPr>
             <a:r>
@@ -10369,8 +10509,8 @@
         </p:nvSpPr>
         <p:spPr>
           <a:xfrm>
-            <a:off x="731520" y="256032"/>
-            <a:ext cx="10698480" cy="256032"/>
+            <a:off x="731520" y="237744"/>
+            <a:ext cx="10698480" cy="237744"/>
           </a:xfrm>
           <a:prstGeom prst="rect">
             <a:avLst/>
@@ -10388,6 +10528,7 @@
                 <a:solidFill>
                   <a:srgbClr val="2563EB"/>
                 </a:solidFill>
+                <a:latin typeface="Segoe UI"/>
               </a:defRPr>
             </a:pPr>
             <a:r>
@@ -10404,8 +10545,8 @@
         </p:nvSpPr>
         <p:spPr>
           <a:xfrm>
-            <a:off x="731520" y="502920"/>
-            <a:ext cx="10698480" cy="548640"/>
+            <a:off x="731520" y="475488"/>
+            <a:ext cx="10698480" cy="502920"/>
           </a:xfrm>
           <a:prstGeom prst="rect">
             <a:avLst/>
@@ -10419,10 +10560,11 @@
           <a:lstStyle/>
           <a:p>
             <a:pPr>
-              <a:defRPr sz="2100" b="1">
+              <a:defRPr sz="2000" b="1">
                 <a:solidFill>
                   <a:srgbClr val="0F172A"/>
                 </a:solidFill>
+                <a:latin typeface="Segoe UI"/>
               </a:defRPr>
             </a:pPr>
             <a:r>
@@ -10439,7 +10581,7 @@
         </p:nvSpPr>
         <p:spPr>
           <a:xfrm>
-            <a:off x="731520" y="1234440"/>
+            <a:off x="731520" y="1188720"/>
             <a:ext cx="5212080" cy="4114800"/>
           </a:xfrm>
           <a:prstGeom prst="roundRect">
@@ -10492,7 +10634,7 @@
         </p:blipFill>
         <p:spPr>
           <a:xfrm>
-            <a:off x="822960" y="1325880"/>
+            <a:off x="822960" y="1280160"/>
             <a:ext cx="5029200" cy="4023360"/>
           </a:xfrm>
           <a:prstGeom prst="rect">
@@ -10508,7 +10650,7 @@
         </p:nvSpPr>
         <p:spPr>
           <a:xfrm>
-            <a:off x="6217920" y="1234440"/>
+            <a:off x="6217920" y="1188720"/>
             <a:ext cx="5242255" cy="4114800"/>
           </a:xfrm>
           <a:prstGeom prst="roundRect">
@@ -10561,7 +10703,7 @@
         </p:blipFill>
         <p:spPr>
           <a:xfrm>
-            <a:off x="6309360" y="1325880"/>
+            <a:off x="6309360" y="1280160"/>
             <a:ext cx="5029200" cy="3771900"/>
           </a:xfrm>
           <a:prstGeom prst="rect">
@@ -10577,8 +10719,8 @@
         </p:nvSpPr>
         <p:spPr>
           <a:xfrm>
-            <a:off x="731520" y="5486400"/>
-            <a:ext cx="10728655" cy="914400"/>
+            <a:off x="731520" y="5440680"/>
+            <a:ext cx="10728655" cy="1005840"/>
           </a:xfrm>
           <a:prstGeom prst="roundRect">
             <a:avLst/>
@@ -10622,8 +10764,8 @@
         </p:nvSpPr>
         <p:spPr>
           <a:xfrm>
-            <a:off x="914400" y="5532120"/>
-            <a:ext cx="10362895" cy="822960"/>
+            <a:off x="914400" y="5504688"/>
+            <a:ext cx="10362895" cy="868680"/>
           </a:xfrm>
           <a:prstGeom prst="rect">
             <a:avLst/>
@@ -10640,10 +10782,11 @@
               <a:spcAft>
                 <a:spcPts val="200"/>
               </a:spcAft>
-              <a:defRPr sz="1100" b="1">
+              <a:defRPr sz="1200" b="1">
                 <a:solidFill>
                   <a:srgbClr val="0F172A"/>
                 </a:solidFill>
+                <a:latin typeface="Segoe UI"/>
               </a:defRPr>
             </a:pPr>
             <a:r>
@@ -10652,10 +10795,11 @@
           </a:p>
           <a:p>
             <a:pPr>
-              <a:defRPr sz="1000">
+              <a:defRPr sz="1100">
                 <a:solidFill>
                   <a:srgbClr val="334155"/>
                 </a:solidFill>
+                <a:latin typeface="Segoe UI"/>
               </a:defRPr>
             </a:pPr>
             <a:r>
@@ -10745,8 +10889,8 @@
         </p:nvSpPr>
         <p:spPr>
           <a:xfrm>
-            <a:off x="731520" y="256032"/>
-            <a:ext cx="10698480" cy="256032"/>
+            <a:off x="731520" y="237744"/>
+            <a:ext cx="10698480" cy="237744"/>
           </a:xfrm>
           <a:prstGeom prst="rect">
             <a:avLst/>
@@ -10764,6 +10908,7 @@
                 <a:solidFill>
                   <a:srgbClr val="2563EB"/>
                 </a:solidFill>
+                <a:latin typeface="Segoe UI"/>
               </a:defRPr>
             </a:pPr>
             <a:r>
@@ -10780,8 +10925,8 @@
         </p:nvSpPr>
         <p:spPr>
           <a:xfrm>
-            <a:off x="731520" y="502920"/>
-            <a:ext cx="10698480" cy="548640"/>
+            <a:off x="731520" y="475488"/>
+            <a:ext cx="10698480" cy="502920"/>
           </a:xfrm>
           <a:prstGeom prst="rect">
             <a:avLst/>
@@ -10795,10 +10940,11 @@
           <a:lstStyle/>
           <a:p>
             <a:pPr>
-              <a:defRPr sz="2100" b="1">
+              <a:defRPr sz="2000" b="1">
                 <a:solidFill>
                   <a:srgbClr val="0F172A"/>
                 </a:solidFill>
+                <a:latin typeface="Segoe UI"/>
               </a:defRPr>
             </a:pPr>
             <a:r>
@@ -10815,8 +10961,8 @@
         </p:nvSpPr>
         <p:spPr>
           <a:xfrm>
-            <a:off x="731520" y="1234440"/>
-            <a:ext cx="5212080" cy="2468880"/>
+            <a:off x="731520" y="1188720"/>
+            <a:ext cx="5212080" cy="2514600"/>
           </a:xfrm>
           <a:prstGeom prst="roundRect">
             <a:avLst/>
@@ -10860,8 +11006,8 @@
         </p:nvSpPr>
         <p:spPr>
           <a:xfrm>
-            <a:off x="914400" y="1371600"/>
-            <a:ext cx="4846320" cy="2194560"/>
+            <a:off x="914400" y="1325880"/>
+            <a:ext cx="4846320" cy="2240280"/>
           </a:xfrm>
           <a:prstGeom prst="rect">
             <a:avLst/>
@@ -10876,57 +11022,61 @@
           <a:p>
             <a:pPr>
               <a:spcAft>
+                <a:spcPts val="800"/>
+              </a:spcAft>
+              <a:defRPr sz="1300" b="1">
+                <a:solidFill>
+                  <a:srgbClr val="2563EB"/>
+                </a:solidFill>
+                <a:latin typeface="Segoe UI"/>
+              </a:defRPr>
+            </a:pPr>
+            <a:r>
+              <a:t>1. WHY We Used It (Problem Statement)</a:t>
+            </a:r>
+          </a:p>
+          <a:p>
+            <a:pPr>
+              <a:spcAft>
                 <a:spcPts val="600"/>
               </a:spcAft>
-              <a:defRPr sz="1200" b="1">
-                <a:solidFill>
-                  <a:srgbClr val="2563EB"/>
-                </a:solidFill>
-              </a:defRPr>
-            </a:pPr>
-            <a:r>
-              <a:t>1. WHY We Used It (The Problem / Need)</a:t>
+              <a:defRPr sz="1200">
+                <a:solidFill>
+                  <a:srgbClr val="334155"/>
+                </a:solidFill>
+                <a:latin typeface="Segoe UI"/>
+              </a:defRPr>
+            </a:pPr>
+            <a:r>
+              <a:t>• Credit risk is not a flat binary outcome; borrowers have diverse financial archetypes.</a:t>
             </a:r>
           </a:p>
           <a:p>
             <a:pPr>
               <a:spcAft>
-                <a:spcPts val="400"/>
+                <a:spcPts val="600"/>
               </a:spcAft>
-              <a:defRPr sz="1000">
+              <a:defRPr sz="1200">
                 <a:solidFill>
                   <a:srgbClr val="334155"/>
                 </a:solidFill>
-              </a:defRPr>
-            </a:pPr>
-            <a:r>
-              <a:t>• Credit risk is not a flat binary outcome; borrowers have diverse financial archetypes.</a:t>
+                <a:latin typeface="Segoe UI"/>
+              </a:defRPr>
+            </a:pPr>
+            <a:r>
+              <a:t>• Lenders need to discover natural customer segments without relying on past default labels.</a:t>
             </a:r>
           </a:p>
           <a:p>
             <a:pPr>
               <a:spcAft>
-                <a:spcPts val="400"/>
+                <a:spcPts val="600"/>
               </a:spcAft>
-              <a:defRPr sz="1000">
+              <a:defRPr sz="1200">
                 <a:solidFill>
                   <a:srgbClr val="334155"/>
                 </a:solidFill>
-              </a:defRPr>
-            </a:pPr>
-            <a:r>
-              <a:t>• Lenders need to discover natural customer segments without relying on past default labels.</a:t>
-            </a:r>
-          </a:p>
-          <a:p>
-            <a:pPr>
-              <a:spcAft>
-                <a:spcPts val="400"/>
-              </a:spcAft>
-              <a:defRPr sz="1000">
-                <a:solidFill>
-                  <a:srgbClr val="334155"/>
-                </a:solidFill>
+                <a:latin typeface="Segoe UI"/>
               </a:defRPr>
             </a:pPr>
             <a:r>
@@ -10943,8 +11093,8 @@
         </p:nvSpPr>
         <p:spPr>
           <a:xfrm>
-            <a:off x="6217920" y="1234440"/>
-            <a:ext cx="5242255" cy="2468880"/>
+            <a:off x="6217920" y="1188720"/>
+            <a:ext cx="5242255" cy="2514600"/>
           </a:xfrm>
           <a:prstGeom prst="roundRect">
             <a:avLst/>
@@ -10988,8 +11138,8 @@
         </p:nvSpPr>
         <p:spPr>
           <a:xfrm>
-            <a:off x="6400800" y="1371600"/>
-            <a:ext cx="4876495" cy="2194560"/>
+            <a:off x="6400800" y="1325880"/>
+            <a:ext cx="4876495" cy="2240280"/>
           </a:xfrm>
           <a:prstGeom prst="rect">
             <a:avLst/>
@@ -11004,57 +11154,61 @@
           <a:p>
             <a:pPr>
               <a:spcAft>
+                <a:spcPts val="800"/>
+              </a:spcAft>
+              <a:defRPr sz="1300" b="1">
+                <a:solidFill>
+                  <a:srgbClr val="10B981"/>
+                </a:solidFill>
+                <a:latin typeface="Segoe UI"/>
+              </a:defRPr>
+            </a:pPr>
+            <a:r>
+              <a:t>2. HOW We Used It (Pipeline &amp; Methods)</a:t>
+            </a:r>
+          </a:p>
+          <a:p>
+            <a:pPr>
+              <a:spcAft>
                 <a:spcPts val="600"/>
               </a:spcAft>
-              <a:defRPr sz="1200" b="1">
-                <a:solidFill>
-                  <a:srgbClr val="10B981"/>
-                </a:solidFill>
-              </a:defRPr>
-            </a:pPr>
-            <a:r>
-              <a:t>2. HOW We Used It (Methodology &amp; Pipeline)</a:t>
+              <a:defRPr sz="1200">
+                <a:solidFill>
+                  <a:srgbClr val="334155"/>
+                </a:solidFill>
+                <a:latin typeface="Segoe UI"/>
+              </a:defRPr>
+            </a:pPr>
+            <a:r>
+              <a:t>• Standardized 5 core numerical features: Income, CreditScore, LoanAmount, DTIRatio, MonthsEmployed.</a:t>
             </a:r>
           </a:p>
           <a:p>
             <a:pPr>
               <a:spcAft>
-                <a:spcPts val="400"/>
+                <a:spcPts val="600"/>
               </a:spcAft>
-              <a:defRPr sz="1000">
+              <a:defRPr sz="1200">
                 <a:solidFill>
                   <a:srgbClr val="334155"/>
                 </a:solidFill>
-              </a:defRPr>
-            </a:pPr>
-            <a:r>
-              <a:t>• Standardized 5 core numerical features: Income, CreditScore, LoanAmount, DTIRatio, MonthsEmployed.</a:t>
+                <a:latin typeface="Segoe UI"/>
+              </a:defRPr>
+            </a:pPr>
+            <a:r>
+              <a:t>• Trained K-Means clustering across K=2 to 6, evaluating within-cluster inertia and Silhouette scores.</a:t>
             </a:r>
           </a:p>
           <a:p>
             <a:pPr>
               <a:spcAft>
-                <a:spcPts val="400"/>
+                <a:spcPts val="600"/>
               </a:spcAft>
-              <a:defRPr sz="1000">
+              <a:defRPr sz="1200">
                 <a:solidFill>
                   <a:srgbClr val="334155"/>
                 </a:solidFill>
-              </a:defRPr>
-            </a:pPr>
-            <a:r>
-              <a:t>• Trained K-Means clustering across K=2 to 6, evaluating within-cluster inertia and Silhouette scores.</a:t>
-            </a:r>
-          </a:p>
-          <a:p>
-            <a:pPr>
-              <a:spcAft>
-                <a:spcPts val="400"/>
-              </a:spcAft>
-              <a:defRPr sz="1000">
-                <a:solidFill>
-                  <a:srgbClr val="334155"/>
-                </a:solidFill>
+                <a:latin typeface="Segoe UI"/>
               </a:defRPr>
             </a:pPr>
             <a:r>
@@ -11132,57 +11286,61 @@
           <a:p>
             <a:pPr>
               <a:spcAft>
+                <a:spcPts val="800"/>
+              </a:spcAft>
+              <a:defRPr sz="1300" b="1">
+                <a:solidFill>
+                  <a:srgbClr val="CA8A04"/>
+                </a:solidFill>
+                <a:latin typeface="Segoe UI"/>
+              </a:defRPr>
+            </a:pPr>
+            <a:r>
+              <a:t>3. WHAT It Does in Our Project (System Role)</a:t>
+            </a:r>
+          </a:p>
+          <a:p>
+            <a:pPr>
+              <a:spcAft>
                 <a:spcPts val="600"/>
               </a:spcAft>
-              <a:defRPr sz="1200" b="1">
-                <a:solidFill>
-                  <a:srgbClr val="CA8A04"/>
-                </a:solidFill>
-              </a:defRPr>
-            </a:pPr>
-            <a:r>
-              <a:t>3. WHAT It Does in Our Project (System Role)</a:t>
+              <a:defRPr sz="1200">
+                <a:solidFill>
+                  <a:srgbClr val="334155"/>
+                </a:solidFill>
+                <a:latin typeface="Segoe UI"/>
+              </a:defRPr>
+            </a:pPr>
+            <a:r>
+              <a:t>• Groups 50,000 borrowers into 3 natural, interpretable risk profiles (Prime, Standard, Vulnerable).</a:t>
             </a:r>
           </a:p>
           <a:p>
             <a:pPr>
               <a:spcAft>
-                <a:spcPts val="400"/>
+                <a:spcPts val="600"/>
               </a:spcAft>
-              <a:defRPr sz="1000">
+              <a:defRPr sz="1200">
                 <a:solidFill>
                   <a:srgbClr val="334155"/>
                 </a:solidFill>
-              </a:defRPr>
-            </a:pPr>
-            <a:r>
-              <a:t>• Groups 50,000 borrowers into 3 natural, interpretable risk profiles (Prime, Standard, Vulnerable).</a:t>
+                <a:latin typeface="Segoe UI"/>
+              </a:defRPr>
+            </a:pPr>
+            <a:r>
+              <a:t>• Discovers that default rates differ by over 5x between clusters (3.93% vs. 20.36%) without using default labels during training.</a:t>
             </a:r>
           </a:p>
           <a:p>
             <a:pPr>
               <a:spcAft>
-                <a:spcPts val="400"/>
+                <a:spcPts val="600"/>
               </a:spcAft>
-              <a:defRPr sz="1000">
+              <a:defRPr sz="1200">
                 <a:solidFill>
                   <a:srgbClr val="334155"/>
                 </a:solidFill>
-              </a:defRPr>
-            </a:pPr>
-            <a:r>
-              <a:t>• Discovers that default rates differ by over 5x between clusters (3.93% vs. 20.36%) without using default labels during training.</a:t>
-            </a:r>
-          </a:p>
-          <a:p>
-            <a:pPr>
-              <a:spcAft>
-                <a:spcPts val="400"/>
-              </a:spcAft>
-              <a:defRPr sz="1000">
-                <a:solidFill>
-                  <a:srgbClr val="334155"/>
-                </a:solidFill>
+                <a:latin typeface="Segoe UI"/>
               </a:defRPr>
             </a:pPr>
             <a:r>
@@ -11260,57 +11418,61 @@
           <a:p>
             <a:pPr>
               <a:spcAft>
+                <a:spcPts val="800"/>
+              </a:spcAft>
+              <a:defRPr sz="1300" b="1">
+                <a:solidFill>
+                  <a:srgbClr val="9333EA"/>
+                </a:solidFill>
+                <a:latin typeface="Segoe UI"/>
+              </a:defRPr>
+            </a:pPr>
+            <a:r>
+              <a:t>4. PRACTICAL USE (Underwriting &amp; Business Value)</a:t>
+            </a:r>
+          </a:p>
+          <a:p>
+            <a:pPr>
+              <a:spcAft>
                 <a:spcPts val="600"/>
               </a:spcAft>
-              <a:defRPr sz="1200" b="1">
-                <a:solidFill>
-                  <a:srgbClr val="9333EA"/>
-                </a:solidFill>
-              </a:defRPr>
-            </a:pPr>
-            <a:r>
-              <a:t>4. PRACTICAL USE (Underwriting &amp; Business Value)</a:t>
+              <a:defRPr sz="1200">
+                <a:solidFill>
+                  <a:srgbClr val="334155"/>
+                </a:solidFill>
+                <a:latin typeface="Segoe UI"/>
+              </a:defRPr>
+            </a:pPr>
+            <a:r>
+              <a:t>• Risk-Based Portfolio Pricing: Sets tailored interest rates and borrowing limits per tier.</a:t>
             </a:r>
           </a:p>
           <a:p>
             <a:pPr>
               <a:spcAft>
-                <a:spcPts val="400"/>
+                <a:spcPts val="600"/>
               </a:spcAft>
-              <a:defRPr sz="1000">
+              <a:defRPr sz="1200">
                 <a:solidFill>
                   <a:srgbClr val="334155"/>
                 </a:solidFill>
-              </a:defRPr>
-            </a:pPr>
-            <a:r>
-              <a:t>• Risk-Based Portfolio Pricing: Sets tailored interest rates and borrowing limits per tier.</a:t>
+                <a:latin typeface="Segoe UI"/>
+              </a:defRPr>
+            </a:pPr>
+            <a:r>
+              <a:t>• Proactive Portfolio Monitoring: Targets vulnerable cohorts with financial counseling before defaults trigger.</a:t>
             </a:r>
           </a:p>
           <a:p>
             <a:pPr>
               <a:spcAft>
-                <a:spcPts val="400"/>
+                <a:spcPts val="600"/>
               </a:spcAft>
-              <a:defRPr sz="1000">
+              <a:defRPr sz="1200">
                 <a:solidFill>
                   <a:srgbClr val="334155"/>
                 </a:solidFill>
-              </a:defRPr>
-            </a:pPr>
-            <a:r>
-              <a:t>• Proactive Portfolio Monitoring: Targets vulnerable cohorts with financial counseling before defaults trigger.</a:t>
-            </a:r>
-          </a:p>
-          <a:p>
-            <a:pPr>
-              <a:spcAft>
-                <a:spcPts val="400"/>
-              </a:spcAft>
-              <a:defRPr sz="1000">
-                <a:solidFill>
-                  <a:srgbClr val="334155"/>
-                </a:solidFill>
+                <a:latin typeface="Segoe UI"/>
               </a:defRPr>
             </a:pPr>
             <a:r>
@@ -11396,8 +11558,8 @@
         </p:nvSpPr>
         <p:spPr>
           <a:xfrm>
-            <a:off x="731520" y="256032"/>
-            <a:ext cx="10698480" cy="256032"/>
+            <a:off x="731520" y="237744"/>
+            <a:ext cx="10698480" cy="237744"/>
           </a:xfrm>
           <a:prstGeom prst="rect">
             <a:avLst/>
@@ -11415,6 +11577,7 @@
                 <a:solidFill>
                   <a:srgbClr val="2563EB"/>
                 </a:solidFill>
+                <a:latin typeface="Segoe UI"/>
               </a:defRPr>
             </a:pPr>
             <a:r>
@@ -11431,8 +11594,8 @@
         </p:nvSpPr>
         <p:spPr>
           <a:xfrm>
-            <a:off x="731520" y="502920"/>
-            <a:ext cx="10698480" cy="548640"/>
+            <a:off x="731520" y="475488"/>
+            <a:ext cx="10698480" cy="502920"/>
           </a:xfrm>
           <a:prstGeom prst="rect">
             <a:avLst/>
@@ -11446,10 +11609,11 @@
           <a:lstStyle/>
           <a:p>
             <a:pPr>
-              <a:defRPr sz="2100" b="1">
+              <a:defRPr sz="2000" b="1">
                 <a:solidFill>
                   <a:srgbClr val="0F172A"/>
                 </a:solidFill>
+                <a:latin typeface="Segoe UI"/>
               </a:defRPr>
             </a:pPr>
             <a:r>
@@ -11466,8 +11630,8 @@
         </p:nvSpPr>
         <p:spPr>
           <a:xfrm>
-            <a:off x="731520" y="1234440"/>
-            <a:ext cx="4389120" cy="5120640"/>
+            <a:off x="731520" y="1188720"/>
+            <a:ext cx="4389120" cy="5212080"/>
           </a:xfrm>
           <a:prstGeom prst="roundRect">
             <a:avLst/>
@@ -11511,8 +11675,8 @@
         </p:nvSpPr>
         <p:spPr>
           <a:xfrm>
-            <a:off x="914400" y="1344168"/>
-            <a:ext cx="4023360" cy="274320"/>
+            <a:off x="914400" y="1298448"/>
+            <a:ext cx="4023360" cy="256032"/>
           </a:xfrm>
           <a:prstGeom prst="rect">
             <a:avLst/>
@@ -11526,10 +11690,11 @@
           <a:lstStyle/>
           <a:p>
             <a:pPr>
-              <a:defRPr sz="950" b="1">
+              <a:defRPr sz="1000" b="1">
                 <a:solidFill>
                   <a:srgbClr val="10B981"/>
                 </a:solidFill>
+                <a:latin typeface="Consolas"/>
               </a:defRPr>
             </a:pPr>
             <a:r>
@@ -11546,8 +11711,8 @@
         </p:nvSpPr>
         <p:spPr>
           <a:xfrm>
-            <a:off x="914400" y="1645920"/>
-            <a:ext cx="4023360" cy="4617720"/>
+            <a:off x="914400" y="1572768"/>
+            <a:ext cx="4023360" cy="4736592"/>
           </a:xfrm>
           <a:prstGeom prst="rect">
             <a:avLst/>
@@ -11561,7 +11726,7 @@
           <a:lstStyle/>
           <a:p>
             <a:pPr>
-              <a:defRPr sz="850">
+              <a:defRPr sz="900">
                 <a:solidFill>
                   <a:srgbClr val="94A3B8"/>
                 </a:solidFill>
@@ -11574,7 +11739,7 @@
           </a:p>
           <a:p>
             <a:pPr>
-              <a:defRPr sz="850">
+              <a:defRPr sz="900">
                 <a:solidFill>
                   <a:srgbClr val="93C5FD"/>
                 </a:solidFill>
@@ -11587,7 +11752,7 @@
           </a:p>
           <a:p>
             <a:pPr>
-              <a:defRPr sz="850">
+              <a:defRPr sz="900">
                 <a:solidFill>
                   <a:srgbClr val="93C5FD"/>
                 </a:solidFill>
@@ -11600,7 +11765,7 @@
           </a:p>
           <a:p>
             <a:pPr>
-              <a:defRPr sz="850">
+              <a:defRPr sz="900">
                 <a:solidFill>
                   <a:srgbClr val="F1F5F9"/>
                 </a:solidFill>
@@ -11610,7 +11775,7 @@
           </a:p>
           <a:p>
             <a:pPr>
-              <a:defRPr sz="850">
+              <a:defRPr sz="900">
                 <a:solidFill>
                   <a:srgbClr val="F1F5F9"/>
                 </a:solidFill>
@@ -11623,7 +11788,7 @@
           </a:p>
           <a:p>
             <a:pPr>
-              <a:defRPr sz="850">
+              <a:defRPr sz="900">
                 <a:solidFill>
                   <a:srgbClr val="F1F5F9"/>
                 </a:solidFill>
@@ -11636,7 +11801,7 @@
           </a:p>
           <a:p>
             <a:pPr>
-              <a:defRPr sz="850">
+              <a:defRPr sz="900">
                 <a:solidFill>
                   <a:srgbClr val="6EE7B7"/>
                 </a:solidFill>
@@ -11649,7 +11814,7 @@
           </a:p>
           <a:p>
             <a:pPr>
-              <a:defRPr sz="850">
+              <a:defRPr sz="900">
                 <a:solidFill>
                   <a:srgbClr val="F1F5F9"/>
                 </a:solidFill>
@@ -11659,7 +11824,7 @@
           </a:p>
           <a:p>
             <a:pPr>
-              <a:defRPr sz="850">
+              <a:defRPr sz="900">
                 <a:solidFill>
                   <a:srgbClr val="94A3B8"/>
                 </a:solidFill>
@@ -11672,7 +11837,7 @@
           </a:p>
           <a:p>
             <a:pPr>
-              <a:defRPr sz="850">
+              <a:defRPr sz="900">
                 <a:solidFill>
                   <a:srgbClr val="93C5FD"/>
                 </a:solidFill>
@@ -11685,7 +11850,7 @@
           </a:p>
           <a:p>
             <a:pPr>
-              <a:defRPr sz="850">
+              <a:defRPr sz="900">
                 <a:solidFill>
                   <a:srgbClr val="6EE7B7"/>
                 </a:solidFill>
@@ -11698,7 +11863,7 @@
           </a:p>
           <a:p>
             <a:pPr>
-              <a:defRPr sz="850">
+              <a:defRPr sz="900">
                 <a:solidFill>
                   <a:srgbClr val="F1F5F9"/>
                 </a:solidFill>
@@ -11711,7 +11876,7 @@
           </a:p>
           <a:p>
             <a:pPr>
-              <a:defRPr sz="850">
+              <a:defRPr sz="900">
                 <a:solidFill>
                   <a:srgbClr val="F1F5F9"/>
                 </a:solidFill>
@@ -11724,7 +11889,7 @@
           </a:p>
           <a:p>
             <a:pPr>
-              <a:defRPr sz="850">
+              <a:defRPr sz="900">
                 <a:solidFill>
                   <a:srgbClr val="F1F5F9"/>
                 </a:solidFill>
@@ -11737,7 +11902,7 @@
           </a:p>
           <a:p>
             <a:pPr>
-              <a:defRPr sz="850">
+              <a:defRPr sz="900">
                 <a:solidFill>
                   <a:srgbClr val="F1F5F9"/>
                 </a:solidFill>
@@ -11747,7 +11912,7 @@
           </a:p>
           <a:p>
             <a:pPr>
-              <a:defRPr sz="850">
+              <a:defRPr sz="900">
                 <a:solidFill>
                   <a:srgbClr val="94A3B8"/>
                 </a:solidFill>
@@ -11760,7 +11925,7 @@
           </a:p>
           <a:p>
             <a:pPr>
-              <a:defRPr sz="850">
+              <a:defRPr sz="900">
                 <a:solidFill>
                   <a:srgbClr val="6EE7B7"/>
                 </a:solidFill>
@@ -11781,7 +11946,7 @@
         </p:nvSpPr>
         <p:spPr>
           <a:xfrm>
-            <a:off x="5303520" y="1234440"/>
+            <a:off x="5303520" y="1188720"/>
             <a:ext cx="6156655" cy="3931920"/>
           </a:xfrm>
           <a:prstGeom prst="roundRect">
@@ -11834,7 +11999,7 @@
         </p:blipFill>
         <p:spPr>
           <a:xfrm>
-            <a:off x="5394960" y="1325880"/>
+            <a:off x="5394960" y="1280160"/>
             <a:ext cx="5943600" cy="2228850"/>
           </a:xfrm>
           <a:prstGeom prst="rect">
@@ -11850,8 +12015,8 @@
         </p:nvSpPr>
         <p:spPr>
           <a:xfrm>
-            <a:off x="5303520" y="5303520"/>
-            <a:ext cx="6156655" cy="1051560"/>
+            <a:off x="5303520" y="5257800"/>
+            <a:ext cx="6156655" cy="1143000"/>
           </a:xfrm>
           <a:prstGeom prst="roundRect">
             <a:avLst/>
@@ -11895,8 +12060,8 @@
         </p:nvSpPr>
         <p:spPr>
           <a:xfrm>
-            <a:off x="5440680" y="5349240"/>
-            <a:ext cx="5882335" cy="960120"/>
+            <a:off x="5440680" y="5321808"/>
+            <a:ext cx="5882335" cy="1005840"/>
           </a:xfrm>
           <a:prstGeom prst="rect">
             <a:avLst/>
@@ -11913,10 +12078,11 @@
               <a:spcAft>
                 <a:spcPts val="200"/>
               </a:spcAft>
-              <a:defRPr sz="1100" b="1">
+              <a:defRPr sz="1200" b="1">
                 <a:solidFill>
                   <a:srgbClr val="10B981"/>
                 </a:solidFill>
+                <a:latin typeface="Segoe UI"/>
               </a:defRPr>
             </a:pPr>
             <a:r>
@@ -11925,10 +12091,11 @@
           </a:p>
           <a:p>
             <a:pPr>
-              <a:defRPr sz="1000">
+              <a:defRPr sz="1100">
                 <a:solidFill>
                   <a:srgbClr val="334155"/>
                 </a:solidFill>
+                <a:latin typeface="Segoe UI"/>
               </a:defRPr>
             </a:pPr>
             <a:r>
@@ -12018,8 +12185,8 @@
         </p:nvSpPr>
         <p:spPr>
           <a:xfrm>
-            <a:off x="731520" y="256032"/>
-            <a:ext cx="10698480" cy="256032"/>
+            <a:off x="731520" y="237744"/>
+            <a:ext cx="10698480" cy="237744"/>
           </a:xfrm>
           <a:prstGeom prst="rect">
             <a:avLst/>
@@ -12037,6 +12204,7 @@
                 <a:solidFill>
                   <a:srgbClr val="2563EB"/>
                 </a:solidFill>
+                <a:latin typeface="Segoe UI"/>
               </a:defRPr>
             </a:pPr>
             <a:r>
@@ -12053,8 +12221,8 @@
         </p:nvSpPr>
         <p:spPr>
           <a:xfrm>
-            <a:off x="731520" y="502920"/>
-            <a:ext cx="10698480" cy="548640"/>
+            <a:off x="731520" y="475488"/>
+            <a:ext cx="10698480" cy="502920"/>
           </a:xfrm>
           <a:prstGeom prst="rect">
             <a:avLst/>
@@ -12068,10 +12236,11 @@
           <a:lstStyle/>
           <a:p>
             <a:pPr>
-              <a:defRPr sz="2100" b="1">
+              <a:defRPr sz="2000" b="1">
                 <a:solidFill>
                   <a:srgbClr val="0F172A"/>
                 </a:solidFill>
+                <a:latin typeface="Segoe UI"/>
               </a:defRPr>
             </a:pPr>
             <a:r>
@@ -12088,8 +12257,8 @@
         </p:nvSpPr>
         <p:spPr>
           <a:xfrm>
-            <a:off x="731520" y="1234440"/>
-            <a:ext cx="5669280" cy="5029200"/>
+            <a:off x="731520" y="1188720"/>
+            <a:ext cx="5669280" cy="5212080"/>
           </a:xfrm>
           <a:prstGeom prst="roundRect">
             <a:avLst/>
@@ -12134,7 +12303,7 @@
           <p:nvPr/>
         </p:nvGraphicFramePr>
         <p:xfrm>
-          <a:off x="868680" y="1371600"/>
+          <a:off x="868680" y="1325880"/>
           <a:ext cx="5394960" cy="2468880"/>
         </p:xfrm>
         <a:graphic>
@@ -12158,10 +12327,11 @@
                     <a:lstStyle/>
                     <a:p>
                       <a:pPr algn="ctr">
-                        <a:defRPr sz="950" b="1">
+                        <a:defRPr sz="1000" b="1">
                           <a:solidFill>
                             <a:srgbClr val="FFFFFF"/>
                           </a:solidFill>
+                          <a:latin typeface="Segoe UI"/>
                         </a:defRPr>
                       </a:pPr>
                       <a:r>
@@ -12181,10 +12351,11 @@
                     <a:lstStyle/>
                     <a:p>
                       <a:pPr algn="ctr">
-                        <a:defRPr sz="950" b="1">
+                        <a:defRPr sz="1000" b="1">
                           <a:solidFill>
                             <a:srgbClr val="FFFFFF"/>
                           </a:solidFill>
+                          <a:latin typeface="Segoe UI"/>
                         </a:defRPr>
                       </a:pPr>
                       <a:r>
@@ -12204,10 +12375,11 @@
                     <a:lstStyle/>
                     <a:p>
                       <a:pPr algn="ctr">
-                        <a:defRPr sz="950" b="1">
+                        <a:defRPr sz="1000" b="1">
                           <a:solidFill>
                             <a:srgbClr val="FFFFFF"/>
                           </a:solidFill>
+                          <a:latin typeface="Segoe UI"/>
                         </a:defRPr>
                       </a:pPr>
                       <a:r>
@@ -12227,10 +12399,11 @@
                     <a:lstStyle/>
                     <a:p>
                       <a:pPr algn="ctr">
-                        <a:defRPr sz="950" b="1">
+                        <a:defRPr sz="1000" b="1">
                           <a:solidFill>
                             <a:srgbClr val="FFFFFF"/>
                           </a:solidFill>
+                          <a:latin typeface="Segoe UI"/>
                         </a:defRPr>
                       </a:pPr>
                       <a:r>
@@ -12250,10 +12423,11 @@
                     <a:lstStyle/>
                     <a:p>
                       <a:pPr algn="ctr">
-                        <a:defRPr sz="950" b="1">
+                        <a:defRPr sz="1000" b="1">
                           <a:solidFill>
                             <a:srgbClr val="FFFFFF"/>
                           </a:solidFill>
+                          <a:latin typeface="Segoe UI"/>
                         </a:defRPr>
                       </a:pPr>
                       <a:r>
@@ -12273,10 +12447,11 @@
                     <a:lstStyle/>
                     <a:p>
                       <a:pPr algn="ctr">
-                        <a:defRPr sz="950" b="1">
+                        <a:defRPr sz="1000" b="1">
                           <a:solidFill>
                             <a:srgbClr val="FFFFFF"/>
                           </a:solidFill>
+                          <a:latin typeface="Segoe UI"/>
                         </a:defRPr>
                       </a:pPr>
                       <a:r>
@@ -12298,7 +12473,9 @@
                     <a:lstStyle/>
                     <a:p>
                       <a:pPr algn="ctr">
-                        <a:defRPr sz="900" b="0"/>
+                        <a:defRPr sz="1000" b="0">
+                          <a:latin typeface="Segoe UI"/>
+                        </a:defRPr>
                       </a:pPr>
                       <a:r>
                         <a:t>Cluster 2</a:t>
@@ -12317,7 +12494,9 @@
                     <a:lstStyle/>
                     <a:p>
                       <a:pPr algn="ctr">
-                        <a:defRPr sz="900" b="1"/>
+                        <a:defRPr sz="1000" b="1">
+                          <a:latin typeface="Segoe UI"/>
+                        </a:defRPr>
                       </a:pPr>
                       <a:r>
                         <a:t>Low Risk (Prime)</a:t>
@@ -12336,7 +12515,9 @@
                     <a:lstStyle/>
                     <a:p>
                       <a:pPr algn="ctr">
-                        <a:defRPr sz="900" b="0"/>
+                        <a:defRPr sz="1000" b="0">
+                          <a:latin typeface="Segoe UI"/>
+                        </a:defRPr>
                       </a:pPr>
                       <a:r>
                         <a:t>37.6%</a:t>
@@ -12355,7 +12536,9 @@
                     <a:lstStyle/>
                     <a:p>
                       <a:pPr algn="ctr">
-                        <a:defRPr sz="900" b="0"/>
+                        <a:defRPr sz="1000" b="0">
+                          <a:latin typeface="Segoe UI"/>
+                        </a:defRPr>
                       </a:pPr>
                       <a:r>
                         <a:t>741.8</a:t>
@@ -12374,7 +12557,9 @@
                     <a:lstStyle/>
                     <a:p>
                       <a:pPr algn="ctr">
-                        <a:defRPr sz="900" b="0"/>
+                        <a:defRPr sz="1000" b="0">
+                          <a:latin typeface="Segoe UI"/>
+                        </a:defRPr>
                       </a:pPr>
                       <a:r>
                         <a:t>60.7 mos</a:t>
@@ -12393,10 +12578,11 @@
                     <a:lstStyle/>
                     <a:p>
                       <a:pPr algn="ctr">
-                        <a:defRPr sz="900" b="1">
+                        <a:defRPr sz="1000" b="1">
                           <a:solidFill>
                             <a:srgbClr val="10B981"/>
                           </a:solidFill>
+                          <a:latin typeface="Segoe UI"/>
                         </a:defRPr>
                       </a:pPr>
                       <a:r>
@@ -12418,7 +12604,9 @@
                     <a:lstStyle/>
                     <a:p>
                       <a:pPr algn="ctr">
-                        <a:defRPr sz="900" b="0"/>
+                        <a:defRPr sz="1000" b="0">
+                          <a:latin typeface="Segoe UI"/>
+                        </a:defRPr>
                       </a:pPr>
                       <a:r>
                         <a:t>Cluster 1</a:t>
@@ -12437,7 +12625,9 @@
                     <a:lstStyle/>
                     <a:p>
                       <a:pPr algn="ctr">
-                        <a:defRPr sz="900" b="1"/>
+                        <a:defRPr sz="1000" b="1">
+                          <a:latin typeface="Segoe UI"/>
+                        </a:defRPr>
                       </a:pPr>
                       <a:r>
                         <a:t>Moderate (Standard)</a:t>
@@ -12456,7 +12646,9 @@
                     <a:lstStyle/>
                     <a:p>
                       <a:pPr algn="ctr">
-                        <a:defRPr sz="900" b="0"/>
+                        <a:defRPr sz="1000" b="0">
+                          <a:latin typeface="Segoe UI"/>
+                        </a:defRPr>
                       </a:pPr>
                       <a:r>
                         <a:t>31.1%</a:t>
@@ -12475,7 +12667,9 @@
                     <a:lstStyle/>
                     <a:p>
                       <a:pPr algn="ctr">
-                        <a:defRPr sz="900" b="0"/>
+                        <a:defRPr sz="1000" b="0">
+                          <a:latin typeface="Segoe UI"/>
+                        </a:defRPr>
                       </a:pPr>
                       <a:r>
                         <a:t>470.8</a:t>
@@ -12494,7 +12688,9 @@
                     <a:lstStyle/>
                     <a:p>
                       <a:pPr algn="ctr">
-                        <a:defRPr sz="900" b="0"/>
+                        <a:defRPr sz="1000" b="0">
+                          <a:latin typeface="Segoe UI"/>
+                        </a:defRPr>
                       </a:pPr>
                       <a:r>
                         <a:t>91.5 mos</a:t>
@@ -12513,10 +12709,11 @@
                     <a:lstStyle/>
                     <a:p>
                       <a:pPr algn="ctr">
-                        <a:defRPr sz="900" b="1">
+                        <a:defRPr sz="1000" b="1">
                           <a:solidFill>
                             <a:srgbClr val="2563EB"/>
                           </a:solidFill>
+                          <a:latin typeface="Segoe UI"/>
                         </a:defRPr>
                       </a:pPr>
                       <a:r>
@@ -12538,7 +12735,9 @@
                     <a:lstStyle/>
                     <a:p>
                       <a:pPr algn="ctr">
-                        <a:defRPr sz="900" b="0"/>
+                        <a:defRPr sz="1000" b="0">
+                          <a:latin typeface="Segoe UI"/>
+                        </a:defRPr>
                       </a:pPr>
                       <a:r>
                         <a:t>Cluster 0</a:t>
@@ -12557,7 +12756,9 @@
                     <a:lstStyle/>
                     <a:p>
                       <a:pPr algn="ctr">
-                        <a:defRPr sz="900" b="1"/>
+                        <a:defRPr sz="1000" b="1">
+                          <a:latin typeface="Segoe UI"/>
+                        </a:defRPr>
                       </a:pPr>
                       <a:r>
                         <a:t>High Risk (Subprime)</a:t>
@@ -12576,7 +12777,9 @@
                     <a:lstStyle/>
                     <a:p>
                       <a:pPr algn="ctr">
-                        <a:defRPr sz="900" b="0"/>
+                        <a:defRPr sz="1000" b="0">
+                          <a:latin typeface="Segoe UI"/>
+                        </a:defRPr>
                       </a:pPr>
                       <a:r>
                         <a:t>31.3%</a:t>
@@ -12595,7 +12798,9 @@
                     <a:lstStyle/>
                     <a:p>
                       <a:pPr algn="ctr">
-                        <a:defRPr sz="900" b="0"/>
+                        <a:defRPr sz="1000" b="0">
+                          <a:latin typeface="Segoe UI"/>
+                        </a:defRPr>
                       </a:pPr>
                       <a:r>
                         <a:t>475.2</a:t>
@@ -12614,7 +12819,9 @@
                     <a:lstStyle/>
                     <a:p>
                       <a:pPr algn="ctr">
-                        <a:defRPr sz="900" b="0"/>
+                        <a:defRPr sz="1000" b="0">
+                          <a:latin typeface="Segoe UI"/>
+                        </a:defRPr>
                       </a:pPr>
                       <a:r>
                         <a:t>27.0 mos</a:t>
@@ -12633,10 +12840,11 @@
                     <a:lstStyle/>
                     <a:p>
                       <a:pPr algn="ctr">
-                        <a:defRPr sz="900" b="1">
+                        <a:defRPr sz="1000" b="1">
                           <a:solidFill>
                             <a:srgbClr val="E11D48"/>
                           </a:solidFill>
+                          <a:latin typeface="Segoe UI"/>
                         </a:defRPr>
                       </a:pPr>
                       <a:r>
@@ -12663,8 +12871,8 @@
         </p:nvSpPr>
         <p:spPr>
           <a:xfrm>
-            <a:off x="868680" y="3977639"/>
-            <a:ext cx="5394960" cy="2194560"/>
+            <a:off x="868680" y="3931920"/>
+            <a:ext cx="5394960" cy="2286000"/>
           </a:xfrm>
           <a:prstGeom prst="rect">
             <a:avLst/>
@@ -12679,12 +12887,13 @@
           <a:p>
             <a:pPr>
               <a:spcAft>
-                <a:spcPts val="200"/>
+                <a:spcPts val="400"/>
               </a:spcAft>
-              <a:defRPr sz="1100" b="1">
+              <a:defRPr sz="1200" b="1">
                 <a:solidFill>
                   <a:srgbClr val="0F172A"/>
                 </a:solidFill>
+                <a:latin typeface="Segoe UI"/>
               </a:defRPr>
             </a:pPr>
             <a:r>
@@ -12694,12 +12903,13 @@
           <a:p>
             <a:pPr>
               <a:spcAft>
-                <a:spcPts val="300"/>
+                <a:spcPts val="400"/>
               </a:spcAft>
-              <a:defRPr sz="950">
+              <a:defRPr sz="1100">
                 <a:solidFill>
                   <a:srgbClr val="334155"/>
                 </a:solidFill>
+                <a:latin typeface="Segoe UI"/>
               </a:defRPr>
             </a:pPr>
             <a:r>
@@ -12709,12 +12919,13 @@
           <a:p>
             <a:pPr>
               <a:spcAft>
-                <a:spcPts val="300"/>
+                <a:spcPts val="400"/>
               </a:spcAft>
-              <a:defRPr sz="950">
+              <a:defRPr sz="1100">
                 <a:solidFill>
                   <a:srgbClr val="334155"/>
                 </a:solidFill>
+                <a:latin typeface="Segoe UI"/>
               </a:defRPr>
             </a:pPr>
             <a:r>
@@ -12724,27 +12935,29 @@
           <a:p>
             <a:pPr>
               <a:spcAft>
-                <a:spcPts val="300"/>
+                <a:spcPts val="400"/>
               </a:spcAft>
-              <a:defRPr sz="950">
+              <a:defRPr sz="1100">
                 <a:solidFill>
                   <a:srgbClr val="334155"/>
                 </a:solidFill>
-              </a:defRPr>
-            </a:pPr>
-            <a:r>
-              <a:t>• Subprime Tier (Cluster 0): Short employment (27.0 mos) -&gt; default rate surges to 20.36% (5x higher than Prime).</a:t>
+                <a:latin typeface="Segoe UI"/>
+              </a:defRPr>
+            </a:pPr>
+            <a:r>
+              <a:t>• Subprime Tier (Cluster 0): Short employment (27.0 mos) -&gt; default surges to 20.36%.</a:t>
             </a:r>
           </a:p>
           <a:p>
             <a:pPr>
               <a:spcAft>
-                <a:spcPts val="300"/>
+                <a:spcPts val="400"/>
               </a:spcAft>
-              <a:defRPr sz="950">
+              <a:defRPr sz="1100">
                 <a:solidFill>
                   <a:srgbClr val="334155"/>
                 </a:solidFill>
+                <a:latin typeface="Segoe UI"/>
               </a:defRPr>
             </a:pPr>
             <a:r>
@@ -12761,8 +12974,8 @@
         </p:nvSpPr>
         <p:spPr>
           <a:xfrm>
-            <a:off x="6583680" y="1234440"/>
-            <a:ext cx="4876495" cy="5029200"/>
+            <a:off x="6583680" y="1188720"/>
+            <a:ext cx="4876495" cy="5212080"/>
           </a:xfrm>
           <a:prstGeom prst="roundRect">
             <a:avLst/>
@@ -12814,7 +13027,7 @@
         </p:blipFill>
         <p:spPr>
           <a:xfrm>
-            <a:off x="6675120" y="1371600"/>
+            <a:off x="6675120" y="1325880"/>
             <a:ext cx="4693615" cy="3520211"/>
           </a:xfrm>
           <a:prstGeom prst="rect">
@@ -12899,8 +13112,8 @@
         </p:nvSpPr>
         <p:spPr>
           <a:xfrm>
-            <a:off x="731520" y="256032"/>
-            <a:ext cx="10698480" cy="256032"/>
+            <a:off x="731520" y="237744"/>
+            <a:ext cx="10698480" cy="237744"/>
           </a:xfrm>
           <a:prstGeom prst="rect">
             <a:avLst/>
@@ -12918,6 +13131,7 @@
                 <a:solidFill>
                   <a:srgbClr val="2563EB"/>
                 </a:solidFill>
+                <a:latin typeface="Segoe UI"/>
               </a:defRPr>
             </a:pPr>
             <a:r>
@@ -12934,8 +13148,8 @@
         </p:nvSpPr>
         <p:spPr>
           <a:xfrm>
-            <a:off x="731520" y="502920"/>
-            <a:ext cx="10698480" cy="548640"/>
+            <a:off x="731520" y="475488"/>
+            <a:ext cx="10698480" cy="502920"/>
           </a:xfrm>
           <a:prstGeom prst="rect">
             <a:avLst/>
@@ -12949,10 +13163,11 @@
           <a:lstStyle/>
           <a:p>
             <a:pPr>
-              <a:defRPr sz="2100" b="1">
+              <a:defRPr sz="2000" b="1">
                 <a:solidFill>
                   <a:srgbClr val="0F172A"/>
                 </a:solidFill>
+                <a:latin typeface="Segoe UI"/>
               </a:defRPr>
             </a:pPr>
             <a:r>
@@ -12969,8 +13184,8 @@
         </p:nvSpPr>
         <p:spPr>
           <a:xfrm>
-            <a:off x="731520" y="1234440"/>
-            <a:ext cx="5212080" cy="2468880"/>
+            <a:off x="731520" y="1188720"/>
+            <a:ext cx="5212080" cy="2514600"/>
           </a:xfrm>
           <a:prstGeom prst="roundRect">
             <a:avLst/>
@@ -13014,8 +13229,8 @@
         </p:nvSpPr>
         <p:spPr>
           <a:xfrm>
-            <a:off x="914400" y="1371600"/>
-            <a:ext cx="4846320" cy="2194560"/>
+            <a:off x="914400" y="1325880"/>
+            <a:ext cx="4846320" cy="2240280"/>
           </a:xfrm>
           <a:prstGeom prst="rect">
             <a:avLst/>
@@ -13030,57 +13245,61 @@
           <a:p>
             <a:pPr>
               <a:spcAft>
+                <a:spcPts val="800"/>
+              </a:spcAft>
+              <a:defRPr sz="1300" b="1">
+                <a:solidFill>
+                  <a:srgbClr val="2563EB"/>
+                </a:solidFill>
+                <a:latin typeface="Segoe UI"/>
+              </a:defRPr>
+            </a:pPr>
+            <a:r>
+              <a:t>1. WHY We Used It (Problem Statement)</a:t>
+            </a:r>
+          </a:p>
+          <a:p>
+            <a:pPr>
+              <a:spcAft>
                 <a:spcPts val="600"/>
               </a:spcAft>
-              <a:defRPr sz="1200" b="1">
-                <a:solidFill>
-                  <a:srgbClr val="2563EB"/>
-                </a:solidFill>
-              </a:defRPr>
-            </a:pPr>
-            <a:r>
-              <a:t>1. WHY We Used It (The Problem / Need)</a:t>
+              <a:defRPr sz="1200">
+                <a:solidFill>
+                  <a:srgbClr val="334155"/>
+                </a:solidFill>
+                <a:latin typeface="Segoe UI"/>
+              </a:defRPr>
+            </a:pPr>
+            <a:r>
+              <a:t>• Loan defaults are rarely triggered by a single parameter in isolation.</a:t>
             </a:r>
           </a:p>
           <a:p>
             <a:pPr>
               <a:spcAft>
-                <a:spcPts val="400"/>
+                <a:spcPts val="600"/>
               </a:spcAft>
-              <a:defRPr sz="1000">
+              <a:defRPr sz="1200">
                 <a:solidFill>
                   <a:srgbClr val="334155"/>
                 </a:solidFill>
-              </a:defRPr>
-            </a:pPr>
-            <a:r>
-              <a:t>• Loan defaults are rarely triggered by a single parameter in isolation.</a:t>
+                <a:latin typeface="Segoe UI"/>
+              </a:defRPr>
+            </a:pPr>
+            <a:r>
+              <a:t>• Defaults happen when multiple adverse financial traits combine (e.g. low income + high DTI + poor credit).</a:t>
             </a:r>
           </a:p>
           <a:p>
             <a:pPr>
               <a:spcAft>
-                <a:spcPts val="400"/>
+                <a:spcPts val="600"/>
               </a:spcAft>
-              <a:defRPr sz="1000">
+              <a:defRPr sz="1200">
                 <a:solidFill>
                   <a:srgbClr val="334155"/>
                 </a:solidFill>
-              </a:defRPr>
-            </a:pPr>
-            <a:r>
-              <a:t>• Defaults happen when multiple adverse financial traits combine (e.g. low income + high DTI + poor credit).</a:t>
-            </a:r>
-          </a:p>
-          <a:p>
-            <a:pPr>
-              <a:spcAft>
-                <a:spcPts val="400"/>
-              </a:spcAft>
-              <a:defRPr sz="1000">
-                <a:solidFill>
-                  <a:srgbClr val="334155"/>
-                </a:solidFill>
+                <a:latin typeface="Segoe UI"/>
               </a:defRPr>
             </a:pPr>
             <a:r>
@@ -13097,8 +13316,8 @@
         </p:nvSpPr>
         <p:spPr>
           <a:xfrm>
-            <a:off x="6217920" y="1234440"/>
-            <a:ext cx="5242255" cy="2468880"/>
+            <a:off x="6217920" y="1188720"/>
+            <a:ext cx="5242255" cy="2514600"/>
           </a:xfrm>
           <a:prstGeom prst="roundRect">
             <a:avLst/>
@@ -13142,8 +13361,8 @@
         </p:nvSpPr>
         <p:spPr>
           <a:xfrm>
-            <a:off x="6400800" y="1371600"/>
-            <a:ext cx="4876495" cy="2194560"/>
+            <a:off x="6400800" y="1325880"/>
+            <a:ext cx="4876495" cy="2240280"/>
           </a:xfrm>
           <a:prstGeom prst="rect">
             <a:avLst/>
@@ -13158,57 +13377,61 @@
           <a:p>
             <a:pPr>
               <a:spcAft>
+                <a:spcPts val="800"/>
+              </a:spcAft>
+              <a:defRPr sz="1300" b="1">
+                <a:solidFill>
+                  <a:srgbClr val="10B981"/>
+                </a:solidFill>
+                <a:latin typeface="Segoe UI"/>
+              </a:defRPr>
+            </a:pPr>
+            <a:r>
+              <a:t>2. HOW We Used It (Pipeline &amp; Methods)</a:t>
+            </a:r>
+          </a:p>
+          <a:p>
+            <a:pPr>
+              <a:spcAft>
                 <a:spcPts val="600"/>
               </a:spcAft>
-              <a:defRPr sz="1200" b="1">
-                <a:solidFill>
-                  <a:srgbClr val="10B981"/>
-                </a:solidFill>
-              </a:defRPr>
-            </a:pPr>
-            <a:r>
-              <a:t>2. HOW We Used It (Methodology &amp; Pipeline)</a:t>
+              <a:defRPr sz="1200">
+                <a:solidFill>
+                  <a:srgbClr val="334155"/>
+                </a:solidFill>
+                <a:latin typeface="Segoe UI"/>
+              </a:defRPr>
+            </a:pPr>
+            <a:r>
+              <a:t>• Discretized continuous metrics into domain bins (Income tertiles, Credit tiers, DTI brackets).</a:t>
             </a:r>
           </a:p>
           <a:p>
             <a:pPr>
               <a:spcAft>
-                <a:spcPts val="400"/>
+                <a:spcPts val="600"/>
               </a:spcAft>
-              <a:defRPr sz="1000">
+              <a:defRPr sz="1200">
                 <a:solidFill>
                   <a:srgbClr val="334155"/>
                 </a:solidFill>
-              </a:defRPr>
-            </a:pPr>
-            <a:r>
-              <a:t>• Discretized continuous metrics into domain bins (Income tertiles, Credit tiers, DTI brackets).</a:t>
+                <a:latin typeface="Segoe UI"/>
+              </a:defRPr>
+            </a:pPr>
+            <a:r>
+              <a:t>• Applied the Apriori Algorithm (mlxtend) to mine frequent itemsets across 15,000 transactions.</a:t>
             </a:r>
           </a:p>
           <a:p>
             <a:pPr>
               <a:spcAft>
-                <a:spcPts val="400"/>
+                <a:spcPts val="600"/>
               </a:spcAft>
-              <a:defRPr sz="1000">
+              <a:defRPr sz="1200">
                 <a:solidFill>
                   <a:srgbClr val="334155"/>
                 </a:solidFill>
-              </a:defRPr>
-            </a:pPr>
-            <a:r>
-              <a:t>• Applied the Apriori Algorithm (mlxtend) to mine frequent itemsets across 15,000 transactions.</a:t>
-            </a:r>
-          </a:p>
-          <a:p>
-            <a:pPr>
-              <a:spcAft>
-                <a:spcPts val="400"/>
-              </a:spcAft>
-              <a:defRPr sz="1000">
-                <a:solidFill>
-                  <a:srgbClr val="334155"/>
-                </a:solidFill>
+                <a:latin typeface="Segoe UI"/>
               </a:defRPr>
             </a:pPr>
             <a:r>
@@ -13286,57 +13509,61 @@
           <a:p>
             <a:pPr>
               <a:spcAft>
+                <a:spcPts val="800"/>
+              </a:spcAft>
+              <a:defRPr sz="1300" b="1">
+                <a:solidFill>
+                  <a:srgbClr val="CA8A04"/>
+                </a:solidFill>
+                <a:latin typeface="Segoe UI"/>
+              </a:defRPr>
+            </a:pPr>
+            <a:r>
+              <a:t>3. WHAT It Does in Our Project (System Role)</a:t>
+            </a:r>
+          </a:p>
+          <a:p>
+            <a:pPr>
+              <a:spcAft>
                 <a:spcPts val="600"/>
               </a:spcAft>
-              <a:defRPr sz="1200" b="1">
-                <a:solidFill>
-                  <a:srgbClr val="CA8A04"/>
-                </a:solidFill>
-              </a:defRPr>
-            </a:pPr>
-            <a:r>
-              <a:t>3. WHAT It Does in Our Project (System Role)</a:t>
+              <a:defRPr sz="1200">
+                <a:solidFill>
+                  <a:srgbClr val="334155"/>
+                </a:solidFill>
+                <a:latin typeface="Segoe UI"/>
+              </a:defRPr>
+            </a:pPr>
+            <a:r>
+              <a:t>• Discovers non-trivial IF-THEN borrower risk patterns with statistical conviction.</a:t>
             </a:r>
           </a:p>
           <a:p>
             <a:pPr>
               <a:spcAft>
-                <a:spcPts val="400"/>
+                <a:spcPts val="600"/>
               </a:spcAft>
-              <a:defRPr sz="1000">
+              <a:defRPr sz="1200">
                 <a:solidFill>
                   <a:srgbClr val="334155"/>
                 </a:solidFill>
-              </a:defRPr>
-            </a:pPr>
-            <a:r>
-              <a:t>• Discovers non-trivial IF-THEN borrower risk patterns with statistical conviction.</a:t>
+                <a:latin typeface="Segoe UI"/>
+              </a:defRPr>
+            </a:pPr>
+            <a:r>
+              <a:t>• Reveals that specific feature combinations increase default risk by over 5.69 times compared to random applicants.</a:t>
             </a:r>
           </a:p>
           <a:p>
             <a:pPr>
               <a:spcAft>
-                <a:spcPts val="400"/>
+                <a:spcPts val="600"/>
               </a:spcAft>
-              <a:defRPr sz="1000">
+              <a:defRPr sz="1200">
                 <a:solidFill>
                   <a:srgbClr val="334155"/>
                 </a:solidFill>
-              </a:defRPr>
-            </a:pPr>
-            <a:r>
-              <a:t>• Reveals that specific feature combinations increase default risk by over 5.69 times compared to random applicants.</a:t>
-            </a:r>
-          </a:p>
-          <a:p>
-            <a:pPr>
-              <a:spcAft>
-                <a:spcPts val="400"/>
-              </a:spcAft>
-              <a:defRPr sz="1000">
-                <a:solidFill>
-                  <a:srgbClr val="334155"/>
-                </a:solidFill>
+                <a:latin typeface="Segoe UI"/>
               </a:defRPr>
             </a:pPr>
             <a:r>
@@ -13414,57 +13641,61 @@
           <a:p>
             <a:pPr>
               <a:spcAft>
+                <a:spcPts val="800"/>
+              </a:spcAft>
+              <a:defRPr sz="1300" b="1">
+                <a:solidFill>
+                  <a:srgbClr val="9333EA"/>
+                </a:solidFill>
+                <a:latin typeface="Segoe UI"/>
+              </a:defRPr>
+            </a:pPr>
+            <a:r>
+              <a:t>4. PRACTICAL USE (Underwriting &amp; Business Value)</a:t>
+            </a:r>
+          </a:p>
+          <a:p>
+            <a:pPr>
+              <a:spcAft>
                 <a:spcPts val="600"/>
               </a:spcAft>
-              <a:defRPr sz="1200" b="1">
-                <a:solidFill>
-                  <a:srgbClr val="9333EA"/>
-                </a:solidFill>
-              </a:defRPr>
-            </a:pPr>
-            <a:r>
-              <a:t>4. PRACTICAL USE (Underwriting &amp; Business Value)</a:t>
+              <a:defRPr sz="1200">
+                <a:solidFill>
+                  <a:srgbClr val="334155"/>
+                </a:solidFill>
+                <a:latin typeface="Segoe UI"/>
+              </a:defRPr>
+            </a:pPr>
+            <a:r>
+              <a:t>• Underwriting Rule Engine: Automates policy rules (e.g. require collateral if Rule #1 triggers).</a:t>
             </a:r>
           </a:p>
           <a:p>
             <a:pPr>
               <a:spcAft>
-                <a:spcPts val="400"/>
+                <a:spcPts val="600"/>
               </a:spcAft>
-              <a:defRPr sz="1000">
+              <a:defRPr sz="1200">
                 <a:solidFill>
                   <a:srgbClr val="334155"/>
                 </a:solidFill>
-              </a:defRPr>
-            </a:pPr>
-            <a:r>
-              <a:t>• Underwriting Rule Engine: Automates policy rules (e.g. require collateral if Rule #1 triggers).</a:t>
+                <a:latin typeface="Segoe UI"/>
+              </a:defRPr>
+            </a:pPr>
+            <a:r>
+              <a:t>• Underwriting Red Flags: Equips credit officers with an actionable risk checklist.</a:t>
             </a:r>
           </a:p>
           <a:p>
             <a:pPr>
               <a:spcAft>
-                <a:spcPts val="400"/>
+                <a:spcPts val="600"/>
               </a:spcAft>
-              <a:defRPr sz="1000">
+              <a:defRPr sz="1200">
                 <a:solidFill>
                   <a:srgbClr val="334155"/>
                 </a:solidFill>
-              </a:defRPr>
-            </a:pPr>
-            <a:r>
-              <a:t>• Underwriting Red Flags: Equips credit officers with an actionable risk checklist.</a:t>
-            </a:r>
-          </a:p>
-          <a:p>
-            <a:pPr>
-              <a:spcAft>
-                <a:spcPts val="400"/>
-              </a:spcAft>
-              <a:defRPr sz="1000">
-                <a:solidFill>
-                  <a:srgbClr val="334155"/>
-                </a:solidFill>
+                <a:latin typeface="Segoe UI"/>
               </a:defRPr>
             </a:pPr>
             <a:r>

--- a/Review2_ByteBrigades_LoanDefault.pptx
+++ b/Review2_ByteBrigades_LoanDefault.pptx
@@ -6,19 +6,19 @@
   </p:sldMasterIdLst>
   <p:sldIdLst>
     <p:sldId id="256" r:id="rId7"/>
-    <p:sldId id="257" r:id="rId9"/>
-    <p:sldId id="258" r:id="rId10"/>
-    <p:sldId id="259" r:id="rId11"/>
-    <p:sldId id="260" r:id="rId12"/>
-    <p:sldId id="261" r:id="rId13"/>
-    <p:sldId id="262" r:id="rId14"/>
-    <p:sldId id="263" r:id="rId15"/>
-    <p:sldId id="264" r:id="rId16"/>
-    <p:sldId id="265" r:id="rId17"/>
-    <p:sldId id="266" r:id="rId18"/>
-    <p:sldId id="267" r:id="rId19"/>
-    <p:sldId id="268" r:id="rId20"/>
-    <p:sldId id="269" r:id="rId21"/>
+    <p:sldId id="257" r:id="rId8"/>
+    <p:sldId id="258" r:id="rId9"/>
+    <p:sldId id="259" r:id="rId10"/>
+    <p:sldId id="260" r:id="rId11"/>
+    <p:sldId id="261" r:id="rId12"/>
+    <p:sldId id="262" r:id="rId13"/>
+    <p:sldId id="263" r:id="rId14"/>
+    <p:sldId id="264" r:id="rId15"/>
+    <p:sldId id="265" r:id="rId16"/>
+    <p:sldId id="266" r:id="rId17"/>
+    <p:sldId id="267" r:id="rId18"/>
+    <p:sldId id="268" r:id="rId19"/>
+    <p:sldId id="269" r:id="rId20"/>
   </p:sldIdLst>
   <p:sldSz cx="12191695" cy="6858000" type="screen4x3"/>
   <p:notesSz cx="6858000" cy="9144000"/>
@@ -118,1056 +118,6 @@
     </a:lvl9pPr>
   </p:defaultTextStyle>
 </p:presentation>
-</file>
-
-<file path=ppt/notesMasters/notesMaster1.xml><?xml version="1.0" encoding="utf-8"?>
-<p:notesMaster xmlns:a="http://schemas.openxmlformats.org/drawingml/2006/main" xmlns:p="http://schemas.openxmlformats.org/presentationml/2006/main" xmlns:r="http://schemas.openxmlformats.org/officeDocument/2006/relationships">
-  <p:cSld>
-    <p:bg>
-      <p:bgRef idx="1001">
-        <a:schemeClr val="bg1"/>
-      </p:bgRef>
-    </p:bg>
-    <p:spTree>
-      <p:nvGrpSpPr>
-        <p:cNvPr id="1" name=""/>
-        <p:cNvGrpSpPr/>
-        <p:nvPr/>
-      </p:nvGrpSpPr>
-      <p:grpSpPr>
-        <a:xfrm>
-          <a:off x="0" y="0"/>
-          <a:ext cx="0" cy="0"/>
-          <a:chOff x="0" y="0"/>
-          <a:chExt cx="0" cy="0"/>
-        </a:xfrm>
-      </p:grpSpPr>
-      <p:sp>
-        <p:nvSpPr>
-          <p:cNvPr id="2" name="Header Placeholder 1"/>
-          <p:cNvSpPr>
-            <a:spLocks noGrp="1"/>
-          </p:cNvSpPr>
-          <p:nvPr>
-            <p:ph type="hdr" sz="quarter"/>
-          </p:nvPr>
-        </p:nvSpPr>
-        <p:spPr>
-          <a:xfrm>
-            <a:off x="0" y="0"/>
-            <a:ext cx="2971800" cy="457200"/>
-          </a:xfrm>
-          <a:prstGeom prst="rect">
-            <a:avLst/>
-          </a:prstGeom>
-        </p:spPr>
-        <p:txBody>
-          <a:bodyPr vert="horz" lIns="91440" tIns="45720" rIns="91440" bIns="45720" rtlCol="0"/>
-          <a:lstStyle>
-            <a:lvl1pPr algn="l">
-              <a:defRPr sz="1200"/>
-            </a:lvl1pPr>
-          </a:lstStyle>
-          <a:p>
-            <a:endParaRPr lang="en-US"/>
-          </a:p>
-        </p:txBody>
-      </p:sp>
-      <p:sp>
-        <p:nvSpPr>
-          <p:cNvPr id="3" name="Date Placeholder 2"/>
-          <p:cNvSpPr>
-            <a:spLocks noGrp="1"/>
-          </p:cNvSpPr>
-          <p:nvPr>
-            <p:ph type="dt" idx="1"/>
-          </p:nvPr>
-        </p:nvSpPr>
-        <p:spPr>
-          <a:xfrm>
-            <a:off x="3884613" y="0"/>
-            <a:ext cx="2971800" cy="457200"/>
-          </a:xfrm>
-          <a:prstGeom prst="rect">
-            <a:avLst/>
-          </a:prstGeom>
-        </p:spPr>
-        <p:txBody>
-          <a:bodyPr vert="horz" lIns="91440" tIns="45720" rIns="91440" bIns="45720" rtlCol="0"/>
-          <a:lstStyle>
-            <a:lvl1pPr algn="r">
-              <a:defRPr sz="1200"/>
-            </a:lvl1pPr>
-          </a:lstStyle>
-          <a:p>
-            <a:fld id="{0F89C1C7-3DCD-1040-A9CF-14679D8B5DDD}" type="datetimeFigureOut">
-              <a:rPr lang="en-US" smtClean="0"/>
-              <a:t>10/17/16</a:t>
-            </a:fld>
-            <a:endParaRPr lang="en-US"/>
-          </a:p>
-        </p:txBody>
-      </p:sp>
-      <p:sp>
-        <p:nvSpPr>
-          <p:cNvPr id="4" name="Slide Image Placeholder 3"/>
-          <p:cNvSpPr>
-            <a:spLocks noGrp="1" noRot="1" noChangeAspect="1"/>
-          </p:cNvSpPr>
-          <p:nvPr>
-            <p:ph type="sldImg" idx="2"/>
-          </p:nvPr>
-        </p:nvSpPr>
-        <p:spPr>
-          <a:xfrm>
-            <a:off x="1143000" y="685800"/>
-            <a:ext cx="4572000" cy="3429000"/>
-          </a:xfrm>
-          <a:prstGeom prst="rect">
-            <a:avLst/>
-          </a:prstGeom>
-          <a:noFill/>
-          <a:ln w="12700">
-            <a:solidFill>
-              <a:prstClr val="black"/>
-            </a:solidFill>
-          </a:ln>
-        </p:spPr>
-        <p:txBody>
-          <a:bodyPr vert="horz" lIns="91440" tIns="45720" rIns="91440" bIns="45720" rtlCol="0" anchor="ctr"/>
-          <a:lstStyle/>
-          <a:p>
-            <a:endParaRPr lang="en-US"/>
-          </a:p>
-        </p:txBody>
-      </p:sp>
-      <p:sp>
-        <p:nvSpPr>
-          <p:cNvPr id="5" name="Notes Placeholder 4"/>
-          <p:cNvSpPr>
-            <a:spLocks noGrp="1"/>
-          </p:cNvSpPr>
-          <p:nvPr>
-            <p:ph type="body" sz="quarter" idx="3"/>
-          </p:nvPr>
-        </p:nvSpPr>
-        <p:spPr>
-          <a:xfrm>
-            <a:off x="685800" y="4343400"/>
-            <a:ext cx="5486400" cy="4114800"/>
-          </a:xfrm>
-          <a:prstGeom prst="rect">
-            <a:avLst/>
-          </a:prstGeom>
-        </p:spPr>
-        <p:txBody>
-          <a:bodyPr vert="horz" lIns="91440" tIns="45720" rIns="91440" bIns="45720" rtlCol="0"/>
-          <a:lstStyle/>
-          <a:p>
-            <a:pPr lvl="0"/>
-            <a:r>
-              <a:rPr lang="en-US" smtClean="0"/>
-              <a:t>Click to edit Master text styles</a:t>
-            </a:r>
-          </a:p>
-          <a:p>
-            <a:pPr lvl="1"/>
-            <a:r>
-              <a:rPr lang="en-US" smtClean="0"/>
-              <a:t>Second level</a:t>
-            </a:r>
-          </a:p>
-          <a:p>
-            <a:pPr lvl="2"/>
-            <a:r>
-              <a:rPr lang="en-US" smtClean="0"/>
-              <a:t>Third level</a:t>
-            </a:r>
-          </a:p>
-          <a:p>
-            <a:pPr lvl="3"/>
-            <a:r>
-              <a:rPr lang="en-US" smtClean="0"/>
-              <a:t>Fourth level</a:t>
-            </a:r>
-          </a:p>
-          <a:p>
-            <a:pPr lvl="4"/>
-            <a:r>
-              <a:rPr lang="en-US" smtClean="0"/>
-              <a:t>Fifth level</a:t>
-            </a:r>
-            <a:endParaRPr lang="en-US"/>
-          </a:p>
-        </p:txBody>
-      </p:sp>
-      <p:sp>
-        <p:nvSpPr>
-          <p:cNvPr id="6" name="Footer Placeholder 5"/>
-          <p:cNvSpPr>
-            <a:spLocks noGrp="1"/>
-          </p:cNvSpPr>
-          <p:nvPr>
-            <p:ph type="ftr" sz="quarter" idx="4"/>
-          </p:nvPr>
-        </p:nvSpPr>
-        <p:spPr>
-          <a:xfrm>
-            <a:off x="0" y="8685213"/>
-            <a:ext cx="2971800" cy="457200"/>
-          </a:xfrm>
-          <a:prstGeom prst="rect">
-            <a:avLst/>
-          </a:prstGeom>
-        </p:spPr>
-        <p:txBody>
-          <a:bodyPr vert="horz" lIns="91440" tIns="45720" rIns="91440" bIns="45720" rtlCol="0" anchor="b"/>
-          <a:lstStyle>
-            <a:lvl1pPr algn="l">
-              <a:defRPr sz="1200"/>
-            </a:lvl1pPr>
-          </a:lstStyle>
-          <a:p>
-            <a:endParaRPr lang="en-US"/>
-          </a:p>
-        </p:txBody>
-      </p:sp>
-      <p:sp>
-        <p:nvSpPr>
-          <p:cNvPr id="7" name="Slide Number Placeholder 6"/>
-          <p:cNvSpPr>
-            <a:spLocks noGrp="1"/>
-          </p:cNvSpPr>
-          <p:nvPr>
-            <p:ph type="sldNum" sz="quarter" idx="5"/>
-          </p:nvPr>
-        </p:nvSpPr>
-        <p:spPr>
-          <a:xfrm>
-            <a:off x="3884613" y="8685213"/>
-            <a:ext cx="2971800" cy="457200"/>
-          </a:xfrm>
-          <a:prstGeom prst="rect">
-            <a:avLst/>
-          </a:prstGeom>
-        </p:spPr>
-        <p:txBody>
-          <a:bodyPr vert="horz" lIns="91440" tIns="45720" rIns="91440" bIns="45720" rtlCol="0" anchor="b"/>
-          <a:lstStyle>
-            <a:lvl1pPr algn="r">
-              <a:defRPr sz="1200"/>
-            </a:lvl1pPr>
-          </a:lstStyle>
-          <a:p>
-            <a:fld id="{BB5E49A5-4136-284D-997B-48E1D791AD67}" type="slidenum">
-              <a:rPr lang="en-US" smtClean="0"/>
-              <a:t>‹#›</a:t>
-            </a:fld>
-            <a:endParaRPr lang="en-US"/>
-          </a:p>
-        </p:txBody>
-      </p:sp>
-    </p:spTree>
-    <p:extLst>
-      <p:ext uri="{BB962C8B-B14F-4D97-AF65-F5344CB8AC3E}">
-        <p14:creationId xmlns:p14="http://schemas.microsoft.com/office/powerpoint/2010/main" val="2623252185"/>
-      </p:ext>
-    </p:extLst>
-  </p:cSld>
-  <p:clrMap bg1="lt1" tx1="dk1" bg2="lt2" tx2="dk2" accent1="accent1" accent2="accent2" accent3="accent3" accent4="accent4" accent5="accent5" accent6="accent6" hlink="hlink" folHlink="folHlink"/>
-  <p:notesStyle>
-    <a:lvl1pPr marL="0" algn="l" defTabSz="457200" rtl="0" eaLnBrk="1" latinLnBrk="0" hangingPunct="1">
-      <a:defRPr sz="1200" kern="1200">
-        <a:solidFill>
-          <a:schemeClr val="tx1"/>
-        </a:solidFill>
-        <a:latin typeface="+mn-lt"/>
-        <a:ea typeface="+mn-ea"/>
-        <a:cs typeface="+mn-cs"/>
-      </a:defRPr>
-    </a:lvl1pPr>
-    <a:lvl2pPr marL="457200" algn="l" defTabSz="457200" rtl="0" eaLnBrk="1" latinLnBrk="0" hangingPunct="1">
-      <a:defRPr sz="1200" kern="1200">
-        <a:solidFill>
-          <a:schemeClr val="tx1"/>
-        </a:solidFill>
-        <a:latin typeface="+mn-lt"/>
-        <a:ea typeface="+mn-ea"/>
-        <a:cs typeface="+mn-cs"/>
-      </a:defRPr>
-    </a:lvl2pPr>
-    <a:lvl3pPr marL="914400" algn="l" defTabSz="457200" rtl="0" eaLnBrk="1" latinLnBrk="0" hangingPunct="1">
-      <a:defRPr sz="1200" kern="1200">
-        <a:solidFill>
-          <a:schemeClr val="tx1"/>
-        </a:solidFill>
-        <a:latin typeface="+mn-lt"/>
-        <a:ea typeface="+mn-ea"/>
-        <a:cs typeface="+mn-cs"/>
-      </a:defRPr>
-    </a:lvl3pPr>
-    <a:lvl4pPr marL="1371600" algn="l" defTabSz="457200" rtl="0" eaLnBrk="1" latinLnBrk="0" hangingPunct="1">
-      <a:defRPr sz="1200" kern="1200">
-        <a:solidFill>
-          <a:schemeClr val="tx1"/>
-        </a:solidFill>
-        <a:latin typeface="+mn-lt"/>
-        <a:ea typeface="+mn-ea"/>
-        <a:cs typeface="+mn-cs"/>
-      </a:defRPr>
-    </a:lvl4pPr>
-    <a:lvl5pPr marL="1828800" algn="l" defTabSz="457200" rtl="0" eaLnBrk="1" latinLnBrk="0" hangingPunct="1">
-      <a:defRPr sz="1200" kern="1200">
-        <a:solidFill>
-          <a:schemeClr val="tx1"/>
-        </a:solidFill>
-        <a:latin typeface="+mn-lt"/>
-        <a:ea typeface="+mn-ea"/>
-        <a:cs typeface="+mn-cs"/>
-      </a:defRPr>
-    </a:lvl5pPr>
-    <a:lvl6pPr marL="2286000" algn="l" defTabSz="457200" rtl="0" eaLnBrk="1" latinLnBrk="0" hangingPunct="1">
-      <a:defRPr sz="1200" kern="1200">
-        <a:solidFill>
-          <a:schemeClr val="tx1"/>
-        </a:solidFill>
-        <a:latin typeface="+mn-lt"/>
-        <a:ea typeface="+mn-ea"/>
-        <a:cs typeface="+mn-cs"/>
-      </a:defRPr>
-    </a:lvl6pPr>
-    <a:lvl7pPr marL="2743200" algn="l" defTabSz="457200" rtl="0" eaLnBrk="1" latinLnBrk="0" hangingPunct="1">
-      <a:defRPr sz="1200" kern="1200">
-        <a:solidFill>
-          <a:schemeClr val="tx1"/>
-        </a:solidFill>
-        <a:latin typeface="+mn-lt"/>
-        <a:ea typeface="+mn-ea"/>
-        <a:cs typeface="+mn-cs"/>
-      </a:defRPr>
-    </a:lvl7pPr>
-    <a:lvl8pPr marL="3200400" algn="l" defTabSz="457200" rtl="0" eaLnBrk="1" latinLnBrk="0" hangingPunct="1">
-      <a:defRPr sz="1200" kern="1200">
-        <a:solidFill>
-          <a:schemeClr val="tx1"/>
-        </a:solidFill>
-        <a:latin typeface="+mn-lt"/>
-        <a:ea typeface="+mn-ea"/>
-        <a:cs typeface="+mn-cs"/>
-      </a:defRPr>
-    </a:lvl8pPr>
-    <a:lvl9pPr marL="3657600" algn="l" defTabSz="457200" rtl="0" eaLnBrk="1" latinLnBrk="0" hangingPunct="1">
-      <a:defRPr sz="1200" kern="1200">
-        <a:solidFill>
-          <a:schemeClr val="tx1"/>
-        </a:solidFill>
-        <a:latin typeface="+mn-lt"/>
-        <a:ea typeface="+mn-ea"/>
-        <a:cs typeface="+mn-cs"/>
-      </a:defRPr>
-    </a:lvl9pPr>
-  </p:notesStyle>
-</p:notesMaster>
-</file>
-
-<file path=ppt/notesSlides/notesSlide1.xml><?xml version="1.0" encoding="utf-8"?>
-<p:notes xmlns:a="http://schemas.openxmlformats.org/drawingml/2006/main" xmlns:p="http://schemas.openxmlformats.org/presentationml/2006/main" xmlns:r="http://schemas.openxmlformats.org/officeDocument/2006/relationships">
-  <p:cSld>
-    <p:spTree>
-      <p:nvGrpSpPr>
-        <p:cNvPr id="1" name=""/>
-        <p:cNvGrpSpPr/>
-        <p:nvPr/>
-      </p:nvGrpSpPr>
-      <p:grpSpPr>
-        <a:xfrm>
-          <a:off x="0" y="0"/>
-          <a:ext cx="0" cy="0"/>
-          <a:chOff x="0" y="0"/>
-          <a:chExt cx="0" cy="0"/>
-        </a:xfrm>
-      </p:grpSpPr>
-      <p:sp>
-        <p:nvSpPr>
-          <p:cNvPr id="2" name="Slide Image Placeholder 1"/>
-          <p:cNvSpPr>
-            <a:spLocks noGrp="1"/>
-          </p:cNvSpPr>
-          <p:nvPr>
-            <p:ph type="sldImg" idx="2"/>
-          </p:nvPr>
-        </p:nvSpPr>
-        <p:spPr/>
-      </p:sp>
-      <p:sp>
-        <p:nvSpPr>
-          <p:cNvPr id="3" name="Notes Placeholder 2"/>
-          <p:cNvSpPr>
-            <a:spLocks noGrp="1"/>
-          </p:cNvSpPr>
-          <p:nvPr>
-            <p:ph type="body" idx="3" sz="quarter"/>
-          </p:nvPr>
-        </p:nvSpPr>
-        <p:spPr/>
-        <p:txBody>
-          <a:bodyPr/>
-          <a:lstStyle/>
-          <a:p>
-            <a:r>
-              <a:t>Good morning faculty. We are team Byte Brigades presenting Review 2 for CSI3010 Data Warehousing &amp; Data Mining. Our team members are Mahaprabhu K (24MID0109) and Pavithran O (24MID0144). Today we present the four core data mining deliverables: Classification, Clustering, Association Rules, and Default Prediction.</a:t>
-            </a:r>
-          </a:p>
-        </p:txBody>
-      </p:sp>
-      <p:sp>
-        <p:nvSpPr>
-          <p:cNvPr id="4" name="Slide Number Placeholder 3"/>
-          <p:cNvSpPr>
-            <a:spLocks noGrp="1"/>
-          </p:cNvSpPr>
-          <p:nvPr>
-            <p:ph type="sldNum" idx="5" sz="quarter"/>
-          </p:nvPr>
-        </p:nvSpPr>
-        <p:spPr/>
-      </p:sp>
-    </p:spTree>
-  </p:cSld>
-  <p:clrMapOvr>
-    <a:masterClrMapping/>
-  </p:clrMapOvr>
-</p:notes>
-</file>
-
-<file path=ppt/notesSlides/notesSlide10.xml><?xml version="1.0" encoding="utf-8"?>
-<p:notes xmlns:a="http://schemas.openxmlformats.org/drawingml/2006/main" xmlns:p="http://schemas.openxmlformats.org/presentationml/2006/main" xmlns:r="http://schemas.openxmlformats.org/officeDocument/2006/relationships">
-  <p:cSld>
-    <p:spTree>
-      <p:nvGrpSpPr>
-        <p:cNvPr id="1" name=""/>
-        <p:cNvGrpSpPr/>
-        <p:nvPr/>
-      </p:nvGrpSpPr>
-      <p:grpSpPr>
-        <a:xfrm>
-          <a:off x="0" y="0"/>
-          <a:ext cx="0" cy="0"/>
-          <a:chOff x="0" y="0"/>
-          <a:chExt cx="0" cy="0"/>
-        </a:xfrm>
-      </p:grpSpPr>
-      <p:sp>
-        <p:nvSpPr>
-          <p:cNvPr id="2" name="Slide Image Placeholder 1"/>
-          <p:cNvSpPr>
-            <a:spLocks noGrp="1"/>
-          </p:cNvSpPr>
-          <p:nvPr>
-            <p:ph type="sldImg" idx="2"/>
-          </p:nvPr>
-        </p:nvSpPr>
-        <p:spPr/>
-      </p:sp>
-      <p:sp>
-        <p:nvSpPr>
-          <p:cNvPr id="3" name="Notes Placeholder 2"/>
-          <p:cNvSpPr>
-            <a:spLocks noGrp="1"/>
-          </p:cNvSpPr>
-          <p:nvPr>
-            <p:ph type="body" idx="3" sz="quarter"/>
-          </p:nvPr>
-        </p:nvSpPr>
-        <p:spPr/>
-        <p:txBody>
-          <a:bodyPr/>
-          <a:lstStyle/>
-          <a:p>
-            <a:r>
-              <a:t>In summary, all four required components of Review 2 are fully completed and verified. In Review 3 we will demonstrate the live interactive dashboard and real-time simulator. Thank you faculty, we are ready for your questions.</a:t>
-            </a:r>
-          </a:p>
-        </p:txBody>
-      </p:sp>
-      <p:sp>
-        <p:nvSpPr>
-          <p:cNvPr id="4" name="Slide Number Placeholder 3"/>
-          <p:cNvSpPr>
-            <a:spLocks noGrp="1"/>
-          </p:cNvSpPr>
-          <p:nvPr>
-            <p:ph type="sldNum" idx="5" sz="quarter"/>
-          </p:nvPr>
-        </p:nvSpPr>
-        <p:spPr/>
-      </p:sp>
-    </p:spTree>
-  </p:cSld>
-  <p:clrMapOvr>
-    <a:masterClrMapping/>
-  </p:clrMapOvr>
-</p:notes>
-</file>
-
-<file path=ppt/notesSlides/notesSlide2.xml><?xml version="1.0" encoding="utf-8"?>
-<p:notes xmlns:a="http://schemas.openxmlformats.org/drawingml/2006/main" xmlns:p="http://schemas.openxmlformats.org/presentationml/2006/main" xmlns:r="http://schemas.openxmlformats.org/officeDocument/2006/relationships">
-  <p:cSld>
-    <p:spTree>
-      <p:nvGrpSpPr>
-        <p:cNvPr id="1" name=""/>
-        <p:cNvGrpSpPr/>
-        <p:nvPr/>
-      </p:nvGrpSpPr>
-      <p:grpSpPr>
-        <a:xfrm>
-          <a:off x="0" y="0"/>
-          <a:ext cx="0" cy="0"/>
-          <a:chOff x="0" y="0"/>
-          <a:chExt cx="0" cy="0"/>
-        </a:xfrm>
-      </p:grpSpPr>
-      <p:sp>
-        <p:nvSpPr>
-          <p:cNvPr id="2" name="Slide Image Placeholder 1"/>
-          <p:cNvSpPr>
-            <a:spLocks noGrp="1"/>
-          </p:cNvSpPr>
-          <p:nvPr>
-            <p:ph type="sldImg" idx="2"/>
-          </p:nvPr>
-        </p:nvSpPr>
-        <p:spPr/>
-      </p:sp>
-      <p:sp>
-        <p:nvSpPr>
-          <p:cNvPr id="3" name="Notes Placeholder 2"/>
-          <p:cNvSpPr>
-            <a:spLocks noGrp="1"/>
-          </p:cNvSpPr>
-          <p:nvPr>
-            <p:ph type="body" idx="3" sz="quarter"/>
-          </p:nvPr>
-        </p:nvSpPr>
-        <p:spPr/>
-        <p:txBody>
-          <a:bodyPr/>
-          <a:lstStyle/>
-          <a:p>
-            <a:r>
-              <a:t>Here is the dataset profile. With 50,000 records, defaults represent only 11.7%. A naive model predicting zero defaults achieves 88% accuracy while failing completely. Hence our evaluation strictly prioritizes Recall, F1-Score, and ROC-AUC.</a:t>
-            </a:r>
-          </a:p>
-        </p:txBody>
-      </p:sp>
-      <p:sp>
-        <p:nvSpPr>
-          <p:cNvPr id="4" name="Slide Number Placeholder 3"/>
-          <p:cNvSpPr>
-            <a:spLocks noGrp="1"/>
-          </p:cNvSpPr>
-          <p:nvPr>
-            <p:ph type="sldNum" idx="5" sz="quarter"/>
-          </p:nvPr>
-        </p:nvSpPr>
-        <p:spPr/>
-      </p:sp>
-    </p:spTree>
-  </p:cSld>
-  <p:clrMapOvr>
-    <a:masterClrMapping/>
-  </p:clrMapOvr>
-</p:notes>
-</file>
-
-<file path=ppt/notesSlides/notesSlide3.xml><?xml version="1.0" encoding="utf-8"?>
-<p:notes xmlns:a="http://schemas.openxmlformats.org/drawingml/2006/main" xmlns:p="http://schemas.openxmlformats.org/presentationml/2006/main" xmlns:r="http://schemas.openxmlformats.org/officeDocument/2006/relationships">
-  <p:cSld>
-    <p:spTree>
-      <p:nvGrpSpPr>
-        <p:cNvPr id="1" name=""/>
-        <p:cNvGrpSpPr/>
-        <p:nvPr/>
-      </p:nvGrpSpPr>
-      <p:grpSpPr>
-        <a:xfrm>
-          <a:off x="0" y="0"/>
-          <a:ext cx="0" cy="0"/>
-          <a:chOff x="0" y="0"/>
-          <a:chExt cx="0" cy="0"/>
-        </a:xfrm>
-      </p:grpSpPr>
-      <p:sp>
-        <p:nvSpPr>
-          <p:cNvPr id="2" name="Slide Image Placeholder 1"/>
-          <p:cNvSpPr>
-            <a:spLocks noGrp="1"/>
-          </p:cNvSpPr>
-          <p:nvPr>
-            <p:ph type="sldImg" idx="2"/>
-          </p:nvPr>
-        </p:nvSpPr>
-        <p:spPr/>
-      </p:sp>
-      <p:sp>
-        <p:nvSpPr>
-          <p:cNvPr id="3" name="Notes Placeholder 2"/>
-          <p:cNvSpPr>
-            <a:spLocks noGrp="1"/>
-          </p:cNvSpPr>
-          <p:nvPr>
-            <p:ph type="body" idx="3" sz="quarter"/>
-          </p:nvPr>
-        </p:nvSpPr>
-        <p:spPr/>
-        <p:txBody>
-          <a:bodyPr/>
-          <a:lstStyle/>
-          <a:p>
-            <a:r>
-              <a:t>Here is the training code and test set benchmark. Logistic regression provides high recall but generates too many false alarms (57% precision). Gradient Boosting achieved 97.11% precision and 83.25% recall, with a champion F1-score of 0.8965 and 0.9973 ROC-AUC.</a:t>
-            </a:r>
-          </a:p>
-        </p:txBody>
-      </p:sp>
-      <p:sp>
-        <p:nvSpPr>
-          <p:cNvPr id="4" name="Slide Number Placeholder 3"/>
-          <p:cNvSpPr>
-            <a:spLocks noGrp="1"/>
-          </p:cNvSpPr>
-          <p:nvPr>
-            <p:ph type="sldNum" idx="5" sz="quarter"/>
-          </p:nvPr>
-        </p:nvSpPr>
-        <p:spPr/>
-      </p:sp>
-    </p:spTree>
-  </p:cSld>
-  <p:clrMapOvr>
-    <a:masterClrMapping/>
-  </p:clrMapOvr>
-</p:notes>
-</file>
-
-<file path=ppt/notesSlides/notesSlide4.xml><?xml version="1.0" encoding="utf-8"?>
-<p:notes xmlns:a="http://schemas.openxmlformats.org/drawingml/2006/main" xmlns:p="http://schemas.openxmlformats.org/presentationml/2006/main" xmlns:r="http://schemas.openxmlformats.org/officeDocument/2006/relationships">
-  <p:cSld>
-    <p:spTree>
-      <p:nvGrpSpPr>
-        <p:cNvPr id="1" name=""/>
-        <p:cNvGrpSpPr/>
-        <p:nvPr/>
-      </p:nvGrpSpPr>
-      <p:grpSpPr>
-        <a:xfrm>
-          <a:off x="0" y="0"/>
-          <a:ext cx="0" cy="0"/>
-          <a:chOff x="0" y="0"/>
-          <a:chExt cx="0" cy="0"/>
-        </a:xfrm>
-      </p:grpSpPr>
-      <p:sp>
-        <p:nvSpPr>
-          <p:cNvPr id="2" name="Slide Image Placeholder 1"/>
-          <p:cNvSpPr>
-            <a:spLocks noGrp="1"/>
-          </p:cNvSpPr>
-          <p:nvPr>
-            <p:ph type="sldImg" idx="2"/>
-          </p:nvPr>
-        </p:nvSpPr>
-        <p:spPr/>
-      </p:sp>
-      <p:sp>
-        <p:nvSpPr>
-          <p:cNvPr id="3" name="Notes Placeholder 2"/>
-          <p:cNvSpPr>
-            <a:spLocks noGrp="1"/>
-          </p:cNvSpPr>
-          <p:nvPr>
-            <p:ph type="body" idx="3" sz="quarter"/>
-          </p:nvPr>
-        </p:nvSpPr>
-        <p:spPr/>
-        <p:txBody>
-          <a:bodyPr/>
-          <a:lstStyle/>
-          <a:p>
-            <a:r>
-              <a:t>The pictorial diagnostics show our four models. The confusion matrix heatmaps show Gradient Boosting maintains minimal false positives. The ROC curves confirm near-optimal probability separation across all decision thresholds.</a:t>
-            </a:r>
-          </a:p>
-        </p:txBody>
-      </p:sp>
-      <p:sp>
-        <p:nvSpPr>
-          <p:cNvPr id="4" name="Slide Number Placeholder 3"/>
-          <p:cNvSpPr>
-            <a:spLocks noGrp="1"/>
-          </p:cNvSpPr>
-          <p:nvPr>
-            <p:ph type="sldNum" idx="5" sz="quarter"/>
-          </p:nvPr>
-        </p:nvSpPr>
-        <p:spPr/>
-      </p:sp>
-    </p:spTree>
-  </p:cSld>
-  <p:clrMapOvr>
-    <a:masterClrMapping/>
-  </p:clrMapOvr>
-</p:notes>
-</file>
-
-<file path=ppt/notesSlides/notesSlide5.xml><?xml version="1.0" encoding="utf-8"?>
-<p:notes xmlns:a="http://schemas.openxmlformats.org/drawingml/2006/main" xmlns:p="http://schemas.openxmlformats.org/presentationml/2006/main" xmlns:r="http://schemas.openxmlformats.org/officeDocument/2006/relationships">
-  <p:cSld>
-    <p:spTree>
-      <p:nvGrpSpPr>
-        <p:cNvPr id="1" name=""/>
-        <p:cNvGrpSpPr/>
-        <p:nvPr/>
-      </p:nvGrpSpPr>
-      <p:grpSpPr>
-        <a:xfrm>
-          <a:off x="0" y="0"/>
-          <a:ext cx="0" cy="0"/>
-          <a:chOff x="0" y="0"/>
-          <a:chExt cx="0" cy="0"/>
-        </a:xfrm>
-      </p:grpSpPr>
-      <p:sp>
-        <p:nvSpPr>
-          <p:cNvPr id="2" name="Slide Image Placeholder 1"/>
-          <p:cNvSpPr>
-            <a:spLocks noGrp="1"/>
-          </p:cNvSpPr>
-          <p:nvPr>
-            <p:ph type="sldImg" idx="2"/>
-          </p:nvPr>
-        </p:nvSpPr>
-        <p:spPr/>
-      </p:sp>
-      <p:sp>
-        <p:nvSpPr>
-          <p:cNvPr id="3" name="Notes Placeholder 2"/>
-          <p:cNvSpPr>
-            <a:spLocks noGrp="1"/>
-          </p:cNvSpPr>
-          <p:nvPr>
-            <p:ph type="body" idx="3" sz="quarter"/>
-          </p:nvPr>
-        </p:nvSpPr>
-        <p:spPr/>
-        <p:txBody>
-          <a:bodyPr/>
-          <a:lstStyle/>
-          <a:p>
-            <a:r>
-              <a:t>Here is our clustering implementation. We standardized 5 core financial features and ran K-Means across K=2 to 6. The Elbow plot exhibits an inflection point at K=3, creating three distinct risk archetypes.</a:t>
-            </a:r>
-          </a:p>
-        </p:txBody>
-      </p:sp>
-      <p:sp>
-        <p:nvSpPr>
-          <p:cNvPr id="4" name="Slide Number Placeholder 3"/>
-          <p:cNvSpPr>
-            <a:spLocks noGrp="1"/>
-          </p:cNvSpPr>
-          <p:nvPr>
-            <p:ph type="sldNum" idx="5" sz="quarter"/>
-          </p:nvPr>
-        </p:nvSpPr>
-        <p:spPr/>
-      </p:sp>
-    </p:spTree>
-  </p:cSld>
-  <p:clrMapOvr>
-    <a:masterClrMapping/>
-  </p:clrMapOvr>
-</p:notes>
-</file>
-
-<file path=ppt/notesSlides/notesSlide6.xml><?xml version="1.0" encoding="utf-8"?>
-<p:notes xmlns:a="http://schemas.openxmlformats.org/drawingml/2006/main" xmlns:p="http://schemas.openxmlformats.org/presentationml/2006/main" xmlns:r="http://schemas.openxmlformats.org/officeDocument/2006/relationships">
-  <p:cSld>
-    <p:spTree>
-      <p:nvGrpSpPr>
-        <p:cNvPr id="1" name=""/>
-        <p:cNvGrpSpPr/>
-        <p:nvPr/>
-      </p:nvGrpSpPr>
-      <p:grpSpPr>
-        <a:xfrm>
-          <a:off x="0" y="0"/>
-          <a:ext cx="0" cy="0"/>
-          <a:chOff x="0" y="0"/>
-          <a:chExt cx="0" cy="0"/>
-        </a:xfrm>
-      </p:grpSpPr>
-      <p:sp>
-        <p:nvSpPr>
-          <p:cNvPr id="2" name="Slide Image Placeholder 1"/>
-          <p:cNvSpPr>
-            <a:spLocks noGrp="1"/>
-          </p:cNvSpPr>
-          <p:nvPr>
-            <p:ph type="sldImg" idx="2"/>
-          </p:nvPr>
-        </p:nvSpPr>
-        <p:spPr/>
-      </p:sp>
-      <p:sp>
-        <p:nvSpPr>
-          <p:cNvPr id="3" name="Notes Placeholder 2"/>
-          <p:cNvSpPr>
-            <a:spLocks noGrp="1"/>
-          </p:cNvSpPr>
-          <p:nvPr>
-            <p:ph type="body" idx="3" sz="quarter"/>
-          </p:nvPr>
-        </p:nvSpPr>
-        <p:spPr/>
-        <p:txBody>
-          <a:bodyPr/>
-          <a:lstStyle/>
-          <a:p>
-            <a:r>
-              <a:t>Here are the mined borrower profiles alongside the 2D PCA projection. Cluster 2 represents Prime borrowers with a default rate of only 3.93%. Cluster 0 isolates vulnerable borrowers where default reaches 20.36%.</a:t>
-            </a:r>
-          </a:p>
-        </p:txBody>
-      </p:sp>
-      <p:sp>
-        <p:nvSpPr>
-          <p:cNvPr id="4" name="Slide Number Placeholder 3"/>
-          <p:cNvSpPr>
-            <a:spLocks noGrp="1"/>
-          </p:cNvSpPr>
-          <p:nvPr>
-            <p:ph type="sldNum" idx="5" sz="quarter"/>
-          </p:nvPr>
-        </p:nvSpPr>
-        <p:spPr/>
-      </p:sp>
-    </p:spTree>
-  </p:cSld>
-  <p:clrMapOvr>
-    <a:masterClrMapping/>
-  </p:clrMapOvr>
-</p:notes>
-</file>
-
-<file path=ppt/notesSlides/notesSlide7.xml><?xml version="1.0" encoding="utf-8"?>
-<p:notes xmlns:a="http://schemas.openxmlformats.org/drawingml/2006/main" xmlns:p="http://schemas.openxmlformats.org/presentationml/2006/main" xmlns:r="http://schemas.openxmlformats.org/officeDocument/2006/relationships">
-  <p:cSld>
-    <p:spTree>
-      <p:nvGrpSpPr>
-        <p:cNvPr id="1" name=""/>
-        <p:cNvGrpSpPr/>
-        <p:nvPr/>
-      </p:nvGrpSpPr>
-      <p:grpSpPr>
-        <a:xfrm>
-          <a:off x="0" y="0"/>
-          <a:ext cx="0" cy="0"/>
-          <a:chOff x="0" y="0"/>
-          <a:chExt cx="0" cy="0"/>
-        </a:xfrm>
-      </p:grpSpPr>
-      <p:sp>
-        <p:nvSpPr>
-          <p:cNvPr id="2" name="Slide Image Placeholder 1"/>
-          <p:cNvSpPr>
-            <a:spLocks noGrp="1"/>
-          </p:cNvSpPr>
-          <p:nvPr>
-            <p:ph type="sldImg" idx="2"/>
-          </p:nvPr>
-        </p:nvSpPr>
-        <p:spPr/>
-      </p:sp>
-      <p:sp>
-        <p:nvSpPr>
-          <p:cNvPr id="3" name="Notes Placeholder 2"/>
-          <p:cNvSpPr>
-            <a:spLocks noGrp="1"/>
-          </p:cNvSpPr>
-          <p:nvPr>
-            <p:ph type="body" idx="3" sz="quarter"/>
-          </p:nvPr>
-        </p:nvSpPr>
-        <p:spPr/>
-        <p:txBody>
-          <a:bodyPr/>
-          <a:lstStyle/>
-          <a:p>
-            <a:r>
-              <a:t>To apply the Apriori algorithm, continuous numerical features were converted to categorical bins. We set a minimum support of 3% and confidence of 30%, filtering specifically for rules leading to Default=Yes. Lift indicates the multiplicative default risk increase above baseline.</a:t>
-            </a:r>
-          </a:p>
-        </p:txBody>
-      </p:sp>
-      <p:sp>
-        <p:nvSpPr>
-          <p:cNvPr id="4" name="Slide Number Placeholder 3"/>
-          <p:cNvSpPr>
-            <a:spLocks noGrp="1"/>
-          </p:cNvSpPr>
-          <p:nvPr>
-            <p:ph type="sldNum" idx="5" sz="quarter"/>
-          </p:nvPr>
-        </p:nvSpPr>
-        <p:spPr/>
-      </p:sp>
-    </p:spTree>
-  </p:cSld>
-  <p:clrMapOvr>
-    <a:masterClrMapping/>
-  </p:clrMapOvr>
-</p:notes>
-</file>
-
-<file path=ppt/notesSlides/notesSlide8.xml><?xml version="1.0" encoding="utf-8"?>
-<p:notes xmlns:a="http://schemas.openxmlformats.org/drawingml/2006/main" xmlns:p="http://schemas.openxmlformats.org/presentationml/2006/main" xmlns:r="http://schemas.openxmlformats.org/officeDocument/2006/relationships">
-  <p:cSld>
-    <p:spTree>
-      <p:nvGrpSpPr>
-        <p:cNvPr id="1" name=""/>
-        <p:cNvGrpSpPr/>
-        <p:nvPr/>
-      </p:nvGrpSpPr>
-      <p:grpSpPr>
-        <a:xfrm>
-          <a:off x="0" y="0"/>
-          <a:ext cx="0" cy="0"/>
-          <a:chOff x="0" y="0"/>
-          <a:chExt cx="0" cy="0"/>
-        </a:xfrm>
-      </p:grpSpPr>
-      <p:sp>
-        <p:nvSpPr>
-          <p:cNvPr id="2" name="Slide Image Placeholder 1"/>
-          <p:cNvSpPr>
-            <a:spLocks noGrp="1"/>
-          </p:cNvSpPr>
-          <p:nvPr>
-            <p:ph type="sldImg" idx="2"/>
-          </p:nvPr>
-        </p:nvSpPr>
-        <p:spPr/>
-      </p:sp>
-      <p:sp>
-        <p:nvSpPr>
-          <p:cNvPr id="3" name="Notes Placeholder 2"/>
-          <p:cNvSpPr>
-            <a:spLocks noGrp="1"/>
-          </p:cNvSpPr>
-          <p:nvPr>
-            <p:ph type="body" idx="3" sz="quarter"/>
-          </p:nvPr>
-        </p:nvSpPr>
-        <p:spPr/>
-        <p:txBody>
-          <a:bodyPr/>
-          <a:lstStyle/>
-          <a:p>
-            <a:r>
-              <a:t>Here is the pictorial representation of our mined association rules. Rule 1 exhibits a Lift of 5.69x with 66.93% confidence when low income, poor credit, and large loan amount co-occur. Rule 3 shows that lacking a co-signer under high DTI drives default risk over 54%.</a:t>
-            </a:r>
-          </a:p>
-        </p:txBody>
-      </p:sp>
-      <p:sp>
-        <p:nvSpPr>
-          <p:cNvPr id="4" name="Slide Number Placeholder 3"/>
-          <p:cNvSpPr>
-            <a:spLocks noGrp="1"/>
-          </p:cNvSpPr>
-          <p:nvPr>
-            <p:ph type="sldNum" idx="5" sz="quarter"/>
-          </p:nvPr>
-        </p:nvSpPr>
-        <p:spPr/>
-      </p:sp>
-    </p:spTree>
-  </p:cSld>
-  <p:clrMapOvr>
-    <a:masterClrMapping/>
-  </p:clrMapOvr>
-</p:notes>
-</file>
-
-<file path=ppt/notesSlides/notesSlide9.xml><?xml version="1.0" encoding="utf-8"?>
-<p:notes xmlns:a="http://schemas.openxmlformats.org/drawingml/2006/main" xmlns:p="http://schemas.openxmlformats.org/presentationml/2006/main" xmlns:r="http://schemas.openxmlformats.org/officeDocument/2006/relationships">
-  <p:cSld>
-    <p:spTree>
-      <p:nvGrpSpPr>
-        <p:cNvPr id="1" name=""/>
-        <p:cNvGrpSpPr/>
-        <p:nvPr/>
-      </p:nvGrpSpPr>
-      <p:grpSpPr>
-        <a:xfrm>
-          <a:off x="0" y="0"/>
-          <a:ext cx="0" cy="0"/>
-          <a:chOff x="0" y="0"/>
-          <a:chExt cx="0" cy="0"/>
-        </a:xfrm>
-      </p:grpSpPr>
-      <p:sp>
-        <p:nvSpPr>
-          <p:cNvPr id="2" name="Slide Image Placeholder 1"/>
-          <p:cNvSpPr>
-            <a:spLocks noGrp="1"/>
-          </p:cNvSpPr>
-          <p:nvPr>
-            <p:ph type="sldImg" idx="2"/>
-          </p:nvPr>
-        </p:nvSpPr>
-        <p:spPr/>
-      </p:sp>
-      <p:sp>
-        <p:nvSpPr>
-          <p:cNvPr id="3" name="Notes Placeholder 2"/>
-          <p:cNvSpPr>
-            <a:spLocks noGrp="1"/>
-          </p:cNvSpPr>
-          <p:nvPr>
-            <p:ph type="body" idx="3" sz="quarter"/>
-          </p:nvPr>
-        </p:nvSpPr>
-        <p:spPr/>
-        <p:txBody>
-          <a:bodyPr/>
-          <a:lstStyle/>
-          <a:p>
-            <a:r>
-              <a:t>Here is our prediction engine implementation. We transform borrower payloads and compute continuous probabilities P(Default=1). Our Brier score of 0.0168 confirms the probabilities are highly calibrated, enabling a clear 4-tier risk policy.</a:t>
-            </a:r>
-          </a:p>
-        </p:txBody>
-      </p:sp>
-      <p:sp>
-        <p:nvSpPr>
-          <p:cNvPr id="4" name="Slide Number Placeholder 3"/>
-          <p:cNvSpPr>
-            <a:spLocks noGrp="1"/>
-          </p:cNvSpPr>
-          <p:nvPr>
-            <p:ph type="sldNum" idx="5" sz="quarter"/>
-          </p:nvPr>
-        </p:nvSpPr>
-        <p:spPr/>
-      </p:sp>
-    </p:spTree>
-  </p:cSld>
-  <p:clrMapOvr>
-    <a:masterClrMapping/>
-  </p:clrMapOvr>
-</p:notes>
 </file>
 
 <file path=ppt/slideLayouts/slideLayout1.xml><?xml version="1.0" encoding="utf-8"?>
@@ -5677,7 +4627,7 @@
               </a:defRPr>
             </a:pPr>
             <a:r>
-              <a:t>CSI3010 | MODULE 4: PREDICTION</a:t>
+              <a:t>CSI3010 | TOPIC OVERVIEW &amp; INSTITUTIONAL ROLE</a:t>
             </a:r>
           </a:p>
         </p:txBody>
@@ -5713,7 +4663,7 @@
               </a:defRPr>
             </a:pPr>
             <a:r>
-              <a:t>Topic 4: Prediction — Concept &amp; Institutional Role</a:t>
+              <a:t>Overview: Prediction Engine</a:t>
             </a:r>
           </a:p>
         </p:txBody>
@@ -5727,7 +4677,191 @@
         <p:spPr>
           <a:xfrm>
             <a:off x="731520" y="1188720"/>
-            <a:ext cx="5212080" cy="2514600"/>
+            <a:ext cx="10728655" cy="3931920"/>
+          </a:xfrm>
+          <a:prstGeom prst="roundRect">
+            <a:avLst/>
+          </a:prstGeom>
+          <a:solidFill>
+            <a:srgbClr val="FFFFFF"/>
+          </a:solidFill>
+          <a:ln w="12700">
+            <a:solidFill>
+              <a:srgbClr val="2563EB"/>
+            </a:solidFill>
+          </a:ln>
+        </p:spPr>
+        <p:style>
+          <a:lnRef idx="1">
+            <a:schemeClr val="accent1"/>
+          </a:lnRef>
+          <a:fillRef idx="3">
+            <a:schemeClr val="accent1"/>
+          </a:fillRef>
+          <a:effectRef idx="2">
+            <a:schemeClr val="accent1"/>
+          </a:effectRef>
+          <a:fontRef idx="minor">
+            <a:schemeClr val="lt1"/>
+          </a:fontRef>
+        </p:style>
+        <p:txBody>
+          <a:bodyPr rtlCol="0" anchor="ctr"/>
+          <a:lstStyle/>
+          <a:p>
+            <a:pPr algn="ctr"/>
+          </a:p>
+        </p:txBody>
+      </p:sp>
+      <p:sp>
+        <p:nvSpPr>
+          <p:cNvPr id="6" name="TextBox 5"/>
+          <p:cNvSpPr txBox="1"/>
+          <p:nvPr/>
+        </p:nvSpPr>
+        <p:spPr>
+          <a:xfrm>
+            <a:off x="1005840" y="1371600"/>
+            <a:ext cx="10180015" cy="3566160"/>
+          </a:xfrm>
+          <a:prstGeom prst="rect">
+            <a:avLst/>
+          </a:prstGeom>
+          <a:noFill/>
+        </p:spPr>
+        <p:txBody>
+          <a:bodyPr wrap="square">
+            <a:spAutoFit/>
+          </a:bodyPr>
+          <a:lstStyle/>
+          <a:p>
+            <a:pPr>
+              <a:spcAft>
+                <a:spcPts val="1400"/>
+              </a:spcAft>
+              <a:defRPr sz="1600" b="1">
+                <a:solidFill>
+                  <a:srgbClr val="0F172A"/>
+                </a:solidFill>
+                <a:latin typeface="Segoe UI"/>
+              </a:defRPr>
+            </a:pPr>
+            <a:r>
+              <a:t>Heading: Prediction Engine</a:t>
+            </a:r>
+          </a:p>
+          <a:p>
+            <a:pPr>
+              <a:spcAft>
+                <a:spcPts val="1400"/>
+              </a:spcAft>
+              <a:defRPr sz="1200" b="1">
+                <a:solidFill>
+                  <a:srgbClr val="2563EB"/>
+                </a:solidFill>
+                <a:latin typeface="Segoe UI"/>
+              </a:defRPr>
+            </a:pPr>
+            <a:r>
+              <a:t>• What it is: </a:t>
+            </a:r>
+            <a:r>
+              <a:rPr sz="1200" b="0">
+                <a:solidFill>
+                  <a:srgbClr val="334155"/>
+                </a:solidFill>
+                <a:latin typeface="Segoe UI"/>
+              </a:rPr>
+              <a:t>Probabilistic inference engine computing continuous probability scores P(Default=1) in range [0.0, 1.0] for any applicant payload.</a:t>
+            </a:r>
+          </a:p>
+          <a:p>
+            <a:pPr>
+              <a:spcAft>
+                <a:spcPts val="1400"/>
+              </a:spcAft>
+              <a:defRPr sz="1200" b="1">
+                <a:solidFill>
+                  <a:srgbClr val="2563EB"/>
+                </a:solidFill>
+                <a:latin typeface="Segoe UI"/>
+              </a:defRPr>
+            </a:pPr>
+            <a:r>
+              <a:t>• Why it is needed: </a:t>
+            </a:r>
+            <a:r>
+              <a:rPr sz="1200" b="0">
+                <a:solidFill>
+                  <a:srgbClr val="334155"/>
+                </a:solidFill>
+                <a:latin typeface="Segoe UI"/>
+              </a:rPr>
+              <a:t>Real-world credit underwriting requires granular probability scores rather than rigid 0/1 binary labels for dynamic risk pricing.</a:t>
+            </a:r>
+          </a:p>
+          <a:p>
+            <a:pPr>
+              <a:spcAft>
+                <a:spcPts val="1400"/>
+              </a:spcAft>
+              <a:defRPr sz="1200" b="1">
+                <a:solidFill>
+                  <a:srgbClr val="2563EB"/>
+                </a:solidFill>
+                <a:latin typeface="Segoe UI"/>
+              </a:defRPr>
+            </a:pPr>
+            <a:r>
+              <a:t>• Where it is used: </a:t>
+            </a:r>
+            <a:r>
+              <a:rPr sz="1200" b="0">
+                <a:solidFill>
+                  <a:srgbClr val="334155"/>
+                </a:solidFill>
+                <a:latin typeface="Segoe UI"/>
+              </a:rPr>
+              <a:t>Integrated into automated loan pricing engines, regulatory capital calculations, and live applicant simulator forms.</a:t>
+            </a:r>
+          </a:p>
+          <a:p>
+            <a:pPr>
+              <a:spcAft>
+                <a:spcPts val="1400"/>
+              </a:spcAft>
+              <a:defRPr sz="1200" b="1">
+                <a:solidFill>
+                  <a:srgbClr val="2563EB"/>
+                </a:solidFill>
+                <a:latin typeface="Segoe UI"/>
+              </a:defRPr>
+            </a:pPr>
+            <a:r>
+              <a:t>• How it is helpful: </a:t>
+            </a:r>
+            <a:r>
+              <a:rPr sz="1200" b="0">
+                <a:solidFill>
+                  <a:srgbClr val="334155"/>
+                </a:solidFill>
+                <a:latin typeface="Segoe UI"/>
+              </a:rPr>
+              <a:t>Maps applicants into 4 distinct policy tiers (Low, Moderate, High, Critical Risk) with an exceptional 0.0168 Brier calibration score.</a:t>
+            </a:r>
+          </a:p>
+        </p:txBody>
+      </p:sp>
+      <p:sp>
+        <p:nvSpPr>
+          <p:cNvPr id="7" name="Rounded Rectangle 6"/>
+          <p:cNvSpPr/>
+          <p:nvPr/>
+        </p:nvSpPr>
+        <p:spPr>
+          <a:xfrm>
+            <a:off x="731520" y="5303520"/>
+            <a:ext cx="10728655" cy="1051560"/>
           </a:xfrm>
           <a:prstGeom prst="roundRect">
             <a:avLst/>
@@ -5765,14 +4899,14 @@
       </p:sp>
       <p:sp>
         <p:nvSpPr>
-          <p:cNvPr id="6" name="TextBox 5"/>
+          <p:cNvPr id="8" name="TextBox 7"/>
           <p:cNvSpPr txBox="1"/>
           <p:nvPr/>
         </p:nvSpPr>
         <p:spPr>
           <a:xfrm>
-            <a:off x="914400" y="1325880"/>
-            <a:ext cx="4846320" cy="2240280"/>
+            <a:off x="1005840" y="5394960"/>
+            <a:ext cx="10180015" cy="868680"/>
           </a:xfrm>
           <a:prstGeom prst="rect">
             <a:avLst/>
@@ -5787,9 +4921,9 @@
           <a:p>
             <a:pPr>
               <a:spcAft>
-                <a:spcPts val="800"/>
+                <a:spcPts val="200"/>
               </a:spcAft>
-              <a:defRPr sz="1300" b="1">
+              <a:defRPr sz="1200" b="1">
                 <a:solidFill>
                   <a:srgbClr val="2563EB"/>
                 </a:solidFill>
@@ -5797,451 +4931,20 @@
               </a:defRPr>
             </a:pPr>
             <a:r>
-              <a:t>1. WHY We Used It (Problem Statement)</a:t>
-            </a:r>
-          </a:p>
-          <a:p>
-            <a:pPr>
-              <a:spcAft>
-                <a:spcPts val="600"/>
-              </a:spcAft>
-              <a:defRPr sz="1200">
-                <a:solidFill>
-                  <a:srgbClr val="334155"/>
-                </a:solidFill>
-                <a:latin typeface="Segoe UI"/>
-              </a:defRPr>
-            </a:pPr>
-            <a:r>
-              <a:t>• Real-world fintech does not use binary 0/1 hard decisions; credit risk is a continuous probability.</a:t>
-            </a:r>
-          </a:p>
-          <a:p>
-            <a:pPr>
-              <a:spcAft>
-                <a:spcPts val="600"/>
-              </a:spcAft>
-              <a:defRPr sz="1200">
-                <a:solidFill>
-                  <a:srgbClr val="334155"/>
-                </a:solidFill>
-                <a:latin typeface="Segoe UI"/>
-              </a:defRPr>
-            </a:pPr>
-            <a:r>
-              <a:t>• Loan pricing, interest rates, and regulatory capital reserves require an exact probability: P(Default=1).</a:t>
-            </a:r>
-          </a:p>
-          <a:p>
-            <a:pPr>
-              <a:spcAft>
-                <a:spcPts val="600"/>
-              </a:spcAft>
-              <a:defRPr sz="1200">
-                <a:solidFill>
-                  <a:srgbClr val="334155"/>
-                </a:solidFill>
-                <a:latin typeface="Segoe UI"/>
-              </a:defRPr>
-            </a:pPr>
-            <a:r>
-              <a:t>• Borrowers with 21% risk require very different underwriting actions than those with 95% risk.</a:t>
-            </a:r>
-          </a:p>
-        </p:txBody>
-      </p:sp>
-      <p:sp>
-        <p:nvSpPr>
-          <p:cNvPr id="7" name="Rounded Rectangle 6"/>
-          <p:cNvSpPr/>
-          <p:nvPr/>
-        </p:nvSpPr>
-        <p:spPr>
-          <a:xfrm>
-            <a:off x="6217920" y="1188720"/>
-            <a:ext cx="5242255" cy="2514600"/>
-          </a:xfrm>
-          <a:prstGeom prst="roundRect">
-            <a:avLst/>
-          </a:prstGeom>
-          <a:solidFill>
-            <a:srgbClr val="ECFDF5"/>
-          </a:solidFill>
-          <a:ln w="12700">
-            <a:solidFill>
-              <a:srgbClr val="10B981"/>
-            </a:solidFill>
-          </a:ln>
-        </p:spPr>
-        <p:style>
-          <a:lnRef idx="1">
-            <a:schemeClr val="accent1"/>
-          </a:lnRef>
-          <a:fillRef idx="3">
-            <a:schemeClr val="accent1"/>
-          </a:fillRef>
-          <a:effectRef idx="2">
-            <a:schemeClr val="accent1"/>
-          </a:effectRef>
-          <a:fontRef idx="minor">
-            <a:schemeClr val="lt1"/>
-          </a:fontRef>
-        </p:style>
-        <p:txBody>
-          <a:bodyPr rtlCol="0" anchor="ctr"/>
-          <a:lstStyle/>
-          <a:p>
-            <a:pPr algn="ctr"/>
-          </a:p>
-        </p:txBody>
-      </p:sp>
-      <p:sp>
-        <p:nvSpPr>
-          <p:cNvPr id="8" name="TextBox 7"/>
-          <p:cNvSpPr txBox="1"/>
-          <p:nvPr/>
-        </p:nvSpPr>
-        <p:spPr>
-          <a:xfrm>
-            <a:off x="6400800" y="1325880"/>
-            <a:ext cx="4876495" cy="2240280"/>
-          </a:xfrm>
-          <a:prstGeom prst="rect">
-            <a:avLst/>
-          </a:prstGeom>
-          <a:noFill/>
-        </p:spPr>
-        <p:txBody>
-          <a:bodyPr wrap="square">
-            <a:spAutoFit/>
-          </a:bodyPr>
-          <a:lstStyle/>
-          <a:p>
-            <a:pPr>
-              <a:spcAft>
-                <a:spcPts val="800"/>
-              </a:spcAft>
-              <a:defRPr sz="1300" b="1">
-                <a:solidFill>
-                  <a:srgbClr val="10B981"/>
-                </a:solidFill>
-                <a:latin typeface="Segoe UI"/>
-              </a:defRPr>
-            </a:pPr>
-            <a:r>
-              <a:t>2. HOW We Used It (Pipeline &amp; Methods)</a:t>
-            </a:r>
-          </a:p>
-          <a:p>
-            <a:pPr>
-              <a:spcAft>
-                <a:spcPts val="600"/>
-              </a:spcAft>
-              <a:defRPr sz="1200">
-                <a:solidFill>
-                  <a:srgbClr val="334155"/>
-                </a:solidFill>
-                <a:latin typeface="Segoe UI"/>
-              </a:defRPr>
-            </a:pPr>
-            <a:r>
-              <a:t>• Built LoanDefaultPredictor wrapping the preprocessor and champion Gradient Boosting model.</a:t>
-            </a:r>
-          </a:p>
-          <a:p>
-            <a:pPr>
-              <a:spcAft>
-                <a:spcPts val="600"/>
-              </a:spcAft>
-              <a:defRPr sz="1200">
-                <a:solidFill>
-                  <a:srgbClr val="334155"/>
-                </a:solidFill>
-                <a:latin typeface="Segoe UI"/>
-              </a:defRPr>
-            </a:pPr>
-            <a:r>
-              <a:t>• Computes continuous probability P(Default=1) in [0.0, 1.0] for any raw borrower dictionary payload.</a:t>
-            </a:r>
-          </a:p>
-          <a:p>
-            <a:pPr>
-              <a:spcAft>
-                <a:spcPts val="600"/>
-              </a:spcAft>
-              <a:defRPr sz="1200">
-                <a:solidFill>
-                  <a:srgbClr val="334155"/>
-                </a:solidFill>
-                <a:latin typeface="Segoe UI"/>
-              </a:defRPr>
-            </a:pPr>
-            <a:r>
-              <a:t>• Evaluated probability calibration quality on test data using Brier Score Loss (0.0168) and Log Loss (0.0622).</a:t>
-            </a:r>
-          </a:p>
-        </p:txBody>
-      </p:sp>
-      <p:sp>
-        <p:nvSpPr>
-          <p:cNvPr id="9" name="Rounded Rectangle 8"/>
-          <p:cNvSpPr/>
-          <p:nvPr/>
-        </p:nvSpPr>
-        <p:spPr>
-          <a:xfrm>
-            <a:off x="731520" y="3886200"/>
-            <a:ext cx="5212080" cy="2560320"/>
-          </a:xfrm>
-          <a:prstGeom prst="roundRect">
-            <a:avLst/>
-          </a:prstGeom>
-          <a:solidFill>
-            <a:srgbClr val="FEF9C3"/>
-          </a:solidFill>
-          <a:ln w="12700">
-            <a:solidFill>
-              <a:srgbClr val="CA8A04"/>
-            </a:solidFill>
-          </a:ln>
-        </p:spPr>
-        <p:style>
-          <a:lnRef idx="1">
-            <a:schemeClr val="accent1"/>
-          </a:lnRef>
-          <a:fillRef idx="3">
-            <a:schemeClr val="accent1"/>
-          </a:fillRef>
-          <a:effectRef idx="2">
-            <a:schemeClr val="accent1"/>
-          </a:effectRef>
-          <a:fontRef idx="minor">
-            <a:schemeClr val="lt1"/>
-          </a:fontRef>
-        </p:style>
-        <p:txBody>
-          <a:bodyPr rtlCol="0" anchor="ctr"/>
-          <a:lstStyle/>
-          <a:p>
-            <a:pPr algn="ctr"/>
-          </a:p>
-        </p:txBody>
-      </p:sp>
-      <p:sp>
-        <p:nvSpPr>
-          <p:cNvPr id="10" name="TextBox 9"/>
-          <p:cNvSpPr txBox="1"/>
-          <p:nvPr/>
-        </p:nvSpPr>
-        <p:spPr>
-          <a:xfrm>
-            <a:off x="914400" y="4023360"/>
-            <a:ext cx="4846320" cy="2286000"/>
-          </a:xfrm>
-          <a:prstGeom prst="rect">
-            <a:avLst/>
-          </a:prstGeom>
-          <a:noFill/>
-        </p:spPr>
-        <p:txBody>
-          <a:bodyPr wrap="square">
-            <a:spAutoFit/>
-          </a:bodyPr>
-          <a:lstStyle/>
-          <a:p>
-            <a:pPr>
-              <a:spcAft>
-                <a:spcPts val="800"/>
-              </a:spcAft>
-              <a:defRPr sz="1300" b="1">
-                <a:solidFill>
-                  <a:srgbClr val="CA8A04"/>
-                </a:solidFill>
-                <a:latin typeface="Segoe UI"/>
-              </a:defRPr>
-            </a:pPr>
-            <a:r>
-              <a:t>3. WHAT It Does in Our Project (System Role)</a:t>
-            </a:r>
-          </a:p>
-          <a:p>
-            <a:pPr>
-              <a:spcAft>
-                <a:spcPts val="600"/>
-              </a:spcAft>
-              <a:defRPr sz="1200">
-                <a:solidFill>
-                  <a:srgbClr val="334155"/>
-                </a:solidFill>
-                <a:latin typeface="Segoe UI"/>
-              </a:defRPr>
-            </a:pPr>
-            <a:r>
-              <a:t>• Transforms raw applicant data in real time and predicts continuous default probability.</a:t>
-            </a:r>
-          </a:p>
-          <a:p>
-            <a:pPr>
-              <a:spcAft>
-                <a:spcPts val="600"/>
-              </a:spcAft>
-              <a:defRPr sz="1200">
-                <a:solidFill>
-                  <a:srgbClr val="334155"/>
-                </a:solidFill>
-                <a:latin typeface="Segoe UI"/>
-              </a:defRPr>
-            </a:pPr>
-            <a:r>
-              <a:t>• Maps probabilities into 4 clear risk tier badges: Low (&lt;20%), Moderate (20-45%), High (45-70%), Critical (&gt;=70%).</a:t>
-            </a:r>
-          </a:p>
-          <a:p>
-            <a:pPr>
-              <a:spcAft>
-                <a:spcPts val="600"/>
-              </a:spcAft>
-              <a:defRPr sz="1200">
-                <a:solidFill>
-                  <a:srgbClr val="334155"/>
-                </a:solidFill>
-                <a:latin typeface="Segoe UI"/>
-              </a:defRPr>
-            </a:pPr>
-            <a:r>
-              <a:t>• Automatically extracts specific contributing risk factors (e.g. DTI &gt; 45%, Credit &lt; 600, No Co-Signer).</a:t>
-            </a:r>
-          </a:p>
-        </p:txBody>
-      </p:sp>
-      <p:sp>
-        <p:nvSpPr>
-          <p:cNvPr id="11" name="Rounded Rectangle 10"/>
-          <p:cNvSpPr/>
-          <p:nvPr/>
-        </p:nvSpPr>
-        <p:spPr>
-          <a:xfrm>
-            <a:off x="6217920" y="3886200"/>
-            <a:ext cx="5242255" cy="2560320"/>
-          </a:xfrm>
-          <a:prstGeom prst="roundRect">
-            <a:avLst/>
-          </a:prstGeom>
-          <a:solidFill>
-            <a:srgbClr val="F5F3FF"/>
-          </a:solidFill>
-          <a:ln w="12700">
-            <a:solidFill>
-              <a:srgbClr val="9333EA"/>
-            </a:solidFill>
-          </a:ln>
-        </p:spPr>
-        <p:style>
-          <a:lnRef idx="1">
-            <a:schemeClr val="accent1"/>
-          </a:lnRef>
-          <a:fillRef idx="3">
-            <a:schemeClr val="accent1"/>
-          </a:fillRef>
-          <a:effectRef idx="2">
-            <a:schemeClr val="accent1"/>
-          </a:effectRef>
-          <a:fontRef idx="minor">
-            <a:schemeClr val="lt1"/>
-          </a:fontRef>
-        </p:style>
-        <p:txBody>
-          <a:bodyPr rtlCol="0" anchor="ctr"/>
-          <a:lstStyle/>
-          <a:p>
-            <a:pPr algn="ctr"/>
-          </a:p>
-        </p:txBody>
-      </p:sp>
-      <p:sp>
-        <p:nvSpPr>
-          <p:cNvPr id="12" name="TextBox 11"/>
-          <p:cNvSpPr txBox="1"/>
-          <p:nvPr/>
-        </p:nvSpPr>
-        <p:spPr>
-          <a:xfrm>
-            <a:off x="6400800" y="4023360"/>
-            <a:ext cx="4876495" cy="2286000"/>
-          </a:xfrm>
-          <a:prstGeom prst="rect">
-            <a:avLst/>
-          </a:prstGeom>
-          <a:noFill/>
-        </p:spPr>
-        <p:txBody>
-          <a:bodyPr wrap="square">
-            <a:spAutoFit/>
-          </a:bodyPr>
-          <a:lstStyle/>
-          <a:p>
-            <a:pPr>
-              <a:spcAft>
-                <a:spcPts val="800"/>
-              </a:spcAft>
-              <a:defRPr sz="1300" b="1">
-                <a:solidFill>
-                  <a:srgbClr val="9333EA"/>
-                </a:solidFill>
-                <a:latin typeface="Segoe UI"/>
-              </a:defRPr>
-            </a:pPr>
-            <a:r>
-              <a:t>4. PRACTICAL USE (Underwriting &amp; Business Value)</a:t>
-            </a:r>
-          </a:p>
-          <a:p>
-            <a:pPr>
-              <a:spcAft>
-                <a:spcPts val="600"/>
-              </a:spcAft>
-              <a:defRPr sz="1200">
-                <a:solidFill>
-                  <a:srgbClr val="334155"/>
-                </a:solidFill>
-                <a:latin typeface="Segoe UI"/>
-              </a:defRPr>
-            </a:pPr>
-            <a:r>
-              <a:t>• Risk-Based Loan Pricing: Low risk applicants get prime APR (4.5%); higher risk gets compensatory pricing.</a:t>
-            </a:r>
-          </a:p>
-          <a:p>
-            <a:pPr>
-              <a:spcAft>
-                <a:spcPts val="600"/>
-              </a:spcAft>
-              <a:defRPr sz="1200">
-                <a:solidFill>
-                  <a:srgbClr val="334155"/>
-                </a:solidFill>
-                <a:latin typeface="Segoe UI"/>
-              </a:defRPr>
-            </a:pPr>
-            <a:r>
-              <a:t>• Automated Adverse Action Notices: Explains to applicants exactly why their loan terms were adjusted.</a:t>
-            </a:r>
-          </a:p>
-          <a:p>
-            <a:pPr>
-              <a:spcAft>
-                <a:spcPts val="600"/>
-              </a:spcAft>
-              <a:defRPr sz="1200">
-                <a:solidFill>
-                  <a:srgbClr val="334155"/>
-                </a:solidFill>
-                <a:latin typeface="Segoe UI"/>
-              </a:defRPr>
-            </a:pPr>
-            <a:r>
-              <a:t>• Live Web Integration: Powers the interactive real-time loan underwriting simulator in Review 3.</a:t>
+              <a:t>Project Implementation: prediction/predictor.py  |  Champion Result: Brier Score: 0.0168 (Log Loss: 0.0622 | Test ROC-AUC: 0.9973)</a:t>
+            </a:r>
+          </a:p>
+          <a:p>
+            <a:pPr>
+              <a:defRPr sz="1100">
+                <a:solidFill>
+                  <a:srgbClr val="64748B"/>
+                </a:solidFill>
+                <a:latin typeface="Segoe UI"/>
+              </a:defRPr>
+            </a:pPr>
+            <a:r>
+              <a:t>Execution verified against Kaggle benchmark dataset (50,000 records, 18 financial features) with zero data leakage.</a:t>
             </a:r>
           </a:p>
         </p:txBody>
@@ -8458,7 +7161,7 @@
               </a:defRPr>
             </a:pPr>
             <a:r>
-              <a:t>CSI3010 | MODULE 1: CLASSIFICATION</a:t>
+              <a:t>CSI3010 | TOPIC OVERVIEW &amp; INSTITUTIONAL ROLE</a:t>
             </a:r>
           </a:p>
         </p:txBody>
@@ -8494,7 +7197,7 @@
               </a:defRPr>
             </a:pPr>
             <a:r>
-              <a:t>Topic 1: Classification — Concept &amp; Institutional Role</a:t>
+              <a:t>Overview: Classification</a:t>
             </a:r>
           </a:p>
         </p:txBody>
@@ -8508,7 +7211,191 @@
         <p:spPr>
           <a:xfrm>
             <a:off x="731520" y="1188720"/>
-            <a:ext cx="5212080" cy="2514600"/>
+            <a:ext cx="10728655" cy="3931920"/>
+          </a:xfrm>
+          <a:prstGeom prst="roundRect">
+            <a:avLst/>
+          </a:prstGeom>
+          <a:solidFill>
+            <a:srgbClr val="FFFFFF"/>
+          </a:solidFill>
+          <a:ln w="12700">
+            <a:solidFill>
+              <a:srgbClr val="2563EB"/>
+            </a:solidFill>
+          </a:ln>
+        </p:spPr>
+        <p:style>
+          <a:lnRef idx="1">
+            <a:schemeClr val="accent1"/>
+          </a:lnRef>
+          <a:fillRef idx="3">
+            <a:schemeClr val="accent1"/>
+          </a:fillRef>
+          <a:effectRef idx="2">
+            <a:schemeClr val="accent1"/>
+          </a:effectRef>
+          <a:fontRef idx="minor">
+            <a:schemeClr val="lt1"/>
+          </a:fontRef>
+        </p:style>
+        <p:txBody>
+          <a:bodyPr rtlCol="0" anchor="ctr"/>
+          <a:lstStyle/>
+          <a:p>
+            <a:pPr algn="ctr"/>
+          </a:p>
+        </p:txBody>
+      </p:sp>
+      <p:sp>
+        <p:nvSpPr>
+          <p:cNvPr id="6" name="TextBox 5"/>
+          <p:cNvSpPr txBox="1"/>
+          <p:nvPr/>
+        </p:nvSpPr>
+        <p:spPr>
+          <a:xfrm>
+            <a:off x="1005840" y="1371600"/>
+            <a:ext cx="10180015" cy="3566160"/>
+          </a:xfrm>
+          <a:prstGeom prst="rect">
+            <a:avLst/>
+          </a:prstGeom>
+          <a:noFill/>
+        </p:spPr>
+        <p:txBody>
+          <a:bodyPr wrap="square">
+            <a:spAutoFit/>
+          </a:bodyPr>
+          <a:lstStyle/>
+          <a:p>
+            <a:pPr>
+              <a:spcAft>
+                <a:spcPts val="1400"/>
+              </a:spcAft>
+              <a:defRPr sz="1600" b="1">
+                <a:solidFill>
+                  <a:srgbClr val="0F172A"/>
+                </a:solidFill>
+                <a:latin typeface="Segoe UI"/>
+              </a:defRPr>
+            </a:pPr>
+            <a:r>
+              <a:t>Heading: Classification</a:t>
+            </a:r>
+          </a:p>
+          <a:p>
+            <a:pPr>
+              <a:spcAft>
+                <a:spcPts val="1400"/>
+              </a:spcAft>
+              <a:defRPr sz="1200" b="1">
+                <a:solidFill>
+                  <a:srgbClr val="2563EB"/>
+                </a:solidFill>
+                <a:latin typeface="Segoe UI"/>
+              </a:defRPr>
+            </a:pPr>
+            <a:r>
+              <a:t>• What it is: </a:t>
+            </a:r>
+            <a:r>
+              <a:rPr sz="1200" b="0">
+                <a:solidFill>
+                  <a:srgbClr val="334155"/>
+                </a:solidFill>
+                <a:latin typeface="Segoe UI"/>
+              </a:rPr>
+              <a:t>Supervised machine learning method that categorizes borrower applications into binary outcomes (0: No Default, 1: Default).</a:t>
+            </a:r>
+          </a:p>
+          <a:p>
+            <a:pPr>
+              <a:spcAft>
+                <a:spcPts val="1400"/>
+              </a:spcAft>
+              <a:defRPr sz="1200" b="1">
+                <a:solidFill>
+                  <a:srgbClr val="2563EB"/>
+                </a:solidFill>
+                <a:latin typeface="Segoe UI"/>
+              </a:defRPr>
+            </a:pPr>
+            <a:r>
+              <a:t>• Why it is needed: </a:t>
+            </a:r>
+            <a:r>
+              <a:rPr sz="1200" b="0">
+                <a:solidFill>
+                  <a:srgbClr val="334155"/>
+                </a:solidFill>
+                <a:latin typeface="Segoe UI"/>
+              </a:rPr>
+              <a:t>Flags high-risk applicants before credit disbursement to prevent non-performing assets (NPAs) and bad-debt write-offs.</a:t>
+            </a:r>
+          </a:p>
+          <a:p>
+            <a:pPr>
+              <a:spcAft>
+                <a:spcPts val="1400"/>
+              </a:spcAft>
+              <a:defRPr sz="1200" b="1">
+                <a:solidFill>
+                  <a:srgbClr val="2563EB"/>
+                </a:solidFill>
+                <a:latin typeface="Segoe UI"/>
+              </a:defRPr>
+            </a:pPr>
+            <a:r>
+              <a:t>• Where it is used: </a:t>
+            </a:r>
+            <a:r>
+              <a:rPr sz="1200" b="0">
+                <a:solidFill>
+                  <a:srgbClr val="334155"/>
+                </a:solidFill>
+                <a:latin typeface="Segoe UI"/>
+              </a:rPr>
+              <a:t>Deployed in the initial automated credit underwriting pipeline to evaluate all incoming applicant profiles.</a:t>
+            </a:r>
+          </a:p>
+          <a:p>
+            <a:pPr>
+              <a:spcAft>
+                <a:spcPts val="1400"/>
+              </a:spcAft>
+              <a:defRPr sz="1200" b="1">
+                <a:solidFill>
+                  <a:srgbClr val="2563EB"/>
+                </a:solidFill>
+                <a:latin typeface="Segoe UI"/>
+              </a:defRPr>
+            </a:pPr>
+            <a:r>
+              <a:t>• How it is helpful: </a:t>
+            </a:r>
+            <a:r>
+              <a:rPr sz="1200" b="0">
+                <a:solidFill>
+                  <a:srgbClr val="334155"/>
+                </a:solidFill>
+                <a:latin typeface="Segoe UI"/>
+              </a:rPr>
+              <a:t>Provides fast, objective risk screening with 97.75% accuracy and an optimal 0.8965 F1-Score.</a:t>
+            </a:r>
+          </a:p>
+        </p:txBody>
+      </p:sp>
+      <p:sp>
+        <p:nvSpPr>
+          <p:cNvPr id="7" name="Rounded Rectangle 6"/>
+          <p:cNvSpPr/>
+          <p:nvPr/>
+        </p:nvSpPr>
+        <p:spPr>
+          <a:xfrm>
+            <a:off x="731520" y="5303520"/>
+            <a:ext cx="10728655" cy="1051560"/>
           </a:xfrm>
           <a:prstGeom prst="roundRect">
             <a:avLst/>
@@ -8546,14 +7433,14 @@
       </p:sp>
       <p:sp>
         <p:nvSpPr>
-          <p:cNvPr id="6" name="TextBox 5"/>
+          <p:cNvPr id="8" name="TextBox 7"/>
           <p:cNvSpPr txBox="1"/>
           <p:nvPr/>
         </p:nvSpPr>
         <p:spPr>
           <a:xfrm>
-            <a:off x="914400" y="1325880"/>
-            <a:ext cx="4846320" cy="2240280"/>
+            <a:off x="1005840" y="5394960"/>
+            <a:ext cx="10180015" cy="868680"/>
           </a:xfrm>
           <a:prstGeom prst="rect">
             <a:avLst/>
@@ -8568,9 +7455,9 @@
           <a:p>
             <a:pPr>
               <a:spcAft>
-                <a:spcPts val="800"/>
+                <a:spcPts val="200"/>
               </a:spcAft>
-              <a:defRPr sz="1300" b="1">
+              <a:defRPr sz="1200" b="1">
                 <a:solidFill>
                   <a:srgbClr val="2563EB"/>
                 </a:solidFill>
@@ -8578,451 +7465,20 @@
               </a:defRPr>
             </a:pPr>
             <a:r>
-              <a:t>1. WHY We Used It (Problem Statement)</a:t>
-            </a:r>
-          </a:p>
-          <a:p>
-            <a:pPr>
-              <a:spcAft>
-                <a:spcPts val="600"/>
-              </a:spcAft>
-              <a:defRPr sz="1200">
-                <a:solidFill>
-                  <a:srgbClr val="334155"/>
-                </a:solidFill>
-                <a:latin typeface="Segoe UI"/>
-              </a:defRPr>
-            </a:pPr>
-            <a:r>
-              <a:t>• Lending institutions suffer severe bad-debt write-offs when borrowers default.</a:t>
-            </a:r>
-          </a:p>
-          <a:p>
-            <a:pPr>
-              <a:spcAft>
-                <a:spcPts val="600"/>
-              </a:spcAft>
-              <a:defRPr sz="1200">
-                <a:solidFill>
-                  <a:srgbClr val="334155"/>
-                </a:solidFill>
-                <a:latin typeface="Segoe UI"/>
-              </a:defRPr>
-            </a:pPr>
-            <a:r>
-              <a:t>• Lenders require an automated, objective system to screen high-risk loan applicants.</a:t>
-            </a:r>
-          </a:p>
-          <a:p>
-            <a:pPr>
-              <a:spcAft>
-                <a:spcPts val="600"/>
-              </a:spcAft>
-              <a:defRPr sz="1200">
-                <a:solidFill>
-                  <a:srgbClr val="334155"/>
-                </a:solidFill>
-                <a:latin typeface="Segoe UI"/>
-              </a:defRPr>
-            </a:pPr>
-            <a:r>
-              <a:t>• Manual underwriter reviews are slow, inconsistent, and cannot scale across high loan volumes.</a:t>
-            </a:r>
-          </a:p>
-        </p:txBody>
-      </p:sp>
-      <p:sp>
-        <p:nvSpPr>
-          <p:cNvPr id="7" name="Rounded Rectangle 6"/>
-          <p:cNvSpPr/>
-          <p:nvPr/>
-        </p:nvSpPr>
-        <p:spPr>
-          <a:xfrm>
-            <a:off x="6217920" y="1188720"/>
-            <a:ext cx="5242255" cy="2514600"/>
-          </a:xfrm>
-          <a:prstGeom prst="roundRect">
-            <a:avLst/>
-          </a:prstGeom>
-          <a:solidFill>
-            <a:srgbClr val="ECFDF5"/>
-          </a:solidFill>
-          <a:ln w="12700">
-            <a:solidFill>
-              <a:srgbClr val="10B981"/>
-            </a:solidFill>
-          </a:ln>
-        </p:spPr>
-        <p:style>
-          <a:lnRef idx="1">
-            <a:schemeClr val="accent1"/>
-          </a:lnRef>
-          <a:fillRef idx="3">
-            <a:schemeClr val="accent1"/>
-          </a:fillRef>
-          <a:effectRef idx="2">
-            <a:schemeClr val="accent1"/>
-          </a:effectRef>
-          <a:fontRef idx="minor">
-            <a:schemeClr val="lt1"/>
-          </a:fontRef>
-        </p:style>
-        <p:txBody>
-          <a:bodyPr rtlCol="0" anchor="ctr"/>
-          <a:lstStyle/>
-          <a:p>
-            <a:pPr algn="ctr"/>
-          </a:p>
-        </p:txBody>
-      </p:sp>
-      <p:sp>
-        <p:nvSpPr>
-          <p:cNvPr id="8" name="TextBox 7"/>
-          <p:cNvSpPr txBox="1"/>
-          <p:nvPr/>
-        </p:nvSpPr>
-        <p:spPr>
-          <a:xfrm>
-            <a:off x="6400800" y="1325880"/>
-            <a:ext cx="4876495" cy="2240280"/>
-          </a:xfrm>
-          <a:prstGeom prst="rect">
-            <a:avLst/>
-          </a:prstGeom>
-          <a:noFill/>
-        </p:spPr>
-        <p:txBody>
-          <a:bodyPr wrap="square">
-            <a:spAutoFit/>
-          </a:bodyPr>
-          <a:lstStyle/>
-          <a:p>
-            <a:pPr>
-              <a:spcAft>
-                <a:spcPts val="800"/>
-              </a:spcAft>
-              <a:defRPr sz="1300" b="1">
-                <a:solidFill>
-                  <a:srgbClr val="10B981"/>
-                </a:solidFill>
-                <a:latin typeface="Segoe UI"/>
-              </a:defRPr>
-            </a:pPr>
-            <a:r>
-              <a:t>2. HOW We Used It (Pipeline &amp; Methods)</a:t>
-            </a:r>
-          </a:p>
-          <a:p>
-            <a:pPr>
-              <a:spcAft>
-                <a:spcPts val="600"/>
-              </a:spcAft>
-              <a:defRPr sz="1200">
-                <a:solidFill>
-                  <a:srgbClr val="334155"/>
-                </a:solidFill>
-                <a:latin typeface="Segoe UI"/>
-              </a:defRPr>
-            </a:pPr>
-            <a:r>
-              <a:t>• Benchmarked 4 supervised classifiers: Logistic Regression, Decision Tree, Random Forest, Gradient Boosting.</a:t>
-            </a:r>
-          </a:p>
-          <a:p>
-            <a:pPr>
-              <a:spcAft>
-                <a:spcPts val="600"/>
-              </a:spcAft>
-              <a:defRPr sz="1200">
-                <a:solidFill>
-                  <a:srgbClr val="334155"/>
-                </a:solidFill>
-                <a:latin typeface="Segoe UI"/>
-              </a:defRPr>
-            </a:pPr>
-            <a:r>
-              <a:t>• Handled class imbalance (11.7% default) via class-weighting and prioritized F1-Score &amp; ROC-AUC.</a:t>
-            </a:r>
-          </a:p>
-          <a:p>
-            <a:pPr>
-              <a:spcAft>
-                <a:spcPts val="600"/>
-              </a:spcAft>
-              <a:defRPr sz="1200">
-                <a:solidFill>
-                  <a:srgbClr val="334155"/>
-                </a:solidFill>
-                <a:latin typeface="Segoe UI"/>
-              </a:defRPr>
-            </a:pPr>
-            <a:r>
-              <a:t>• Evaluated on 10,000 holdout test samples with zero data leakage from training.</a:t>
-            </a:r>
-          </a:p>
-        </p:txBody>
-      </p:sp>
-      <p:sp>
-        <p:nvSpPr>
-          <p:cNvPr id="9" name="Rounded Rectangle 8"/>
-          <p:cNvSpPr/>
-          <p:nvPr/>
-        </p:nvSpPr>
-        <p:spPr>
-          <a:xfrm>
-            <a:off x="731520" y="3886200"/>
-            <a:ext cx="5212080" cy="2560320"/>
-          </a:xfrm>
-          <a:prstGeom prst="roundRect">
-            <a:avLst/>
-          </a:prstGeom>
-          <a:solidFill>
-            <a:srgbClr val="FEF9C3"/>
-          </a:solidFill>
-          <a:ln w="12700">
-            <a:solidFill>
-              <a:srgbClr val="CA8A04"/>
-            </a:solidFill>
-          </a:ln>
-        </p:spPr>
-        <p:style>
-          <a:lnRef idx="1">
-            <a:schemeClr val="accent1"/>
-          </a:lnRef>
-          <a:fillRef idx="3">
-            <a:schemeClr val="accent1"/>
-          </a:fillRef>
-          <a:effectRef idx="2">
-            <a:schemeClr val="accent1"/>
-          </a:effectRef>
-          <a:fontRef idx="minor">
-            <a:schemeClr val="lt1"/>
-          </a:fontRef>
-        </p:style>
-        <p:txBody>
-          <a:bodyPr rtlCol="0" anchor="ctr"/>
-          <a:lstStyle/>
-          <a:p>
-            <a:pPr algn="ctr"/>
-          </a:p>
-        </p:txBody>
-      </p:sp>
-      <p:sp>
-        <p:nvSpPr>
-          <p:cNvPr id="10" name="TextBox 9"/>
-          <p:cNvSpPr txBox="1"/>
-          <p:nvPr/>
-        </p:nvSpPr>
-        <p:spPr>
-          <a:xfrm>
-            <a:off x="914400" y="4023360"/>
-            <a:ext cx="4846320" cy="2286000"/>
-          </a:xfrm>
-          <a:prstGeom prst="rect">
-            <a:avLst/>
-          </a:prstGeom>
-          <a:noFill/>
-        </p:spPr>
-        <p:txBody>
-          <a:bodyPr wrap="square">
-            <a:spAutoFit/>
-          </a:bodyPr>
-          <a:lstStyle/>
-          <a:p>
-            <a:pPr>
-              <a:spcAft>
-                <a:spcPts val="800"/>
-              </a:spcAft>
-              <a:defRPr sz="1300" b="1">
-                <a:solidFill>
-                  <a:srgbClr val="CA8A04"/>
-                </a:solidFill>
-                <a:latin typeface="Segoe UI"/>
-              </a:defRPr>
-            </a:pPr>
-            <a:r>
-              <a:t>3. WHAT It Does in Our Project (System Role)</a:t>
-            </a:r>
-          </a:p>
-          <a:p>
-            <a:pPr>
-              <a:spcAft>
-                <a:spcPts val="600"/>
-              </a:spcAft>
-              <a:defRPr sz="1200">
-                <a:solidFill>
-                  <a:srgbClr val="334155"/>
-                </a:solidFill>
-                <a:latin typeface="Segoe UI"/>
-              </a:defRPr>
-            </a:pPr>
-            <a:r>
-              <a:t>• Learns complex financial risk patterns to classify applicants into Default (1) vs. No Default (0).</a:t>
-            </a:r>
-          </a:p>
-          <a:p>
-            <a:pPr>
-              <a:spcAft>
-                <a:spcPts val="600"/>
-              </a:spcAft>
-              <a:defRPr sz="1200">
-                <a:solidFill>
-                  <a:srgbClr val="334155"/>
-                </a:solidFill>
-                <a:latin typeface="Segoe UI"/>
-              </a:defRPr>
-            </a:pPr>
-            <a:r>
-              <a:t>• Identifies Gradient Boosting as champion architecture with 97.75% accuracy and 0.8965 F1-Score.</a:t>
-            </a:r>
-          </a:p>
-          <a:p>
-            <a:pPr>
-              <a:spcAft>
-                <a:spcPts val="600"/>
-              </a:spcAft>
-              <a:defRPr sz="1200">
-                <a:solidFill>
-                  <a:srgbClr val="334155"/>
-                </a:solidFill>
-                <a:latin typeface="Segoe UI"/>
-              </a:defRPr>
-            </a:pPr>
-            <a:r>
-              <a:t>• Exports the champion model into prediction/saved_models/best_classifier.joblib.</a:t>
-            </a:r>
-          </a:p>
-        </p:txBody>
-      </p:sp>
-      <p:sp>
-        <p:nvSpPr>
-          <p:cNvPr id="11" name="Rounded Rectangle 10"/>
-          <p:cNvSpPr/>
-          <p:nvPr/>
-        </p:nvSpPr>
-        <p:spPr>
-          <a:xfrm>
-            <a:off x="6217920" y="3886200"/>
-            <a:ext cx="5242255" cy="2560320"/>
-          </a:xfrm>
-          <a:prstGeom prst="roundRect">
-            <a:avLst/>
-          </a:prstGeom>
-          <a:solidFill>
-            <a:srgbClr val="F5F3FF"/>
-          </a:solidFill>
-          <a:ln w="12700">
-            <a:solidFill>
-              <a:srgbClr val="9333EA"/>
-            </a:solidFill>
-          </a:ln>
-        </p:spPr>
-        <p:style>
-          <a:lnRef idx="1">
-            <a:schemeClr val="accent1"/>
-          </a:lnRef>
-          <a:fillRef idx="3">
-            <a:schemeClr val="accent1"/>
-          </a:fillRef>
-          <a:effectRef idx="2">
-            <a:schemeClr val="accent1"/>
-          </a:effectRef>
-          <a:fontRef idx="minor">
-            <a:schemeClr val="lt1"/>
-          </a:fontRef>
-        </p:style>
-        <p:txBody>
-          <a:bodyPr rtlCol="0" anchor="ctr"/>
-          <a:lstStyle/>
-          <a:p>
-            <a:pPr algn="ctr"/>
-          </a:p>
-        </p:txBody>
-      </p:sp>
-      <p:sp>
-        <p:nvSpPr>
-          <p:cNvPr id="12" name="TextBox 11"/>
-          <p:cNvSpPr txBox="1"/>
-          <p:nvPr/>
-        </p:nvSpPr>
-        <p:spPr>
-          <a:xfrm>
-            <a:off x="6400800" y="4023360"/>
-            <a:ext cx="4876495" cy="2286000"/>
-          </a:xfrm>
-          <a:prstGeom prst="rect">
-            <a:avLst/>
-          </a:prstGeom>
-          <a:noFill/>
-        </p:spPr>
-        <p:txBody>
-          <a:bodyPr wrap="square">
-            <a:spAutoFit/>
-          </a:bodyPr>
-          <a:lstStyle/>
-          <a:p>
-            <a:pPr>
-              <a:spcAft>
-                <a:spcPts val="800"/>
-              </a:spcAft>
-              <a:defRPr sz="1300" b="1">
-                <a:solidFill>
-                  <a:srgbClr val="9333EA"/>
-                </a:solidFill>
-                <a:latin typeface="Segoe UI"/>
-              </a:defRPr>
-            </a:pPr>
-            <a:r>
-              <a:t>4. PRACTICAL USE (Underwriting &amp; Business Value)</a:t>
-            </a:r>
-          </a:p>
-          <a:p>
-            <a:pPr>
-              <a:spcAft>
-                <a:spcPts val="600"/>
-              </a:spcAft>
-              <a:defRPr sz="1200">
-                <a:solidFill>
-                  <a:srgbClr val="334155"/>
-                </a:solidFill>
-                <a:latin typeface="Segoe UI"/>
-              </a:defRPr>
-            </a:pPr>
-            <a:r>
-              <a:t>• Automated Underwriting: Fast-tracks credit approvals while instantly flagging risky loans.</a:t>
-            </a:r>
-          </a:p>
-          <a:p>
-            <a:pPr>
-              <a:spcAft>
-                <a:spcPts val="600"/>
-              </a:spcAft>
-              <a:defRPr sz="1200">
-                <a:solidFill>
-                  <a:srgbClr val="334155"/>
-                </a:solidFill>
-                <a:latin typeface="Segoe UI"/>
-              </a:defRPr>
-            </a:pPr>
-            <a:r>
-              <a:t>• Loss Prevention: Drastically slashes Non-Performing Assets (NPAs) with 97.11% precision.</a:t>
-            </a:r>
-          </a:p>
-          <a:p>
-            <a:pPr>
-              <a:spcAft>
-                <a:spcPts val="600"/>
-              </a:spcAft>
-              <a:defRPr sz="1200">
-                <a:solidFill>
-                  <a:srgbClr val="334155"/>
-                </a:solidFill>
-                <a:latin typeface="Segoe UI"/>
-              </a:defRPr>
-            </a:pPr>
-            <a:r>
-              <a:t>• Institutional Standard: Establishes a verifiable, auditable credit decision benchmark.</a:t>
+              <a:t>Project Implementation: classification/train_classifiers.py  |  Champion Result: Champion: Gradient Boosting (Accuracy: 97.75% | F1: 0.8965 | ROC-AUC: 0.9973)</a:t>
+            </a:r>
+          </a:p>
+          <a:p>
+            <a:pPr>
+              <a:defRPr sz="1100">
+                <a:solidFill>
+                  <a:srgbClr val="64748B"/>
+                </a:solidFill>
+                <a:latin typeface="Segoe UI"/>
+              </a:defRPr>
+            </a:pPr>
+            <a:r>
+              <a:t>Execution verified against Kaggle benchmark dataset (50,000 records, 18 financial features) with zero data leakage.</a:t>
             </a:r>
           </a:p>
         </p:txBody>
@@ -10635,7 +9091,7 @@
         <p:spPr>
           <a:xfrm>
             <a:off x="822960" y="1280160"/>
-            <a:ext cx="5029200" cy="4023360"/>
+            <a:ext cx="5029200" cy="4343400"/>
           </a:xfrm>
           <a:prstGeom prst="rect">
             <a:avLst/>
@@ -10912,7 +9368,7 @@
               </a:defRPr>
             </a:pPr>
             <a:r>
-              <a:t>CSI3010 | MODULE 2: CLUSTERING</a:t>
+              <a:t>CSI3010 | TOPIC OVERVIEW &amp; INSTITUTIONAL ROLE</a:t>
             </a:r>
           </a:p>
         </p:txBody>
@@ -10948,7 +9404,7 @@
               </a:defRPr>
             </a:pPr>
             <a:r>
-              <a:t>Topic 2: Clustering — Concept &amp; Institutional Role</a:t>
+              <a:t>Overview: Clustering</a:t>
             </a:r>
           </a:p>
         </p:txBody>
@@ -10962,7 +9418,191 @@
         <p:spPr>
           <a:xfrm>
             <a:off x="731520" y="1188720"/>
-            <a:ext cx="5212080" cy="2514600"/>
+            <a:ext cx="10728655" cy="3931920"/>
+          </a:xfrm>
+          <a:prstGeom prst="roundRect">
+            <a:avLst/>
+          </a:prstGeom>
+          <a:solidFill>
+            <a:srgbClr val="FFFFFF"/>
+          </a:solidFill>
+          <a:ln w="12700">
+            <a:solidFill>
+              <a:srgbClr val="2563EB"/>
+            </a:solidFill>
+          </a:ln>
+        </p:spPr>
+        <p:style>
+          <a:lnRef idx="1">
+            <a:schemeClr val="accent1"/>
+          </a:lnRef>
+          <a:fillRef idx="3">
+            <a:schemeClr val="accent1"/>
+          </a:fillRef>
+          <a:effectRef idx="2">
+            <a:schemeClr val="accent1"/>
+          </a:effectRef>
+          <a:fontRef idx="minor">
+            <a:schemeClr val="lt1"/>
+          </a:fontRef>
+        </p:style>
+        <p:txBody>
+          <a:bodyPr rtlCol="0" anchor="ctr"/>
+          <a:lstStyle/>
+          <a:p>
+            <a:pPr algn="ctr"/>
+          </a:p>
+        </p:txBody>
+      </p:sp>
+      <p:sp>
+        <p:nvSpPr>
+          <p:cNvPr id="6" name="TextBox 5"/>
+          <p:cNvSpPr txBox="1"/>
+          <p:nvPr/>
+        </p:nvSpPr>
+        <p:spPr>
+          <a:xfrm>
+            <a:off x="1005840" y="1371600"/>
+            <a:ext cx="10180015" cy="3566160"/>
+          </a:xfrm>
+          <a:prstGeom prst="rect">
+            <a:avLst/>
+          </a:prstGeom>
+          <a:noFill/>
+        </p:spPr>
+        <p:txBody>
+          <a:bodyPr wrap="square">
+            <a:spAutoFit/>
+          </a:bodyPr>
+          <a:lstStyle/>
+          <a:p>
+            <a:pPr>
+              <a:spcAft>
+                <a:spcPts val="1400"/>
+              </a:spcAft>
+              <a:defRPr sz="1600" b="1">
+                <a:solidFill>
+                  <a:srgbClr val="0F172A"/>
+                </a:solidFill>
+                <a:latin typeface="Segoe UI"/>
+              </a:defRPr>
+            </a:pPr>
+            <a:r>
+              <a:t>Heading: Clustering</a:t>
+            </a:r>
+          </a:p>
+          <a:p>
+            <a:pPr>
+              <a:spcAft>
+                <a:spcPts val="1400"/>
+              </a:spcAft>
+              <a:defRPr sz="1200" b="1">
+                <a:solidFill>
+                  <a:srgbClr val="2563EB"/>
+                </a:solidFill>
+                <a:latin typeface="Segoe UI"/>
+              </a:defRPr>
+            </a:pPr>
+            <a:r>
+              <a:t>• What it is: </a:t>
+            </a:r>
+            <a:r>
+              <a:rPr sz="1200" b="0">
+                <a:solidFill>
+                  <a:srgbClr val="334155"/>
+                </a:solidFill>
+                <a:latin typeface="Segoe UI"/>
+              </a:rPr>
+              <a:t>Unsupervised machine learning method that segments borrowers into natural risk cohorts without relying on past default labels.</a:t>
+            </a:r>
+          </a:p>
+          <a:p>
+            <a:pPr>
+              <a:spcAft>
+                <a:spcPts val="1400"/>
+              </a:spcAft>
+              <a:defRPr sz="1200" b="1">
+                <a:solidFill>
+                  <a:srgbClr val="2563EB"/>
+                </a:solidFill>
+                <a:latin typeface="Segoe UI"/>
+              </a:defRPr>
+            </a:pPr>
+            <a:r>
+              <a:t>• Why it is needed: </a:t>
+            </a:r>
+            <a:r>
+              <a:rPr sz="1200" b="0">
+                <a:solidFill>
+                  <a:srgbClr val="334155"/>
+                </a:solidFill>
+                <a:latin typeface="Segoe UI"/>
+              </a:rPr>
+              <a:t>Captures diverse borrower archetypes across multiple financial indicators (Income, Credit Score, DTI, Employment Tenure).</a:t>
+            </a:r>
+          </a:p>
+          <a:p>
+            <a:pPr>
+              <a:spcAft>
+                <a:spcPts val="1400"/>
+              </a:spcAft>
+              <a:defRPr sz="1200" b="1">
+                <a:solidFill>
+                  <a:srgbClr val="2563EB"/>
+                </a:solidFill>
+                <a:latin typeface="Segoe UI"/>
+              </a:defRPr>
+            </a:pPr>
+            <a:r>
+              <a:t>• Where it is used: </a:t>
+            </a:r>
+            <a:r>
+              <a:rPr sz="1200" b="0">
+                <a:solidFill>
+                  <a:srgbClr val="334155"/>
+                </a:solidFill>
+                <a:latin typeface="Segoe UI"/>
+              </a:rPr>
+              <a:t>Applied in credit portfolio segmentation, regulatory capital reserve allocations, and customer risk profiling.</a:t>
+            </a:r>
+          </a:p>
+          <a:p>
+            <a:pPr>
+              <a:spcAft>
+                <a:spcPts val="1400"/>
+              </a:spcAft>
+              <a:defRPr sz="1200" b="1">
+                <a:solidFill>
+                  <a:srgbClr val="2563EB"/>
+                </a:solidFill>
+                <a:latin typeface="Segoe UI"/>
+              </a:defRPr>
+            </a:pPr>
+            <a:r>
+              <a:t>• How it is helpful: </a:t>
+            </a:r>
+            <a:r>
+              <a:rPr sz="1200" b="0">
+                <a:solidFill>
+                  <a:srgbClr val="334155"/>
+                </a:solidFill>
+                <a:latin typeface="Segoe UI"/>
+              </a:rPr>
+              <a:t>Enables tailored interest rate pricing, tiered credit limits, and targeted early-intervention counseling for vulnerable borrowers.</a:t>
+            </a:r>
+          </a:p>
+        </p:txBody>
+      </p:sp>
+      <p:sp>
+        <p:nvSpPr>
+          <p:cNvPr id="7" name="Rounded Rectangle 6"/>
+          <p:cNvSpPr/>
+          <p:nvPr/>
+        </p:nvSpPr>
+        <p:spPr>
+          <a:xfrm>
+            <a:off x="731520" y="5303520"/>
+            <a:ext cx="10728655" cy="1051560"/>
           </a:xfrm>
           <a:prstGeom prst="roundRect">
             <a:avLst/>
@@ -11000,14 +9640,14 @@
       </p:sp>
       <p:sp>
         <p:nvSpPr>
-          <p:cNvPr id="6" name="TextBox 5"/>
+          <p:cNvPr id="8" name="TextBox 7"/>
           <p:cNvSpPr txBox="1"/>
           <p:nvPr/>
         </p:nvSpPr>
         <p:spPr>
           <a:xfrm>
-            <a:off x="914400" y="1325880"/>
-            <a:ext cx="4846320" cy="2240280"/>
+            <a:off x="1005840" y="5394960"/>
+            <a:ext cx="10180015" cy="868680"/>
           </a:xfrm>
           <a:prstGeom prst="rect">
             <a:avLst/>
@@ -11022,9 +9662,9 @@
           <a:p>
             <a:pPr>
               <a:spcAft>
-                <a:spcPts val="800"/>
+                <a:spcPts val="200"/>
               </a:spcAft>
-              <a:defRPr sz="1300" b="1">
+              <a:defRPr sz="1200" b="1">
                 <a:solidFill>
                   <a:srgbClr val="2563EB"/>
                 </a:solidFill>
@@ -11032,451 +9672,20 @@
               </a:defRPr>
             </a:pPr>
             <a:r>
-              <a:t>1. WHY We Used It (Problem Statement)</a:t>
-            </a:r>
-          </a:p>
-          <a:p>
-            <a:pPr>
-              <a:spcAft>
-                <a:spcPts val="600"/>
-              </a:spcAft>
-              <a:defRPr sz="1200">
-                <a:solidFill>
-                  <a:srgbClr val="334155"/>
-                </a:solidFill>
-                <a:latin typeface="Segoe UI"/>
-              </a:defRPr>
-            </a:pPr>
-            <a:r>
-              <a:t>• Credit risk is not a flat binary outcome; borrowers have diverse financial archetypes.</a:t>
-            </a:r>
-          </a:p>
-          <a:p>
-            <a:pPr>
-              <a:spcAft>
-                <a:spcPts val="600"/>
-              </a:spcAft>
-              <a:defRPr sz="1200">
-                <a:solidFill>
-                  <a:srgbClr val="334155"/>
-                </a:solidFill>
-                <a:latin typeface="Segoe UI"/>
-              </a:defRPr>
-            </a:pPr>
-            <a:r>
-              <a:t>• Lenders need to discover natural customer segments without relying on past default labels.</a:t>
-            </a:r>
-          </a:p>
-          <a:p>
-            <a:pPr>
-              <a:spcAft>
-                <a:spcPts val="600"/>
-              </a:spcAft>
-              <a:defRPr sz="1200">
-                <a:solidFill>
-                  <a:srgbClr val="334155"/>
-                </a:solidFill>
-                <a:latin typeface="Segoe UI"/>
-              </a:defRPr>
-            </a:pPr>
-            <a:r>
-              <a:t>• Helps underwriters identify subtle risk buildup before defaults formally occur.</a:t>
-            </a:r>
-          </a:p>
-        </p:txBody>
-      </p:sp>
-      <p:sp>
-        <p:nvSpPr>
-          <p:cNvPr id="7" name="Rounded Rectangle 6"/>
-          <p:cNvSpPr/>
-          <p:nvPr/>
-        </p:nvSpPr>
-        <p:spPr>
-          <a:xfrm>
-            <a:off x="6217920" y="1188720"/>
-            <a:ext cx="5242255" cy="2514600"/>
-          </a:xfrm>
-          <a:prstGeom prst="roundRect">
-            <a:avLst/>
-          </a:prstGeom>
-          <a:solidFill>
-            <a:srgbClr val="ECFDF5"/>
-          </a:solidFill>
-          <a:ln w="12700">
-            <a:solidFill>
-              <a:srgbClr val="10B981"/>
-            </a:solidFill>
-          </a:ln>
-        </p:spPr>
-        <p:style>
-          <a:lnRef idx="1">
-            <a:schemeClr val="accent1"/>
-          </a:lnRef>
-          <a:fillRef idx="3">
-            <a:schemeClr val="accent1"/>
-          </a:fillRef>
-          <a:effectRef idx="2">
-            <a:schemeClr val="accent1"/>
-          </a:effectRef>
-          <a:fontRef idx="minor">
-            <a:schemeClr val="lt1"/>
-          </a:fontRef>
-        </p:style>
-        <p:txBody>
-          <a:bodyPr rtlCol="0" anchor="ctr"/>
-          <a:lstStyle/>
-          <a:p>
-            <a:pPr algn="ctr"/>
-          </a:p>
-        </p:txBody>
-      </p:sp>
-      <p:sp>
-        <p:nvSpPr>
-          <p:cNvPr id="8" name="TextBox 7"/>
-          <p:cNvSpPr txBox="1"/>
-          <p:nvPr/>
-        </p:nvSpPr>
-        <p:spPr>
-          <a:xfrm>
-            <a:off x="6400800" y="1325880"/>
-            <a:ext cx="4876495" cy="2240280"/>
-          </a:xfrm>
-          <a:prstGeom prst="rect">
-            <a:avLst/>
-          </a:prstGeom>
-          <a:noFill/>
-        </p:spPr>
-        <p:txBody>
-          <a:bodyPr wrap="square">
-            <a:spAutoFit/>
-          </a:bodyPr>
-          <a:lstStyle/>
-          <a:p>
-            <a:pPr>
-              <a:spcAft>
-                <a:spcPts val="800"/>
-              </a:spcAft>
-              <a:defRPr sz="1300" b="1">
-                <a:solidFill>
-                  <a:srgbClr val="10B981"/>
-                </a:solidFill>
-                <a:latin typeface="Segoe UI"/>
-              </a:defRPr>
-            </a:pPr>
-            <a:r>
-              <a:t>2. HOW We Used It (Pipeline &amp; Methods)</a:t>
-            </a:r>
-          </a:p>
-          <a:p>
-            <a:pPr>
-              <a:spcAft>
-                <a:spcPts val="600"/>
-              </a:spcAft>
-              <a:defRPr sz="1200">
-                <a:solidFill>
-                  <a:srgbClr val="334155"/>
-                </a:solidFill>
-                <a:latin typeface="Segoe UI"/>
-              </a:defRPr>
-            </a:pPr>
-            <a:r>
-              <a:t>• Standardized 5 core numerical features: Income, CreditScore, LoanAmount, DTIRatio, MonthsEmployed.</a:t>
-            </a:r>
-          </a:p>
-          <a:p>
-            <a:pPr>
-              <a:spcAft>
-                <a:spcPts val="600"/>
-              </a:spcAft>
-              <a:defRPr sz="1200">
-                <a:solidFill>
-                  <a:srgbClr val="334155"/>
-                </a:solidFill>
-                <a:latin typeface="Segoe UI"/>
-              </a:defRPr>
-            </a:pPr>
-            <a:r>
-              <a:t>• Trained K-Means clustering across K=2 to 6, evaluating within-cluster inertia and Silhouette scores.</a:t>
-            </a:r>
-          </a:p>
-          <a:p>
-            <a:pPr>
-              <a:spcAft>
-                <a:spcPts val="600"/>
-              </a:spcAft>
-              <a:defRPr sz="1200">
-                <a:solidFill>
-                  <a:srgbClr val="334155"/>
-                </a:solidFill>
-                <a:latin typeface="Segoe UI"/>
-              </a:defRPr>
-            </a:pPr>
-            <a:r>
-              <a:t>• Identified optimal K=3 at the Elbow curve inflection point and validated cluster cohesion.</a:t>
-            </a:r>
-          </a:p>
-        </p:txBody>
-      </p:sp>
-      <p:sp>
-        <p:nvSpPr>
-          <p:cNvPr id="9" name="Rounded Rectangle 8"/>
-          <p:cNvSpPr/>
-          <p:nvPr/>
-        </p:nvSpPr>
-        <p:spPr>
-          <a:xfrm>
-            <a:off x="731520" y="3886200"/>
-            <a:ext cx="5212080" cy="2560320"/>
-          </a:xfrm>
-          <a:prstGeom prst="roundRect">
-            <a:avLst/>
-          </a:prstGeom>
-          <a:solidFill>
-            <a:srgbClr val="FEF9C3"/>
-          </a:solidFill>
-          <a:ln w="12700">
-            <a:solidFill>
-              <a:srgbClr val="CA8A04"/>
-            </a:solidFill>
-          </a:ln>
-        </p:spPr>
-        <p:style>
-          <a:lnRef idx="1">
-            <a:schemeClr val="accent1"/>
-          </a:lnRef>
-          <a:fillRef idx="3">
-            <a:schemeClr val="accent1"/>
-          </a:fillRef>
-          <a:effectRef idx="2">
-            <a:schemeClr val="accent1"/>
-          </a:effectRef>
-          <a:fontRef idx="minor">
-            <a:schemeClr val="lt1"/>
-          </a:fontRef>
-        </p:style>
-        <p:txBody>
-          <a:bodyPr rtlCol="0" anchor="ctr"/>
-          <a:lstStyle/>
-          <a:p>
-            <a:pPr algn="ctr"/>
-          </a:p>
-        </p:txBody>
-      </p:sp>
-      <p:sp>
-        <p:nvSpPr>
-          <p:cNvPr id="10" name="TextBox 9"/>
-          <p:cNvSpPr txBox="1"/>
-          <p:nvPr/>
-        </p:nvSpPr>
-        <p:spPr>
-          <a:xfrm>
-            <a:off x="914400" y="4023360"/>
-            <a:ext cx="4846320" cy="2286000"/>
-          </a:xfrm>
-          <a:prstGeom prst="rect">
-            <a:avLst/>
-          </a:prstGeom>
-          <a:noFill/>
-        </p:spPr>
-        <p:txBody>
-          <a:bodyPr wrap="square">
-            <a:spAutoFit/>
-          </a:bodyPr>
-          <a:lstStyle/>
-          <a:p>
-            <a:pPr>
-              <a:spcAft>
-                <a:spcPts val="800"/>
-              </a:spcAft>
-              <a:defRPr sz="1300" b="1">
-                <a:solidFill>
-                  <a:srgbClr val="CA8A04"/>
-                </a:solidFill>
-                <a:latin typeface="Segoe UI"/>
-              </a:defRPr>
-            </a:pPr>
-            <a:r>
-              <a:t>3. WHAT It Does in Our Project (System Role)</a:t>
-            </a:r>
-          </a:p>
-          <a:p>
-            <a:pPr>
-              <a:spcAft>
-                <a:spcPts val="600"/>
-              </a:spcAft>
-              <a:defRPr sz="1200">
-                <a:solidFill>
-                  <a:srgbClr val="334155"/>
-                </a:solidFill>
-                <a:latin typeface="Segoe UI"/>
-              </a:defRPr>
-            </a:pPr>
-            <a:r>
-              <a:t>• Groups 50,000 borrowers into 3 natural, interpretable risk profiles (Prime, Standard, Vulnerable).</a:t>
-            </a:r>
-          </a:p>
-          <a:p>
-            <a:pPr>
-              <a:spcAft>
-                <a:spcPts val="600"/>
-              </a:spcAft>
-              <a:defRPr sz="1200">
-                <a:solidFill>
-                  <a:srgbClr val="334155"/>
-                </a:solidFill>
-                <a:latin typeface="Segoe UI"/>
-              </a:defRPr>
-            </a:pPr>
-            <a:r>
-              <a:t>• Discovers that default rates differ by over 5x between clusters (3.93% vs. 20.36%) without using default labels during training.</a:t>
-            </a:r>
-          </a:p>
-          <a:p>
-            <a:pPr>
-              <a:spcAft>
-                <a:spcPts val="600"/>
-              </a:spcAft>
-              <a:defRPr sz="1200">
-                <a:solidFill>
-                  <a:srgbClr val="334155"/>
-                </a:solidFill>
-                <a:latin typeface="Segoe UI"/>
-              </a:defRPr>
-            </a:pPr>
-            <a:r>
-              <a:t>• Projects the 5D feature space into 2D PCA components for geometric risk space visualization.</a:t>
-            </a:r>
-          </a:p>
-        </p:txBody>
-      </p:sp>
-      <p:sp>
-        <p:nvSpPr>
-          <p:cNvPr id="11" name="Rounded Rectangle 10"/>
-          <p:cNvSpPr/>
-          <p:nvPr/>
-        </p:nvSpPr>
-        <p:spPr>
-          <a:xfrm>
-            <a:off x="6217920" y="3886200"/>
-            <a:ext cx="5242255" cy="2560320"/>
-          </a:xfrm>
-          <a:prstGeom prst="roundRect">
-            <a:avLst/>
-          </a:prstGeom>
-          <a:solidFill>
-            <a:srgbClr val="F5F3FF"/>
-          </a:solidFill>
-          <a:ln w="12700">
-            <a:solidFill>
-              <a:srgbClr val="9333EA"/>
-            </a:solidFill>
-          </a:ln>
-        </p:spPr>
-        <p:style>
-          <a:lnRef idx="1">
-            <a:schemeClr val="accent1"/>
-          </a:lnRef>
-          <a:fillRef idx="3">
-            <a:schemeClr val="accent1"/>
-          </a:fillRef>
-          <a:effectRef idx="2">
-            <a:schemeClr val="accent1"/>
-          </a:effectRef>
-          <a:fontRef idx="minor">
-            <a:schemeClr val="lt1"/>
-          </a:fontRef>
-        </p:style>
-        <p:txBody>
-          <a:bodyPr rtlCol="0" anchor="ctr"/>
-          <a:lstStyle/>
-          <a:p>
-            <a:pPr algn="ctr"/>
-          </a:p>
-        </p:txBody>
-      </p:sp>
-      <p:sp>
-        <p:nvSpPr>
-          <p:cNvPr id="12" name="TextBox 11"/>
-          <p:cNvSpPr txBox="1"/>
-          <p:nvPr/>
-        </p:nvSpPr>
-        <p:spPr>
-          <a:xfrm>
-            <a:off x="6400800" y="4023360"/>
-            <a:ext cx="4876495" cy="2286000"/>
-          </a:xfrm>
-          <a:prstGeom prst="rect">
-            <a:avLst/>
-          </a:prstGeom>
-          <a:noFill/>
-        </p:spPr>
-        <p:txBody>
-          <a:bodyPr wrap="square">
-            <a:spAutoFit/>
-          </a:bodyPr>
-          <a:lstStyle/>
-          <a:p>
-            <a:pPr>
-              <a:spcAft>
-                <a:spcPts val="800"/>
-              </a:spcAft>
-              <a:defRPr sz="1300" b="1">
-                <a:solidFill>
-                  <a:srgbClr val="9333EA"/>
-                </a:solidFill>
-                <a:latin typeface="Segoe UI"/>
-              </a:defRPr>
-            </a:pPr>
-            <a:r>
-              <a:t>4. PRACTICAL USE (Underwriting &amp; Business Value)</a:t>
-            </a:r>
-          </a:p>
-          <a:p>
-            <a:pPr>
-              <a:spcAft>
-                <a:spcPts val="600"/>
-              </a:spcAft>
-              <a:defRPr sz="1200">
-                <a:solidFill>
-                  <a:srgbClr val="334155"/>
-                </a:solidFill>
-                <a:latin typeface="Segoe UI"/>
-              </a:defRPr>
-            </a:pPr>
-            <a:r>
-              <a:t>• Risk-Based Portfolio Pricing: Sets tailored interest rates and borrowing limits per tier.</a:t>
-            </a:r>
-          </a:p>
-          <a:p>
-            <a:pPr>
-              <a:spcAft>
-                <a:spcPts val="600"/>
-              </a:spcAft>
-              <a:defRPr sz="1200">
-                <a:solidFill>
-                  <a:srgbClr val="334155"/>
-                </a:solidFill>
-                <a:latin typeface="Segoe UI"/>
-              </a:defRPr>
-            </a:pPr>
-            <a:r>
-              <a:t>• Proactive Portfolio Monitoring: Targets vulnerable cohorts with financial counseling before defaults trigger.</a:t>
-            </a:r>
-          </a:p>
-          <a:p>
-            <a:pPr>
-              <a:spcAft>
-                <a:spcPts val="600"/>
-              </a:spcAft>
-              <a:defRPr sz="1200">
-                <a:solidFill>
-                  <a:srgbClr val="334155"/>
-                </a:solidFill>
-                <a:latin typeface="Segoe UI"/>
-              </a:defRPr>
-            </a:pPr>
-            <a:r>
-              <a:t>• Capital Allocation: Banks allocate capital reserves based on cluster risk concentrations.</a:t>
+              <a:t>Project Implementation: clustering/train_clustering.py  |  Champion Result: Optimal K=3 (Prime: 3.93% default, Standard: 12.38%, Subprime: 20.36%)</a:t>
+            </a:r>
+          </a:p>
+          <a:p>
+            <a:pPr>
+              <a:defRPr sz="1100">
+                <a:solidFill>
+                  <a:srgbClr val="64748B"/>
+                </a:solidFill>
+                <a:latin typeface="Segoe UI"/>
+              </a:defRPr>
+            </a:pPr>
+            <a:r>
+              <a:t>Execution verified against Kaggle benchmark dataset (50,000 records, 18 financial features) with zero data leakage.</a:t>
             </a:r>
           </a:p>
         </p:txBody>
@@ -13135,7 +11344,7 @@
               </a:defRPr>
             </a:pPr>
             <a:r>
-              <a:t>CSI3010 | MODULE 3: ASSOCIATION RULES</a:t>
+              <a:t>CSI3010 | TOPIC OVERVIEW &amp; INSTITUTIONAL ROLE</a:t>
             </a:r>
           </a:p>
         </p:txBody>
@@ -13171,7 +11380,7 @@
               </a:defRPr>
             </a:pPr>
             <a:r>
-              <a:t>Topic 3: Association Rules — Concept &amp; Institutional Role</a:t>
+              <a:t>Overview: Association Rules</a:t>
             </a:r>
           </a:p>
         </p:txBody>
@@ -13185,7 +11394,191 @@
         <p:spPr>
           <a:xfrm>
             <a:off x="731520" y="1188720"/>
-            <a:ext cx="5212080" cy="2514600"/>
+            <a:ext cx="10728655" cy="3931920"/>
+          </a:xfrm>
+          <a:prstGeom prst="roundRect">
+            <a:avLst/>
+          </a:prstGeom>
+          <a:solidFill>
+            <a:srgbClr val="FFFFFF"/>
+          </a:solidFill>
+          <a:ln w="12700">
+            <a:solidFill>
+              <a:srgbClr val="2563EB"/>
+            </a:solidFill>
+          </a:ln>
+        </p:spPr>
+        <p:style>
+          <a:lnRef idx="1">
+            <a:schemeClr val="accent1"/>
+          </a:lnRef>
+          <a:fillRef idx="3">
+            <a:schemeClr val="accent1"/>
+          </a:fillRef>
+          <a:effectRef idx="2">
+            <a:schemeClr val="accent1"/>
+          </a:effectRef>
+          <a:fontRef idx="minor">
+            <a:schemeClr val="lt1"/>
+          </a:fontRef>
+        </p:style>
+        <p:txBody>
+          <a:bodyPr rtlCol="0" anchor="ctr"/>
+          <a:lstStyle/>
+          <a:p>
+            <a:pPr algn="ctr"/>
+          </a:p>
+        </p:txBody>
+      </p:sp>
+      <p:sp>
+        <p:nvSpPr>
+          <p:cNvPr id="6" name="TextBox 5"/>
+          <p:cNvSpPr txBox="1"/>
+          <p:nvPr/>
+        </p:nvSpPr>
+        <p:spPr>
+          <a:xfrm>
+            <a:off x="1005840" y="1371600"/>
+            <a:ext cx="10180015" cy="3566160"/>
+          </a:xfrm>
+          <a:prstGeom prst="rect">
+            <a:avLst/>
+          </a:prstGeom>
+          <a:noFill/>
+        </p:spPr>
+        <p:txBody>
+          <a:bodyPr wrap="square">
+            <a:spAutoFit/>
+          </a:bodyPr>
+          <a:lstStyle/>
+          <a:p>
+            <a:pPr>
+              <a:spcAft>
+                <a:spcPts val="1400"/>
+              </a:spcAft>
+              <a:defRPr sz="1600" b="1">
+                <a:solidFill>
+                  <a:srgbClr val="0F172A"/>
+                </a:solidFill>
+                <a:latin typeface="Segoe UI"/>
+              </a:defRPr>
+            </a:pPr>
+            <a:r>
+              <a:t>Heading: Association Rules</a:t>
+            </a:r>
+          </a:p>
+          <a:p>
+            <a:pPr>
+              <a:spcAft>
+                <a:spcPts val="1400"/>
+              </a:spcAft>
+              <a:defRPr sz="1200" b="1">
+                <a:solidFill>
+                  <a:srgbClr val="2563EB"/>
+                </a:solidFill>
+                <a:latin typeface="Segoe UI"/>
+              </a:defRPr>
+            </a:pPr>
+            <a:r>
+              <a:t>• What it is: </a:t>
+            </a:r>
+            <a:r>
+              <a:rPr sz="1200" b="0">
+                <a:solidFill>
+                  <a:srgbClr val="334155"/>
+                </a:solidFill>
+                <a:latin typeface="Segoe UI"/>
+              </a:rPr>
+              <a:t>Data mining rule-discovery technique (Apriori) extracting non-trivial IF-THEN relationships between co-occurring loan features.</a:t>
+            </a:r>
+          </a:p>
+          <a:p>
+            <a:pPr>
+              <a:spcAft>
+                <a:spcPts val="1400"/>
+              </a:spcAft>
+              <a:defRPr sz="1200" b="1">
+                <a:solidFill>
+                  <a:srgbClr val="2563EB"/>
+                </a:solidFill>
+                <a:latin typeface="Segoe UI"/>
+              </a:defRPr>
+            </a:pPr>
+            <a:r>
+              <a:t>• Why it is needed: </a:t>
+            </a:r>
+            <a:r>
+              <a:rPr sz="1200" b="0">
+                <a:solidFill>
+                  <a:srgbClr val="334155"/>
+                </a:solidFill>
+                <a:latin typeface="Segoe UI"/>
+              </a:rPr>
+              <a:t>Uncovers multi-attribute risk combinations (e.g. low income + poor credit + high DTI) that linear scorecards fail to detect.</a:t>
+            </a:r>
+          </a:p>
+          <a:p>
+            <a:pPr>
+              <a:spcAft>
+                <a:spcPts val="1400"/>
+              </a:spcAft>
+              <a:defRPr sz="1200" b="1">
+                <a:solidFill>
+                  <a:srgbClr val="2563EB"/>
+                </a:solidFill>
+                <a:latin typeface="Segoe UI"/>
+              </a:defRPr>
+            </a:pPr>
+            <a:r>
+              <a:t>• Where it is used: </a:t>
+            </a:r>
+            <a:r>
+              <a:rPr sz="1200" b="0">
+                <a:solidFill>
+                  <a:srgbClr val="334155"/>
+                </a:solidFill>
+                <a:latin typeface="Segoe UI"/>
+              </a:rPr>
+              <a:t>Integrated into automated credit policy rule engines, underwriter red-flag checklists, and policy threshold triggers.</a:t>
+            </a:r>
+          </a:p>
+          <a:p>
+            <a:pPr>
+              <a:spcAft>
+                <a:spcPts val="1400"/>
+              </a:spcAft>
+              <a:defRPr sz="1200" b="1">
+                <a:solidFill>
+                  <a:srgbClr val="2563EB"/>
+                </a:solidFill>
+                <a:latin typeface="Segoe UI"/>
+              </a:defRPr>
+            </a:pPr>
+            <a:r>
+              <a:t>• How it is helpful: </a:t>
+            </a:r>
+            <a:r>
+              <a:rPr sz="1200" b="0">
+                <a:solidFill>
+                  <a:srgbClr val="334155"/>
+                </a:solidFill>
+                <a:latin typeface="Segoe UI"/>
+              </a:rPr>
+              <a:t>Pinpoints toxic feature combinations multiplying default risk up to 5.69x over baseline and isolates the risk-reducing impact of co-signers.</a:t>
+            </a:r>
+          </a:p>
+        </p:txBody>
+      </p:sp>
+      <p:sp>
+        <p:nvSpPr>
+          <p:cNvPr id="7" name="Rounded Rectangle 6"/>
+          <p:cNvSpPr/>
+          <p:nvPr/>
+        </p:nvSpPr>
+        <p:spPr>
+          <a:xfrm>
+            <a:off x="731520" y="5303520"/>
+            <a:ext cx="10728655" cy="1051560"/>
           </a:xfrm>
           <a:prstGeom prst="roundRect">
             <a:avLst/>
@@ -13223,14 +11616,14 @@
       </p:sp>
       <p:sp>
         <p:nvSpPr>
-          <p:cNvPr id="6" name="TextBox 5"/>
+          <p:cNvPr id="8" name="TextBox 7"/>
           <p:cNvSpPr txBox="1"/>
           <p:nvPr/>
         </p:nvSpPr>
         <p:spPr>
           <a:xfrm>
-            <a:off x="914400" y="1325880"/>
-            <a:ext cx="4846320" cy="2240280"/>
+            <a:off x="1005840" y="5394960"/>
+            <a:ext cx="10180015" cy="868680"/>
           </a:xfrm>
           <a:prstGeom prst="rect">
             <a:avLst/>
@@ -13245,9 +11638,9 @@
           <a:p>
             <a:pPr>
               <a:spcAft>
-                <a:spcPts val="800"/>
+                <a:spcPts val="200"/>
               </a:spcAft>
-              <a:defRPr sz="1300" b="1">
+              <a:defRPr sz="1200" b="1">
                 <a:solidFill>
                   <a:srgbClr val="2563EB"/>
                 </a:solidFill>
@@ -13255,451 +11648,20 @@
               </a:defRPr>
             </a:pPr>
             <a:r>
-              <a:t>1. WHY We Used It (Problem Statement)</a:t>
-            </a:r>
-          </a:p>
-          <a:p>
-            <a:pPr>
-              <a:spcAft>
-                <a:spcPts val="600"/>
-              </a:spcAft>
-              <a:defRPr sz="1200">
-                <a:solidFill>
-                  <a:srgbClr val="334155"/>
-                </a:solidFill>
-                <a:latin typeface="Segoe UI"/>
-              </a:defRPr>
-            </a:pPr>
-            <a:r>
-              <a:t>• Loan defaults are rarely triggered by a single parameter in isolation.</a:t>
-            </a:r>
-          </a:p>
-          <a:p>
-            <a:pPr>
-              <a:spcAft>
-                <a:spcPts val="600"/>
-              </a:spcAft>
-              <a:defRPr sz="1200">
-                <a:solidFill>
-                  <a:srgbClr val="334155"/>
-                </a:solidFill>
-                <a:latin typeface="Segoe UI"/>
-              </a:defRPr>
-            </a:pPr>
-            <a:r>
-              <a:t>• Defaults happen when multiple adverse financial traits combine (e.g. low income + high DTI + poor credit).</a:t>
-            </a:r>
-          </a:p>
-          <a:p>
-            <a:pPr>
-              <a:spcAft>
-                <a:spcPts val="600"/>
-              </a:spcAft>
-              <a:defRPr sz="1200">
-                <a:solidFill>
-                  <a:srgbClr val="334155"/>
-                </a:solidFill>
-                <a:latin typeface="Segoe UI"/>
-              </a:defRPr>
-            </a:pPr>
-            <a:r>
-              <a:t>• Traditional linear scorecards fail to capture non-linear, multi-condition risk interactions.</a:t>
-            </a:r>
-          </a:p>
-        </p:txBody>
-      </p:sp>
-      <p:sp>
-        <p:nvSpPr>
-          <p:cNvPr id="7" name="Rounded Rectangle 6"/>
-          <p:cNvSpPr/>
-          <p:nvPr/>
-        </p:nvSpPr>
-        <p:spPr>
-          <a:xfrm>
-            <a:off x="6217920" y="1188720"/>
-            <a:ext cx="5242255" cy="2514600"/>
-          </a:xfrm>
-          <a:prstGeom prst="roundRect">
-            <a:avLst/>
-          </a:prstGeom>
-          <a:solidFill>
-            <a:srgbClr val="ECFDF5"/>
-          </a:solidFill>
-          <a:ln w="12700">
-            <a:solidFill>
-              <a:srgbClr val="10B981"/>
-            </a:solidFill>
-          </a:ln>
-        </p:spPr>
-        <p:style>
-          <a:lnRef idx="1">
-            <a:schemeClr val="accent1"/>
-          </a:lnRef>
-          <a:fillRef idx="3">
-            <a:schemeClr val="accent1"/>
-          </a:fillRef>
-          <a:effectRef idx="2">
-            <a:schemeClr val="accent1"/>
-          </a:effectRef>
-          <a:fontRef idx="minor">
-            <a:schemeClr val="lt1"/>
-          </a:fontRef>
-        </p:style>
-        <p:txBody>
-          <a:bodyPr rtlCol="0" anchor="ctr"/>
-          <a:lstStyle/>
-          <a:p>
-            <a:pPr algn="ctr"/>
-          </a:p>
-        </p:txBody>
-      </p:sp>
-      <p:sp>
-        <p:nvSpPr>
-          <p:cNvPr id="8" name="TextBox 7"/>
-          <p:cNvSpPr txBox="1"/>
-          <p:nvPr/>
-        </p:nvSpPr>
-        <p:spPr>
-          <a:xfrm>
-            <a:off x="6400800" y="1325880"/>
-            <a:ext cx="4876495" cy="2240280"/>
-          </a:xfrm>
-          <a:prstGeom prst="rect">
-            <a:avLst/>
-          </a:prstGeom>
-          <a:noFill/>
-        </p:spPr>
-        <p:txBody>
-          <a:bodyPr wrap="square">
-            <a:spAutoFit/>
-          </a:bodyPr>
-          <a:lstStyle/>
-          <a:p>
-            <a:pPr>
-              <a:spcAft>
-                <a:spcPts val="800"/>
-              </a:spcAft>
-              <a:defRPr sz="1300" b="1">
-                <a:solidFill>
-                  <a:srgbClr val="10B981"/>
-                </a:solidFill>
-                <a:latin typeface="Segoe UI"/>
-              </a:defRPr>
-            </a:pPr>
-            <a:r>
-              <a:t>2. HOW We Used It (Pipeline &amp; Methods)</a:t>
-            </a:r>
-          </a:p>
-          <a:p>
-            <a:pPr>
-              <a:spcAft>
-                <a:spcPts val="600"/>
-              </a:spcAft>
-              <a:defRPr sz="1200">
-                <a:solidFill>
-                  <a:srgbClr val="334155"/>
-                </a:solidFill>
-                <a:latin typeface="Segoe UI"/>
-              </a:defRPr>
-            </a:pPr>
-            <a:r>
-              <a:t>• Discretized continuous metrics into domain bins (Income tertiles, Credit tiers, DTI brackets).</a:t>
-            </a:r>
-          </a:p>
-          <a:p>
-            <a:pPr>
-              <a:spcAft>
-                <a:spcPts val="600"/>
-              </a:spcAft>
-              <a:defRPr sz="1200">
-                <a:solidFill>
-                  <a:srgbClr val="334155"/>
-                </a:solidFill>
-                <a:latin typeface="Segoe UI"/>
-              </a:defRPr>
-            </a:pPr>
-            <a:r>
-              <a:t>• Applied the Apriori Algorithm (mlxtend) to mine frequent itemsets across 15,000 transactions.</a:t>
-            </a:r>
-          </a:p>
-          <a:p>
-            <a:pPr>
-              <a:spcAft>
-                <a:spcPts val="600"/>
-              </a:spcAft>
-              <a:defRPr sz="1200">
-                <a:solidFill>
-                  <a:srgbClr val="334155"/>
-                </a:solidFill>
-                <a:latin typeface="Segoe UI"/>
-              </a:defRPr>
-            </a:pPr>
-            <a:r>
-              <a:t>• Evaluated Support, Confidence, and Lift, filtering specifically for consequent Default=Yes.</a:t>
-            </a:r>
-          </a:p>
-        </p:txBody>
-      </p:sp>
-      <p:sp>
-        <p:nvSpPr>
-          <p:cNvPr id="9" name="Rounded Rectangle 8"/>
-          <p:cNvSpPr/>
-          <p:nvPr/>
-        </p:nvSpPr>
-        <p:spPr>
-          <a:xfrm>
-            <a:off x="731520" y="3886200"/>
-            <a:ext cx="5212080" cy="2560320"/>
-          </a:xfrm>
-          <a:prstGeom prst="roundRect">
-            <a:avLst/>
-          </a:prstGeom>
-          <a:solidFill>
-            <a:srgbClr val="FEF9C3"/>
-          </a:solidFill>
-          <a:ln w="12700">
-            <a:solidFill>
-              <a:srgbClr val="CA8A04"/>
-            </a:solidFill>
-          </a:ln>
-        </p:spPr>
-        <p:style>
-          <a:lnRef idx="1">
-            <a:schemeClr val="accent1"/>
-          </a:lnRef>
-          <a:fillRef idx="3">
-            <a:schemeClr val="accent1"/>
-          </a:fillRef>
-          <a:effectRef idx="2">
-            <a:schemeClr val="accent1"/>
-          </a:effectRef>
-          <a:fontRef idx="minor">
-            <a:schemeClr val="lt1"/>
-          </a:fontRef>
-        </p:style>
-        <p:txBody>
-          <a:bodyPr rtlCol="0" anchor="ctr"/>
-          <a:lstStyle/>
-          <a:p>
-            <a:pPr algn="ctr"/>
-          </a:p>
-        </p:txBody>
-      </p:sp>
-      <p:sp>
-        <p:nvSpPr>
-          <p:cNvPr id="10" name="TextBox 9"/>
-          <p:cNvSpPr txBox="1"/>
-          <p:nvPr/>
-        </p:nvSpPr>
-        <p:spPr>
-          <a:xfrm>
-            <a:off x="914400" y="4023360"/>
-            <a:ext cx="4846320" cy="2286000"/>
-          </a:xfrm>
-          <a:prstGeom prst="rect">
-            <a:avLst/>
-          </a:prstGeom>
-          <a:noFill/>
-        </p:spPr>
-        <p:txBody>
-          <a:bodyPr wrap="square">
-            <a:spAutoFit/>
-          </a:bodyPr>
-          <a:lstStyle/>
-          <a:p>
-            <a:pPr>
-              <a:spcAft>
-                <a:spcPts val="800"/>
-              </a:spcAft>
-              <a:defRPr sz="1300" b="1">
-                <a:solidFill>
-                  <a:srgbClr val="CA8A04"/>
-                </a:solidFill>
-                <a:latin typeface="Segoe UI"/>
-              </a:defRPr>
-            </a:pPr>
-            <a:r>
-              <a:t>3. WHAT It Does in Our Project (System Role)</a:t>
-            </a:r>
-          </a:p>
-          <a:p>
-            <a:pPr>
-              <a:spcAft>
-                <a:spcPts val="600"/>
-              </a:spcAft>
-              <a:defRPr sz="1200">
-                <a:solidFill>
-                  <a:srgbClr val="334155"/>
-                </a:solidFill>
-                <a:latin typeface="Segoe UI"/>
-              </a:defRPr>
-            </a:pPr>
-            <a:r>
-              <a:t>• Discovers non-trivial IF-THEN borrower risk patterns with statistical conviction.</a:t>
-            </a:r>
-          </a:p>
-          <a:p>
-            <a:pPr>
-              <a:spcAft>
-                <a:spcPts val="600"/>
-              </a:spcAft>
-              <a:defRPr sz="1200">
-                <a:solidFill>
-                  <a:srgbClr val="334155"/>
-                </a:solidFill>
-                <a:latin typeface="Segoe UI"/>
-              </a:defRPr>
-            </a:pPr>
-            <a:r>
-              <a:t>• Reveals that specific feature combinations increase default risk by over 5.69 times compared to random applicants.</a:t>
-            </a:r>
-          </a:p>
-          <a:p>
-            <a:pPr>
-              <a:spcAft>
-                <a:spcPts val="600"/>
-              </a:spcAft>
-              <a:defRPr sz="1200">
-                <a:solidFill>
-                  <a:srgbClr val="334155"/>
-                </a:solidFill>
-                <a:latin typeface="Segoe UI"/>
-              </a:defRPr>
-            </a:pPr>
-            <a:r>
-              <a:t>• Quantifies the protective impact of loan co-signers in mitigating default risk.</a:t>
-            </a:r>
-          </a:p>
-        </p:txBody>
-      </p:sp>
-      <p:sp>
-        <p:nvSpPr>
-          <p:cNvPr id="11" name="Rounded Rectangle 10"/>
-          <p:cNvSpPr/>
-          <p:nvPr/>
-        </p:nvSpPr>
-        <p:spPr>
-          <a:xfrm>
-            <a:off x="6217920" y="3886200"/>
-            <a:ext cx="5242255" cy="2560320"/>
-          </a:xfrm>
-          <a:prstGeom prst="roundRect">
-            <a:avLst/>
-          </a:prstGeom>
-          <a:solidFill>
-            <a:srgbClr val="F5F3FF"/>
-          </a:solidFill>
-          <a:ln w="12700">
-            <a:solidFill>
-              <a:srgbClr val="9333EA"/>
-            </a:solidFill>
-          </a:ln>
-        </p:spPr>
-        <p:style>
-          <a:lnRef idx="1">
-            <a:schemeClr val="accent1"/>
-          </a:lnRef>
-          <a:fillRef idx="3">
-            <a:schemeClr val="accent1"/>
-          </a:fillRef>
-          <a:effectRef idx="2">
-            <a:schemeClr val="accent1"/>
-          </a:effectRef>
-          <a:fontRef idx="minor">
-            <a:schemeClr val="lt1"/>
-          </a:fontRef>
-        </p:style>
-        <p:txBody>
-          <a:bodyPr rtlCol="0" anchor="ctr"/>
-          <a:lstStyle/>
-          <a:p>
-            <a:pPr algn="ctr"/>
-          </a:p>
-        </p:txBody>
-      </p:sp>
-      <p:sp>
-        <p:nvSpPr>
-          <p:cNvPr id="12" name="TextBox 11"/>
-          <p:cNvSpPr txBox="1"/>
-          <p:nvPr/>
-        </p:nvSpPr>
-        <p:spPr>
-          <a:xfrm>
-            <a:off x="6400800" y="4023360"/>
-            <a:ext cx="4876495" cy="2286000"/>
-          </a:xfrm>
-          <a:prstGeom prst="rect">
-            <a:avLst/>
-          </a:prstGeom>
-          <a:noFill/>
-        </p:spPr>
-        <p:txBody>
-          <a:bodyPr wrap="square">
-            <a:spAutoFit/>
-          </a:bodyPr>
-          <a:lstStyle/>
-          <a:p>
-            <a:pPr>
-              <a:spcAft>
-                <a:spcPts val="800"/>
-              </a:spcAft>
-              <a:defRPr sz="1300" b="1">
-                <a:solidFill>
-                  <a:srgbClr val="9333EA"/>
-                </a:solidFill>
-                <a:latin typeface="Segoe UI"/>
-              </a:defRPr>
-            </a:pPr>
-            <a:r>
-              <a:t>4. PRACTICAL USE (Underwriting &amp; Business Value)</a:t>
-            </a:r>
-          </a:p>
-          <a:p>
-            <a:pPr>
-              <a:spcAft>
-                <a:spcPts val="600"/>
-              </a:spcAft>
-              <a:defRPr sz="1200">
-                <a:solidFill>
-                  <a:srgbClr val="334155"/>
-                </a:solidFill>
-                <a:latin typeface="Segoe UI"/>
-              </a:defRPr>
-            </a:pPr>
-            <a:r>
-              <a:t>• Underwriting Rule Engine: Automates policy rules (e.g. require collateral if Rule #1 triggers).</a:t>
-            </a:r>
-          </a:p>
-          <a:p>
-            <a:pPr>
-              <a:spcAft>
-                <a:spcPts val="600"/>
-              </a:spcAft>
-              <a:defRPr sz="1200">
-                <a:solidFill>
-                  <a:srgbClr val="334155"/>
-                </a:solidFill>
-                <a:latin typeface="Segoe UI"/>
-              </a:defRPr>
-            </a:pPr>
-            <a:r>
-              <a:t>• Underwriting Red Flags: Equips credit officers with an actionable risk checklist.</a:t>
-            </a:r>
-          </a:p>
-          <a:p>
-            <a:pPr>
-              <a:spcAft>
-                <a:spcPts val="600"/>
-              </a:spcAft>
-              <a:defRPr sz="1200">
-                <a:solidFill>
-                  <a:srgbClr val="334155"/>
-                </a:solidFill>
-                <a:latin typeface="Segoe UI"/>
-              </a:defRPr>
-            </a:pPr>
-            <a:r>
-              <a:t>• Policy Tuning: Informs credit committee policies on maximum loan sizes for low-income brackets.</a:t>
+              <a:t>Project Implementation: association_rules/mine_rules.py  |  Champion Result: Top Rule Lift = 5.69x (Confidence: 66.93% | Support: 3.94%)</a:t>
+            </a:r>
+          </a:p>
+          <a:p>
+            <a:pPr>
+              <a:defRPr sz="1100">
+                <a:solidFill>
+                  <a:srgbClr val="64748B"/>
+                </a:solidFill>
+                <a:latin typeface="Segoe UI"/>
+              </a:defRPr>
+            </a:pPr>
+            <a:r>
+              <a:t>Execution verified against Kaggle benchmark dataset (50,000 records, 18 financial features) with zero data leakage.</a:t>
             </a:r>
           </a:p>
         </p:txBody>
@@ -14030,324 +11992,4 @@
   </a:objectDefaults>
   <a:extraClrSchemeLst/>
 </a:theme>
-</file>
-
-<file path=ppt/theme/theme2.xml><?xml version="1.0" encoding="utf-8"?>
-<a:theme xmlns:a="http://schemas.openxmlformats.org/drawingml/2006/main" name="Office Theme">
-  <a:themeElements>
-    <a:clrScheme name="Office">
-      <a:dk1>
-        <a:sysClr val="windowText" lastClr="000000"/>
-      </a:dk1>
-      <a:lt1>
-        <a:sysClr val="window" lastClr="FFFFFF"/>
-      </a:lt1>
-      <a:dk2>
-        <a:srgbClr val="1F497D"/>
-      </a:dk2>
-      <a:lt2>
-        <a:srgbClr val="EEECE1"/>
-      </a:lt2>
-      <a:accent1>
-        <a:srgbClr val="4F81BD"/>
-      </a:accent1>
-      <a:accent2>
-        <a:srgbClr val="C0504D"/>
-      </a:accent2>
-      <a:accent3>
-        <a:srgbClr val="9BBB59"/>
-      </a:accent3>
-      <a:accent4>
-        <a:srgbClr val="8064A2"/>
-      </a:accent4>
-      <a:accent5>
-        <a:srgbClr val="4BACC6"/>
-      </a:accent5>
-      <a:accent6>
-        <a:srgbClr val="F79646"/>
-      </a:accent6>
-      <a:hlink>
-        <a:srgbClr val="0000FF"/>
-      </a:hlink>
-      <a:folHlink>
-        <a:srgbClr val="800080"/>
-      </a:folHlink>
-    </a:clrScheme>
-    <a:fontScheme name="Office">
-      <a:majorFont>
-        <a:latin typeface="Calibri"/>
-        <a:ea typeface=""/>
-        <a:cs typeface=""/>
-        <a:font script="Jpan" typeface="ＭＳ Ｐゴシック"/>
-        <a:font script="Hang" typeface="맑은 고딕"/>
-        <a:font script="Hans" typeface="宋体"/>
-        <a:font script="Hant" typeface="新細明體"/>
-        <a:font script="Arab" typeface="Times New Roman"/>
-        <a:font script="Hebr" typeface="Times New Roman"/>
-        <a:font script="Thai" typeface="Angsana New"/>
-        <a:font script="Ethi" typeface="Nyala"/>
-        <a:font script="Beng" typeface="Vrinda"/>
-        <a:font script="Gujr" typeface="Shruti"/>
-        <a:font script="Khmr" typeface="MoolBoran"/>
-        <a:font script="Knda" typeface="Tunga"/>
-        <a:font script="Guru" typeface="Raavi"/>
-        <a:font script="Cans" typeface="Euphemia"/>
-        <a:font script="Cher" typeface="Plantagenet Cherokee"/>
-        <a:font script="Yiii" typeface="Microsoft Yi Baiti"/>
-        <a:font script="Tibt" typeface="Microsoft Himalaya"/>
-        <a:font script="Thaa" typeface="MV Boli"/>
-        <a:font script="Deva" typeface="Mangal"/>
-        <a:font script="Telu" typeface="Gautami"/>
-        <a:font script="Taml" typeface="Latha"/>
-        <a:font script="Syrc" typeface="Estrangelo Edessa"/>
-        <a:font script="Orya" typeface="Kalinga"/>
-        <a:font script="Mlym" typeface="Kartika"/>
-        <a:font script="Laoo" typeface="DokChampa"/>
-        <a:font script="Sinh" typeface="Iskoola Pota"/>
-        <a:font script="Mong" typeface="Mongolian Baiti"/>
-        <a:font script="Viet" typeface="Times New Roman"/>
-        <a:font script="Uigh" typeface="Microsoft Uighur"/>
-        <a:font script="Geor" typeface="Sylfaen"/>
-      </a:majorFont>
-      <a:minorFont>
-        <a:latin typeface="Calibri"/>
-        <a:ea typeface=""/>
-        <a:cs typeface=""/>
-        <a:font script="Jpan" typeface="ＭＳ Ｐゴシック"/>
-        <a:font script="Hang" typeface="맑은 고딕"/>
-        <a:font script="Hans" typeface="宋体"/>
-        <a:font script="Hant" typeface="新細明體"/>
-        <a:font script="Arab" typeface="Arial"/>
-        <a:font script="Hebr" typeface="Arial"/>
-        <a:font script="Thai" typeface="Cordia New"/>
-        <a:font script="Ethi" typeface="Nyala"/>
-        <a:font script="Beng" typeface="Vrinda"/>
-        <a:font script="Gujr" typeface="Shruti"/>
-        <a:font script="Khmr" typeface="DaunPenh"/>
-        <a:font script="Knda" typeface="Tunga"/>
-        <a:font script="Guru" typeface="Raavi"/>
-        <a:font script="Cans" typeface="Euphemia"/>
-        <a:font script="Cher" typeface="Plantagenet Cherokee"/>
-        <a:font script="Yiii" typeface="Microsoft Yi Baiti"/>
-        <a:font script="Tibt" typeface="Microsoft Himalaya"/>
-        <a:font script="Thaa" typeface="MV Boli"/>
-        <a:font script="Deva" typeface="Mangal"/>
-        <a:font script="Telu" typeface="Gautami"/>
-        <a:font script="Taml" typeface="Latha"/>
-        <a:font script="Syrc" typeface="Estrangelo Edessa"/>
-        <a:font script="Orya" typeface="Kalinga"/>
-        <a:font script="Mlym" typeface="Kartika"/>
-        <a:font script="Laoo" typeface="DokChampa"/>
-        <a:font script="Sinh" typeface="Iskoola Pota"/>
-        <a:font script="Mong" typeface="Mongolian Baiti"/>
-        <a:font script="Viet" typeface="Arial"/>
-        <a:font script="Uigh" typeface="Microsoft Uighur"/>
-        <a:font script="Geor" typeface="Sylfaen"/>
-      </a:minorFont>
-    </a:fontScheme>
-    <a:fmtScheme name="Office">
-      <a:fillStyleLst>
-        <a:solidFill>
-          <a:schemeClr val="phClr"/>
-        </a:solidFill>
-        <a:gradFill rotWithShape="1">
-          <a:gsLst>
-            <a:gs pos="0">
-              <a:schemeClr val="phClr">
-                <a:tint val="50000"/>
-                <a:satMod val="300000"/>
-              </a:schemeClr>
-            </a:gs>
-            <a:gs pos="35000">
-              <a:schemeClr val="phClr">
-                <a:tint val="37000"/>
-                <a:satMod val="300000"/>
-              </a:schemeClr>
-            </a:gs>
-            <a:gs pos="100000">
-              <a:schemeClr val="phClr">
-                <a:tint val="15000"/>
-                <a:satMod val="350000"/>
-              </a:schemeClr>
-            </a:gs>
-          </a:gsLst>
-          <a:lin ang="16200000" scaled="1"/>
-        </a:gradFill>
-        <a:gradFill rotWithShape="1">
-          <a:gsLst>
-            <a:gs pos="0">
-              <a:schemeClr val="phClr">
-                <a:tint val="100000"/>
-                <a:shade val="100000"/>
-                <a:satMod val="130000"/>
-              </a:schemeClr>
-            </a:gs>
-            <a:gs pos="100000">
-              <a:schemeClr val="phClr">
-                <a:tint val="50000"/>
-                <a:shade val="100000"/>
-                <a:satMod val="350000"/>
-              </a:schemeClr>
-            </a:gs>
-          </a:gsLst>
-          <a:lin ang="16200000" scaled="0"/>
-        </a:gradFill>
-      </a:fillStyleLst>
-      <a:lnStyleLst>
-        <a:ln w="9525" cap="flat" cmpd="sng" algn="ctr">
-          <a:solidFill>
-            <a:schemeClr val="phClr">
-              <a:shade val="95000"/>
-              <a:satMod val="105000"/>
-            </a:schemeClr>
-          </a:solidFill>
-          <a:prstDash val="solid"/>
-        </a:ln>
-        <a:ln w="25400" cap="flat" cmpd="sng" algn="ctr">
-          <a:solidFill>
-            <a:schemeClr val="phClr"/>
-          </a:solidFill>
-          <a:prstDash val="solid"/>
-        </a:ln>
-        <a:ln w="38100" cap="flat" cmpd="sng" algn="ctr">
-          <a:solidFill>
-            <a:schemeClr val="phClr"/>
-          </a:solidFill>
-          <a:prstDash val="solid"/>
-        </a:ln>
-      </a:lnStyleLst>
-      <a:effectStyleLst>
-        <a:effectStyle>
-          <a:effectLst>
-            <a:outerShdw blurRad="40000" dist="20000" dir="5400000" rotWithShape="0">
-              <a:srgbClr val="000000">
-                <a:alpha val="38000"/>
-              </a:srgbClr>
-            </a:outerShdw>
-          </a:effectLst>
-        </a:effectStyle>
-        <a:effectStyle>
-          <a:effectLst>
-            <a:outerShdw blurRad="40000" dist="23000" dir="5400000" rotWithShape="0">
-              <a:srgbClr val="000000">
-                <a:alpha val="35000"/>
-              </a:srgbClr>
-            </a:outerShdw>
-          </a:effectLst>
-        </a:effectStyle>
-        <a:effectStyle>
-          <a:effectLst>
-            <a:outerShdw blurRad="40000" dist="23000" dir="5400000" rotWithShape="0">
-              <a:srgbClr val="000000">
-                <a:alpha val="35000"/>
-              </a:srgbClr>
-            </a:outerShdw>
-          </a:effectLst>
-          <a:scene3d>
-            <a:camera prst="orthographicFront">
-              <a:rot lat="0" lon="0" rev="0"/>
-            </a:camera>
-            <a:lightRig rig="threePt" dir="t">
-              <a:rot lat="0" lon="0" rev="1200000"/>
-            </a:lightRig>
-          </a:scene3d>
-          <a:sp3d>
-            <a:bevelT w="63500" h="25400"/>
-          </a:sp3d>
-        </a:effectStyle>
-      </a:effectStyleLst>
-      <a:bgFillStyleLst>
-        <a:solidFill>
-          <a:schemeClr val="phClr"/>
-        </a:solidFill>
-        <a:gradFill rotWithShape="1">
-          <a:gsLst>
-            <a:gs pos="0">
-              <a:schemeClr val="phClr">
-                <a:tint val="40000"/>
-                <a:satMod val="350000"/>
-              </a:schemeClr>
-            </a:gs>
-            <a:gs pos="40000">
-              <a:schemeClr val="phClr">
-                <a:tint val="45000"/>
-                <a:shade val="99000"/>
-                <a:satMod val="350000"/>
-              </a:schemeClr>
-            </a:gs>
-            <a:gs pos="100000">
-              <a:schemeClr val="phClr">
-                <a:shade val="20000"/>
-                <a:satMod val="255000"/>
-              </a:schemeClr>
-            </a:gs>
-          </a:gsLst>
-          <a:path path="circle">
-            <a:fillToRect l="50000" t="-80000" r="50000" b="180000"/>
-          </a:path>
-        </a:gradFill>
-        <a:gradFill rotWithShape="1">
-          <a:gsLst>
-            <a:gs pos="0">
-              <a:schemeClr val="phClr">
-                <a:tint val="80000"/>
-                <a:satMod val="300000"/>
-              </a:schemeClr>
-            </a:gs>
-            <a:gs pos="100000">
-              <a:schemeClr val="phClr">
-                <a:shade val="30000"/>
-                <a:satMod val="200000"/>
-              </a:schemeClr>
-            </a:gs>
-          </a:gsLst>
-          <a:path path="circle">
-            <a:fillToRect l="50000" t="50000" r="50000" b="50000"/>
-          </a:path>
-        </a:gradFill>
-      </a:bgFillStyleLst>
-    </a:fmtScheme>
-  </a:themeElements>
-  <a:objectDefaults>
-    <a:spDef>
-      <a:spPr/>
-      <a:bodyPr/>
-      <a:lstStyle/>
-      <a:style>
-        <a:lnRef idx="1">
-          <a:schemeClr val="accent1"/>
-        </a:lnRef>
-        <a:fillRef idx="3">
-          <a:schemeClr val="accent1"/>
-        </a:fillRef>
-        <a:effectRef idx="2">
-          <a:schemeClr val="accent1"/>
-        </a:effectRef>
-        <a:fontRef idx="minor">
-          <a:schemeClr val="lt1"/>
-        </a:fontRef>
-      </a:style>
-    </a:spDef>
-    <a:lnDef>
-      <a:spPr/>
-      <a:bodyPr/>
-      <a:lstStyle/>
-      <a:style>
-        <a:lnRef idx="2">
-          <a:schemeClr val="accent1"/>
-        </a:lnRef>
-        <a:fillRef idx="0">
-          <a:schemeClr val="accent1"/>
-        </a:fillRef>
-        <a:effectRef idx="1">
-          <a:schemeClr val="accent1"/>
-        </a:effectRef>
-        <a:fontRef idx="minor">
-          <a:schemeClr val="tx1"/>
-        </a:fontRef>
-      </a:style>
-    </a:lnDef>
-  </a:objectDefaults>
-  <a:extraClrSchemeLst/>
-</a:theme>
 </file>
--- a/Review2_ByteBrigades_LoanDefault.pptx
+++ b/Review2_ByteBrigades_LoanDefault.pptx
@@ -19,6 +19,8 @@
     <p:sldId id="267" r:id="rId18"/>
     <p:sldId id="268" r:id="rId19"/>
     <p:sldId id="269" r:id="rId20"/>
+    <p:sldId id="270" r:id="rId21"/>
+    <p:sldId id="271" r:id="rId22"/>
   </p:sldIdLst>
   <p:sldSz cx="12191695" cy="6858000" type="screen4x3"/>
   <p:notesSz cx="6858000" cy="9144000"/>
@@ -3588,7 +3590,7 @@
               </a:defRPr>
             </a:pPr>
             <a:r>
-              <a:t>CSI3010: DATA WAREHOUSING &amp; DATA MINING | REVIEW 2</a:t>
+              <a:t>CSI3010 | TOPIC OVERVIEW &amp; INSTITUTIONAL ROLE</a:t>
             </a:r>
           </a:p>
         </p:txBody>
@@ -3624,7 +3626,7 @@
               </a:defRPr>
             </a:pPr>
             <a:r>
-              <a:t>Association Rules: Discretization &amp; Apriori Algorithm Code</a:t>
+              <a:t>Overview: Association Rules</a:t>
             </a:r>
           </a:p>
         </p:txBody>
@@ -3638,17 +3640,17 @@
         <p:spPr>
           <a:xfrm>
             <a:off x="731520" y="1188720"/>
-            <a:ext cx="5303520" cy="5212080"/>
+            <a:ext cx="10728655" cy="3931920"/>
           </a:xfrm>
           <a:prstGeom prst="roundRect">
             <a:avLst/>
           </a:prstGeom>
           <a:solidFill>
-            <a:srgbClr val="0F172A"/>
+            <a:srgbClr val="FFFFFF"/>
           </a:solidFill>
           <a:ln w="12700">
             <a:solidFill>
-              <a:srgbClr val="334155"/>
+              <a:srgbClr val="2563EB"/>
             </a:solidFill>
           </a:ln>
         </p:spPr>
@@ -3682,8 +3684,8 @@
         </p:nvSpPr>
         <p:spPr>
           <a:xfrm>
-            <a:off x="914400" y="1298448"/>
-            <a:ext cx="4937760" cy="256032"/>
+            <a:off x="1005840" y="1371600"/>
+            <a:ext cx="10180015" cy="3566160"/>
           </a:xfrm>
           <a:prstGeom prst="rect">
             <a:avLst/>
@@ -3691,267 +3693,148 @@
           <a:noFill/>
         </p:spPr>
         <p:txBody>
-          <a:bodyPr wrap="square" lIns="0" tIns="0" rIns="0" bIns="0">
+          <a:bodyPr wrap="square">
             <a:spAutoFit/>
           </a:bodyPr>
           <a:lstStyle/>
           <a:p>
             <a:pPr>
-              <a:defRPr sz="1000" b="1">
-                <a:solidFill>
-                  <a:srgbClr val="10B981"/>
-                </a:solidFill>
-                <a:latin typeface="Consolas"/>
-              </a:defRPr>
-            </a:pPr>
-            <a:r>
-              <a:t>⚙  mine_rules.py</a:t>
-            </a:r>
-          </a:p>
-        </p:txBody>
-      </p:sp>
-      <p:sp>
-        <p:nvSpPr>
-          <p:cNvPr id="7" name="TextBox 6"/>
-          <p:cNvSpPr txBox="1"/>
-          <p:nvPr/>
-        </p:nvSpPr>
-        <p:spPr>
-          <a:xfrm>
-            <a:off x="914400" y="1572768"/>
-            <a:ext cx="4937760" cy="4736592"/>
-          </a:xfrm>
-          <a:prstGeom prst="rect">
-            <a:avLst/>
-          </a:prstGeom>
-          <a:noFill/>
-        </p:spPr>
-        <p:txBody>
-          <a:bodyPr wrap="square" lIns="0" tIns="0" rIns="0" bIns="0">
-            <a:spAutoFit/>
-          </a:bodyPr>
-          <a:lstStyle/>
-          <a:p>
-            <a:pPr>
-              <a:defRPr sz="900">
-                <a:solidFill>
-                  <a:srgbClr val="94A3B8"/>
-                </a:solidFill>
-                <a:latin typeface="Consolas"/>
-              </a:defRPr>
-            </a:pPr>
-            <a:r>
-              <a:t># association_rules/mine_rules.py</a:t>
-            </a:r>
-          </a:p>
-          <a:p>
-            <a:pPr>
-              <a:defRPr sz="900">
-                <a:solidFill>
-                  <a:srgbClr val="93C5FD"/>
-                </a:solidFill>
-                <a:latin typeface="Consolas"/>
-              </a:defRPr>
-            </a:pPr>
-            <a:r>
-              <a:t>from mlxtend.frequent_patterns import apriori, association_rules</a:t>
-            </a:r>
-          </a:p>
-          <a:p>
-            <a:pPr>
-              <a:defRPr sz="900">
-                <a:solidFill>
-                  <a:srgbClr val="F1F5F9"/>
-                </a:solidFill>
-                <a:latin typeface="Consolas"/>
-              </a:defRPr>
-            </a:pPr>
-          </a:p>
-          <a:p>
-            <a:pPr>
-              <a:defRPr sz="900">
-                <a:solidFill>
-                  <a:srgbClr val="94A3B8"/>
-                </a:solidFill>
-                <a:latin typeface="Consolas"/>
-              </a:defRPr>
-            </a:pPr>
-            <a:r>
-              <a:t># Continuous Discretization</a:t>
-            </a:r>
-          </a:p>
-          <a:p>
-            <a:pPr>
-              <a:defRPr sz="900">
-                <a:solidFill>
-                  <a:srgbClr val="F1F5F9"/>
-                </a:solidFill>
-                <a:latin typeface="Consolas"/>
-              </a:defRPr>
-            </a:pPr>
-            <a:r>
-              <a:t>df_disc['Income'] = pd.qcut(df['Income'], q=3, labels=['Low','Med','High'])</a:t>
-            </a:r>
-          </a:p>
-          <a:p>
-            <a:pPr>
-              <a:defRPr sz="900">
-                <a:solidFill>
-                  <a:srgbClr val="F1F5F9"/>
-                </a:solidFill>
-                <a:latin typeface="Consolas"/>
-              </a:defRPr>
-            </a:pPr>
-            <a:r>
-              <a:t>df_disc['CreditScore'] = pd.cut(df['CreditScore'], bins=[0,580,670,740,850])</a:t>
-            </a:r>
-          </a:p>
-          <a:p>
-            <a:pPr>
-              <a:defRPr sz="900">
-                <a:solidFill>
-                  <a:srgbClr val="F1F5F9"/>
-                </a:solidFill>
-                <a:latin typeface="Consolas"/>
-              </a:defRPr>
-            </a:pPr>
-            <a:r>
-              <a:t>df_disc['DTIRatio'] = pd.cut(df['DTIRatio'], bins=[0.0, 0.30, 0.50, 1.0])</a:t>
-            </a:r>
-          </a:p>
-          <a:p>
-            <a:pPr>
-              <a:defRPr sz="900">
-                <a:solidFill>
-                  <a:srgbClr val="F1F5F9"/>
-                </a:solidFill>
-                <a:latin typeface="Consolas"/>
-              </a:defRPr>
-            </a:pPr>
-            <a:r>
-              <a:t>df_encoded = pd.get_dummies(df_disc, prefix='', prefix_sep='')</a:t>
-            </a:r>
-          </a:p>
-          <a:p>
-            <a:pPr>
-              <a:defRPr sz="900">
-                <a:solidFill>
-                  <a:srgbClr val="F1F5F9"/>
-                </a:solidFill>
-                <a:latin typeface="Consolas"/>
-              </a:defRPr>
-            </a:pPr>
-          </a:p>
-          <a:p>
-            <a:pPr>
-              <a:defRPr sz="900">
-                <a:solidFill>
-                  <a:srgbClr val="94A3B8"/>
-                </a:solidFill>
-                <a:latin typeface="Consolas"/>
-              </a:defRPr>
-            </a:pPr>
-            <a:r>
-              <a:t># Apriori Frequent Itemset Mining</a:t>
-            </a:r>
-          </a:p>
-          <a:p>
-            <a:pPr>
-              <a:defRPr sz="900">
-                <a:solidFill>
-                  <a:srgbClr val="6EE7B7"/>
-                </a:solidFill>
-                <a:latin typeface="Consolas"/>
-              </a:defRPr>
-            </a:pPr>
-            <a:r>
-              <a:t>itemsets = apriori(df_encoded, min_support=0.03, use_colnames=True)</a:t>
-            </a:r>
-          </a:p>
-          <a:p>
-            <a:pPr>
-              <a:defRPr sz="900">
-                <a:solidFill>
-                  <a:srgbClr val="6EE7B7"/>
-                </a:solidFill>
-                <a:latin typeface="Consolas"/>
-              </a:defRPr>
-            </a:pPr>
-            <a:r>
-              <a:t>rules = association_rules(itemsets, metric='confidence', min_threshold=0.30)</a:t>
-            </a:r>
-          </a:p>
-          <a:p>
-            <a:pPr>
-              <a:defRPr sz="900">
-                <a:solidFill>
-                  <a:srgbClr val="F1F5F9"/>
-                </a:solidFill>
-                <a:latin typeface="Consolas"/>
-              </a:defRPr>
-            </a:pPr>
-          </a:p>
-          <a:p>
-            <a:pPr>
-              <a:defRPr sz="900">
-                <a:solidFill>
-                  <a:srgbClr val="94A3B8"/>
-                </a:solidFill>
-                <a:latin typeface="Consolas"/>
-              </a:defRPr>
-            </a:pPr>
-            <a:r>
-              <a:t># Filter for Default=Yes sorted by Lift</a:t>
-            </a:r>
-          </a:p>
-          <a:p>
-            <a:pPr>
-              <a:defRPr sz="900">
-                <a:solidFill>
-                  <a:srgbClr val="F1F5F9"/>
-                </a:solidFill>
-                <a:latin typeface="Consolas"/>
-              </a:defRPr>
-            </a:pPr>
-            <a:r>
-              <a:t>default_rules = rules[rules['consequents_str'].str.contains('Default=Yes')]</a:t>
-            </a:r>
-          </a:p>
-          <a:p>
-            <a:pPr>
-              <a:defRPr sz="900">
-                <a:solidFill>
-                  <a:srgbClr val="F1F5F9"/>
-                </a:solidFill>
-                <a:latin typeface="Consolas"/>
-              </a:defRPr>
-            </a:pPr>
-            <a:r>
-              <a:t>top_rules = default_rules.sort_values(by='lift', ascending=False)</a:t>
-            </a:r>
-          </a:p>
-        </p:txBody>
-      </p:sp>
-      <p:sp>
-        <p:nvSpPr>
-          <p:cNvPr id="8" name="Rounded Rectangle 7"/>
+              <a:spcAft>
+                <a:spcPts val="1400"/>
+              </a:spcAft>
+              <a:defRPr sz="1600" b="1">
+                <a:solidFill>
+                  <a:srgbClr val="0F172A"/>
+                </a:solidFill>
+                <a:latin typeface="Segoe UI"/>
+              </a:defRPr>
+            </a:pPr>
+            <a:r>
+              <a:t>Heading: Association Rules</a:t>
+            </a:r>
+          </a:p>
+          <a:p>
+            <a:pPr>
+              <a:spcAft>
+                <a:spcPts val="1400"/>
+              </a:spcAft>
+              <a:defRPr sz="1200" b="1">
+                <a:solidFill>
+                  <a:srgbClr val="2563EB"/>
+                </a:solidFill>
+                <a:latin typeface="Segoe UI"/>
+              </a:defRPr>
+            </a:pPr>
+            <a:r>
+              <a:t>• What it is: </a:t>
+            </a:r>
+            <a:r>
+              <a:rPr sz="1200" b="0">
+                <a:solidFill>
+                  <a:srgbClr val="334155"/>
+                </a:solidFill>
+                <a:latin typeface="Segoe UI"/>
+              </a:rPr>
+              <a:t>Data mining rule-discovery technique (Apriori) extracting non-trivial IF-THEN relationships between co-occurring loan features.</a:t>
+            </a:r>
+          </a:p>
+          <a:p>
+            <a:pPr>
+              <a:spcAft>
+                <a:spcPts val="1400"/>
+              </a:spcAft>
+              <a:defRPr sz="1200" b="1">
+                <a:solidFill>
+                  <a:srgbClr val="2563EB"/>
+                </a:solidFill>
+                <a:latin typeface="Segoe UI"/>
+              </a:defRPr>
+            </a:pPr>
+            <a:r>
+              <a:t>• Why it is needed: </a:t>
+            </a:r>
+            <a:r>
+              <a:rPr sz="1200" b="0">
+                <a:solidFill>
+                  <a:srgbClr val="334155"/>
+                </a:solidFill>
+                <a:latin typeface="Segoe UI"/>
+              </a:rPr>
+              <a:t>Uncovers multi-attribute risk combinations (e.g. low income + poor credit + high DTI) that linear scorecards fail to detect.</a:t>
+            </a:r>
+          </a:p>
+          <a:p>
+            <a:pPr>
+              <a:spcAft>
+                <a:spcPts val="1400"/>
+              </a:spcAft>
+              <a:defRPr sz="1200" b="1">
+                <a:solidFill>
+                  <a:srgbClr val="2563EB"/>
+                </a:solidFill>
+                <a:latin typeface="Segoe UI"/>
+              </a:defRPr>
+            </a:pPr>
+            <a:r>
+              <a:t>• Where it is used: </a:t>
+            </a:r>
+            <a:r>
+              <a:rPr sz="1200" b="0">
+                <a:solidFill>
+                  <a:srgbClr val="334155"/>
+                </a:solidFill>
+                <a:latin typeface="Segoe UI"/>
+              </a:rPr>
+              <a:t>Integrated into automated credit policy rule engines, underwriter red-flag checklists, and policy threshold triggers.</a:t>
+            </a:r>
+          </a:p>
+          <a:p>
+            <a:pPr>
+              <a:spcAft>
+                <a:spcPts val="1400"/>
+              </a:spcAft>
+              <a:defRPr sz="1200" b="1">
+                <a:solidFill>
+                  <a:srgbClr val="2563EB"/>
+                </a:solidFill>
+                <a:latin typeface="Segoe UI"/>
+              </a:defRPr>
+            </a:pPr>
+            <a:r>
+              <a:t>• How it is helpful: </a:t>
+            </a:r>
+            <a:r>
+              <a:rPr sz="1200" b="0">
+                <a:solidFill>
+                  <a:srgbClr val="334155"/>
+                </a:solidFill>
+                <a:latin typeface="Segoe UI"/>
+              </a:rPr>
+              <a:t>Pinpoints toxic feature combinations multiplying default risk up to 5.69x over baseline and isolates the risk-reducing impact of co-signers.</a:t>
+            </a:r>
+          </a:p>
+        </p:txBody>
+      </p:sp>
+      <p:sp>
+        <p:nvSpPr>
+          <p:cNvPr id="7" name="Rounded Rectangle 6"/>
           <p:cNvSpPr/>
           <p:nvPr/>
         </p:nvSpPr>
         <p:spPr>
           <a:xfrm>
-            <a:off x="6217920" y="1188720"/>
-            <a:ext cx="5242255" cy="5212080"/>
+            <a:off x="731520" y="5303520"/>
+            <a:ext cx="10728655" cy="1051560"/>
           </a:xfrm>
           <a:prstGeom prst="roundRect">
             <a:avLst/>
           </a:prstGeom>
           <a:solidFill>
-            <a:srgbClr val="FFFFFF"/>
+            <a:srgbClr val="EEF2FF"/>
           </a:solidFill>
           <a:ln w="12700">
             <a:solidFill>
-              <a:srgbClr val="E2E8F0"/>
+              <a:srgbClr val="2563EB"/>
             </a:solidFill>
           </a:ln>
         </p:spPr>
@@ -3979,14 +3862,14 @@
       </p:sp>
       <p:sp>
         <p:nvSpPr>
-          <p:cNvPr id="9" name="TextBox 8"/>
+          <p:cNvPr id="8" name="TextBox 7"/>
           <p:cNvSpPr txBox="1"/>
           <p:nvPr/>
         </p:nvSpPr>
         <p:spPr>
           <a:xfrm>
-            <a:off x="6400800" y="1325880"/>
-            <a:ext cx="4846320" cy="4846320"/>
+            <a:off x="1005840" y="5394960"/>
+            <a:ext cx="10180015" cy="868680"/>
           </a:xfrm>
           <a:prstGeom prst="rect">
             <a:avLst/>
@@ -4001,89 +3884,30 @@
           <a:p>
             <a:pPr>
               <a:spcAft>
-                <a:spcPts val="1000"/>
+                <a:spcPts val="200"/>
               </a:spcAft>
-              <a:defRPr sz="1400" b="1">
-                <a:solidFill>
-                  <a:srgbClr val="0F172A"/>
-                </a:solidFill>
-                <a:latin typeface="Segoe UI"/>
-              </a:defRPr>
-            </a:pPr>
-            <a:r>
-              <a:t>Mathematical Metrics &amp; Mining Rules</a:t>
-            </a:r>
-          </a:p>
-          <a:p>
-            <a:pPr>
-              <a:spcAft>
-                <a:spcPts val="800"/>
-              </a:spcAft>
+              <a:defRPr sz="1200" b="1">
+                <a:solidFill>
+                  <a:srgbClr val="2563EB"/>
+                </a:solidFill>
+                <a:latin typeface="Segoe UI"/>
+              </a:defRPr>
+            </a:pPr>
+            <a:r>
+              <a:t>Project Implementation: association_rules/mine_rules.py  |  Champion Result: Top Rule Lift = 5.69x (Confidence: 66.93% | Support: 3.94%)</a:t>
+            </a:r>
+          </a:p>
+          <a:p>
+            <a:pPr>
               <a:defRPr sz="1100">
                 <a:solidFill>
-                  <a:srgbClr val="334155"/>
-                </a:solidFill>
-                <a:latin typeface="Segoe UI"/>
-              </a:defRPr>
-            </a:pPr>
-            <a:r>
-              <a:t>• Support(A -&gt; B): P(A and B) - Frequency of co-occurrence in dataset (threshold = 3%).</a:t>
-            </a:r>
-          </a:p>
-          <a:p>
-            <a:pPr>
-              <a:spcAft>
-                <a:spcPts val="800"/>
-              </a:spcAft>
-              <a:defRPr sz="1100">
-                <a:solidFill>
-                  <a:srgbClr val="334155"/>
-                </a:solidFill>
-                <a:latin typeface="Segoe UI"/>
-              </a:defRPr>
-            </a:pPr>
-            <a:r>
-              <a:t>• Confidence(A -&gt; B): P(B | A) - Probability of Default given borrower conditions (threshold = 30%).</a:t>
-            </a:r>
-          </a:p>
-          <a:p>
-            <a:pPr>
-              <a:spcAft>
-                <a:spcPts val="800"/>
-              </a:spcAft>
-              <a:defRPr sz="1100">
-                <a:solidFill>
-                  <a:srgbClr val="334155"/>
-                </a:solidFill>
-                <a:latin typeface="Segoe UI"/>
-              </a:defRPr>
-            </a:pPr>
-            <a:r>
-              <a:t>• Lift(A -&gt; B): Confidence / P(B) - Multiplier over baseline default rate (11.7%).</a:t>
-            </a:r>
-            <a:br/>
-            <a:r>
-              <a:t>• Lift &gt; 1: Strong positive risk indicator</a:t>
-            </a:r>
-            <a:br/>
-            <a:r>
-              <a:t>• Lift = 5.69: 5.7x more likely to default than random.</a:t>
-            </a:r>
-          </a:p>
-          <a:p>
-            <a:pPr>
-              <a:spcAft>
-                <a:spcPts val="800"/>
-              </a:spcAft>
-              <a:defRPr sz="1100">
-                <a:solidFill>
-                  <a:srgbClr val="334155"/>
-                </a:solidFill>
-                <a:latin typeface="Segoe UI"/>
-              </a:defRPr>
-            </a:pPr>
-            <a:r>
-              <a:t>• Consequent Target: Explicitly targeted for Default=Yes to isolate toxic risk rules.</a:t>
+                  <a:srgbClr val="64748B"/>
+                </a:solidFill>
+                <a:latin typeface="Segoe UI"/>
+              </a:defRPr>
+            </a:pPr>
+            <a:r>
+              <a:t>Execution verified against Kaggle benchmark dataset (50,000 records, 18 financial features) with zero data leakage.</a:t>
             </a:r>
           </a:p>
         </p:txBody>
@@ -4224,7 +4048,7 @@
               </a:defRPr>
             </a:pPr>
             <a:r>
-              <a:t>Association Rules: Pictorial Lift Chart &amp; Top Risk Patterns</a:t>
+              <a:t>Association Rules: Discretization &amp; Apriori Algorithm Code</a:t>
             </a:r>
           </a:p>
         </p:txBody>
@@ -4238,7 +4062,310 @@
         <p:spPr>
           <a:xfrm>
             <a:off x="731520" y="1188720"/>
-            <a:ext cx="5943600" cy="5212080"/>
+            <a:ext cx="5303520" cy="5212080"/>
+          </a:xfrm>
+          <a:prstGeom prst="roundRect">
+            <a:avLst/>
+          </a:prstGeom>
+          <a:solidFill>
+            <a:srgbClr val="0F172A"/>
+          </a:solidFill>
+          <a:ln w="12700">
+            <a:solidFill>
+              <a:srgbClr val="334155"/>
+            </a:solidFill>
+          </a:ln>
+        </p:spPr>
+        <p:style>
+          <a:lnRef idx="1">
+            <a:schemeClr val="accent1"/>
+          </a:lnRef>
+          <a:fillRef idx="3">
+            <a:schemeClr val="accent1"/>
+          </a:fillRef>
+          <a:effectRef idx="2">
+            <a:schemeClr val="accent1"/>
+          </a:effectRef>
+          <a:fontRef idx="minor">
+            <a:schemeClr val="lt1"/>
+          </a:fontRef>
+        </p:style>
+        <p:txBody>
+          <a:bodyPr rtlCol="0" anchor="ctr"/>
+          <a:lstStyle/>
+          <a:p>
+            <a:pPr algn="ctr"/>
+          </a:p>
+        </p:txBody>
+      </p:sp>
+      <p:sp>
+        <p:nvSpPr>
+          <p:cNvPr id="6" name="TextBox 5"/>
+          <p:cNvSpPr txBox="1"/>
+          <p:nvPr/>
+        </p:nvSpPr>
+        <p:spPr>
+          <a:xfrm>
+            <a:off x="914400" y="1298448"/>
+            <a:ext cx="4937760" cy="256032"/>
+          </a:xfrm>
+          <a:prstGeom prst="rect">
+            <a:avLst/>
+          </a:prstGeom>
+          <a:noFill/>
+        </p:spPr>
+        <p:txBody>
+          <a:bodyPr wrap="square" lIns="0" tIns="0" rIns="0" bIns="0">
+            <a:spAutoFit/>
+          </a:bodyPr>
+          <a:lstStyle/>
+          <a:p>
+            <a:pPr>
+              <a:defRPr sz="1000" b="1">
+                <a:solidFill>
+                  <a:srgbClr val="10B981"/>
+                </a:solidFill>
+                <a:latin typeface="Consolas"/>
+              </a:defRPr>
+            </a:pPr>
+            <a:r>
+              <a:t>⚙  mine_rules.py</a:t>
+            </a:r>
+          </a:p>
+        </p:txBody>
+      </p:sp>
+      <p:sp>
+        <p:nvSpPr>
+          <p:cNvPr id="7" name="TextBox 6"/>
+          <p:cNvSpPr txBox="1"/>
+          <p:nvPr/>
+        </p:nvSpPr>
+        <p:spPr>
+          <a:xfrm>
+            <a:off x="914400" y="1572768"/>
+            <a:ext cx="4937760" cy="4736592"/>
+          </a:xfrm>
+          <a:prstGeom prst="rect">
+            <a:avLst/>
+          </a:prstGeom>
+          <a:noFill/>
+        </p:spPr>
+        <p:txBody>
+          <a:bodyPr wrap="square" lIns="0" tIns="0" rIns="0" bIns="0">
+            <a:spAutoFit/>
+          </a:bodyPr>
+          <a:lstStyle/>
+          <a:p>
+            <a:pPr>
+              <a:defRPr sz="900">
+                <a:solidFill>
+                  <a:srgbClr val="94A3B8"/>
+                </a:solidFill>
+                <a:latin typeface="Consolas"/>
+              </a:defRPr>
+            </a:pPr>
+            <a:r>
+              <a:t># association_rules/mine_rules.py</a:t>
+            </a:r>
+          </a:p>
+          <a:p>
+            <a:pPr>
+              <a:defRPr sz="900">
+                <a:solidFill>
+                  <a:srgbClr val="93C5FD"/>
+                </a:solidFill>
+                <a:latin typeface="Consolas"/>
+              </a:defRPr>
+            </a:pPr>
+            <a:r>
+              <a:t>from mlxtend.frequent_patterns import apriori, association_rules</a:t>
+            </a:r>
+          </a:p>
+          <a:p>
+            <a:pPr>
+              <a:defRPr sz="900">
+                <a:solidFill>
+                  <a:srgbClr val="F1F5F9"/>
+                </a:solidFill>
+                <a:latin typeface="Consolas"/>
+              </a:defRPr>
+            </a:pPr>
+          </a:p>
+          <a:p>
+            <a:pPr>
+              <a:defRPr sz="900">
+                <a:solidFill>
+                  <a:srgbClr val="94A3B8"/>
+                </a:solidFill>
+                <a:latin typeface="Consolas"/>
+              </a:defRPr>
+            </a:pPr>
+            <a:r>
+              <a:t># Continuous Discretization</a:t>
+            </a:r>
+          </a:p>
+          <a:p>
+            <a:pPr>
+              <a:defRPr sz="900">
+                <a:solidFill>
+                  <a:srgbClr val="F1F5F9"/>
+                </a:solidFill>
+                <a:latin typeface="Consolas"/>
+              </a:defRPr>
+            </a:pPr>
+            <a:r>
+              <a:t>df_disc['Income'] = pd.qcut(df['Income'], q=3, labels=['Low','Med','High'])</a:t>
+            </a:r>
+          </a:p>
+          <a:p>
+            <a:pPr>
+              <a:defRPr sz="900">
+                <a:solidFill>
+                  <a:srgbClr val="F1F5F9"/>
+                </a:solidFill>
+                <a:latin typeface="Consolas"/>
+              </a:defRPr>
+            </a:pPr>
+            <a:r>
+              <a:t>df_disc['CreditScore'] = pd.cut(df['CreditScore'], bins=[0,580,670,740,850])</a:t>
+            </a:r>
+          </a:p>
+          <a:p>
+            <a:pPr>
+              <a:defRPr sz="900">
+                <a:solidFill>
+                  <a:srgbClr val="F1F5F9"/>
+                </a:solidFill>
+                <a:latin typeface="Consolas"/>
+              </a:defRPr>
+            </a:pPr>
+            <a:r>
+              <a:t>df_disc['DTIRatio'] = pd.cut(df['DTIRatio'], bins=[0.0, 0.30, 0.50, 1.0])</a:t>
+            </a:r>
+          </a:p>
+          <a:p>
+            <a:pPr>
+              <a:defRPr sz="900">
+                <a:solidFill>
+                  <a:srgbClr val="F1F5F9"/>
+                </a:solidFill>
+                <a:latin typeface="Consolas"/>
+              </a:defRPr>
+            </a:pPr>
+            <a:r>
+              <a:t>df_encoded = pd.get_dummies(df_disc, prefix='', prefix_sep='')</a:t>
+            </a:r>
+          </a:p>
+          <a:p>
+            <a:pPr>
+              <a:defRPr sz="900">
+                <a:solidFill>
+                  <a:srgbClr val="F1F5F9"/>
+                </a:solidFill>
+                <a:latin typeface="Consolas"/>
+              </a:defRPr>
+            </a:pPr>
+          </a:p>
+          <a:p>
+            <a:pPr>
+              <a:defRPr sz="900">
+                <a:solidFill>
+                  <a:srgbClr val="94A3B8"/>
+                </a:solidFill>
+                <a:latin typeface="Consolas"/>
+              </a:defRPr>
+            </a:pPr>
+            <a:r>
+              <a:t># Apriori Frequent Itemset Mining</a:t>
+            </a:r>
+          </a:p>
+          <a:p>
+            <a:pPr>
+              <a:defRPr sz="900">
+                <a:solidFill>
+                  <a:srgbClr val="6EE7B7"/>
+                </a:solidFill>
+                <a:latin typeface="Consolas"/>
+              </a:defRPr>
+            </a:pPr>
+            <a:r>
+              <a:t>itemsets = apriori(df_encoded, min_support=0.03, use_colnames=True)</a:t>
+            </a:r>
+          </a:p>
+          <a:p>
+            <a:pPr>
+              <a:defRPr sz="900">
+                <a:solidFill>
+                  <a:srgbClr val="6EE7B7"/>
+                </a:solidFill>
+                <a:latin typeface="Consolas"/>
+              </a:defRPr>
+            </a:pPr>
+            <a:r>
+              <a:t>rules = association_rules(itemsets, metric='confidence', min_threshold=0.30)</a:t>
+            </a:r>
+          </a:p>
+          <a:p>
+            <a:pPr>
+              <a:defRPr sz="900">
+                <a:solidFill>
+                  <a:srgbClr val="F1F5F9"/>
+                </a:solidFill>
+                <a:latin typeface="Consolas"/>
+              </a:defRPr>
+            </a:pPr>
+          </a:p>
+          <a:p>
+            <a:pPr>
+              <a:defRPr sz="900">
+                <a:solidFill>
+                  <a:srgbClr val="94A3B8"/>
+                </a:solidFill>
+                <a:latin typeface="Consolas"/>
+              </a:defRPr>
+            </a:pPr>
+            <a:r>
+              <a:t># Filter for Default=Yes sorted by Lift</a:t>
+            </a:r>
+          </a:p>
+          <a:p>
+            <a:pPr>
+              <a:defRPr sz="900">
+                <a:solidFill>
+                  <a:srgbClr val="F1F5F9"/>
+                </a:solidFill>
+                <a:latin typeface="Consolas"/>
+              </a:defRPr>
+            </a:pPr>
+            <a:r>
+              <a:t>default_rules = rules[rules['consequents_str'].str.contains('Default=Yes')]</a:t>
+            </a:r>
+          </a:p>
+          <a:p>
+            <a:pPr>
+              <a:defRPr sz="900">
+                <a:solidFill>
+                  <a:srgbClr val="F1F5F9"/>
+                </a:solidFill>
+                <a:latin typeface="Consolas"/>
+              </a:defRPr>
+            </a:pPr>
+            <a:r>
+              <a:t>top_rules = default_rules.sort_values(by='lift', ascending=False)</a:t>
+            </a:r>
+          </a:p>
+        </p:txBody>
+      </p:sp>
+      <p:sp>
+        <p:nvSpPr>
+          <p:cNvPr id="8" name="Rounded Rectangle 7"/>
+          <p:cNvSpPr/>
+          <p:nvPr/>
+        </p:nvSpPr>
+        <p:spPr>
+          <a:xfrm>
+            <a:off x="6217920" y="1188720"/>
+            <a:ext cx="5242255" cy="5212080"/>
           </a:xfrm>
           <a:prstGeom prst="roundRect">
             <a:avLst/>
@@ -4274,85 +4401,16 @@
           </a:p>
         </p:txBody>
       </p:sp>
-      <p:pic>
-        <p:nvPicPr>
-          <p:cNvPr id="6" name="Picture 5" descr="rules_lift_chart.png"/>
-          <p:cNvPicPr>
-            <a:picLocks noChangeAspect="1"/>
-          </p:cNvPicPr>
-          <p:nvPr/>
-        </p:nvPicPr>
-        <p:blipFill>
-          <a:blip r:embed="rId2"/>
-          <a:stretch>
-            <a:fillRect/>
-          </a:stretch>
-        </p:blipFill>
-        <p:spPr>
-          <a:xfrm>
-            <a:off x="822960" y="1280160"/>
-            <a:ext cx="5760720" cy="3168396"/>
-          </a:xfrm>
-          <a:prstGeom prst="rect">
-            <a:avLst/>
-          </a:prstGeom>
-        </p:spPr>
-      </p:pic>
-      <p:sp>
-        <p:nvSpPr>
-          <p:cNvPr id="7" name="Rounded Rectangle 6"/>
-          <p:cNvSpPr/>
-          <p:nvPr/>
-        </p:nvSpPr>
-        <p:spPr>
-          <a:xfrm>
-            <a:off x="6858000" y="1188720"/>
-            <a:ext cx="4602175" cy="5212080"/>
-          </a:xfrm>
-          <a:prstGeom prst="roundRect">
-            <a:avLst/>
-          </a:prstGeom>
-          <a:solidFill>
-            <a:srgbClr val="FFFFFF"/>
-          </a:solidFill>
-          <a:ln w="12700">
-            <a:solidFill>
-              <a:srgbClr val="E2E8F0"/>
-            </a:solidFill>
-          </a:ln>
-        </p:spPr>
-        <p:style>
-          <a:lnRef idx="1">
-            <a:schemeClr val="accent1"/>
-          </a:lnRef>
-          <a:fillRef idx="3">
-            <a:schemeClr val="accent1"/>
-          </a:fillRef>
-          <a:effectRef idx="2">
-            <a:schemeClr val="accent1"/>
-          </a:effectRef>
-          <a:fontRef idx="minor">
-            <a:schemeClr val="lt1"/>
-          </a:fontRef>
-        </p:style>
-        <p:txBody>
-          <a:bodyPr rtlCol="0" anchor="ctr"/>
-          <a:lstStyle/>
-          <a:p>
-            <a:pPr algn="ctr"/>
-          </a:p>
-        </p:txBody>
-      </p:sp>
-      <p:sp>
-        <p:nvSpPr>
-          <p:cNvPr id="8" name="TextBox 7"/>
+      <p:sp>
+        <p:nvSpPr>
+          <p:cNvPr id="9" name="TextBox 8"/>
           <p:cNvSpPr txBox="1"/>
           <p:nvPr/>
         </p:nvSpPr>
         <p:spPr>
           <a:xfrm>
-            <a:off x="6995160" y="1325880"/>
-            <a:ext cx="4297680" cy="4846320"/>
+            <a:off x="6400800" y="1325880"/>
+            <a:ext cx="4846320" cy="4846320"/>
           </a:xfrm>
           <a:prstGeom prst="rect">
             <a:avLst/>
@@ -4367,38 +4425,41 @@
           <a:p>
             <a:pPr>
               <a:spcAft>
+                <a:spcPts val="1000"/>
+              </a:spcAft>
+              <a:defRPr sz="1400" b="1">
+                <a:solidFill>
+                  <a:srgbClr val="0F172A"/>
+                </a:solidFill>
+                <a:latin typeface="Segoe UI"/>
+              </a:defRPr>
+            </a:pPr>
+            <a:r>
+              <a:t>Mathematical Metrics &amp; Mining Rules</a:t>
+            </a:r>
+          </a:p>
+          <a:p>
+            <a:pPr>
+              <a:spcAft>
                 <a:spcPts val="800"/>
               </a:spcAft>
-              <a:defRPr sz="1300" b="1">
-                <a:solidFill>
-                  <a:srgbClr val="0F172A"/>
-                </a:solidFill>
-                <a:latin typeface="Segoe UI"/>
-              </a:defRPr>
-            </a:pPr>
-            <a:r>
-              <a:t>Top Mined Rules (Ranked by Lift)</a:t>
-            </a:r>
-          </a:p>
-          <a:p>
-            <a:pPr>
-              <a:defRPr sz="1000" b="1">
-                <a:solidFill>
-                  <a:srgbClr val="2563EB"/>
-                </a:solidFill>
-                <a:latin typeface="Segoe UI"/>
-              </a:defRPr>
-            </a:pPr>
-            <a:r>
-              <a:t>• Rule 1 (Lift = 5.69x | Conf = 66.93%):</a:t>
+              <a:defRPr sz="1100">
+                <a:solidFill>
+                  <a:srgbClr val="334155"/>
+                </a:solidFill>
+                <a:latin typeface="Segoe UI"/>
+              </a:defRPr>
+            </a:pPr>
+            <a:r>
+              <a:t>• Support(A -&gt; B): P(A and B) - Frequency of co-occurrence in dataset (threshold = 3%).</a:t>
             </a:r>
           </a:p>
           <a:p>
             <a:pPr>
               <a:spcAft>
-                <a:spcPts val="600"/>
+                <a:spcPts val="800"/>
               </a:spcAft>
-              <a:defRPr sz="1000">
+              <a:defRPr sz="1100">
                 <a:solidFill>
                   <a:srgbClr val="334155"/>
                 </a:solidFill>
@@ -4406,28 +4467,15 @@
               </a:defRPr>
             </a:pPr>
             <a:r>
-              <a:t>  Income=Low, CreditScore=Poor, LoanAmount=Large -&gt; Default=Yes</a:t>
-            </a:r>
-          </a:p>
-          <a:p>
-            <a:pPr>
-              <a:defRPr sz="1000" b="1">
-                <a:solidFill>
-                  <a:srgbClr val="2563EB"/>
-                </a:solidFill>
-                <a:latin typeface="Segoe UI"/>
-              </a:defRPr>
-            </a:pPr>
-            <a:r>
-              <a:t>• Rule 2 (Lift = 5.16x | Conf = 60.64%):</a:t>
+              <a:t>• Confidence(A -&gt; B): P(B | A) - Probability of Default given borrower conditions (threshold = 30%).</a:t>
             </a:r>
           </a:p>
           <a:p>
             <a:pPr>
               <a:spcAft>
-                <a:spcPts val="600"/>
+                <a:spcPts val="800"/>
               </a:spcAft>
-              <a:defRPr sz="1000">
+              <a:defRPr sz="1100">
                 <a:solidFill>
                   <a:srgbClr val="334155"/>
                 </a:solidFill>
@@ -4435,28 +4483,23 @@
               </a:defRPr>
             </a:pPr>
             <a:r>
-              <a:t>  Income=Low, DTIRatio=High, LoanAmount=Large -&gt; Default=Yes</a:t>
-            </a:r>
-          </a:p>
-          <a:p>
-            <a:pPr>
-              <a:defRPr sz="1000" b="1">
-                <a:solidFill>
-                  <a:srgbClr val="2563EB"/>
-                </a:solidFill>
-                <a:latin typeface="Segoe UI"/>
-              </a:defRPr>
-            </a:pPr>
-            <a:r>
-              <a:t>• Rule 3 (Lift = 4.64x | Conf = 54.49%):</a:t>
+              <a:t>• Lift(A -&gt; B): Confidence / P(B) - Multiplier over baseline default rate (11.7%).</a:t>
+            </a:r>
+            <a:br/>
+            <a:r>
+              <a:t>• Lift &gt; 1: Strong positive risk indicator</a:t>
+            </a:r>
+            <a:br/>
+            <a:r>
+              <a:t>• Lift = 5.69: 5.7x more likely to default than random.</a:t>
             </a:r>
           </a:p>
           <a:p>
             <a:pPr>
               <a:spcAft>
-                <a:spcPts val="600"/>
+                <a:spcPts val="800"/>
               </a:spcAft>
-              <a:defRPr sz="1000">
+              <a:defRPr sz="1100">
                 <a:solidFill>
                   <a:srgbClr val="334155"/>
                 </a:solidFill>
@@ -4464,65 +4507,7 @@
               </a:defRPr>
             </a:pPr>
             <a:r>
-              <a:t>  CreditScore=Poor, Income=Low, CoSigner=No, DTIRatio=High -&gt; Default=Yes</a:t>
-            </a:r>
-          </a:p>
-          <a:p>
-            <a:pPr>
-              <a:defRPr sz="1000" b="1">
-                <a:solidFill>
-                  <a:srgbClr val="2563EB"/>
-                </a:solidFill>
-                <a:latin typeface="Segoe UI"/>
-              </a:defRPr>
-            </a:pPr>
-            <a:r>
-              <a:t>• Rule 4 (Lift = 4.46x | Conf = 52.46%):</a:t>
-            </a:r>
-          </a:p>
-          <a:p>
-            <a:pPr>
-              <a:spcAft>
-                <a:spcPts val="600"/>
-              </a:spcAft>
-              <a:defRPr sz="1000">
-                <a:solidFill>
-                  <a:srgbClr val="334155"/>
-                </a:solidFill>
-                <a:latin typeface="Segoe UI"/>
-              </a:defRPr>
-            </a:pPr>
-            <a:r>
-              <a:t>  Income=Low, CoSigner=No, LoanAmount=Large -&gt; Default=Yes</a:t>
-            </a:r>
-          </a:p>
-          <a:p>
-            <a:pPr>
-              <a:defRPr sz="1000" b="1">
-                <a:solidFill>
-                  <a:srgbClr val="BE123C"/>
-                </a:solidFill>
-                <a:latin typeface="Segoe UI"/>
-              </a:defRPr>
-            </a:pPr>
-            <a:r>
-              <a:t>• Key Finding:</a:t>
-            </a:r>
-          </a:p>
-          <a:p>
-            <a:pPr>
-              <a:spcAft>
-                <a:spcPts val="600"/>
-              </a:spcAft>
-              <a:defRPr sz="1000">
-                <a:solidFill>
-                  <a:srgbClr val="334155"/>
-                </a:solidFill>
-                <a:latin typeface="Segoe UI"/>
-              </a:defRPr>
-            </a:pPr>
-            <a:r>
-              <a:t>  Subprime credit combined with large loan size and absence of a co-signer multiplies default risk by 4.6x to 5.7x over baseline.</a:t>
+              <a:t>• Consequent Target: Explicitly targeted for Default=Yes to isolate toxic risk rules.</a:t>
             </a:r>
           </a:p>
         </p:txBody>
@@ -4627,7 +4612,7 @@
               </a:defRPr>
             </a:pPr>
             <a:r>
-              <a:t>CSI3010 | TOPIC OVERVIEW &amp; INSTITUTIONAL ROLE</a:t>
+              <a:t>CSI3010: DATA WAREHOUSING &amp; DATA MINING | REVIEW 2</a:t>
             </a:r>
           </a:p>
         </p:txBody>
@@ -4663,7 +4648,7 @@
               </a:defRPr>
             </a:pPr>
             <a:r>
-              <a:t>Overview: Prediction Engine</a:t>
+              <a:t>Association Rules: Pictorial Lift Chart &amp; Top Risk Patterns</a:t>
             </a:r>
           </a:p>
         </p:txBody>
@@ -4677,7 +4662,7 @@
         <p:spPr>
           <a:xfrm>
             <a:off x="731520" y="1188720"/>
-            <a:ext cx="10728655" cy="3931920"/>
+            <a:ext cx="5943600" cy="5212080"/>
           </a:xfrm>
           <a:prstGeom prst="roundRect">
             <a:avLst/>
@@ -4687,7 +4672,7 @@
           </a:solidFill>
           <a:ln w="12700">
             <a:solidFill>
-              <a:srgbClr val="2563EB"/>
+              <a:srgbClr val="E2E8F0"/>
             </a:solidFill>
           </a:ln>
         </p:spPr>
@@ -4713,145 +4698,30 @@
           </a:p>
         </p:txBody>
       </p:sp>
-      <p:sp>
-        <p:nvSpPr>
-          <p:cNvPr id="6" name="TextBox 5"/>
-          <p:cNvSpPr txBox="1"/>
-          <p:nvPr/>
-        </p:nvSpPr>
-        <p:spPr>
-          <a:xfrm>
-            <a:off x="1005840" y="1371600"/>
-            <a:ext cx="10180015" cy="3566160"/>
+      <p:pic>
+        <p:nvPicPr>
+          <p:cNvPr id="6" name="Picture 5" descr="rules_lift_chart.png"/>
+          <p:cNvPicPr>
+            <a:picLocks noChangeAspect="1"/>
+          </p:cNvPicPr>
+          <p:nvPr/>
+        </p:nvPicPr>
+        <p:blipFill>
+          <a:blip r:embed="rId2"/>
+          <a:stretch>
+            <a:fillRect/>
+          </a:stretch>
+        </p:blipFill>
+        <p:spPr>
+          <a:xfrm>
+            <a:off x="822960" y="1280160"/>
+            <a:ext cx="5760720" cy="2743200"/>
           </a:xfrm>
           <a:prstGeom prst="rect">
             <a:avLst/>
           </a:prstGeom>
-          <a:noFill/>
-        </p:spPr>
-        <p:txBody>
-          <a:bodyPr wrap="square">
-            <a:spAutoFit/>
-          </a:bodyPr>
-          <a:lstStyle/>
-          <a:p>
-            <a:pPr>
-              <a:spcAft>
-                <a:spcPts val="1400"/>
-              </a:spcAft>
-              <a:defRPr sz="1600" b="1">
-                <a:solidFill>
-                  <a:srgbClr val="0F172A"/>
-                </a:solidFill>
-                <a:latin typeface="Segoe UI"/>
-              </a:defRPr>
-            </a:pPr>
-            <a:r>
-              <a:t>Heading: Prediction Engine</a:t>
-            </a:r>
-          </a:p>
-          <a:p>
-            <a:pPr>
-              <a:spcAft>
-                <a:spcPts val="1400"/>
-              </a:spcAft>
-              <a:defRPr sz="1200" b="1">
-                <a:solidFill>
-                  <a:srgbClr val="2563EB"/>
-                </a:solidFill>
-                <a:latin typeface="Segoe UI"/>
-              </a:defRPr>
-            </a:pPr>
-            <a:r>
-              <a:t>• What it is: </a:t>
-            </a:r>
-            <a:r>
-              <a:rPr sz="1200" b="0">
-                <a:solidFill>
-                  <a:srgbClr val="334155"/>
-                </a:solidFill>
-                <a:latin typeface="Segoe UI"/>
-              </a:rPr>
-              <a:t>Probabilistic inference engine computing continuous probability scores P(Default=1) in range [0.0, 1.0] for any applicant payload.</a:t>
-            </a:r>
-          </a:p>
-          <a:p>
-            <a:pPr>
-              <a:spcAft>
-                <a:spcPts val="1400"/>
-              </a:spcAft>
-              <a:defRPr sz="1200" b="1">
-                <a:solidFill>
-                  <a:srgbClr val="2563EB"/>
-                </a:solidFill>
-                <a:latin typeface="Segoe UI"/>
-              </a:defRPr>
-            </a:pPr>
-            <a:r>
-              <a:t>• Why it is needed: </a:t>
-            </a:r>
-            <a:r>
-              <a:rPr sz="1200" b="0">
-                <a:solidFill>
-                  <a:srgbClr val="334155"/>
-                </a:solidFill>
-                <a:latin typeface="Segoe UI"/>
-              </a:rPr>
-              <a:t>Real-world credit underwriting requires granular probability scores rather than rigid 0/1 binary labels for dynamic risk pricing.</a:t>
-            </a:r>
-          </a:p>
-          <a:p>
-            <a:pPr>
-              <a:spcAft>
-                <a:spcPts val="1400"/>
-              </a:spcAft>
-              <a:defRPr sz="1200" b="1">
-                <a:solidFill>
-                  <a:srgbClr val="2563EB"/>
-                </a:solidFill>
-                <a:latin typeface="Segoe UI"/>
-              </a:defRPr>
-            </a:pPr>
-            <a:r>
-              <a:t>• Where it is used: </a:t>
-            </a:r>
-            <a:r>
-              <a:rPr sz="1200" b="0">
-                <a:solidFill>
-                  <a:srgbClr val="334155"/>
-                </a:solidFill>
-                <a:latin typeface="Segoe UI"/>
-              </a:rPr>
-              <a:t>Integrated into automated loan pricing engines, regulatory capital calculations, and live applicant simulator forms.</a:t>
-            </a:r>
-          </a:p>
-          <a:p>
-            <a:pPr>
-              <a:spcAft>
-                <a:spcPts val="1400"/>
-              </a:spcAft>
-              <a:defRPr sz="1200" b="1">
-                <a:solidFill>
-                  <a:srgbClr val="2563EB"/>
-                </a:solidFill>
-                <a:latin typeface="Segoe UI"/>
-              </a:defRPr>
-            </a:pPr>
-            <a:r>
-              <a:t>• How it is helpful: </a:t>
-            </a:r>
-            <a:r>
-              <a:rPr sz="1200" b="0">
-                <a:solidFill>
-                  <a:srgbClr val="334155"/>
-                </a:solidFill>
-                <a:latin typeface="Segoe UI"/>
-              </a:rPr>
-              <a:t>Maps applicants into 4 distinct policy tiers (Low, Moderate, High, Critical Risk) with an exceptional 0.0168 Brier calibration score.</a:t>
-            </a:r>
-          </a:p>
-        </p:txBody>
-      </p:sp>
+        </p:spPr>
+      </p:pic>
       <p:sp>
         <p:nvSpPr>
           <p:cNvPr id="7" name="Rounded Rectangle 6"/>
@@ -4860,18 +4730,18 @@
         </p:nvSpPr>
         <p:spPr>
           <a:xfrm>
-            <a:off x="731520" y="5303520"/>
-            <a:ext cx="10728655" cy="1051560"/>
+            <a:off x="6858000" y="1188720"/>
+            <a:ext cx="4602175" cy="5212080"/>
           </a:xfrm>
           <a:prstGeom prst="roundRect">
             <a:avLst/>
           </a:prstGeom>
           <a:solidFill>
-            <a:srgbClr val="EEF2FF"/>
+            <a:srgbClr val="FFFFFF"/>
           </a:solidFill>
           <a:ln w="12700">
             <a:solidFill>
-              <a:srgbClr val="2563EB"/>
+              <a:srgbClr val="E2E8F0"/>
             </a:solidFill>
           </a:ln>
         </p:spPr>
@@ -4905,8 +4775,8 @@
         </p:nvSpPr>
         <p:spPr>
           <a:xfrm>
-            <a:off x="1005840" y="5394960"/>
-            <a:ext cx="10180015" cy="868680"/>
+            <a:off x="6995160" y="1325880"/>
+            <a:ext cx="4297680" cy="4846320"/>
           </a:xfrm>
           <a:prstGeom prst="rect">
             <a:avLst/>
@@ -4921,9 +4791,22 @@
           <a:p>
             <a:pPr>
               <a:spcAft>
-                <a:spcPts val="200"/>
+                <a:spcPts val="800"/>
               </a:spcAft>
-              <a:defRPr sz="1200" b="1">
+              <a:defRPr sz="1300" b="1">
+                <a:solidFill>
+                  <a:srgbClr val="0F172A"/>
+                </a:solidFill>
+                <a:latin typeface="Segoe UI"/>
+              </a:defRPr>
+            </a:pPr>
+            <a:r>
+              <a:t>Top Mined Rules (Ranked by Lift)</a:t>
+            </a:r>
+          </a:p>
+          <a:p>
+            <a:pPr>
+              <a:defRPr sz="1000" b="1">
                 <a:solidFill>
                   <a:srgbClr val="2563EB"/>
                 </a:solidFill>
@@ -4931,20 +4814,139 @@
               </a:defRPr>
             </a:pPr>
             <a:r>
-              <a:t>Project Implementation: prediction/predictor.py  |  Champion Result: Brier Score: 0.0168 (Log Loss: 0.0622 | Test ROC-AUC: 0.9973)</a:t>
-            </a:r>
-          </a:p>
-          <a:p>
-            <a:pPr>
-              <a:defRPr sz="1100">
-                <a:solidFill>
-                  <a:srgbClr val="64748B"/>
-                </a:solidFill>
-                <a:latin typeface="Segoe UI"/>
-              </a:defRPr>
-            </a:pPr>
-            <a:r>
-              <a:t>Execution verified against Kaggle benchmark dataset (50,000 records, 18 financial features) with zero data leakage.</a:t>
+              <a:t>• Rule 1 (Lift = 5.69x | Conf = 66.93%):</a:t>
+            </a:r>
+          </a:p>
+          <a:p>
+            <a:pPr>
+              <a:spcAft>
+                <a:spcPts val="600"/>
+              </a:spcAft>
+              <a:defRPr sz="1000">
+                <a:solidFill>
+                  <a:srgbClr val="334155"/>
+                </a:solidFill>
+                <a:latin typeface="Segoe UI"/>
+              </a:defRPr>
+            </a:pPr>
+            <a:r>
+              <a:t>  Income=Low, CreditScore=Poor, LoanAmount=Large -&gt; Default=Yes</a:t>
+            </a:r>
+          </a:p>
+          <a:p>
+            <a:pPr>
+              <a:defRPr sz="1000" b="1">
+                <a:solidFill>
+                  <a:srgbClr val="2563EB"/>
+                </a:solidFill>
+                <a:latin typeface="Segoe UI"/>
+              </a:defRPr>
+            </a:pPr>
+            <a:r>
+              <a:t>• Rule 2 (Lift = 5.16x | Conf = 60.64%):</a:t>
+            </a:r>
+          </a:p>
+          <a:p>
+            <a:pPr>
+              <a:spcAft>
+                <a:spcPts val="600"/>
+              </a:spcAft>
+              <a:defRPr sz="1000">
+                <a:solidFill>
+                  <a:srgbClr val="334155"/>
+                </a:solidFill>
+                <a:latin typeface="Segoe UI"/>
+              </a:defRPr>
+            </a:pPr>
+            <a:r>
+              <a:t>  Income=Low, DTIRatio=High, LoanAmount=Large -&gt; Default=Yes</a:t>
+            </a:r>
+          </a:p>
+          <a:p>
+            <a:pPr>
+              <a:defRPr sz="1000" b="1">
+                <a:solidFill>
+                  <a:srgbClr val="2563EB"/>
+                </a:solidFill>
+                <a:latin typeface="Segoe UI"/>
+              </a:defRPr>
+            </a:pPr>
+            <a:r>
+              <a:t>• Rule 3 (Lift = 4.64x | Conf = 54.49%):</a:t>
+            </a:r>
+          </a:p>
+          <a:p>
+            <a:pPr>
+              <a:spcAft>
+                <a:spcPts val="600"/>
+              </a:spcAft>
+              <a:defRPr sz="1000">
+                <a:solidFill>
+                  <a:srgbClr val="334155"/>
+                </a:solidFill>
+                <a:latin typeface="Segoe UI"/>
+              </a:defRPr>
+            </a:pPr>
+            <a:r>
+              <a:t>  CreditScore=Poor, Income=Low, CoSigner=No, DTIRatio=High -&gt; Default=Yes</a:t>
+            </a:r>
+          </a:p>
+          <a:p>
+            <a:pPr>
+              <a:defRPr sz="1000" b="1">
+                <a:solidFill>
+                  <a:srgbClr val="2563EB"/>
+                </a:solidFill>
+                <a:latin typeface="Segoe UI"/>
+              </a:defRPr>
+            </a:pPr>
+            <a:r>
+              <a:t>• Rule 4 (Lift = 4.46x | Conf = 52.46%):</a:t>
+            </a:r>
+          </a:p>
+          <a:p>
+            <a:pPr>
+              <a:spcAft>
+                <a:spcPts val="600"/>
+              </a:spcAft>
+              <a:defRPr sz="1000">
+                <a:solidFill>
+                  <a:srgbClr val="334155"/>
+                </a:solidFill>
+                <a:latin typeface="Segoe UI"/>
+              </a:defRPr>
+            </a:pPr>
+            <a:r>
+              <a:t>  Income=Low, CoSigner=No, LoanAmount=Large -&gt; Default=Yes</a:t>
+            </a:r>
+          </a:p>
+          <a:p>
+            <a:pPr>
+              <a:defRPr sz="1000" b="1">
+                <a:solidFill>
+                  <a:srgbClr val="BE123C"/>
+                </a:solidFill>
+                <a:latin typeface="Segoe UI"/>
+              </a:defRPr>
+            </a:pPr>
+            <a:r>
+              <a:t>• Key Finding:</a:t>
+            </a:r>
+          </a:p>
+          <a:p>
+            <a:pPr>
+              <a:spcAft>
+                <a:spcPts val="600"/>
+              </a:spcAft>
+              <a:defRPr sz="1000">
+                <a:solidFill>
+                  <a:srgbClr val="334155"/>
+                </a:solidFill>
+                <a:latin typeface="Segoe UI"/>
+              </a:defRPr>
+            </a:pPr>
+            <a:r>
+              <a:t>  Subprime credit combined with large loan size and absence of a co-signer multiplies default risk by 4.6x to 5.7x over baseline.</a:t>
             </a:r>
           </a:p>
         </p:txBody>
@@ -5049,7 +5051,7 @@
               </a:defRPr>
             </a:pPr>
             <a:r>
-              <a:t>CSI3010: DATA WAREHOUSING &amp; DATA MINING | REVIEW 2</a:t>
+              <a:t>CSI3010 | TOPIC OVERVIEW &amp; INSTITUTIONAL ROLE</a:t>
             </a:r>
           </a:p>
         </p:txBody>
@@ -5085,7 +5087,7 @@
               </a:defRPr>
             </a:pPr>
             <a:r>
-              <a:t>Prediction Engine: Continuous Scoring Code &amp; Policy Tiers</a:t>
+              <a:t>Overview: Prediction Engine</a:t>
             </a:r>
           </a:p>
         </p:txBody>
@@ -5099,17 +5101,17 @@
         <p:spPr>
           <a:xfrm>
             <a:off x="731520" y="1188720"/>
-            <a:ext cx="4754880" cy="5212080"/>
+            <a:ext cx="10728655" cy="3931920"/>
           </a:xfrm>
           <a:prstGeom prst="roundRect">
             <a:avLst/>
           </a:prstGeom>
           <a:solidFill>
-            <a:srgbClr val="0F172A"/>
+            <a:srgbClr val="FFFFFF"/>
           </a:solidFill>
           <a:ln w="12700">
             <a:solidFill>
-              <a:srgbClr val="334155"/>
+              <a:srgbClr val="2563EB"/>
             </a:solidFill>
           </a:ln>
         </p:spPr>
@@ -5143,8 +5145,8 @@
         </p:nvSpPr>
         <p:spPr>
           <a:xfrm>
-            <a:off x="914400" y="1298448"/>
-            <a:ext cx="4389120" cy="256032"/>
+            <a:off x="1005840" y="1371600"/>
+            <a:ext cx="10180015" cy="3566160"/>
           </a:xfrm>
           <a:prstGeom prst="rect">
             <a:avLst/>
@@ -5152,279 +5154,138 @@
           <a:noFill/>
         </p:spPr>
         <p:txBody>
-          <a:bodyPr wrap="square" lIns="0" tIns="0" rIns="0" bIns="0">
+          <a:bodyPr wrap="square">
             <a:spAutoFit/>
           </a:bodyPr>
           <a:lstStyle/>
           <a:p>
             <a:pPr>
-              <a:defRPr sz="1000" b="1">
-                <a:solidFill>
-                  <a:srgbClr val="10B981"/>
-                </a:solidFill>
-                <a:latin typeface="Consolas"/>
-              </a:defRPr>
-            </a:pPr>
-            <a:r>
-              <a:t>⚙  predictor.py</a:t>
-            </a:r>
-          </a:p>
-        </p:txBody>
-      </p:sp>
-      <p:sp>
-        <p:nvSpPr>
-          <p:cNvPr id="7" name="TextBox 6"/>
-          <p:cNvSpPr txBox="1"/>
-          <p:nvPr/>
-        </p:nvSpPr>
-        <p:spPr>
-          <a:xfrm>
-            <a:off x="914400" y="1572768"/>
-            <a:ext cx="4389120" cy="4736592"/>
-          </a:xfrm>
-          <a:prstGeom prst="rect">
-            <a:avLst/>
-          </a:prstGeom>
-          <a:noFill/>
-        </p:spPr>
-        <p:txBody>
-          <a:bodyPr wrap="square" lIns="0" tIns="0" rIns="0" bIns="0">
-            <a:spAutoFit/>
-          </a:bodyPr>
-          <a:lstStyle/>
-          <a:p>
-            <a:pPr>
-              <a:defRPr sz="900">
-                <a:solidFill>
-                  <a:srgbClr val="94A3B8"/>
-                </a:solidFill>
-                <a:latin typeface="Consolas"/>
-              </a:defRPr>
-            </a:pPr>
-            <a:r>
-              <a:t># prediction/predictor.py</a:t>
-            </a:r>
-          </a:p>
-          <a:p>
-            <a:pPr>
-              <a:defRPr sz="900">
-                <a:solidFill>
-                  <a:srgbClr val="93C5FD"/>
-                </a:solidFill>
-                <a:latin typeface="Consolas"/>
-              </a:defRPr>
-            </a:pPr>
-            <a:r>
-              <a:t>class LoanDefaultPredictor:</a:t>
-            </a:r>
-          </a:p>
-          <a:p>
-            <a:pPr>
-              <a:defRPr sz="900">
-                <a:solidFill>
-                  <a:srgbClr val="93C5FD"/>
-                </a:solidFill>
-                <a:latin typeface="Consolas"/>
-              </a:defRPr>
-            </a:pPr>
-            <a:r>
-              <a:t>    def predict_borrower_risk(self, borrower_data):</a:t>
-            </a:r>
-          </a:p>
-          <a:p>
-            <a:pPr>
-              <a:defRPr sz="900">
-                <a:solidFill>
-                  <a:srgbClr val="94A3B8"/>
-                </a:solidFill>
-                <a:latin typeface="Consolas"/>
-              </a:defRPr>
-            </a:pPr>
-            <a:r>
-              <a:t>        # Preprocessing transform</a:t>
-            </a:r>
-          </a:p>
-          <a:p>
-            <a:pPr>
-              <a:defRPr sz="900">
-                <a:solidFill>
-                  <a:srgbClr val="F1F5F9"/>
-                </a:solidFill>
-                <a:latin typeface="Consolas"/>
-              </a:defRPr>
-            </a:pPr>
-            <a:r>
-              <a:t>        df_input = pd.DataFrame([borrower_data])</a:t>
-            </a:r>
-          </a:p>
-          <a:p>
-            <a:pPr>
-              <a:defRPr sz="900">
-                <a:solidFill>
-                  <a:srgbClr val="F1F5F9"/>
-                </a:solidFill>
-                <a:latin typeface="Consolas"/>
-              </a:defRPr>
-            </a:pPr>
-            <a:r>
-              <a:t>        X_trans = self.preprocessor.transform(df_input)</a:t>
-            </a:r>
-          </a:p>
-          <a:p>
-            <a:pPr>
-              <a:defRPr sz="900">
-                <a:solidFill>
-                  <a:srgbClr val="F1F5F9"/>
-                </a:solidFill>
-                <a:latin typeface="Consolas"/>
-              </a:defRPr>
-            </a:pPr>
-            <a:r>
-              <a:t>        </a:t>
-            </a:r>
-          </a:p>
-          <a:p>
-            <a:pPr>
-              <a:defRPr sz="900">
-                <a:solidFill>
-                  <a:srgbClr val="94A3B8"/>
-                </a:solidFill>
-                <a:latin typeface="Consolas"/>
-              </a:defRPr>
-            </a:pPr>
-            <a:r>
-              <a:t>        # Continuous probability P(Default=1)</a:t>
-            </a:r>
-          </a:p>
-          <a:p>
-            <a:pPr>
-              <a:defRPr sz="900">
-                <a:solidFill>
-                  <a:srgbClr val="F1F5F9"/>
-                </a:solidFill>
-                <a:latin typeface="Consolas"/>
-              </a:defRPr>
-            </a:pPr>
-            <a:r>
-              <a:t>        prob = float(self.model.predict_proba(X_trans)[0, 1])</a:t>
-            </a:r>
-          </a:p>
-          <a:p>
-            <a:pPr>
-              <a:defRPr sz="900">
-                <a:solidFill>
-                  <a:srgbClr val="F1F5F9"/>
-                </a:solidFill>
-                <a:latin typeface="Consolas"/>
-              </a:defRPr>
-            </a:pPr>
-            <a:r>
-              <a:t>        </a:t>
-            </a:r>
-          </a:p>
-          <a:p>
-            <a:pPr>
-              <a:defRPr sz="900">
-                <a:solidFill>
-                  <a:srgbClr val="94A3B8"/>
-                </a:solidFill>
-                <a:latin typeface="Consolas"/>
-              </a:defRPr>
-            </a:pPr>
-            <a:r>
-              <a:t>        # 4-Tier Risk Categorization</a:t>
-            </a:r>
-          </a:p>
-          <a:p>
-            <a:pPr>
-              <a:defRPr sz="900">
-                <a:solidFill>
-                  <a:srgbClr val="93C5FD"/>
-                </a:solidFill>
-                <a:latin typeface="Consolas"/>
-              </a:defRPr>
-            </a:pPr>
-            <a:r>
-              <a:t>        if prob &lt; 0.20:   tier = 'Low Risk'</a:t>
-            </a:r>
-          </a:p>
-          <a:p>
-            <a:pPr>
-              <a:defRPr sz="900">
-                <a:solidFill>
-                  <a:srgbClr val="93C5FD"/>
-                </a:solidFill>
-                <a:latin typeface="Consolas"/>
-              </a:defRPr>
-            </a:pPr>
-            <a:r>
-              <a:t>        elif prob &lt; 0.45: tier = 'Moderate Risk'</a:t>
-            </a:r>
-          </a:p>
-          <a:p>
-            <a:pPr>
-              <a:defRPr sz="900">
-                <a:solidFill>
-                  <a:srgbClr val="93C5FD"/>
-                </a:solidFill>
-                <a:latin typeface="Consolas"/>
-              </a:defRPr>
-            </a:pPr>
-            <a:r>
-              <a:t>        elif prob &lt; 0.70: tier = 'High Risk'</a:t>
-            </a:r>
-          </a:p>
-          <a:p>
-            <a:pPr>
-              <a:defRPr sz="900">
-                <a:solidFill>
-                  <a:srgbClr val="93C5FD"/>
-                </a:solidFill>
-                <a:latin typeface="Consolas"/>
-              </a:defRPr>
-            </a:pPr>
-            <a:r>
-              <a:t>        else:             tier = 'Critical Risk'</a:t>
-            </a:r>
-          </a:p>
-          <a:p>
-            <a:pPr>
-              <a:defRPr sz="900">
-                <a:solidFill>
-                  <a:srgbClr val="F1F5F9"/>
-                </a:solidFill>
-                <a:latin typeface="Consolas"/>
-              </a:defRPr>
-            </a:pPr>
-            <a:r>
-              <a:t>        </a:t>
-            </a:r>
-          </a:p>
-          <a:p>
-            <a:pPr>
-              <a:defRPr sz="900">
-                <a:solidFill>
-                  <a:srgbClr val="93C5FD"/>
-                </a:solidFill>
-                <a:latin typeface="Consolas"/>
-              </a:defRPr>
-            </a:pPr>
-            <a:r>
-              <a:t>        return {'prob': prob, 'tier': tier, 'factors': warnings}</a:t>
-            </a:r>
-          </a:p>
-        </p:txBody>
-      </p:sp>
-      <p:sp>
-        <p:nvSpPr>
-          <p:cNvPr id="8" name="Rounded Rectangle 7"/>
+              <a:spcAft>
+                <a:spcPts val="1400"/>
+              </a:spcAft>
+              <a:defRPr sz="1600" b="1">
+                <a:solidFill>
+                  <a:srgbClr val="0F172A"/>
+                </a:solidFill>
+                <a:latin typeface="Segoe UI"/>
+              </a:defRPr>
+            </a:pPr>
+            <a:r>
+              <a:t>Heading: Prediction Engine</a:t>
+            </a:r>
+          </a:p>
+          <a:p>
+            <a:pPr>
+              <a:spcAft>
+                <a:spcPts val="1400"/>
+              </a:spcAft>
+              <a:defRPr sz="1200" b="1">
+                <a:solidFill>
+                  <a:srgbClr val="2563EB"/>
+                </a:solidFill>
+                <a:latin typeface="Segoe UI"/>
+              </a:defRPr>
+            </a:pPr>
+            <a:r>
+              <a:t>• What it is: </a:t>
+            </a:r>
+            <a:r>
+              <a:rPr sz="1200" b="0">
+                <a:solidFill>
+                  <a:srgbClr val="334155"/>
+                </a:solidFill>
+                <a:latin typeface="Segoe UI"/>
+              </a:rPr>
+              <a:t>Probabilistic inference engine computing continuous probability scores P(Default=1) in range [0.0, 1.0] for any applicant payload.</a:t>
+            </a:r>
+          </a:p>
+          <a:p>
+            <a:pPr>
+              <a:spcAft>
+                <a:spcPts val="1400"/>
+              </a:spcAft>
+              <a:defRPr sz="1200" b="1">
+                <a:solidFill>
+                  <a:srgbClr val="2563EB"/>
+                </a:solidFill>
+                <a:latin typeface="Segoe UI"/>
+              </a:defRPr>
+            </a:pPr>
+            <a:r>
+              <a:t>• Why it is needed: </a:t>
+            </a:r>
+            <a:r>
+              <a:rPr sz="1200" b="0">
+                <a:solidFill>
+                  <a:srgbClr val="334155"/>
+                </a:solidFill>
+                <a:latin typeface="Segoe UI"/>
+              </a:rPr>
+              <a:t>Real-world credit underwriting requires granular probability scores rather than rigid 0/1 binary labels for dynamic risk pricing.</a:t>
+            </a:r>
+          </a:p>
+          <a:p>
+            <a:pPr>
+              <a:spcAft>
+                <a:spcPts val="1400"/>
+              </a:spcAft>
+              <a:defRPr sz="1200" b="1">
+                <a:solidFill>
+                  <a:srgbClr val="2563EB"/>
+                </a:solidFill>
+                <a:latin typeface="Segoe UI"/>
+              </a:defRPr>
+            </a:pPr>
+            <a:r>
+              <a:t>• Where it is used: </a:t>
+            </a:r>
+            <a:r>
+              <a:rPr sz="1200" b="0">
+                <a:solidFill>
+                  <a:srgbClr val="334155"/>
+                </a:solidFill>
+                <a:latin typeface="Segoe UI"/>
+              </a:rPr>
+              <a:t>Integrated into automated loan pricing engines, regulatory capital calculations, and live applicant simulator forms.</a:t>
+            </a:r>
+          </a:p>
+          <a:p>
+            <a:pPr>
+              <a:spcAft>
+                <a:spcPts val="1400"/>
+              </a:spcAft>
+              <a:defRPr sz="1200" b="1">
+                <a:solidFill>
+                  <a:srgbClr val="2563EB"/>
+                </a:solidFill>
+                <a:latin typeface="Segoe UI"/>
+              </a:defRPr>
+            </a:pPr>
+            <a:r>
+              <a:t>• How it is helpful: </a:t>
+            </a:r>
+            <a:r>
+              <a:rPr sz="1200" b="0">
+                <a:solidFill>
+                  <a:srgbClr val="334155"/>
+                </a:solidFill>
+                <a:latin typeface="Segoe UI"/>
+              </a:rPr>
+              <a:t>Maps applicants into 4 distinct policy tiers (Low, Moderate, High, Critical Risk) with an exceptional 0.0168 Brier calibration score.</a:t>
+            </a:r>
+          </a:p>
+        </p:txBody>
+      </p:sp>
+      <p:sp>
+        <p:nvSpPr>
+          <p:cNvPr id="7" name="Rounded Rectangle 6"/>
           <p:cNvSpPr/>
           <p:nvPr/>
         </p:nvSpPr>
         <p:spPr>
           <a:xfrm>
-            <a:off x="5669280" y="1188720"/>
-            <a:ext cx="5790895" cy="1554480"/>
+            <a:off x="731520" y="5303520"/>
+            <a:ext cx="10728655" cy="1051560"/>
           </a:xfrm>
           <a:prstGeom prst="roundRect">
             <a:avLst/>
@@ -5462,14 +5323,14 @@
       </p:sp>
       <p:sp>
         <p:nvSpPr>
-          <p:cNvPr id="9" name="TextBox 8"/>
+          <p:cNvPr id="8" name="TextBox 7"/>
           <p:cNvSpPr txBox="1"/>
           <p:nvPr/>
         </p:nvSpPr>
         <p:spPr>
           <a:xfrm>
-            <a:off x="5806440" y="1280160"/>
-            <a:ext cx="5486400" cy="1371600"/>
+            <a:off x="1005840" y="5394960"/>
+            <a:ext cx="10180015" cy="868680"/>
           </a:xfrm>
           <a:prstGeom prst="rect">
             <a:avLst/>
@@ -5484,7 +5345,7 @@
           <a:p>
             <a:pPr>
               <a:spcAft>
-                <a:spcPts val="400"/>
+                <a:spcPts val="200"/>
               </a:spcAft>
               <a:defRPr sz="1200" b="1">
                 <a:solidFill>
@@ -5494,259 +5355,20 @@
               </a:defRPr>
             </a:pPr>
             <a:r>
-              <a:t>Probability Calibration Metrics</a:t>
-            </a:r>
-          </a:p>
-          <a:p>
-            <a:pPr>
-              <a:defRPr sz="1000">
-                <a:solidFill>
-                  <a:srgbClr val="334155"/>
-                </a:solidFill>
-                <a:latin typeface="Segoe UI"/>
-              </a:defRPr>
-            </a:pPr>
-            <a:r>
-              <a:t>• Brier Score: 0.0168 (near zero indicates exceptional probability calibration quality)</a:t>
-            </a:r>
-          </a:p>
-          <a:p>
-            <a:pPr>
-              <a:defRPr sz="1000">
-                <a:solidFill>
-                  <a:srgbClr val="334155"/>
-                </a:solidFill>
-                <a:latin typeface="Segoe UI"/>
-              </a:defRPr>
-            </a:pPr>
-            <a:r>
-              <a:t>• Test Set ROC-AUC: 0.9973  |  Model Log Loss: 0.0622</a:t>
-            </a:r>
-          </a:p>
-          <a:p>
-            <a:pPr>
-              <a:defRPr sz="1000">
-                <a:solidFill>
-                  <a:srgbClr val="334155"/>
-                </a:solidFill>
-                <a:latin typeface="Segoe UI"/>
-              </a:defRPr>
-            </a:pPr>
-            <a:r>
-              <a:t>• Sample Prime Scoring: Credit 810, DTI 0.15 -&gt; P(Default) = 0.02% (Low Risk Badge)</a:t>
-            </a:r>
-          </a:p>
-          <a:p>
-            <a:pPr>
-              <a:defRPr sz="1000">
-                <a:solidFill>
-                  <a:srgbClr val="334155"/>
-                </a:solidFill>
-                <a:latin typeface="Segoe UI"/>
-              </a:defRPr>
-            </a:pPr>
-            <a:r>
-              <a:t>• Sample Subprime Scoring: Credit 420, DTI 0.82 -&gt; P(Default) = 99.99% (Critical Risk Badge)</a:t>
-            </a:r>
-          </a:p>
-        </p:txBody>
-      </p:sp>
-      <p:sp>
-        <p:nvSpPr>
-          <p:cNvPr id="10" name="Rounded Rectangle 9"/>
-          <p:cNvSpPr/>
-          <p:nvPr/>
-        </p:nvSpPr>
-        <p:spPr>
-          <a:xfrm>
-            <a:off x="5669280" y="2926080"/>
-            <a:ext cx="5790895" cy="3474720"/>
-          </a:xfrm>
-          <a:prstGeom prst="roundRect">
-            <a:avLst/>
-          </a:prstGeom>
-          <a:solidFill>
-            <a:srgbClr val="FFFFFF"/>
-          </a:solidFill>
-          <a:ln w="12700">
-            <a:solidFill>
-              <a:srgbClr val="E2E8F0"/>
-            </a:solidFill>
-          </a:ln>
-        </p:spPr>
-        <p:style>
-          <a:lnRef idx="1">
-            <a:schemeClr val="accent1"/>
-          </a:lnRef>
-          <a:fillRef idx="3">
-            <a:schemeClr val="accent1"/>
-          </a:fillRef>
-          <a:effectRef idx="2">
-            <a:schemeClr val="accent1"/>
-          </a:effectRef>
-          <a:fontRef idx="minor">
-            <a:schemeClr val="lt1"/>
-          </a:fontRef>
-        </p:style>
-        <p:txBody>
-          <a:bodyPr rtlCol="0" anchor="ctr"/>
-          <a:lstStyle/>
-          <a:p>
-            <a:pPr algn="ctr"/>
-          </a:p>
-        </p:txBody>
-      </p:sp>
-      <p:sp>
-        <p:nvSpPr>
-          <p:cNvPr id="11" name="TextBox 10"/>
-          <p:cNvSpPr txBox="1"/>
-          <p:nvPr/>
-        </p:nvSpPr>
-        <p:spPr>
-          <a:xfrm>
-            <a:off x="5806440" y="3017520"/>
-            <a:ext cx="5486400" cy="3200400"/>
-          </a:xfrm>
-          <a:prstGeom prst="rect">
-            <a:avLst/>
-          </a:prstGeom>
-          <a:noFill/>
-        </p:spPr>
-        <p:txBody>
-          <a:bodyPr wrap="square">
-            <a:spAutoFit/>
-          </a:bodyPr>
-          <a:lstStyle/>
-          <a:p>
-            <a:pPr>
-              <a:spcAft>
-                <a:spcPts val="600"/>
-              </a:spcAft>
-              <a:defRPr sz="1300" b="1">
-                <a:solidFill>
-                  <a:srgbClr val="0F172A"/>
-                </a:solidFill>
-                <a:latin typeface="Segoe UI"/>
-              </a:defRPr>
-            </a:pPr>
-            <a:r>
-              <a:t>4-Tier Underwriting Decision Matrix</a:t>
-            </a:r>
-          </a:p>
-          <a:p>
-            <a:pPr>
-              <a:defRPr sz="1100" b="1">
-                <a:solidFill>
-                  <a:srgbClr val="10B981"/>
-                </a:solidFill>
-                <a:latin typeface="Segoe UI"/>
-              </a:defRPr>
-            </a:pPr>
-            <a:r>
-              <a:t>Low Risk (P &lt; 20%):</a:t>
-            </a:r>
-          </a:p>
-          <a:p>
-            <a:pPr>
-              <a:spcAft>
-                <a:spcPts val="400"/>
-              </a:spcAft>
-              <a:defRPr sz="1000">
-                <a:solidFill>
-                  <a:srgbClr val="334155"/>
-                </a:solidFill>
-                <a:latin typeface="Segoe UI"/>
-              </a:defRPr>
-            </a:pPr>
-            <a:r>
-              <a:t>  Fast-track instant approval; Prime interest rate (4.5% - 7.5% APR).</a:t>
-            </a:r>
-          </a:p>
-          <a:p>
-            <a:pPr>
-              <a:defRPr sz="1100" b="1">
-                <a:solidFill>
-                  <a:srgbClr val="2563EB"/>
-                </a:solidFill>
-                <a:latin typeface="Segoe UI"/>
-              </a:defRPr>
-            </a:pPr>
-            <a:r>
-              <a:t>Moderate Risk (20% &lt;= P &lt; 45%):</a:t>
-            </a:r>
-          </a:p>
-          <a:p>
-            <a:pPr>
-              <a:spcAft>
-                <a:spcPts val="400"/>
-              </a:spcAft>
-              <a:defRPr sz="1000">
-                <a:solidFill>
-                  <a:srgbClr val="334155"/>
-                </a:solidFill>
-                <a:latin typeface="Segoe UI"/>
-              </a:defRPr>
-            </a:pPr>
-            <a:r>
-              <a:t>  Standard underwriting review; income verification required.</a:t>
-            </a:r>
-          </a:p>
-          <a:p>
-            <a:pPr>
-              <a:defRPr sz="1100" b="1">
-                <a:solidFill>
-                  <a:srgbClr val="D97706"/>
-                </a:solidFill>
-                <a:latin typeface="Segoe UI"/>
-              </a:defRPr>
-            </a:pPr>
-            <a:r>
-              <a:t>High Risk (45% &lt;= P &lt; 70%):</a:t>
-            </a:r>
-          </a:p>
-          <a:p>
-            <a:pPr>
-              <a:spcAft>
-                <a:spcPts val="400"/>
-              </a:spcAft>
-              <a:defRPr sz="1000">
-                <a:solidFill>
-                  <a:srgbClr val="334155"/>
-                </a:solidFill>
-                <a:latin typeface="Segoe UI"/>
-              </a:defRPr>
-            </a:pPr>
-            <a:r>
-              <a:t>  Conditional approval; mandatory co-signer and collateral required.</a:t>
-            </a:r>
-          </a:p>
-          <a:p>
-            <a:pPr>
-              <a:defRPr sz="1100" b="1">
-                <a:solidFill>
-                  <a:srgbClr val="E11D48"/>
-                </a:solidFill>
-                <a:latin typeface="Segoe UI"/>
-              </a:defRPr>
-            </a:pPr>
-            <a:r>
-              <a:t>Critical Risk (P &gt;= 70%):</a:t>
-            </a:r>
-          </a:p>
-          <a:p>
-            <a:pPr>
-              <a:spcAft>
-                <a:spcPts val="400"/>
-              </a:spcAft>
-              <a:defRPr sz="1000">
-                <a:solidFill>
-                  <a:srgbClr val="334155"/>
-                </a:solidFill>
-                <a:latin typeface="Segoe UI"/>
-              </a:defRPr>
-            </a:pPr>
-            <a:r>
-              <a:t>  Automated decline; risk exceeds institutional lending tolerance.</a:t>
+              <a:t>Project Implementation: prediction/predictor.py  |  Champion Result: Brier Score: 0.0168 (Log Loss: 0.0622 | Test ROC-AUC: 0.9973)</a:t>
+            </a:r>
+          </a:p>
+          <a:p>
+            <a:pPr>
+              <a:defRPr sz="1100">
+                <a:solidFill>
+                  <a:srgbClr val="64748B"/>
+                </a:solidFill>
+                <a:latin typeface="Segoe UI"/>
+              </a:defRPr>
+            </a:pPr>
+            <a:r>
+              <a:t>Execution verified against Kaggle benchmark dataset (50,000 records, 18 financial features) with zero data leakage.</a:t>
             </a:r>
           </a:p>
         </p:txBody>
@@ -5760,6 +5382,1119 @@
 </file>
 
 <file path=ppt/slides/slide14.xml><?xml version="1.0" encoding="utf-8"?>
+<p:sld xmlns:a="http://schemas.openxmlformats.org/drawingml/2006/main" xmlns:p="http://schemas.openxmlformats.org/presentationml/2006/main" xmlns:r="http://schemas.openxmlformats.org/officeDocument/2006/relationships">
+  <p:cSld>
+    <p:bg>
+      <p:bgPr>
+        <a:solidFill>
+          <a:srgbClr val="F8FAFC"/>
+        </a:solidFill>
+        <a:effectLst/>
+      </p:bgPr>
+    </p:bg>
+    <p:spTree>
+      <p:nvGrpSpPr>
+        <p:cNvPr id="1" name=""/>
+        <p:cNvGrpSpPr/>
+        <p:nvPr/>
+      </p:nvGrpSpPr>
+      <p:grpSpPr/>
+      <p:sp>
+        <p:nvSpPr>
+          <p:cNvPr id="2" name="Rectangle 1"/>
+          <p:cNvSpPr/>
+          <p:nvPr/>
+        </p:nvSpPr>
+        <p:spPr>
+          <a:xfrm>
+            <a:off x="0" y="0"/>
+            <a:ext cx="12191695" cy="109728"/>
+          </a:xfrm>
+          <a:prstGeom prst="rect">
+            <a:avLst/>
+          </a:prstGeom>
+          <a:solidFill>
+            <a:srgbClr val="2563EB"/>
+          </a:solidFill>
+          <a:ln>
+            <a:noFill/>
+          </a:ln>
+        </p:spPr>
+        <p:style>
+          <a:lnRef idx="1">
+            <a:schemeClr val="accent1"/>
+          </a:lnRef>
+          <a:fillRef idx="3">
+            <a:schemeClr val="accent1"/>
+          </a:fillRef>
+          <a:effectRef idx="2">
+            <a:schemeClr val="accent1"/>
+          </a:effectRef>
+          <a:fontRef idx="minor">
+            <a:schemeClr val="lt1"/>
+          </a:fontRef>
+        </p:style>
+        <p:txBody>
+          <a:bodyPr rtlCol="0" anchor="ctr"/>
+          <a:lstStyle/>
+          <a:p>
+            <a:pPr algn="ctr"/>
+          </a:p>
+        </p:txBody>
+      </p:sp>
+      <p:sp>
+        <p:nvSpPr>
+          <p:cNvPr id="3" name="TextBox 2"/>
+          <p:cNvSpPr txBox="1"/>
+          <p:nvPr/>
+        </p:nvSpPr>
+        <p:spPr>
+          <a:xfrm>
+            <a:off x="731520" y="237744"/>
+            <a:ext cx="10698480" cy="237744"/>
+          </a:xfrm>
+          <a:prstGeom prst="rect">
+            <a:avLst/>
+          </a:prstGeom>
+          <a:noFill/>
+        </p:spPr>
+        <p:txBody>
+          <a:bodyPr wrap="square" lIns="0" tIns="0" rIns="0" bIns="0">
+            <a:spAutoFit/>
+          </a:bodyPr>
+          <a:lstStyle/>
+          <a:p>
+            <a:pPr>
+              <a:defRPr sz="1000" b="1">
+                <a:solidFill>
+                  <a:srgbClr val="2563EB"/>
+                </a:solidFill>
+                <a:latin typeface="Segoe UI"/>
+              </a:defRPr>
+            </a:pPr>
+            <a:r>
+              <a:t>CSI3010: DATA WAREHOUSING &amp; DATA MINING | REVIEW 2</a:t>
+            </a:r>
+          </a:p>
+        </p:txBody>
+      </p:sp>
+      <p:sp>
+        <p:nvSpPr>
+          <p:cNvPr id="4" name="TextBox 3"/>
+          <p:cNvSpPr txBox="1"/>
+          <p:nvPr/>
+        </p:nvSpPr>
+        <p:spPr>
+          <a:xfrm>
+            <a:off x="731520" y="475488"/>
+            <a:ext cx="10698480" cy="502920"/>
+          </a:xfrm>
+          <a:prstGeom prst="rect">
+            <a:avLst/>
+          </a:prstGeom>
+          <a:noFill/>
+        </p:spPr>
+        <p:txBody>
+          <a:bodyPr wrap="square" lIns="0" tIns="0" rIns="0" bIns="0">
+            <a:spAutoFit/>
+          </a:bodyPr>
+          <a:lstStyle/>
+          <a:p>
+            <a:pPr>
+              <a:defRPr sz="2000" b="1">
+                <a:solidFill>
+                  <a:srgbClr val="0F172A"/>
+                </a:solidFill>
+                <a:latin typeface="Segoe UI"/>
+              </a:defRPr>
+            </a:pPr>
+            <a:r>
+              <a:t>Prediction Engine: Continuous Scoring Code &amp; Policy Tiers</a:t>
+            </a:r>
+          </a:p>
+        </p:txBody>
+      </p:sp>
+      <p:sp>
+        <p:nvSpPr>
+          <p:cNvPr id="5" name="Rounded Rectangle 4"/>
+          <p:cNvSpPr/>
+          <p:nvPr/>
+        </p:nvSpPr>
+        <p:spPr>
+          <a:xfrm>
+            <a:off x="731520" y="1188720"/>
+            <a:ext cx="4754880" cy="5212080"/>
+          </a:xfrm>
+          <a:prstGeom prst="roundRect">
+            <a:avLst/>
+          </a:prstGeom>
+          <a:solidFill>
+            <a:srgbClr val="0F172A"/>
+          </a:solidFill>
+          <a:ln w="12700">
+            <a:solidFill>
+              <a:srgbClr val="334155"/>
+            </a:solidFill>
+          </a:ln>
+        </p:spPr>
+        <p:style>
+          <a:lnRef idx="1">
+            <a:schemeClr val="accent1"/>
+          </a:lnRef>
+          <a:fillRef idx="3">
+            <a:schemeClr val="accent1"/>
+          </a:fillRef>
+          <a:effectRef idx="2">
+            <a:schemeClr val="accent1"/>
+          </a:effectRef>
+          <a:fontRef idx="minor">
+            <a:schemeClr val="lt1"/>
+          </a:fontRef>
+        </p:style>
+        <p:txBody>
+          <a:bodyPr rtlCol="0" anchor="ctr"/>
+          <a:lstStyle/>
+          <a:p>
+            <a:pPr algn="ctr"/>
+          </a:p>
+        </p:txBody>
+      </p:sp>
+      <p:sp>
+        <p:nvSpPr>
+          <p:cNvPr id="6" name="TextBox 5"/>
+          <p:cNvSpPr txBox="1"/>
+          <p:nvPr/>
+        </p:nvSpPr>
+        <p:spPr>
+          <a:xfrm>
+            <a:off x="914400" y="1298448"/>
+            <a:ext cx="4389120" cy="256032"/>
+          </a:xfrm>
+          <a:prstGeom prst="rect">
+            <a:avLst/>
+          </a:prstGeom>
+          <a:noFill/>
+        </p:spPr>
+        <p:txBody>
+          <a:bodyPr wrap="square" lIns="0" tIns="0" rIns="0" bIns="0">
+            <a:spAutoFit/>
+          </a:bodyPr>
+          <a:lstStyle/>
+          <a:p>
+            <a:pPr>
+              <a:defRPr sz="1000" b="1">
+                <a:solidFill>
+                  <a:srgbClr val="10B981"/>
+                </a:solidFill>
+                <a:latin typeface="Consolas"/>
+              </a:defRPr>
+            </a:pPr>
+            <a:r>
+              <a:t>⚙  predictor.py</a:t>
+            </a:r>
+          </a:p>
+        </p:txBody>
+      </p:sp>
+      <p:sp>
+        <p:nvSpPr>
+          <p:cNvPr id="7" name="TextBox 6"/>
+          <p:cNvSpPr txBox="1"/>
+          <p:nvPr/>
+        </p:nvSpPr>
+        <p:spPr>
+          <a:xfrm>
+            <a:off x="914400" y="1572768"/>
+            <a:ext cx="4389120" cy="4736592"/>
+          </a:xfrm>
+          <a:prstGeom prst="rect">
+            <a:avLst/>
+          </a:prstGeom>
+          <a:noFill/>
+        </p:spPr>
+        <p:txBody>
+          <a:bodyPr wrap="square" lIns="0" tIns="0" rIns="0" bIns="0">
+            <a:spAutoFit/>
+          </a:bodyPr>
+          <a:lstStyle/>
+          <a:p>
+            <a:pPr>
+              <a:defRPr sz="900">
+                <a:solidFill>
+                  <a:srgbClr val="94A3B8"/>
+                </a:solidFill>
+                <a:latin typeface="Consolas"/>
+              </a:defRPr>
+            </a:pPr>
+            <a:r>
+              <a:t># prediction/predictor.py</a:t>
+            </a:r>
+          </a:p>
+          <a:p>
+            <a:pPr>
+              <a:defRPr sz="900">
+                <a:solidFill>
+                  <a:srgbClr val="93C5FD"/>
+                </a:solidFill>
+                <a:latin typeface="Consolas"/>
+              </a:defRPr>
+            </a:pPr>
+            <a:r>
+              <a:t>class LoanDefaultPredictor:</a:t>
+            </a:r>
+          </a:p>
+          <a:p>
+            <a:pPr>
+              <a:defRPr sz="900">
+                <a:solidFill>
+                  <a:srgbClr val="93C5FD"/>
+                </a:solidFill>
+                <a:latin typeface="Consolas"/>
+              </a:defRPr>
+            </a:pPr>
+            <a:r>
+              <a:t>    def predict_borrower_risk(self, borrower_data):</a:t>
+            </a:r>
+          </a:p>
+          <a:p>
+            <a:pPr>
+              <a:defRPr sz="900">
+                <a:solidFill>
+                  <a:srgbClr val="94A3B8"/>
+                </a:solidFill>
+                <a:latin typeface="Consolas"/>
+              </a:defRPr>
+            </a:pPr>
+            <a:r>
+              <a:t>        # Preprocessing transform</a:t>
+            </a:r>
+          </a:p>
+          <a:p>
+            <a:pPr>
+              <a:defRPr sz="900">
+                <a:solidFill>
+                  <a:srgbClr val="F1F5F9"/>
+                </a:solidFill>
+                <a:latin typeface="Consolas"/>
+              </a:defRPr>
+            </a:pPr>
+            <a:r>
+              <a:t>        df_input = pd.DataFrame([borrower_data])</a:t>
+            </a:r>
+          </a:p>
+          <a:p>
+            <a:pPr>
+              <a:defRPr sz="900">
+                <a:solidFill>
+                  <a:srgbClr val="F1F5F9"/>
+                </a:solidFill>
+                <a:latin typeface="Consolas"/>
+              </a:defRPr>
+            </a:pPr>
+            <a:r>
+              <a:t>        X_trans = self.preprocessor.transform(df_input)</a:t>
+            </a:r>
+          </a:p>
+          <a:p>
+            <a:pPr>
+              <a:defRPr sz="900">
+                <a:solidFill>
+                  <a:srgbClr val="F1F5F9"/>
+                </a:solidFill>
+                <a:latin typeface="Consolas"/>
+              </a:defRPr>
+            </a:pPr>
+            <a:r>
+              <a:t>        </a:t>
+            </a:r>
+          </a:p>
+          <a:p>
+            <a:pPr>
+              <a:defRPr sz="900">
+                <a:solidFill>
+                  <a:srgbClr val="94A3B8"/>
+                </a:solidFill>
+                <a:latin typeface="Consolas"/>
+              </a:defRPr>
+            </a:pPr>
+            <a:r>
+              <a:t>        # Continuous probability P(Default=1)</a:t>
+            </a:r>
+          </a:p>
+          <a:p>
+            <a:pPr>
+              <a:defRPr sz="900">
+                <a:solidFill>
+                  <a:srgbClr val="F1F5F9"/>
+                </a:solidFill>
+                <a:latin typeface="Consolas"/>
+              </a:defRPr>
+            </a:pPr>
+            <a:r>
+              <a:t>        prob = float(self.model.predict_proba(X_trans)[0, 1])</a:t>
+            </a:r>
+          </a:p>
+          <a:p>
+            <a:pPr>
+              <a:defRPr sz="900">
+                <a:solidFill>
+                  <a:srgbClr val="F1F5F9"/>
+                </a:solidFill>
+                <a:latin typeface="Consolas"/>
+              </a:defRPr>
+            </a:pPr>
+            <a:r>
+              <a:t>        </a:t>
+            </a:r>
+          </a:p>
+          <a:p>
+            <a:pPr>
+              <a:defRPr sz="900">
+                <a:solidFill>
+                  <a:srgbClr val="94A3B8"/>
+                </a:solidFill>
+                <a:latin typeface="Consolas"/>
+              </a:defRPr>
+            </a:pPr>
+            <a:r>
+              <a:t>        # 4-Tier Risk Categorization</a:t>
+            </a:r>
+          </a:p>
+          <a:p>
+            <a:pPr>
+              <a:defRPr sz="900">
+                <a:solidFill>
+                  <a:srgbClr val="93C5FD"/>
+                </a:solidFill>
+                <a:latin typeface="Consolas"/>
+              </a:defRPr>
+            </a:pPr>
+            <a:r>
+              <a:t>        if prob &lt; 0.20:   tier = 'Low Risk'</a:t>
+            </a:r>
+          </a:p>
+          <a:p>
+            <a:pPr>
+              <a:defRPr sz="900">
+                <a:solidFill>
+                  <a:srgbClr val="93C5FD"/>
+                </a:solidFill>
+                <a:latin typeface="Consolas"/>
+              </a:defRPr>
+            </a:pPr>
+            <a:r>
+              <a:t>        elif prob &lt; 0.45: tier = 'Moderate Risk'</a:t>
+            </a:r>
+          </a:p>
+          <a:p>
+            <a:pPr>
+              <a:defRPr sz="900">
+                <a:solidFill>
+                  <a:srgbClr val="93C5FD"/>
+                </a:solidFill>
+                <a:latin typeface="Consolas"/>
+              </a:defRPr>
+            </a:pPr>
+            <a:r>
+              <a:t>        elif prob &lt; 0.70: tier = 'High Risk'</a:t>
+            </a:r>
+          </a:p>
+          <a:p>
+            <a:pPr>
+              <a:defRPr sz="900">
+                <a:solidFill>
+                  <a:srgbClr val="93C5FD"/>
+                </a:solidFill>
+                <a:latin typeface="Consolas"/>
+              </a:defRPr>
+            </a:pPr>
+            <a:r>
+              <a:t>        else:             tier = 'Critical Risk'</a:t>
+            </a:r>
+          </a:p>
+          <a:p>
+            <a:pPr>
+              <a:defRPr sz="900">
+                <a:solidFill>
+                  <a:srgbClr val="F1F5F9"/>
+                </a:solidFill>
+                <a:latin typeface="Consolas"/>
+              </a:defRPr>
+            </a:pPr>
+            <a:r>
+              <a:t>        </a:t>
+            </a:r>
+          </a:p>
+          <a:p>
+            <a:pPr>
+              <a:defRPr sz="900">
+                <a:solidFill>
+                  <a:srgbClr val="93C5FD"/>
+                </a:solidFill>
+                <a:latin typeface="Consolas"/>
+              </a:defRPr>
+            </a:pPr>
+            <a:r>
+              <a:t>        return {'prob': prob, 'tier': tier, 'factors': warnings}</a:t>
+            </a:r>
+          </a:p>
+        </p:txBody>
+      </p:sp>
+      <p:sp>
+        <p:nvSpPr>
+          <p:cNvPr id="8" name="Rounded Rectangle 7"/>
+          <p:cNvSpPr/>
+          <p:nvPr/>
+        </p:nvSpPr>
+        <p:spPr>
+          <a:xfrm>
+            <a:off x="5669280" y="1188720"/>
+            <a:ext cx="5790895" cy="1554480"/>
+          </a:xfrm>
+          <a:prstGeom prst="roundRect">
+            <a:avLst/>
+          </a:prstGeom>
+          <a:solidFill>
+            <a:srgbClr val="EEF2FF"/>
+          </a:solidFill>
+          <a:ln w="12700">
+            <a:solidFill>
+              <a:srgbClr val="2563EB"/>
+            </a:solidFill>
+          </a:ln>
+        </p:spPr>
+        <p:style>
+          <a:lnRef idx="1">
+            <a:schemeClr val="accent1"/>
+          </a:lnRef>
+          <a:fillRef idx="3">
+            <a:schemeClr val="accent1"/>
+          </a:fillRef>
+          <a:effectRef idx="2">
+            <a:schemeClr val="accent1"/>
+          </a:effectRef>
+          <a:fontRef idx="minor">
+            <a:schemeClr val="lt1"/>
+          </a:fontRef>
+        </p:style>
+        <p:txBody>
+          <a:bodyPr rtlCol="0" anchor="ctr"/>
+          <a:lstStyle/>
+          <a:p>
+            <a:pPr algn="ctr"/>
+          </a:p>
+        </p:txBody>
+      </p:sp>
+      <p:sp>
+        <p:nvSpPr>
+          <p:cNvPr id="9" name="TextBox 8"/>
+          <p:cNvSpPr txBox="1"/>
+          <p:nvPr/>
+        </p:nvSpPr>
+        <p:spPr>
+          <a:xfrm>
+            <a:off x="5806440" y="1280160"/>
+            <a:ext cx="5486400" cy="1371600"/>
+          </a:xfrm>
+          <a:prstGeom prst="rect">
+            <a:avLst/>
+          </a:prstGeom>
+          <a:noFill/>
+        </p:spPr>
+        <p:txBody>
+          <a:bodyPr wrap="square">
+            <a:spAutoFit/>
+          </a:bodyPr>
+          <a:lstStyle/>
+          <a:p>
+            <a:pPr>
+              <a:spcAft>
+                <a:spcPts val="400"/>
+              </a:spcAft>
+              <a:defRPr sz="1200" b="1">
+                <a:solidFill>
+                  <a:srgbClr val="2563EB"/>
+                </a:solidFill>
+                <a:latin typeface="Segoe UI"/>
+              </a:defRPr>
+            </a:pPr>
+            <a:r>
+              <a:t>Probability Calibration Metrics</a:t>
+            </a:r>
+          </a:p>
+          <a:p>
+            <a:pPr>
+              <a:defRPr sz="1000">
+                <a:solidFill>
+                  <a:srgbClr val="334155"/>
+                </a:solidFill>
+                <a:latin typeface="Segoe UI"/>
+              </a:defRPr>
+            </a:pPr>
+            <a:r>
+              <a:t>• Brier Score: 0.0168 (near zero indicates exceptional probability calibration quality)</a:t>
+            </a:r>
+          </a:p>
+          <a:p>
+            <a:pPr>
+              <a:defRPr sz="1000">
+                <a:solidFill>
+                  <a:srgbClr val="334155"/>
+                </a:solidFill>
+                <a:latin typeface="Segoe UI"/>
+              </a:defRPr>
+            </a:pPr>
+            <a:r>
+              <a:t>• Test Set ROC-AUC: 0.9973  |  Model Log Loss: 0.0622</a:t>
+            </a:r>
+          </a:p>
+          <a:p>
+            <a:pPr>
+              <a:defRPr sz="1000">
+                <a:solidFill>
+                  <a:srgbClr val="334155"/>
+                </a:solidFill>
+                <a:latin typeface="Segoe UI"/>
+              </a:defRPr>
+            </a:pPr>
+            <a:r>
+              <a:t>• Sample Prime Scoring: Credit 810, DTI 0.15 -&gt; P(Default) = 0.02% (Low Risk Badge)</a:t>
+            </a:r>
+          </a:p>
+          <a:p>
+            <a:pPr>
+              <a:defRPr sz="1000">
+                <a:solidFill>
+                  <a:srgbClr val="334155"/>
+                </a:solidFill>
+                <a:latin typeface="Segoe UI"/>
+              </a:defRPr>
+            </a:pPr>
+            <a:r>
+              <a:t>• Sample Subprime Scoring: Credit 420, DTI 0.82 -&gt; P(Default) = 99.99% (Critical Risk Badge)</a:t>
+            </a:r>
+          </a:p>
+        </p:txBody>
+      </p:sp>
+      <p:sp>
+        <p:nvSpPr>
+          <p:cNvPr id="10" name="Rounded Rectangle 9"/>
+          <p:cNvSpPr/>
+          <p:nvPr/>
+        </p:nvSpPr>
+        <p:spPr>
+          <a:xfrm>
+            <a:off x="5669280" y="2926080"/>
+            <a:ext cx="5790895" cy="3474720"/>
+          </a:xfrm>
+          <a:prstGeom prst="roundRect">
+            <a:avLst/>
+          </a:prstGeom>
+          <a:solidFill>
+            <a:srgbClr val="FFFFFF"/>
+          </a:solidFill>
+          <a:ln w="12700">
+            <a:solidFill>
+              <a:srgbClr val="E2E8F0"/>
+            </a:solidFill>
+          </a:ln>
+        </p:spPr>
+        <p:style>
+          <a:lnRef idx="1">
+            <a:schemeClr val="accent1"/>
+          </a:lnRef>
+          <a:fillRef idx="3">
+            <a:schemeClr val="accent1"/>
+          </a:fillRef>
+          <a:effectRef idx="2">
+            <a:schemeClr val="accent1"/>
+          </a:effectRef>
+          <a:fontRef idx="minor">
+            <a:schemeClr val="lt1"/>
+          </a:fontRef>
+        </p:style>
+        <p:txBody>
+          <a:bodyPr rtlCol="0" anchor="ctr"/>
+          <a:lstStyle/>
+          <a:p>
+            <a:pPr algn="ctr"/>
+          </a:p>
+        </p:txBody>
+      </p:sp>
+      <p:sp>
+        <p:nvSpPr>
+          <p:cNvPr id="11" name="TextBox 10"/>
+          <p:cNvSpPr txBox="1"/>
+          <p:nvPr/>
+        </p:nvSpPr>
+        <p:spPr>
+          <a:xfrm>
+            <a:off x="5806440" y="3017520"/>
+            <a:ext cx="5486400" cy="3200400"/>
+          </a:xfrm>
+          <a:prstGeom prst="rect">
+            <a:avLst/>
+          </a:prstGeom>
+          <a:noFill/>
+        </p:spPr>
+        <p:txBody>
+          <a:bodyPr wrap="square">
+            <a:spAutoFit/>
+          </a:bodyPr>
+          <a:lstStyle/>
+          <a:p>
+            <a:pPr>
+              <a:spcAft>
+                <a:spcPts val="600"/>
+              </a:spcAft>
+              <a:defRPr sz="1300" b="1">
+                <a:solidFill>
+                  <a:srgbClr val="0F172A"/>
+                </a:solidFill>
+                <a:latin typeface="Segoe UI"/>
+              </a:defRPr>
+            </a:pPr>
+            <a:r>
+              <a:t>4-Tier Underwriting Decision Matrix</a:t>
+            </a:r>
+          </a:p>
+          <a:p>
+            <a:pPr>
+              <a:defRPr sz="1100" b="1">
+                <a:solidFill>
+                  <a:srgbClr val="10B981"/>
+                </a:solidFill>
+                <a:latin typeface="Segoe UI"/>
+              </a:defRPr>
+            </a:pPr>
+            <a:r>
+              <a:t>Low Risk (P &lt; 20%):</a:t>
+            </a:r>
+          </a:p>
+          <a:p>
+            <a:pPr>
+              <a:spcAft>
+                <a:spcPts val="400"/>
+              </a:spcAft>
+              <a:defRPr sz="1000">
+                <a:solidFill>
+                  <a:srgbClr val="334155"/>
+                </a:solidFill>
+                <a:latin typeface="Segoe UI"/>
+              </a:defRPr>
+            </a:pPr>
+            <a:r>
+              <a:t>  Fast-track instant approval; Prime interest rate (4.5% - 7.5% APR).</a:t>
+            </a:r>
+          </a:p>
+          <a:p>
+            <a:pPr>
+              <a:defRPr sz="1100" b="1">
+                <a:solidFill>
+                  <a:srgbClr val="2563EB"/>
+                </a:solidFill>
+                <a:latin typeface="Segoe UI"/>
+              </a:defRPr>
+            </a:pPr>
+            <a:r>
+              <a:t>Moderate Risk (20% &lt;= P &lt; 45%):</a:t>
+            </a:r>
+          </a:p>
+          <a:p>
+            <a:pPr>
+              <a:spcAft>
+                <a:spcPts val="400"/>
+              </a:spcAft>
+              <a:defRPr sz="1000">
+                <a:solidFill>
+                  <a:srgbClr val="334155"/>
+                </a:solidFill>
+                <a:latin typeface="Segoe UI"/>
+              </a:defRPr>
+            </a:pPr>
+            <a:r>
+              <a:t>  Standard underwriting review; income verification required.</a:t>
+            </a:r>
+          </a:p>
+          <a:p>
+            <a:pPr>
+              <a:defRPr sz="1100" b="1">
+                <a:solidFill>
+                  <a:srgbClr val="D97706"/>
+                </a:solidFill>
+                <a:latin typeface="Segoe UI"/>
+              </a:defRPr>
+            </a:pPr>
+            <a:r>
+              <a:t>High Risk (45% &lt;= P &lt; 70%):</a:t>
+            </a:r>
+          </a:p>
+          <a:p>
+            <a:pPr>
+              <a:spcAft>
+                <a:spcPts val="400"/>
+              </a:spcAft>
+              <a:defRPr sz="1000">
+                <a:solidFill>
+                  <a:srgbClr val="334155"/>
+                </a:solidFill>
+                <a:latin typeface="Segoe UI"/>
+              </a:defRPr>
+            </a:pPr>
+            <a:r>
+              <a:t>  Conditional approval; mandatory co-signer and collateral required.</a:t>
+            </a:r>
+          </a:p>
+          <a:p>
+            <a:pPr>
+              <a:defRPr sz="1100" b="1">
+                <a:solidFill>
+                  <a:srgbClr val="E11D48"/>
+                </a:solidFill>
+                <a:latin typeface="Segoe UI"/>
+              </a:defRPr>
+            </a:pPr>
+            <a:r>
+              <a:t>Critical Risk (P &gt;= 70%):</a:t>
+            </a:r>
+          </a:p>
+          <a:p>
+            <a:pPr>
+              <a:spcAft>
+                <a:spcPts val="400"/>
+              </a:spcAft>
+              <a:defRPr sz="1000">
+                <a:solidFill>
+                  <a:srgbClr val="334155"/>
+                </a:solidFill>
+                <a:latin typeface="Segoe UI"/>
+              </a:defRPr>
+            </a:pPr>
+            <a:r>
+              <a:t>  Automated decline; risk exceeds institutional lending tolerance.</a:t>
+            </a:r>
+          </a:p>
+        </p:txBody>
+      </p:sp>
+    </p:spTree>
+  </p:cSld>
+  <p:clrMapOvr>
+    <a:masterClrMapping/>
+  </p:clrMapOvr>
+</p:sld>
+</file>
+
+<file path=ppt/slides/slide15.xml><?xml version="1.0" encoding="utf-8"?>
+<p:sld xmlns:a="http://schemas.openxmlformats.org/drawingml/2006/main" xmlns:p="http://schemas.openxmlformats.org/presentationml/2006/main" xmlns:r="http://schemas.openxmlformats.org/officeDocument/2006/relationships">
+  <p:cSld>
+    <p:bg>
+      <p:bgPr>
+        <a:solidFill>
+          <a:srgbClr val="F8FAFC"/>
+        </a:solidFill>
+        <a:effectLst/>
+      </p:bgPr>
+    </p:bg>
+    <p:spTree>
+      <p:nvGrpSpPr>
+        <p:cNvPr id="1" name=""/>
+        <p:cNvGrpSpPr/>
+        <p:nvPr/>
+      </p:nvGrpSpPr>
+      <p:grpSpPr/>
+      <p:sp>
+        <p:nvSpPr>
+          <p:cNvPr id="2" name="Rectangle 1"/>
+          <p:cNvSpPr/>
+          <p:nvPr/>
+        </p:nvSpPr>
+        <p:spPr>
+          <a:xfrm>
+            <a:off x="0" y="0"/>
+            <a:ext cx="12191695" cy="109728"/>
+          </a:xfrm>
+          <a:prstGeom prst="rect">
+            <a:avLst/>
+          </a:prstGeom>
+          <a:solidFill>
+            <a:srgbClr val="2563EB"/>
+          </a:solidFill>
+          <a:ln>
+            <a:noFill/>
+          </a:ln>
+        </p:spPr>
+        <p:style>
+          <a:lnRef idx="1">
+            <a:schemeClr val="accent1"/>
+          </a:lnRef>
+          <a:fillRef idx="3">
+            <a:schemeClr val="accent1"/>
+          </a:fillRef>
+          <a:effectRef idx="2">
+            <a:schemeClr val="accent1"/>
+          </a:effectRef>
+          <a:fontRef idx="minor">
+            <a:schemeClr val="lt1"/>
+          </a:fontRef>
+        </p:style>
+        <p:txBody>
+          <a:bodyPr rtlCol="0" anchor="ctr"/>
+          <a:lstStyle/>
+          <a:p>
+            <a:pPr algn="ctr"/>
+          </a:p>
+        </p:txBody>
+      </p:sp>
+      <p:sp>
+        <p:nvSpPr>
+          <p:cNvPr id="3" name="TextBox 2"/>
+          <p:cNvSpPr txBox="1"/>
+          <p:nvPr/>
+        </p:nvSpPr>
+        <p:spPr>
+          <a:xfrm>
+            <a:off x="731520" y="237744"/>
+            <a:ext cx="10698480" cy="237744"/>
+          </a:xfrm>
+          <a:prstGeom prst="rect">
+            <a:avLst/>
+          </a:prstGeom>
+          <a:noFill/>
+        </p:spPr>
+        <p:txBody>
+          <a:bodyPr wrap="square" lIns="0" tIns="0" rIns="0" bIns="0">
+            <a:spAutoFit/>
+          </a:bodyPr>
+          <a:lstStyle/>
+          <a:p>
+            <a:pPr>
+              <a:defRPr sz="1000" b="1">
+                <a:solidFill>
+                  <a:srgbClr val="2563EB"/>
+                </a:solidFill>
+                <a:latin typeface="Segoe UI"/>
+              </a:defRPr>
+            </a:pPr>
+            <a:r>
+              <a:t>CSI3010: DATA WAREHOUSING &amp; DATA MINING | REVIEW 2</a:t>
+            </a:r>
+          </a:p>
+        </p:txBody>
+      </p:sp>
+      <p:sp>
+        <p:nvSpPr>
+          <p:cNvPr id="4" name="TextBox 3"/>
+          <p:cNvSpPr txBox="1"/>
+          <p:nvPr/>
+        </p:nvSpPr>
+        <p:spPr>
+          <a:xfrm>
+            <a:off x="731520" y="475488"/>
+            <a:ext cx="10698480" cy="502920"/>
+          </a:xfrm>
+          <a:prstGeom prst="rect">
+            <a:avLst/>
+          </a:prstGeom>
+          <a:noFill/>
+        </p:spPr>
+        <p:txBody>
+          <a:bodyPr wrap="square" lIns="0" tIns="0" rIns="0" bIns="0">
+            <a:spAutoFit/>
+          </a:bodyPr>
+          <a:lstStyle/>
+          <a:p>
+            <a:pPr>
+              <a:defRPr sz="2000" b="1">
+                <a:solidFill>
+                  <a:srgbClr val="0F172A"/>
+                </a:solidFill>
+                <a:latin typeface="Segoe UI"/>
+              </a:defRPr>
+            </a:pPr>
+            <a:r>
+              <a:t>Prediction Engine: Pictorial Policy Matrix &amp; Inference Visual</a:t>
+            </a:r>
+          </a:p>
+        </p:txBody>
+      </p:sp>
+      <p:sp>
+        <p:nvSpPr>
+          <p:cNvPr id="5" name="Rounded Rectangle 4"/>
+          <p:cNvSpPr/>
+          <p:nvPr/>
+        </p:nvSpPr>
+        <p:spPr>
+          <a:xfrm>
+            <a:off x="731520" y="1188720"/>
+            <a:ext cx="10728655" cy="4114800"/>
+          </a:xfrm>
+          <a:prstGeom prst="roundRect">
+            <a:avLst/>
+          </a:prstGeom>
+          <a:solidFill>
+            <a:srgbClr val="FFFFFF"/>
+          </a:solidFill>
+          <a:ln w="12700">
+            <a:solidFill>
+              <a:srgbClr val="E2E8F0"/>
+            </a:solidFill>
+          </a:ln>
+        </p:spPr>
+        <p:style>
+          <a:lnRef idx="1">
+            <a:schemeClr val="accent1"/>
+          </a:lnRef>
+          <a:fillRef idx="3">
+            <a:schemeClr val="accent1"/>
+          </a:fillRef>
+          <a:effectRef idx="2">
+            <a:schemeClr val="accent1"/>
+          </a:effectRef>
+          <a:fontRef idx="minor">
+            <a:schemeClr val="lt1"/>
+          </a:fontRef>
+        </p:style>
+        <p:txBody>
+          <a:bodyPr rtlCol="0" anchor="ctr"/>
+          <a:lstStyle/>
+          <a:p>
+            <a:pPr algn="ctr"/>
+          </a:p>
+        </p:txBody>
+      </p:sp>
+      <p:pic>
+        <p:nvPicPr>
+          <p:cNvPr id="6" name="Picture 5" descr="prediction_risk_visual.png"/>
+          <p:cNvPicPr>
+            <a:picLocks noChangeAspect="1"/>
+          </p:cNvPicPr>
+          <p:nvPr/>
+        </p:nvPicPr>
+        <p:blipFill>
+          <a:blip r:embed="rId2"/>
+          <a:stretch>
+            <a:fillRect/>
+          </a:stretch>
+        </p:blipFill>
+        <p:spPr>
+          <a:xfrm>
+            <a:off x="914400" y="1280160"/>
+            <a:ext cx="10362895" cy="4934712"/>
+          </a:xfrm>
+          <a:prstGeom prst="rect">
+            <a:avLst/>
+          </a:prstGeom>
+        </p:spPr>
+      </p:pic>
+      <p:sp>
+        <p:nvSpPr>
+          <p:cNvPr id="7" name="Rounded Rectangle 6"/>
+          <p:cNvSpPr/>
+          <p:nvPr/>
+        </p:nvSpPr>
+        <p:spPr>
+          <a:xfrm>
+            <a:off x="731520" y="5440680"/>
+            <a:ext cx="10728655" cy="1005840"/>
+          </a:xfrm>
+          <a:prstGeom prst="roundRect">
+            <a:avLst/>
+          </a:prstGeom>
+          <a:solidFill>
+            <a:srgbClr val="FFFFFF"/>
+          </a:solidFill>
+          <a:ln w="12700">
+            <a:solidFill>
+              <a:srgbClr val="E2E8F0"/>
+            </a:solidFill>
+          </a:ln>
+        </p:spPr>
+        <p:style>
+          <a:lnRef idx="1">
+            <a:schemeClr val="accent1"/>
+          </a:lnRef>
+          <a:fillRef idx="3">
+            <a:schemeClr val="accent1"/>
+          </a:fillRef>
+          <a:effectRef idx="2">
+            <a:schemeClr val="accent1"/>
+          </a:effectRef>
+          <a:fontRef idx="minor">
+            <a:schemeClr val="lt1"/>
+          </a:fontRef>
+        </p:style>
+        <p:txBody>
+          <a:bodyPr rtlCol="0" anchor="ctr"/>
+          <a:lstStyle/>
+          <a:p>
+            <a:pPr algn="ctr"/>
+          </a:p>
+        </p:txBody>
+      </p:sp>
+      <p:sp>
+        <p:nvSpPr>
+          <p:cNvPr id="8" name="TextBox 7"/>
+          <p:cNvSpPr txBox="1"/>
+          <p:nvPr/>
+        </p:nvSpPr>
+        <p:spPr>
+          <a:xfrm>
+            <a:off x="914400" y="5504688"/>
+            <a:ext cx="10362895" cy="868680"/>
+          </a:xfrm>
+          <a:prstGeom prst="rect">
+            <a:avLst/>
+          </a:prstGeom>
+          <a:noFill/>
+        </p:spPr>
+        <p:txBody>
+          <a:bodyPr wrap="square">
+            <a:spAutoFit/>
+          </a:bodyPr>
+          <a:lstStyle/>
+          <a:p>
+            <a:pPr>
+              <a:spcAft>
+                <a:spcPts val="200"/>
+              </a:spcAft>
+              <a:defRPr sz="1200" b="1">
+                <a:solidFill>
+                  <a:srgbClr val="0F172A"/>
+                </a:solidFill>
+                <a:latin typeface="Segoe UI"/>
+              </a:defRPr>
+            </a:pPr>
+            <a:r>
+              <a:t>Inference &amp; Policy Visual Insights:</a:t>
+            </a:r>
+          </a:p>
+          <a:p>
+            <a:pPr>
+              <a:defRPr sz="1100">
+                <a:solidFill>
+                  <a:srgbClr val="334155"/>
+                </a:solidFill>
+                <a:latin typeface="Segoe UI"/>
+              </a:defRPr>
+            </a:pPr>
+            <a:r>
+              <a:t>• Policy Matrix: Clear operational division between Prime fast-track approvals (&lt;20%) and automatic rejections (&gt;=70%).</a:t>
+            </a:r>
+            <a:br/>
+            <a:r>
+              <a:t>• Calibration Reliability: Brier Score of 0.0168 confirms continuous probabilities accurately mirror real-world default frequencies.</a:t>
+            </a:r>
+          </a:p>
+        </p:txBody>
+      </p:sp>
+    </p:spTree>
+  </p:cSld>
+  <p:clrMapOvr>
+    <a:masterClrMapping/>
+  </p:clrMapOvr>
+</p:sld>
+</file>
+
+<file path=ppt/slides/slide16.xml><?xml version="1.0" encoding="utf-8"?>
 <p:sld xmlns:a="http://schemas.openxmlformats.org/drawingml/2006/main" xmlns:p="http://schemas.openxmlformats.org/presentationml/2006/main" xmlns:r="http://schemas.openxmlformats.org/officeDocument/2006/relationships">
   <p:cSld>
     <p:bg>
@@ -9024,7 +9759,7 @@
               </a:defRPr>
             </a:pPr>
             <a:r>
-              <a:t>Classification: Pictorial Diagnostics (Confusion Matrices &amp; ROC)</a:t>
+              <a:t>Classification: Multi-Algorithm Visual Benchmark Comparison</a:t>
             </a:r>
           </a:p>
         </p:txBody>
@@ -9038,7 +9773,7 @@
         <p:spPr>
           <a:xfrm>
             <a:off x="731520" y="1188720"/>
-            <a:ext cx="5212080" cy="4114800"/>
+            <a:ext cx="10728655" cy="4114800"/>
           </a:xfrm>
           <a:prstGeom prst="roundRect">
             <a:avLst/>
@@ -9076,7 +9811,7 @@
       </p:sp>
       <p:pic>
         <p:nvPicPr>
-          <p:cNvPr id="6" name="Picture 5" descr="confusion_matrices.png"/>
+          <p:cNvPr id="6" name="Picture 5" descr="models_benchmark_chart.png"/>
           <p:cNvPicPr>
             <a:picLocks noChangeAspect="1"/>
           </p:cNvPicPr>
@@ -9090,8 +9825,8 @@
         </p:blipFill>
         <p:spPr>
           <a:xfrm>
-            <a:off x="822960" y="1280160"/>
-            <a:ext cx="5029200" cy="4343400"/>
+            <a:off x="914400" y="1280160"/>
+            <a:ext cx="10362895" cy="5132100"/>
           </a:xfrm>
           <a:prstGeom prst="rect">
             <a:avLst/>
@@ -9106,8 +9841,8 @@
         </p:nvSpPr>
         <p:spPr>
           <a:xfrm>
-            <a:off x="6217920" y="1188720"/>
-            <a:ext cx="5242255" cy="4114800"/>
+            <a:off x="731520" y="5440680"/>
+            <a:ext cx="10728655" cy="1005840"/>
           </a:xfrm>
           <a:prstGeom prst="roundRect">
             <a:avLst/>
@@ -9143,78 +9878,9 @@
           </a:p>
         </p:txBody>
       </p:sp>
-      <p:pic>
-        <p:nvPicPr>
-          <p:cNvPr id="8" name="Picture 7" descr="roc_curves.png"/>
-          <p:cNvPicPr>
-            <a:picLocks noChangeAspect="1"/>
-          </p:cNvPicPr>
-          <p:nvPr/>
-        </p:nvPicPr>
-        <p:blipFill>
-          <a:blip r:embed="rId3"/>
-          <a:stretch>
-            <a:fillRect/>
-          </a:stretch>
-        </p:blipFill>
-        <p:spPr>
-          <a:xfrm>
-            <a:off x="6309360" y="1280160"/>
-            <a:ext cx="5029200" cy="3771900"/>
-          </a:xfrm>
-          <a:prstGeom prst="rect">
-            <a:avLst/>
-          </a:prstGeom>
-        </p:spPr>
-      </p:pic>
-      <p:sp>
-        <p:nvSpPr>
-          <p:cNvPr id="9" name="Rounded Rectangle 8"/>
-          <p:cNvSpPr/>
-          <p:nvPr/>
-        </p:nvSpPr>
-        <p:spPr>
-          <a:xfrm>
-            <a:off x="731520" y="5440680"/>
-            <a:ext cx="10728655" cy="1005840"/>
-          </a:xfrm>
-          <a:prstGeom prst="roundRect">
-            <a:avLst/>
-          </a:prstGeom>
-          <a:solidFill>
-            <a:srgbClr val="FFFFFF"/>
-          </a:solidFill>
-          <a:ln w="12700">
-            <a:solidFill>
-              <a:srgbClr val="E2E8F0"/>
-            </a:solidFill>
-          </a:ln>
-        </p:spPr>
-        <p:style>
-          <a:lnRef idx="1">
-            <a:schemeClr val="accent1"/>
-          </a:lnRef>
-          <a:fillRef idx="3">
-            <a:schemeClr val="accent1"/>
-          </a:fillRef>
-          <a:effectRef idx="2">
-            <a:schemeClr val="accent1"/>
-          </a:effectRef>
-          <a:fontRef idx="minor">
-            <a:schemeClr val="lt1"/>
-          </a:fontRef>
-        </p:style>
-        <p:txBody>
-          <a:bodyPr rtlCol="0" anchor="ctr"/>
-          <a:lstStyle/>
-          <a:p>
-            <a:pPr algn="ctr"/>
-          </a:p>
-        </p:txBody>
-      </p:sp>
-      <p:sp>
-        <p:nvSpPr>
-          <p:cNvPr id="10" name="TextBox 9"/>
+      <p:sp>
+        <p:nvSpPr>
+          <p:cNvPr id="8" name="TextBox 7"/>
           <p:cNvSpPr txBox="1"/>
           <p:nvPr/>
         </p:nvSpPr>
@@ -9246,7 +9912,7 @@
               </a:defRPr>
             </a:pPr>
             <a:r>
-              <a:t>Key Diagnostic Observations:</a:t>
+              <a:t>Comparative Visual Insights Across 4 Models:</a:t>
             </a:r>
           </a:p>
           <a:p>
@@ -9259,11 +9925,11 @@
               </a:defRPr>
             </a:pPr>
             <a:r>
-              <a:t>• Confusion Matrix: Gradient Boosting eliminates false alarms (only 2.89% false positive rate), preventing healthy customer turnaways.</a:t>
+              <a:t>• Gradient Boosting achieves top scores across Accuracy (97.75%), Precision (97.11%), F1 (0.8965), and ROC-AUC (0.9973).</a:t>
             </a:r>
             <a:br/>
             <a:r>
-              <a:t>• ROC Curves: Gradient Boosting hugs the upper-left boundary (AUC = 0.9973), outperforming Decision Tree (0.934) and Logistic Reg (0.982).</a:t>
+              <a:t>• Logistic Regression baseline provides high recall (94.10%) but low precision (57.19%), causing too many false alarms.</a:t>
             </a:r>
           </a:p>
         </p:txBody>
@@ -9368,7 +10034,7 @@
               </a:defRPr>
             </a:pPr>
             <a:r>
-              <a:t>CSI3010 | TOPIC OVERVIEW &amp; INSTITUTIONAL ROLE</a:t>
+              <a:t>CSI3010: DATA WAREHOUSING &amp; DATA MINING | REVIEW 2</a:t>
             </a:r>
           </a:p>
         </p:txBody>
@@ -9404,7 +10070,7 @@
               </a:defRPr>
             </a:pPr>
             <a:r>
-              <a:t>Overview: Clustering</a:t>
+              <a:t>Classification: Pictorial Diagnostics (Confusion Matrices &amp; ROC)</a:t>
             </a:r>
           </a:p>
         </p:txBody>
@@ -9418,7 +10084,7 @@
         <p:spPr>
           <a:xfrm>
             <a:off x="731520" y="1188720"/>
-            <a:ext cx="10728655" cy="3931920"/>
+            <a:ext cx="5212080" cy="4114800"/>
           </a:xfrm>
           <a:prstGeom prst="roundRect">
             <a:avLst/>
@@ -9428,7 +10094,7 @@
           </a:solidFill>
           <a:ln w="12700">
             <a:solidFill>
-              <a:srgbClr val="2563EB"/>
+              <a:srgbClr val="E2E8F0"/>
             </a:solidFill>
           </a:ln>
         </p:spPr>
@@ -9454,145 +10120,30 @@
           </a:p>
         </p:txBody>
       </p:sp>
-      <p:sp>
-        <p:nvSpPr>
-          <p:cNvPr id="6" name="TextBox 5"/>
-          <p:cNvSpPr txBox="1"/>
-          <p:nvPr/>
-        </p:nvSpPr>
-        <p:spPr>
-          <a:xfrm>
-            <a:off x="1005840" y="1371600"/>
-            <a:ext cx="10180015" cy="3566160"/>
+      <p:pic>
+        <p:nvPicPr>
+          <p:cNvPr id="6" name="Picture 5" descr="confusion_matrices.png"/>
+          <p:cNvPicPr>
+            <a:picLocks noChangeAspect="1"/>
+          </p:cNvPicPr>
+          <p:nvPr/>
+        </p:nvPicPr>
+        <p:blipFill>
+          <a:blip r:embed="rId2"/>
+          <a:stretch>
+            <a:fillRect/>
+          </a:stretch>
+        </p:blipFill>
+        <p:spPr>
+          <a:xfrm>
+            <a:off x="822960" y="1280160"/>
+            <a:ext cx="5029200" cy="4343400"/>
           </a:xfrm>
           <a:prstGeom prst="rect">
             <a:avLst/>
           </a:prstGeom>
-          <a:noFill/>
-        </p:spPr>
-        <p:txBody>
-          <a:bodyPr wrap="square">
-            <a:spAutoFit/>
-          </a:bodyPr>
-          <a:lstStyle/>
-          <a:p>
-            <a:pPr>
-              <a:spcAft>
-                <a:spcPts val="1400"/>
-              </a:spcAft>
-              <a:defRPr sz="1600" b="1">
-                <a:solidFill>
-                  <a:srgbClr val="0F172A"/>
-                </a:solidFill>
-                <a:latin typeface="Segoe UI"/>
-              </a:defRPr>
-            </a:pPr>
-            <a:r>
-              <a:t>Heading: Clustering</a:t>
-            </a:r>
-          </a:p>
-          <a:p>
-            <a:pPr>
-              <a:spcAft>
-                <a:spcPts val="1400"/>
-              </a:spcAft>
-              <a:defRPr sz="1200" b="1">
-                <a:solidFill>
-                  <a:srgbClr val="2563EB"/>
-                </a:solidFill>
-                <a:latin typeface="Segoe UI"/>
-              </a:defRPr>
-            </a:pPr>
-            <a:r>
-              <a:t>• What it is: </a:t>
-            </a:r>
-            <a:r>
-              <a:rPr sz="1200" b="0">
-                <a:solidFill>
-                  <a:srgbClr val="334155"/>
-                </a:solidFill>
-                <a:latin typeface="Segoe UI"/>
-              </a:rPr>
-              <a:t>Unsupervised machine learning method that segments borrowers into natural risk cohorts without relying on past default labels.</a:t>
-            </a:r>
-          </a:p>
-          <a:p>
-            <a:pPr>
-              <a:spcAft>
-                <a:spcPts val="1400"/>
-              </a:spcAft>
-              <a:defRPr sz="1200" b="1">
-                <a:solidFill>
-                  <a:srgbClr val="2563EB"/>
-                </a:solidFill>
-                <a:latin typeface="Segoe UI"/>
-              </a:defRPr>
-            </a:pPr>
-            <a:r>
-              <a:t>• Why it is needed: </a:t>
-            </a:r>
-            <a:r>
-              <a:rPr sz="1200" b="0">
-                <a:solidFill>
-                  <a:srgbClr val="334155"/>
-                </a:solidFill>
-                <a:latin typeface="Segoe UI"/>
-              </a:rPr>
-              <a:t>Captures diverse borrower archetypes across multiple financial indicators (Income, Credit Score, DTI, Employment Tenure).</a:t>
-            </a:r>
-          </a:p>
-          <a:p>
-            <a:pPr>
-              <a:spcAft>
-                <a:spcPts val="1400"/>
-              </a:spcAft>
-              <a:defRPr sz="1200" b="1">
-                <a:solidFill>
-                  <a:srgbClr val="2563EB"/>
-                </a:solidFill>
-                <a:latin typeface="Segoe UI"/>
-              </a:defRPr>
-            </a:pPr>
-            <a:r>
-              <a:t>• Where it is used: </a:t>
-            </a:r>
-            <a:r>
-              <a:rPr sz="1200" b="0">
-                <a:solidFill>
-                  <a:srgbClr val="334155"/>
-                </a:solidFill>
-                <a:latin typeface="Segoe UI"/>
-              </a:rPr>
-              <a:t>Applied in credit portfolio segmentation, regulatory capital reserve allocations, and customer risk profiling.</a:t>
-            </a:r>
-          </a:p>
-          <a:p>
-            <a:pPr>
-              <a:spcAft>
-                <a:spcPts val="1400"/>
-              </a:spcAft>
-              <a:defRPr sz="1200" b="1">
-                <a:solidFill>
-                  <a:srgbClr val="2563EB"/>
-                </a:solidFill>
-                <a:latin typeface="Segoe UI"/>
-              </a:defRPr>
-            </a:pPr>
-            <a:r>
-              <a:t>• How it is helpful: </a:t>
-            </a:r>
-            <a:r>
-              <a:rPr sz="1200" b="0">
-                <a:solidFill>
-                  <a:srgbClr val="334155"/>
-                </a:solidFill>
-                <a:latin typeface="Segoe UI"/>
-              </a:rPr>
-              <a:t>Enables tailored interest rate pricing, tiered credit limits, and targeted early-intervention counseling for vulnerable borrowers.</a:t>
-            </a:r>
-          </a:p>
-        </p:txBody>
-      </p:sp>
+        </p:spPr>
+      </p:pic>
       <p:sp>
         <p:nvSpPr>
           <p:cNvPr id="7" name="Rounded Rectangle 6"/>
@@ -9601,18 +10152,18 @@
         </p:nvSpPr>
         <p:spPr>
           <a:xfrm>
-            <a:off x="731520" y="5303520"/>
-            <a:ext cx="10728655" cy="1051560"/>
+            <a:off x="6217920" y="1188720"/>
+            <a:ext cx="5242255" cy="4114800"/>
           </a:xfrm>
           <a:prstGeom prst="roundRect">
             <a:avLst/>
           </a:prstGeom>
           <a:solidFill>
-            <a:srgbClr val="EEF2FF"/>
+            <a:srgbClr val="FFFFFF"/>
           </a:solidFill>
           <a:ln w="12700">
             <a:solidFill>
-              <a:srgbClr val="2563EB"/>
+              <a:srgbClr val="E2E8F0"/>
             </a:solidFill>
           </a:ln>
         </p:spPr>
@@ -9638,16 +10189,85 @@
           </a:p>
         </p:txBody>
       </p:sp>
-      <p:sp>
-        <p:nvSpPr>
-          <p:cNvPr id="8" name="TextBox 7"/>
+      <p:pic>
+        <p:nvPicPr>
+          <p:cNvPr id="8" name="Picture 7" descr="roc_curves.png"/>
+          <p:cNvPicPr>
+            <a:picLocks noChangeAspect="1"/>
+          </p:cNvPicPr>
+          <p:nvPr/>
+        </p:nvPicPr>
+        <p:blipFill>
+          <a:blip r:embed="rId3"/>
+          <a:stretch>
+            <a:fillRect/>
+          </a:stretch>
+        </p:blipFill>
+        <p:spPr>
+          <a:xfrm>
+            <a:off x="6309360" y="1280160"/>
+            <a:ext cx="5029200" cy="3771900"/>
+          </a:xfrm>
+          <a:prstGeom prst="rect">
+            <a:avLst/>
+          </a:prstGeom>
+        </p:spPr>
+      </p:pic>
+      <p:sp>
+        <p:nvSpPr>
+          <p:cNvPr id="9" name="Rounded Rectangle 8"/>
+          <p:cNvSpPr/>
+          <p:nvPr/>
+        </p:nvSpPr>
+        <p:spPr>
+          <a:xfrm>
+            <a:off x="731520" y="5440680"/>
+            <a:ext cx="10728655" cy="1005840"/>
+          </a:xfrm>
+          <a:prstGeom prst="roundRect">
+            <a:avLst/>
+          </a:prstGeom>
+          <a:solidFill>
+            <a:srgbClr val="FFFFFF"/>
+          </a:solidFill>
+          <a:ln w="12700">
+            <a:solidFill>
+              <a:srgbClr val="E2E8F0"/>
+            </a:solidFill>
+          </a:ln>
+        </p:spPr>
+        <p:style>
+          <a:lnRef idx="1">
+            <a:schemeClr val="accent1"/>
+          </a:lnRef>
+          <a:fillRef idx="3">
+            <a:schemeClr val="accent1"/>
+          </a:fillRef>
+          <a:effectRef idx="2">
+            <a:schemeClr val="accent1"/>
+          </a:effectRef>
+          <a:fontRef idx="minor">
+            <a:schemeClr val="lt1"/>
+          </a:fontRef>
+        </p:style>
+        <p:txBody>
+          <a:bodyPr rtlCol="0" anchor="ctr"/>
+          <a:lstStyle/>
+          <a:p>
+            <a:pPr algn="ctr"/>
+          </a:p>
+        </p:txBody>
+      </p:sp>
+      <p:sp>
+        <p:nvSpPr>
+          <p:cNvPr id="10" name="TextBox 9"/>
           <p:cNvSpPr txBox="1"/>
           <p:nvPr/>
         </p:nvSpPr>
         <p:spPr>
           <a:xfrm>
-            <a:off x="1005840" y="5394960"/>
-            <a:ext cx="10180015" cy="868680"/>
+            <a:off x="914400" y="5504688"/>
+            <a:ext cx="10362895" cy="868680"/>
           </a:xfrm>
           <a:prstGeom prst="rect">
             <a:avLst/>
@@ -9666,26 +10286,30 @@
               </a:spcAft>
               <a:defRPr sz="1200" b="1">
                 <a:solidFill>
-                  <a:srgbClr val="2563EB"/>
-                </a:solidFill>
-                <a:latin typeface="Segoe UI"/>
-              </a:defRPr>
-            </a:pPr>
-            <a:r>
-              <a:t>Project Implementation: clustering/train_clustering.py  |  Champion Result: Optimal K=3 (Prime: 3.93% default, Standard: 12.38%, Subprime: 20.36%)</a:t>
+                  <a:srgbClr val="0F172A"/>
+                </a:solidFill>
+                <a:latin typeface="Segoe UI"/>
+              </a:defRPr>
+            </a:pPr>
+            <a:r>
+              <a:t>Key Diagnostic Observations:</a:t>
             </a:r>
           </a:p>
           <a:p>
             <a:pPr>
               <a:defRPr sz="1100">
                 <a:solidFill>
-                  <a:srgbClr val="64748B"/>
-                </a:solidFill>
-                <a:latin typeface="Segoe UI"/>
-              </a:defRPr>
-            </a:pPr>
-            <a:r>
-              <a:t>Execution verified against Kaggle benchmark dataset (50,000 records, 18 financial features) with zero data leakage.</a:t>
+                  <a:srgbClr val="334155"/>
+                </a:solidFill>
+                <a:latin typeface="Segoe UI"/>
+              </a:defRPr>
+            </a:pPr>
+            <a:r>
+              <a:t>• Confusion Matrix: Gradient Boosting eliminates false alarms (only 2.89% false positive rate), preventing healthy customer turnaways.</a:t>
+            </a:r>
+            <a:br/>
+            <a:r>
+              <a:t>• ROC Curves: Gradient Boosting hugs the upper-left boundary (AUC = 0.9973), outperforming Decision Tree (0.934) and Logistic Reg (0.982).</a:t>
             </a:r>
           </a:p>
         </p:txBody>
@@ -9790,7 +10414,7 @@
               </a:defRPr>
             </a:pPr>
             <a:r>
-              <a:t>CSI3010: DATA WAREHOUSING &amp; DATA MINING | REVIEW 2</a:t>
+              <a:t>CSI3010 | TOPIC OVERVIEW &amp; INSTITUTIONAL ROLE</a:t>
             </a:r>
           </a:p>
         </p:txBody>
@@ -9826,7 +10450,7 @@
               </a:defRPr>
             </a:pPr>
             <a:r>
-              <a:t>Borrower Clustering: K-Means Code &amp; Optimal K Determination</a:t>
+              <a:t>Overview: Clustering</a:t>
             </a:r>
           </a:p>
         </p:txBody>
@@ -9840,17 +10464,17 @@
         <p:spPr>
           <a:xfrm>
             <a:off x="731520" y="1188720"/>
-            <a:ext cx="4389120" cy="5212080"/>
+            <a:ext cx="10728655" cy="3931920"/>
           </a:xfrm>
           <a:prstGeom prst="roundRect">
             <a:avLst/>
           </a:prstGeom>
           <a:solidFill>
-            <a:srgbClr val="0F172A"/>
+            <a:srgbClr val="FFFFFF"/>
           </a:solidFill>
           <a:ln w="12700">
             <a:solidFill>
-              <a:srgbClr val="334155"/>
+              <a:srgbClr val="2563EB"/>
             </a:solidFill>
           </a:ln>
         </p:spPr>
@@ -9884,8 +10508,8 @@
         </p:nvSpPr>
         <p:spPr>
           <a:xfrm>
-            <a:off x="914400" y="1298448"/>
-            <a:ext cx="4023360" cy="256032"/>
+            <a:off x="1005840" y="1371600"/>
+            <a:ext cx="10180015" cy="3566160"/>
           </a:xfrm>
           <a:prstGeom prst="rect">
             <a:avLst/>
@@ -9893,280 +10517,148 @@
           <a:noFill/>
         </p:spPr>
         <p:txBody>
-          <a:bodyPr wrap="square" lIns="0" tIns="0" rIns="0" bIns="0">
+          <a:bodyPr wrap="square">
             <a:spAutoFit/>
           </a:bodyPr>
           <a:lstStyle/>
           <a:p>
             <a:pPr>
-              <a:defRPr sz="1000" b="1">
-                <a:solidFill>
-                  <a:srgbClr val="10B981"/>
-                </a:solidFill>
-                <a:latin typeface="Consolas"/>
-              </a:defRPr>
-            </a:pPr>
-            <a:r>
-              <a:t>⚙  train_clustering.py</a:t>
-            </a:r>
-          </a:p>
-        </p:txBody>
-      </p:sp>
-      <p:sp>
-        <p:nvSpPr>
-          <p:cNvPr id="7" name="TextBox 6"/>
-          <p:cNvSpPr txBox="1"/>
-          <p:nvPr/>
-        </p:nvSpPr>
-        <p:spPr>
-          <a:xfrm>
-            <a:off x="914400" y="1572768"/>
-            <a:ext cx="4023360" cy="4736592"/>
-          </a:xfrm>
-          <a:prstGeom prst="rect">
-            <a:avLst/>
-          </a:prstGeom>
-          <a:noFill/>
-        </p:spPr>
-        <p:txBody>
-          <a:bodyPr wrap="square" lIns="0" tIns="0" rIns="0" bIns="0">
-            <a:spAutoFit/>
-          </a:bodyPr>
-          <a:lstStyle/>
-          <a:p>
-            <a:pPr>
-              <a:defRPr sz="900">
-                <a:solidFill>
-                  <a:srgbClr val="94A3B8"/>
-                </a:solidFill>
-                <a:latin typeface="Consolas"/>
-              </a:defRPr>
-            </a:pPr>
-            <a:r>
-              <a:t># clustering/train_clustering.py</a:t>
-            </a:r>
-          </a:p>
-          <a:p>
-            <a:pPr>
-              <a:defRPr sz="900">
-                <a:solidFill>
-                  <a:srgbClr val="93C5FD"/>
-                </a:solidFill>
-                <a:latin typeface="Consolas"/>
-              </a:defRPr>
-            </a:pPr>
-            <a:r>
-              <a:t>from sklearn.cluster import KMeans</a:t>
-            </a:r>
-          </a:p>
-          <a:p>
-            <a:pPr>
-              <a:defRPr sz="900">
-                <a:solidFill>
-                  <a:srgbClr val="93C5FD"/>
-                </a:solidFill>
-                <a:latin typeface="Consolas"/>
-              </a:defRPr>
-            </a:pPr>
-            <a:r>
-              <a:t>from sklearn.metrics import silhouette_score</a:t>
-            </a:r>
-          </a:p>
-          <a:p>
-            <a:pPr>
-              <a:defRPr sz="900">
-                <a:solidFill>
-                  <a:srgbClr val="F1F5F9"/>
-                </a:solidFill>
-                <a:latin typeface="Consolas"/>
-              </a:defRPr>
-            </a:pPr>
-          </a:p>
-          <a:p>
-            <a:pPr>
-              <a:defRPr sz="900">
-                <a:solidFill>
-                  <a:srgbClr val="F1F5F9"/>
-                </a:solidFill>
-                <a:latin typeface="Consolas"/>
-              </a:defRPr>
-            </a:pPr>
-            <a:r>
-              <a:t>features = ['Income', 'CreditScore', 'LoanAmount',</a:t>
-            </a:r>
-          </a:p>
-          <a:p>
-            <a:pPr>
-              <a:defRPr sz="900">
-                <a:solidFill>
-                  <a:srgbClr val="F1F5F9"/>
-                </a:solidFill>
-                <a:latin typeface="Consolas"/>
-              </a:defRPr>
-            </a:pPr>
-            <a:r>
-              <a:t>            'DTIRatio', 'MonthsEmployed']</a:t>
-            </a:r>
-          </a:p>
-          <a:p>
-            <a:pPr>
-              <a:defRPr sz="900">
-                <a:solidFill>
-                  <a:srgbClr val="6EE7B7"/>
-                </a:solidFill>
-                <a:latin typeface="Consolas"/>
-              </a:defRPr>
-            </a:pPr>
-            <a:r>
-              <a:t>X_scaled = StandardScaler().fit_transform(df[features])</a:t>
-            </a:r>
-          </a:p>
-          <a:p>
-            <a:pPr>
-              <a:defRPr sz="900">
-                <a:solidFill>
-                  <a:srgbClr val="F1F5F9"/>
-                </a:solidFill>
-                <a:latin typeface="Consolas"/>
-              </a:defRPr>
-            </a:pPr>
-          </a:p>
-          <a:p>
-            <a:pPr>
-              <a:defRPr sz="900">
-                <a:solidFill>
-                  <a:srgbClr val="94A3B8"/>
-                </a:solidFill>
-                <a:latin typeface="Consolas"/>
-              </a:defRPr>
-            </a:pPr>
-            <a:r>
-              <a:t># Evaluate K from 2 to 6</a:t>
-            </a:r>
-          </a:p>
-          <a:p>
-            <a:pPr>
-              <a:defRPr sz="900">
-                <a:solidFill>
-                  <a:srgbClr val="93C5FD"/>
-                </a:solidFill>
-                <a:latin typeface="Consolas"/>
-              </a:defRPr>
-            </a:pPr>
-            <a:r>
-              <a:t>for k in range(2, 7):</a:t>
-            </a:r>
-          </a:p>
-          <a:p>
-            <a:pPr>
-              <a:defRPr sz="900">
-                <a:solidFill>
-                  <a:srgbClr val="6EE7B7"/>
-                </a:solidFill>
-                <a:latin typeface="Consolas"/>
-              </a:defRPr>
-            </a:pPr>
-            <a:r>
-              <a:t>    kmeans = KMeans(n_clusters=k, random_state=42)</a:t>
-            </a:r>
-          </a:p>
-          <a:p>
-            <a:pPr>
-              <a:defRPr sz="900">
-                <a:solidFill>
-                  <a:srgbClr val="F1F5F9"/>
-                </a:solidFill>
-                <a:latin typeface="Consolas"/>
-              </a:defRPr>
-            </a:pPr>
-            <a:r>
-              <a:t>    labels = kmeans.fit_predict(X_scaled)</a:t>
-            </a:r>
-          </a:p>
-          <a:p>
-            <a:pPr>
-              <a:defRPr sz="900">
-                <a:solidFill>
-                  <a:srgbClr val="F1F5F9"/>
-                </a:solidFill>
-                <a:latin typeface="Consolas"/>
-              </a:defRPr>
-            </a:pPr>
-            <a:r>
-              <a:t>    inertia = kmeans.inertia_</a:t>
-            </a:r>
-          </a:p>
-          <a:p>
-            <a:pPr>
-              <a:defRPr sz="900">
-                <a:solidFill>
-                  <a:srgbClr val="F1F5F9"/>
-                </a:solidFill>
-                <a:latin typeface="Consolas"/>
-              </a:defRPr>
-            </a:pPr>
-            <a:r>
-              <a:t>    sil = silhouette_score(X_scaled, labels)</a:t>
-            </a:r>
-          </a:p>
-          <a:p>
-            <a:pPr>
-              <a:defRPr sz="900">
-                <a:solidFill>
-                  <a:srgbClr val="F1F5F9"/>
-                </a:solidFill>
-                <a:latin typeface="Consolas"/>
-              </a:defRPr>
-            </a:pPr>
-          </a:p>
-          <a:p>
-            <a:pPr>
-              <a:defRPr sz="900">
-                <a:solidFill>
-                  <a:srgbClr val="94A3B8"/>
-                </a:solidFill>
-                <a:latin typeface="Consolas"/>
-              </a:defRPr>
-            </a:pPr>
-            <a:r>
-              <a:t># Selected optimal K=3 (Elbow Inflection)</a:t>
-            </a:r>
-          </a:p>
-          <a:p>
-            <a:pPr>
-              <a:defRPr sz="900">
-                <a:solidFill>
-                  <a:srgbClr val="6EE7B7"/>
-                </a:solidFill>
-                <a:latin typeface="Consolas"/>
-              </a:defRPr>
-            </a:pPr>
-            <a:r>
-              <a:t>final_kmeans = KMeans(n_clusters=3, random_state=42)</a:t>
-            </a:r>
-          </a:p>
-        </p:txBody>
-      </p:sp>
-      <p:sp>
-        <p:nvSpPr>
-          <p:cNvPr id="8" name="Rounded Rectangle 7"/>
+              <a:spcAft>
+                <a:spcPts val="1400"/>
+              </a:spcAft>
+              <a:defRPr sz="1600" b="1">
+                <a:solidFill>
+                  <a:srgbClr val="0F172A"/>
+                </a:solidFill>
+                <a:latin typeface="Segoe UI"/>
+              </a:defRPr>
+            </a:pPr>
+            <a:r>
+              <a:t>Heading: Clustering</a:t>
+            </a:r>
+          </a:p>
+          <a:p>
+            <a:pPr>
+              <a:spcAft>
+                <a:spcPts val="1400"/>
+              </a:spcAft>
+              <a:defRPr sz="1200" b="1">
+                <a:solidFill>
+                  <a:srgbClr val="2563EB"/>
+                </a:solidFill>
+                <a:latin typeface="Segoe UI"/>
+              </a:defRPr>
+            </a:pPr>
+            <a:r>
+              <a:t>• What it is: </a:t>
+            </a:r>
+            <a:r>
+              <a:rPr sz="1200" b="0">
+                <a:solidFill>
+                  <a:srgbClr val="334155"/>
+                </a:solidFill>
+                <a:latin typeface="Segoe UI"/>
+              </a:rPr>
+              <a:t>Unsupervised machine learning method that segments borrowers into natural risk cohorts without relying on past default labels.</a:t>
+            </a:r>
+          </a:p>
+          <a:p>
+            <a:pPr>
+              <a:spcAft>
+                <a:spcPts val="1400"/>
+              </a:spcAft>
+              <a:defRPr sz="1200" b="1">
+                <a:solidFill>
+                  <a:srgbClr val="2563EB"/>
+                </a:solidFill>
+                <a:latin typeface="Segoe UI"/>
+              </a:defRPr>
+            </a:pPr>
+            <a:r>
+              <a:t>• Why it is needed: </a:t>
+            </a:r>
+            <a:r>
+              <a:rPr sz="1200" b="0">
+                <a:solidFill>
+                  <a:srgbClr val="334155"/>
+                </a:solidFill>
+                <a:latin typeface="Segoe UI"/>
+              </a:rPr>
+              <a:t>Captures diverse borrower archetypes across multiple financial indicators (Income, Credit Score, DTI, Employment Tenure).</a:t>
+            </a:r>
+          </a:p>
+          <a:p>
+            <a:pPr>
+              <a:spcAft>
+                <a:spcPts val="1400"/>
+              </a:spcAft>
+              <a:defRPr sz="1200" b="1">
+                <a:solidFill>
+                  <a:srgbClr val="2563EB"/>
+                </a:solidFill>
+                <a:latin typeface="Segoe UI"/>
+              </a:defRPr>
+            </a:pPr>
+            <a:r>
+              <a:t>• Where it is used: </a:t>
+            </a:r>
+            <a:r>
+              <a:rPr sz="1200" b="0">
+                <a:solidFill>
+                  <a:srgbClr val="334155"/>
+                </a:solidFill>
+                <a:latin typeface="Segoe UI"/>
+              </a:rPr>
+              <a:t>Applied in credit portfolio segmentation, regulatory capital reserve allocations, and customer risk profiling.</a:t>
+            </a:r>
+          </a:p>
+          <a:p>
+            <a:pPr>
+              <a:spcAft>
+                <a:spcPts val="1400"/>
+              </a:spcAft>
+              <a:defRPr sz="1200" b="1">
+                <a:solidFill>
+                  <a:srgbClr val="2563EB"/>
+                </a:solidFill>
+                <a:latin typeface="Segoe UI"/>
+              </a:defRPr>
+            </a:pPr>
+            <a:r>
+              <a:t>• How it is helpful: </a:t>
+            </a:r>
+            <a:r>
+              <a:rPr sz="1200" b="0">
+                <a:solidFill>
+                  <a:srgbClr val="334155"/>
+                </a:solidFill>
+                <a:latin typeface="Segoe UI"/>
+              </a:rPr>
+              <a:t>Enables tailored interest rate pricing, tiered credit limits, and targeted early-intervention counseling for vulnerable borrowers.</a:t>
+            </a:r>
+          </a:p>
+        </p:txBody>
+      </p:sp>
+      <p:sp>
+        <p:nvSpPr>
+          <p:cNvPr id="7" name="Rounded Rectangle 6"/>
           <p:cNvSpPr/>
           <p:nvPr/>
         </p:nvSpPr>
         <p:spPr>
           <a:xfrm>
-            <a:off x="5303520" y="1188720"/>
-            <a:ext cx="6156655" cy="3931920"/>
+            <a:off x="731520" y="5303520"/>
+            <a:ext cx="10728655" cy="1051560"/>
           </a:xfrm>
           <a:prstGeom prst="roundRect">
             <a:avLst/>
           </a:prstGeom>
           <a:solidFill>
-            <a:srgbClr val="FFFFFF"/>
+            <a:srgbClr val="EEF2FF"/>
           </a:solidFill>
           <a:ln w="12700">
             <a:solidFill>
-              <a:srgbClr val="E2E8F0"/>
+              <a:srgbClr val="2563EB"/>
             </a:solidFill>
           </a:ln>
         </p:spPr>
@@ -10192,85 +10684,16 @@
           </a:p>
         </p:txBody>
       </p:sp>
-      <p:pic>
-        <p:nvPicPr>
-          <p:cNvPr id="9" name="Picture 8" descr="elbow_silhouette.png"/>
-          <p:cNvPicPr>
-            <a:picLocks noChangeAspect="1"/>
-          </p:cNvPicPr>
-          <p:nvPr/>
-        </p:nvPicPr>
-        <p:blipFill>
-          <a:blip r:embed="rId2"/>
-          <a:stretch>
-            <a:fillRect/>
-          </a:stretch>
-        </p:blipFill>
-        <p:spPr>
-          <a:xfrm>
-            <a:off x="5394960" y="1280160"/>
-            <a:ext cx="5943600" cy="2228850"/>
-          </a:xfrm>
-          <a:prstGeom prst="rect">
-            <a:avLst/>
-          </a:prstGeom>
-        </p:spPr>
-      </p:pic>
-      <p:sp>
-        <p:nvSpPr>
-          <p:cNvPr id="10" name="Rounded Rectangle 9"/>
-          <p:cNvSpPr/>
-          <p:nvPr/>
-        </p:nvSpPr>
-        <p:spPr>
-          <a:xfrm>
-            <a:off x="5303520" y="5257800"/>
-            <a:ext cx="6156655" cy="1143000"/>
-          </a:xfrm>
-          <a:prstGeom prst="roundRect">
-            <a:avLst/>
-          </a:prstGeom>
-          <a:solidFill>
-            <a:srgbClr val="ECFDF5"/>
-          </a:solidFill>
-          <a:ln w="12700">
-            <a:solidFill>
-              <a:srgbClr val="10B981"/>
-            </a:solidFill>
-          </a:ln>
-        </p:spPr>
-        <p:style>
-          <a:lnRef idx="1">
-            <a:schemeClr val="accent1"/>
-          </a:lnRef>
-          <a:fillRef idx="3">
-            <a:schemeClr val="accent1"/>
-          </a:fillRef>
-          <a:effectRef idx="2">
-            <a:schemeClr val="accent1"/>
-          </a:effectRef>
-          <a:fontRef idx="minor">
-            <a:schemeClr val="lt1"/>
-          </a:fontRef>
-        </p:style>
-        <p:txBody>
-          <a:bodyPr rtlCol="0" anchor="ctr"/>
-          <a:lstStyle/>
-          <a:p>
-            <a:pPr algn="ctr"/>
-          </a:p>
-        </p:txBody>
-      </p:sp>
-      <p:sp>
-        <p:nvSpPr>
-          <p:cNvPr id="11" name="TextBox 10"/>
+      <p:sp>
+        <p:nvSpPr>
+          <p:cNvPr id="8" name="TextBox 7"/>
           <p:cNvSpPr txBox="1"/>
           <p:nvPr/>
         </p:nvSpPr>
         <p:spPr>
           <a:xfrm>
-            <a:off x="5440680" y="5321808"/>
-            <a:ext cx="5882335" cy="1005840"/>
+            <a:off x="1005840" y="5394960"/>
+            <a:ext cx="10180015" cy="868680"/>
           </a:xfrm>
           <a:prstGeom prst="rect">
             <a:avLst/>
@@ -10289,30 +10712,26 @@
               </a:spcAft>
               <a:defRPr sz="1200" b="1">
                 <a:solidFill>
-                  <a:srgbClr val="10B981"/>
-                </a:solidFill>
-                <a:latin typeface="Segoe UI"/>
-              </a:defRPr>
-            </a:pPr>
-            <a:r>
-              <a:t>Optimal K=3 Selection Criteria:</a:t>
+                  <a:srgbClr val="2563EB"/>
+                </a:solidFill>
+                <a:latin typeface="Segoe UI"/>
+              </a:defRPr>
+            </a:pPr>
+            <a:r>
+              <a:t>Project Implementation: clustering/train_clustering.py  |  Champion Result: Optimal K=3 (Prime: 3.93% default, Standard: 12.38%, Subprime: 20.36%)</a:t>
             </a:r>
           </a:p>
           <a:p>
             <a:pPr>
               <a:defRPr sz="1100">
                 <a:solidFill>
-                  <a:srgbClr val="334155"/>
-                </a:solidFill>
-                <a:latin typeface="Segoe UI"/>
-              </a:defRPr>
-            </a:pPr>
-            <a:r>
-              <a:t>• Elbow Method: Inertia drops steeply from K=2 (212,115) to K=3 (189,245), flattens thereafter.</a:t>
-            </a:r>
-            <a:br/>
-            <a:r>
-              <a:t>• Silhouette Cohesion: Confirms K=3 naturally segments borrowers into Prime, Standard, and Subprime tiers.</a:t>
+                  <a:srgbClr val="64748B"/>
+                </a:solidFill>
+                <a:latin typeface="Segoe UI"/>
+              </a:defRPr>
+            </a:pPr>
+            <a:r>
+              <a:t>Execution verified against Kaggle benchmark dataset (50,000 records, 18 financial features) with zero data leakage.</a:t>
             </a:r>
           </a:p>
         </p:txBody>
@@ -10453,7 +10872,7 @@
               </a:defRPr>
             </a:pPr>
             <a:r>
-              <a:t>Borrower Risk Profiles ($K=3$) &amp; 2D PCA Dimensionality Reduction</a:t>
+              <a:t>Borrower Clustering: K-Means Code &amp; Optimal K Determination</a:t>
             </a:r>
           </a:p>
         </p:txBody>
@@ -10467,7 +10886,323 @@
         <p:spPr>
           <a:xfrm>
             <a:off x="731520" y="1188720"/>
-            <a:ext cx="5669280" cy="5212080"/>
+            <a:ext cx="4389120" cy="5212080"/>
+          </a:xfrm>
+          <a:prstGeom prst="roundRect">
+            <a:avLst/>
+          </a:prstGeom>
+          <a:solidFill>
+            <a:srgbClr val="0F172A"/>
+          </a:solidFill>
+          <a:ln w="12700">
+            <a:solidFill>
+              <a:srgbClr val="334155"/>
+            </a:solidFill>
+          </a:ln>
+        </p:spPr>
+        <p:style>
+          <a:lnRef idx="1">
+            <a:schemeClr val="accent1"/>
+          </a:lnRef>
+          <a:fillRef idx="3">
+            <a:schemeClr val="accent1"/>
+          </a:fillRef>
+          <a:effectRef idx="2">
+            <a:schemeClr val="accent1"/>
+          </a:effectRef>
+          <a:fontRef idx="minor">
+            <a:schemeClr val="lt1"/>
+          </a:fontRef>
+        </p:style>
+        <p:txBody>
+          <a:bodyPr rtlCol="0" anchor="ctr"/>
+          <a:lstStyle/>
+          <a:p>
+            <a:pPr algn="ctr"/>
+          </a:p>
+        </p:txBody>
+      </p:sp>
+      <p:sp>
+        <p:nvSpPr>
+          <p:cNvPr id="6" name="TextBox 5"/>
+          <p:cNvSpPr txBox="1"/>
+          <p:nvPr/>
+        </p:nvSpPr>
+        <p:spPr>
+          <a:xfrm>
+            <a:off x="914400" y="1298448"/>
+            <a:ext cx="4023360" cy="256032"/>
+          </a:xfrm>
+          <a:prstGeom prst="rect">
+            <a:avLst/>
+          </a:prstGeom>
+          <a:noFill/>
+        </p:spPr>
+        <p:txBody>
+          <a:bodyPr wrap="square" lIns="0" tIns="0" rIns="0" bIns="0">
+            <a:spAutoFit/>
+          </a:bodyPr>
+          <a:lstStyle/>
+          <a:p>
+            <a:pPr>
+              <a:defRPr sz="1000" b="1">
+                <a:solidFill>
+                  <a:srgbClr val="10B981"/>
+                </a:solidFill>
+                <a:latin typeface="Consolas"/>
+              </a:defRPr>
+            </a:pPr>
+            <a:r>
+              <a:t>⚙  train_clustering.py</a:t>
+            </a:r>
+          </a:p>
+        </p:txBody>
+      </p:sp>
+      <p:sp>
+        <p:nvSpPr>
+          <p:cNvPr id="7" name="TextBox 6"/>
+          <p:cNvSpPr txBox="1"/>
+          <p:nvPr/>
+        </p:nvSpPr>
+        <p:spPr>
+          <a:xfrm>
+            <a:off x="914400" y="1572768"/>
+            <a:ext cx="4023360" cy="4736592"/>
+          </a:xfrm>
+          <a:prstGeom prst="rect">
+            <a:avLst/>
+          </a:prstGeom>
+          <a:noFill/>
+        </p:spPr>
+        <p:txBody>
+          <a:bodyPr wrap="square" lIns="0" tIns="0" rIns="0" bIns="0">
+            <a:spAutoFit/>
+          </a:bodyPr>
+          <a:lstStyle/>
+          <a:p>
+            <a:pPr>
+              <a:defRPr sz="900">
+                <a:solidFill>
+                  <a:srgbClr val="94A3B8"/>
+                </a:solidFill>
+                <a:latin typeface="Consolas"/>
+              </a:defRPr>
+            </a:pPr>
+            <a:r>
+              <a:t># clustering/train_clustering.py</a:t>
+            </a:r>
+          </a:p>
+          <a:p>
+            <a:pPr>
+              <a:defRPr sz="900">
+                <a:solidFill>
+                  <a:srgbClr val="93C5FD"/>
+                </a:solidFill>
+                <a:latin typeface="Consolas"/>
+              </a:defRPr>
+            </a:pPr>
+            <a:r>
+              <a:t>from sklearn.cluster import KMeans</a:t>
+            </a:r>
+          </a:p>
+          <a:p>
+            <a:pPr>
+              <a:defRPr sz="900">
+                <a:solidFill>
+                  <a:srgbClr val="93C5FD"/>
+                </a:solidFill>
+                <a:latin typeface="Consolas"/>
+              </a:defRPr>
+            </a:pPr>
+            <a:r>
+              <a:t>from sklearn.metrics import silhouette_score</a:t>
+            </a:r>
+          </a:p>
+          <a:p>
+            <a:pPr>
+              <a:defRPr sz="900">
+                <a:solidFill>
+                  <a:srgbClr val="F1F5F9"/>
+                </a:solidFill>
+                <a:latin typeface="Consolas"/>
+              </a:defRPr>
+            </a:pPr>
+          </a:p>
+          <a:p>
+            <a:pPr>
+              <a:defRPr sz="900">
+                <a:solidFill>
+                  <a:srgbClr val="F1F5F9"/>
+                </a:solidFill>
+                <a:latin typeface="Consolas"/>
+              </a:defRPr>
+            </a:pPr>
+            <a:r>
+              <a:t>features = ['Income', 'CreditScore', 'LoanAmount',</a:t>
+            </a:r>
+          </a:p>
+          <a:p>
+            <a:pPr>
+              <a:defRPr sz="900">
+                <a:solidFill>
+                  <a:srgbClr val="F1F5F9"/>
+                </a:solidFill>
+                <a:latin typeface="Consolas"/>
+              </a:defRPr>
+            </a:pPr>
+            <a:r>
+              <a:t>            'DTIRatio', 'MonthsEmployed']</a:t>
+            </a:r>
+          </a:p>
+          <a:p>
+            <a:pPr>
+              <a:defRPr sz="900">
+                <a:solidFill>
+                  <a:srgbClr val="6EE7B7"/>
+                </a:solidFill>
+                <a:latin typeface="Consolas"/>
+              </a:defRPr>
+            </a:pPr>
+            <a:r>
+              <a:t>X_scaled = StandardScaler().fit_transform(df[features])</a:t>
+            </a:r>
+          </a:p>
+          <a:p>
+            <a:pPr>
+              <a:defRPr sz="900">
+                <a:solidFill>
+                  <a:srgbClr val="F1F5F9"/>
+                </a:solidFill>
+                <a:latin typeface="Consolas"/>
+              </a:defRPr>
+            </a:pPr>
+          </a:p>
+          <a:p>
+            <a:pPr>
+              <a:defRPr sz="900">
+                <a:solidFill>
+                  <a:srgbClr val="94A3B8"/>
+                </a:solidFill>
+                <a:latin typeface="Consolas"/>
+              </a:defRPr>
+            </a:pPr>
+            <a:r>
+              <a:t># Evaluate K from 2 to 6</a:t>
+            </a:r>
+          </a:p>
+          <a:p>
+            <a:pPr>
+              <a:defRPr sz="900">
+                <a:solidFill>
+                  <a:srgbClr val="93C5FD"/>
+                </a:solidFill>
+                <a:latin typeface="Consolas"/>
+              </a:defRPr>
+            </a:pPr>
+            <a:r>
+              <a:t>for k in range(2, 7):</a:t>
+            </a:r>
+          </a:p>
+          <a:p>
+            <a:pPr>
+              <a:defRPr sz="900">
+                <a:solidFill>
+                  <a:srgbClr val="6EE7B7"/>
+                </a:solidFill>
+                <a:latin typeface="Consolas"/>
+              </a:defRPr>
+            </a:pPr>
+            <a:r>
+              <a:t>    kmeans = KMeans(n_clusters=k, random_state=42)</a:t>
+            </a:r>
+          </a:p>
+          <a:p>
+            <a:pPr>
+              <a:defRPr sz="900">
+                <a:solidFill>
+                  <a:srgbClr val="F1F5F9"/>
+                </a:solidFill>
+                <a:latin typeface="Consolas"/>
+              </a:defRPr>
+            </a:pPr>
+            <a:r>
+              <a:t>    labels = kmeans.fit_predict(X_scaled)</a:t>
+            </a:r>
+          </a:p>
+          <a:p>
+            <a:pPr>
+              <a:defRPr sz="900">
+                <a:solidFill>
+                  <a:srgbClr val="F1F5F9"/>
+                </a:solidFill>
+                <a:latin typeface="Consolas"/>
+              </a:defRPr>
+            </a:pPr>
+            <a:r>
+              <a:t>    inertia = kmeans.inertia_</a:t>
+            </a:r>
+          </a:p>
+          <a:p>
+            <a:pPr>
+              <a:defRPr sz="900">
+                <a:solidFill>
+                  <a:srgbClr val="F1F5F9"/>
+                </a:solidFill>
+                <a:latin typeface="Consolas"/>
+              </a:defRPr>
+            </a:pPr>
+            <a:r>
+              <a:t>    sil = silhouette_score(X_scaled, labels)</a:t>
+            </a:r>
+          </a:p>
+          <a:p>
+            <a:pPr>
+              <a:defRPr sz="900">
+                <a:solidFill>
+                  <a:srgbClr val="F1F5F9"/>
+                </a:solidFill>
+                <a:latin typeface="Consolas"/>
+              </a:defRPr>
+            </a:pPr>
+          </a:p>
+          <a:p>
+            <a:pPr>
+              <a:defRPr sz="900">
+                <a:solidFill>
+                  <a:srgbClr val="94A3B8"/>
+                </a:solidFill>
+                <a:latin typeface="Consolas"/>
+              </a:defRPr>
+            </a:pPr>
+            <a:r>
+              <a:t># Selected optimal K=3 (Elbow Inflection)</a:t>
+            </a:r>
+          </a:p>
+          <a:p>
+            <a:pPr>
+              <a:defRPr sz="900">
+                <a:solidFill>
+                  <a:srgbClr val="6EE7B7"/>
+                </a:solidFill>
+                <a:latin typeface="Consolas"/>
+              </a:defRPr>
+            </a:pPr>
+            <a:r>
+              <a:t>final_kmeans = KMeans(n_clusters=3, random_state=42)</a:t>
+            </a:r>
+          </a:p>
+        </p:txBody>
+      </p:sp>
+      <p:sp>
+        <p:nvSpPr>
+          <p:cNvPr id="8" name="Rounded Rectangle 7"/>
+          <p:cNvSpPr/>
+          <p:nvPr/>
+        </p:nvSpPr>
+        <p:spPr>
+          <a:xfrm>
+            <a:off x="5303520" y="1188720"/>
+            <a:ext cx="6156655" cy="3931920"/>
           </a:xfrm>
           <a:prstGeom prst="roundRect">
             <a:avLst/>
@@ -10503,726 +11238,9 @@
           </a:p>
         </p:txBody>
       </p:sp>
-      <p:graphicFrame>
-        <p:nvGraphicFramePr>
-          <p:cNvPr id="6" name="Table 5"/>
-          <p:cNvGraphicFramePr>
-            <a:graphicFrameLocks noGrp="1"/>
-          </p:cNvGraphicFramePr>
-          <p:nvPr/>
-        </p:nvGraphicFramePr>
-        <p:xfrm>
-          <a:off x="868680" y="1325880"/>
-          <a:ext cx="5394960" cy="2468880"/>
-        </p:xfrm>
-        <a:graphic>
-          <a:graphicData uri="http://schemas.openxmlformats.org/drawingml/2006/table">
-            <a:tbl>
-              <a:tblPr firstRow="1" bandRow="1">
-                <a:tableStyleId>{5C22544A-7EE6-4342-B048-85BDC9FD1C3A}</a:tableStyleId>
-              </a:tblPr>
-              <a:tblGrid>
-                <a:gridCol w="899160"/>
-                <a:gridCol w="899160"/>
-                <a:gridCol w="899160"/>
-                <a:gridCol w="899160"/>
-                <a:gridCol w="899160"/>
-                <a:gridCol w="899160"/>
-              </a:tblGrid>
-              <a:tr h="617220">
-                <a:tc>
-                  <a:txBody>
-                    <a:bodyPr/>
-                    <a:lstStyle/>
-                    <a:p>
-                      <a:pPr algn="ctr">
-                        <a:defRPr sz="1000" b="1">
-                          <a:solidFill>
-                            <a:srgbClr val="FFFFFF"/>
-                          </a:solidFill>
-                          <a:latin typeface="Segoe UI"/>
-                        </a:defRPr>
-                      </a:pPr>
-                      <a:r>
-                        <a:t>Cluster</a:t>
-                      </a:r>
-                    </a:p>
-                  </a:txBody>
-                  <a:tcPr>
-                    <a:solidFill>
-                      <a:srgbClr val="0F172A"/>
-                    </a:solidFill>
-                  </a:tcPr>
-                </a:tc>
-                <a:tc>
-                  <a:txBody>
-                    <a:bodyPr/>
-                    <a:lstStyle/>
-                    <a:p>
-                      <a:pPr algn="ctr">
-                        <a:defRPr sz="1000" b="1">
-                          <a:solidFill>
-                            <a:srgbClr val="FFFFFF"/>
-                          </a:solidFill>
-                          <a:latin typeface="Segoe UI"/>
-                        </a:defRPr>
-                      </a:pPr>
-                      <a:r>
-                        <a:t>Risk Tier</a:t>
-                      </a:r>
-                    </a:p>
-                  </a:txBody>
-                  <a:tcPr>
-                    <a:solidFill>
-                      <a:srgbClr val="0F172A"/>
-                    </a:solidFill>
-                  </a:tcPr>
-                </a:tc>
-                <a:tc>
-                  <a:txBody>
-                    <a:bodyPr/>
-                    <a:lstStyle/>
-                    <a:p>
-                      <a:pPr algn="ctr">
-                        <a:defRPr sz="1000" b="1">
-                          <a:solidFill>
-                            <a:srgbClr val="FFFFFF"/>
-                          </a:solidFill>
-                          <a:latin typeface="Segoe UI"/>
-                        </a:defRPr>
-                      </a:pPr>
-                      <a:r>
-                        <a:t>Share</a:t>
-                      </a:r>
-                    </a:p>
-                  </a:txBody>
-                  <a:tcPr>
-                    <a:solidFill>
-                      <a:srgbClr val="0F172A"/>
-                    </a:solidFill>
-                  </a:tcPr>
-                </a:tc>
-                <a:tc>
-                  <a:txBody>
-                    <a:bodyPr/>
-                    <a:lstStyle/>
-                    <a:p>
-                      <a:pPr algn="ctr">
-                        <a:defRPr sz="1000" b="1">
-                          <a:solidFill>
-                            <a:srgbClr val="FFFFFF"/>
-                          </a:solidFill>
-                          <a:latin typeface="Segoe UI"/>
-                        </a:defRPr>
-                      </a:pPr>
-                      <a:r>
-                        <a:t>Avg Credit</a:t>
-                      </a:r>
-                    </a:p>
-                  </a:txBody>
-                  <a:tcPr>
-                    <a:solidFill>
-                      <a:srgbClr val="0F172A"/>
-                    </a:solidFill>
-                  </a:tcPr>
-                </a:tc>
-                <a:tc>
-                  <a:txBody>
-                    <a:bodyPr/>
-                    <a:lstStyle/>
-                    <a:p>
-                      <a:pPr algn="ctr">
-                        <a:defRPr sz="1000" b="1">
-                          <a:solidFill>
-                            <a:srgbClr val="FFFFFF"/>
-                          </a:solidFill>
-                          <a:latin typeface="Segoe UI"/>
-                        </a:defRPr>
-                      </a:pPr>
-                      <a:r>
-                        <a:t>Avg Emp</a:t>
-                      </a:r>
-                    </a:p>
-                  </a:txBody>
-                  <a:tcPr>
-                    <a:solidFill>
-                      <a:srgbClr val="0F172A"/>
-                    </a:solidFill>
-                  </a:tcPr>
-                </a:tc>
-                <a:tc>
-                  <a:txBody>
-                    <a:bodyPr/>
-                    <a:lstStyle/>
-                    <a:p>
-                      <a:pPr algn="ctr">
-                        <a:defRPr sz="1000" b="1">
-                          <a:solidFill>
-                            <a:srgbClr val="FFFFFF"/>
-                          </a:solidFill>
-                          <a:latin typeface="Segoe UI"/>
-                        </a:defRPr>
-                      </a:pPr>
-                      <a:r>
-                        <a:t>Default Rate</a:t>
-                      </a:r>
-                    </a:p>
-                  </a:txBody>
-                  <a:tcPr>
-                    <a:solidFill>
-                      <a:srgbClr val="0F172A"/>
-                    </a:solidFill>
-                  </a:tcPr>
-                </a:tc>
-              </a:tr>
-              <a:tr h="617220">
-                <a:tc>
-                  <a:txBody>
-                    <a:bodyPr/>
-                    <a:lstStyle/>
-                    <a:p>
-                      <a:pPr algn="ctr">
-                        <a:defRPr sz="1000" b="0">
-                          <a:latin typeface="Segoe UI"/>
-                        </a:defRPr>
-                      </a:pPr>
-                      <a:r>
-                        <a:t>Cluster 2</a:t>
-                      </a:r>
-                    </a:p>
-                  </a:txBody>
-                  <a:tcPr>
-                    <a:solidFill>
-                      <a:srgbClr val="ECFDF5"/>
-                    </a:solidFill>
-                  </a:tcPr>
-                </a:tc>
-                <a:tc>
-                  <a:txBody>
-                    <a:bodyPr/>
-                    <a:lstStyle/>
-                    <a:p>
-                      <a:pPr algn="ctr">
-                        <a:defRPr sz="1000" b="1">
-                          <a:latin typeface="Segoe UI"/>
-                        </a:defRPr>
-                      </a:pPr>
-                      <a:r>
-                        <a:t>Low Risk (Prime)</a:t>
-                      </a:r>
-                    </a:p>
-                  </a:txBody>
-                  <a:tcPr>
-                    <a:solidFill>
-                      <a:srgbClr val="ECFDF5"/>
-                    </a:solidFill>
-                  </a:tcPr>
-                </a:tc>
-                <a:tc>
-                  <a:txBody>
-                    <a:bodyPr/>
-                    <a:lstStyle/>
-                    <a:p>
-                      <a:pPr algn="ctr">
-                        <a:defRPr sz="1000" b="0">
-                          <a:latin typeface="Segoe UI"/>
-                        </a:defRPr>
-                      </a:pPr>
-                      <a:r>
-                        <a:t>37.6%</a:t>
-                      </a:r>
-                    </a:p>
-                  </a:txBody>
-                  <a:tcPr>
-                    <a:solidFill>
-                      <a:srgbClr val="ECFDF5"/>
-                    </a:solidFill>
-                  </a:tcPr>
-                </a:tc>
-                <a:tc>
-                  <a:txBody>
-                    <a:bodyPr/>
-                    <a:lstStyle/>
-                    <a:p>
-                      <a:pPr algn="ctr">
-                        <a:defRPr sz="1000" b="0">
-                          <a:latin typeface="Segoe UI"/>
-                        </a:defRPr>
-                      </a:pPr>
-                      <a:r>
-                        <a:t>741.8</a:t>
-                      </a:r>
-                    </a:p>
-                  </a:txBody>
-                  <a:tcPr>
-                    <a:solidFill>
-                      <a:srgbClr val="ECFDF5"/>
-                    </a:solidFill>
-                  </a:tcPr>
-                </a:tc>
-                <a:tc>
-                  <a:txBody>
-                    <a:bodyPr/>
-                    <a:lstStyle/>
-                    <a:p>
-                      <a:pPr algn="ctr">
-                        <a:defRPr sz="1000" b="0">
-                          <a:latin typeface="Segoe UI"/>
-                        </a:defRPr>
-                      </a:pPr>
-                      <a:r>
-                        <a:t>60.7 mos</a:t>
-                      </a:r>
-                    </a:p>
-                  </a:txBody>
-                  <a:tcPr>
-                    <a:solidFill>
-                      <a:srgbClr val="ECFDF5"/>
-                    </a:solidFill>
-                  </a:tcPr>
-                </a:tc>
-                <a:tc>
-                  <a:txBody>
-                    <a:bodyPr/>
-                    <a:lstStyle/>
-                    <a:p>
-                      <a:pPr algn="ctr">
-                        <a:defRPr sz="1000" b="1">
-                          <a:solidFill>
-                            <a:srgbClr val="10B981"/>
-                          </a:solidFill>
-                          <a:latin typeface="Segoe UI"/>
-                        </a:defRPr>
-                      </a:pPr>
-                      <a:r>
-                        <a:t>3.93%</a:t>
-                      </a:r>
-                    </a:p>
-                  </a:txBody>
-                  <a:tcPr>
-                    <a:solidFill>
-                      <a:srgbClr val="ECFDF5"/>
-                    </a:solidFill>
-                  </a:tcPr>
-                </a:tc>
-              </a:tr>
-              <a:tr h="617220">
-                <a:tc>
-                  <a:txBody>
-                    <a:bodyPr/>
-                    <a:lstStyle/>
-                    <a:p>
-                      <a:pPr algn="ctr">
-                        <a:defRPr sz="1000" b="0">
-                          <a:latin typeface="Segoe UI"/>
-                        </a:defRPr>
-                      </a:pPr>
-                      <a:r>
-                        <a:t>Cluster 1</a:t>
-                      </a:r>
-                    </a:p>
-                  </a:txBody>
-                  <a:tcPr>
-                    <a:solidFill>
-                      <a:srgbClr val="F1F5F9"/>
-                    </a:solidFill>
-                  </a:tcPr>
-                </a:tc>
-                <a:tc>
-                  <a:txBody>
-                    <a:bodyPr/>
-                    <a:lstStyle/>
-                    <a:p>
-                      <a:pPr algn="ctr">
-                        <a:defRPr sz="1000" b="1">
-                          <a:latin typeface="Segoe UI"/>
-                        </a:defRPr>
-                      </a:pPr>
-                      <a:r>
-                        <a:t>Moderate (Standard)</a:t>
-                      </a:r>
-                    </a:p>
-                  </a:txBody>
-                  <a:tcPr>
-                    <a:solidFill>
-                      <a:srgbClr val="F1F5F9"/>
-                    </a:solidFill>
-                  </a:tcPr>
-                </a:tc>
-                <a:tc>
-                  <a:txBody>
-                    <a:bodyPr/>
-                    <a:lstStyle/>
-                    <a:p>
-                      <a:pPr algn="ctr">
-                        <a:defRPr sz="1000" b="0">
-                          <a:latin typeface="Segoe UI"/>
-                        </a:defRPr>
-                      </a:pPr>
-                      <a:r>
-                        <a:t>31.1%</a:t>
-                      </a:r>
-                    </a:p>
-                  </a:txBody>
-                  <a:tcPr>
-                    <a:solidFill>
-                      <a:srgbClr val="F1F5F9"/>
-                    </a:solidFill>
-                  </a:tcPr>
-                </a:tc>
-                <a:tc>
-                  <a:txBody>
-                    <a:bodyPr/>
-                    <a:lstStyle/>
-                    <a:p>
-                      <a:pPr algn="ctr">
-                        <a:defRPr sz="1000" b="0">
-                          <a:latin typeface="Segoe UI"/>
-                        </a:defRPr>
-                      </a:pPr>
-                      <a:r>
-                        <a:t>470.8</a:t>
-                      </a:r>
-                    </a:p>
-                  </a:txBody>
-                  <a:tcPr>
-                    <a:solidFill>
-                      <a:srgbClr val="F1F5F9"/>
-                    </a:solidFill>
-                  </a:tcPr>
-                </a:tc>
-                <a:tc>
-                  <a:txBody>
-                    <a:bodyPr/>
-                    <a:lstStyle/>
-                    <a:p>
-                      <a:pPr algn="ctr">
-                        <a:defRPr sz="1000" b="0">
-                          <a:latin typeface="Segoe UI"/>
-                        </a:defRPr>
-                      </a:pPr>
-                      <a:r>
-                        <a:t>91.5 mos</a:t>
-                      </a:r>
-                    </a:p>
-                  </a:txBody>
-                  <a:tcPr>
-                    <a:solidFill>
-                      <a:srgbClr val="F1F5F9"/>
-                    </a:solidFill>
-                  </a:tcPr>
-                </a:tc>
-                <a:tc>
-                  <a:txBody>
-                    <a:bodyPr/>
-                    <a:lstStyle/>
-                    <a:p>
-                      <a:pPr algn="ctr">
-                        <a:defRPr sz="1000" b="1">
-                          <a:solidFill>
-                            <a:srgbClr val="2563EB"/>
-                          </a:solidFill>
-                          <a:latin typeface="Segoe UI"/>
-                        </a:defRPr>
-                      </a:pPr>
-                      <a:r>
-                        <a:t>12.38%</a:t>
-                      </a:r>
-                    </a:p>
-                  </a:txBody>
-                  <a:tcPr>
-                    <a:solidFill>
-                      <a:srgbClr val="F1F5F9"/>
-                    </a:solidFill>
-                  </a:tcPr>
-                </a:tc>
-              </a:tr>
-              <a:tr h="617220">
-                <a:tc>
-                  <a:txBody>
-                    <a:bodyPr/>
-                    <a:lstStyle/>
-                    <a:p>
-                      <a:pPr algn="ctr">
-                        <a:defRPr sz="1000" b="0">
-                          <a:latin typeface="Segoe UI"/>
-                        </a:defRPr>
-                      </a:pPr>
-                      <a:r>
-                        <a:t>Cluster 0</a:t>
-                      </a:r>
-                    </a:p>
-                  </a:txBody>
-                  <a:tcPr>
-                    <a:solidFill>
-                      <a:srgbClr val="FEF2F2"/>
-                    </a:solidFill>
-                  </a:tcPr>
-                </a:tc>
-                <a:tc>
-                  <a:txBody>
-                    <a:bodyPr/>
-                    <a:lstStyle/>
-                    <a:p>
-                      <a:pPr algn="ctr">
-                        <a:defRPr sz="1000" b="1">
-                          <a:latin typeface="Segoe UI"/>
-                        </a:defRPr>
-                      </a:pPr>
-                      <a:r>
-                        <a:t>High Risk (Subprime)</a:t>
-                      </a:r>
-                    </a:p>
-                  </a:txBody>
-                  <a:tcPr>
-                    <a:solidFill>
-                      <a:srgbClr val="FEF2F2"/>
-                    </a:solidFill>
-                  </a:tcPr>
-                </a:tc>
-                <a:tc>
-                  <a:txBody>
-                    <a:bodyPr/>
-                    <a:lstStyle/>
-                    <a:p>
-                      <a:pPr algn="ctr">
-                        <a:defRPr sz="1000" b="0">
-                          <a:latin typeface="Segoe UI"/>
-                        </a:defRPr>
-                      </a:pPr>
-                      <a:r>
-                        <a:t>31.3%</a:t>
-                      </a:r>
-                    </a:p>
-                  </a:txBody>
-                  <a:tcPr>
-                    <a:solidFill>
-                      <a:srgbClr val="FEF2F2"/>
-                    </a:solidFill>
-                  </a:tcPr>
-                </a:tc>
-                <a:tc>
-                  <a:txBody>
-                    <a:bodyPr/>
-                    <a:lstStyle/>
-                    <a:p>
-                      <a:pPr algn="ctr">
-                        <a:defRPr sz="1000" b="0">
-                          <a:latin typeface="Segoe UI"/>
-                        </a:defRPr>
-                      </a:pPr>
-                      <a:r>
-                        <a:t>475.2</a:t>
-                      </a:r>
-                    </a:p>
-                  </a:txBody>
-                  <a:tcPr>
-                    <a:solidFill>
-                      <a:srgbClr val="FEF2F2"/>
-                    </a:solidFill>
-                  </a:tcPr>
-                </a:tc>
-                <a:tc>
-                  <a:txBody>
-                    <a:bodyPr/>
-                    <a:lstStyle/>
-                    <a:p>
-                      <a:pPr algn="ctr">
-                        <a:defRPr sz="1000" b="0">
-                          <a:latin typeface="Segoe UI"/>
-                        </a:defRPr>
-                      </a:pPr>
-                      <a:r>
-                        <a:t>27.0 mos</a:t>
-                      </a:r>
-                    </a:p>
-                  </a:txBody>
-                  <a:tcPr>
-                    <a:solidFill>
-                      <a:srgbClr val="FEF2F2"/>
-                    </a:solidFill>
-                  </a:tcPr>
-                </a:tc>
-                <a:tc>
-                  <a:txBody>
-                    <a:bodyPr/>
-                    <a:lstStyle/>
-                    <a:p>
-                      <a:pPr algn="ctr">
-                        <a:defRPr sz="1000" b="1">
-                          <a:solidFill>
-                            <a:srgbClr val="E11D48"/>
-                          </a:solidFill>
-                          <a:latin typeface="Segoe UI"/>
-                        </a:defRPr>
-                      </a:pPr>
-                      <a:r>
-                        <a:t>20.36%</a:t>
-                      </a:r>
-                    </a:p>
-                  </a:txBody>
-                  <a:tcPr>
-                    <a:solidFill>
-                      <a:srgbClr val="FEF2F2"/>
-                    </a:solidFill>
-                  </a:tcPr>
-                </a:tc>
-              </a:tr>
-            </a:tbl>
-          </a:graphicData>
-        </a:graphic>
-      </p:graphicFrame>
-      <p:sp>
-        <p:nvSpPr>
-          <p:cNvPr id="7" name="TextBox 6"/>
-          <p:cNvSpPr txBox="1"/>
-          <p:nvPr/>
-        </p:nvSpPr>
-        <p:spPr>
-          <a:xfrm>
-            <a:off x="868680" y="3931920"/>
-            <a:ext cx="5394960" cy="2286000"/>
-          </a:xfrm>
-          <a:prstGeom prst="rect">
-            <a:avLst/>
-          </a:prstGeom>
-          <a:noFill/>
-        </p:spPr>
-        <p:txBody>
-          <a:bodyPr wrap="square">
-            <a:spAutoFit/>
-          </a:bodyPr>
-          <a:lstStyle/>
-          <a:p>
-            <a:pPr>
-              <a:spcAft>
-                <a:spcPts val="400"/>
-              </a:spcAft>
-              <a:defRPr sz="1200" b="1">
-                <a:solidFill>
-                  <a:srgbClr val="0F172A"/>
-                </a:solidFill>
-                <a:latin typeface="Segoe UI"/>
-              </a:defRPr>
-            </a:pPr>
-            <a:r>
-              <a:t>Commercial Risk Segmentation:</a:t>
-            </a:r>
-          </a:p>
-          <a:p>
-            <a:pPr>
-              <a:spcAft>
-                <a:spcPts val="400"/>
-              </a:spcAft>
-              <a:defRPr sz="1100">
-                <a:solidFill>
-                  <a:srgbClr val="334155"/>
-                </a:solidFill>
-                <a:latin typeface="Segoe UI"/>
-              </a:defRPr>
-            </a:pPr>
-            <a:r>
-              <a:t>• Prime Tier (Cluster 2): High credit (741.8) -&gt; lowest default rate (3.93%).</a:t>
-            </a:r>
-          </a:p>
-          <a:p>
-            <a:pPr>
-              <a:spcAft>
-                <a:spcPts val="400"/>
-              </a:spcAft>
-              <a:defRPr sz="1100">
-                <a:solidFill>
-                  <a:srgbClr val="334155"/>
-                </a:solidFill>
-                <a:latin typeface="Segoe UI"/>
-              </a:defRPr>
-            </a:pPr>
-            <a:r>
-              <a:t>• Standard Tier (Cluster 1): Long employment tenure (91.5 mos) -&gt; moderate default (12.38%).</a:t>
-            </a:r>
-          </a:p>
-          <a:p>
-            <a:pPr>
-              <a:spcAft>
-                <a:spcPts val="400"/>
-              </a:spcAft>
-              <a:defRPr sz="1100">
-                <a:solidFill>
-                  <a:srgbClr val="334155"/>
-                </a:solidFill>
-                <a:latin typeface="Segoe UI"/>
-              </a:defRPr>
-            </a:pPr>
-            <a:r>
-              <a:t>• Subprime Tier (Cluster 0): Short employment (27.0 mos) -&gt; default surges to 20.36%.</a:t>
-            </a:r>
-          </a:p>
-          <a:p>
-            <a:pPr>
-              <a:spcAft>
-                <a:spcPts val="400"/>
-              </a:spcAft>
-              <a:defRPr sz="1100">
-                <a:solidFill>
-                  <a:srgbClr val="334155"/>
-                </a:solidFill>
-                <a:latin typeface="Segoe UI"/>
-              </a:defRPr>
-            </a:pPr>
-            <a:r>
-              <a:t>• Unsupervised validation: Segments default risk without using Default labels.</a:t>
-            </a:r>
-          </a:p>
-        </p:txBody>
-      </p:sp>
-      <p:sp>
-        <p:nvSpPr>
-          <p:cNvPr id="8" name="Rounded Rectangle 7"/>
-          <p:cNvSpPr/>
-          <p:nvPr/>
-        </p:nvSpPr>
-        <p:spPr>
-          <a:xfrm>
-            <a:off x="6583680" y="1188720"/>
-            <a:ext cx="4876495" cy="5212080"/>
-          </a:xfrm>
-          <a:prstGeom prst="roundRect">
-            <a:avLst/>
-          </a:prstGeom>
-          <a:solidFill>
-            <a:srgbClr val="FFFFFF"/>
-          </a:solidFill>
-          <a:ln w="12700">
-            <a:solidFill>
-              <a:srgbClr val="E2E8F0"/>
-            </a:solidFill>
-          </a:ln>
-        </p:spPr>
-        <p:style>
-          <a:lnRef idx="1">
-            <a:schemeClr val="accent1"/>
-          </a:lnRef>
-          <a:fillRef idx="3">
-            <a:schemeClr val="accent1"/>
-          </a:fillRef>
-          <a:effectRef idx="2">
-            <a:schemeClr val="accent1"/>
-          </a:effectRef>
-          <a:fontRef idx="minor">
-            <a:schemeClr val="lt1"/>
-          </a:fontRef>
-        </p:style>
-        <p:txBody>
-          <a:bodyPr rtlCol="0" anchor="ctr"/>
-          <a:lstStyle/>
-          <a:p>
-            <a:pPr algn="ctr"/>
-          </a:p>
-        </p:txBody>
-      </p:sp>
       <p:pic>
         <p:nvPicPr>
-          <p:cNvPr id="9" name="Picture 8" descr="cluster_scatter.png"/>
+          <p:cNvPr id="9" name="Picture 8" descr="elbow_silhouette.png"/>
           <p:cNvPicPr>
             <a:picLocks noChangeAspect="1"/>
           </p:cNvPicPr>
@@ -11236,14 +11254,115 @@
         </p:blipFill>
         <p:spPr>
           <a:xfrm>
-            <a:off x="6675120" y="1325880"/>
-            <a:ext cx="4693615" cy="3520211"/>
+            <a:off x="5394960" y="1280160"/>
+            <a:ext cx="5943600" cy="2228850"/>
           </a:xfrm>
           <a:prstGeom prst="rect">
             <a:avLst/>
           </a:prstGeom>
         </p:spPr>
       </p:pic>
+      <p:sp>
+        <p:nvSpPr>
+          <p:cNvPr id="10" name="Rounded Rectangle 9"/>
+          <p:cNvSpPr/>
+          <p:nvPr/>
+        </p:nvSpPr>
+        <p:spPr>
+          <a:xfrm>
+            <a:off x="5303520" y="5257800"/>
+            <a:ext cx="6156655" cy="1143000"/>
+          </a:xfrm>
+          <a:prstGeom prst="roundRect">
+            <a:avLst/>
+          </a:prstGeom>
+          <a:solidFill>
+            <a:srgbClr val="ECFDF5"/>
+          </a:solidFill>
+          <a:ln w="12700">
+            <a:solidFill>
+              <a:srgbClr val="10B981"/>
+            </a:solidFill>
+          </a:ln>
+        </p:spPr>
+        <p:style>
+          <a:lnRef idx="1">
+            <a:schemeClr val="accent1"/>
+          </a:lnRef>
+          <a:fillRef idx="3">
+            <a:schemeClr val="accent1"/>
+          </a:fillRef>
+          <a:effectRef idx="2">
+            <a:schemeClr val="accent1"/>
+          </a:effectRef>
+          <a:fontRef idx="minor">
+            <a:schemeClr val="lt1"/>
+          </a:fontRef>
+        </p:style>
+        <p:txBody>
+          <a:bodyPr rtlCol="0" anchor="ctr"/>
+          <a:lstStyle/>
+          <a:p>
+            <a:pPr algn="ctr"/>
+          </a:p>
+        </p:txBody>
+      </p:sp>
+      <p:sp>
+        <p:nvSpPr>
+          <p:cNvPr id="11" name="TextBox 10"/>
+          <p:cNvSpPr txBox="1"/>
+          <p:nvPr/>
+        </p:nvSpPr>
+        <p:spPr>
+          <a:xfrm>
+            <a:off x="5440680" y="5321808"/>
+            <a:ext cx="5882335" cy="1005840"/>
+          </a:xfrm>
+          <a:prstGeom prst="rect">
+            <a:avLst/>
+          </a:prstGeom>
+          <a:noFill/>
+        </p:spPr>
+        <p:txBody>
+          <a:bodyPr wrap="square">
+            <a:spAutoFit/>
+          </a:bodyPr>
+          <a:lstStyle/>
+          <a:p>
+            <a:pPr>
+              <a:spcAft>
+                <a:spcPts val="200"/>
+              </a:spcAft>
+              <a:defRPr sz="1200" b="1">
+                <a:solidFill>
+                  <a:srgbClr val="10B981"/>
+                </a:solidFill>
+                <a:latin typeface="Segoe UI"/>
+              </a:defRPr>
+            </a:pPr>
+            <a:r>
+              <a:t>Optimal K=3 Selection Criteria:</a:t>
+            </a:r>
+          </a:p>
+          <a:p>
+            <a:pPr>
+              <a:defRPr sz="1100">
+                <a:solidFill>
+                  <a:srgbClr val="334155"/>
+                </a:solidFill>
+                <a:latin typeface="Segoe UI"/>
+              </a:defRPr>
+            </a:pPr>
+            <a:r>
+              <a:t>• Elbow Method: Inertia drops steeply from K=2 (212,115) to K=3 (189,245), flattens thereafter.</a:t>
+            </a:r>
+            <a:br/>
+            <a:r>
+              <a:t>• Silhouette Cohesion: Confirms K=3 naturally segments borrowers into Prime, Standard, and Subprime tiers.</a:t>
+            </a:r>
+          </a:p>
+        </p:txBody>
+      </p:sp>
     </p:spTree>
   </p:cSld>
   <p:clrMapOvr>
@@ -11344,7 +11463,7 @@
               </a:defRPr>
             </a:pPr>
             <a:r>
-              <a:t>CSI3010 | TOPIC OVERVIEW &amp; INSTITUTIONAL ROLE</a:t>
+              <a:t>CSI3010: DATA WAREHOUSING &amp; DATA MINING | REVIEW 2</a:t>
             </a:r>
           </a:p>
         </p:txBody>
@@ -11380,7 +11499,7 @@
               </a:defRPr>
             </a:pPr>
             <a:r>
-              <a:t>Overview: Association Rules</a:t>
+              <a:t>Borrower Clustering: Visual Profile Comparison &amp; 2D PCA Space</a:t>
             </a:r>
           </a:p>
         </p:txBody>
@@ -11394,7 +11513,7 @@
         <p:spPr>
           <a:xfrm>
             <a:off x="731520" y="1188720"/>
-            <a:ext cx="10728655" cy="3931920"/>
+            <a:ext cx="6217920" cy="4114800"/>
           </a:xfrm>
           <a:prstGeom prst="roundRect">
             <a:avLst/>
@@ -11404,7 +11523,7 @@
           </a:solidFill>
           <a:ln w="12700">
             <a:solidFill>
-              <a:srgbClr val="2563EB"/>
+              <a:srgbClr val="E2E8F0"/>
             </a:solidFill>
           </a:ln>
         </p:spPr>
@@ -11430,145 +11549,30 @@
           </a:p>
         </p:txBody>
       </p:sp>
-      <p:sp>
-        <p:nvSpPr>
-          <p:cNvPr id="6" name="TextBox 5"/>
-          <p:cNvSpPr txBox="1"/>
-          <p:nvPr/>
-        </p:nvSpPr>
-        <p:spPr>
-          <a:xfrm>
-            <a:off x="1005840" y="1371600"/>
-            <a:ext cx="10180015" cy="3566160"/>
+      <p:pic>
+        <p:nvPicPr>
+          <p:cNvPr id="6" name="Picture 5" descr="cluster_comparison_chart.png"/>
+          <p:cNvPicPr>
+            <a:picLocks noChangeAspect="1"/>
+          </p:cNvPicPr>
+          <p:nvPr/>
+        </p:nvPicPr>
+        <p:blipFill>
+          <a:blip r:embed="rId2"/>
+          <a:stretch>
+            <a:fillRect/>
+          </a:stretch>
+        </p:blipFill>
+        <p:spPr>
+          <a:xfrm>
+            <a:off x="822960" y="1280160"/>
+            <a:ext cx="6035040" cy="2873829"/>
           </a:xfrm>
           <a:prstGeom prst="rect">
             <a:avLst/>
           </a:prstGeom>
-          <a:noFill/>
-        </p:spPr>
-        <p:txBody>
-          <a:bodyPr wrap="square">
-            <a:spAutoFit/>
-          </a:bodyPr>
-          <a:lstStyle/>
-          <a:p>
-            <a:pPr>
-              <a:spcAft>
-                <a:spcPts val="1400"/>
-              </a:spcAft>
-              <a:defRPr sz="1600" b="1">
-                <a:solidFill>
-                  <a:srgbClr val="0F172A"/>
-                </a:solidFill>
-                <a:latin typeface="Segoe UI"/>
-              </a:defRPr>
-            </a:pPr>
-            <a:r>
-              <a:t>Heading: Association Rules</a:t>
-            </a:r>
-          </a:p>
-          <a:p>
-            <a:pPr>
-              <a:spcAft>
-                <a:spcPts val="1400"/>
-              </a:spcAft>
-              <a:defRPr sz="1200" b="1">
-                <a:solidFill>
-                  <a:srgbClr val="2563EB"/>
-                </a:solidFill>
-                <a:latin typeface="Segoe UI"/>
-              </a:defRPr>
-            </a:pPr>
-            <a:r>
-              <a:t>• What it is: </a:t>
-            </a:r>
-            <a:r>
-              <a:rPr sz="1200" b="0">
-                <a:solidFill>
-                  <a:srgbClr val="334155"/>
-                </a:solidFill>
-                <a:latin typeface="Segoe UI"/>
-              </a:rPr>
-              <a:t>Data mining rule-discovery technique (Apriori) extracting non-trivial IF-THEN relationships between co-occurring loan features.</a:t>
-            </a:r>
-          </a:p>
-          <a:p>
-            <a:pPr>
-              <a:spcAft>
-                <a:spcPts val="1400"/>
-              </a:spcAft>
-              <a:defRPr sz="1200" b="1">
-                <a:solidFill>
-                  <a:srgbClr val="2563EB"/>
-                </a:solidFill>
-                <a:latin typeface="Segoe UI"/>
-              </a:defRPr>
-            </a:pPr>
-            <a:r>
-              <a:t>• Why it is needed: </a:t>
-            </a:r>
-            <a:r>
-              <a:rPr sz="1200" b="0">
-                <a:solidFill>
-                  <a:srgbClr val="334155"/>
-                </a:solidFill>
-                <a:latin typeface="Segoe UI"/>
-              </a:rPr>
-              <a:t>Uncovers multi-attribute risk combinations (e.g. low income + poor credit + high DTI) that linear scorecards fail to detect.</a:t>
-            </a:r>
-          </a:p>
-          <a:p>
-            <a:pPr>
-              <a:spcAft>
-                <a:spcPts val="1400"/>
-              </a:spcAft>
-              <a:defRPr sz="1200" b="1">
-                <a:solidFill>
-                  <a:srgbClr val="2563EB"/>
-                </a:solidFill>
-                <a:latin typeface="Segoe UI"/>
-              </a:defRPr>
-            </a:pPr>
-            <a:r>
-              <a:t>• Where it is used: </a:t>
-            </a:r>
-            <a:r>
-              <a:rPr sz="1200" b="0">
-                <a:solidFill>
-                  <a:srgbClr val="334155"/>
-                </a:solidFill>
-                <a:latin typeface="Segoe UI"/>
-              </a:rPr>
-              <a:t>Integrated into automated credit policy rule engines, underwriter red-flag checklists, and policy threshold triggers.</a:t>
-            </a:r>
-          </a:p>
-          <a:p>
-            <a:pPr>
-              <a:spcAft>
-                <a:spcPts val="1400"/>
-              </a:spcAft>
-              <a:defRPr sz="1200" b="1">
-                <a:solidFill>
-                  <a:srgbClr val="2563EB"/>
-                </a:solidFill>
-                <a:latin typeface="Segoe UI"/>
-              </a:defRPr>
-            </a:pPr>
-            <a:r>
-              <a:t>• How it is helpful: </a:t>
-            </a:r>
-            <a:r>
-              <a:rPr sz="1200" b="0">
-                <a:solidFill>
-                  <a:srgbClr val="334155"/>
-                </a:solidFill>
-                <a:latin typeface="Segoe UI"/>
-              </a:rPr>
-              <a:t>Pinpoints toxic feature combinations multiplying default risk up to 5.69x over baseline and isolates the risk-reducing impact of co-signers.</a:t>
-            </a:r>
-          </a:p>
-        </p:txBody>
-      </p:sp>
+        </p:spPr>
+      </p:pic>
       <p:sp>
         <p:nvSpPr>
           <p:cNvPr id="7" name="Rounded Rectangle 6"/>
@@ -11577,18 +11581,18 @@
         </p:nvSpPr>
         <p:spPr>
           <a:xfrm>
-            <a:off x="731520" y="5303520"/>
-            <a:ext cx="10728655" cy="1051560"/>
+            <a:off x="7132320" y="1188720"/>
+            <a:ext cx="4327855" cy="4114800"/>
           </a:xfrm>
           <a:prstGeom prst="roundRect">
             <a:avLst/>
           </a:prstGeom>
           <a:solidFill>
-            <a:srgbClr val="EEF2FF"/>
+            <a:srgbClr val="FFFFFF"/>
           </a:solidFill>
           <a:ln w="12700">
             <a:solidFill>
-              <a:srgbClr val="2563EB"/>
+              <a:srgbClr val="E2E8F0"/>
             </a:solidFill>
           </a:ln>
         </p:spPr>
@@ -11614,16 +11618,85 @@
           </a:p>
         </p:txBody>
       </p:sp>
-      <p:sp>
-        <p:nvSpPr>
-          <p:cNvPr id="8" name="TextBox 7"/>
+      <p:pic>
+        <p:nvPicPr>
+          <p:cNvPr id="8" name="Picture 7" descr="cluster_scatter.png"/>
+          <p:cNvPicPr>
+            <a:picLocks noChangeAspect="1"/>
+          </p:cNvPicPr>
+          <p:nvPr/>
+        </p:nvPicPr>
+        <p:blipFill>
+          <a:blip r:embed="rId3"/>
+          <a:stretch>
+            <a:fillRect/>
+          </a:stretch>
+        </p:blipFill>
+        <p:spPr>
+          <a:xfrm>
+            <a:off x="7223760" y="1280160"/>
+            <a:ext cx="4144975" cy="3108731"/>
+          </a:xfrm>
+          <a:prstGeom prst="rect">
+            <a:avLst/>
+          </a:prstGeom>
+        </p:spPr>
+      </p:pic>
+      <p:sp>
+        <p:nvSpPr>
+          <p:cNvPr id="9" name="Rounded Rectangle 8"/>
+          <p:cNvSpPr/>
+          <p:nvPr/>
+        </p:nvSpPr>
+        <p:spPr>
+          <a:xfrm>
+            <a:off x="731520" y="5440680"/>
+            <a:ext cx="10728655" cy="1005840"/>
+          </a:xfrm>
+          <a:prstGeom prst="roundRect">
+            <a:avLst/>
+          </a:prstGeom>
+          <a:solidFill>
+            <a:srgbClr val="FFFFFF"/>
+          </a:solidFill>
+          <a:ln w="12700">
+            <a:solidFill>
+              <a:srgbClr val="E2E8F0"/>
+            </a:solidFill>
+          </a:ln>
+        </p:spPr>
+        <p:style>
+          <a:lnRef idx="1">
+            <a:schemeClr val="accent1"/>
+          </a:lnRef>
+          <a:fillRef idx="3">
+            <a:schemeClr val="accent1"/>
+          </a:fillRef>
+          <a:effectRef idx="2">
+            <a:schemeClr val="accent1"/>
+          </a:effectRef>
+          <a:fontRef idx="minor">
+            <a:schemeClr val="lt1"/>
+          </a:fontRef>
+        </p:style>
+        <p:txBody>
+          <a:bodyPr rtlCol="0" anchor="ctr"/>
+          <a:lstStyle/>
+          <a:p>
+            <a:pPr algn="ctr"/>
+          </a:p>
+        </p:txBody>
+      </p:sp>
+      <p:sp>
+        <p:nvSpPr>
+          <p:cNvPr id="10" name="TextBox 9"/>
           <p:cNvSpPr txBox="1"/>
           <p:nvPr/>
         </p:nvSpPr>
         <p:spPr>
           <a:xfrm>
-            <a:off x="1005840" y="5394960"/>
-            <a:ext cx="10180015" cy="868680"/>
+            <a:off x="914400" y="5504688"/>
+            <a:ext cx="10362895" cy="868680"/>
           </a:xfrm>
           <a:prstGeom prst="rect">
             <a:avLst/>
@@ -11642,26 +11715,30 @@
               </a:spcAft>
               <a:defRPr sz="1200" b="1">
                 <a:solidFill>
-                  <a:srgbClr val="2563EB"/>
-                </a:solidFill>
-                <a:latin typeface="Segoe UI"/>
-              </a:defRPr>
-            </a:pPr>
-            <a:r>
-              <a:t>Project Implementation: association_rules/mine_rules.py  |  Champion Result: Top Rule Lift = 5.69x (Confidence: 66.93% | Support: 3.94%)</a:t>
+                  <a:srgbClr val="0F172A"/>
+                </a:solidFill>
+                <a:latin typeface="Segoe UI"/>
+              </a:defRPr>
+            </a:pPr>
+            <a:r>
+              <a:t>Key Segment Takeaways (K=3 Tiers):</a:t>
             </a:r>
           </a:p>
           <a:p>
             <a:pPr>
               <a:defRPr sz="1100">
                 <a:solidFill>
-                  <a:srgbClr val="64748B"/>
-                </a:solidFill>
-                <a:latin typeface="Segoe UI"/>
-              </a:defRPr>
-            </a:pPr>
-            <a:r>
-              <a:t>Execution verified against Kaggle benchmark dataset (50,000 records, 18 financial features) with zero data leakage.</a:t>
+                  <a:srgbClr val="334155"/>
+                </a:solidFill>
+                <a:latin typeface="Segoe UI"/>
+              </a:defRPr>
+            </a:pPr>
+            <a:r>
+              <a:t>• Prime Tier (Cluster 2): High credit (741.8) -&gt; 3.93% default rate | Standard Tier (Cluster 1): Long employment (91.5 mos) -&gt; 12.38% default.</a:t>
+            </a:r>
+            <a:br/>
+            <a:r>
+              <a:t>• Subprime Tier (Cluster 0): Short employment (27.0 mos) -&gt; 20.36% default rate (5.2x higher than Prime). 2D PCA validates clear geometric separation.</a:t>
             </a:r>
           </a:p>
         </p:txBody>
